--- a/에너지경제학/자원에너지경제학_Chapter_4 (가스).pptx
+++ b/에너지경제학/자원에너지경제학_Chapter_4 (가스).pptx
@@ -275,7 +275,7 @@
           <a:p>
             <a:fld id="{4A5E00EF-AEA4-43E2-9451-8F9C59A39471}" type="datetimeFigureOut">
               <a:rPr lang="ko-KR" altLang="en-US" smtClean="0"/>
-              <a:t>2026-08-28</a:t>
+              <a:t>2026-09-29</a:t>
             </a:fld>
             <a:endParaRPr lang="ko-KR" altLang="en-US"/>
           </a:p>
@@ -1081,7 +1081,7 @@
           <a:p>
             <a:fld id="{CD32C56F-BD27-4999-9E6D-D4EACE3DA9F4}" type="datetime1">
               <a:rPr lang="ko-KR" altLang="en-US" smtClean="0"/>
-              <a:t>2026-08-28</a:t>
+              <a:t>2026-09-29</a:t>
             </a:fld>
             <a:endParaRPr lang="ko-KR" altLang="en-US"/>
           </a:p>
@@ -1295,7 +1295,7 @@
           <a:p>
             <a:fld id="{8EF4A19C-72C8-45CA-8E3F-68A7FA345D6C}" type="datetime1">
               <a:rPr lang="ko-KR" altLang="en-US" smtClean="0"/>
-              <a:t>2026-08-28</a:t>
+              <a:t>2026-09-29</a:t>
             </a:fld>
             <a:endParaRPr lang="ko-KR" altLang="en-US"/>
           </a:p>
@@ -1519,7 +1519,7 @@
           <a:p>
             <a:fld id="{56A175B2-010B-4341-954C-5F8F5C70B124}" type="datetime1">
               <a:rPr lang="ko-KR" altLang="en-US" smtClean="0"/>
-              <a:t>2026-08-28</a:t>
+              <a:t>2026-09-29</a:t>
             </a:fld>
             <a:endParaRPr lang="ko-KR" altLang="en-US"/>
           </a:p>
@@ -1733,7 +1733,7 @@
           <a:p>
             <a:fld id="{16B83F9E-22C9-45CA-9E85-070F1D3EF530}" type="datetime1">
               <a:rPr lang="ko-KR" altLang="en-US" smtClean="0"/>
-              <a:t>2026-08-28</a:t>
+              <a:t>2026-09-29</a:t>
             </a:fld>
             <a:endParaRPr lang="ko-KR" altLang="en-US"/>
           </a:p>
@@ -2024,7 +2024,7 @@
           <a:p>
             <a:fld id="{03278F45-FB3C-4C4D-B89A-7BC3F5F229F6}" type="datetime1">
               <a:rPr lang="ko-KR" altLang="en-US" smtClean="0"/>
-              <a:t>2026-08-28</a:t>
+              <a:t>2026-09-29</a:t>
             </a:fld>
             <a:endParaRPr lang="ko-KR" altLang="en-US"/>
           </a:p>
@@ -2417,7 +2417,7 @@
           <a:p>
             <a:fld id="{38FDAC3C-35A6-415C-9F03-738A6AC328B1}" type="datetime1">
               <a:rPr lang="ko-KR" altLang="en-US" smtClean="0"/>
-              <a:t>2026-08-28</a:t>
+              <a:t>2026-09-29</a:t>
             </a:fld>
             <a:endParaRPr lang="ko-KR" altLang="en-US"/>
           </a:p>
@@ -4011,7 +4011,7 @@
           <a:p>
             <a:fld id="{507A0DF1-AEE6-4B0D-89D2-351E7B3EF65C}" type="datetime1">
               <a:rPr lang="ko-KR" altLang="en-US" smtClean="0"/>
-              <a:t>2026-08-28</a:t>
+              <a:t>2026-09-29</a:t>
             </a:fld>
             <a:endParaRPr lang="ko-KR" altLang="en-US"/>
           </a:p>
@@ -4439,7 +4439,7 @@
           <a:p>
             <a:fld id="{CA93B8C9-630F-4D57-944D-04FD37CECCD3}" type="datetime1">
               <a:rPr lang="ko-KR" altLang="en-US" smtClean="0"/>
-              <a:t>2026-08-28</a:t>
+              <a:t>2026-09-29</a:t>
             </a:fld>
             <a:endParaRPr lang="ko-KR" altLang="en-US"/>
           </a:p>
@@ -4596,7 +4596,7 @@
           <a:p>
             <a:fld id="{E986165A-AC43-4902-9541-874ECD310BA3}" type="datetime1">
               <a:rPr lang="ko-KR" altLang="en-US" smtClean="0"/>
-              <a:t>2026-08-28</a:t>
+              <a:t>2026-09-29</a:t>
             </a:fld>
             <a:endParaRPr lang="ko-KR" altLang="en-US"/>
           </a:p>
@@ -4923,7 +4923,7 @@
           <a:p>
             <a:fld id="{47E6EE6D-2B0E-43A9-87A2-7354CDB998F4}" type="datetime1">
               <a:rPr lang="ko-KR" altLang="en-US" smtClean="0"/>
-              <a:t>2026-08-28</a:t>
+              <a:t>2026-09-29</a:t>
             </a:fld>
             <a:endParaRPr lang="ko-KR" altLang="en-US"/>
           </a:p>
@@ -5227,7 +5227,7 @@
           <a:p>
             <a:fld id="{5CC5944E-0BC8-4FAA-9F94-6B4B05834E10}" type="datetime1">
               <a:rPr lang="ko-KR" altLang="en-US" smtClean="0"/>
-              <a:t>2026-08-28</a:t>
+              <a:t>2026-09-29</a:t>
             </a:fld>
             <a:endParaRPr lang="ko-KR" altLang="en-US"/>
           </a:p>
@@ -43876,7 +43876,7 @@
             </a:r>
             <a:r>
               <a:rPr lang="ko-KR" altLang="en-US" sz="1600" dirty="0"/>
-              <a:t>세계 천연가스 시장의 공급이 안정되었다</a:t>
+              <a:t>세계 천연가스 시장의 공급 안정성이 향상되었다</a:t>
             </a:r>
             <a:r>
               <a:rPr lang="en-US" altLang="ko-KR" sz="1600" dirty="0"/>
@@ -44469,6 +44469,41 @@
             <a:r>
               <a:rPr lang="en-US" altLang="ko-KR" sz="1600" dirty="0"/>
               <a:t>.</a:t>
+            </a:r>
+          </a:p>
+        </p:txBody>
+      </p:sp>
+      <p:sp>
+        <p:nvSpPr>
+          <p:cNvPr id="6" name="TextBox 5">
+            <a:extLst>
+              <a:ext uri="{FF2B5EF4-FFF2-40B4-BE49-F238E27FC236}">
+                <a16:creationId xmlns:a16="http://schemas.microsoft.com/office/drawing/2014/main" id="{938A3F3A-62FB-C30F-0F3F-8AA269FED5F8}"/>
+              </a:ext>
+            </a:extLst>
+          </p:cNvPr>
+          <p:cNvSpPr txBox="1"/>
+          <p:nvPr/>
+        </p:nvSpPr>
+        <p:spPr>
+          <a:xfrm>
+            <a:off x="7020059" y="3623187"/>
+            <a:ext cx="3905518" cy="276999"/>
+          </a:xfrm>
+          <a:prstGeom prst="rect">
+            <a:avLst/>
+          </a:prstGeom>
+          <a:noFill/>
+        </p:spPr>
+        <p:txBody>
+          <a:bodyPr wrap="square">
+            <a:spAutoFit/>
+          </a:bodyPr>
+          <a:lstStyle/>
+          <a:p>
+            <a:r>
+              <a:rPr lang="ko-KR" altLang="en-US" sz="1200" dirty="0"/>
+              <a:t>https://youtu.be/hWYle2IeInE?si=SKTF1iGELLehr8lD</a:t>
             </a:r>
           </a:p>
         </p:txBody>

--- a/에너지경제학/자원에너지경제학_Chapter_4 (가스).pptx
+++ b/에너지경제학/자원에너지경제학_Chapter_4 (가스).pptx
@@ -5,7 +5,7 @@
     <p:sldMasterId id="2147483648" r:id="rId1"/>
   </p:sldMasterIdLst>
   <p:notesMasterIdLst>
-    <p:notesMasterId r:id="rId59"/>
+    <p:notesMasterId r:id="rId63"/>
   </p:notesMasterIdLst>
   <p:sldIdLst>
     <p:sldId id="375" r:id="rId2"/>
@@ -25,46 +25,50 @@
     <p:sldId id="647" r:id="rId16"/>
     <p:sldId id="648" r:id="rId17"/>
     <p:sldId id="649" r:id="rId18"/>
-    <p:sldId id="650" r:id="rId19"/>
-    <p:sldId id="653" r:id="rId20"/>
-    <p:sldId id="651" r:id="rId21"/>
-    <p:sldId id="654" r:id="rId22"/>
-    <p:sldId id="652" r:id="rId23"/>
-    <p:sldId id="655" r:id="rId24"/>
-    <p:sldId id="656" r:id="rId25"/>
-    <p:sldId id="657" r:id="rId26"/>
-    <p:sldId id="658" r:id="rId27"/>
-    <p:sldId id="659" r:id="rId28"/>
-    <p:sldId id="660" r:id="rId29"/>
-    <p:sldId id="661" r:id="rId30"/>
-    <p:sldId id="662" r:id="rId31"/>
-    <p:sldId id="663" r:id="rId32"/>
-    <p:sldId id="664" r:id="rId33"/>
-    <p:sldId id="665" r:id="rId34"/>
-    <p:sldId id="666" r:id="rId35"/>
-    <p:sldId id="667" r:id="rId36"/>
-    <p:sldId id="668" r:id="rId37"/>
-    <p:sldId id="676" r:id="rId38"/>
-    <p:sldId id="669" r:id="rId39"/>
-    <p:sldId id="670" r:id="rId40"/>
-    <p:sldId id="671" r:id="rId41"/>
-    <p:sldId id="677" r:id="rId42"/>
-    <p:sldId id="672" r:id="rId43"/>
-    <p:sldId id="673" r:id="rId44"/>
-    <p:sldId id="674" r:id="rId45"/>
-    <p:sldId id="675" r:id="rId46"/>
-    <p:sldId id="678" r:id="rId47"/>
-    <p:sldId id="679" r:id="rId48"/>
-    <p:sldId id="680" r:id="rId49"/>
-    <p:sldId id="681" r:id="rId50"/>
-    <p:sldId id="682" r:id="rId51"/>
-    <p:sldId id="683" r:id="rId52"/>
-    <p:sldId id="684" r:id="rId53"/>
-    <p:sldId id="685" r:id="rId54"/>
-    <p:sldId id="686" r:id="rId55"/>
-    <p:sldId id="687" r:id="rId56"/>
-    <p:sldId id="688" r:id="rId57"/>
-    <p:sldId id="598" r:id="rId58"/>
+    <p:sldId id="689" r:id="rId19"/>
+    <p:sldId id="690" r:id="rId20"/>
+    <p:sldId id="691" r:id="rId21"/>
+    <p:sldId id="692" r:id="rId22"/>
+    <p:sldId id="650" r:id="rId23"/>
+    <p:sldId id="653" r:id="rId24"/>
+    <p:sldId id="651" r:id="rId25"/>
+    <p:sldId id="654" r:id="rId26"/>
+    <p:sldId id="652" r:id="rId27"/>
+    <p:sldId id="655" r:id="rId28"/>
+    <p:sldId id="656" r:id="rId29"/>
+    <p:sldId id="657" r:id="rId30"/>
+    <p:sldId id="658" r:id="rId31"/>
+    <p:sldId id="659" r:id="rId32"/>
+    <p:sldId id="660" r:id="rId33"/>
+    <p:sldId id="661" r:id="rId34"/>
+    <p:sldId id="662" r:id="rId35"/>
+    <p:sldId id="663" r:id="rId36"/>
+    <p:sldId id="664" r:id="rId37"/>
+    <p:sldId id="665" r:id="rId38"/>
+    <p:sldId id="666" r:id="rId39"/>
+    <p:sldId id="667" r:id="rId40"/>
+    <p:sldId id="668" r:id="rId41"/>
+    <p:sldId id="676" r:id="rId42"/>
+    <p:sldId id="669" r:id="rId43"/>
+    <p:sldId id="670" r:id="rId44"/>
+    <p:sldId id="671" r:id="rId45"/>
+    <p:sldId id="677" r:id="rId46"/>
+    <p:sldId id="672" r:id="rId47"/>
+    <p:sldId id="673" r:id="rId48"/>
+    <p:sldId id="674" r:id="rId49"/>
+    <p:sldId id="675" r:id="rId50"/>
+    <p:sldId id="678" r:id="rId51"/>
+    <p:sldId id="679" r:id="rId52"/>
+    <p:sldId id="680" r:id="rId53"/>
+    <p:sldId id="681" r:id="rId54"/>
+    <p:sldId id="682" r:id="rId55"/>
+    <p:sldId id="683" r:id="rId56"/>
+    <p:sldId id="684" r:id="rId57"/>
+    <p:sldId id="685" r:id="rId58"/>
+    <p:sldId id="686" r:id="rId59"/>
+    <p:sldId id="687" r:id="rId60"/>
+    <p:sldId id="688" r:id="rId61"/>
+    <p:sldId id="598" r:id="rId62"/>
   </p:sldIdLst>
   <p:sldSz cx="12192000" cy="6858000"/>
   <p:notesSz cx="6858000" cy="9144000"/>
@@ -275,7 +279,7 @@
           <a:p>
             <a:fld id="{4A5E00EF-AEA4-43E2-9451-8F9C59A39471}" type="datetimeFigureOut">
               <a:rPr lang="ko-KR" altLang="en-US" smtClean="0"/>
-              <a:t>2026-09-29</a:t>
+              <a:t>2026-10-01</a:t>
             </a:fld>
             <a:endParaRPr lang="ko-KR" altLang="en-US"/>
           </a:p>
@@ -607,7 +611,7 @@
           <a:p>
             <a:fld id="{D6183C86-FCDD-4CD4-A668-4DF0BEDE3EB5}" type="slidenum">
               <a:rPr lang="ko-KR" altLang="en-US" smtClean="0"/>
-              <a:t>48</a:t>
+              <a:t>52</a:t>
             </a:fld>
             <a:endParaRPr lang="ko-KR" altLang="en-US"/>
           </a:p>
@@ -715,7 +719,7 @@
           <a:p>
             <a:fld id="{D6183C86-FCDD-4CD4-A668-4DF0BEDE3EB5}" type="slidenum">
               <a:rPr lang="ko-KR" altLang="en-US" smtClean="0"/>
-              <a:t>49</a:t>
+              <a:t>53</a:t>
             </a:fld>
             <a:endParaRPr lang="ko-KR" altLang="en-US"/>
           </a:p>
@@ -823,7 +827,7 @@
           <a:p>
             <a:fld id="{D6183C86-FCDD-4CD4-A668-4DF0BEDE3EB5}" type="slidenum">
               <a:rPr lang="ko-KR" altLang="en-US" smtClean="0"/>
-              <a:t>50</a:t>
+              <a:t>54</a:t>
             </a:fld>
             <a:endParaRPr lang="ko-KR" altLang="en-US"/>
           </a:p>
@@ -907,7 +911,7 @@
           <a:p>
             <a:fld id="{D6183C86-FCDD-4CD4-A668-4DF0BEDE3EB5}" type="slidenum">
               <a:rPr lang="ko-KR" altLang="en-US" smtClean="0"/>
-              <a:t>52</a:t>
+              <a:t>56</a:t>
             </a:fld>
             <a:endParaRPr lang="ko-KR" altLang="en-US"/>
           </a:p>
@@ -1081,7 +1085,7 @@
           <a:p>
             <a:fld id="{CD32C56F-BD27-4999-9E6D-D4EACE3DA9F4}" type="datetime1">
               <a:rPr lang="ko-KR" altLang="en-US" smtClean="0"/>
-              <a:t>2026-09-29</a:t>
+              <a:t>2026-10-01</a:t>
             </a:fld>
             <a:endParaRPr lang="ko-KR" altLang="en-US"/>
           </a:p>
@@ -1295,7 +1299,7 @@
           <a:p>
             <a:fld id="{8EF4A19C-72C8-45CA-8E3F-68A7FA345D6C}" type="datetime1">
               <a:rPr lang="ko-KR" altLang="en-US" smtClean="0"/>
-              <a:t>2026-09-29</a:t>
+              <a:t>2026-10-01</a:t>
             </a:fld>
             <a:endParaRPr lang="ko-KR" altLang="en-US"/>
           </a:p>
@@ -1519,7 +1523,7 @@
           <a:p>
             <a:fld id="{56A175B2-010B-4341-954C-5F8F5C70B124}" type="datetime1">
               <a:rPr lang="ko-KR" altLang="en-US" smtClean="0"/>
-              <a:t>2026-09-29</a:t>
+              <a:t>2026-10-01</a:t>
             </a:fld>
             <a:endParaRPr lang="ko-KR" altLang="en-US"/>
           </a:p>
@@ -1733,7 +1737,7 @@
           <a:p>
             <a:fld id="{16B83F9E-22C9-45CA-9E85-070F1D3EF530}" type="datetime1">
               <a:rPr lang="ko-KR" altLang="en-US" smtClean="0"/>
-              <a:t>2026-09-29</a:t>
+              <a:t>2026-10-01</a:t>
             </a:fld>
             <a:endParaRPr lang="ko-KR" altLang="en-US"/>
           </a:p>
@@ -2024,7 +2028,7 @@
           <a:p>
             <a:fld id="{03278F45-FB3C-4C4D-B89A-7BC3F5F229F6}" type="datetime1">
               <a:rPr lang="ko-KR" altLang="en-US" smtClean="0"/>
-              <a:t>2026-09-29</a:t>
+              <a:t>2026-10-01</a:t>
             </a:fld>
             <a:endParaRPr lang="ko-KR" altLang="en-US"/>
           </a:p>
@@ -2417,7 +2421,7 @@
           <a:p>
             <a:fld id="{38FDAC3C-35A6-415C-9F03-738A6AC328B1}" type="datetime1">
               <a:rPr lang="ko-KR" altLang="en-US" smtClean="0"/>
-              <a:t>2026-09-29</a:t>
+              <a:t>2026-10-01</a:t>
             </a:fld>
             <a:endParaRPr lang="ko-KR" altLang="en-US"/>
           </a:p>
@@ -4011,7 +4015,7 @@
           <a:p>
             <a:fld id="{507A0DF1-AEE6-4B0D-89D2-351E7B3EF65C}" type="datetime1">
               <a:rPr lang="ko-KR" altLang="en-US" smtClean="0"/>
-              <a:t>2026-09-29</a:t>
+              <a:t>2026-10-01</a:t>
             </a:fld>
             <a:endParaRPr lang="ko-KR" altLang="en-US"/>
           </a:p>
@@ -4439,7 +4443,7 @@
           <a:p>
             <a:fld id="{CA93B8C9-630F-4D57-944D-04FD37CECCD3}" type="datetime1">
               <a:rPr lang="ko-KR" altLang="en-US" smtClean="0"/>
-              <a:t>2026-09-29</a:t>
+              <a:t>2026-10-01</a:t>
             </a:fld>
             <a:endParaRPr lang="ko-KR" altLang="en-US"/>
           </a:p>
@@ -4596,7 +4600,7 @@
           <a:p>
             <a:fld id="{E986165A-AC43-4902-9541-874ECD310BA3}" type="datetime1">
               <a:rPr lang="ko-KR" altLang="en-US" smtClean="0"/>
-              <a:t>2026-09-29</a:t>
+              <a:t>2026-10-01</a:t>
             </a:fld>
             <a:endParaRPr lang="ko-KR" altLang="en-US"/>
           </a:p>
@@ -4923,7 +4927,7 @@
           <a:p>
             <a:fld id="{47E6EE6D-2B0E-43A9-87A2-7354CDB998F4}" type="datetime1">
               <a:rPr lang="ko-KR" altLang="en-US" smtClean="0"/>
-              <a:t>2026-09-29</a:t>
+              <a:t>2026-10-01</a:t>
             </a:fld>
             <a:endParaRPr lang="ko-KR" altLang="en-US"/>
           </a:p>
@@ -5227,7 +5231,7 @@
           <a:p>
             <a:fld id="{5CC5944E-0BC8-4FAA-9F94-6B4B05834E10}" type="datetime1">
               <a:rPr lang="ko-KR" altLang="en-US" smtClean="0"/>
-              <a:t>2026-09-29</a:t>
+              <a:t>2026-10-01</a:t>
             </a:fld>
             <a:endParaRPr lang="ko-KR" altLang="en-US"/>
           </a:p>
@@ -10553,6 +10557,1513 @@
         <p:cNvPr id="1" name="">
           <a:extLst>
             <a:ext uri="{FF2B5EF4-FFF2-40B4-BE49-F238E27FC236}">
+              <a16:creationId xmlns:a16="http://schemas.microsoft.com/office/drawing/2014/main" id="{7EE3C058-5EF2-5802-A3C8-F10C838576F2}"/>
+            </a:ext>
+          </a:extLst>
+        </p:cNvPr>
+        <p:cNvGrpSpPr/>
+        <p:nvPr/>
+      </p:nvGrpSpPr>
+      <p:grpSpPr>
+        <a:xfrm>
+          <a:off x="0" y="0"/>
+          <a:ext cx="0" cy="0"/>
+          <a:chOff x="0" y="0"/>
+          <a:chExt cx="0" cy="0"/>
+        </a:xfrm>
+      </p:grpSpPr>
+      <p:sp>
+        <p:nvSpPr>
+          <p:cNvPr id="2" name="제목 1">
+            <a:extLst>
+              <a:ext uri="{FF2B5EF4-FFF2-40B4-BE49-F238E27FC236}">
+                <a16:creationId xmlns:a16="http://schemas.microsoft.com/office/drawing/2014/main" id="{88AC10F2-4EBA-CE40-9E9F-2C9A3A6857EF}"/>
+              </a:ext>
+            </a:extLst>
+          </p:cNvPr>
+          <p:cNvSpPr>
+            <a:spLocks noGrp="1"/>
+          </p:cNvSpPr>
+          <p:nvPr>
+            <p:ph type="title"/>
+          </p:nvPr>
+        </p:nvSpPr>
+        <p:spPr/>
+        <p:txBody>
+          <a:bodyPr/>
+          <a:lstStyle/>
+          <a:p>
+            <a:r>
+              <a:rPr lang="ko-KR" altLang="en-US" dirty="0"/>
+              <a:t>천연가스 공급사슬</a:t>
+            </a:r>
+          </a:p>
+        </p:txBody>
+      </p:sp>
+      <p:sp>
+        <p:nvSpPr>
+          <p:cNvPr id="4" name="슬라이드 번호 개체 틀 3">
+            <a:extLst>
+              <a:ext uri="{FF2B5EF4-FFF2-40B4-BE49-F238E27FC236}">
+                <a16:creationId xmlns:a16="http://schemas.microsoft.com/office/drawing/2014/main" id="{21D77C88-06DC-29CB-0ADE-FC200BDBF42D}"/>
+              </a:ext>
+            </a:extLst>
+          </p:cNvPr>
+          <p:cNvSpPr>
+            <a:spLocks noGrp="1"/>
+          </p:cNvSpPr>
+          <p:nvPr>
+            <p:ph type="sldNum" sz="quarter" idx="12"/>
+          </p:nvPr>
+        </p:nvSpPr>
+        <p:spPr/>
+        <p:txBody>
+          <a:bodyPr/>
+          <a:lstStyle/>
+          <a:p>
+            <a:fld id="{109C872D-39A9-4065-8BF3-6A613116E2A1}" type="slidenum">
+              <a:rPr lang="ko-KR" altLang="en-US" smtClean="0"/>
+              <a:t>18</a:t>
+            </a:fld>
+            <a:endParaRPr lang="ko-KR" altLang="en-US"/>
+          </a:p>
+        </p:txBody>
+      </p:sp>
+      <p:sp>
+        <p:nvSpPr>
+          <p:cNvPr id="3" name="TextBox 2">
+            <a:extLst>
+              <a:ext uri="{FF2B5EF4-FFF2-40B4-BE49-F238E27FC236}">
+                <a16:creationId xmlns:a16="http://schemas.microsoft.com/office/drawing/2014/main" id="{67AE0A3A-0ACB-D5D6-0635-57D75C020C1C}"/>
+              </a:ext>
+            </a:extLst>
+          </p:cNvPr>
+          <p:cNvSpPr txBox="1"/>
+          <p:nvPr/>
+        </p:nvSpPr>
+        <p:spPr>
+          <a:xfrm>
+            <a:off x="288790" y="958844"/>
+            <a:ext cx="11118453" cy="1522020"/>
+          </a:xfrm>
+          <a:prstGeom prst="rect">
+            <a:avLst/>
+          </a:prstGeom>
+          <a:noFill/>
+        </p:spPr>
+        <p:txBody>
+          <a:bodyPr wrap="square" rtlCol="0" anchor="t">
+            <a:spAutoFit/>
+          </a:bodyPr>
+          <a:lstStyle/>
+          <a:p>
+            <a:pPr marL="377825" indent="-285750">
+              <a:lnSpc>
+                <a:spcPct val="150000"/>
+              </a:lnSpc>
+              <a:buFont typeface="Arial" panose="020B0604020202020204" pitchFamily="34" charset="0"/>
+              <a:buChar char="•"/>
+            </a:pPr>
+            <a:r>
+              <a:rPr lang="ko-KR" altLang="en-US" sz="1600" dirty="0"/>
+              <a:t>천연가스 공급사슬은 기술</a:t>
+            </a:r>
+            <a:r>
+              <a:rPr lang="en-US" altLang="ko-KR" sz="1600" dirty="0"/>
+              <a:t>, </a:t>
+            </a:r>
+            <a:r>
+              <a:rPr lang="ko-KR" altLang="en-US" sz="1600" dirty="0"/>
+              <a:t>경제성</a:t>
+            </a:r>
+            <a:r>
+              <a:rPr lang="en-US" altLang="ko-KR" sz="1600" dirty="0"/>
+              <a:t>, </a:t>
+            </a:r>
+            <a:r>
+              <a:rPr lang="ko-KR" altLang="en-US" sz="1600" dirty="0" err="1"/>
+              <a:t>환경성</a:t>
+            </a:r>
+            <a:r>
+              <a:rPr lang="en-US" altLang="ko-KR" sz="1600" dirty="0"/>
+              <a:t>, </a:t>
+            </a:r>
+            <a:r>
+              <a:rPr lang="ko-KR" altLang="en-US" sz="1600" dirty="0"/>
+              <a:t>국제정치가 복합적으로 얽힌 구조로서</a:t>
+            </a:r>
+            <a:r>
+              <a:rPr lang="en-US" altLang="ko-KR" sz="1600" dirty="0"/>
+              <a:t>, </a:t>
+            </a:r>
+            <a:r>
+              <a:rPr lang="ko-KR" altLang="en-US" sz="1600" dirty="0"/>
+              <a:t>각 단계는 단순한 생산과 수송 이상의 전략적 의미를 갖는다</a:t>
+            </a:r>
+            <a:r>
+              <a:rPr lang="en-US" altLang="ko-KR" sz="1600" dirty="0"/>
+              <a:t>.</a:t>
+            </a:r>
+          </a:p>
+          <a:p>
+            <a:pPr marL="377825" indent="-285750">
+              <a:lnSpc>
+                <a:spcPct val="150000"/>
+              </a:lnSpc>
+              <a:buFont typeface="Arial" panose="020B0604020202020204" pitchFamily="34" charset="0"/>
+              <a:buChar char="•"/>
+            </a:pPr>
+            <a:r>
+              <a:rPr lang="ko-KR" altLang="en-US" sz="1600" dirty="0"/>
+              <a:t>특히 에너지 안보</a:t>
+            </a:r>
+            <a:r>
+              <a:rPr lang="en-US" altLang="ko-KR" sz="1600" dirty="0"/>
+              <a:t>, </a:t>
+            </a:r>
+            <a:r>
+              <a:rPr lang="ko-KR" altLang="en-US" sz="1600" dirty="0"/>
+              <a:t>에너지 전환</a:t>
+            </a:r>
+            <a:r>
+              <a:rPr lang="en-US" altLang="ko-KR" sz="1600" dirty="0"/>
+              <a:t>, </a:t>
+            </a:r>
+            <a:r>
+              <a:rPr lang="ko-KR" altLang="en-US" sz="1600" dirty="0"/>
+              <a:t>탄소중립 목표가 중요한 시대적 과제로 떠오른 현재</a:t>
+            </a:r>
+            <a:r>
+              <a:rPr lang="en-US" altLang="ko-KR" sz="1600" dirty="0"/>
+              <a:t>, </a:t>
+            </a:r>
+            <a:r>
+              <a:rPr lang="ko-KR" altLang="en-US" sz="1600" dirty="0"/>
+              <a:t>천연가스 공급사슬의 효율성과 탄력성은 국가 및 글로벌 차원의 정책 설계와 시장전략에서 핵심 요소로 작용하고 있다</a:t>
+            </a:r>
+            <a:r>
+              <a:rPr lang="en-US" altLang="ko-KR" sz="1600" dirty="0"/>
+              <a:t>.</a:t>
+            </a:r>
+          </a:p>
+        </p:txBody>
+      </p:sp>
+    </p:spTree>
+    <p:extLst>
+      <p:ext uri="{BB962C8B-B14F-4D97-AF65-F5344CB8AC3E}">
+        <p14:creationId xmlns:p14="http://schemas.microsoft.com/office/powerpoint/2010/main" val="452298595"/>
+      </p:ext>
+    </p:extLst>
+  </p:cSld>
+  <p:clrMapOvr>
+    <a:masterClrMapping/>
+  </p:clrMapOvr>
+</p:sld>
+</file>
+
+<file path=ppt/slides/slide19.xml><?xml version="1.0" encoding="utf-8"?>
+<p:sld xmlns:a="http://schemas.openxmlformats.org/drawingml/2006/main" xmlns:r="http://schemas.openxmlformats.org/officeDocument/2006/relationships" xmlns:p="http://schemas.openxmlformats.org/presentationml/2006/main">
+  <p:cSld>
+    <p:spTree>
+      <p:nvGrpSpPr>
+        <p:cNvPr id="1" name="">
+          <a:extLst>
+            <a:ext uri="{FF2B5EF4-FFF2-40B4-BE49-F238E27FC236}">
+              <a16:creationId xmlns:a16="http://schemas.microsoft.com/office/drawing/2014/main" id="{B82C8334-1C75-B7BC-AF2E-8E84261DEE93}"/>
+            </a:ext>
+          </a:extLst>
+        </p:cNvPr>
+        <p:cNvGrpSpPr/>
+        <p:nvPr/>
+      </p:nvGrpSpPr>
+      <p:grpSpPr>
+        <a:xfrm>
+          <a:off x="0" y="0"/>
+          <a:ext cx="0" cy="0"/>
+          <a:chOff x="0" y="0"/>
+          <a:chExt cx="0" cy="0"/>
+        </a:xfrm>
+      </p:grpSpPr>
+      <p:sp>
+        <p:nvSpPr>
+          <p:cNvPr id="2" name="제목 1">
+            <a:extLst>
+              <a:ext uri="{FF2B5EF4-FFF2-40B4-BE49-F238E27FC236}">
+                <a16:creationId xmlns:a16="http://schemas.microsoft.com/office/drawing/2014/main" id="{1F801C85-997B-F12E-8BAF-45A05665658A}"/>
+              </a:ext>
+            </a:extLst>
+          </p:cNvPr>
+          <p:cNvSpPr>
+            <a:spLocks noGrp="1"/>
+          </p:cNvSpPr>
+          <p:nvPr>
+            <p:ph type="title"/>
+          </p:nvPr>
+        </p:nvSpPr>
+        <p:spPr/>
+        <p:txBody>
+          <a:bodyPr/>
+          <a:lstStyle/>
+          <a:p>
+            <a:r>
+              <a:rPr lang="en-US" altLang="ko-KR" dirty="0"/>
+              <a:t>LNG</a:t>
+            </a:r>
+            <a:r>
+              <a:rPr lang="ko-KR" altLang="en-US" dirty="0"/>
+              <a:t> 기술개발을 통한 천연가스 수송혁신</a:t>
+            </a:r>
+          </a:p>
+        </p:txBody>
+      </p:sp>
+      <p:sp>
+        <p:nvSpPr>
+          <p:cNvPr id="4" name="슬라이드 번호 개체 틀 3">
+            <a:extLst>
+              <a:ext uri="{FF2B5EF4-FFF2-40B4-BE49-F238E27FC236}">
+                <a16:creationId xmlns:a16="http://schemas.microsoft.com/office/drawing/2014/main" id="{42343A25-D98B-E12B-CC75-3634BFB6990A}"/>
+              </a:ext>
+            </a:extLst>
+          </p:cNvPr>
+          <p:cNvSpPr>
+            <a:spLocks noGrp="1"/>
+          </p:cNvSpPr>
+          <p:nvPr>
+            <p:ph type="sldNum" sz="quarter" idx="12"/>
+          </p:nvPr>
+        </p:nvSpPr>
+        <p:spPr/>
+        <p:txBody>
+          <a:bodyPr/>
+          <a:lstStyle/>
+          <a:p>
+            <a:fld id="{109C872D-39A9-4065-8BF3-6A613116E2A1}" type="slidenum">
+              <a:rPr lang="ko-KR" altLang="en-US" smtClean="0"/>
+              <a:t>19</a:t>
+            </a:fld>
+            <a:endParaRPr lang="ko-KR" altLang="en-US"/>
+          </a:p>
+        </p:txBody>
+      </p:sp>
+      <p:sp>
+        <p:nvSpPr>
+          <p:cNvPr id="3" name="TextBox 2">
+            <a:extLst>
+              <a:ext uri="{FF2B5EF4-FFF2-40B4-BE49-F238E27FC236}">
+                <a16:creationId xmlns:a16="http://schemas.microsoft.com/office/drawing/2014/main" id="{1C46A4DD-E0C7-9598-F434-E747727328BD}"/>
+              </a:ext>
+            </a:extLst>
+          </p:cNvPr>
+          <p:cNvSpPr txBox="1"/>
+          <p:nvPr/>
+        </p:nvSpPr>
+        <p:spPr>
+          <a:xfrm>
+            <a:off x="288790" y="958844"/>
+            <a:ext cx="11118453" cy="5215338"/>
+          </a:xfrm>
+          <a:prstGeom prst="rect">
+            <a:avLst/>
+          </a:prstGeom>
+          <a:noFill/>
+        </p:spPr>
+        <p:txBody>
+          <a:bodyPr wrap="square" rtlCol="0" anchor="t">
+            <a:spAutoFit/>
+          </a:bodyPr>
+          <a:lstStyle/>
+          <a:p>
+            <a:pPr marL="377825" indent="-285750">
+              <a:lnSpc>
+                <a:spcPct val="150000"/>
+              </a:lnSpc>
+              <a:buFont typeface="Arial" panose="020B0604020202020204" pitchFamily="34" charset="0"/>
+              <a:buChar char="•"/>
+            </a:pPr>
+            <a:r>
+              <a:rPr lang="ko-KR" altLang="en-US" sz="1600" dirty="0"/>
+              <a:t>액체 형태인 석유는 유조선을 통해 어디든지 수송할 수 있었으나</a:t>
+            </a:r>
+            <a:r>
+              <a:rPr lang="en-US" altLang="ko-KR" sz="1600" dirty="0"/>
+              <a:t>, </a:t>
+            </a:r>
+            <a:r>
+              <a:rPr lang="ko-KR" altLang="en-US" sz="1600" dirty="0"/>
+              <a:t>천연가스는 </a:t>
+            </a:r>
+            <a:r>
+              <a:rPr lang="ko-KR" altLang="en-US" sz="1600" dirty="0" err="1"/>
+              <a:t>기체상태이므로</a:t>
+            </a:r>
+            <a:r>
+              <a:rPr lang="ko-KR" altLang="en-US" sz="1600" dirty="0"/>
+              <a:t> 가스관을 통해서만 수송할 수 있었다</a:t>
+            </a:r>
+            <a:r>
+              <a:rPr lang="en-US" altLang="ko-KR" sz="1600" dirty="0"/>
+              <a:t>.</a:t>
+            </a:r>
+          </a:p>
+          <a:p>
+            <a:pPr marL="835025" lvl="1" indent="-285750">
+              <a:lnSpc>
+                <a:spcPct val="150000"/>
+              </a:lnSpc>
+              <a:buFont typeface="Wingdings" panose="05000000000000000000" pitchFamily="2" charset="2"/>
+              <a:buChar char="ü"/>
+            </a:pPr>
+            <a:r>
+              <a:rPr lang="ko-KR" altLang="en-US" sz="1600" dirty="0"/>
+              <a:t>가스전을 발견해도</a:t>
+            </a:r>
+            <a:r>
+              <a:rPr lang="en-US" altLang="ko-KR" sz="1600" dirty="0"/>
+              <a:t>, </a:t>
+            </a:r>
+            <a:r>
+              <a:rPr lang="ko-KR" altLang="en-US" sz="1600" dirty="0"/>
+              <a:t>수요처가 멀어 대규모 가스전이 아니면 경제성이 없어서</a:t>
+            </a:r>
+            <a:r>
+              <a:rPr lang="en-US" altLang="ko-KR" sz="1600" dirty="0"/>
+              <a:t>, </a:t>
+            </a:r>
+            <a:r>
+              <a:rPr lang="ko-KR" altLang="en-US" sz="1600" dirty="0"/>
+              <a:t>개발을 포기하는 경우가 많았다</a:t>
+            </a:r>
+            <a:r>
+              <a:rPr lang="en-US" altLang="ko-KR" sz="1600" dirty="0"/>
+              <a:t>.</a:t>
+            </a:r>
+          </a:p>
+          <a:p>
+            <a:pPr marL="835025" lvl="1" indent="-285750">
+              <a:lnSpc>
+                <a:spcPct val="150000"/>
+              </a:lnSpc>
+              <a:buFont typeface="Wingdings" panose="05000000000000000000" pitchFamily="2" charset="2"/>
+              <a:buChar char="ü"/>
+            </a:pPr>
+            <a:endParaRPr lang="en-US" altLang="ko-KR" sz="1600" dirty="0"/>
+          </a:p>
+          <a:p>
+            <a:pPr marL="377825" indent="-285750">
+              <a:lnSpc>
+                <a:spcPct val="150000"/>
+              </a:lnSpc>
+              <a:buFont typeface="Arial" panose="020B0604020202020204" pitchFamily="34" charset="0"/>
+              <a:buChar char="•"/>
+            </a:pPr>
+            <a:r>
+              <a:rPr lang="ko-KR" altLang="en-US" sz="1600" dirty="0"/>
+              <a:t>그러다 천연가스를 영하 </a:t>
+            </a:r>
+            <a:r>
+              <a:rPr lang="en-US" altLang="ko-KR" sz="1600" dirty="0"/>
+              <a:t>162</a:t>
+            </a:r>
+            <a:r>
+              <a:rPr lang="ko-KR" altLang="en-US" sz="1600" dirty="0"/>
+              <a:t>도의 아주 낮은 온도에서 </a:t>
+            </a:r>
+            <a:r>
+              <a:rPr lang="ko-KR" altLang="en-US" sz="1600" dirty="0" err="1"/>
+              <a:t>액화하는</a:t>
+            </a:r>
+            <a:r>
+              <a:rPr lang="ko-KR" altLang="en-US" sz="1600" dirty="0"/>
+              <a:t> </a:t>
+            </a:r>
+            <a:r>
+              <a:rPr lang="en-US" altLang="ko-KR" sz="1600" dirty="0"/>
+              <a:t>LNG </a:t>
+            </a:r>
+            <a:r>
+              <a:rPr lang="ko-KR" altLang="en-US" sz="1600" dirty="0"/>
+              <a:t>기술이 개발되어 그동안 개발하지 못했던 많은 가스전이 개발되기 시작했다</a:t>
+            </a:r>
+            <a:r>
+              <a:rPr lang="en-US" altLang="ko-KR" sz="1600" dirty="0"/>
+              <a:t>.</a:t>
+            </a:r>
+          </a:p>
+          <a:p>
+            <a:pPr marL="835025" lvl="1" indent="-285750">
+              <a:lnSpc>
+                <a:spcPct val="150000"/>
+              </a:lnSpc>
+              <a:buFont typeface="Wingdings" panose="05000000000000000000" pitchFamily="2" charset="2"/>
+              <a:buChar char="ü"/>
+            </a:pPr>
+            <a:r>
+              <a:rPr lang="en-US" altLang="ko-KR" sz="1600" dirty="0"/>
+              <a:t>1959</a:t>
+            </a:r>
+            <a:r>
+              <a:rPr lang="ko-KR" altLang="en-US" sz="1600" dirty="0"/>
+              <a:t>년 </a:t>
+            </a:r>
+            <a:r>
+              <a:rPr lang="en-US" altLang="ko-KR" sz="1600" dirty="0"/>
+              <a:t>LNG </a:t>
+            </a:r>
+            <a:r>
+              <a:rPr lang="ko-KR" altLang="en-US" sz="1600" dirty="0"/>
+              <a:t>화물을 실은 배가 미국 </a:t>
+            </a:r>
+            <a:r>
+              <a:rPr lang="ko-KR" altLang="en-US" sz="1600" dirty="0" err="1"/>
+              <a:t>루이지애나만을</a:t>
+            </a:r>
+            <a:r>
+              <a:rPr lang="ko-KR" altLang="en-US" sz="1600" dirty="0"/>
+              <a:t> 떠나 영국으로 항해함으로써 선박을 통한 천연가스를 운송하는 길이 열렸다</a:t>
+            </a:r>
+            <a:r>
+              <a:rPr lang="en-US" altLang="ko-KR" sz="1600" dirty="0"/>
+              <a:t>.</a:t>
+            </a:r>
+          </a:p>
+          <a:p>
+            <a:pPr marL="835025" lvl="1" indent="-285750">
+              <a:lnSpc>
+                <a:spcPct val="150000"/>
+              </a:lnSpc>
+              <a:buFont typeface="Wingdings" panose="05000000000000000000" pitchFamily="2" charset="2"/>
+              <a:buChar char="ü"/>
+            </a:pPr>
+            <a:r>
+              <a:rPr lang="ko-KR" altLang="en-US" sz="1600" dirty="0"/>
+              <a:t>선박을 통한 </a:t>
+            </a:r>
+            <a:r>
+              <a:rPr lang="en-US" altLang="ko-KR" sz="1600" dirty="0"/>
+              <a:t>LNG </a:t>
+            </a:r>
+            <a:r>
+              <a:rPr lang="ko-KR" altLang="en-US" sz="1600" dirty="0"/>
+              <a:t>수송이 가능해지면서</a:t>
+            </a:r>
+            <a:r>
+              <a:rPr lang="en-US" altLang="ko-KR" sz="1600" dirty="0"/>
+              <a:t>, 1970</a:t>
+            </a:r>
+            <a:r>
+              <a:rPr lang="ko-KR" altLang="en-US" sz="1600" dirty="0"/>
+              <a:t>년대부터 천연가스 수요가 점차 늘어나기 시작했다</a:t>
+            </a:r>
+            <a:r>
+              <a:rPr lang="en-US" altLang="ko-KR" sz="1600" dirty="0"/>
+              <a:t>.</a:t>
+            </a:r>
+          </a:p>
+          <a:p>
+            <a:pPr marL="835025" lvl="1" indent="-285750">
+              <a:lnSpc>
+                <a:spcPct val="150000"/>
+              </a:lnSpc>
+              <a:buFont typeface="Wingdings" panose="05000000000000000000" pitchFamily="2" charset="2"/>
+              <a:buChar char="ü"/>
+            </a:pPr>
+            <a:endParaRPr lang="en-US" altLang="ko-KR" sz="1600" dirty="0"/>
+          </a:p>
+          <a:p>
+            <a:pPr marL="377825" indent="-285750">
+              <a:lnSpc>
+                <a:spcPct val="150000"/>
+              </a:lnSpc>
+              <a:buFont typeface="Arial" panose="020B0604020202020204" pitchFamily="34" charset="0"/>
+              <a:buChar char="•"/>
+            </a:pPr>
+            <a:r>
+              <a:rPr lang="en-US" altLang="ko-KR" sz="1600" dirty="0"/>
+              <a:t>2010</a:t>
+            </a:r>
+            <a:r>
+              <a:rPr lang="ko-KR" altLang="en-US" sz="1600" dirty="0"/>
+              <a:t>년대 부터는 해상에서 바로 </a:t>
+            </a:r>
+            <a:r>
+              <a:rPr lang="ko-KR" altLang="en-US" sz="1600" dirty="0" err="1"/>
+              <a:t>액화하는</a:t>
+            </a:r>
+            <a:r>
+              <a:rPr lang="ko-KR" altLang="en-US" sz="1600" dirty="0"/>
+              <a:t> </a:t>
+            </a:r>
+            <a:r>
+              <a:rPr lang="ko-KR" altLang="en-US" sz="1600" dirty="0" err="1"/>
+              <a:t>부유식</a:t>
+            </a:r>
+            <a:r>
+              <a:rPr lang="ko-KR" altLang="en-US" sz="1600" dirty="0"/>
+              <a:t> </a:t>
+            </a:r>
+            <a:r>
+              <a:rPr lang="en-US" altLang="ko-KR" sz="1600" dirty="0"/>
+              <a:t>LNG </a:t>
+            </a:r>
+            <a:r>
+              <a:rPr lang="ko-KR" altLang="en-US" sz="1600" dirty="0"/>
+              <a:t>기술이 개발되어</a:t>
+            </a:r>
+            <a:r>
+              <a:rPr lang="en-US" altLang="ko-KR" sz="1600" dirty="0"/>
+              <a:t>, </a:t>
+            </a:r>
+            <a:r>
+              <a:rPr lang="ko-KR" altLang="en-US" sz="1600" dirty="0"/>
+              <a:t>먼 바다의 가스전에서 </a:t>
+            </a:r>
+            <a:r>
+              <a:rPr lang="en-US" altLang="ko-KR" sz="1600" dirty="0"/>
+              <a:t>LNG</a:t>
+            </a:r>
+            <a:r>
+              <a:rPr lang="ko-KR" altLang="en-US" sz="1600" dirty="0"/>
+              <a:t>를 직접 생산할 수 있게 되었다</a:t>
+            </a:r>
+            <a:r>
+              <a:rPr lang="en-US" altLang="ko-KR" sz="1600" dirty="0"/>
+              <a:t>.</a:t>
+            </a:r>
+          </a:p>
+          <a:p>
+            <a:pPr marL="835025" lvl="1" indent="-285750">
+              <a:lnSpc>
+                <a:spcPct val="150000"/>
+              </a:lnSpc>
+              <a:buFont typeface="Wingdings" panose="05000000000000000000" pitchFamily="2" charset="2"/>
+              <a:buChar char="ü"/>
+            </a:pPr>
+            <a:r>
+              <a:rPr lang="ko-KR" altLang="en-US" sz="1600" dirty="0"/>
+              <a:t>그동안 </a:t>
+            </a:r>
+            <a:r>
+              <a:rPr lang="en-US" altLang="ko-KR" sz="1600" dirty="0"/>
+              <a:t>LNG </a:t>
+            </a:r>
+            <a:r>
+              <a:rPr lang="ko-KR" altLang="en-US" sz="1600" dirty="0"/>
+              <a:t>설비를</a:t>
+            </a:r>
+            <a:r>
+              <a:rPr lang="en-US" altLang="ko-KR" sz="1600" dirty="0"/>
+              <a:t> </a:t>
+            </a:r>
+            <a:r>
+              <a:rPr lang="ko-KR" altLang="en-US" sz="1600" dirty="0"/>
+              <a:t>육지에서만 할 수 있었으므로</a:t>
+            </a:r>
+            <a:r>
+              <a:rPr lang="en-US" altLang="ko-KR" sz="1600" dirty="0"/>
+              <a:t>, </a:t>
+            </a:r>
+            <a:r>
+              <a:rPr lang="ko-KR" altLang="en-US" sz="1600" dirty="0"/>
+              <a:t>해상 가스전의 경우 육지의 </a:t>
+            </a:r>
+            <a:r>
+              <a:rPr lang="en-US" altLang="ko-KR" sz="1600" dirty="0"/>
+              <a:t>LNG</a:t>
+            </a:r>
+            <a:r>
+              <a:rPr lang="ko-KR" altLang="en-US" sz="1600" dirty="0"/>
+              <a:t>플랜트까지 가스관을 건설해야 했다</a:t>
+            </a:r>
+            <a:r>
+              <a:rPr lang="en-US" altLang="ko-KR" sz="1600" dirty="0"/>
+              <a:t>. </a:t>
+            </a:r>
+          </a:p>
+        </p:txBody>
+      </p:sp>
+    </p:spTree>
+    <p:extLst>
+      <p:ext uri="{BB962C8B-B14F-4D97-AF65-F5344CB8AC3E}">
+        <p14:creationId xmlns:p14="http://schemas.microsoft.com/office/powerpoint/2010/main" val="209569913"/>
+      </p:ext>
+    </p:extLst>
+  </p:cSld>
+  <p:clrMapOvr>
+    <a:masterClrMapping/>
+  </p:clrMapOvr>
+</p:sld>
+</file>
+
+<file path=ppt/slides/slide2.xml><?xml version="1.0" encoding="utf-8"?>
+<p:sld xmlns:a="http://schemas.openxmlformats.org/drawingml/2006/main" xmlns:r="http://schemas.openxmlformats.org/officeDocument/2006/relationships" xmlns:p="http://schemas.openxmlformats.org/presentationml/2006/main">
+  <p:cSld>
+    <p:spTree>
+      <p:nvGrpSpPr>
+        <p:cNvPr id="1" name="">
+          <a:extLst>
+            <a:ext uri="{FF2B5EF4-FFF2-40B4-BE49-F238E27FC236}">
+              <a16:creationId xmlns:a16="http://schemas.microsoft.com/office/drawing/2014/main" id="{C41D0659-CAFD-F53E-5E96-AE42A73FE935}"/>
+            </a:ext>
+          </a:extLst>
+        </p:cNvPr>
+        <p:cNvGrpSpPr/>
+        <p:nvPr/>
+      </p:nvGrpSpPr>
+      <p:grpSpPr>
+        <a:xfrm>
+          <a:off x="0" y="0"/>
+          <a:ext cx="0" cy="0"/>
+          <a:chOff x="0" y="0"/>
+          <a:chExt cx="0" cy="0"/>
+        </a:xfrm>
+      </p:grpSpPr>
+      <p:pic>
+        <p:nvPicPr>
+          <p:cNvPr id="6" name="그림 5" descr="텍스트, 로고, 원, 폰트이(가) 표시된 사진&#10;&#10;AI 생성 콘텐츠는 정확하지 않을 수 있습니다.">
+            <a:extLst>
+              <a:ext uri="{FF2B5EF4-FFF2-40B4-BE49-F238E27FC236}">
+                <a16:creationId xmlns:a16="http://schemas.microsoft.com/office/drawing/2014/main" id="{D5C3F3A0-36ED-43FB-2D13-6CAA30B083C2}"/>
+              </a:ext>
+            </a:extLst>
+          </p:cNvPr>
+          <p:cNvPicPr>
+            <a:picLocks noChangeAspect="1"/>
+          </p:cNvPicPr>
+          <p:nvPr/>
+        </p:nvPicPr>
+        <p:blipFill>
+          <a:blip r:embed="rId2">
+            <a:alphaModFix amt="20000"/>
+            <a:extLst>
+              <a:ext uri="{28A0092B-C50C-407E-A947-70E740481C1C}">
+                <a14:useLocalDpi xmlns:a14="http://schemas.microsoft.com/office/drawing/2010/main" val="0"/>
+              </a:ext>
+            </a:extLst>
+          </a:blip>
+          <a:stretch>
+            <a:fillRect/>
+          </a:stretch>
+        </p:blipFill>
+        <p:spPr>
+          <a:xfrm>
+            <a:off x="4012070" y="1673061"/>
+            <a:ext cx="4167861" cy="4167861"/>
+          </a:xfrm>
+          <a:prstGeom prst="rect">
+            <a:avLst/>
+          </a:prstGeom>
+        </p:spPr>
+      </p:pic>
+      <p:sp>
+        <p:nvSpPr>
+          <p:cNvPr id="4" name="슬라이드 번호 개체 틀 3">
+            <a:extLst>
+              <a:ext uri="{FF2B5EF4-FFF2-40B4-BE49-F238E27FC236}">
+                <a16:creationId xmlns:a16="http://schemas.microsoft.com/office/drawing/2014/main" id="{A8D19C74-D6C9-BA18-D11B-15A0CD9AF906}"/>
+              </a:ext>
+            </a:extLst>
+          </p:cNvPr>
+          <p:cNvSpPr>
+            <a:spLocks noGrp="1"/>
+          </p:cNvSpPr>
+          <p:nvPr>
+            <p:ph type="sldNum" sz="quarter" idx="12"/>
+          </p:nvPr>
+        </p:nvSpPr>
+        <p:spPr/>
+        <p:txBody>
+          <a:bodyPr/>
+          <a:lstStyle/>
+          <a:p>
+            <a:fld id="{109C872D-39A9-4065-8BF3-6A613116E2A1}" type="slidenum">
+              <a:rPr lang="ko-KR" altLang="en-US" smtClean="0"/>
+              <a:t>2</a:t>
+            </a:fld>
+            <a:endParaRPr lang="ko-KR" altLang="en-US"/>
+          </a:p>
+        </p:txBody>
+      </p:sp>
+      <p:sp>
+        <p:nvSpPr>
+          <p:cNvPr id="7" name="제목 1">
+            <a:extLst>
+              <a:ext uri="{FF2B5EF4-FFF2-40B4-BE49-F238E27FC236}">
+                <a16:creationId xmlns:a16="http://schemas.microsoft.com/office/drawing/2014/main" id="{B58D8A77-45B6-C35A-AFD8-829E4435C90E}"/>
+              </a:ext>
+            </a:extLst>
+          </p:cNvPr>
+          <p:cNvSpPr>
+            <a:spLocks noGrp="1"/>
+          </p:cNvSpPr>
+          <p:nvPr>
+            <p:ph type="title"/>
+          </p:nvPr>
+        </p:nvSpPr>
+        <p:spPr>
+          <a:xfrm>
+            <a:off x="831850" y="2478940"/>
+            <a:ext cx="11007224" cy="1939428"/>
+          </a:xfrm>
+          <a:effectLst>
+            <a:reflection blurRad="50800" stA="45000" endPos="44000" dir="5400000" sy="-100000" algn="bl" rotWithShape="0"/>
+          </a:effectLst>
+        </p:spPr>
+        <p:txBody>
+          <a:bodyPr anchor="b"/>
+          <a:lstStyle/>
+          <a:p>
+            <a:r>
+              <a:rPr lang="en-US" altLang="ko-KR" sz="4000" b="1" i="0" spc="150"/>
+              <a:t>Chapter 4</a:t>
+            </a:r>
+            <a:br>
+              <a:rPr lang="en-US" altLang="ko-KR" sz="4000" b="1" i="0" spc="150" dirty="0"/>
+            </a:br>
+            <a:br>
+              <a:rPr lang="en-US" altLang="ko-KR" sz="4000" b="1" i="0" spc="150" dirty="0"/>
+            </a:br>
+            <a:r>
+              <a:rPr lang="ko-KR" altLang="en-US" sz="4000" b="1" i="0" spc="150" dirty="0"/>
+              <a:t>천연가스 시장</a:t>
+            </a:r>
+            <a:endParaRPr lang="ko-KR" altLang="en-US" sz="3600" i="0" spc="150" dirty="0"/>
+          </a:p>
+        </p:txBody>
+      </p:sp>
+    </p:spTree>
+    <p:extLst>
+      <p:ext uri="{BB962C8B-B14F-4D97-AF65-F5344CB8AC3E}">
+        <p14:creationId xmlns:p14="http://schemas.microsoft.com/office/powerpoint/2010/main" val="2655123632"/>
+      </p:ext>
+    </p:extLst>
+  </p:cSld>
+  <p:clrMapOvr>
+    <a:masterClrMapping/>
+  </p:clrMapOvr>
+</p:sld>
+</file>
+
+<file path=ppt/slides/slide20.xml><?xml version="1.0" encoding="utf-8"?>
+<p:sld xmlns:a="http://schemas.openxmlformats.org/drawingml/2006/main" xmlns:r="http://schemas.openxmlformats.org/officeDocument/2006/relationships" xmlns:p="http://schemas.openxmlformats.org/presentationml/2006/main">
+  <p:cSld>
+    <p:spTree>
+      <p:nvGrpSpPr>
+        <p:cNvPr id="1" name="">
+          <a:extLst>
+            <a:ext uri="{FF2B5EF4-FFF2-40B4-BE49-F238E27FC236}">
+              <a16:creationId xmlns:a16="http://schemas.microsoft.com/office/drawing/2014/main" id="{CA1D23FE-C073-7293-849C-835E51580DDF}"/>
+            </a:ext>
+          </a:extLst>
+        </p:cNvPr>
+        <p:cNvGrpSpPr/>
+        <p:nvPr/>
+      </p:nvGrpSpPr>
+      <p:grpSpPr>
+        <a:xfrm>
+          <a:off x="0" y="0"/>
+          <a:ext cx="0" cy="0"/>
+          <a:chOff x="0" y="0"/>
+          <a:chExt cx="0" cy="0"/>
+        </a:xfrm>
+      </p:grpSpPr>
+      <p:sp>
+        <p:nvSpPr>
+          <p:cNvPr id="2" name="제목 1">
+            <a:extLst>
+              <a:ext uri="{FF2B5EF4-FFF2-40B4-BE49-F238E27FC236}">
+                <a16:creationId xmlns:a16="http://schemas.microsoft.com/office/drawing/2014/main" id="{36920A42-E2FF-6FCF-46E6-1E5E9E93F058}"/>
+              </a:ext>
+            </a:extLst>
+          </p:cNvPr>
+          <p:cNvSpPr>
+            <a:spLocks noGrp="1"/>
+          </p:cNvSpPr>
+          <p:nvPr>
+            <p:ph type="title"/>
+          </p:nvPr>
+        </p:nvSpPr>
+        <p:spPr/>
+        <p:txBody>
+          <a:bodyPr/>
+          <a:lstStyle/>
+          <a:p>
+            <a:r>
+              <a:rPr lang="en-US" altLang="ko-KR" dirty="0"/>
+              <a:t>LNG</a:t>
+            </a:r>
+            <a:r>
+              <a:rPr lang="ko-KR" altLang="en-US" dirty="0"/>
+              <a:t> 기술개발을 통한 천연가스 수송혁신</a:t>
+            </a:r>
+          </a:p>
+        </p:txBody>
+      </p:sp>
+      <p:sp>
+        <p:nvSpPr>
+          <p:cNvPr id="4" name="슬라이드 번호 개체 틀 3">
+            <a:extLst>
+              <a:ext uri="{FF2B5EF4-FFF2-40B4-BE49-F238E27FC236}">
+                <a16:creationId xmlns:a16="http://schemas.microsoft.com/office/drawing/2014/main" id="{A1D215EB-BC08-CDE8-9223-1AA33F6B37D4}"/>
+              </a:ext>
+            </a:extLst>
+          </p:cNvPr>
+          <p:cNvSpPr>
+            <a:spLocks noGrp="1"/>
+          </p:cNvSpPr>
+          <p:nvPr>
+            <p:ph type="sldNum" sz="quarter" idx="12"/>
+          </p:nvPr>
+        </p:nvSpPr>
+        <p:spPr/>
+        <p:txBody>
+          <a:bodyPr/>
+          <a:lstStyle/>
+          <a:p>
+            <a:fld id="{109C872D-39A9-4065-8BF3-6A613116E2A1}" type="slidenum">
+              <a:rPr lang="ko-KR" altLang="en-US" smtClean="0"/>
+              <a:t>20</a:t>
+            </a:fld>
+            <a:endParaRPr lang="ko-KR" altLang="en-US"/>
+          </a:p>
+        </p:txBody>
+      </p:sp>
+      <p:sp>
+        <p:nvSpPr>
+          <p:cNvPr id="3" name="TextBox 2">
+            <a:extLst>
+              <a:ext uri="{FF2B5EF4-FFF2-40B4-BE49-F238E27FC236}">
+                <a16:creationId xmlns:a16="http://schemas.microsoft.com/office/drawing/2014/main" id="{FF709185-8DEF-87E2-06F2-0BB52D7E35CC}"/>
+              </a:ext>
+            </a:extLst>
+          </p:cNvPr>
+          <p:cNvSpPr txBox="1"/>
+          <p:nvPr/>
+        </p:nvSpPr>
+        <p:spPr>
+          <a:xfrm>
+            <a:off x="288790" y="958844"/>
+            <a:ext cx="11118453" cy="1522020"/>
+          </a:xfrm>
+          <a:prstGeom prst="rect">
+            <a:avLst/>
+          </a:prstGeom>
+          <a:noFill/>
+        </p:spPr>
+        <p:txBody>
+          <a:bodyPr wrap="square" rtlCol="0" anchor="t">
+            <a:spAutoFit/>
+          </a:bodyPr>
+          <a:lstStyle/>
+          <a:p>
+            <a:pPr marL="377825" indent="-285750">
+              <a:lnSpc>
+                <a:spcPct val="150000"/>
+              </a:lnSpc>
+              <a:buFont typeface="Arial" panose="020B0604020202020204" pitchFamily="34" charset="0"/>
+              <a:buChar char="•"/>
+            </a:pPr>
+            <a:r>
+              <a:rPr lang="en-US" altLang="ko-KR" sz="1600" dirty="0"/>
+              <a:t>2010</a:t>
+            </a:r>
+            <a:r>
+              <a:rPr lang="ko-KR" altLang="en-US" sz="1600" dirty="0"/>
+              <a:t>년대 부터는 해상에서 바로 </a:t>
+            </a:r>
+            <a:r>
+              <a:rPr lang="ko-KR" altLang="en-US" sz="1600" dirty="0" err="1"/>
+              <a:t>액화하는</a:t>
+            </a:r>
+            <a:r>
+              <a:rPr lang="ko-KR" altLang="en-US" sz="1600" dirty="0"/>
+              <a:t> </a:t>
+            </a:r>
+            <a:r>
+              <a:rPr lang="ko-KR" altLang="en-US" sz="1600" dirty="0" err="1"/>
+              <a:t>부유식</a:t>
+            </a:r>
+            <a:r>
+              <a:rPr lang="ko-KR" altLang="en-US" sz="1600" dirty="0"/>
+              <a:t> </a:t>
+            </a:r>
+            <a:r>
+              <a:rPr lang="en-US" altLang="ko-KR" sz="1600" dirty="0"/>
+              <a:t>LNG </a:t>
+            </a:r>
+            <a:r>
+              <a:rPr lang="ko-KR" altLang="en-US" sz="1600" dirty="0"/>
+              <a:t>기술이 개발되어</a:t>
+            </a:r>
+            <a:r>
+              <a:rPr lang="en-US" altLang="ko-KR" sz="1600" dirty="0"/>
+              <a:t>, </a:t>
+            </a:r>
+            <a:r>
+              <a:rPr lang="ko-KR" altLang="en-US" sz="1600" dirty="0"/>
+              <a:t>먼 바다의 가스전에서 </a:t>
+            </a:r>
+            <a:r>
+              <a:rPr lang="en-US" altLang="ko-KR" sz="1600" dirty="0"/>
+              <a:t>LNG</a:t>
+            </a:r>
+            <a:r>
+              <a:rPr lang="ko-KR" altLang="en-US" sz="1600" dirty="0"/>
+              <a:t>를 직접 생산할 수 있게 되었다</a:t>
+            </a:r>
+            <a:r>
+              <a:rPr lang="en-US" altLang="ko-KR" sz="1600" dirty="0"/>
+              <a:t>.</a:t>
+            </a:r>
+          </a:p>
+          <a:p>
+            <a:pPr marL="835025" lvl="1" indent="-285750">
+              <a:lnSpc>
+                <a:spcPct val="150000"/>
+              </a:lnSpc>
+              <a:buFont typeface="Wingdings" panose="05000000000000000000" pitchFamily="2" charset="2"/>
+              <a:buChar char="ü"/>
+            </a:pPr>
+            <a:r>
+              <a:rPr lang="ko-KR" altLang="en-US" sz="1600" dirty="0"/>
+              <a:t>그동안 </a:t>
+            </a:r>
+            <a:r>
+              <a:rPr lang="en-US" altLang="ko-KR" sz="1600" dirty="0"/>
+              <a:t>LNG </a:t>
+            </a:r>
+            <a:r>
+              <a:rPr lang="ko-KR" altLang="en-US" sz="1600" dirty="0"/>
+              <a:t>설비를</a:t>
+            </a:r>
+            <a:r>
+              <a:rPr lang="en-US" altLang="ko-KR" sz="1600" dirty="0"/>
+              <a:t> </a:t>
+            </a:r>
+            <a:r>
+              <a:rPr lang="ko-KR" altLang="en-US" sz="1600" dirty="0"/>
+              <a:t>육지에서만 할 수 있었으므로</a:t>
+            </a:r>
+            <a:r>
+              <a:rPr lang="en-US" altLang="ko-KR" sz="1600" dirty="0"/>
+              <a:t>, </a:t>
+            </a:r>
+            <a:r>
+              <a:rPr lang="ko-KR" altLang="en-US" sz="1600" dirty="0"/>
+              <a:t>해상 가스전의 경우 육지의 </a:t>
+            </a:r>
+            <a:r>
+              <a:rPr lang="en-US" altLang="ko-KR" sz="1600" dirty="0"/>
+              <a:t>LNG</a:t>
+            </a:r>
+            <a:r>
+              <a:rPr lang="ko-KR" altLang="en-US" sz="1600" dirty="0"/>
+              <a:t>플랜트까지 가스관을 건설해야 했다</a:t>
+            </a:r>
+            <a:r>
+              <a:rPr lang="en-US" altLang="ko-KR" sz="1600" dirty="0"/>
+              <a:t>. </a:t>
+            </a:r>
+          </a:p>
+        </p:txBody>
+      </p:sp>
+      <p:sp>
+        <p:nvSpPr>
+          <p:cNvPr id="6" name="TextBox 5">
+            <a:extLst>
+              <a:ext uri="{FF2B5EF4-FFF2-40B4-BE49-F238E27FC236}">
+                <a16:creationId xmlns:a16="http://schemas.microsoft.com/office/drawing/2014/main" id="{A27A27FD-EBCC-4990-97D7-9913CD55BCA3}"/>
+              </a:ext>
+            </a:extLst>
+          </p:cNvPr>
+          <p:cNvSpPr txBox="1"/>
+          <p:nvPr/>
+        </p:nvSpPr>
+        <p:spPr>
+          <a:xfrm>
+            <a:off x="7145360" y="6276719"/>
+            <a:ext cx="4487840" cy="261610"/>
+          </a:xfrm>
+          <a:prstGeom prst="rect">
+            <a:avLst/>
+          </a:prstGeom>
+          <a:noFill/>
+        </p:spPr>
+        <p:txBody>
+          <a:bodyPr wrap="square">
+            <a:spAutoFit/>
+          </a:bodyPr>
+          <a:lstStyle/>
+          <a:p>
+            <a:r>
+              <a:rPr lang="ko-KR" altLang="en-US" sz="1100" dirty="0"/>
+              <a:t>https://www.gjnewsplaza.com/news/articleView.html?idxno=1726</a:t>
+            </a:r>
+          </a:p>
+        </p:txBody>
+      </p:sp>
+      <p:pic>
+        <p:nvPicPr>
+          <p:cNvPr id="7" name="그림 6">
+            <a:extLst>
+              <a:ext uri="{FF2B5EF4-FFF2-40B4-BE49-F238E27FC236}">
+                <a16:creationId xmlns:a16="http://schemas.microsoft.com/office/drawing/2014/main" id="{04213AB6-4825-9A17-4DF6-6165266BE3DD}"/>
+              </a:ext>
+            </a:extLst>
+          </p:cNvPr>
+          <p:cNvPicPr>
+            <a:picLocks noChangeAspect="1"/>
+          </p:cNvPicPr>
+          <p:nvPr/>
+        </p:nvPicPr>
+        <p:blipFill>
+          <a:blip r:embed="rId2"/>
+          <a:stretch>
+            <a:fillRect/>
+          </a:stretch>
+        </p:blipFill>
+        <p:spPr>
+          <a:xfrm>
+            <a:off x="6742582" y="2272880"/>
+            <a:ext cx="5094372" cy="4033044"/>
+          </a:xfrm>
+          <a:prstGeom prst="rect">
+            <a:avLst/>
+          </a:prstGeom>
+        </p:spPr>
+      </p:pic>
+      <p:pic>
+        <p:nvPicPr>
+          <p:cNvPr id="9" name="그림 8" descr="삼성중공업이 건조한 부유식 액화천연가스 생산설비">
+            <a:extLst>
+              <a:ext uri="{FF2B5EF4-FFF2-40B4-BE49-F238E27FC236}">
+                <a16:creationId xmlns:a16="http://schemas.microsoft.com/office/drawing/2014/main" id="{2DC7909D-48CD-9D08-5BD6-6055F98790C6}"/>
+              </a:ext>
+            </a:extLst>
+          </p:cNvPr>
+          <p:cNvPicPr>
+            <a:picLocks noChangeAspect="1"/>
+          </p:cNvPicPr>
+          <p:nvPr/>
+        </p:nvPicPr>
+        <p:blipFill>
+          <a:blip r:embed="rId3"/>
+          <a:stretch>
+            <a:fillRect/>
+          </a:stretch>
+        </p:blipFill>
+        <p:spPr>
+          <a:xfrm>
+            <a:off x="1193068" y="3173420"/>
+            <a:ext cx="4654948" cy="3103299"/>
+          </a:xfrm>
+          <a:prstGeom prst="rect">
+            <a:avLst/>
+          </a:prstGeom>
+        </p:spPr>
+      </p:pic>
+      <p:sp>
+        <p:nvSpPr>
+          <p:cNvPr id="11" name="TextBox 10">
+            <a:extLst>
+              <a:ext uri="{FF2B5EF4-FFF2-40B4-BE49-F238E27FC236}">
+                <a16:creationId xmlns:a16="http://schemas.microsoft.com/office/drawing/2014/main" id="{8DEB2AD2-36A0-8418-7EDD-1DDD40CAFA8A}"/>
+              </a:ext>
+            </a:extLst>
+          </p:cNvPr>
+          <p:cNvSpPr txBox="1"/>
+          <p:nvPr/>
+        </p:nvSpPr>
+        <p:spPr>
+          <a:xfrm>
+            <a:off x="514350" y="2834866"/>
+            <a:ext cx="6134100" cy="276999"/>
+          </a:xfrm>
+          <a:prstGeom prst="rect">
+            <a:avLst/>
+          </a:prstGeom>
+          <a:noFill/>
+        </p:spPr>
+        <p:txBody>
+          <a:bodyPr wrap="square">
+            <a:spAutoFit/>
+          </a:bodyPr>
+          <a:lstStyle/>
+          <a:p>
+            <a:pPr algn="ctr"/>
+            <a:r>
+              <a:rPr lang="en-US" altLang="ko-KR" sz="1200" dirty="0"/>
+              <a:t>&lt;</a:t>
+            </a:r>
+            <a:r>
+              <a:rPr lang="ko-KR" altLang="en-US" sz="1200" dirty="0"/>
+              <a:t>삼성중공업이 건조한 </a:t>
+            </a:r>
+            <a:r>
+              <a:rPr lang="ko-KR" altLang="en-US" sz="1200" dirty="0" err="1"/>
+              <a:t>부유식</a:t>
+            </a:r>
+            <a:r>
+              <a:rPr lang="ko-KR" altLang="en-US" sz="1200" dirty="0"/>
+              <a:t> 액화천연가스 생산설비</a:t>
+            </a:r>
+            <a:r>
+              <a:rPr lang="en-US" altLang="ko-KR" sz="1200" dirty="0"/>
+              <a:t>&gt;</a:t>
+            </a:r>
+            <a:endParaRPr lang="ko-KR" altLang="en-US" sz="1400" dirty="0"/>
+          </a:p>
+        </p:txBody>
+      </p:sp>
+      <p:sp>
+        <p:nvSpPr>
+          <p:cNvPr id="13" name="TextBox 12">
+            <a:extLst>
+              <a:ext uri="{FF2B5EF4-FFF2-40B4-BE49-F238E27FC236}">
+                <a16:creationId xmlns:a16="http://schemas.microsoft.com/office/drawing/2014/main" id="{201311D2-95C7-4712-04A1-BA3883D67267}"/>
+              </a:ext>
+            </a:extLst>
+          </p:cNvPr>
+          <p:cNvSpPr txBox="1"/>
+          <p:nvPr/>
+        </p:nvSpPr>
+        <p:spPr>
+          <a:xfrm>
+            <a:off x="1130300" y="6276719"/>
+            <a:ext cx="3492500" cy="261610"/>
+          </a:xfrm>
+          <a:prstGeom prst="rect">
+            <a:avLst/>
+          </a:prstGeom>
+          <a:noFill/>
+        </p:spPr>
+        <p:txBody>
+          <a:bodyPr wrap="square">
+            <a:spAutoFit/>
+          </a:bodyPr>
+          <a:lstStyle/>
+          <a:p>
+            <a:r>
+              <a:rPr lang="ko-KR" altLang="en-US" sz="1100" dirty="0"/>
+              <a:t>https://www.yna.co.kr/view/AKR20260914038600003</a:t>
+            </a:r>
+          </a:p>
+        </p:txBody>
+      </p:sp>
+    </p:spTree>
+    <p:extLst>
+      <p:ext uri="{BB962C8B-B14F-4D97-AF65-F5344CB8AC3E}">
+        <p14:creationId xmlns:p14="http://schemas.microsoft.com/office/powerpoint/2010/main" val="3119020869"/>
+      </p:ext>
+    </p:extLst>
+  </p:cSld>
+  <p:clrMapOvr>
+    <a:masterClrMapping/>
+  </p:clrMapOvr>
+</p:sld>
+</file>
+
+<file path=ppt/slides/slide21.xml><?xml version="1.0" encoding="utf-8"?>
+<p:sld xmlns:a="http://schemas.openxmlformats.org/drawingml/2006/main" xmlns:r="http://schemas.openxmlformats.org/officeDocument/2006/relationships" xmlns:p="http://schemas.openxmlformats.org/presentationml/2006/main">
+  <p:cSld>
+    <p:spTree>
+      <p:nvGrpSpPr>
+        <p:cNvPr id="1" name="">
+          <a:extLst>
+            <a:ext uri="{FF2B5EF4-FFF2-40B4-BE49-F238E27FC236}">
+              <a16:creationId xmlns:a16="http://schemas.microsoft.com/office/drawing/2014/main" id="{68BD9592-FA09-351E-AFB0-0190BE1CBD2C}"/>
+            </a:ext>
+          </a:extLst>
+        </p:cNvPr>
+        <p:cNvGrpSpPr/>
+        <p:nvPr/>
+      </p:nvGrpSpPr>
+      <p:grpSpPr>
+        <a:xfrm>
+          <a:off x="0" y="0"/>
+          <a:ext cx="0" cy="0"/>
+          <a:chOff x="0" y="0"/>
+          <a:chExt cx="0" cy="0"/>
+        </a:xfrm>
+      </p:grpSpPr>
+      <p:sp>
+        <p:nvSpPr>
+          <p:cNvPr id="2" name="제목 1">
+            <a:extLst>
+              <a:ext uri="{FF2B5EF4-FFF2-40B4-BE49-F238E27FC236}">
+                <a16:creationId xmlns:a16="http://schemas.microsoft.com/office/drawing/2014/main" id="{87B8455C-8C67-2B3A-AF6F-491FFAA2DAB5}"/>
+              </a:ext>
+            </a:extLst>
+          </p:cNvPr>
+          <p:cNvSpPr>
+            <a:spLocks noGrp="1"/>
+          </p:cNvSpPr>
+          <p:nvPr>
+            <p:ph type="title"/>
+          </p:nvPr>
+        </p:nvSpPr>
+        <p:spPr/>
+        <p:txBody>
+          <a:bodyPr/>
+          <a:lstStyle/>
+          <a:p>
+            <a:r>
+              <a:rPr lang="en-US" altLang="ko-KR" dirty="0"/>
+              <a:t>LNG</a:t>
+            </a:r>
+            <a:r>
+              <a:rPr lang="ko-KR" altLang="en-US" dirty="0"/>
+              <a:t> 기술개발을 통한 천연가스 수송혁신</a:t>
+            </a:r>
+          </a:p>
+        </p:txBody>
+      </p:sp>
+      <p:sp>
+        <p:nvSpPr>
+          <p:cNvPr id="4" name="슬라이드 번호 개체 틀 3">
+            <a:extLst>
+              <a:ext uri="{FF2B5EF4-FFF2-40B4-BE49-F238E27FC236}">
+                <a16:creationId xmlns:a16="http://schemas.microsoft.com/office/drawing/2014/main" id="{A9B85088-7BCB-D0F5-BCBD-23514CB8F7B2}"/>
+              </a:ext>
+            </a:extLst>
+          </p:cNvPr>
+          <p:cNvSpPr>
+            <a:spLocks noGrp="1"/>
+          </p:cNvSpPr>
+          <p:nvPr>
+            <p:ph type="sldNum" sz="quarter" idx="12"/>
+          </p:nvPr>
+        </p:nvSpPr>
+        <p:spPr/>
+        <p:txBody>
+          <a:bodyPr/>
+          <a:lstStyle/>
+          <a:p>
+            <a:fld id="{109C872D-39A9-4065-8BF3-6A613116E2A1}" type="slidenum">
+              <a:rPr lang="ko-KR" altLang="en-US" smtClean="0"/>
+              <a:t>21</a:t>
+            </a:fld>
+            <a:endParaRPr lang="ko-KR" altLang="en-US"/>
+          </a:p>
+        </p:txBody>
+      </p:sp>
+      <p:sp>
+        <p:nvSpPr>
+          <p:cNvPr id="3" name="TextBox 2">
+            <a:extLst>
+              <a:ext uri="{FF2B5EF4-FFF2-40B4-BE49-F238E27FC236}">
+                <a16:creationId xmlns:a16="http://schemas.microsoft.com/office/drawing/2014/main" id="{660338E8-567A-85F5-07BD-2CB85DFABB1F}"/>
+              </a:ext>
+            </a:extLst>
+          </p:cNvPr>
+          <p:cNvSpPr txBox="1"/>
+          <p:nvPr/>
+        </p:nvSpPr>
+        <p:spPr>
+          <a:xfrm>
+            <a:off x="288790" y="958844"/>
+            <a:ext cx="11118453" cy="2260683"/>
+          </a:xfrm>
+          <a:prstGeom prst="rect">
+            <a:avLst/>
+          </a:prstGeom>
+          <a:noFill/>
+        </p:spPr>
+        <p:txBody>
+          <a:bodyPr wrap="square" rtlCol="0" anchor="t">
+            <a:spAutoFit/>
+          </a:bodyPr>
+          <a:lstStyle/>
+          <a:p>
+            <a:pPr marL="377825" indent="-285750">
+              <a:lnSpc>
+                <a:spcPct val="150000"/>
+              </a:lnSpc>
+              <a:buFont typeface="Arial" panose="020B0604020202020204" pitchFamily="34" charset="0"/>
+              <a:buChar char="•"/>
+            </a:pPr>
+            <a:r>
+              <a:rPr lang="en-US" altLang="ko-KR" sz="1600" dirty="0"/>
+              <a:t>LNG </a:t>
+            </a:r>
+            <a:r>
+              <a:rPr lang="ko-KR" altLang="en-US" sz="1600" dirty="0"/>
+              <a:t>기술이 개발되면서 가장 혜택을 본 나라는 동아시아의 한국</a:t>
+            </a:r>
+            <a:r>
+              <a:rPr lang="en-US" altLang="ko-KR" sz="1600" dirty="0"/>
+              <a:t>, </a:t>
+            </a:r>
+            <a:r>
+              <a:rPr lang="ko-KR" altLang="en-US" sz="1600" dirty="0"/>
+              <a:t>일본</a:t>
+            </a:r>
+            <a:r>
+              <a:rPr lang="en-US" altLang="ko-KR" sz="1600" dirty="0"/>
+              <a:t>, </a:t>
+            </a:r>
+            <a:r>
+              <a:rPr lang="ko-KR" altLang="en-US" sz="1600" dirty="0"/>
+              <a:t>타이완이다</a:t>
+            </a:r>
+            <a:r>
+              <a:rPr lang="en-US" altLang="ko-KR" sz="1600" dirty="0"/>
+              <a:t>.</a:t>
+            </a:r>
+          </a:p>
+          <a:p>
+            <a:pPr marL="835025" lvl="1" indent="-285750">
+              <a:lnSpc>
+                <a:spcPct val="150000"/>
+              </a:lnSpc>
+              <a:buFont typeface="Wingdings" panose="05000000000000000000" pitchFamily="2" charset="2"/>
+              <a:buChar char="ü"/>
+            </a:pPr>
+            <a:r>
+              <a:rPr lang="ko-KR" altLang="en-US" sz="1600" dirty="0"/>
+              <a:t>그동안 </a:t>
+            </a:r>
+            <a:r>
+              <a:rPr lang="ko-KR" altLang="en-US" sz="1600" dirty="0" err="1"/>
+              <a:t>중동산</a:t>
+            </a:r>
+            <a:r>
+              <a:rPr lang="ko-KR" altLang="en-US" sz="1600" dirty="0"/>
+              <a:t> 석유에만 의존해 왔는데 동아시아에서 멀지 않은 호주</a:t>
+            </a:r>
+            <a:r>
+              <a:rPr lang="en-US" altLang="ko-KR" sz="1600" dirty="0"/>
+              <a:t>, </a:t>
+            </a:r>
+            <a:r>
+              <a:rPr lang="ko-KR" altLang="en-US" sz="1600" dirty="0"/>
+              <a:t>인도네시아</a:t>
+            </a:r>
+            <a:r>
+              <a:rPr lang="en-US" altLang="ko-KR" sz="1600" dirty="0"/>
+              <a:t>, </a:t>
+            </a:r>
+            <a:r>
+              <a:rPr lang="ko-KR" altLang="en-US" sz="1600" dirty="0"/>
+              <a:t>말레이시아 로부터 </a:t>
+            </a:r>
+            <a:r>
+              <a:rPr lang="en-US" altLang="ko-KR" sz="1600" dirty="0"/>
+              <a:t>LNG</a:t>
+            </a:r>
+            <a:r>
+              <a:rPr lang="ko-KR" altLang="en-US" sz="1600" dirty="0"/>
+              <a:t>가 공급되면서</a:t>
+            </a:r>
+            <a:r>
+              <a:rPr lang="en-US" altLang="ko-KR" sz="1600" dirty="0"/>
+              <a:t>, </a:t>
+            </a:r>
+            <a:r>
+              <a:rPr lang="ko-KR" altLang="en-US" sz="1600" dirty="0"/>
+              <a:t>한국과 일본의 에너지 시장에 일대 혁신이 일어났다</a:t>
+            </a:r>
+            <a:r>
+              <a:rPr lang="en-US" altLang="ko-KR" sz="1600" dirty="0"/>
+              <a:t>.</a:t>
+            </a:r>
+          </a:p>
+          <a:p>
+            <a:pPr marL="377825" indent="-285750">
+              <a:lnSpc>
+                <a:spcPct val="150000"/>
+              </a:lnSpc>
+              <a:buFont typeface="Arial" panose="020B0604020202020204" pitchFamily="34" charset="0"/>
+              <a:buChar char="•"/>
+            </a:pPr>
+            <a:r>
+              <a:rPr lang="ko-KR" altLang="en-US" sz="1600" dirty="0"/>
+              <a:t>우리나라에는 </a:t>
+            </a:r>
+            <a:r>
+              <a:rPr lang="en-US" altLang="ko-KR" sz="1600" dirty="0"/>
+              <a:t>1983</a:t>
+            </a:r>
+            <a:r>
+              <a:rPr lang="ko-KR" altLang="en-US" sz="1600" dirty="0"/>
+              <a:t>년 천연가스 사업을 전담하는 한국가스공사가 설립되고</a:t>
+            </a:r>
+            <a:r>
+              <a:rPr lang="en-US" altLang="ko-KR" sz="1600" dirty="0"/>
+              <a:t> 1986</a:t>
+            </a:r>
+            <a:r>
+              <a:rPr lang="ko-KR" altLang="en-US" sz="1600" dirty="0"/>
+              <a:t>년부터 </a:t>
+            </a:r>
+            <a:r>
+              <a:rPr lang="en-US" altLang="ko-KR" sz="1600" dirty="0"/>
+              <a:t>LNG</a:t>
+            </a:r>
+            <a:r>
+              <a:rPr lang="ko-KR" altLang="en-US" sz="1600" dirty="0"/>
+              <a:t>를 도입하기 시작했다</a:t>
+            </a:r>
+            <a:r>
+              <a:rPr lang="en-US" altLang="ko-KR" sz="1600" dirty="0"/>
+              <a:t>.</a:t>
+            </a:r>
+          </a:p>
+          <a:p>
+            <a:pPr marL="835025" lvl="1" indent="-285750">
+              <a:lnSpc>
+                <a:spcPct val="150000"/>
+              </a:lnSpc>
+              <a:buFont typeface="Wingdings" panose="05000000000000000000" pitchFamily="2" charset="2"/>
+              <a:buChar char="ü"/>
+            </a:pPr>
+            <a:r>
+              <a:rPr lang="ko-KR" altLang="en-US" sz="1600" dirty="0"/>
+              <a:t>이전에는 가정에서 프로판 용기에 들어 있던 </a:t>
+            </a:r>
+            <a:r>
+              <a:rPr lang="en-US" altLang="ko-KR" sz="1600" dirty="0"/>
+              <a:t>LPG</a:t>
+            </a:r>
+            <a:r>
+              <a:rPr lang="ko-KR" altLang="en-US" sz="1600" dirty="0"/>
+              <a:t>를 주로 사용하였는데</a:t>
+            </a:r>
+            <a:r>
+              <a:rPr lang="en-US" altLang="ko-KR" sz="1600" dirty="0"/>
+              <a:t>, </a:t>
+            </a:r>
+            <a:r>
+              <a:rPr lang="ko-KR" altLang="en-US" sz="1600" dirty="0"/>
+              <a:t>전국적으로 가스관이 깔리고 도시가스가 공급되면서 가정에서 편리하고 값싼 가스를 사용하게 되었다</a:t>
+            </a:r>
+            <a:r>
+              <a:rPr lang="en-US" altLang="ko-KR" sz="1600" dirty="0"/>
+              <a:t>.</a:t>
+            </a:r>
+          </a:p>
+        </p:txBody>
+      </p:sp>
+    </p:spTree>
+    <p:extLst>
+      <p:ext uri="{BB962C8B-B14F-4D97-AF65-F5344CB8AC3E}">
+        <p14:creationId xmlns:p14="http://schemas.microsoft.com/office/powerpoint/2010/main" val="530824633"/>
+      </p:ext>
+    </p:extLst>
+  </p:cSld>
+  <p:clrMapOvr>
+    <a:masterClrMapping/>
+  </p:clrMapOvr>
+</p:sld>
+</file>
+
+<file path=ppt/slides/slide22.xml><?xml version="1.0" encoding="utf-8"?>
+<p:sld xmlns:a="http://schemas.openxmlformats.org/drawingml/2006/main" xmlns:r="http://schemas.openxmlformats.org/officeDocument/2006/relationships" xmlns:p="http://schemas.openxmlformats.org/presentationml/2006/main">
+  <p:cSld>
+    <p:spTree>
+      <p:nvGrpSpPr>
+        <p:cNvPr id="1" name="">
+          <a:extLst>
+            <a:ext uri="{FF2B5EF4-FFF2-40B4-BE49-F238E27FC236}">
               <a16:creationId xmlns:a16="http://schemas.microsoft.com/office/drawing/2014/main" id="{7CB6601A-FB1D-722F-2FC6-1AD571EAC781}"/>
             </a:ext>
           </a:extLst>
@@ -10628,7 +12139,7 @@
           <a:p>
             <a:fld id="{109C872D-39A9-4065-8BF3-6A613116E2A1}" type="slidenum">
               <a:rPr lang="ko-KR" altLang="en-US" smtClean="0"/>
-              <a:t>18</a:t>
+              <a:t>22</a:t>
             </a:fld>
             <a:endParaRPr lang="ko-KR" altLang="en-US"/>
           </a:p>
@@ -10688,7 +12199,7 @@
 </p:sld>
 </file>
 
-<file path=ppt/slides/slide19.xml><?xml version="1.0" encoding="utf-8"?>
+<file path=ppt/slides/slide23.xml><?xml version="1.0" encoding="utf-8"?>
 <p:sld xmlns:a="http://schemas.openxmlformats.org/drawingml/2006/main" xmlns:r="http://schemas.openxmlformats.org/officeDocument/2006/relationships" xmlns:p="http://schemas.openxmlformats.org/presentationml/2006/main">
   <p:cSld>
     <p:spTree>
@@ -10762,7 +12273,7 @@
           <a:p>
             <a:fld id="{109C872D-39A9-4065-8BF3-6A613116E2A1}" type="slidenum">
               <a:rPr lang="ko-KR" altLang="en-US" smtClean="0"/>
-              <a:t>19</a:t>
+              <a:t>23</a:t>
             </a:fld>
             <a:endParaRPr lang="ko-KR" altLang="en-US"/>
           </a:p>
@@ -15380,156 +16891,7 @@
 </p:sld>
 </file>
 
-<file path=ppt/slides/slide2.xml><?xml version="1.0" encoding="utf-8"?>
-<p:sld xmlns:a="http://schemas.openxmlformats.org/drawingml/2006/main" xmlns:r="http://schemas.openxmlformats.org/officeDocument/2006/relationships" xmlns:p="http://schemas.openxmlformats.org/presentationml/2006/main">
-  <p:cSld>
-    <p:spTree>
-      <p:nvGrpSpPr>
-        <p:cNvPr id="1" name="">
-          <a:extLst>
-            <a:ext uri="{FF2B5EF4-FFF2-40B4-BE49-F238E27FC236}">
-              <a16:creationId xmlns:a16="http://schemas.microsoft.com/office/drawing/2014/main" id="{C41D0659-CAFD-F53E-5E96-AE42A73FE935}"/>
-            </a:ext>
-          </a:extLst>
-        </p:cNvPr>
-        <p:cNvGrpSpPr/>
-        <p:nvPr/>
-      </p:nvGrpSpPr>
-      <p:grpSpPr>
-        <a:xfrm>
-          <a:off x="0" y="0"/>
-          <a:ext cx="0" cy="0"/>
-          <a:chOff x="0" y="0"/>
-          <a:chExt cx="0" cy="0"/>
-        </a:xfrm>
-      </p:grpSpPr>
-      <p:pic>
-        <p:nvPicPr>
-          <p:cNvPr id="6" name="그림 5" descr="텍스트, 로고, 원, 폰트이(가) 표시된 사진&#10;&#10;AI 생성 콘텐츠는 정확하지 않을 수 있습니다.">
-            <a:extLst>
-              <a:ext uri="{FF2B5EF4-FFF2-40B4-BE49-F238E27FC236}">
-                <a16:creationId xmlns:a16="http://schemas.microsoft.com/office/drawing/2014/main" id="{D5C3F3A0-36ED-43FB-2D13-6CAA30B083C2}"/>
-              </a:ext>
-            </a:extLst>
-          </p:cNvPr>
-          <p:cNvPicPr>
-            <a:picLocks noChangeAspect="1"/>
-          </p:cNvPicPr>
-          <p:nvPr/>
-        </p:nvPicPr>
-        <p:blipFill>
-          <a:blip r:embed="rId2">
-            <a:alphaModFix amt="20000"/>
-            <a:extLst>
-              <a:ext uri="{28A0092B-C50C-407E-A947-70E740481C1C}">
-                <a14:useLocalDpi xmlns:a14="http://schemas.microsoft.com/office/drawing/2010/main" val="0"/>
-              </a:ext>
-            </a:extLst>
-          </a:blip>
-          <a:stretch>
-            <a:fillRect/>
-          </a:stretch>
-        </p:blipFill>
-        <p:spPr>
-          <a:xfrm>
-            <a:off x="4012070" y="1673061"/>
-            <a:ext cx="4167861" cy="4167861"/>
-          </a:xfrm>
-          <a:prstGeom prst="rect">
-            <a:avLst/>
-          </a:prstGeom>
-        </p:spPr>
-      </p:pic>
-      <p:sp>
-        <p:nvSpPr>
-          <p:cNvPr id="4" name="슬라이드 번호 개체 틀 3">
-            <a:extLst>
-              <a:ext uri="{FF2B5EF4-FFF2-40B4-BE49-F238E27FC236}">
-                <a16:creationId xmlns:a16="http://schemas.microsoft.com/office/drawing/2014/main" id="{A8D19C74-D6C9-BA18-D11B-15A0CD9AF906}"/>
-              </a:ext>
-            </a:extLst>
-          </p:cNvPr>
-          <p:cNvSpPr>
-            <a:spLocks noGrp="1"/>
-          </p:cNvSpPr>
-          <p:nvPr>
-            <p:ph type="sldNum" sz="quarter" idx="12"/>
-          </p:nvPr>
-        </p:nvSpPr>
-        <p:spPr/>
-        <p:txBody>
-          <a:bodyPr/>
-          <a:lstStyle/>
-          <a:p>
-            <a:fld id="{109C872D-39A9-4065-8BF3-6A613116E2A1}" type="slidenum">
-              <a:rPr lang="ko-KR" altLang="en-US" smtClean="0"/>
-              <a:t>2</a:t>
-            </a:fld>
-            <a:endParaRPr lang="ko-KR" altLang="en-US"/>
-          </a:p>
-        </p:txBody>
-      </p:sp>
-      <p:sp>
-        <p:nvSpPr>
-          <p:cNvPr id="7" name="제목 1">
-            <a:extLst>
-              <a:ext uri="{FF2B5EF4-FFF2-40B4-BE49-F238E27FC236}">
-                <a16:creationId xmlns:a16="http://schemas.microsoft.com/office/drawing/2014/main" id="{B58D8A77-45B6-C35A-AFD8-829E4435C90E}"/>
-              </a:ext>
-            </a:extLst>
-          </p:cNvPr>
-          <p:cNvSpPr>
-            <a:spLocks noGrp="1"/>
-          </p:cNvSpPr>
-          <p:nvPr>
-            <p:ph type="title"/>
-          </p:nvPr>
-        </p:nvSpPr>
-        <p:spPr>
-          <a:xfrm>
-            <a:off x="831850" y="2478940"/>
-            <a:ext cx="11007224" cy="1939428"/>
-          </a:xfrm>
-          <a:effectLst>
-            <a:reflection blurRad="50800" stA="45000" endPos="44000" dir="5400000" sy="-100000" algn="bl" rotWithShape="0"/>
-          </a:effectLst>
-        </p:spPr>
-        <p:txBody>
-          <a:bodyPr anchor="b"/>
-          <a:lstStyle/>
-          <a:p>
-            <a:r>
-              <a:rPr lang="en-US" altLang="ko-KR" sz="4000" b="1" i="0" spc="150"/>
-              <a:t>Chapter 4</a:t>
-            </a:r>
-            <a:br>
-              <a:rPr lang="en-US" altLang="ko-KR" sz="4000" b="1" i="0" spc="150" dirty="0"/>
-            </a:br>
-            <a:br>
-              <a:rPr lang="en-US" altLang="ko-KR" sz="4000" b="1" i="0" spc="150" dirty="0"/>
-            </a:br>
-            <a:r>
-              <a:rPr lang="ko-KR" altLang="en-US" sz="4000" b="1" i="0" spc="150" dirty="0"/>
-              <a:t>천연가스 시장</a:t>
-            </a:r>
-            <a:endParaRPr lang="ko-KR" altLang="en-US" sz="3600" i="0" spc="150" dirty="0"/>
-          </a:p>
-        </p:txBody>
-      </p:sp>
-    </p:spTree>
-    <p:extLst>
-      <p:ext uri="{BB962C8B-B14F-4D97-AF65-F5344CB8AC3E}">
-        <p14:creationId xmlns:p14="http://schemas.microsoft.com/office/powerpoint/2010/main" val="2655123632"/>
-      </p:ext>
-    </p:extLst>
-  </p:cSld>
-  <p:clrMapOvr>
-    <a:masterClrMapping/>
-  </p:clrMapOvr>
-</p:sld>
-</file>
-
-<file path=ppt/slides/slide20.xml><?xml version="1.0" encoding="utf-8"?>
+<file path=ppt/slides/slide24.xml><?xml version="1.0" encoding="utf-8"?>
 <p:sld xmlns:a="http://schemas.openxmlformats.org/drawingml/2006/main" xmlns:r="http://schemas.openxmlformats.org/officeDocument/2006/relationships" xmlns:p="http://schemas.openxmlformats.org/presentationml/2006/main">
   <p:cSld>
     <p:spTree>
@@ -15603,7 +16965,7 @@
           <a:p>
             <a:fld id="{109C872D-39A9-4065-8BF3-6A613116E2A1}" type="slidenum">
               <a:rPr lang="ko-KR" altLang="en-US" smtClean="0"/>
-              <a:t>20</a:t>
+              <a:t>24</a:t>
             </a:fld>
             <a:endParaRPr lang="ko-KR" altLang="en-US"/>
           </a:p>
@@ -16017,7 +17379,7 @@
 </p:sld>
 </file>
 
-<file path=ppt/slides/slide21.xml><?xml version="1.0" encoding="utf-8"?>
+<file path=ppt/slides/slide25.xml><?xml version="1.0" encoding="utf-8"?>
 <p:sld xmlns:a="http://schemas.openxmlformats.org/drawingml/2006/main" xmlns:r="http://schemas.openxmlformats.org/officeDocument/2006/relationships" xmlns:p="http://schemas.openxmlformats.org/presentationml/2006/main">
   <p:cSld>
     <p:spTree>
@@ -16091,7 +17453,7 @@
           <a:p>
             <a:fld id="{109C872D-39A9-4065-8BF3-6A613116E2A1}" type="slidenum">
               <a:rPr lang="ko-KR" altLang="en-US" smtClean="0"/>
-              <a:t>21</a:t>
+              <a:t>25</a:t>
             </a:fld>
             <a:endParaRPr lang="ko-KR" altLang="en-US"/>
           </a:p>
@@ -22083,7 +23445,7 @@
 </p:sld>
 </file>
 
-<file path=ppt/slides/slide22.xml><?xml version="1.0" encoding="utf-8"?>
+<file path=ppt/slides/slide26.xml><?xml version="1.0" encoding="utf-8"?>
 <p:sld xmlns:a="http://schemas.openxmlformats.org/drawingml/2006/main" xmlns:r="http://schemas.openxmlformats.org/officeDocument/2006/relationships" xmlns:p="http://schemas.openxmlformats.org/presentationml/2006/main">
   <p:cSld>
     <p:spTree>
@@ -22157,7 +23519,7 @@
           <a:p>
             <a:fld id="{109C872D-39A9-4065-8BF3-6A613116E2A1}" type="slidenum">
               <a:rPr lang="ko-KR" altLang="en-US" smtClean="0"/>
-              <a:t>22</a:t>
+              <a:t>26</a:t>
             </a:fld>
             <a:endParaRPr lang="ko-KR" altLang="en-US"/>
           </a:p>
@@ -22626,7 +23988,7 @@
 </p:sld>
 </file>
 
-<file path=ppt/slides/slide23.xml><?xml version="1.0" encoding="utf-8"?>
+<file path=ppt/slides/slide27.xml><?xml version="1.0" encoding="utf-8"?>
 <p:sld xmlns:a="http://schemas.openxmlformats.org/drawingml/2006/main" xmlns:r="http://schemas.openxmlformats.org/officeDocument/2006/relationships" xmlns:p="http://schemas.openxmlformats.org/presentationml/2006/main">
   <p:cSld>
     <p:spTree>
@@ -22700,7 +24062,7 @@
           <a:p>
             <a:fld id="{109C872D-39A9-4065-8BF3-6A613116E2A1}" type="slidenum">
               <a:rPr lang="ko-KR" altLang="en-US" smtClean="0"/>
-              <a:t>23</a:t>
+              <a:t>27</a:t>
             </a:fld>
             <a:endParaRPr lang="ko-KR" altLang="en-US"/>
           </a:p>
@@ -23148,7 +24510,7 @@
 </p:sld>
 </file>
 
-<file path=ppt/slides/slide24.xml><?xml version="1.0" encoding="utf-8"?>
+<file path=ppt/slides/slide28.xml><?xml version="1.0" encoding="utf-8"?>
 <p:sld xmlns:a="http://schemas.openxmlformats.org/drawingml/2006/main" xmlns:r="http://schemas.openxmlformats.org/officeDocument/2006/relationships" xmlns:p="http://schemas.openxmlformats.org/presentationml/2006/main">
   <p:cSld>
     <p:spTree>
@@ -23222,7 +24584,7 @@
           <a:p>
             <a:fld id="{109C872D-39A9-4065-8BF3-6A613116E2A1}" type="slidenum">
               <a:rPr lang="ko-KR" altLang="en-US" smtClean="0"/>
-              <a:t>24</a:t>
+              <a:t>28</a:t>
             </a:fld>
             <a:endParaRPr lang="ko-KR" altLang="en-US"/>
           </a:p>
@@ -29238,7 +30600,7 @@
 </p:sld>
 </file>
 
-<file path=ppt/slides/slide25.xml><?xml version="1.0" encoding="utf-8"?>
+<file path=ppt/slides/slide29.xml><?xml version="1.0" encoding="utf-8"?>
 <p:sld xmlns:a="http://schemas.openxmlformats.org/drawingml/2006/main" xmlns:r="http://schemas.openxmlformats.org/officeDocument/2006/relationships" xmlns:p="http://schemas.openxmlformats.org/presentationml/2006/main">
   <p:cSld>
     <p:spTree>
@@ -29312,7 +30674,7 @@
           <a:p>
             <a:fld id="{109C872D-39A9-4065-8BF3-6A613116E2A1}" type="slidenum">
               <a:rPr lang="ko-KR" altLang="en-US" smtClean="0"/>
-              <a:t>25</a:t>
+              <a:t>29</a:t>
             </a:fld>
             <a:endParaRPr lang="ko-KR" altLang="en-US"/>
           </a:p>
@@ -29724,1830 +31086,6 @@
     <p:extLst>
       <p:ext uri="{BB962C8B-B14F-4D97-AF65-F5344CB8AC3E}">
         <p14:creationId xmlns:p14="http://schemas.microsoft.com/office/powerpoint/2010/main" val="3423313291"/>
-      </p:ext>
-    </p:extLst>
-  </p:cSld>
-  <p:clrMapOvr>
-    <a:masterClrMapping/>
-  </p:clrMapOvr>
-</p:sld>
-</file>
-
-<file path=ppt/slides/slide26.xml><?xml version="1.0" encoding="utf-8"?>
-<p:sld xmlns:a="http://schemas.openxmlformats.org/drawingml/2006/main" xmlns:r="http://schemas.openxmlformats.org/officeDocument/2006/relationships" xmlns:p="http://schemas.openxmlformats.org/presentationml/2006/main">
-  <p:cSld>
-    <p:spTree>
-      <p:nvGrpSpPr>
-        <p:cNvPr id="1" name="">
-          <a:extLst>
-            <a:ext uri="{FF2B5EF4-FFF2-40B4-BE49-F238E27FC236}">
-              <a16:creationId xmlns:a16="http://schemas.microsoft.com/office/drawing/2014/main" id="{FB53CCBB-A096-4F5E-82A0-6FA451650AF3}"/>
-            </a:ext>
-          </a:extLst>
-        </p:cNvPr>
-        <p:cNvGrpSpPr/>
-        <p:nvPr/>
-      </p:nvGrpSpPr>
-      <p:grpSpPr>
-        <a:xfrm>
-          <a:off x="0" y="0"/>
-          <a:ext cx="0" cy="0"/>
-          <a:chOff x="0" y="0"/>
-          <a:chExt cx="0" cy="0"/>
-        </a:xfrm>
-      </p:grpSpPr>
-      <p:sp>
-        <p:nvSpPr>
-          <p:cNvPr id="2" name="제목 1">
-            <a:extLst>
-              <a:ext uri="{FF2B5EF4-FFF2-40B4-BE49-F238E27FC236}">
-                <a16:creationId xmlns:a16="http://schemas.microsoft.com/office/drawing/2014/main" id="{4A390E5F-A4F8-AAD3-CC8B-AB68364297D1}"/>
-              </a:ext>
-            </a:extLst>
-          </p:cNvPr>
-          <p:cNvSpPr>
-            <a:spLocks noGrp="1"/>
-          </p:cNvSpPr>
-          <p:nvPr>
-            <p:ph type="title"/>
-          </p:nvPr>
-        </p:nvSpPr>
-        <p:spPr/>
-        <p:txBody>
-          <a:bodyPr/>
-          <a:lstStyle/>
-          <a:p>
-            <a:r>
-              <a:rPr lang="ko-KR" altLang="en-US" dirty="0"/>
-              <a:t>천연가스 소비</a:t>
-            </a:r>
-          </a:p>
-        </p:txBody>
-      </p:sp>
-      <p:sp>
-        <p:nvSpPr>
-          <p:cNvPr id="4" name="슬라이드 번호 개체 틀 3">
-            <a:extLst>
-              <a:ext uri="{FF2B5EF4-FFF2-40B4-BE49-F238E27FC236}">
-                <a16:creationId xmlns:a16="http://schemas.microsoft.com/office/drawing/2014/main" id="{283DFC10-B1F8-C620-A895-687007ABFB07}"/>
-              </a:ext>
-            </a:extLst>
-          </p:cNvPr>
-          <p:cNvSpPr>
-            <a:spLocks noGrp="1"/>
-          </p:cNvSpPr>
-          <p:nvPr>
-            <p:ph type="sldNum" sz="quarter" idx="12"/>
-          </p:nvPr>
-        </p:nvSpPr>
-        <p:spPr/>
-        <p:txBody>
-          <a:bodyPr/>
-          <a:lstStyle/>
-          <a:p>
-            <a:fld id="{109C872D-39A9-4065-8BF3-6A613116E2A1}" type="slidenum">
-              <a:rPr lang="ko-KR" altLang="en-US" smtClean="0"/>
-              <a:t>26</a:t>
-            </a:fld>
-            <a:endParaRPr lang="ko-KR" altLang="en-US"/>
-          </a:p>
-        </p:txBody>
-      </p:sp>
-      <p:sp>
-        <p:nvSpPr>
-          <p:cNvPr id="3" name="TextBox 2">
-            <a:extLst>
-              <a:ext uri="{FF2B5EF4-FFF2-40B4-BE49-F238E27FC236}">
-                <a16:creationId xmlns:a16="http://schemas.microsoft.com/office/drawing/2014/main" id="{0D9406ED-3EC3-CA2F-B6EB-A9691A7965F6}"/>
-              </a:ext>
-            </a:extLst>
-          </p:cNvPr>
-          <p:cNvSpPr txBox="1"/>
-          <p:nvPr/>
-        </p:nvSpPr>
-        <p:spPr>
-          <a:xfrm>
-            <a:off x="288790" y="958844"/>
-            <a:ext cx="11118453" cy="5215338"/>
-          </a:xfrm>
-          <a:prstGeom prst="rect">
-            <a:avLst/>
-          </a:prstGeom>
-          <a:noFill/>
-        </p:spPr>
-        <p:txBody>
-          <a:bodyPr wrap="square" rtlCol="0" anchor="t">
-            <a:spAutoFit/>
-          </a:bodyPr>
-          <a:lstStyle/>
-          <a:p>
-            <a:pPr marL="377825" indent="-285750">
-              <a:lnSpc>
-                <a:spcPct val="150000"/>
-              </a:lnSpc>
-              <a:buFont typeface="Arial" panose="020B0604020202020204" pitchFamily="34" charset="0"/>
-              <a:buChar char="•"/>
-            </a:pPr>
-            <a:r>
-              <a:rPr lang="ko-KR" altLang="en-US" sz="1600" dirty="0"/>
-              <a:t>글로벌 액화천연가스</a:t>
-            </a:r>
-            <a:r>
-              <a:rPr lang="en-US" altLang="ko-KR" sz="1600" dirty="0"/>
-              <a:t>(LNG) </a:t>
-            </a:r>
-            <a:r>
-              <a:rPr lang="ko-KR" altLang="en-US" sz="1600" dirty="0"/>
-              <a:t>수입은 지난 수십 년간 에너지 시장에서 가장 빠르게 성장한 분야이다</a:t>
-            </a:r>
-            <a:r>
-              <a:rPr lang="en-US" altLang="ko-KR" sz="1600" dirty="0"/>
-              <a:t>.</a:t>
-            </a:r>
-          </a:p>
-          <a:p>
-            <a:pPr marL="835025" lvl="1" indent="-285750">
-              <a:lnSpc>
-                <a:spcPct val="150000"/>
-              </a:lnSpc>
-              <a:buFont typeface="Wingdings" panose="05000000000000000000" pitchFamily="2" charset="2"/>
-              <a:buChar char="ü"/>
-            </a:pPr>
-            <a:r>
-              <a:rPr lang="ko-KR" altLang="en-US" sz="1600" dirty="0"/>
-              <a:t>공급망 유연성 증대와 에너지 안보 강화에 핵심적 역할을 해왔다</a:t>
-            </a:r>
-            <a:r>
-              <a:rPr lang="en-US" altLang="ko-KR" sz="1600" dirty="0"/>
-              <a:t>.</a:t>
-            </a:r>
-          </a:p>
-          <a:p>
-            <a:pPr marL="835025" lvl="1" indent="-285750">
-              <a:lnSpc>
-                <a:spcPct val="150000"/>
-              </a:lnSpc>
-              <a:buFont typeface="Wingdings" panose="05000000000000000000" pitchFamily="2" charset="2"/>
-              <a:buChar char="ü"/>
-            </a:pPr>
-            <a:r>
-              <a:rPr lang="ko-KR" altLang="en-US" sz="1600" dirty="0"/>
-              <a:t>기존 파이프라인 수송 방식에 비해</a:t>
-            </a:r>
-            <a:r>
-              <a:rPr lang="en-US" altLang="ko-KR" sz="1600" dirty="0"/>
-              <a:t>, </a:t>
-            </a:r>
-            <a:r>
-              <a:rPr lang="ko-KR" altLang="en-US" sz="1600" dirty="0"/>
-              <a:t>거리 및 지정학적 제약으로부터 자유롭기 때문에 천연가스 국제무역을 가능하게 하는 핵심 기술이 되었다</a:t>
-            </a:r>
-            <a:r>
-              <a:rPr lang="en-US" altLang="ko-KR" sz="1600" dirty="0"/>
-              <a:t>.</a:t>
-            </a:r>
-          </a:p>
-          <a:p>
-            <a:pPr marL="1292225" lvl="2" indent="-285750">
-              <a:lnSpc>
-                <a:spcPct val="150000"/>
-              </a:lnSpc>
-              <a:buFont typeface="Wingdings" panose="05000000000000000000" pitchFamily="2" charset="2"/>
-              <a:buChar char="Ø"/>
-            </a:pPr>
-            <a:r>
-              <a:rPr lang="ko-KR" altLang="en-US" sz="1600" dirty="0"/>
-              <a:t>천연가스 자원이 풍부한 북미</a:t>
-            </a:r>
-            <a:r>
-              <a:rPr lang="en-US" altLang="ko-KR" sz="1600" dirty="0"/>
-              <a:t>, </a:t>
-            </a:r>
-            <a:r>
-              <a:rPr lang="ko-KR" altLang="en-US" sz="1600" dirty="0"/>
-              <a:t>중동</a:t>
-            </a:r>
-            <a:r>
-              <a:rPr lang="en-US" altLang="ko-KR" sz="1600" dirty="0"/>
-              <a:t>, </a:t>
-            </a:r>
-            <a:r>
-              <a:rPr lang="ko-KR" altLang="en-US" sz="1600" dirty="0"/>
-              <a:t>러시아 등의 지역에서 생산된 가스가</a:t>
-            </a:r>
-            <a:r>
-              <a:rPr lang="en-US" altLang="ko-KR" sz="1600" dirty="0"/>
-              <a:t>, </a:t>
-            </a:r>
-            <a:r>
-              <a:rPr lang="ko-KR" altLang="en-US" sz="1600" dirty="0"/>
-              <a:t>수요가 집중된 동아시아</a:t>
-            </a:r>
-            <a:r>
-              <a:rPr lang="en-US" altLang="ko-KR" sz="1600" dirty="0"/>
-              <a:t>, </a:t>
-            </a:r>
-            <a:r>
-              <a:rPr lang="ko-KR" altLang="en-US" sz="1600" dirty="0"/>
-              <a:t>유럽</a:t>
-            </a:r>
-            <a:r>
-              <a:rPr lang="en-US" altLang="ko-KR" sz="1600" dirty="0"/>
-              <a:t>, </a:t>
-            </a:r>
-            <a:r>
-              <a:rPr lang="ko-KR" altLang="en-US" sz="1600" dirty="0"/>
-              <a:t>남아시아 지역으로 이전됨으로써 천연가스는 석유 시장과 유사한 통합성과 유연성을 갖춘 글로벌 상품으로 진화하고 있다</a:t>
-            </a:r>
-            <a:r>
-              <a:rPr lang="en-US" altLang="ko-KR" sz="1600" dirty="0"/>
-              <a:t>.</a:t>
-            </a:r>
-          </a:p>
-          <a:p>
-            <a:pPr marL="835025" lvl="1" indent="-285750">
-              <a:lnSpc>
-                <a:spcPct val="150000"/>
-              </a:lnSpc>
-              <a:buFont typeface="Wingdings" panose="05000000000000000000" pitchFamily="2" charset="2"/>
-              <a:buChar char="ü"/>
-            </a:pPr>
-            <a:r>
-              <a:rPr lang="ko-KR" altLang="en-US" sz="1600" dirty="0"/>
-              <a:t>수입국 측면에서 아시아는 전세계 </a:t>
-            </a:r>
-            <a:r>
-              <a:rPr lang="en-US" altLang="ko-KR" sz="1600" dirty="0"/>
-              <a:t>LNG </a:t>
-            </a:r>
-            <a:r>
-              <a:rPr lang="ko-KR" altLang="en-US" sz="1600" dirty="0"/>
-              <a:t>수요의 중심지로 부상하였다</a:t>
-            </a:r>
-            <a:r>
-              <a:rPr lang="en-US" altLang="ko-KR" sz="1600" dirty="0"/>
-              <a:t>.</a:t>
-            </a:r>
-          </a:p>
-          <a:p>
-            <a:pPr marL="1292225" lvl="2" indent="-285750">
-              <a:lnSpc>
-                <a:spcPct val="150000"/>
-              </a:lnSpc>
-              <a:buFont typeface="Wingdings" panose="05000000000000000000" pitchFamily="2" charset="2"/>
-              <a:buChar char="Ø"/>
-            </a:pPr>
-            <a:r>
-              <a:rPr lang="ko-KR" altLang="en-US" sz="1600" dirty="0"/>
-              <a:t>일본은 오랜 기간 세계 최대 </a:t>
-            </a:r>
-            <a:r>
-              <a:rPr lang="en-US" altLang="ko-KR" sz="1600" dirty="0"/>
-              <a:t>LNG </a:t>
-            </a:r>
-            <a:r>
-              <a:rPr lang="ko-KR" altLang="en-US" sz="1600" dirty="0"/>
-              <a:t>수입국의 지위를 유지하였고</a:t>
-            </a:r>
-            <a:r>
-              <a:rPr lang="en-US" altLang="ko-KR" sz="1600" dirty="0"/>
-              <a:t>, 2011</a:t>
-            </a:r>
-            <a:r>
-              <a:rPr lang="ko-KR" altLang="en-US" sz="1600" dirty="0"/>
-              <a:t>년 후쿠시마 원전 사고 이후 원전 의존도를 대폭 축소하고</a:t>
-            </a:r>
-            <a:r>
-              <a:rPr lang="en-US" altLang="ko-KR" sz="1600" dirty="0"/>
-              <a:t>, LNG </a:t>
-            </a:r>
-            <a:r>
-              <a:rPr lang="ko-KR" altLang="en-US" sz="1600" dirty="0"/>
-              <a:t>수입을 대체 에너지원으로 급격히 확대하였다</a:t>
-            </a:r>
-            <a:r>
-              <a:rPr lang="en-US" altLang="ko-KR" sz="1600" dirty="0"/>
-              <a:t>.</a:t>
-            </a:r>
-          </a:p>
-          <a:p>
-            <a:pPr marL="1292225" lvl="2" indent="-285750">
-              <a:lnSpc>
-                <a:spcPct val="150000"/>
-              </a:lnSpc>
-              <a:buFont typeface="Wingdings" panose="05000000000000000000" pitchFamily="2" charset="2"/>
-              <a:buChar char="Ø"/>
-            </a:pPr>
-            <a:r>
-              <a:rPr lang="ko-KR" altLang="en-US" sz="1600" dirty="0"/>
-              <a:t>중국은 최근 에너지 수요 급증과 </a:t>
-            </a:r>
-            <a:r>
-              <a:rPr lang="ko-KR" altLang="en-US" sz="1600" dirty="0" err="1"/>
-              <a:t>대기질</a:t>
-            </a:r>
-            <a:r>
-              <a:rPr lang="ko-KR" altLang="en-US" sz="1600" dirty="0"/>
-              <a:t> 개선 목표에 따라 </a:t>
-            </a:r>
-            <a:r>
-              <a:rPr lang="en-US" altLang="ko-KR" sz="1600" dirty="0"/>
-              <a:t>LNG </a:t>
-            </a:r>
-            <a:r>
-              <a:rPr lang="ko-KR" altLang="en-US" sz="1600" dirty="0"/>
-              <a:t>수입을 대폭 늘려</a:t>
-            </a:r>
-            <a:r>
-              <a:rPr lang="en-US" altLang="ko-KR" sz="1600" dirty="0"/>
-              <a:t>, 2021</a:t>
-            </a:r>
-            <a:r>
-              <a:rPr lang="ko-KR" altLang="en-US" sz="1600" dirty="0"/>
-              <a:t>년 처음으로 일본을 제치고 세계 최대 </a:t>
-            </a:r>
-            <a:r>
-              <a:rPr lang="en-US" altLang="ko-KR" sz="1600" dirty="0"/>
-              <a:t>LNG </a:t>
-            </a:r>
-            <a:r>
-              <a:rPr lang="ko-KR" altLang="en-US" sz="1600" dirty="0"/>
-              <a:t>수입국이 되었다</a:t>
-            </a:r>
-            <a:r>
-              <a:rPr lang="en-US" altLang="ko-KR" sz="1600" dirty="0"/>
-              <a:t>.</a:t>
-            </a:r>
-          </a:p>
-          <a:p>
-            <a:pPr marL="1292225" lvl="2" indent="-285750">
-              <a:lnSpc>
-                <a:spcPct val="150000"/>
-              </a:lnSpc>
-              <a:buFont typeface="Wingdings" panose="05000000000000000000" pitchFamily="2" charset="2"/>
-              <a:buChar char="Ø"/>
-            </a:pPr>
-            <a:r>
-              <a:rPr lang="ko-KR" altLang="en-US" sz="1600" dirty="0"/>
-              <a:t>인도와 한국 또한 수입량을 지속적으로 확대하고 있으며</a:t>
-            </a:r>
-            <a:r>
-              <a:rPr lang="en-US" altLang="ko-KR" sz="1600" dirty="0"/>
-              <a:t>, </a:t>
-            </a:r>
-            <a:r>
-              <a:rPr lang="ko-KR" altLang="en-US" sz="1600" dirty="0"/>
-              <a:t>아시아 전체는 현재 글로벌 </a:t>
-            </a:r>
-            <a:r>
-              <a:rPr lang="en-US" altLang="ko-KR" sz="1600" dirty="0"/>
-              <a:t>LNG </a:t>
-            </a:r>
-            <a:r>
-              <a:rPr lang="ko-KR" altLang="en-US" sz="1600" dirty="0"/>
-              <a:t>수입의 약 </a:t>
-            </a:r>
-            <a:r>
-              <a:rPr lang="en-US" altLang="ko-KR" sz="1600" dirty="0"/>
-              <a:t>70%</a:t>
-            </a:r>
-            <a:r>
-              <a:rPr lang="ko-KR" altLang="en-US" sz="1600" dirty="0"/>
-              <a:t>를 차지하고 있다</a:t>
-            </a:r>
-            <a:r>
-              <a:rPr lang="en-US" altLang="ko-KR" sz="1600" dirty="0"/>
-              <a:t>.</a:t>
-            </a:r>
-          </a:p>
-        </p:txBody>
-      </p:sp>
-    </p:spTree>
-    <p:extLst>
-      <p:ext uri="{BB962C8B-B14F-4D97-AF65-F5344CB8AC3E}">
-        <p14:creationId xmlns:p14="http://schemas.microsoft.com/office/powerpoint/2010/main" val="3435324664"/>
-      </p:ext>
-    </p:extLst>
-  </p:cSld>
-  <p:clrMapOvr>
-    <a:masterClrMapping/>
-  </p:clrMapOvr>
-</p:sld>
-</file>
-
-<file path=ppt/slides/slide27.xml><?xml version="1.0" encoding="utf-8"?>
-<p:sld xmlns:a="http://schemas.openxmlformats.org/drawingml/2006/main" xmlns:r="http://schemas.openxmlformats.org/officeDocument/2006/relationships" xmlns:p="http://schemas.openxmlformats.org/presentationml/2006/main">
-  <p:cSld>
-    <p:spTree>
-      <p:nvGrpSpPr>
-        <p:cNvPr id="1" name="">
-          <a:extLst>
-            <a:ext uri="{FF2B5EF4-FFF2-40B4-BE49-F238E27FC236}">
-              <a16:creationId xmlns:a16="http://schemas.microsoft.com/office/drawing/2014/main" id="{5FA8CD1B-9FA0-D50E-9F70-DB9EB64D9260}"/>
-            </a:ext>
-          </a:extLst>
-        </p:cNvPr>
-        <p:cNvGrpSpPr/>
-        <p:nvPr/>
-      </p:nvGrpSpPr>
-      <p:grpSpPr>
-        <a:xfrm>
-          <a:off x="0" y="0"/>
-          <a:ext cx="0" cy="0"/>
-          <a:chOff x="0" y="0"/>
-          <a:chExt cx="0" cy="0"/>
-        </a:xfrm>
-      </p:grpSpPr>
-      <p:sp>
-        <p:nvSpPr>
-          <p:cNvPr id="2" name="제목 1">
-            <a:extLst>
-              <a:ext uri="{FF2B5EF4-FFF2-40B4-BE49-F238E27FC236}">
-                <a16:creationId xmlns:a16="http://schemas.microsoft.com/office/drawing/2014/main" id="{79B34FB3-EDD9-C0E4-685A-3951CEB74506}"/>
-              </a:ext>
-            </a:extLst>
-          </p:cNvPr>
-          <p:cNvSpPr>
-            <a:spLocks noGrp="1"/>
-          </p:cNvSpPr>
-          <p:nvPr>
-            <p:ph type="title"/>
-          </p:nvPr>
-        </p:nvSpPr>
-        <p:spPr/>
-        <p:txBody>
-          <a:bodyPr/>
-          <a:lstStyle/>
-          <a:p>
-            <a:r>
-              <a:rPr lang="ko-KR" altLang="en-US" dirty="0"/>
-              <a:t>천연가스 소비</a:t>
-            </a:r>
-          </a:p>
-        </p:txBody>
-      </p:sp>
-      <p:sp>
-        <p:nvSpPr>
-          <p:cNvPr id="4" name="슬라이드 번호 개체 틀 3">
-            <a:extLst>
-              <a:ext uri="{FF2B5EF4-FFF2-40B4-BE49-F238E27FC236}">
-                <a16:creationId xmlns:a16="http://schemas.microsoft.com/office/drawing/2014/main" id="{248B2577-1AF3-CD0B-486F-C29A2495E75D}"/>
-              </a:ext>
-            </a:extLst>
-          </p:cNvPr>
-          <p:cNvSpPr>
-            <a:spLocks noGrp="1"/>
-          </p:cNvSpPr>
-          <p:nvPr>
-            <p:ph type="sldNum" sz="quarter" idx="12"/>
-          </p:nvPr>
-        </p:nvSpPr>
-        <p:spPr/>
-        <p:txBody>
-          <a:bodyPr/>
-          <a:lstStyle/>
-          <a:p>
-            <a:fld id="{109C872D-39A9-4065-8BF3-6A613116E2A1}" type="slidenum">
-              <a:rPr lang="ko-KR" altLang="en-US" smtClean="0"/>
-              <a:t>27</a:t>
-            </a:fld>
-            <a:endParaRPr lang="ko-KR" altLang="en-US"/>
-          </a:p>
-        </p:txBody>
-      </p:sp>
-      <p:sp>
-        <p:nvSpPr>
-          <p:cNvPr id="3" name="TextBox 2">
-            <a:extLst>
-              <a:ext uri="{FF2B5EF4-FFF2-40B4-BE49-F238E27FC236}">
-                <a16:creationId xmlns:a16="http://schemas.microsoft.com/office/drawing/2014/main" id="{FDD62BF2-D3B7-7B98-DDD0-10A5909F39DB}"/>
-              </a:ext>
-            </a:extLst>
-          </p:cNvPr>
-          <p:cNvSpPr txBox="1"/>
-          <p:nvPr/>
-        </p:nvSpPr>
-        <p:spPr>
-          <a:xfrm>
-            <a:off x="288790" y="958844"/>
-            <a:ext cx="11118453" cy="4846007"/>
-          </a:xfrm>
-          <a:prstGeom prst="rect">
-            <a:avLst/>
-          </a:prstGeom>
-          <a:noFill/>
-        </p:spPr>
-        <p:txBody>
-          <a:bodyPr wrap="square" rtlCol="0" anchor="t">
-            <a:spAutoFit/>
-          </a:bodyPr>
-          <a:lstStyle/>
-          <a:p>
-            <a:pPr marL="835025" lvl="1" indent="-285750">
-              <a:lnSpc>
-                <a:spcPct val="150000"/>
-              </a:lnSpc>
-              <a:buFont typeface="Wingdings" panose="05000000000000000000" pitchFamily="2" charset="2"/>
-              <a:buChar char="ü"/>
-            </a:pPr>
-            <a:r>
-              <a:rPr lang="ko-KR" altLang="en-US" sz="1600" dirty="0"/>
-              <a:t>유럽 역시 </a:t>
-            </a:r>
-            <a:r>
-              <a:rPr lang="en-US" altLang="ko-KR" sz="1600" dirty="0"/>
-              <a:t>LNG </a:t>
-            </a:r>
-            <a:r>
-              <a:rPr lang="ko-KR" altLang="en-US" sz="1600" dirty="0"/>
-              <a:t>수입 시장에서 중요한 변화를 보이고 있다</a:t>
-            </a:r>
-            <a:r>
-              <a:rPr lang="en-US" altLang="ko-KR" sz="1600" dirty="0"/>
-              <a:t>.</a:t>
-            </a:r>
-          </a:p>
-          <a:p>
-            <a:pPr marL="1292225" lvl="2" indent="-285750">
-              <a:lnSpc>
-                <a:spcPct val="150000"/>
-              </a:lnSpc>
-              <a:buFont typeface="Wingdings" panose="05000000000000000000" pitchFamily="2" charset="2"/>
-              <a:buChar char="Ø"/>
-            </a:pPr>
-            <a:r>
-              <a:rPr lang="ko-KR" altLang="en-US" sz="1600" dirty="0"/>
-              <a:t>과거 유럽은 러시아산 파이프라인 가스에 대한 높은 의존도를 보여왔지만</a:t>
-            </a:r>
-            <a:r>
-              <a:rPr lang="en-US" altLang="ko-KR" sz="1600" dirty="0"/>
-              <a:t>, 2022</a:t>
-            </a:r>
-            <a:r>
-              <a:rPr lang="ko-KR" altLang="en-US" sz="1600" dirty="0"/>
-              <a:t>년 </a:t>
-            </a:r>
-            <a:r>
-              <a:rPr lang="ko-KR" altLang="en-US" sz="1600" dirty="0" err="1"/>
-              <a:t>러이사</a:t>
-            </a:r>
-            <a:r>
-              <a:rPr lang="en-US" altLang="ko-KR" sz="1600" dirty="0"/>
-              <a:t>-</a:t>
-            </a:r>
-            <a:r>
-              <a:rPr lang="ko-KR" altLang="en-US" sz="1600" dirty="0"/>
-              <a:t>우크라이나 전쟁 이후 에너지 안보에 대한 우려가 급증하여 </a:t>
-            </a:r>
-            <a:r>
-              <a:rPr lang="en-US" altLang="ko-KR" sz="1600" dirty="0"/>
-              <a:t>LNG</a:t>
-            </a:r>
-            <a:r>
-              <a:rPr lang="ko-KR" altLang="en-US" sz="1600" dirty="0"/>
-              <a:t>수입을 전략적으로 확대하는 방향으로 전환하였다</a:t>
-            </a:r>
-            <a:r>
-              <a:rPr lang="en-US" altLang="ko-KR" sz="1600" dirty="0"/>
-              <a:t>.</a:t>
-            </a:r>
-          </a:p>
-          <a:p>
-            <a:pPr marL="1292225" lvl="2" indent="-285750">
-              <a:lnSpc>
-                <a:spcPct val="150000"/>
-              </a:lnSpc>
-              <a:buFont typeface="Wingdings" panose="05000000000000000000" pitchFamily="2" charset="2"/>
-              <a:buChar char="Ø"/>
-            </a:pPr>
-            <a:r>
-              <a:rPr lang="ko-KR" altLang="en-US" sz="1600" dirty="0"/>
-              <a:t>독일</a:t>
-            </a:r>
-            <a:r>
-              <a:rPr lang="en-US" altLang="ko-KR" sz="1600" dirty="0"/>
-              <a:t>, </a:t>
-            </a:r>
-            <a:r>
-              <a:rPr lang="ko-KR" altLang="en-US" sz="1600" dirty="0"/>
-              <a:t>폴란드</a:t>
-            </a:r>
-            <a:r>
-              <a:rPr lang="en-US" altLang="ko-KR" sz="1600" dirty="0"/>
-              <a:t>, </a:t>
-            </a:r>
-            <a:r>
-              <a:rPr lang="ko-KR" altLang="en-US" sz="1600" dirty="0"/>
-              <a:t>핀란드 등은 기존에 부재하던 </a:t>
-            </a:r>
-            <a:r>
-              <a:rPr lang="en-US" altLang="ko-KR" sz="1600" dirty="0"/>
-              <a:t>LNG </a:t>
-            </a:r>
-            <a:r>
-              <a:rPr lang="ko-KR" altLang="en-US" sz="1600" dirty="0"/>
-              <a:t>터미널을 신속히 구축하거나 기존 시설을 확장하였고</a:t>
-            </a:r>
-            <a:r>
-              <a:rPr lang="en-US" altLang="ko-KR" sz="1600" dirty="0"/>
-              <a:t>, </a:t>
-            </a:r>
-            <a:r>
-              <a:rPr lang="ko-KR" altLang="en-US" sz="1600" dirty="0"/>
-              <a:t>미국 및 카타르 등으로부터 장기 수입계약 체결을 통해 공급선 다변화를 적극 추진하고 있다</a:t>
-            </a:r>
-            <a:r>
-              <a:rPr lang="en-US" altLang="ko-KR" sz="1600" dirty="0"/>
-              <a:t>.</a:t>
-            </a:r>
-          </a:p>
-          <a:p>
-            <a:pPr marL="1292225" lvl="2" indent="-285750">
-              <a:lnSpc>
-                <a:spcPct val="150000"/>
-              </a:lnSpc>
-              <a:buFont typeface="Wingdings" panose="05000000000000000000" pitchFamily="2" charset="2"/>
-              <a:buChar char="Ø"/>
-            </a:pPr>
-            <a:r>
-              <a:rPr lang="ko-KR" altLang="en-US" sz="1600" dirty="0"/>
-              <a:t>그 결과 </a:t>
-            </a:r>
-            <a:r>
-              <a:rPr lang="en-US" altLang="ko-KR" sz="1600" dirty="0"/>
-              <a:t>2022-2023</a:t>
-            </a:r>
-            <a:r>
-              <a:rPr lang="ko-KR" altLang="en-US" sz="1600" dirty="0"/>
-              <a:t>년 사이 유럽의 </a:t>
-            </a:r>
-            <a:r>
-              <a:rPr lang="en-US" altLang="ko-KR" sz="1600" dirty="0"/>
-              <a:t>LNG </a:t>
-            </a:r>
-            <a:r>
-              <a:rPr lang="ko-KR" altLang="en-US" sz="1600" dirty="0"/>
-              <a:t>수입량은 전년 대비 약 </a:t>
-            </a:r>
-            <a:r>
-              <a:rPr lang="en-US" altLang="ko-KR" sz="1600" dirty="0"/>
-              <a:t>60% </a:t>
-            </a:r>
-            <a:r>
-              <a:rPr lang="ko-KR" altLang="en-US" sz="1600" dirty="0"/>
-              <a:t>증가하였으며</a:t>
-            </a:r>
-            <a:r>
-              <a:rPr lang="en-US" altLang="ko-KR" sz="1600" dirty="0"/>
-              <a:t>, </a:t>
-            </a:r>
-            <a:r>
-              <a:rPr lang="ko-KR" altLang="en-US" sz="1600" dirty="0"/>
-              <a:t>이는 글로벌 </a:t>
-            </a:r>
-            <a:r>
-              <a:rPr lang="en-US" altLang="ko-KR" sz="1600" dirty="0"/>
-              <a:t>LNG </a:t>
-            </a:r>
-            <a:r>
-              <a:rPr lang="ko-KR" altLang="en-US" sz="1600" dirty="0"/>
-              <a:t>수급 및 가격에 상당한 파급효과를 미쳤다</a:t>
-            </a:r>
-            <a:r>
-              <a:rPr lang="en-US" altLang="ko-KR" sz="1600" dirty="0"/>
-              <a:t>.</a:t>
-            </a:r>
-          </a:p>
-          <a:p>
-            <a:pPr marL="1292225" lvl="2" indent="-285750">
-              <a:lnSpc>
-                <a:spcPct val="150000"/>
-              </a:lnSpc>
-              <a:buFont typeface="Wingdings" panose="05000000000000000000" pitchFamily="2" charset="2"/>
-              <a:buChar char="Ø"/>
-            </a:pPr>
-            <a:endParaRPr lang="en-US" altLang="ko-KR" sz="1600" dirty="0"/>
-          </a:p>
-          <a:p>
-            <a:pPr marL="377825" indent="-285750">
-              <a:lnSpc>
-                <a:spcPct val="150000"/>
-              </a:lnSpc>
-              <a:buFont typeface="Arial" panose="020B0604020202020204" pitchFamily="34" charset="0"/>
-              <a:buChar char="•"/>
-            </a:pPr>
-            <a:r>
-              <a:rPr lang="ko-KR" altLang="en-US" sz="1600" dirty="0"/>
-              <a:t>글로벌 </a:t>
-            </a:r>
-            <a:r>
-              <a:rPr lang="en-US" altLang="ko-KR" sz="1600" dirty="0"/>
-              <a:t>LNG </a:t>
-            </a:r>
-            <a:r>
-              <a:rPr lang="ko-KR" altLang="en-US" sz="1600" dirty="0"/>
-              <a:t>시장은 계약 구조 측면에서도 중요한 변화를 경험하고 있다</a:t>
-            </a:r>
-            <a:r>
-              <a:rPr lang="en-US" altLang="ko-KR" sz="1600" dirty="0"/>
-              <a:t>.</a:t>
-            </a:r>
-          </a:p>
-          <a:p>
-            <a:pPr marL="835025" lvl="1" indent="-285750">
-              <a:lnSpc>
-                <a:spcPct val="150000"/>
-              </a:lnSpc>
-              <a:buFont typeface="Wingdings" panose="05000000000000000000" pitchFamily="2" charset="2"/>
-              <a:buChar char="ü"/>
-            </a:pPr>
-            <a:r>
-              <a:rPr lang="ko-KR" altLang="en-US" sz="1600" dirty="0"/>
-              <a:t>과거에는 </a:t>
-            </a:r>
-            <a:r>
-              <a:rPr lang="en-US" altLang="ko-KR" sz="1600" dirty="0"/>
-              <a:t>20</a:t>
-            </a:r>
-            <a:r>
-              <a:rPr lang="ko-KR" altLang="en-US" sz="1600" dirty="0"/>
-              <a:t>년 이상의 장기 고정가격 계약이 시장의 표준이었으나</a:t>
-            </a:r>
-            <a:r>
-              <a:rPr lang="en-US" altLang="ko-KR" sz="1600" dirty="0"/>
-              <a:t>, </a:t>
-            </a:r>
-            <a:r>
-              <a:rPr lang="ko-KR" altLang="en-US" sz="1600" dirty="0"/>
-              <a:t>최근에는 현물 시장 및 단기 계약의 비중이 늘고 있다</a:t>
-            </a:r>
-            <a:r>
-              <a:rPr lang="en-US" altLang="ko-KR" sz="1600" dirty="0"/>
-              <a:t>.</a:t>
-            </a:r>
-          </a:p>
-          <a:p>
-            <a:pPr marL="1292225" lvl="2" indent="-285750">
-              <a:lnSpc>
-                <a:spcPct val="150000"/>
-              </a:lnSpc>
-              <a:buFont typeface="Wingdings" panose="05000000000000000000" pitchFamily="2" charset="2"/>
-              <a:buChar char="Ø"/>
-            </a:pPr>
-            <a:r>
-              <a:rPr lang="ko-KR" altLang="en-US" sz="1600" dirty="0"/>
-              <a:t>이는 수요의 변동성 증가</a:t>
-            </a:r>
-            <a:r>
-              <a:rPr lang="en-US" altLang="ko-KR" sz="1600" dirty="0"/>
-              <a:t>, </a:t>
-            </a:r>
-            <a:r>
-              <a:rPr lang="ko-KR" altLang="en-US" sz="1600" dirty="0"/>
-              <a:t>시장 가격에 대한 민감성 강화</a:t>
-            </a:r>
-            <a:r>
-              <a:rPr lang="en-US" altLang="ko-KR" sz="1600" dirty="0"/>
-              <a:t>, </a:t>
-            </a:r>
-            <a:r>
-              <a:rPr lang="ko-KR" altLang="en-US" sz="1600" dirty="0"/>
-              <a:t>공급국 간 경쟁 심화 등과 같은 요인에 기인하며</a:t>
-            </a:r>
-            <a:r>
-              <a:rPr lang="en-US" altLang="ko-KR" sz="1600" dirty="0"/>
-              <a:t>, </a:t>
-            </a:r>
-            <a:r>
-              <a:rPr lang="ko-KR" altLang="en-US" sz="1600" dirty="0"/>
-              <a:t>결과적으로 </a:t>
-            </a:r>
-            <a:r>
-              <a:rPr lang="en-US" altLang="ko-KR" sz="1600" dirty="0"/>
-              <a:t>LNG </a:t>
-            </a:r>
-            <a:r>
-              <a:rPr lang="ko-KR" altLang="en-US" sz="1600" dirty="0"/>
-              <a:t>거래의 유연성과 시장 반응성을 높이는 방향으로 시장이 진화하고 있음을 의미한다</a:t>
-            </a:r>
-            <a:r>
-              <a:rPr lang="en-US" altLang="ko-KR" sz="1600" dirty="0"/>
-              <a:t>.</a:t>
-            </a:r>
-          </a:p>
-        </p:txBody>
-      </p:sp>
-    </p:spTree>
-    <p:extLst>
-      <p:ext uri="{BB962C8B-B14F-4D97-AF65-F5344CB8AC3E}">
-        <p14:creationId xmlns:p14="http://schemas.microsoft.com/office/powerpoint/2010/main" val="3139826916"/>
-      </p:ext>
-    </p:extLst>
-  </p:cSld>
-  <p:clrMapOvr>
-    <a:masterClrMapping/>
-  </p:clrMapOvr>
-</p:sld>
-</file>
-
-<file path=ppt/slides/slide28.xml><?xml version="1.0" encoding="utf-8"?>
-<p:sld xmlns:a="http://schemas.openxmlformats.org/drawingml/2006/main" xmlns:r="http://schemas.openxmlformats.org/officeDocument/2006/relationships" xmlns:p="http://schemas.openxmlformats.org/presentationml/2006/main">
-  <p:cSld>
-    <p:spTree>
-      <p:nvGrpSpPr>
-        <p:cNvPr id="1" name="">
-          <a:extLst>
-            <a:ext uri="{FF2B5EF4-FFF2-40B4-BE49-F238E27FC236}">
-              <a16:creationId xmlns:a16="http://schemas.microsoft.com/office/drawing/2014/main" id="{04C58AE2-422F-6289-068D-E8103D8736E1}"/>
-            </a:ext>
-          </a:extLst>
-        </p:cNvPr>
-        <p:cNvGrpSpPr/>
-        <p:nvPr/>
-      </p:nvGrpSpPr>
-      <p:grpSpPr>
-        <a:xfrm>
-          <a:off x="0" y="0"/>
-          <a:ext cx="0" cy="0"/>
-          <a:chOff x="0" y="0"/>
-          <a:chExt cx="0" cy="0"/>
-        </a:xfrm>
-      </p:grpSpPr>
-      <p:sp>
-        <p:nvSpPr>
-          <p:cNvPr id="2" name="제목 1">
-            <a:extLst>
-              <a:ext uri="{FF2B5EF4-FFF2-40B4-BE49-F238E27FC236}">
-                <a16:creationId xmlns:a16="http://schemas.microsoft.com/office/drawing/2014/main" id="{3124D0AD-4F6D-3A3C-06AC-C3F166CC0A22}"/>
-              </a:ext>
-            </a:extLst>
-          </p:cNvPr>
-          <p:cNvSpPr>
-            <a:spLocks noGrp="1"/>
-          </p:cNvSpPr>
-          <p:nvPr>
-            <p:ph type="title"/>
-          </p:nvPr>
-        </p:nvSpPr>
-        <p:spPr/>
-        <p:txBody>
-          <a:bodyPr/>
-          <a:lstStyle/>
-          <a:p>
-            <a:r>
-              <a:rPr lang="ko-KR" altLang="en-US" dirty="0"/>
-              <a:t>천연가스 소비</a:t>
-            </a:r>
-          </a:p>
-        </p:txBody>
-      </p:sp>
-      <p:sp>
-        <p:nvSpPr>
-          <p:cNvPr id="4" name="슬라이드 번호 개체 틀 3">
-            <a:extLst>
-              <a:ext uri="{FF2B5EF4-FFF2-40B4-BE49-F238E27FC236}">
-                <a16:creationId xmlns:a16="http://schemas.microsoft.com/office/drawing/2014/main" id="{0701E83C-7DFA-2013-71AA-569E4F430E89}"/>
-              </a:ext>
-            </a:extLst>
-          </p:cNvPr>
-          <p:cNvSpPr>
-            <a:spLocks noGrp="1"/>
-          </p:cNvSpPr>
-          <p:nvPr>
-            <p:ph type="sldNum" sz="quarter" idx="12"/>
-          </p:nvPr>
-        </p:nvSpPr>
-        <p:spPr/>
-        <p:txBody>
-          <a:bodyPr/>
-          <a:lstStyle/>
-          <a:p>
-            <a:fld id="{109C872D-39A9-4065-8BF3-6A613116E2A1}" type="slidenum">
-              <a:rPr lang="ko-KR" altLang="en-US" smtClean="0"/>
-              <a:t>28</a:t>
-            </a:fld>
-            <a:endParaRPr lang="ko-KR" altLang="en-US"/>
-          </a:p>
-        </p:txBody>
-      </p:sp>
-      <p:sp>
-        <p:nvSpPr>
-          <p:cNvPr id="3" name="TextBox 2">
-            <a:extLst>
-              <a:ext uri="{FF2B5EF4-FFF2-40B4-BE49-F238E27FC236}">
-                <a16:creationId xmlns:a16="http://schemas.microsoft.com/office/drawing/2014/main" id="{1C3193F3-D9D8-8D01-FFC2-86AF9E53B9A1}"/>
-              </a:ext>
-            </a:extLst>
-          </p:cNvPr>
-          <p:cNvSpPr txBox="1"/>
-          <p:nvPr/>
-        </p:nvSpPr>
-        <p:spPr>
-          <a:xfrm>
-            <a:off x="288790" y="958844"/>
-            <a:ext cx="11118453" cy="2260683"/>
-          </a:xfrm>
-          <a:prstGeom prst="rect">
-            <a:avLst/>
-          </a:prstGeom>
-          <a:noFill/>
-        </p:spPr>
-        <p:txBody>
-          <a:bodyPr wrap="square" rtlCol="0" anchor="t">
-            <a:spAutoFit/>
-          </a:bodyPr>
-          <a:lstStyle/>
-          <a:p>
-            <a:pPr marL="377825" indent="-285750">
-              <a:lnSpc>
-                <a:spcPct val="150000"/>
-              </a:lnSpc>
-              <a:buFont typeface="Arial" panose="020B0604020202020204" pitchFamily="34" charset="0"/>
-              <a:buChar char="•"/>
-            </a:pPr>
-            <a:r>
-              <a:rPr lang="ko-KR" altLang="en-US" sz="1600" dirty="0"/>
-              <a:t>한편</a:t>
-            </a:r>
-            <a:r>
-              <a:rPr lang="en-US" altLang="ko-KR" sz="1600" dirty="0"/>
-              <a:t>, LNG </a:t>
-            </a:r>
-            <a:r>
-              <a:rPr lang="ko-KR" altLang="en-US" sz="1600" dirty="0"/>
-              <a:t>수입 확대는 인프라 구축과 밀접하게 연계되어 있으며</a:t>
-            </a:r>
-            <a:r>
-              <a:rPr lang="en-US" altLang="ko-KR" sz="1600" dirty="0"/>
-              <a:t>, </a:t>
-            </a:r>
-            <a:r>
-              <a:rPr lang="ko-KR" altLang="en-US" sz="1600" dirty="0"/>
-              <a:t>이에 따라 수입국의 정책적 의지</a:t>
-            </a:r>
-            <a:r>
-              <a:rPr lang="en-US" altLang="ko-KR" sz="1600" dirty="0"/>
-              <a:t>, </a:t>
-            </a:r>
-            <a:r>
-              <a:rPr lang="ko-KR" altLang="en-US" sz="1600" dirty="0"/>
-              <a:t>제도적 환경</a:t>
-            </a:r>
-            <a:r>
-              <a:rPr lang="en-US" altLang="ko-KR" sz="1600" dirty="0"/>
-              <a:t>, </a:t>
-            </a:r>
-            <a:r>
-              <a:rPr lang="ko-KR" altLang="en-US" sz="1600" dirty="0"/>
-              <a:t>기술 역량 등에 따라 확대 속도와 범위에 상당한 차이가 나타나고 있다</a:t>
-            </a:r>
-            <a:r>
-              <a:rPr lang="en-US" altLang="ko-KR" sz="1600" dirty="0"/>
-              <a:t>.</a:t>
-            </a:r>
-          </a:p>
-          <a:p>
-            <a:pPr marL="835025" lvl="1" indent="-285750">
-              <a:lnSpc>
-                <a:spcPct val="150000"/>
-              </a:lnSpc>
-              <a:buFont typeface="Wingdings" panose="05000000000000000000" pitchFamily="2" charset="2"/>
-              <a:buChar char="ü"/>
-            </a:pPr>
-            <a:r>
-              <a:rPr lang="ko-KR" altLang="en-US" sz="1600" dirty="0"/>
-              <a:t>아시아 및 유럽의 선진국들은 재기화터미널</a:t>
-            </a:r>
-            <a:r>
-              <a:rPr lang="en-US" altLang="ko-KR" sz="1600" dirty="0"/>
-              <a:t>, </a:t>
-            </a:r>
-            <a:r>
-              <a:rPr lang="ko-KR" altLang="en-US" sz="1600" dirty="0"/>
-              <a:t>저장 설비</a:t>
-            </a:r>
-            <a:r>
-              <a:rPr lang="en-US" altLang="ko-KR" sz="1600" dirty="0"/>
-              <a:t>, </a:t>
-            </a:r>
-            <a:r>
-              <a:rPr lang="ko-KR" altLang="en-US" sz="1600" dirty="0"/>
-              <a:t>전용 운반선 확보 등에서 상대적 우위에 있다</a:t>
-            </a:r>
-            <a:r>
-              <a:rPr lang="en-US" altLang="ko-KR" sz="1600" dirty="0"/>
-              <a:t>.</a:t>
-            </a:r>
-          </a:p>
-          <a:p>
-            <a:pPr marL="835025" lvl="1" indent="-285750">
-              <a:lnSpc>
-                <a:spcPct val="150000"/>
-              </a:lnSpc>
-              <a:buFont typeface="Wingdings" panose="05000000000000000000" pitchFamily="2" charset="2"/>
-              <a:buChar char="ü"/>
-            </a:pPr>
-            <a:r>
-              <a:rPr lang="ko-KR" altLang="en-US" sz="1600" dirty="0"/>
-              <a:t>한편 일부 개발도상국은 재정적</a:t>
-            </a:r>
-            <a:r>
-              <a:rPr lang="en-US" altLang="ko-KR" sz="1600" dirty="0"/>
-              <a:t>·</a:t>
-            </a:r>
-            <a:r>
-              <a:rPr lang="ko-KR" altLang="en-US" sz="1600" dirty="0"/>
-              <a:t>기술적 제약으로 인해 </a:t>
-            </a:r>
-            <a:r>
-              <a:rPr lang="en-US" altLang="ko-KR" sz="1600" dirty="0"/>
-              <a:t>LNG </a:t>
-            </a:r>
-            <a:r>
-              <a:rPr lang="ko-KR" altLang="en-US" sz="1600" dirty="0"/>
-              <a:t>수입 확대에 구조적 어려움을 겪고 있다</a:t>
-            </a:r>
-            <a:r>
-              <a:rPr lang="en-US" altLang="ko-KR" sz="1600" dirty="0"/>
-              <a:t>.</a:t>
-            </a:r>
-          </a:p>
-          <a:p>
-            <a:pPr marL="1292225" lvl="2" indent="-285750">
-              <a:lnSpc>
-                <a:spcPct val="150000"/>
-              </a:lnSpc>
-              <a:buFont typeface="Wingdings" panose="05000000000000000000" pitchFamily="2" charset="2"/>
-              <a:buChar char="Ø"/>
-            </a:pPr>
-            <a:r>
-              <a:rPr lang="ko-KR" altLang="en-US" sz="1600" dirty="0"/>
-              <a:t>이러한 한계를 극복하기 위한 대안이 </a:t>
-            </a:r>
-            <a:r>
-              <a:rPr lang="ko-KR" altLang="en-US" sz="1600" dirty="0" err="1"/>
-              <a:t>부유식</a:t>
-            </a:r>
-            <a:r>
-              <a:rPr lang="ko-KR" altLang="en-US" sz="1600" dirty="0"/>
-              <a:t> 저장 및 재기화 설비 이며</a:t>
-            </a:r>
-            <a:r>
-              <a:rPr lang="en-US" altLang="ko-KR" sz="1600" dirty="0"/>
-              <a:t>, </a:t>
-            </a:r>
-            <a:r>
-              <a:rPr lang="ko-KR" altLang="en-US" sz="1600" dirty="0"/>
-              <a:t>이는 초기 투자비용을 절감하고</a:t>
-            </a:r>
-            <a:r>
-              <a:rPr lang="en-US" altLang="ko-KR" sz="1600" dirty="0"/>
-              <a:t>, </a:t>
-            </a:r>
-            <a:r>
-              <a:rPr lang="ko-KR" altLang="en-US" sz="1600" dirty="0"/>
-              <a:t>신속한 배치가 가능하다는 점에서 신흥국 시장에서 광범위하게 채택되고 있다</a:t>
-            </a:r>
-            <a:r>
-              <a:rPr lang="en-US" altLang="ko-KR" sz="1600" dirty="0"/>
-              <a:t>.</a:t>
-            </a:r>
-          </a:p>
-        </p:txBody>
-      </p:sp>
-      <p:pic>
-        <p:nvPicPr>
-          <p:cNvPr id="5" name="그림 4">
-            <a:extLst>
-              <a:ext uri="{FF2B5EF4-FFF2-40B4-BE49-F238E27FC236}">
-                <a16:creationId xmlns:a16="http://schemas.microsoft.com/office/drawing/2014/main" id="{3736BE1C-4ED8-BE9F-1913-1F5FCA0FA896}"/>
-              </a:ext>
-            </a:extLst>
-          </p:cNvPr>
-          <p:cNvPicPr>
-            <a:picLocks noChangeAspect="1"/>
-          </p:cNvPicPr>
-          <p:nvPr/>
-        </p:nvPicPr>
-        <p:blipFill rotWithShape="1">
-          <a:blip r:embed="rId2"/>
-          <a:srcRect r="5292"/>
-          <a:stretch>
-            <a:fillRect/>
-          </a:stretch>
-        </p:blipFill>
-        <p:spPr>
-          <a:xfrm>
-            <a:off x="6348255" y="3645192"/>
-            <a:ext cx="5554955" cy="2891715"/>
-          </a:xfrm>
-          <a:prstGeom prst="rect">
-            <a:avLst/>
-          </a:prstGeom>
-        </p:spPr>
-      </p:pic>
-      <p:sp>
-        <p:nvSpPr>
-          <p:cNvPr id="6" name="TextBox 5">
-            <a:extLst>
-              <a:ext uri="{FF2B5EF4-FFF2-40B4-BE49-F238E27FC236}">
-                <a16:creationId xmlns:a16="http://schemas.microsoft.com/office/drawing/2014/main" id="{BFBB1B0C-7D04-3FAA-B7B2-C7F3F0B7BD7D}"/>
-              </a:ext>
-            </a:extLst>
-          </p:cNvPr>
-          <p:cNvSpPr txBox="1"/>
-          <p:nvPr/>
-        </p:nvSpPr>
-        <p:spPr>
-          <a:xfrm>
-            <a:off x="7512785" y="3570199"/>
-            <a:ext cx="3225894" cy="253916"/>
-          </a:xfrm>
-          <a:prstGeom prst="rect">
-            <a:avLst/>
-          </a:prstGeom>
-          <a:noFill/>
-        </p:spPr>
-        <p:txBody>
-          <a:bodyPr wrap="square">
-            <a:spAutoFit/>
-          </a:bodyPr>
-          <a:lstStyle/>
-          <a:p>
-            <a:pPr algn="ctr"/>
-            <a:r>
-              <a:rPr lang="en-US" altLang="ko-KR" sz="1050" spc="-50" dirty="0"/>
-              <a:t>&lt; </a:t>
-            </a:r>
-            <a:r>
-              <a:rPr lang="ko-KR" altLang="en-US" sz="1050" spc="-50" dirty="0"/>
-              <a:t>주요 국가의 천연가스 수입량  </a:t>
-            </a:r>
-            <a:r>
-              <a:rPr lang="en-US" altLang="ko-KR" sz="1050" spc="-50" dirty="0"/>
-              <a:t>(10</a:t>
-            </a:r>
-            <a:r>
-              <a:rPr lang="ko-KR" altLang="en-US" sz="1050" spc="-50" dirty="0"/>
-              <a:t>억 </a:t>
-            </a:r>
-            <a:r>
-              <a:rPr lang="ko-KR" altLang="en-US" sz="1050" spc="-50" dirty="0" err="1"/>
-              <a:t>입방미터</a:t>
-            </a:r>
-            <a:r>
-              <a:rPr lang="en-US" altLang="ko-KR" sz="1050" spc="-50" dirty="0"/>
-              <a:t>) &gt;</a:t>
-            </a:r>
-            <a:endParaRPr lang="ko-KR" altLang="en-US" sz="1050" dirty="0"/>
-          </a:p>
-        </p:txBody>
-      </p:sp>
-      <p:sp>
-        <p:nvSpPr>
-          <p:cNvPr id="8" name="TextBox 7">
-            <a:extLst>
-              <a:ext uri="{FF2B5EF4-FFF2-40B4-BE49-F238E27FC236}">
-                <a16:creationId xmlns:a16="http://schemas.microsoft.com/office/drawing/2014/main" id="{F1F33EDC-027D-1970-6B61-0B9CA05B79C2}"/>
-              </a:ext>
-            </a:extLst>
-          </p:cNvPr>
-          <p:cNvSpPr txBox="1"/>
-          <p:nvPr/>
-        </p:nvSpPr>
-        <p:spPr>
-          <a:xfrm>
-            <a:off x="288791" y="3334360"/>
-            <a:ext cx="6165018" cy="2260683"/>
-          </a:xfrm>
-          <a:prstGeom prst="rect">
-            <a:avLst/>
-          </a:prstGeom>
-          <a:noFill/>
-        </p:spPr>
-        <p:txBody>
-          <a:bodyPr wrap="square" rtlCol="0" anchor="t">
-            <a:spAutoFit/>
-          </a:bodyPr>
-          <a:lstStyle/>
-          <a:p>
-            <a:pPr marL="377825" indent="-285750">
-              <a:lnSpc>
-                <a:spcPct val="150000"/>
-              </a:lnSpc>
-              <a:buFont typeface="Arial" panose="020B0604020202020204" pitchFamily="34" charset="0"/>
-              <a:buChar char="•"/>
-            </a:pPr>
-            <a:r>
-              <a:rPr lang="ko-KR" altLang="en-US" sz="1600" dirty="0"/>
-              <a:t>오른쪽 그래프에서 보듯이 </a:t>
-            </a:r>
-            <a:r>
-              <a:rPr lang="en-US" altLang="ko-KR" sz="1600" dirty="0"/>
-              <a:t>LNG</a:t>
-            </a:r>
-            <a:r>
-              <a:rPr lang="ko-KR" altLang="en-US" sz="1600" dirty="0"/>
-              <a:t> 주요 수입국은 중국</a:t>
-            </a:r>
-            <a:r>
-              <a:rPr lang="en-US" altLang="ko-KR" sz="1600" dirty="0"/>
-              <a:t>, </a:t>
-            </a:r>
-            <a:r>
-              <a:rPr lang="ko-KR" altLang="en-US" sz="1600" dirty="0"/>
-              <a:t>인도</a:t>
-            </a:r>
-            <a:r>
-              <a:rPr lang="en-US" altLang="ko-KR" sz="1600" dirty="0"/>
-              <a:t>, </a:t>
-            </a:r>
-            <a:r>
-              <a:rPr lang="ko-KR" altLang="en-US" sz="1600" dirty="0"/>
-              <a:t>일본</a:t>
-            </a:r>
-            <a:r>
-              <a:rPr lang="en-US" altLang="ko-KR" sz="1600" dirty="0"/>
-              <a:t>, </a:t>
-            </a:r>
-            <a:r>
-              <a:rPr lang="ko-KR" altLang="en-US" sz="1600" dirty="0"/>
-              <a:t>한국</a:t>
-            </a:r>
-            <a:r>
-              <a:rPr lang="en-US" altLang="ko-KR" sz="1600" dirty="0"/>
-              <a:t>, </a:t>
-            </a:r>
-            <a:r>
-              <a:rPr lang="ko-KR" altLang="en-US" sz="1600" dirty="0"/>
-              <a:t>프랑스</a:t>
-            </a:r>
-            <a:r>
-              <a:rPr lang="en-US" altLang="ko-KR" sz="1600" dirty="0"/>
-              <a:t>, </a:t>
-            </a:r>
-            <a:r>
-              <a:rPr lang="ko-KR" altLang="en-US" sz="1600" dirty="0"/>
-              <a:t>대만 등이다</a:t>
-            </a:r>
-            <a:r>
-              <a:rPr lang="en-US" altLang="ko-KR" sz="1600" dirty="0"/>
-              <a:t>.</a:t>
-            </a:r>
-          </a:p>
-          <a:p>
-            <a:pPr marL="835025" lvl="1" indent="-285750">
-              <a:lnSpc>
-                <a:spcPct val="150000"/>
-              </a:lnSpc>
-              <a:buFont typeface="Wingdings" panose="05000000000000000000" pitchFamily="2" charset="2"/>
-              <a:buChar char="ü"/>
-            </a:pPr>
-            <a:r>
-              <a:rPr lang="en-US" altLang="ko-KR" sz="1600" dirty="0"/>
-              <a:t>2013-2023</a:t>
-            </a:r>
-            <a:r>
-              <a:rPr lang="ko-KR" altLang="en-US" sz="1600" dirty="0"/>
-              <a:t>년 기간동안 중국</a:t>
-            </a:r>
-            <a:r>
-              <a:rPr lang="en-US" altLang="ko-KR" sz="1600" dirty="0"/>
-              <a:t>, </a:t>
-            </a:r>
-            <a:r>
-              <a:rPr lang="ko-KR" altLang="en-US" sz="1600" dirty="0"/>
-              <a:t>한국</a:t>
-            </a:r>
-            <a:r>
-              <a:rPr lang="en-US" altLang="ko-KR" sz="1600" dirty="0"/>
-              <a:t>, </a:t>
-            </a:r>
-            <a:r>
-              <a:rPr lang="ko-KR" altLang="en-US" sz="1600" dirty="0"/>
-              <a:t>인도를 중심으로 증가하고 있다</a:t>
-            </a:r>
-            <a:r>
-              <a:rPr lang="en-US" altLang="ko-KR" sz="1600" dirty="0"/>
-              <a:t>.</a:t>
-            </a:r>
-          </a:p>
-          <a:p>
-            <a:pPr marL="1349375" lvl="2" indent="-342900">
-              <a:lnSpc>
-                <a:spcPct val="150000"/>
-              </a:lnSpc>
-              <a:buFont typeface="Wingdings" panose="05000000000000000000" pitchFamily="2" charset="2"/>
-              <a:buChar char="Ø"/>
-            </a:pPr>
-            <a:r>
-              <a:rPr lang="ko-KR" altLang="en-US" sz="1600" dirty="0"/>
-              <a:t>특히 중국은 동 기간에 수입량이 </a:t>
-            </a:r>
-            <a:r>
-              <a:rPr lang="en-US" altLang="ko-KR" sz="1600" dirty="0"/>
-              <a:t>25.2</a:t>
-            </a:r>
-            <a:r>
-              <a:rPr lang="ko-KR" altLang="en-US" sz="1600" dirty="0"/>
-              <a:t>에서 </a:t>
-            </a:r>
-            <a:r>
-              <a:rPr lang="en-US" altLang="ko-KR" sz="1600" dirty="0"/>
-              <a:t>97.8</a:t>
-            </a:r>
-            <a:r>
-              <a:rPr lang="ko-KR" altLang="en-US" sz="1600" dirty="0"/>
-              <a:t>로 증가하였으며</a:t>
-            </a:r>
-            <a:r>
-              <a:rPr lang="en-US" altLang="ko-KR" sz="1600" dirty="0"/>
-              <a:t>, </a:t>
-            </a:r>
-            <a:r>
-              <a:rPr lang="ko-KR" altLang="en-US" sz="1600" dirty="0"/>
-              <a:t>연평균 </a:t>
-            </a:r>
-            <a:r>
-              <a:rPr lang="en-US" altLang="ko-KR" sz="1600" dirty="0"/>
-              <a:t>14.6% </a:t>
-            </a:r>
-            <a:r>
-              <a:rPr lang="ko-KR" altLang="en-US" sz="1600" dirty="0"/>
-              <a:t>증가세를 보였다</a:t>
-            </a:r>
-            <a:r>
-              <a:rPr lang="en-US" altLang="ko-KR" sz="1600" dirty="0"/>
-              <a:t>.</a:t>
-            </a:r>
-          </a:p>
-        </p:txBody>
-      </p:sp>
-    </p:spTree>
-    <p:extLst>
-      <p:ext uri="{BB962C8B-B14F-4D97-AF65-F5344CB8AC3E}">
-        <p14:creationId xmlns:p14="http://schemas.microsoft.com/office/powerpoint/2010/main" val="2430887983"/>
-      </p:ext>
-    </p:extLst>
-  </p:cSld>
-  <p:clrMapOvr>
-    <a:masterClrMapping/>
-  </p:clrMapOvr>
-</p:sld>
-</file>
-
-<file path=ppt/slides/slide29.xml><?xml version="1.0" encoding="utf-8"?>
-<p:sld xmlns:a="http://schemas.openxmlformats.org/drawingml/2006/main" xmlns:r="http://schemas.openxmlformats.org/officeDocument/2006/relationships" xmlns:p="http://schemas.openxmlformats.org/presentationml/2006/main">
-  <p:cSld>
-    <p:spTree>
-      <p:nvGrpSpPr>
-        <p:cNvPr id="1" name="">
-          <a:extLst>
-            <a:ext uri="{FF2B5EF4-FFF2-40B4-BE49-F238E27FC236}">
-              <a16:creationId xmlns:a16="http://schemas.microsoft.com/office/drawing/2014/main" id="{69943A93-811A-7438-46BE-889A474EA297}"/>
-            </a:ext>
-          </a:extLst>
-        </p:cNvPr>
-        <p:cNvGrpSpPr/>
-        <p:nvPr/>
-      </p:nvGrpSpPr>
-      <p:grpSpPr>
-        <a:xfrm>
-          <a:off x="0" y="0"/>
-          <a:ext cx="0" cy="0"/>
-          <a:chOff x="0" y="0"/>
-          <a:chExt cx="0" cy="0"/>
-        </a:xfrm>
-      </p:grpSpPr>
-      <p:sp>
-        <p:nvSpPr>
-          <p:cNvPr id="2" name="제목 1">
-            <a:extLst>
-              <a:ext uri="{FF2B5EF4-FFF2-40B4-BE49-F238E27FC236}">
-                <a16:creationId xmlns:a16="http://schemas.microsoft.com/office/drawing/2014/main" id="{EE37FFF7-50F9-EC5D-F629-AAA85F8C74A3}"/>
-              </a:ext>
-            </a:extLst>
-          </p:cNvPr>
-          <p:cNvSpPr>
-            <a:spLocks noGrp="1"/>
-          </p:cNvSpPr>
-          <p:nvPr>
-            <p:ph type="title"/>
-          </p:nvPr>
-        </p:nvSpPr>
-        <p:spPr/>
-        <p:txBody>
-          <a:bodyPr/>
-          <a:lstStyle/>
-          <a:p>
-            <a:r>
-              <a:rPr lang="ko-KR" altLang="en-US" dirty="0"/>
-              <a:t>천연가스 소비</a:t>
-            </a:r>
-          </a:p>
-        </p:txBody>
-      </p:sp>
-      <p:sp>
-        <p:nvSpPr>
-          <p:cNvPr id="4" name="슬라이드 번호 개체 틀 3">
-            <a:extLst>
-              <a:ext uri="{FF2B5EF4-FFF2-40B4-BE49-F238E27FC236}">
-                <a16:creationId xmlns:a16="http://schemas.microsoft.com/office/drawing/2014/main" id="{FB27DCB1-B9DA-147E-0B55-B74914C0954A}"/>
-              </a:ext>
-            </a:extLst>
-          </p:cNvPr>
-          <p:cNvSpPr>
-            <a:spLocks noGrp="1"/>
-          </p:cNvSpPr>
-          <p:nvPr>
-            <p:ph type="sldNum" sz="quarter" idx="12"/>
-          </p:nvPr>
-        </p:nvSpPr>
-        <p:spPr/>
-        <p:txBody>
-          <a:bodyPr/>
-          <a:lstStyle/>
-          <a:p>
-            <a:fld id="{109C872D-39A9-4065-8BF3-6A613116E2A1}" type="slidenum">
-              <a:rPr lang="ko-KR" altLang="en-US" smtClean="0"/>
-              <a:t>29</a:t>
-            </a:fld>
-            <a:endParaRPr lang="ko-KR" altLang="en-US"/>
-          </a:p>
-        </p:txBody>
-      </p:sp>
-      <p:sp>
-        <p:nvSpPr>
-          <p:cNvPr id="3" name="TextBox 2">
-            <a:extLst>
-              <a:ext uri="{FF2B5EF4-FFF2-40B4-BE49-F238E27FC236}">
-                <a16:creationId xmlns:a16="http://schemas.microsoft.com/office/drawing/2014/main" id="{94017E8F-A809-1BFB-9CD5-F388D10C5549}"/>
-              </a:ext>
-            </a:extLst>
-          </p:cNvPr>
-          <p:cNvSpPr txBox="1"/>
-          <p:nvPr/>
-        </p:nvSpPr>
-        <p:spPr>
-          <a:xfrm>
-            <a:off x="288790" y="958844"/>
-            <a:ext cx="11118453" cy="4476675"/>
-          </a:xfrm>
-          <a:prstGeom prst="rect">
-            <a:avLst/>
-          </a:prstGeom>
-          <a:noFill/>
-        </p:spPr>
-        <p:txBody>
-          <a:bodyPr wrap="square" rtlCol="0" anchor="t">
-            <a:spAutoFit/>
-          </a:bodyPr>
-          <a:lstStyle/>
-          <a:p>
-            <a:pPr marL="377825" indent="-285750">
-              <a:lnSpc>
-                <a:spcPct val="150000"/>
-              </a:lnSpc>
-              <a:buFont typeface="Arial" panose="020B0604020202020204" pitchFamily="34" charset="0"/>
-              <a:buChar char="•"/>
-            </a:pPr>
-            <a:r>
-              <a:rPr lang="ko-KR" altLang="en-US" sz="1600" dirty="0"/>
-              <a:t>글로벌 </a:t>
-            </a:r>
-            <a:r>
-              <a:rPr lang="en-US" altLang="ko-KR" sz="1600" dirty="0"/>
-              <a:t>LNG </a:t>
-            </a:r>
-            <a:r>
-              <a:rPr lang="ko-KR" altLang="en-US" sz="1600" dirty="0"/>
-              <a:t>수출 시장은 과거 몇몇 중동 및 동남아시아 국가에 집중되어 있었으나</a:t>
-            </a:r>
-            <a:r>
-              <a:rPr lang="en-US" altLang="ko-KR" sz="1600" dirty="0"/>
-              <a:t>, </a:t>
-            </a:r>
-            <a:r>
-              <a:rPr lang="ko-KR" altLang="en-US" sz="1600" dirty="0"/>
-              <a:t>최근 수십년간 기술 혁신과 투자 확대를 통해 공급국의 지리적 다양성이 확대되고 있다</a:t>
-            </a:r>
-            <a:r>
-              <a:rPr lang="en-US" altLang="ko-KR" sz="1600" dirty="0"/>
-              <a:t>.</a:t>
-            </a:r>
-          </a:p>
-          <a:p>
-            <a:pPr marL="835025" lvl="1" indent="-285750">
-              <a:lnSpc>
-                <a:spcPct val="150000"/>
-              </a:lnSpc>
-              <a:buFont typeface="Wingdings" panose="05000000000000000000" pitchFamily="2" charset="2"/>
-              <a:buChar char="ü"/>
-            </a:pPr>
-            <a:r>
-              <a:rPr lang="ko-KR" altLang="en-US" sz="1600" dirty="0"/>
-              <a:t>전통적으로 카타르</a:t>
-            </a:r>
-            <a:r>
-              <a:rPr lang="en-US" altLang="ko-KR" sz="1600" dirty="0"/>
-              <a:t>, </a:t>
-            </a:r>
-            <a:r>
-              <a:rPr lang="ko-KR" altLang="en-US" sz="1600" dirty="0"/>
-              <a:t>말레이시아</a:t>
-            </a:r>
-            <a:r>
-              <a:rPr lang="en-US" altLang="ko-KR" sz="1600" dirty="0"/>
-              <a:t>, </a:t>
-            </a:r>
-            <a:r>
-              <a:rPr lang="ko-KR" altLang="en-US" sz="1600" dirty="0"/>
-              <a:t>인도네시아 등은 세계 </a:t>
-            </a:r>
-            <a:r>
-              <a:rPr lang="en-US" altLang="ko-KR" sz="1600" dirty="0"/>
-              <a:t>LNG </a:t>
-            </a:r>
-            <a:r>
-              <a:rPr lang="ko-KR" altLang="en-US" sz="1600" dirty="0"/>
-              <a:t>수출량의 대부분을 차지해왔다</a:t>
-            </a:r>
-            <a:r>
-              <a:rPr lang="en-US" altLang="ko-KR" sz="1600" dirty="0"/>
-              <a:t>.</a:t>
-            </a:r>
-          </a:p>
-          <a:p>
-            <a:pPr marL="835025" lvl="1" indent="-285750">
-              <a:lnSpc>
-                <a:spcPct val="150000"/>
-              </a:lnSpc>
-              <a:buFont typeface="Wingdings" panose="05000000000000000000" pitchFamily="2" charset="2"/>
-              <a:buChar char="ü"/>
-            </a:pPr>
-            <a:r>
-              <a:rPr lang="ko-KR" altLang="en-US" sz="1600" dirty="0"/>
-              <a:t>최근에는 미국과 호주가 주요 수출국으로 급부상하면서 글로벌 수출 구조에 큰 변화를 가져왔다</a:t>
-            </a:r>
-            <a:r>
-              <a:rPr lang="en-US" altLang="ko-KR" sz="1600" dirty="0"/>
-              <a:t>.</a:t>
-            </a:r>
-          </a:p>
-          <a:p>
-            <a:pPr marL="1292225" lvl="2" indent="-285750">
-              <a:lnSpc>
-                <a:spcPct val="150000"/>
-              </a:lnSpc>
-              <a:buFont typeface="Wingdings" panose="05000000000000000000" pitchFamily="2" charset="2"/>
-              <a:buChar char="Ø"/>
-            </a:pPr>
-            <a:r>
-              <a:rPr lang="ko-KR" altLang="en-US" sz="1600" dirty="0"/>
-              <a:t>미국은 </a:t>
-            </a:r>
-            <a:r>
-              <a:rPr lang="ko-KR" altLang="en-US" sz="1600" dirty="0" err="1"/>
-              <a:t>셰일가스</a:t>
-            </a:r>
-            <a:r>
-              <a:rPr lang="ko-KR" altLang="en-US" sz="1600" dirty="0"/>
-              <a:t> 생산량의 급증과 함께 사빈패스</a:t>
-            </a:r>
-            <a:r>
-              <a:rPr lang="en-US" altLang="ko-KR" sz="1600" dirty="0"/>
-              <a:t>, </a:t>
-            </a:r>
-            <a:r>
-              <a:rPr lang="ko-KR" altLang="en-US" sz="1600" dirty="0"/>
-              <a:t>캐머런</a:t>
-            </a:r>
-            <a:r>
-              <a:rPr lang="en-US" altLang="ko-KR" sz="1600" dirty="0"/>
-              <a:t>, </a:t>
-            </a:r>
-            <a:r>
-              <a:rPr lang="ko-KR" altLang="en-US" sz="1600" dirty="0" err="1"/>
-              <a:t>프리포트</a:t>
-            </a:r>
-            <a:r>
-              <a:rPr lang="ko-KR" altLang="en-US" sz="1600" dirty="0"/>
-              <a:t> </a:t>
-            </a:r>
-            <a:r>
-              <a:rPr lang="en-US" altLang="ko-KR" sz="1600" dirty="0"/>
-              <a:t>(</a:t>
-            </a:r>
-            <a:r>
-              <a:rPr lang="ko-KR" altLang="en-US" sz="1600" dirty="0"/>
-              <a:t>미국 지명</a:t>
-            </a:r>
-            <a:r>
-              <a:rPr lang="en-US" altLang="ko-KR" sz="1600" dirty="0"/>
-              <a:t>)</a:t>
-            </a:r>
-            <a:r>
-              <a:rPr lang="ko-KR" altLang="en-US" sz="1600" dirty="0"/>
-              <a:t> 등 주요 액화설비에 대한 공격적인 투자를 통해 </a:t>
-            </a:r>
-            <a:r>
-              <a:rPr lang="en-US" altLang="ko-KR" sz="1600" dirty="0"/>
-              <a:t>2016</a:t>
-            </a:r>
-            <a:r>
-              <a:rPr lang="ko-KR" altLang="en-US" sz="1600" dirty="0"/>
-              <a:t>년 이후 본격적인 수출국으로 부상하였고</a:t>
-            </a:r>
-            <a:r>
-              <a:rPr lang="en-US" altLang="ko-KR" sz="1600" dirty="0"/>
-              <a:t>, 2023</a:t>
-            </a:r>
-            <a:r>
-              <a:rPr lang="ko-KR" altLang="en-US" sz="1600" dirty="0"/>
-              <a:t>년에는 세계 최대 </a:t>
-            </a:r>
-            <a:r>
-              <a:rPr lang="en-US" altLang="ko-KR" sz="1600" dirty="0"/>
-              <a:t>LNG</a:t>
-            </a:r>
-            <a:r>
-              <a:rPr lang="ko-KR" altLang="en-US" sz="1600" dirty="0"/>
-              <a:t> 수출국이 되었다</a:t>
-            </a:r>
-            <a:r>
-              <a:rPr lang="en-US" altLang="ko-KR" sz="1600" dirty="0"/>
-              <a:t>.</a:t>
-            </a:r>
-          </a:p>
-          <a:p>
-            <a:pPr marL="1292225" lvl="2" indent="-285750">
-              <a:lnSpc>
-                <a:spcPct val="150000"/>
-              </a:lnSpc>
-              <a:buFont typeface="Wingdings" panose="05000000000000000000" pitchFamily="2" charset="2"/>
-              <a:buChar char="Ø"/>
-            </a:pPr>
-            <a:r>
-              <a:rPr lang="ko-KR" altLang="en-US" sz="1600" dirty="0"/>
-              <a:t>호주는 고르곤</a:t>
-            </a:r>
-            <a:r>
-              <a:rPr lang="en-US" altLang="ko-KR" sz="1600" dirty="0"/>
-              <a:t>, </a:t>
-            </a:r>
-            <a:r>
-              <a:rPr lang="ko-KR" altLang="en-US" sz="1600" dirty="0" err="1"/>
-              <a:t>휘트스톤</a:t>
-            </a:r>
-            <a:r>
-              <a:rPr lang="en-US" altLang="ko-KR" sz="1600" dirty="0"/>
-              <a:t>, </a:t>
-            </a:r>
-            <a:r>
-              <a:rPr lang="ko-KR" altLang="en-US" sz="1600" dirty="0" err="1"/>
-              <a:t>이치시스</a:t>
-            </a:r>
-            <a:r>
-              <a:rPr lang="en-US" altLang="ko-KR" sz="1600" dirty="0"/>
-              <a:t>, </a:t>
-            </a:r>
-            <a:r>
-              <a:rPr lang="ko-KR" altLang="en-US" sz="1600" dirty="0" err="1"/>
-              <a:t>프렐류드</a:t>
-            </a:r>
-            <a:r>
-              <a:rPr lang="ko-KR" altLang="en-US" sz="1600" dirty="0"/>
-              <a:t> </a:t>
-            </a:r>
-            <a:r>
-              <a:rPr lang="en-US" altLang="ko-KR" sz="1600" dirty="0"/>
-              <a:t>(</a:t>
-            </a:r>
-            <a:r>
-              <a:rPr lang="ko-KR" altLang="en-US" sz="1600" dirty="0"/>
-              <a:t>호주 지명</a:t>
-            </a:r>
-            <a:r>
-              <a:rPr lang="en-US" altLang="ko-KR" sz="1600" dirty="0"/>
-              <a:t>) </a:t>
-            </a:r>
-            <a:r>
-              <a:rPr lang="ko-KR" altLang="en-US" sz="1600" dirty="0"/>
-              <a:t>등 대형 프로젝트를 완공하며</a:t>
-            </a:r>
-            <a:r>
-              <a:rPr lang="en-US" altLang="ko-KR" sz="1600" dirty="0"/>
-              <a:t>, </a:t>
-            </a:r>
-            <a:r>
-              <a:rPr lang="ko-KR" altLang="en-US" sz="1600" dirty="0"/>
-              <a:t>카타르와 함께 </a:t>
-            </a:r>
-            <a:r>
-              <a:rPr lang="en-US" altLang="ko-KR" sz="1600" dirty="0"/>
-              <a:t>2020</a:t>
-            </a:r>
-            <a:r>
-              <a:rPr lang="ko-KR" altLang="en-US" sz="1600" dirty="0"/>
-              <a:t>년대 초반까지 세계 </a:t>
-            </a:r>
-            <a:r>
-              <a:rPr lang="en-US" altLang="ko-KR" sz="1600" dirty="0"/>
-              <a:t>1~2</a:t>
-            </a:r>
-            <a:r>
-              <a:rPr lang="ko-KR" altLang="en-US" sz="1600" dirty="0"/>
-              <a:t>위를 다투는 위치까지 올랐다</a:t>
-            </a:r>
-            <a:r>
-              <a:rPr lang="en-US" altLang="ko-KR" sz="1600" dirty="0"/>
-              <a:t>.</a:t>
-            </a:r>
-          </a:p>
-          <a:p>
-            <a:pPr marL="835025" lvl="1" indent="-285750">
-              <a:lnSpc>
-                <a:spcPct val="150000"/>
-              </a:lnSpc>
-              <a:buFont typeface="Wingdings" panose="05000000000000000000" pitchFamily="2" charset="2"/>
-              <a:buChar char="ü"/>
-            </a:pPr>
-            <a:r>
-              <a:rPr lang="ko-KR" altLang="en-US" sz="1600" dirty="0"/>
-              <a:t>이와 같은 수출국 다변화는 천연가스 시장의 지역 편중을 완화시켰다</a:t>
-            </a:r>
-            <a:r>
-              <a:rPr lang="en-US" altLang="ko-KR" sz="1600" dirty="0"/>
-              <a:t>.</a:t>
-            </a:r>
-          </a:p>
-          <a:p>
-            <a:pPr marL="835025" lvl="1" indent="-285750">
-              <a:lnSpc>
-                <a:spcPct val="150000"/>
-              </a:lnSpc>
-              <a:buFont typeface="Wingdings" panose="05000000000000000000" pitchFamily="2" charset="2"/>
-              <a:buChar char="ü"/>
-            </a:pPr>
-            <a:r>
-              <a:rPr lang="ko-KR" altLang="en-US" sz="1600" dirty="0"/>
-              <a:t>특히 미국</a:t>
-            </a:r>
-            <a:r>
-              <a:rPr lang="en-US" altLang="ko-KR" sz="1600" dirty="0"/>
-              <a:t>, </a:t>
-            </a:r>
-            <a:r>
-              <a:rPr lang="ko-KR" altLang="en-US" sz="1600" dirty="0"/>
-              <a:t>호주</a:t>
-            </a:r>
-            <a:r>
-              <a:rPr lang="en-US" altLang="ko-KR" sz="1600" dirty="0"/>
-              <a:t>, </a:t>
-            </a:r>
-            <a:r>
-              <a:rPr lang="ko-KR" altLang="en-US" sz="1600" dirty="0"/>
-              <a:t>카타르 간 경쟁 심화는 </a:t>
-            </a:r>
-            <a:r>
-              <a:rPr lang="en-US" altLang="ko-KR" sz="1600" dirty="0"/>
-              <a:t>LNG </a:t>
-            </a:r>
-            <a:r>
-              <a:rPr lang="ko-KR" altLang="en-US" sz="1600" dirty="0"/>
-              <a:t>시장을 보다 </a:t>
-            </a:r>
-            <a:r>
-              <a:rPr lang="ko-KR" altLang="en-US" sz="1600" dirty="0" err="1"/>
-              <a:t>시장지향적이고</a:t>
-            </a:r>
-            <a:r>
-              <a:rPr lang="en-US" altLang="ko-KR" sz="1600" dirty="0"/>
-              <a:t>, </a:t>
-            </a:r>
-            <a:r>
-              <a:rPr lang="ko-KR" altLang="en-US" sz="1600" dirty="0"/>
-              <a:t>역동적인 구조로 재편하게 했다</a:t>
-            </a:r>
-            <a:r>
-              <a:rPr lang="en-US" altLang="ko-KR" sz="1600" dirty="0"/>
-              <a:t>.</a:t>
-            </a:r>
-          </a:p>
-          <a:p>
-            <a:pPr marL="92075">
-              <a:lnSpc>
-                <a:spcPct val="150000"/>
-              </a:lnSpc>
-            </a:pPr>
-            <a:endParaRPr lang="en-US" altLang="ko-KR" sz="1600" dirty="0"/>
-          </a:p>
-        </p:txBody>
-      </p:sp>
-    </p:spTree>
-    <p:extLst>
-      <p:ext uri="{BB962C8B-B14F-4D97-AF65-F5344CB8AC3E}">
-        <p14:creationId xmlns:p14="http://schemas.microsoft.com/office/powerpoint/2010/main" val="782567626"/>
       </p:ext>
     </p:extLst>
   </p:cSld>
@@ -31708,6 +31246,1830 @@
         <p:cNvPr id="1" name="">
           <a:extLst>
             <a:ext uri="{FF2B5EF4-FFF2-40B4-BE49-F238E27FC236}">
+              <a16:creationId xmlns:a16="http://schemas.microsoft.com/office/drawing/2014/main" id="{FB53CCBB-A096-4F5E-82A0-6FA451650AF3}"/>
+            </a:ext>
+          </a:extLst>
+        </p:cNvPr>
+        <p:cNvGrpSpPr/>
+        <p:nvPr/>
+      </p:nvGrpSpPr>
+      <p:grpSpPr>
+        <a:xfrm>
+          <a:off x="0" y="0"/>
+          <a:ext cx="0" cy="0"/>
+          <a:chOff x="0" y="0"/>
+          <a:chExt cx="0" cy="0"/>
+        </a:xfrm>
+      </p:grpSpPr>
+      <p:sp>
+        <p:nvSpPr>
+          <p:cNvPr id="2" name="제목 1">
+            <a:extLst>
+              <a:ext uri="{FF2B5EF4-FFF2-40B4-BE49-F238E27FC236}">
+                <a16:creationId xmlns:a16="http://schemas.microsoft.com/office/drawing/2014/main" id="{4A390E5F-A4F8-AAD3-CC8B-AB68364297D1}"/>
+              </a:ext>
+            </a:extLst>
+          </p:cNvPr>
+          <p:cNvSpPr>
+            <a:spLocks noGrp="1"/>
+          </p:cNvSpPr>
+          <p:nvPr>
+            <p:ph type="title"/>
+          </p:nvPr>
+        </p:nvSpPr>
+        <p:spPr/>
+        <p:txBody>
+          <a:bodyPr/>
+          <a:lstStyle/>
+          <a:p>
+            <a:r>
+              <a:rPr lang="ko-KR" altLang="en-US" dirty="0"/>
+              <a:t>천연가스 소비</a:t>
+            </a:r>
+          </a:p>
+        </p:txBody>
+      </p:sp>
+      <p:sp>
+        <p:nvSpPr>
+          <p:cNvPr id="4" name="슬라이드 번호 개체 틀 3">
+            <a:extLst>
+              <a:ext uri="{FF2B5EF4-FFF2-40B4-BE49-F238E27FC236}">
+                <a16:creationId xmlns:a16="http://schemas.microsoft.com/office/drawing/2014/main" id="{283DFC10-B1F8-C620-A895-687007ABFB07}"/>
+              </a:ext>
+            </a:extLst>
+          </p:cNvPr>
+          <p:cNvSpPr>
+            <a:spLocks noGrp="1"/>
+          </p:cNvSpPr>
+          <p:nvPr>
+            <p:ph type="sldNum" sz="quarter" idx="12"/>
+          </p:nvPr>
+        </p:nvSpPr>
+        <p:spPr/>
+        <p:txBody>
+          <a:bodyPr/>
+          <a:lstStyle/>
+          <a:p>
+            <a:fld id="{109C872D-39A9-4065-8BF3-6A613116E2A1}" type="slidenum">
+              <a:rPr lang="ko-KR" altLang="en-US" smtClean="0"/>
+              <a:t>30</a:t>
+            </a:fld>
+            <a:endParaRPr lang="ko-KR" altLang="en-US"/>
+          </a:p>
+        </p:txBody>
+      </p:sp>
+      <p:sp>
+        <p:nvSpPr>
+          <p:cNvPr id="3" name="TextBox 2">
+            <a:extLst>
+              <a:ext uri="{FF2B5EF4-FFF2-40B4-BE49-F238E27FC236}">
+                <a16:creationId xmlns:a16="http://schemas.microsoft.com/office/drawing/2014/main" id="{0D9406ED-3EC3-CA2F-B6EB-A9691A7965F6}"/>
+              </a:ext>
+            </a:extLst>
+          </p:cNvPr>
+          <p:cNvSpPr txBox="1"/>
+          <p:nvPr/>
+        </p:nvSpPr>
+        <p:spPr>
+          <a:xfrm>
+            <a:off x="288790" y="958844"/>
+            <a:ext cx="11118453" cy="5215338"/>
+          </a:xfrm>
+          <a:prstGeom prst="rect">
+            <a:avLst/>
+          </a:prstGeom>
+          <a:noFill/>
+        </p:spPr>
+        <p:txBody>
+          <a:bodyPr wrap="square" rtlCol="0" anchor="t">
+            <a:spAutoFit/>
+          </a:bodyPr>
+          <a:lstStyle/>
+          <a:p>
+            <a:pPr marL="377825" indent="-285750">
+              <a:lnSpc>
+                <a:spcPct val="150000"/>
+              </a:lnSpc>
+              <a:buFont typeface="Arial" panose="020B0604020202020204" pitchFamily="34" charset="0"/>
+              <a:buChar char="•"/>
+            </a:pPr>
+            <a:r>
+              <a:rPr lang="ko-KR" altLang="en-US" sz="1600" dirty="0"/>
+              <a:t>글로벌 액화천연가스</a:t>
+            </a:r>
+            <a:r>
+              <a:rPr lang="en-US" altLang="ko-KR" sz="1600" dirty="0"/>
+              <a:t>(LNG) </a:t>
+            </a:r>
+            <a:r>
+              <a:rPr lang="ko-KR" altLang="en-US" sz="1600" dirty="0"/>
+              <a:t>수입은 지난 수십 년간 에너지 시장에서 가장 빠르게 성장한 분야이다</a:t>
+            </a:r>
+            <a:r>
+              <a:rPr lang="en-US" altLang="ko-KR" sz="1600" dirty="0"/>
+              <a:t>.</a:t>
+            </a:r>
+          </a:p>
+          <a:p>
+            <a:pPr marL="835025" lvl="1" indent="-285750">
+              <a:lnSpc>
+                <a:spcPct val="150000"/>
+              </a:lnSpc>
+              <a:buFont typeface="Wingdings" panose="05000000000000000000" pitchFamily="2" charset="2"/>
+              <a:buChar char="ü"/>
+            </a:pPr>
+            <a:r>
+              <a:rPr lang="ko-KR" altLang="en-US" sz="1600" dirty="0"/>
+              <a:t>공급망 유연성 증대와 에너지 안보 강화에 핵심적 역할을 해왔다</a:t>
+            </a:r>
+            <a:r>
+              <a:rPr lang="en-US" altLang="ko-KR" sz="1600" dirty="0"/>
+              <a:t>.</a:t>
+            </a:r>
+          </a:p>
+          <a:p>
+            <a:pPr marL="835025" lvl="1" indent="-285750">
+              <a:lnSpc>
+                <a:spcPct val="150000"/>
+              </a:lnSpc>
+              <a:buFont typeface="Wingdings" panose="05000000000000000000" pitchFamily="2" charset="2"/>
+              <a:buChar char="ü"/>
+            </a:pPr>
+            <a:r>
+              <a:rPr lang="ko-KR" altLang="en-US" sz="1600" dirty="0"/>
+              <a:t>기존 파이프라인 수송 방식에 비해</a:t>
+            </a:r>
+            <a:r>
+              <a:rPr lang="en-US" altLang="ko-KR" sz="1600" dirty="0"/>
+              <a:t>, </a:t>
+            </a:r>
+            <a:r>
+              <a:rPr lang="ko-KR" altLang="en-US" sz="1600" dirty="0"/>
+              <a:t>거리 및 지정학적 제약으로부터 자유롭기 때문에 천연가스 국제무역을 가능하게 하는 핵심 기술이 되었다</a:t>
+            </a:r>
+            <a:r>
+              <a:rPr lang="en-US" altLang="ko-KR" sz="1600" dirty="0"/>
+              <a:t>.</a:t>
+            </a:r>
+          </a:p>
+          <a:p>
+            <a:pPr marL="1292225" lvl="2" indent="-285750">
+              <a:lnSpc>
+                <a:spcPct val="150000"/>
+              </a:lnSpc>
+              <a:buFont typeface="Wingdings" panose="05000000000000000000" pitchFamily="2" charset="2"/>
+              <a:buChar char="Ø"/>
+            </a:pPr>
+            <a:r>
+              <a:rPr lang="ko-KR" altLang="en-US" sz="1600" dirty="0"/>
+              <a:t>천연가스 자원이 풍부한 북미</a:t>
+            </a:r>
+            <a:r>
+              <a:rPr lang="en-US" altLang="ko-KR" sz="1600" dirty="0"/>
+              <a:t>, </a:t>
+            </a:r>
+            <a:r>
+              <a:rPr lang="ko-KR" altLang="en-US" sz="1600" dirty="0"/>
+              <a:t>중동</a:t>
+            </a:r>
+            <a:r>
+              <a:rPr lang="en-US" altLang="ko-KR" sz="1600" dirty="0"/>
+              <a:t>, </a:t>
+            </a:r>
+            <a:r>
+              <a:rPr lang="ko-KR" altLang="en-US" sz="1600" dirty="0"/>
+              <a:t>러시아 등의 지역에서 생산된 가스가</a:t>
+            </a:r>
+            <a:r>
+              <a:rPr lang="en-US" altLang="ko-KR" sz="1600" dirty="0"/>
+              <a:t>, </a:t>
+            </a:r>
+            <a:r>
+              <a:rPr lang="ko-KR" altLang="en-US" sz="1600" dirty="0"/>
+              <a:t>수요가 집중된 동아시아</a:t>
+            </a:r>
+            <a:r>
+              <a:rPr lang="en-US" altLang="ko-KR" sz="1600" dirty="0"/>
+              <a:t>, </a:t>
+            </a:r>
+            <a:r>
+              <a:rPr lang="ko-KR" altLang="en-US" sz="1600" dirty="0"/>
+              <a:t>유럽</a:t>
+            </a:r>
+            <a:r>
+              <a:rPr lang="en-US" altLang="ko-KR" sz="1600" dirty="0"/>
+              <a:t>, </a:t>
+            </a:r>
+            <a:r>
+              <a:rPr lang="ko-KR" altLang="en-US" sz="1600" dirty="0"/>
+              <a:t>남아시아 지역으로 이전됨으로써 천연가스는 석유 시장과 유사한 통합성과 유연성을 갖춘 글로벌 상품으로 진화하고 있다</a:t>
+            </a:r>
+            <a:r>
+              <a:rPr lang="en-US" altLang="ko-KR" sz="1600" dirty="0"/>
+              <a:t>.</a:t>
+            </a:r>
+          </a:p>
+          <a:p>
+            <a:pPr marL="835025" lvl="1" indent="-285750">
+              <a:lnSpc>
+                <a:spcPct val="150000"/>
+              </a:lnSpc>
+              <a:buFont typeface="Wingdings" panose="05000000000000000000" pitchFamily="2" charset="2"/>
+              <a:buChar char="ü"/>
+            </a:pPr>
+            <a:r>
+              <a:rPr lang="ko-KR" altLang="en-US" sz="1600" dirty="0"/>
+              <a:t>수입국 측면에서 아시아는 전세계 </a:t>
+            </a:r>
+            <a:r>
+              <a:rPr lang="en-US" altLang="ko-KR" sz="1600" dirty="0"/>
+              <a:t>LNG </a:t>
+            </a:r>
+            <a:r>
+              <a:rPr lang="ko-KR" altLang="en-US" sz="1600" dirty="0"/>
+              <a:t>수요의 중심지로 부상하였다</a:t>
+            </a:r>
+            <a:r>
+              <a:rPr lang="en-US" altLang="ko-KR" sz="1600" dirty="0"/>
+              <a:t>.</a:t>
+            </a:r>
+          </a:p>
+          <a:p>
+            <a:pPr marL="1292225" lvl="2" indent="-285750">
+              <a:lnSpc>
+                <a:spcPct val="150000"/>
+              </a:lnSpc>
+              <a:buFont typeface="Wingdings" panose="05000000000000000000" pitchFamily="2" charset="2"/>
+              <a:buChar char="Ø"/>
+            </a:pPr>
+            <a:r>
+              <a:rPr lang="ko-KR" altLang="en-US" sz="1600" dirty="0"/>
+              <a:t>일본은 오랜 기간 세계 최대 </a:t>
+            </a:r>
+            <a:r>
+              <a:rPr lang="en-US" altLang="ko-KR" sz="1600" dirty="0"/>
+              <a:t>LNG </a:t>
+            </a:r>
+            <a:r>
+              <a:rPr lang="ko-KR" altLang="en-US" sz="1600" dirty="0"/>
+              <a:t>수입국의 지위를 유지하였고</a:t>
+            </a:r>
+            <a:r>
+              <a:rPr lang="en-US" altLang="ko-KR" sz="1600" dirty="0"/>
+              <a:t>, 2011</a:t>
+            </a:r>
+            <a:r>
+              <a:rPr lang="ko-KR" altLang="en-US" sz="1600" dirty="0"/>
+              <a:t>년 후쿠시마 원전 사고 이후 원전 의존도를 대폭 축소하고</a:t>
+            </a:r>
+            <a:r>
+              <a:rPr lang="en-US" altLang="ko-KR" sz="1600" dirty="0"/>
+              <a:t>, LNG </a:t>
+            </a:r>
+            <a:r>
+              <a:rPr lang="ko-KR" altLang="en-US" sz="1600" dirty="0"/>
+              <a:t>수입을 대체 에너지원으로 급격히 확대하였다</a:t>
+            </a:r>
+            <a:r>
+              <a:rPr lang="en-US" altLang="ko-KR" sz="1600" dirty="0"/>
+              <a:t>.</a:t>
+            </a:r>
+          </a:p>
+          <a:p>
+            <a:pPr marL="1292225" lvl="2" indent="-285750">
+              <a:lnSpc>
+                <a:spcPct val="150000"/>
+              </a:lnSpc>
+              <a:buFont typeface="Wingdings" panose="05000000000000000000" pitchFamily="2" charset="2"/>
+              <a:buChar char="Ø"/>
+            </a:pPr>
+            <a:r>
+              <a:rPr lang="ko-KR" altLang="en-US" sz="1600" dirty="0"/>
+              <a:t>중국은 최근 에너지 수요 급증과 </a:t>
+            </a:r>
+            <a:r>
+              <a:rPr lang="ko-KR" altLang="en-US" sz="1600" dirty="0" err="1"/>
+              <a:t>대기질</a:t>
+            </a:r>
+            <a:r>
+              <a:rPr lang="ko-KR" altLang="en-US" sz="1600" dirty="0"/>
+              <a:t> 개선 목표에 따라 </a:t>
+            </a:r>
+            <a:r>
+              <a:rPr lang="en-US" altLang="ko-KR" sz="1600" dirty="0"/>
+              <a:t>LNG </a:t>
+            </a:r>
+            <a:r>
+              <a:rPr lang="ko-KR" altLang="en-US" sz="1600" dirty="0"/>
+              <a:t>수입을 대폭 늘려</a:t>
+            </a:r>
+            <a:r>
+              <a:rPr lang="en-US" altLang="ko-KR" sz="1600" dirty="0"/>
+              <a:t>, 2021</a:t>
+            </a:r>
+            <a:r>
+              <a:rPr lang="ko-KR" altLang="en-US" sz="1600" dirty="0"/>
+              <a:t>년 처음으로 일본을 제치고 세계 최대 </a:t>
+            </a:r>
+            <a:r>
+              <a:rPr lang="en-US" altLang="ko-KR" sz="1600" dirty="0"/>
+              <a:t>LNG </a:t>
+            </a:r>
+            <a:r>
+              <a:rPr lang="ko-KR" altLang="en-US" sz="1600" dirty="0"/>
+              <a:t>수입국이 되었다</a:t>
+            </a:r>
+            <a:r>
+              <a:rPr lang="en-US" altLang="ko-KR" sz="1600" dirty="0"/>
+              <a:t>.</a:t>
+            </a:r>
+          </a:p>
+          <a:p>
+            <a:pPr marL="1292225" lvl="2" indent="-285750">
+              <a:lnSpc>
+                <a:spcPct val="150000"/>
+              </a:lnSpc>
+              <a:buFont typeface="Wingdings" panose="05000000000000000000" pitchFamily="2" charset="2"/>
+              <a:buChar char="Ø"/>
+            </a:pPr>
+            <a:r>
+              <a:rPr lang="ko-KR" altLang="en-US" sz="1600" dirty="0"/>
+              <a:t>인도와 한국 또한 수입량을 지속적으로 확대하고 있으며</a:t>
+            </a:r>
+            <a:r>
+              <a:rPr lang="en-US" altLang="ko-KR" sz="1600" dirty="0"/>
+              <a:t>, </a:t>
+            </a:r>
+            <a:r>
+              <a:rPr lang="ko-KR" altLang="en-US" sz="1600" dirty="0"/>
+              <a:t>아시아 전체는 현재 글로벌 </a:t>
+            </a:r>
+            <a:r>
+              <a:rPr lang="en-US" altLang="ko-KR" sz="1600" dirty="0"/>
+              <a:t>LNG </a:t>
+            </a:r>
+            <a:r>
+              <a:rPr lang="ko-KR" altLang="en-US" sz="1600" dirty="0"/>
+              <a:t>수입의 약 </a:t>
+            </a:r>
+            <a:r>
+              <a:rPr lang="en-US" altLang="ko-KR" sz="1600" dirty="0"/>
+              <a:t>70%</a:t>
+            </a:r>
+            <a:r>
+              <a:rPr lang="ko-KR" altLang="en-US" sz="1600" dirty="0"/>
+              <a:t>를 차지하고 있다</a:t>
+            </a:r>
+            <a:r>
+              <a:rPr lang="en-US" altLang="ko-KR" sz="1600" dirty="0"/>
+              <a:t>.</a:t>
+            </a:r>
+          </a:p>
+        </p:txBody>
+      </p:sp>
+    </p:spTree>
+    <p:extLst>
+      <p:ext uri="{BB962C8B-B14F-4D97-AF65-F5344CB8AC3E}">
+        <p14:creationId xmlns:p14="http://schemas.microsoft.com/office/powerpoint/2010/main" val="3435324664"/>
+      </p:ext>
+    </p:extLst>
+  </p:cSld>
+  <p:clrMapOvr>
+    <a:masterClrMapping/>
+  </p:clrMapOvr>
+</p:sld>
+</file>
+
+<file path=ppt/slides/slide31.xml><?xml version="1.0" encoding="utf-8"?>
+<p:sld xmlns:a="http://schemas.openxmlformats.org/drawingml/2006/main" xmlns:r="http://schemas.openxmlformats.org/officeDocument/2006/relationships" xmlns:p="http://schemas.openxmlformats.org/presentationml/2006/main">
+  <p:cSld>
+    <p:spTree>
+      <p:nvGrpSpPr>
+        <p:cNvPr id="1" name="">
+          <a:extLst>
+            <a:ext uri="{FF2B5EF4-FFF2-40B4-BE49-F238E27FC236}">
+              <a16:creationId xmlns:a16="http://schemas.microsoft.com/office/drawing/2014/main" id="{5FA8CD1B-9FA0-D50E-9F70-DB9EB64D9260}"/>
+            </a:ext>
+          </a:extLst>
+        </p:cNvPr>
+        <p:cNvGrpSpPr/>
+        <p:nvPr/>
+      </p:nvGrpSpPr>
+      <p:grpSpPr>
+        <a:xfrm>
+          <a:off x="0" y="0"/>
+          <a:ext cx="0" cy="0"/>
+          <a:chOff x="0" y="0"/>
+          <a:chExt cx="0" cy="0"/>
+        </a:xfrm>
+      </p:grpSpPr>
+      <p:sp>
+        <p:nvSpPr>
+          <p:cNvPr id="2" name="제목 1">
+            <a:extLst>
+              <a:ext uri="{FF2B5EF4-FFF2-40B4-BE49-F238E27FC236}">
+                <a16:creationId xmlns:a16="http://schemas.microsoft.com/office/drawing/2014/main" id="{79B34FB3-EDD9-C0E4-685A-3951CEB74506}"/>
+              </a:ext>
+            </a:extLst>
+          </p:cNvPr>
+          <p:cNvSpPr>
+            <a:spLocks noGrp="1"/>
+          </p:cNvSpPr>
+          <p:nvPr>
+            <p:ph type="title"/>
+          </p:nvPr>
+        </p:nvSpPr>
+        <p:spPr/>
+        <p:txBody>
+          <a:bodyPr/>
+          <a:lstStyle/>
+          <a:p>
+            <a:r>
+              <a:rPr lang="ko-KR" altLang="en-US" dirty="0"/>
+              <a:t>천연가스 소비</a:t>
+            </a:r>
+          </a:p>
+        </p:txBody>
+      </p:sp>
+      <p:sp>
+        <p:nvSpPr>
+          <p:cNvPr id="4" name="슬라이드 번호 개체 틀 3">
+            <a:extLst>
+              <a:ext uri="{FF2B5EF4-FFF2-40B4-BE49-F238E27FC236}">
+                <a16:creationId xmlns:a16="http://schemas.microsoft.com/office/drawing/2014/main" id="{248B2577-1AF3-CD0B-486F-C29A2495E75D}"/>
+              </a:ext>
+            </a:extLst>
+          </p:cNvPr>
+          <p:cNvSpPr>
+            <a:spLocks noGrp="1"/>
+          </p:cNvSpPr>
+          <p:nvPr>
+            <p:ph type="sldNum" sz="quarter" idx="12"/>
+          </p:nvPr>
+        </p:nvSpPr>
+        <p:spPr/>
+        <p:txBody>
+          <a:bodyPr/>
+          <a:lstStyle/>
+          <a:p>
+            <a:fld id="{109C872D-39A9-4065-8BF3-6A613116E2A1}" type="slidenum">
+              <a:rPr lang="ko-KR" altLang="en-US" smtClean="0"/>
+              <a:t>31</a:t>
+            </a:fld>
+            <a:endParaRPr lang="ko-KR" altLang="en-US"/>
+          </a:p>
+        </p:txBody>
+      </p:sp>
+      <p:sp>
+        <p:nvSpPr>
+          <p:cNvPr id="3" name="TextBox 2">
+            <a:extLst>
+              <a:ext uri="{FF2B5EF4-FFF2-40B4-BE49-F238E27FC236}">
+                <a16:creationId xmlns:a16="http://schemas.microsoft.com/office/drawing/2014/main" id="{FDD62BF2-D3B7-7B98-DDD0-10A5909F39DB}"/>
+              </a:ext>
+            </a:extLst>
+          </p:cNvPr>
+          <p:cNvSpPr txBox="1"/>
+          <p:nvPr/>
+        </p:nvSpPr>
+        <p:spPr>
+          <a:xfrm>
+            <a:off x="288790" y="958844"/>
+            <a:ext cx="11118453" cy="4846007"/>
+          </a:xfrm>
+          <a:prstGeom prst="rect">
+            <a:avLst/>
+          </a:prstGeom>
+          <a:noFill/>
+        </p:spPr>
+        <p:txBody>
+          <a:bodyPr wrap="square" rtlCol="0" anchor="t">
+            <a:spAutoFit/>
+          </a:bodyPr>
+          <a:lstStyle/>
+          <a:p>
+            <a:pPr marL="835025" lvl="1" indent="-285750">
+              <a:lnSpc>
+                <a:spcPct val="150000"/>
+              </a:lnSpc>
+              <a:buFont typeface="Wingdings" panose="05000000000000000000" pitchFamily="2" charset="2"/>
+              <a:buChar char="ü"/>
+            </a:pPr>
+            <a:r>
+              <a:rPr lang="ko-KR" altLang="en-US" sz="1600" dirty="0"/>
+              <a:t>유럽 역시 </a:t>
+            </a:r>
+            <a:r>
+              <a:rPr lang="en-US" altLang="ko-KR" sz="1600" dirty="0"/>
+              <a:t>LNG </a:t>
+            </a:r>
+            <a:r>
+              <a:rPr lang="ko-KR" altLang="en-US" sz="1600" dirty="0"/>
+              <a:t>수입 시장에서 중요한 변화를 보이고 있다</a:t>
+            </a:r>
+            <a:r>
+              <a:rPr lang="en-US" altLang="ko-KR" sz="1600" dirty="0"/>
+              <a:t>.</a:t>
+            </a:r>
+          </a:p>
+          <a:p>
+            <a:pPr marL="1292225" lvl="2" indent="-285750">
+              <a:lnSpc>
+                <a:spcPct val="150000"/>
+              </a:lnSpc>
+              <a:buFont typeface="Wingdings" panose="05000000000000000000" pitchFamily="2" charset="2"/>
+              <a:buChar char="Ø"/>
+            </a:pPr>
+            <a:r>
+              <a:rPr lang="ko-KR" altLang="en-US" sz="1600" dirty="0"/>
+              <a:t>과거 유럽은 러시아산 파이프라인 가스에 대한 높은 의존도를 보여왔지만</a:t>
+            </a:r>
+            <a:r>
+              <a:rPr lang="en-US" altLang="ko-KR" sz="1600" dirty="0"/>
+              <a:t>, 2022</a:t>
+            </a:r>
+            <a:r>
+              <a:rPr lang="ko-KR" altLang="en-US" sz="1600" dirty="0"/>
+              <a:t>년 </a:t>
+            </a:r>
+            <a:r>
+              <a:rPr lang="ko-KR" altLang="en-US" sz="1600" dirty="0" err="1"/>
+              <a:t>러이사</a:t>
+            </a:r>
+            <a:r>
+              <a:rPr lang="en-US" altLang="ko-KR" sz="1600" dirty="0"/>
+              <a:t>-</a:t>
+            </a:r>
+            <a:r>
+              <a:rPr lang="ko-KR" altLang="en-US" sz="1600" dirty="0"/>
+              <a:t>우크라이나 전쟁 이후 에너지 안보에 대한 우려가 급증하여 </a:t>
+            </a:r>
+            <a:r>
+              <a:rPr lang="en-US" altLang="ko-KR" sz="1600" dirty="0"/>
+              <a:t>LNG</a:t>
+            </a:r>
+            <a:r>
+              <a:rPr lang="ko-KR" altLang="en-US" sz="1600" dirty="0"/>
+              <a:t>수입을 전략적으로 확대하는 방향으로 전환하였다</a:t>
+            </a:r>
+            <a:r>
+              <a:rPr lang="en-US" altLang="ko-KR" sz="1600" dirty="0"/>
+              <a:t>.</a:t>
+            </a:r>
+          </a:p>
+          <a:p>
+            <a:pPr marL="1292225" lvl="2" indent="-285750">
+              <a:lnSpc>
+                <a:spcPct val="150000"/>
+              </a:lnSpc>
+              <a:buFont typeface="Wingdings" panose="05000000000000000000" pitchFamily="2" charset="2"/>
+              <a:buChar char="Ø"/>
+            </a:pPr>
+            <a:r>
+              <a:rPr lang="ko-KR" altLang="en-US" sz="1600" dirty="0"/>
+              <a:t>독일</a:t>
+            </a:r>
+            <a:r>
+              <a:rPr lang="en-US" altLang="ko-KR" sz="1600" dirty="0"/>
+              <a:t>, </a:t>
+            </a:r>
+            <a:r>
+              <a:rPr lang="ko-KR" altLang="en-US" sz="1600" dirty="0"/>
+              <a:t>폴란드</a:t>
+            </a:r>
+            <a:r>
+              <a:rPr lang="en-US" altLang="ko-KR" sz="1600" dirty="0"/>
+              <a:t>, </a:t>
+            </a:r>
+            <a:r>
+              <a:rPr lang="ko-KR" altLang="en-US" sz="1600" dirty="0"/>
+              <a:t>핀란드 등은 기존에 부재하던 </a:t>
+            </a:r>
+            <a:r>
+              <a:rPr lang="en-US" altLang="ko-KR" sz="1600" dirty="0"/>
+              <a:t>LNG </a:t>
+            </a:r>
+            <a:r>
+              <a:rPr lang="ko-KR" altLang="en-US" sz="1600" dirty="0"/>
+              <a:t>터미널을 신속히 구축하거나 기존 시설을 확장하였고</a:t>
+            </a:r>
+            <a:r>
+              <a:rPr lang="en-US" altLang="ko-KR" sz="1600" dirty="0"/>
+              <a:t>, </a:t>
+            </a:r>
+            <a:r>
+              <a:rPr lang="ko-KR" altLang="en-US" sz="1600" dirty="0"/>
+              <a:t>미국 및 카타르 등으로부터 장기 수입계약 체결을 통해 공급선 다변화를 적극 추진하고 있다</a:t>
+            </a:r>
+            <a:r>
+              <a:rPr lang="en-US" altLang="ko-KR" sz="1600" dirty="0"/>
+              <a:t>.</a:t>
+            </a:r>
+          </a:p>
+          <a:p>
+            <a:pPr marL="1292225" lvl="2" indent="-285750">
+              <a:lnSpc>
+                <a:spcPct val="150000"/>
+              </a:lnSpc>
+              <a:buFont typeface="Wingdings" panose="05000000000000000000" pitchFamily="2" charset="2"/>
+              <a:buChar char="Ø"/>
+            </a:pPr>
+            <a:r>
+              <a:rPr lang="ko-KR" altLang="en-US" sz="1600" dirty="0"/>
+              <a:t>그 결과 </a:t>
+            </a:r>
+            <a:r>
+              <a:rPr lang="en-US" altLang="ko-KR" sz="1600" dirty="0"/>
+              <a:t>2022-2023</a:t>
+            </a:r>
+            <a:r>
+              <a:rPr lang="ko-KR" altLang="en-US" sz="1600" dirty="0"/>
+              <a:t>년 사이 유럽의 </a:t>
+            </a:r>
+            <a:r>
+              <a:rPr lang="en-US" altLang="ko-KR" sz="1600" dirty="0"/>
+              <a:t>LNG </a:t>
+            </a:r>
+            <a:r>
+              <a:rPr lang="ko-KR" altLang="en-US" sz="1600" dirty="0"/>
+              <a:t>수입량은 전년 대비 약 </a:t>
+            </a:r>
+            <a:r>
+              <a:rPr lang="en-US" altLang="ko-KR" sz="1600" dirty="0"/>
+              <a:t>60% </a:t>
+            </a:r>
+            <a:r>
+              <a:rPr lang="ko-KR" altLang="en-US" sz="1600" dirty="0"/>
+              <a:t>증가하였으며</a:t>
+            </a:r>
+            <a:r>
+              <a:rPr lang="en-US" altLang="ko-KR" sz="1600" dirty="0"/>
+              <a:t>, </a:t>
+            </a:r>
+            <a:r>
+              <a:rPr lang="ko-KR" altLang="en-US" sz="1600" dirty="0"/>
+              <a:t>이는 글로벌 </a:t>
+            </a:r>
+            <a:r>
+              <a:rPr lang="en-US" altLang="ko-KR" sz="1600" dirty="0"/>
+              <a:t>LNG </a:t>
+            </a:r>
+            <a:r>
+              <a:rPr lang="ko-KR" altLang="en-US" sz="1600" dirty="0"/>
+              <a:t>수급 및 가격에 상당한 파급효과를 미쳤다</a:t>
+            </a:r>
+            <a:r>
+              <a:rPr lang="en-US" altLang="ko-KR" sz="1600" dirty="0"/>
+              <a:t>.</a:t>
+            </a:r>
+          </a:p>
+          <a:p>
+            <a:pPr marL="1292225" lvl="2" indent="-285750">
+              <a:lnSpc>
+                <a:spcPct val="150000"/>
+              </a:lnSpc>
+              <a:buFont typeface="Wingdings" panose="05000000000000000000" pitchFamily="2" charset="2"/>
+              <a:buChar char="Ø"/>
+            </a:pPr>
+            <a:endParaRPr lang="en-US" altLang="ko-KR" sz="1600" dirty="0"/>
+          </a:p>
+          <a:p>
+            <a:pPr marL="377825" indent="-285750">
+              <a:lnSpc>
+                <a:spcPct val="150000"/>
+              </a:lnSpc>
+              <a:buFont typeface="Arial" panose="020B0604020202020204" pitchFamily="34" charset="0"/>
+              <a:buChar char="•"/>
+            </a:pPr>
+            <a:r>
+              <a:rPr lang="ko-KR" altLang="en-US" sz="1600" dirty="0"/>
+              <a:t>글로벌 </a:t>
+            </a:r>
+            <a:r>
+              <a:rPr lang="en-US" altLang="ko-KR" sz="1600" dirty="0"/>
+              <a:t>LNG </a:t>
+            </a:r>
+            <a:r>
+              <a:rPr lang="ko-KR" altLang="en-US" sz="1600" dirty="0"/>
+              <a:t>시장은 계약 구조 측면에서도 중요한 변화를 경험하고 있다</a:t>
+            </a:r>
+            <a:r>
+              <a:rPr lang="en-US" altLang="ko-KR" sz="1600" dirty="0"/>
+              <a:t>.</a:t>
+            </a:r>
+          </a:p>
+          <a:p>
+            <a:pPr marL="835025" lvl="1" indent="-285750">
+              <a:lnSpc>
+                <a:spcPct val="150000"/>
+              </a:lnSpc>
+              <a:buFont typeface="Wingdings" panose="05000000000000000000" pitchFamily="2" charset="2"/>
+              <a:buChar char="ü"/>
+            </a:pPr>
+            <a:r>
+              <a:rPr lang="ko-KR" altLang="en-US" sz="1600" dirty="0"/>
+              <a:t>과거에는 </a:t>
+            </a:r>
+            <a:r>
+              <a:rPr lang="en-US" altLang="ko-KR" sz="1600" dirty="0"/>
+              <a:t>20</a:t>
+            </a:r>
+            <a:r>
+              <a:rPr lang="ko-KR" altLang="en-US" sz="1600" dirty="0"/>
+              <a:t>년 이상의 장기 고정가격 계약이 시장의 표준이었으나</a:t>
+            </a:r>
+            <a:r>
+              <a:rPr lang="en-US" altLang="ko-KR" sz="1600" dirty="0"/>
+              <a:t>, </a:t>
+            </a:r>
+            <a:r>
+              <a:rPr lang="ko-KR" altLang="en-US" sz="1600" dirty="0"/>
+              <a:t>최근에는 현물 시장 및 단기 계약의 비중이 늘고 있다</a:t>
+            </a:r>
+            <a:r>
+              <a:rPr lang="en-US" altLang="ko-KR" sz="1600" dirty="0"/>
+              <a:t>.</a:t>
+            </a:r>
+          </a:p>
+          <a:p>
+            <a:pPr marL="1292225" lvl="2" indent="-285750">
+              <a:lnSpc>
+                <a:spcPct val="150000"/>
+              </a:lnSpc>
+              <a:buFont typeface="Wingdings" panose="05000000000000000000" pitchFamily="2" charset="2"/>
+              <a:buChar char="Ø"/>
+            </a:pPr>
+            <a:r>
+              <a:rPr lang="ko-KR" altLang="en-US" sz="1600" dirty="0"/>
+              <a:t>이는 수요의 변동성 증가</a:t>
+            </a:r>
+            <a:r>
+              <a:rPr lang="en-US" altLang="ko-KR" sz="1600" dirty="0"/>
+              <a:t>, </a:t>
+            </a:r>
+            <a:r>
+              <a:rPr lang="ko-KR" altLang="en-US" sz="1600" dirty="0"/>
+              <a:t>시장 가격에 대한 민감성 강화</a:t>
+            </a:r>
+            <a:r>
+              <a:rPr lang="en-US" altLang="ko-KR" sz="1600" dirty="0"/>
+              <a:t>, </a:t>
+            </a:r>
+            <a:r>
+              <a:rPr lang="ko-KR" altLang="en-US" sz="1600" dirty="0"/>
+              <a:t>공급국 간 경쟁 심화 등과 같은 요인에 기인하며</a:t>
+            </a:r>
+            <a:r>
+              <a:rPr lang="en-US" altLang="ko-KR" sz="1600" dirty="0"/>
+              <a:t>, </a:t>
+            </a:r>
+            <a:r>
+              <a:rPr lang="ko-KR" altLang="en-US" sz="1600" dirty="0"/>
+              <a:t>결과적으로 </a:t>
+            </a:r>
+            <a:r>
+              <a:rPr lang="en-US" altLang="ko-KR" sz="1600" dirty="0"/>
+              <a:t>LNG </a:t>
+            </a:r>
+            <a:r>
+              <a:rPr lang="ko-KR" altLang="en-US" sz="1600" dirty="0"/>
+              <a:t>거래의 유연성과 시장 반응성을 높이는 방향으로 시장이 진화하고 있음을 의미한다</a:t>
+            </a:r>
+            <a:r>
+              <a:rPr lang="en-US" altLang="ko-KR" sz="1600" dirty="0"/>
+              <a:t>.</a:t>
+            </a:r>
+          </a:p>
+        </p:txBody>
+      </p:sp>
+    </p:spTree>
+    <p:extLst>
+      <p:ext uri="{BB962C8B-B14F-4D97-AF65-F5344CB8AC3E}">
+        <p14:creationId xmlns:p14="http://schemas.microsoft.com/office/powerpoint/2010/main" val="3139826916"/>
+      </p:ext>
+    </p:extLst>
+  </p:cSld>
+  <p:clrMapOvr>
+    <a:masterClrMapping/>
+  </p:clrMapOvr>
+</p:sld>
+</file>
+
+<file path=ppt/slides/slide32.xml><?xml version="1.0" encoding="utf-8"?>
+<p:sld xmlns:a="http://schemas.openxmlformats.org/drawingml/2006/main" xmlns:r="http://schemas.openxmlformats.org/officeDocument/2006/relationships" xmlns:p="http://schemas.openxmlformats.org/presentationml/2006/main">
+  <p:cSld>
+    <p:spTree>
+      <p:nvGrpSpPr>
+        <p:cNvPr id="1" name="">
+          <a:extLst>
+            <a:ext uri="{FF2B5EF4-FFF2-40B4-BE49-F238E27FC236}">
+              <a16:creationId xmlns:a16="http://schemas.microsoft.com/office/drawing/2014/main" id="{04C58AE2-422F-6289-068D-E8103D8736E1}"/>
+            </a:ext>
+          </a:extLst>
+        </p:cNvPr>
+        <p:cNvGrpSpPr/>
+        <p:nvPr/>
+      </p:nvGrpSpPr>
+      <p:grpSpPr>
+        <a:xfrm>
+          <a:off x="0" y="0"/>
+          <a:ext cx="0" cy="0"/>
+          <a:chOff x="0" y="0"/>
+          <a:chExt cx="0" cy="0"/>
+        </a:xfrm>
+      </p:grpSpPr>
+      <p:sp>
+        <p:nvSpPr>
+          <p:cNvPr id="2" name="제목 1">
+            <a:extLst>
+              <a:ext uri="{FF2B5EF4-FFF2-40B4-BE49-F238E27FC236}">
+                <a16:creationId xmlns:a16="http://schemas.microsoft.com/office/drawing/2014/main" id="{3124D0AD-4F6D-3A3C-06AC-C3F166CC0A22}"/>
+              </a:ext>
+            </a:extLst>
+          </p:cNvPr>
+          <p:cNvSpPr>
+            <a:spLocks noGrp="1"/>
+          </p:cNvSpPr>
+          <p:nvPr>
+            <p:ph type="title"/>
+          </p:nvPr>
+        </p:nvSpPr>
+        <p:spPr/>
+        <p:txBody>
+          <a:bodyPr/>
+          <a:lstStyle/>
+          <a:p>
+            <a:r>
+              <a:rPr lang="ko-KR" altLang="en-US" dirty="0"/>
+              <a:t>천연가스 소비</a:t>
+            </a:r>
+          </a:p>
+        </p:txBody>
+      </p:sp>
+      <p:sp>
+        <p:nvSpPr>
+          <p:cNvPr id="4" name="슬라이드 번호 개체 틀 3">
+            <a:extLst>
+              <a:ext uri="{FF2B5EF4-FFF2-40B4-BE49-F238E27FC236}">
+                <a16:creationId xmlns:a16="http://schemas.microsoft.com/office/drawing/2014/main" id="{0701E83C-7DFA-2013-71AA-569E4F430E89}"/>
+              </a:ext>
+            </a:extLst>
+          </p:cNvPr>
+          <p:cNvSpPr>
+            <a:spLocks noGrp="1"/>
+          </p:cNvSpPr>
+          <p:nvPr>
+            <p:ph type="sldNum" sz="quarter" idx="12"/>
+          </p:nvPr>
+        </p:nvSpPr>
+        <p:spPr/>
+        <p:txBody>
+          <a:bodyPr/>
+          <a:lstStyle/>
+          <a:p>
+            <a:fld id="{109C872D-39A9-4065-8BF3-6A613116E2A1}" type="slidenum">
+              <a:rPr lang="ko-KR" altLang="en-US" smtClean="0"/>
+              <a:t>32</a:t>
+            </a:fld>
+            <a:endParaRPr lang="ko-KR" altLang="en-US"/>
+          </a:p>
+        </p:txBody>
+      </p:sp>
+      <p:sp>
+        <p:nvSpPr>
+          <p:cNvPr id="3" name="TextBox 2">
+            <a:extLst>
+              <a:ext uri="{FF2B5EF4-FFF2-40B4-BE49-F238E27FC236}">
+                <a16:creationId xmlns:a16="http://schemas.microsoft.com/office/drawing/2014/main" id="{1C3193F3-D9D8-8D01-FFC2-86AF9E53B9A1}"/>
+              </a:ext>
+            </a:extLst>
+          </p:cNvPr>
+          <p:cNvSpPr txBox="1"/>
+          <p:nvPr/>
+        </p:nvSpPr>
+        <p:spPr>
+          <a:xfrm>
+            <a:off x="288790" y="958844"/>
+            <a:ext cx="11118453" cy="2260683"/>
+          </a:xfrm>
+          <a:prstGeom prst="rect">
+            <a:avLst/>
+          </a:prstGeom>
+          <a:noFill/>
+        </p:spPr>
+        <p:txBody>
+          <a:bodyPr wrap="square" rtlCol="0" anchor="t">
+            <a:spAutoFit/>
+          </a:bodyPr>
+          <a:lstStyle/>
+          <a:p>
+            <a:pPr marL="377825" indent="-285750">
+              <a:lnSpc>
+                <a:spcPct val="150000"/>
+              </a:lnSpc>
+              <a:buFont typeface="Arial" panose="020B0604020202020204" pitchFamily="34" charset="0"/>
+              <a:buChar char="•"/>
+            </a:pPr>
+            <a:r>
+              <a:rPr lang="ko-KR" altLang="en-US" sz="1600" dirty="0"/>
+              <a:t>한편</a:t>
+            </a:r>
+            <a:r>
+              <a:rPr lang="en-US" altLang="ko-KR" sz="1600" dirty="0"/>
+              <a:t>, LNG </a:t>
+            </a:r>
+            <a:r>
+              <a:rPr lang="ko-KR" altLang="en-US" sz="1600" dirty="0"/>
+              <a:t>수입 확대는 인프라 구축과 밀접하게 연계되어 있으며</a:t>
+            </a:r>
+            <a:r>
+              <a:rPr lang="en-US" altLang="ko-KR" sz="1600" dirty="0"/>
+              <a:t>, </a:t>
+            </a:r>
+            <a:r>
+              <a:rPr lang="ko-KR" altLang="en-US" sz="1600" dirty="0"/>
+              <a:t>이에 따라 수입국의 정책적 의지</a:t>
+            </a:r>
+            <a:r>
+              <a:rPr lang="en-US" altLang="ko-KR" sz="1600" dirty="0"/>
+              <a:t>, </a:t>
+            </a:r>
+            <a:r>
+              <a:rPr lang="ko-KR" altLang="en-US" sz="1600" dirty="0"/>
+              <a:t>제도적 환경</a:t>
+            </a:r>
+            <a:r>
+              <a:rPr lang="en-US" altLang="ko-KR" sz="1600" dirty="0"/>
+              <a:t>, </a:t>
+            </a:r>
+            <a:r>
+              <a:rPr lang="ko-KR" altLang="en-US" sz="1600" dirty="0"/>
+              <a:t>기술 역량 등에 따라 확대 속도와 범위에 상당한 차이가 나타나고 있다</a:t>
+            </a:r>
+            <a:r>
+              <a:rPr lang="en-US" altLang="ko-KR" sz="1600" dirty="0"/>
+              <a:t>.</a:t>
+            </a:r>
+          </a:p>
+          <a:p>
+            <a:pPr marL="835025" lvl="1" indent="-285750">
+              <a:lnSpc>
+                <a:spcPct val="150000"/>
+              </a:lnSpc>
+              <a:buFont typeface="Wingdings" panose="05000000000000000000" pitchFamily="2" charset="2"/>
+              <a:buChar char="ü"/>
+            </a:pPr>
+            <a:r>
+              <a:rPr lang="ko-KR" altLang="en-US" sz="1600" dirty="0"/>
+              <a:t>아시아 및 유럽의 선진국들은 재기화터미널</a:t>
+            </a:r>
+            <a:r>
+              <a:rPr lang="en-US" altLang="ko-KR" sz="1600" dirty="0"/>
+              <a:t>, </a:t>
+            </a:r>
+            <a:r>
+              <a:rPr lang="ko-KR" altLang="en-US" sz="1600" dirty="0"/>
+              <a:t>저장 설비</a:t>
+            </a:r>
+            <a:r>
+              <a:rPr lang="en-US" altLang="ko-KR" sz="1600" dirty="0"/>
+              <a:t>, </a:t>
+            </a:r>
+            <a:r>
+              <a:rPr lang="ko-KR" altLang="en-US" sz="1600" dirty="0"/>
+              <a:t>전용 운반선 확보 등에서 상대적 우위에 있다</a:t>
+            </a:r>
+            <a:r>
+              <a:rPr lang="en-US" altLang="ko-KR" sz="1600" dirty="0"/>
+              <a:t>.</a:t>
+            </a:r>
+          </a:p>
+          <a:p>
+            <a:pPr marL="835025" lvl="1" indent="-285750">
+              <a:lnSpc>
+                <a:spcPct val="150000"/>
+              </a:lnSpc>
+              <a:buFont typeface="Wingdings" panose="05000000000000000000" pitchFamily="2" charset="2"/>
+              <a:buChar char="ü"/>
+            </a:pPr>
+            <a:r>
+              <a:rPr lang="ko-KR" altLang="en-US" sz="1600" dirty="0"/>
+              <a:t>한편 일부 개발도상국은 재정적</a:t>
+            </a:r>
+            <a:r>
+              <a:rPr lang="en-US" altLang="ko-KR" sz="1600" dirty="0"/>
+              <a:t>·</a:t>
+            </a:r>
+            <a:r>
+              <a:rPr lang="ko-KR" altLang="en-US" sz="1600" dirty="0"/>
+              <a:t>기술적 제약으로 인해 </a:t>
+            </a:r>
+            <a:r>
+              <a:rPr lang="en-US" altLang="ko-KR" sz="1600" dirty="0"/>
+              <a:t>LNG </a:t>
+            </a:r>
+            <a:r>
+              <a:rPr lang="ko-KR" altLang="en-US" sz="1600" dirty="0"/>
+              <a:t>수입 확대에 구조적 어려움을 겪고 있다</a:t>
+            </a:r>
+            <a:r>
+              <a:rPr lang="en-US" altLang="ko-KR" sz="1600" dirty="0"/>
+              <a:t>.</a:t>
+            </a:r>
+          </a:p>
+          <a:p>
+            <a:pPr marL="1292225" lvl="2" indent="-285750">
+              <a:lnSpc>
+                <a:spcPct val="150000"/>
+              </a:lnSpc>
+              <a:buFont typeface="Wingdings" panose="05000000000000000000" pitchFamily="2" charset="2"/>
+              <a:buChar char="Ø"/>
+            </a:pPr>
+            <a:r>
+              <a:rPr lang="ko-KR" altLang="en-US" sz="1600" dirty="0"/>
+              <a:t>이러한 한계를 극복하기 위한 대안이 </a:t>
+            </a:r>
+            <a:r>
+              <a:rPr lang="ko-KR" altLang="en-US" sz="1600" dirty="0" err="1"/>
+              <a:t>부유식</a:t>
+            </a:r>
+            <a:r>
+              <a:rPr lang="ko-KR" altLang="en-US" sz="1600" dirty="0"/>
+              <a:t> 저장 및 재기화 설비 이며</a:t>
+            </a:r>
+            <a:r>
+              <a:rPr lang="en-US" altLang="ko-KR" sz="1600" dirty="0"/>
+              <a:t>, </a:t>
+            </a:r>
+            <a:r>
+              <a:rPr lang="ko-KR" altLang="en-US" sz="1600" dirty="0"/>
+              <a:t>이는 초기 투자비용을 절감하고</a:t>
+            </a:r>
+            <a:r>
+              <a:rPr lang="en-US" altLang="ko-KR" sz="1600" dirty="0"/>
+              <a:t>, </a:t>
+            </a:r>
+            <a:r>
+              <a:rPr lang="ko-KR" altLang="en-US" sz="1600" dirty="0"/>
+              <a:t>신속한 배치가 가능하다는 점에서 신흥국 시장에서 광범위하게 채택되고 있다</a:t>
+            </a:r>
+            <a:r>
+              <a:rPr lang="en-US" altLang="ko-KR" sz="1600" dirty="0"/>
+              <a:t>.</a:t>
+            </a:r>
+          </a:p>
+        </p:txBody>
+      </p:sp>
+      <p:pic>
+        <p:nvPicPr>
+          <p:cNvPr id="5" name="그림 4">
+            <a:extLst>
+              <a:ext uri="{FF2B5EF4-FFF2-40B4-BE49-F238E27FC236}">
+                <a16:creationId xmlns:a16="http://schemas.microsoft.com/office/drawing/2014/main" id="{3736BE1C-4ED8-BE9F-1913-1F5FCA0FA896}"/>
+              </a:ext>
+            </a:extLst>
+          </p:cNvPr>
+          <p:cNvPicPr>
+            <a:picLocks noChangeAspect="1"/>
+          </p:cNvPicPr>
+          <p:nvPr/>
+        </p:nvPicPr>
+        <p:blipFill rotWithShape="1">
+          <a:blip r:embed="rId2"/>
+          <a:srcRect r="5292"/>
+          <a:stretch>
+            <a:fillRect/>
+          </a:stretch>
+        </p:blipFill>
+        <p:spPr>
+          <a:xfrm>
+            <a:off x="6348255" y="3645192"/>
+            <a:ext cx="5554955" cy="2891715"/>
+          </a:xfrm>
+          <a:prstGeom prst="rect">
+            <a:avLst/>
+          </a:prstGeom>
+        </p:spPr>
+      </p:pic>
+      <p:sp>
+        <p:nvSpPr>
+          <p:cNvPr id="6" name="TextBox 5">
+            <a:extLst>
+              <a:ext uri="{FF2B5EF4-FFF2-40B4-BE49-F238E27FC236}">
+                <a16:creationId xmlns:a16="http://schemas.microsoft.com/office/drawing/2014/main" id="{BFBB1B0C-7D04-3FAA-B7B2-C7F3F0B7BD7D}"/>
+              </a:ext>
+            </a:extLst>
+          </p:cNvPr>
+          <p:cNvSpPr txBox="1"/>
+          <p:nvPr/>
+        </p:nvSpPr>
+        <p:spPr>
+          <a:xfrm>
+            <a:off x="7512785" y="3570199"/>
+            <a:ext cx="3225894" cy="253916"/>
+          </a:xfrm>
+          <a:prstGeom prst="rect">
+            <a:avLst/>
+          </a:prstGeom>
+          <a:noFill/>
+        </p:spPr>
+        <p:txBody>
+          <a:bodyPr wrap="square">
+            <a:spAutoFit/>
+          </a:bodyPr>
+          <a:lstStyle/>
+          <a:p>
+            <a:pPr algn="ctr"/>
+            <a:r>
+              <a:rPr lang="en-US" altLang="ko-KR" sz="1050" spc="-50" dirty="0"/>
+              <a:t>&lt; </a:t>
+            </a:r>
+            <a:r>
+              <a:rPr lang="ko-KR" altLang="en-US" sz="1050" spc="-50" dirty="0"/>
+              <a:t>주요 국가의 천연가스 수입량  </a:t>
+            </a:r>
+            <a:r>
+              <a:rPr lang="en-US" altLang="ko-KR" sz="1050" spc="-50" dirty="0"/>
+              <a:t>(10</a:t>
+            </a:r>
+            <a:r>
+              <a:rPr lang="ko-KR" altLang="en-US" sz="1050" spc="-50" dirty="0"/>
+              <a:t>억 </a:t>
+            </a:r>
+            <a:r>
+              <a:rPr lang="ko-KR" altLang="en-US" sz="1050" spc="-50" dirty="0" err="1"/>
+              <a:t>입방미터</a:t>
+            </a:r>
+            <a:r>
+              <a:rPr lang="en-US" altLang="ko-KR" sz="1050" spc="-50" dirty="0"/>
+              <a:t>) &gt;</a:t>
+            </a:r>
+            <a:endParaRPr lang="ko-KR" altLang="en-US" sz="1050" dirty="0"/>
+          </a:p>
+        </p:txBody>
+      </p:sp>
+      <p:sp>
+        <p:nvSpPr>
+          <p:cNvPr id="8" name="TextBox 7">
+            <a:extLst>
+              <a:ext uri="{FF2B5EF4-FFF2-40B4-BE49-F238E27FC236}">
+                <a16:creationId xmlns:a16="http://schemas.microsoft.com/office/drawing/2014/main" id="{F1F33EDC-027D-1970-6B61-0B9CA05B79C2}"/>
+              </a:ext>
+            </a:extLst>
+          </p:cNvPr>
+          <p:cNvSpPr txBox="1"/>
+          <p:nvPr/>
+        </p:nvSpPr>
+        <p:spPr>
+          <a:xfrm>
+            <a:off x="288791" y="3334360"/>
+            <a:ext cx="6165018" cy="2260683"/>
+          </a:xfrm>
+          <a:prstGeom prst="rect">
+            <a:avLst/>
+          </a:prstGeom>
+          <a:noFill/>
+        </p:spPr>
+        <p:txBody>
+          <a:bodyPr wrap="square" rtlCol="0" anchor="t">
+            <a:spAutoFit/>
+          </a:bodyPr>
+          <a:lstStyle/>
+          <a:p>
+            <a:pPr marL="377825" indent="-285750">
+              <a:lnSpc>
+                <a:spcPct val="150000"/>
+              </a:lnSpc>
+              <a:buFont typeface="Arial" panose="020B0604020202020204" pitchFamily="34" charset="0"/>
+              <a:buChar char="•"/>
+            </a:pPr>
+            <a:r>
+              <a:rPr lang="ko-KR" altLang="en-US" sz="1600" dirty="0"/>
+              <a:t>오른쪽 그래프에서 보듯이 </a:t>
+            </a:r>
+            <a:r>
+              <a:rPr lang="en-US" altLang="ko-KR" sz="1600" dirty="0"/>
+              <a:t>LNG</a:t>
+            </a:r>
+            <a:r>
+              <a:rPr lang="ko-KR" altLang="en-US" sz="1600" dirty="0"/>
+              <a:t> 주요 수입국은 중국</a:t>
+            </a:r>
+            <a:r>
+              <a:rPr lang="en-US" altLang="ko-KR" sz="1600" dirty="0"/>
+              <a:t>, </a:t>
+            </a:r>
+            <a:r>
+              <a:rPr lang="ko-KR" altLang="en-US" sz="1600" dirty="0"/>
+              <a:t>인도</a:t>
+            </a:r>
+            <a:r>
+              <a:rPr lang="en-US" altLang="ko-KR" sz="1600" dirty="0"/>
+              <a:t>, </a:t>
+            </a:r>
+            <a:r>
+              <a:rPr lang="ko-KR" altLang="en-US" sz="1600" dirty="0"/>
+              <a:t>일본</a:t>
+            </a:r>
+            <a:r>
+              <a:rPr lang="en-US" altLang="ko-KR" sz="1600" dirty="0"/>
+              <a:t>, </a:t>
+            </a:r>
+            <a:r>
+              <a:rPr lang="ko-KR" altLang="en-US" sz="1600" dirty="0"/>
+              <a:t>한국</a:t>
+            </a:r>
+            <a:r>
+              <a:rPr lang="en-US" altLang="ko-KR" sz="1600" dirty="0"/>
+              <a:t>, </a:t>
+            </a:r>
+            <a:r>
+              <a:rPr lang="ko-KR" altLang="en-US" sz="1600" dirty="0"/>
+              <a:t>프랑스</a:t>
+            </a:r>
+            <a:r>
+              <a:rPr lang="en-US" altLang="ko-KR" sz="1600" dirty="0"/>
+              <a:t>, </a:t>
+            </a:r>
+            <a:r>
+              <a:rPr lang="ko-KR" altLang="en-US" sz="1600" dirty="0"/>
+              <a:t>대만 등이다</a:t>
+            </a:r>
+            <a:r>
+              <a:rPr lang="en-US" altLang="ko-KR" sz="1600" dirty="0"/>
+              <a:t>.</a:t>
+            </a:r>
+          </a:p>
+          <a:p>
+            <a:pPr marL="835025" lvl="1" indent="-285750">
+              <a:lnSpc>
+                <a:spcPct val="150000"/>
+              </a:lnSpc>
+              <a:buFont typeface="Wingdings" panose="05000000000000000000" pitchFamily="2" charset="2"/>
+              <a:buChar char="ü"/>
+            </a:pPr>
+            <a:r>
+              <a:rPr lang="en-US" altLang="ko-KR" sz="1600" dirty="0"/>
+              <a:t>2013-2023</a:t>
+            </a:r>
+            <a:r>
+              <a:rPr lang="ko-KR" altLang="en-US" sz="1600" dirty="0"/>
+              <a:t>년 기간동안 중국</a:t>
+            </a:r>
+            <a:r>
+              <a:rPr lang="en-US" altLang="ko-KR" sz="1600" dirty="0"/>
+              <a:t>, </a:t>
+            </a:r>
+            <a:r>
+              <a:rPr lang="ko-KR" altLang="en-US" sz="1600" dirty="0"/>
+              <a:t>한국</a:t>
+            </a:r>
+            <a:r>
+              <a:rPr lang="en-US" altLang="ko-KR" sz="1600" dirty="0"/>
+              <a:t>, </a:t>
+            </a:r>
+            <a:r>
+              <a:rPr lang="ko-KR" altLang="en-US" sz="1600" dirty="0"/>
+              <a:t>인도를 중심으로 증가하고 있다</a:t>
+            </a:r>
+            <a:r>
+              <a:rPr lang="en-US" altLang="ko-KR" sz="1600" dirty="0"/>
+              <a:t>.</a:t>
+            </a:r>
+          </a:p>
+          <a:p>
+            <a:pPr marL="1349375" lvl="2" indent="-342900">
+              <a:lnSpc>
+                <a:spcPct val="150000"/>
+              </a:lnSpc>
+              <a:buFont typeface="Wingdings" panose="05000000000000000000" pitchFamily="2" charset="2"/>
+              <a:buChar char="Ø"/>
+            </a:pPr>
+            <a:r>
+              <a:rPr lang="ko-KR" altLang="en-US" sz="1600" dirty="0"/>
+              <a:t>특히 중국은 동 기간에 수입량이 </a:t>
+            </a:r>
+            <a:r>
+              <a:rPr lang="en-US" altLang="ko-KR" sz="1600" dirty="0"/>
+              <a:t>25.2</a:t>
+            </a:r>
+            <a:r>
+              <a:rPr lang="ko-KR" altLang="en-US" sz="1600" dirty="0"/>
+              <a:t>에서 </a:t>
+            </a:r>
+            <a:r>
+              <a:rPr lang="en-US" altLang="ko-KR" sz="1600" dirty="0"/>
+              <a:t>97.8</a:t>
+            </a:r>
+            <a:r>
+              <a:rPr lang="ko-KR" altLang="en-US" sz="1600" dirty="0"/>
+              <a:t>로 증가하였으며</a:t>
+            </a:r>
+            <a:r>
+              <a:rPr lang="en-US" altLang="ko-KR" sz="1600" dirty="0"/>
+              <a:t>, </a:t>
+            </a:r>
+            <a:r>
+              <a:rPr lang="ko-KR" altLang="en-US" sz="1600" dirty="0"/>
+              <a:t>연평균 </a:t>
+            </a:r>
+            <a:r>
+              <a:rPr lang="en-US" altLang="ko-KR" sz="1600" dirty="0"/>
+              <a:t>14.6% </a:t>
+            </a:r>
+            <a:r>
+              <a:rPr lang="ko-KR" altLang="en-US" sz="1600" dirty="0"/>
+              <a:t>증가세를 보였다</a:t>
+            </a:r>
+            <a:r>
+              <a:rPr lang="en-US" altLang="ko-KR" sz="1600" dirty="0"/>
+              <a:t>.</a:t>
+            </a:r>
+          </a:p>
+        </p:txBody>
+      </p:sp>
+    </p:spTree>
+    <p:extLst>
+      <p:ext uri="{BB962C8B-B14F-4D97-AF65-F5344CB8AC3E}">
+        <p14:creationId xmlns:p14="http://schemas.microsoft.com/office/powerpoint/2010/main" val="2430887983"/>
+      </p:ext>
+    </p:extLst>
+  </p:cSld>
+  <p:clrMapOvr>
+    <a:masterClrMapping/>
+  </p:clrMapOvr>
+</p:sld>
+</file>
+
+<file path=ppt/slides/slide33.xml><?xml version="1.0" encoding="utf-8"?>
+<p:sld xmlns:a="http://schemas.openxmlformats.org/drawingml/2006/main" xmlns:r="http://schemas.openxmlformats.org/officeDocument/2006/relationships" xmlns:p="http://schemas.openxmlformats.org/presentationml/2006/main">
+  <p:cSld>
+    <p:spTree>
+      <p:nvGrpSpPr>
+        <p:cNvPr id="1" name="">
+          <a:extLst>
+            <a:ext uri="{FF2B5EF4-FFF2-40B4-BE49-F238E27FC236}">
+              <a16:creationId xmlns:a16="http://schemas.microsoft.com/office/drawing/2014/main" id="{69943A93-811A-7438-46BE-889A474EA297}"/>
+            </a:ext>
+          </a:extLst>
+        </p:cNvPr>
+        <p:cNvGrpSpPr/>
+        <p:nvPr/>
+      </p:nvGrpSpPr>
+      <p:grpSpPr>
+        <a:xfrm>
+          <a:off x="0" y="0"/>
+          <a:ext cx="0" cy="0"/>
+          <a:chOff x="0" y="0"/>
+          <a:chExt cx="0" cy="0"/>
+        </a:xfrm>
+      </p:grpSpPr>
+      <p:sp>
+        <p:nvSpPr>
+          <p:cNvPr id="2" name="제목 1">
+            <a:extLst>
+              <a:ext uri="{FF2B5EF4-FFF2-40B4-BE49-F238E27FC236}">
+                <a16:creationId xmlns:a16="http://schemas.microsoft.com/office/drawing/2014/main" id="{EE37FFF7-50F9-EC5D-F629-AAA85F8C74A3}"/>
+              </a:ext>
+            </a:extLst>
+          </p:cNvPr>
+          <p:cNvSpPr>
+            <a:spLocks noGrp="1"/>
+          </p:cNvSpPr>
+          <p:nvPr>
+            <p:ph type="title"/>
+          </p:nvPr>
+        </p:nvSpPr>
+        <p:spPr/>
+        <p:txBody>
+          <a:bodyPr/>
+          <a:lstStyle/>
+          <a:p>
+            <a:r>
+              <a:rPr lang="ko-KR" altLang="en-US" dirty="0"/>
+              <a:t>천연가스 소비</a:t>
+            </a:r>
+          </a:p>
+        </p:txBody>
+      </p:sp>
+      <p:sp>
+        <p:nvSpPr>
+          <p:cNvPr id="4" name="슬라이드 번호 개체 틀 3">
+            <a:extLst>
+              <a:ext uri="{FF2B5EF4-FFF2-40B4-BE49-F238E27FC236}">
+                <a16:creationId xmlns:a16="http://schemas.microsoft.com/office/drawing/2014/main" id="{FB27DCB1-B9DA-147E-0B55-B74914C0954A}"/>
+              </a:ext>
+            </a:extLst>
+          </p:cNvPr>
+          <p:cNvSpPr>
+            <a:spLocks noGrp="1"/>
+          </p:cNvSpPr>
+          <p:nvPr>
+            <p:ph type="sldNum" sz="quarter" idx="12"/>
+          </p:nvPr>
+        </p:nvSpPr>
+        <p:spPr/>
+        <p:txBody>
+          <a:bodyPr/>
+          <a:lstStyle/>
+          <a:p>
+            <a:fld id="{109C872D-39A9-4065-8BF3-6A613116E2A1}" type="slidenum">
+              <a:rPr lang="ko-KR" altLang="en-US" smtClean="0"/>
+              <a:t>33</a:t>
+            </a:fld>
+            <a:endParaRPr lang="ko-KR" altLang="en-US"/>
+          </a:p>
+        </p:txBody>
+      </p:sp>
+      <p:sp>
+        <p:nvSpPr>
+          <p:cNvPr id="3" name="TextBox 2">
+            <a:extLst>
+              <a:ext uri="{FF2B5EF4-FFF2-40B4-BE49-F238E27FC236}">
+                <a16:creationId xmlns:a16="http://schemas.microsoft.com/office/drawing/2014/main" id="{94017E8F-A809-1BFB-9CD5-F388D10C5549}"/>
+              </a:ext>
+            </a:extLst>
+          </p:cNvPr>
+          <p:cNvSpPr txBox="1"/>
+          <p:nvPr/>
+        </p:nvSpPr>
+        <p:spPr>
+          <a:xfrm>
+            <a:off x="288790" y="958844"/>
+            <a:ext cx="11118453" cy="4476675"/>
+          </a:xfrm>
+          <a:prstGeom prst="rect">
+            <a:avLst/>
+          </a:prstGeom>
+          <a:noFill/>
+        </p:spPr>
+        <p:txBody>
+          <a:bodyPr wrap="square" rtlCol="0" anchor="t">
+            <a:spAutoFit/>
+          </a:bodyPr>
+          <a:lstStyle/>
+          <a:p>
+            <a:pPr marL="377825" indent="-285750">
+              <a:lnSpc>
+                <a:spcPct val="150000"/>
+              </a:lnSpc>
+              <a:buFont typeface="Arial" panose="020B0604020202020204" pitchFamily="34" charset="0"/>
+              <a:buChar char="•"/>
+            </a:pPr>
+            <a:r>
+              <a:rPr lang="ko-KR" altLang="en-US" sz="1600" dirty="0"/>
+              <a:t>글로벌 </a:t>
+            </a:r>
+            <a:r>
+              <a:rPr lang="en-US" altLang="ko-KR" sz="1600" dirty="0"/>
+              <a:t>LNG </a:t>
+            </a:r>
+            <a:r>
+              <a:rPr lang="ko-KR" altLang="en-US" sz="1600" dirty="0"/>
+              <a:t>수출 시장은 과거 몇몇 중동 및 동남아시아 국가에 집중되어 있었으나</a:t>
+            </a:r>
+            <a:r>
+              <a:rPr lang="en-US" altLang="ko-KR" sz="1600" dirty="0"/>
+              <a:t>, </a:t>
+            </a:r>
+            <a:r>
+              <a:rPr lang="ko-KR" altLang="en-US" sz="1600" dirty="0"/>
+              <a:t>최근 수십년간 기술 혁신과 투자 확대를 통해 공급국의 지리적 다양성이 확대되고 있다</a:t>
+            </a:r>
+            <a:r>
+              <a:rPr lang="en-US" altLang="ko-KR" sz="1600" dirty="0"/>
+              <a:t>.</a:t>
+            </a:r>
+          </a:p>
+          <a:p>
+            <a:pPr marL="835025" lvl="1" indent="-285750">
+              <a:lnSpc>
+                <a:spcPct val="150000"/>
+              </a:lnSpc>
+              <a:buFont typeface="Wingdings" panose="05000000000000000000" pitchFamily="2" charset="2"/>
+              <a:buChar char="ü"/>
+            </a:pPr>
+            <a:r>
+              <a:rPr lang="ko-KR" altLang="en-US" sz="1600" dirty="0"/>
+              <a:t>전통적으로 카타르</a:t>
+            </a:r>
+            <a:r>
+              <a:rPr lang="en-US" altLang="ko-KR" sz="1600" dirty="0"/>
+              <a:t>, </a:t>
+            </a:r>
+            <a:r>
+              <a:rPr lang="ko-KR" altLang="en-US" sz="1600" dirty="0"/>
+              <a:t>말레이시아</a:t>
+            </a:r>
+            <a:r>
+              <a:rPr lang="en-US" altLang="ko-KR" sz="1600" dirty="0"/>
+              <a:t>, </a:t>
+            </a:r>
+            <a:r>
+              <a:rPr lang="ko-KR" altLang="en-US" sz="1600" dirty="0"/>
+              <a:t>인도네시아 등은 세계 </a:t>
+            </a:r>
+            <a:r>
+              <a:rPr lang="en-US" altLang="ko-KR" sz="1600" dirty="0"/>
+              <a:t>LNG </a:t>
+            </a:r>
+            <a:r>
+              <a:rPr lang="ko-KR" altLang="en-US" sz="1600" dirty="0"/>
+              <a:t>수출량의 대부분을 차지해왔다</a:t>
+            </a:r>
+            <a:r>
+              <a:rPr lang="en-US" altLang="ko-KR" sz="1600" dirty="0"/>
+              <a:t>.</a:t>
+            </a:r>
+          </a:p>
+          <a:p>
+            <a:pPr marL="835025" lvl="1" indent="-285750">
+              <a:lnSpc>
+                <a:spcPct val="150000"/>
+              </a:lnSpc>
+              <a:buFont typeface="Wingdings" panose="05000000000000000000" pitchFamily="2" charset="2"/>
+              <a:buChar char="ü"/>
+            </a:pPr>
+            <a:r>
+              <a:rPr lang="ko-KR" altLang="en-US" sz="1600" dirty="0"/>
+              <a:t>최근에는 미국과 호주가 주요 수출국으로 급부상하면서 글로벌 수출 구조에 큰 변화를 가져왔다</a:t>
+            </a:r>
+            <a:r>
+              <a:rPr lang="en-US" altLang="ko-KR" sz="1600" dirty="0"/>
+              <a:t>.</a:t>
+            </a:r>
+          </a:p>
+          <a:p>
+            <a:pPr marL="1292225" lvl="2" indent="-285750">
+              <a:lnSpc>
+                <a:spcPct val="150000"/>
+              </a:lnSpc>
+              <a:buFont typeface="Wingdings" panose="05000000000000000000" pitchFamily="2" charset="2"/>
+              <a:buChar char="Ø"/>
+            </a:pPr>
+            <a:r>
+              <a:rPr lang="ko-KR" altLang="en-US" sz="1600" dirty="0"/>
+              <a:t>미국은 </a:t>
+            </a:r>
+            <a:r>
+              <a:rPr lang="ko-KR" altLang="en-US" sz="1600" dirty="0" err="1"/>
+              <a:t>셰일가스</a:t>
+            </a:r>
+            <a:r>
+              <a:rPr lang="ko-KR" altLang="en-US" sz="1600" dirty="0"/>
+              <a:t> 생산량의 급증과 함께 사빈패스</a:t>
+            </a:r>
+            <a:r>
+              <a:rPr lang="en-US" altLang="ko-KR" sz="1600" dirty="0"/>
+              <a:t>, </a:t>
+            </a:r>
+            <a:r>
+              <a:rPr lang="ko-KR" altLang="en-US" sz="1600" dirty="0"/>
+              <a:t>캐머런</a:t>
+            </a:r>
+            <a:r>
+              <a:rPr lang="en-US" altLang="ko-KR" sz="1600" dirty="0"/>
+              <a:t>, </a:t>
+            </a:r>
+            <a:r>
+              <a:rPr lang="ko-KR" altLang="en-US" sz="1600" dirty="0" err="1"/>
+              <a:t>프리포트</a:t>
+            </a:r>
+            <a:r>
+              <a:rPr lang="ko-KR" altLang="en-US" sz="1600" dirty="0"/>
+              <a:t> </a:t>
+            </a:r>
+            <a:r>
+              <a:rPr lang="en-US" altLang="ko-KR" sz="1600" dirty="0"/>
+              <a:t>(</a:t>
+            </a:r>
+            <a:r>
+              <a:rPr lang="ko-KR" altLang="en-US" sz="1600" dirty="0"/>
+              <a:t>미국 지명</a:t>
+            </a:r>
+            <a:r>
+              <a:rPr lang="en-US" altLang="ko-KR" sz="1600" dirty="0"/>
+              <a:t>)</a:t>
+            </a:r>
+            <a:r>
+              <a:rPr lang="ko-KR" altLang="en-US" sz="1600" dirty="0"/>
+              <a:t> 등 주요 액화설비에 대한 공격적인 투자를 통해 </a:t>
+            </a:r>
+            <a:r>
+              <a:rPr lang="en-US" altLang="ko-KR" sz="1600" dirty="0"/>
+              <a:t>2016</a:t>
+            </a:r>
+            <a:r>
+              <a:rPr lang="ko-KR" altLang="en-US" sz="1600" dirty="0"/>
+              <a:t>년 이후 본격적인 수출국으로 부상하였고</a:t>
+            </a:r>
+            <a:r>
+              <a:rPr lang="en-US" altLang="ko-KR" sz="1600" dirty="0"/>
+              <a:t>, 2023</a:t>
+            </a:r>
+            <a:r>
+              <a:rPr lang="ko-KR" altLang="en-US" sz="1600" dirty="0"/>
+              <a:t>년에는 세계 최대 </a:t>
+            </a:r>
+            <a:r>
+              <a:rPr lang="en-US" altLang="ko-KR" sz="1600" dirty="0"/>
+              <a:t>LNG</a:t>
+            </a:r>
+            <a:r>
+              <a:rPr lang="ko-KR" altLang="en-US" sz="1600" dirty="0"/>
+              <a:t> 수출국이 되었다</a:t>
+            </a:r>
+            <a:r>
+              <a:rPr lang="en-US" altLang="ko-KR" sz="1600" dirty="0"/>
+              <a:t>.</a:t>
+            </a:r>
+          </a:p>
+          <a:p>
+            <a:pPr marL="1292225" lvl="2" indent="-285750">
+              <a:lnSpc>
+                <a:spcPct val="150000"/>
+              </a:lnSpc>
+              <a:buFont typeface="Wingdings" panose="05000000000000000000" pitchFamily="2" charset="2"/>
+              <a:buChar char="Ø"/>
+            </a:pPr>
+            <a:r>
+              <a:rPr lang="ko-KR" altLang="en-US" sz="1600" dirty="0"/>
+              <a:t>호주는 고르곤</a:t>
+            </a:r>
+            <a:r>
+              <a:rPr lang="en-US" altLang="ko-KR" sz="1600" dirty="0"/>
+              <a:t>, </a:t>
+            </a:r>
+            <a:r>
+              <a:rPr lang="ko-KR" altLang="en-US" sz="1600" dirty="0" err="1"/>
+              <a:t>휘트스톤</a:t>
+            </a:r>
+            <a:r>
+              <a:rPr lang="en-US" altLang="ko-KR" sz="1600" dirty="0"/>
+              <a:t>, </a:t>
+            </a:r>
+            <a:r>
+              <a:rPr lang="ko-KR" altLang="en-US" sz="1600" dirty="0" err="1"/>
+              <a:t>이치시스</a:t>
+            </a:r>
+            <a:r>
+              <a:rPr lang="en-US" altLang="ko-KR" sz="1600" dirty="0"/>
+              <a:t>, </a:t>
+            </a:r>
+            <a:r>
+              <a:rPr lang="ko-KR" altLang="en-US" sz="1600" dirty="0" err="1"/>
+              <a:t>프렐류드</a:t>
+            </a:r>
+            <a:r>
+              <a:rPr lang="ko-KR" altLang="en-US" sz="1600" dirty="0"/>
+              <a:t> </a:t>
+            </a:r>
+            <a:r>
+              <a:rPr lang="en-US" altLang="ko-KR" sz="1600" dirty="0"/>
+              <a:t>(</a:t>
+            </a:r>
+            <a:r>
+              <a:rPr lang="ko-KR" altLang="en-US" sz="1600" dirty="0"/>
+              <a:t>호주 지명</a:t>
+            </a:r>
+            <a:r>
+              <a:rPr lang="en-US" altLang="ko-KR" sz="1600" dirty="0"/>
+              <a:t>) </a:t>
+            </a:r>
+            <a:r>
+              <a:rPr lang="ko-KR" altLang="en-US" sz="1600" dirty="0"/>
+              <a:t>등 대형 프로젝트를 완공하며</a:t>
+            </a:r>
+            <a:r>
+              <a:rPr lang="en-US" altLang="ko-KR" sz="1600" dirty="0"/>
+              <a:t>, </a:t>
+            </a:r>
+            <a:r>
+              <a:rPr lang="ko-KR" altLang="en-US" sz="1600" dirty="0"/>
+              <a:t>카타르와 함께 </a:t>
+            </a:r>
+            <a:r>
+              <a:rPr lang="en-US" altLang="ko-KR" sz="1600" dirty="0"/>
+              <a:t>2020</a:t>
+            </a:r>
+            <a:r>
+              <a:rPr lang="ko-KR" altLang="en-US" sz="1600" dirty="0"/>
+              <a:t>년대 초반까지 세계 </a:t>
+            </a:r>
+            <a:r>
+              <a:rPr lang="en-US" altLang="ko-KR" sz="1600" dirty="0"/>
+              <a:t>1~2</a:t>
+            </a:r>
+            <a:r>
+              <a:rPr lang="ko-KR" altLang="en-US" sz="1600" dirty="0"/>
+              <a:t>위를 다투는 위치까지 올랐다</a:t>
+            </a:r>
+            <a:r>
+              <a:rPr lang="en-US" altLang="ko-KR" sz="1600" dirty="0"/>
+              <a:t>.</a:t>
+            </a:r>
+          </a:p>
+          <a:p>
+            <a:pPr marL="835025" lvl="1" indent="-285750">
+              <a:lnSpc>
+                <a:spcPct val="150000"/>
+              </a:lnSpc>
+              <a:buFont typeface="Wingdings" panose="05000000000000000000" pitchFamily="2" charset="2"/>
+              <a:buChar char="ü"/>
+            </a:pPr>
+            <a:r>
+              <a:rPr lang="ko-KR" altLang="en-US" sz="1600" dirty="0"/>
+              <a:t>이와 같은 수출국 다변화는 천연가스 시장의 지역 편중을 완화시켰다</a:t>
+            </a:r>
+            <a:r>
+              <a:rPr lang="en-US" altLang="ko-KR" sz="1600" dirty="0"/>
+              <a:t>.</a:t>
+            </a:r>
+          </a:p>
+          <a:p>
+            <a:pPr marL="835025" lvl="1" indent="-285750">
+              <a:lnSpc>
+                <a:spcPct val="150000"/>
+              </a:lnSpc>
+              <a:buFont typeface="Wingdings" panose="05000000000000000000" pitchFamily="2" charset="2"/>
+              <a:buChar char="ü"/>
+            </a:pPr>
+            <a:r>
+              <a:rPr lang="ko-KR" altLang="en-US" sz="1600" dirty="0"/>
+              <a:t>특히 미국</a:t>
+            </a:r>
+            <a:r>
+              <a:rPr lang="en-US" altLang="ko-KR" sz="1600" dirty="0"/>
+              <a:t>, </a:t>
+            </a:r>
+            <a:r>
+              <a:rPr lang="ko-KR" altLang="en-US" sz="1600" dirty="0"/>
+              <a:t>호주</a:t>
+            </a:r>
+            <a:r>
+              <a:rPr lang="en-US" altLang="ko-KR" sz="1600" dirty="0"/>
+              <a:t>, </a:t>
+            </a:r>
+            <a:r>
+              <a:rPr lang="ko-KR" altLang="en-US" sz="1600" dirty="0"/>
+              <a:t>카타르 간 경쟁 심화는 </a:t>
+            </a:r>
+            <a:r>
+              <a:rPr lang="en-US" altLang="ko-KR" sz="1600" dirty="0"/>
+              <a:t>LNG </a:t>
+            </a:r>
+            <a:r>
+              <a:rPr lang="ko-KR" altLang="en-US" sz="1600" dirty="0"/>
+              <a:t>시장을 보다 </a:t>
+            </a:r>
+            <a:r>
+              <a:rPr lang="ko-KR" altLang="en-US" sz="1600" dirty="0" err="1"/>
+              <a:t>시장지향적이고</a:t>
+            </a:r>
+            <a:r>
+              <a:rPr lang="en-US" altLang="ko-KR" sz="1600" dirty="0"/>
+              <a:t>, </a:t>
+            </a:r>
+            <a:r>
+              <a:rPr lang="ko-KR" altLang="en-US" sz="1600" dirty="0"/>
+              <a:t>역동적인 구조로 재편하게 했다</a:t>
+            </a:r>
+            <a:r>
+              <a:rPr lang="en-US" altLang="ko-KR" sz="1600" dirty="0"/>
+              <a:t>.</a:t>
+            </a:r>
+          </a:p>
+          <a:p>
+            <a:pPr marL="92075">
+              <a:lnSpc>
+                <a:spcPct val="150000"/>
+              </a:lnSpc>
+            </a:pPr>
+            <a:endParaRPr lang="en-US" altLang="ko-KR" sz="1600" dirty="0"/>
+          </a:p>
+        </p:txBody>
+      </p:sp>
+    </p:spTree>
+    <p:extLst>
+      <p:ext uri="{BB962C8B-B14F-4D97-AF65-F5344CB8AC3E}">
+        <p14:creationId xmlns:p14="http://schemas.microsoft.com/office/powerpoint/2010/main" val="782567626"/>
+      </p:ext>
+    </p:extLst>
+  </p:cSld>
+  <p:clrMapOvr>
+    <a:masterClrMapping/>
+  </p:clrMapOvr>
+</p:sld>
+</file>
+
+<file path=ppt/slides/slide34.xml><?xml version="1.0" encoding="utf-8"?>
+<p:sld xmlns:a="http://schemas.openxmlformats.org/drawingml/2006/main" xmlns:r="http://schemas.openxmlformats.org/officeDocument/2006/relationships" xmlns:p="http://schemas.openxmlformats.org/presentationml/2006/main">
+  <p:cSld>
+    <p:spTree>
+      <p:nvGrpSpPr>
+        <p:cNvPr id="1" name="">
+          <a:extLst>
+            <a:ext uri="{FF2B5EF4-FFF2-40B4-BE49-F238E27FC236}">
               <a16:creationId xmlns:a16="http://schemas.microsoft.com/office/drawing/2014/main" id="{B36C9B72-6603-1993-C74B-D1C00E451FD3}"/>
             </a:ext>
           </a:extLst>
@@ -31774,7 +33136,7 @@
           <a:p>
             <a:fld id="{109C872D-39A9-4065-8BF3-6A613116E2A1}" type="slidenum">
               <a:rPr lang="ko-KR" altLang="en-US" smtClean="0"/>
-              <a:t>30</a:t>
+              <a:t>34</a:t>
             </a:fld>
             <a:endParaRPr lang="ko-KR" altLang="en-US"/>
           </a:p>
@@ -32144,7 +33506,7 @@
 </p:sld>
 </file>
 
-<file path=ppt/slides/slide31.xml><?xml version="1.0" encoding="utf-8"?>
+<file path=ppt/slides/slide35.xml><?xml version="1.0" encoding="utf-8"?>
 <p:sld xmlns:a="http://schemas.openxmlformats.org/drawingml/2006/main" xmlns:r="http://schemas.openxmlformats.org/officeDocument/2006/relationships" xmlns:p="http://schemas.openxmlformats.org/presentationml/2006/main">
   <p:cSld>
     <p:spTree>
@@ -32218,7 +33580,7 @@
           <a:p>
             <a:fld id="{109C872D-39A9-4065-8BF3-6A613116E2A1}" type="slidenum">
               <a:rPr lang="ko-KR" altLang="en-US" smtClean="0"/>
-              <a:t>31</a:t>
+              <a:t>35</a:t>
             </a:fld>
             <a:endParaRPr lang="ko-KR" altLang="en-US"/>
           </a:p>
@@ -32609,7 +33971,7 @@
 </p:sld>
 </file>
 
-<file path=ppt/slides/slide32.xml><?xml version="1.0" encoding="utf-8"?>
+<file path=ppt/slides/slide36.xml><?xml version="1.0" encoding="utf-8"?>
 <p:sld xmlns:a="http://schemas.openxmlformats.org/drawingml/2006/main" xmlns:r="http://schemas.openxmlformats.org/officeDocument/2006/relationships" xmlns:p="http://schemas.openxmlformats.org/presentationml/2006/main">
   <p:cSld>
     <p:spTree>
@@ -32683,7 +34045,7 @@
           <a:p>
             <a:fld id="{109C872D-39A9-4065-8BF3-6A613116E2A1}" type="slidenum">
               <a:rPr lang="ko-KR" altLang="en-US" smtClean="0"/>
-              <a:t>32</a:t>
+              <a:t>36</a:t>
             </a:fld>
             <a:endParaRPr lang="ko-KR" altLang="en-US"/>
           </a:p>
@@ -33074,7 +34436,7 @@
 </p:sld>
 </file>
 
-<file path=ppt/slides/slide33.xml><?xml version="1.0" encoding="utf-8"?>
+<file path=ppt/slides/slide37.xml><?xml version="1.0" encoding="utf-8"?>
 <p:sld xmlns:a="http://schemas.openxmlformats.org/drawingml/2006/main" xmlns:r="http://schemas.openxmlformats.org/officeDocument/2006/relationships" xmlns:p="http://schemas.openxmlformats.org/presentationml/2006/main">
   <p:cSld>
     <p:spTree>
@@ -33148,7 +34510,7 @@
           <a:p>
             <a:fld id="{109C872D-39A9-4065-8BF3-6A613116E2A1}" type="slidenum">
               <a:rPr lang="ko-KR" altLang="en-US" smtClean="0"/>
-              <a:t>33</a:t>
+              <a:t>37</a:t>
             </a:fld>
             <a:endParaRPr lang="ko-KR" altLang="en-US"/>
           </a:p>
@@ -33523,7 +34885,7 @@
 </p:sld>
 </file>
 
-<file path=ppt/slides/slide34.xml><?xml version="1.0" encoding="utf-8"?>
+<file path=ppt/slides/slide38.xml><?xml version="1.0" encoding="utf-8"?>
 <p:sld xmlns:a="http://schemas.openxmlformats.org/drawingml/2006/main" xmlns:r="http://schemas.openxmlformats.org/officeDocument/2006/relationships" xmlns:p="http://schemas.openxmlformats.org/presentationml/2006/main">
   <p:cSld>
     <p:spTree>
@@ -33597,7 +34959,7 @@
           <a:p>
             <a:fld id="{109C872D-39A9-4065-8BF3-6A613116E2A1}" type="slidenum">
               <a:rPr lang="ko-KR" altLang="en-US" smtClean="0"/>
-              <a:t>34</a:t>
+              <a:t>38</a:t>
             </a:fld>
             <a:endParaRPr lang="ko-KR" altLang="en-US"/>
           </a:p>
@@ -33916,7 +35278,7 @@
 </p:sld>
 </file>
 
-<file path=ppt/slides/slide35.xml><?xml version="1.0" encoding="utf-8"?>
+<file path=ppt/slides/slide39.xml><?xml version="1.0" encoding="utf-8"?>
 <p:sld xmlns:a="http://schemas.openxmlformats.org/drawingml/2006/main" xmlns:r="http://schemas.openxmlformats.org/officeDocument/2006/relationships" xmlns:p="http://schemas.openxmlformats.org/presentationml/2006/main">
   <p:cSld>
     <p:spTree>
@@ -33990,7 +35352,7 @@
           <a:p>
             <a:fld id="{109C872D-39A9-4065-8BF3-6A613116E2A1}" type="slidenum">
               <a:rPr lang="ko-KR" altLang="en-US" smtClean="0"/>
-              <a:t>35</a:t>
+              <a:t>39</a:t>
             </a:fld>
             <a:endParaRPr lang="ko-KR" altLang="en-US"/>
           </a:p>
@@ -34378,7 +35740,480 @@
 </p:sld>
 </file>
 
-<file path=ppt/slides/slide36.xml><?xml version="1.0" encoding="utf-8"?>
+<file path=ppt/slides/slide4.xml><?xml version="1.0" encoding="utf-8"?>
+<p:sld xmlns:a="http://schemas.openxmlformats.org/drawingml/2006/main" xmlns:r="http://schemas.openxmlformats.org/officeDocument/2006/relationships" xmlns:p="http://schemas.openxmlformats.org/presentationml/2006/main">
+  <p:cSld>
+    <p:spTree>
+      <p:nvGrpSpPr>
+        <p:cNvPr id="1" name=""/>
+        <p:cNvGrpSpPr/>
+        <p:nvPr/>
+      </p:nvGrpSpPr>
+      <p:grpSpPr>
+        <a:xfrm>
+          <a:off x="0" y="0"/>
+          <a:ext cx="0" cy="0"/>
+          <a:chOff x="0" y="0"/>
+          <a:chExt cx="0" cy="0"/>
+        </a:xfrm>
+      </p:grpSpPr>
+      <p:sp>
+        <p:nvSpPr>
+          <p:cNvPr id="2" name="제목 1">
+            <a:extLst>
+              <a:ext uri="{FF2B5EF4-FFF2-40B4-BE49-F238E27FC236}">
+                <a16:creationId xmlns:a16="http://schemas.microsoft.com/office/drawing/2014/main" id="{708E53AA-7D50-5F4A-320F-293F315471D7}"/>
+              </a:ext>
+            </a:extLst>
+          </p:cNvPr>
+          <p:cNvSpPr>
+            <a:spLocks noGrp="1"/>
+          </p:cNvSpPr>
+          <p:nvPr>
+            <p:ph type="title"/>
+          </p:nvPr>
+        </p:nvSpPr>
+        <p:spPr/>
+        <p:txBody>
+          <a:bodyPr/>
+          <a:lstStyle/>
+          <a:p>
+            <a:r>
+              <a:rPr lang="ko-KR" altLang="en-US" dirty="0"/>
+              <a:t>서론</a:t>
+            </a:r>
+          </a:p>
+        </p:txBody>
+      </p:sp>
+      <p:sp>
+        <p:nvSpPr>
+          <p:cNvPr id="4" name="슬라이드 번호 개체 틀 3">
+            <a:extLst>
+              <a:ext uri="{FF2B5EF4-FFF2-40B4-BE49-F238E27FC236}">
+                <a16:creationId xmlns:a16="http://schemas.microsoft.com/office/drawing/2014/main" id="{0E66E9B2-B0DB-FDCD-AA50-636EA4E5B253}"/>
+              </a:ext>
+            </a:extLst>
+          </p:cNvPr>
+          <p:cNvSpPr>
+            <a:spLocks noGrp="1"/>
+          </p:cNvSpPr>
+          <p:nvPr>
+            <p:ph type="sldNum" sz="quarter" idx="12"/>
+          </p:nvPr>
+        </p:nvSpPr>
+        <p:spPr/>
+        <p:txBody>
+          <a:bodyPr/>
+          <a:lstStyle/>
+          <a:p>
+            <a:fld id="{109C872D-39A9-4065-8BF3-6A613116E2A1}" type="slidenum">
+              <a:rPr lang="ko-KR" altLang="en-US" smtClean="0"/>
+              <a:t>4</a:t>
+            </a:fld>
+            <a:endParaRPr lang="ko-KR" altLang="en-US"/>
+          </a:p>
+        </p:txBody>
+      </p:sp>
+      <p:sp>
+        <p:nvSpPr>
+          <p:cNvPr id="3" name="TextBox 2">
+            <a:extLst>
+              <a:ext uri="{FF2B5EF4-FFF2-40B4-BE49-F238E27FC236}">
+                <a16:creationId xmlns:a16="http://schemas.microsoft.com/office/drawing/2014/main" id="{6C27E35B-63AE-3D62-3078-BE10F308BEDD}"/>
+              </a:ext>
+            </a:extLst>
+          </p:cNvPr>
+          <p:cNvSpPr txBox="1"/>
+          <p:nvPr/>
+        </p:nvSpPr>
+        <p:spPr>
+          <a:xfrm>
+            <a:off x="288790" y="958844"/>
+            <a:ext cx="11118453" cy="5584670"/>
+          </a:xfrm>
+          <a:prstGeom prst="rect">
+            <a:avLst/>
+          </a:prstGeom>
+          <a:noFill/>
+        </p:spPr>
+        <p:txBody>
+          <a:bodyPr wrap="square" rtlCol="0" anchor="t">
+            <a:spAutoFit/>
+          </a:bodyPr>
+          <a:lstStyle/>
+          <a:p>
+            <a:pPr marL="377825" indent="-285750">
+              <a:lnSpc>
+                <a:spcPct val="150000"/>
+              </a:lnSpc>
+              <a:buFont typeface="Arial" panose="020B0604020202020204" pitchFamily="34" charset="0"/>
+              <a:buChar char="•"/>
+            </a:pPr>
+            <a:r>
+              <a:rPr lang="ko-KR" altLang="en-US" sz="1600" dirty="0"/>
+              <a:t>천연가스는 주로 메탄</a:t>
+            </a:r>
+            <a:r>
+              <a:rPr lang="en-US" altLang="ko-KR" sz="1600" dirty="0"/>
+              <a:t>(CH</a:t>
+            </a:r>
+            <a:r>
+              <a:rPr lang="en-US" altLang="ko-KR" sz="1600" baseline="-25000" dirty="0"/>
+              <a:t>4</a:t>
+            </a:r>
+            <a:r>
+              <a:rPr lang="en-US" altLang="ko-KR" sz="1600" dirty="0"/>
+              <a:t>)</a:t>
+            </a:r>
+            <a:r>
+              <a:rPr lang="ko-KR" altLang="en-US" sz="1600" dirty="0"/>
+              <a:t>으로 구성되어 있으며</a:t>
+            </a:r>
+            <a:r>
+              <a:rPr lang="en-US" altLang="ko-KR" sz="1600" dirty="0"/>
+              <a:t>, </a:t>
+            </a:r>
+            <a:r>
+              <a:rPr lang="ko-KR" altLang="en-US" sz="1600" dirty="0"/>
+              <a:t>다른 연료</a:t>
+            </a:r>
+            <a:r>
+              <a:rPr lang="en-US" altLang="ko-KR" sz="1600" dirty="0"/>
+              <a:t>(</a:t>
+            </a:r>
+            <a:r>
+              <a:rPr lang="ko-KR" altLang="en-US" sz="1600" dirty="0"/>
+              <a:t>석탄 및 석유</a:t>
+            </a:r>
+            <a:r>
+              <a:rPr lang="en-US" altLang="ko-KR" sz="1600" dirty="0"/>
+              <a:t>)</a:t>
+            </a:r>
+            <a:r>
+              <a:rPr lang="ko-KR" altLang="en-US" sz="1600" dirty="0"/>
+              <a:t>에 비해 연소할 때 배출되는 오염물질이 적어</a:t>
+            </a:r>
+            <a:r>
+              <a:rPr lang="en-US" altLang="ko-KR" sz="1600" dirty="0"/>
+              <a:t>, </a:t>
+            </a:r>
+            <a:r>
+              <a:rPr lang="ko-KR" altLang="en-US" sz="1600" dirty="0"/>
+              <a:t>화석연료 중에서는 가장 청정한 연료로 평가된다</a:t>
+            </a:r>
+            <a:r>
+              <a:rPr lang="en-US" altLang="ko-KR" sz="1600" dirty="0"/>
+              <a:t>.</a:t>
+            </a:r>
+          </a:p>
+          <a:p>
+            <a:pPr marL="835025" lvl="1" indent="-285750">
+              <a:lnSpc>
+                <a:spcPct val="150000"/>
+              </a:lnSpc>
+              <a:buFont typeface="Wingdings" panose="05000000000000000000" pitchFamily="2" charset="2"/>
+              <a:buChar char="ü"/>
+            </a:pPr>
+            <a:r>
+              <a:rPr lang="ko-KR" altLang="en-US" sz="1600" dirty="0"/>
+              <a:t>이러한 특성으로</a:t>
+            </a:r>
+            <a:r>
+              <a:rPr lang="en-US" altLang="ko-KR" sz="1600" dirty="0"/>
+              <a:t> </a:t>
+            </a:r>
+            <a:r>
+              <a:rPr lang="ko-KR" altLang="en-US" sz="1600" dirty="0"/>
+              <a:t>기후변화 대응과 에너지 전환 과정에서 </a:t>
+            </a:r>
+            <a:r>
+              <a:rPr lang="en-US" altLang="ko-KR" sz="1600" dirty="0"/>
+              <a:t>‘</a:t>
+            </a:r>
+            <a:r>
+              <a:rPr lang="ko-KR" altLang="en-US" sz="1600" dirty="0"/>
+              <a:t>교량 연료</a:t>
+            </a:r>
+            <a:r>
+              <a:rPr lang="en-US" altLang="ko-KR" sz="1600" dirty="0"/>
+              <a:t>‘</a:t>
+            </a:r>
+            <a:r>
+              <a:rPr lang="ko-KR" altLang="en-US" sz="1600" dirty="0"/>
+              <a:t>로 주목받고 있으며</a:t>
+            </a:r>
+            <a:r>
+              <a:rPr lang="en-US" altLang="ko-KR" sz="1600" dirty="0"/>
+              <a:t>, </a:t>
+            </a:r>
+            <a:r>
+              <a:rPr lang="ko-KR" altLang="en-US" sz="1600" dirty="0"/>
+              <a:t>재생에너지의 간헐성을 보완하는 유연한 발전원으로 활용 가능하다</a:t>
+            </a:r>
+            <a:r>
+              <a:rPr lang="en-US" altLang="ko-KR" sz="1600" dirty="0"/>
+              <a:t>.</a:t>
+            </a:r>
+          </a:p>
+          <a:p>
+            <a:pPr marL="377825" indent="-285750">
+              <a:lnSpc>
+                <a:spcPct val="150000"/>
+              </a:lnSpc>
+              <a:buFont typeface="Arial" panose="020B0604020202020204" pitchFamily="34" charset="0"/>
+              <a:buChar char="•"/>
+            </a:pPr>
+            <a:endParaRPr lang="en-US" altLang="ko-KR" sz="1600" dirty="0"/>
+          </a:p>
+          <a:p>
+            <a:pPr marL="377825" indent="-285750">
+              <a:lnSpc>
+                <a:spcPct val="150000"/>
+              </a:lnSpc>
+              <a:buFont typeface="Arial" panose="020B0604020202020204" pitchFamily="34" charset="0"/>
+              <a:buChar char="•"/>
+            </a:pPr>
+            <a:r>
+              <a:rPr lang="ko-KR" altLang="en-US" sz="1600" dirty="0"/>
+              <a:t>인류의 천연가스 이용은 고대까지 거슬러 올라가며</a:t>
+            </a:r>
+            <a:r>
+              <a:rPr lang="en-US" altLang="ko-KR" sz="1600" dirty="0"/>
+              <a:t>, </a:t>
+            </a:r>
+            <a:r>
+              <a:rPr lang="ko-KR" altLang="en-US" sz="1600" dirty="0"/>
+              <a:t>상징적</a:t>
+            </a:r>
+            <a:r>
+              <a:rPr lang="en-US" altLang="ko-KR" sz="1600" dirty="0"/>
+              <a:t>·</a:t>
+            </a:r>
+            <a:r>
+              <a:rPr lang="ko-KR" altLang="en-US" sz="1600" dirty="0"/>
+              <a:t>제의적 의미에 머무르고</a:t>
+            </a:r>
+            <a:r>
+              <a:rPr lang="en-US" altLang="ko-KR" sz="1600" dirty="0"/>
+              <a:t>, </a:t>
+            </a:r>
+            <a:r>
+              <a:rPr lang="ko-KR" altLang="en-US" sz="1600" dirty="0"/>
+              <a:t>본격적으로 활용되지는 않았다</a:t>
+            </a:r>
+            <a:r>
+              <a:rPr lang="en-US" altLang="ko-KR" sz="1600" dirty="0"/>
+              <a:t>.</a:t>
+            </a:r>
+          </a:p>
+          <a:p>
+            <a:pPr marL="835025" lvl="1" indent="-285750">
+              <a:lnSpc>
+                <a:spcPct val="150000"/>
+              </a:lnSpc>
+              <a:buFont typeface="Wingdings" panose="05000000000000000000" pitchFamily="2" charset="2"/>
+              <a:buChar char="ü"/>
+            </a:pPr>
+            <a:r>
+              <a:rPr lang="ko-KR" altLang="en-US" sz="1600" dirty="0"/>
+              <a:t>기원전 </a:t>
+            </a:r>
+            <a:r>
+              <a:rPr lang="en-US" altLang="ko-KR" sz="1600" dirty="0"/>
+              <a:t>1,000</a:t>
+            </a:r>
+            <a:r>
+              <a:rPr lang="ko-KR" altLang="en-US" sz="1600" dirty="0" err="1"/>
+              <a:t>년경</a:t>
+            </a:r>
+            <a:r>
+              <a:rPr lang="ko-KR" altLang="en-US" sz="1600" dirty="0"/>
+              <a:t> 중국에서는 대나무 파이프를 사용하여 천연가스를 지표로부터 추출하였다</a:t>
+            </a:r>
+            <a:r>
+              <a:rPr lang="en-US" altLang="ko-KR" sz="1600" dirty="0"/>
+              <a:t>.</a:t>
+            </a:r>
+          </a:p>
+          <a:p>
+            <a:pPr marL="835025" lvl="1" indent="-285750">
+              <a:lnSpc>
+                <a:spcPct val="150000"/>
+              </a:lnSpc>
+              <a:buFont typeface="Wingdings" panose="05000000000000000000" pitchFamily="2" charset="2"/>
+              <a:buChar char="ü"/>
+            </a:pPr>
+            <a:r>
+              <a:rPr lang="ko-KR" altLang="en-US" sz="1600" dirty="0"/>
+              <a:t>고대 그리스 및 페르시아에서도 천연가스의 자연 누출로 발생하는 </a:t>
+            </a:r>
+            <a:r>
+              <a:rPr lang="en-US" altLang="ko-KR" sz="1600" dirty="0"/>
+              <a:t>‘</a:t>
+            </a:r>
+            <a:r>
+              <a:rPr lang="ko-KR" altLang="en-US" sz="1600" dirty="0"/>
+              <a:t>영원한 불</a:t>
+            </a:r>
+            <a:r>
+              <a:rPr lang="en-US" altLang="ko-KR" sz="1600" dirty="0"/>
+              <a:t>‘</a:t>
+            </a:r>
+            <a:r>
+              <a:rPr lang="ko-KR" altLang="en-US" sz="1600" dirty="0"/>
+              <a:t>은 신성한 존재로 인식되며 종교적 의례에 사용되었다</a:t>
+            </a:r>
+            <a:r>
+              <a:rPr lang="en-US" altLang="ko-KR" sz="1600" dirty="0"/>
+              <a:t>.</a:t>
+            </a:r>
+          </a:p>
+          <a:p>
+            <a:pPr marL="835025" lvl="1" indent="-285750">
+              <a:lnSpc>
+                <a:spcPct val="150000"/>
+              </a:lnSpc>
+              <a:buFont typeface="Wingdings" panose="05000000000000000000" pitchFamily="2" charset="2"/>
+              <a:buChar char="ü"/>
+            </a:pPr>
+            <a:endParaRPr lang="en-US" altLang="ko-KR" sz="1600" dirty="0"/>
+          </a:p>
+          <a:p>
+            <a:pPr marL="377825" indent="-285750">
+              <a:lnSpc>
+                <a:spcPct val="150000"/>
+              </a:lnSpc>
+              <a:buFont typeface="Arial" panose="020B0604020202020204" pitchFamily="34" charset="0"/>
+              <a:buChar char="•"/>
+            </a:pPr>
+            <a:r>
+              <a:rPr lang="en-US" altLang="ko-KR" sz="1600" dirty="0"/>
+              <a:t>19</a:t>
+            </a:r>
+            <a:r>
+              <a:rPr lang="ko-KR" altLang="en-US" sz="1600" dirty="0"/>
+              <a:t>세기 들어 산업화에 따라 천연가스의 상업적 활용이 시작되었다</a:t>
+            </a:r>
+            <a:r>
+              <a:rPr lang="en-US" altLang="ko-KR" sz="1600" dirty="0"/>
+              <a:t>.</a:t>
+            </a:r>
+          </a:p>
+          <a:p>
+            <a:pPr marL="835025" lvl="1" indent="-285750">
+              <a:lnSpc>
+                <a:spcPct val="150000"/>
+              </a:lnSpc>
+              <a:buFont typeface="Wingdings" panose="05000000000000000000" pitchFamily="2" charset="2"/>
+              <a:buChar char="ü"/>
+            </a:pPr>
+            <a:r>
+              <a:rPr lang="en-US" altLang="ko-KR" sz="1600" dirty="0"/>
+              <a:t>1821</a:t>
+            </a:r>
+            <a:r>
+              <a:rPr lang="ko-KR" altLang="en-US" sz="1600" dirty="0"/>
+              <a:t>년 미국 뉴욕주에서 세계 최초의 천연가스 우물이 </a:t>
+            </a:r>
+            <a:r>
+              <a:rPr lang="ko-KR" altLang="en-US" sz="1600" dirty="0" err="1"/>
+              <a:t>시추되었다</a:t>
+            </a:r>
+            <a:r>
+              <a:rPr lang="en-US" altLang="ko-KR" sz="1600" dirty="0"/>
+              <a:t>.</a:t>
+            </a:r>
+          </a:p>
+          <a:p>
+            <a:pPr marL="835025" lvl="1" indent="-285750">
+              <a:lnSpc>
+                <a:spcPct val="150000"/>
+              </a:lnSpc>
+              <a:buFont typeface="Wingdings" panose="05000000000000000000" pitchFamily="2" charset="2"/>
+              <a:buChar char="ü"/>
+            </a:pPr>
+            <a:r>
+              <a:rPr lang="en-US" altLang="ko-KR" sz="1600" dirty="0"/>
+              <a:t>1850</a:t>
+            </a:r>
+            <a:r>
+              <a:rPr lang="ko-KR" altLang="en-US" sz="1600" dirty="0"/>
+              <a:t>년대 중반부터는 도시의 가로등</a:t>
+            </a:r>
+            <a:r>
+              <a:rPr lang="en-US" altLang="ko-KR" sz="1600" dirty="0"/>
+              <a:t>, </a:t>
+            </a:r>
+            <a:r>
+              <a:rPr lang="ko-KR" altLang="en-US" sz="1600" dirty="0"/>
+              <a:t>가정 난방용으로 천연가스가 사용되기 시작하였다</a:t>
+            </a:r>
+            <a:r>
+              <a:rPr lang="en-US" altLang="ko-KR" sz="1600" dirty="0"/>
+              <a:t>.</a:t>
+            </a:r>
+          </a:p>
+          <a:p>
+            <a:pPr marL="835025" lvl="1" indent="-285750">
+              <a:lnSpc>
+                <a:spcPct val="150000"/>
+              </a:lnSpc>
+              <a:buFont typeface="Wingdings" panose="05000000000000000000" pitchFamily="2" charset="2"/>
+              <a:buChar char="ü"/>
+            </a:pPr>
+            <a:r>
+              <a:rPr lang="en-US" altLang="ko-KR" sz="1600" dirty="0"/>
+              <a:t>1859</a:t>
+            </a:r>
+            <a:r>
+              <a:rPr lang="ko-KR" altLang="en-US" sz="1600" dirty="0"/>
+              <a:t>년 펜실베니아 드레이크 성공은 </a:t>
+            </a:r>
+            <a:r>
+              <a:rPr lang="en-US" altLang="ko-KR" sz="1600" dirty="0"/>
+              <a:t>(</a:t>
+            </a:r>
+            <a:r>
+              <a:rPr lang="ko-KR" altLang="en-US" sz="1600" dirty="0" err="1"/>
+              <a:t>석유챕터</a:t>
+            </a:r>
+            <a:r>
+              <a:rPr lang="en-US" altLang="ko-KR" sz="1600" dirty="0"/>
+              <a:t> </a:t>
+            </a:r>
+            <a:r>
+              <a:rPr lang="ko-KR" altLang="en-US" sz="1600" dirty="0"/>
+              <a:t>참고</a:t>
+            </a:r>
+            <a:r>
+              <a:rPr lang="en-US" altLang="ko-KR" sz="1600" dirty="0"/>
+              <a:t>)</a:t>
+            </a:r>
+            <a:r>
+              <a:rPr lang="ko-KR" altLang="en-US" sz="1600" dirty="0"/>
+              <a:t> 석유 뿐만 아니라 천연가스 산업에도 기폭제 역할을 하였다</a:t>
+            </a:r>
+            <a:r>
+              <a:rPr lang="en-US" altLang="ko-KR" sz="1600" dirty="0"/>
+              <a:t>.</a:t>
+            </a:r>
+          </a:p>
+        </p:txBody>
+      </p:sp>
+    </p:spTree>
+    <p:extLst>
+      <p:ext uri="{BB962C8B-B14F-4D97-AF65-F5344CB8AC3E}">
+        <p14:creationId xmlns:p14="http://schemas.microsoft.com/office/powerpoint/2010/main" val="152177136"/>
+      </p:ext>
+    </p:extLst>
+  </p:cSld>
+  <p:clrMapOvr>
+    <a:masterClrMapping/>
+  </p:clrMapOvr>
+</p:sld>
+</file>
+
+<file path=ppt/slides/slide40.xml><?xml version="1.0" encoding="utf-8"?>
 <p:sld xmlns:a="http://schemas.openxmlformats.org/drawingml/2006/main" xmlns:r="http://schemas.openxmlformats.org/officeDocument/2006/relationships" xmlns:p="http://schemas.openxmlformats.org/presentationml/2006/main">
   <p:cSld>
     <p:spTree>
@@ -34452,7 +36287,7 @@
           <a:p>
             <a:fld id="{109C872D-39A9-4065-8BF3-6A613116E2A1}" type="slidenum">
               <a:rPr lang="ko-KR" altLang="en-US" smtClean="0"/>
-              <a:t>36</a:t>
+              <a:t>40</a:t>
             </a:fld>
             <a:endParaRPr lang="ko-KR" altLang="en-US"/>
           </a:p>
@@ -34893,7 +36728,7 @@
 </p:sld>
 </file>
 
-<file path=ppt/slides/slide37.xml><?xml version="1.0" encoding="utf-8"?>
+<file path=ppt/slides/slide41.xml><?xml version="1.0" encoding="utf-8"?>
 <p:sld xmlns:a="http://schemas.openxmlformats.org/drawingml/2006/main" xmlns:r="http://schemas.openxmlformats.org/officeDocument/2006/relationships" xmlns:p="http://schemas.openxmlformats.org/presentationml/2006/main">
   <p:cSld>
     <p:spTree>
@@ -34976,7 +36811,7 @@
           <a:p>
             <a:fld id="{109C872D-39A9-4065-8BF3-6A613116E2A1}" type="slidenum">
               <a:rPr lang="ko-KR" altLang="en-US" smtClean="0"/>
-              <a:t>37</a:t>
+              <a:t>41</a:t>
             </a:fld>
             <a:endParaRPr lang="ko-KR" altLang="en-US"/>
           </a:p>
@@ -35036,7 +36871,7 @@
 </p:sld>
 </file>
 
-<file path=ppt/slides/slide38.xml><?xml version="1.0" encoding="utf-8"?>
+<file path=ppt/slides/slide42.xml><?xml version="1.0" encoding="utf-8"?>
 <p:sld xmlns:a="http://schemas.openxmlformats.org/drawingml/2006/main" xmlns:r="http://schemas.openxmlformats.org/officeDocument/2006/relationships" xmlns:p="http://schemas.openxmlformats.org/presentationml/2006/main">
   <p:cSld>
     <p:spTree>
@@ -35110,7 +36945,7 @@
           <a:p>
             <a:fld id="{109C872D-39A9-4065-8BF3-6A613116E2A1}" type="slidenum">
               <a:rPr lang="ko-KR" altLang="en-US" smtClean="0"/>
-              <a:t>38</a:t>
+              <a:t>42</a:t>
             </a:fld>
             <a:endParaRPr lang="ko-KR" altLang="en-US"/>
           </a:p>
@@ -35410,7 +37245,7 @@
 </p:sld>
 </file>
 
-<file path=ppt/slides/slide39.xml><?xml version="1.0" encoding="utf-8"?>
+<file path=ppt/slides/slide43.xml><?xml version="1.0" encoding="utf-8"?>
 <p:sld xmlns:a="http://schemas.openxmlformats.org/drawingml/2006/main" xmlns:r="http://schemas.openxmlformats.org/officeDocument/2006/relationships" xmlns:p="http://schemas.openxmlformats.org/presentationml/2006/main">
   <p:cSld>
     <p:spTree>
@@ -35484,7 +37319,7 @@
           <a:p>
             <a:fld id="{109C872D-39A9-4065-8BF3-6A613116E2A1}" type="slidenum">
               <a:rPr lang="ko-KR" altLang="en-US" smtClean="0"/>
-              <a:t>39</a:t>
+              <a:t>43</a:t>
             </a:fld>
             <a:endParaRPr lang="ko-KR" altLang="en-US"/>
           </a:p>
@@ -35729,480 +37564,7 @@
 </p:sld>
 </file>
 
-<file path=ppt/slides/slide4.xml><?xml version="1.0" encoding="utf-8"?>
-<p:sld xmlns:a="http://schemas.openxmlformats.org/drawingml/2006/main" xmlns:r="http://schemas.openxmlformats.org/officeDocument/2006/relationships" xmlns:p="http://schemas.openxmlformats.org/presentationml/2006/main">
-  <p:cSld>
-    <p:spTree>
-      <p:nvGrpSpPr>
-        <p:cNvPr id="1" name=""/>
-        <p:cNvGrpSpPr/>
-        <p:nvPr/>
-      </p:nvGrpSpPr>
-      <p:grpSpPr>
-        <a:xfrm>
-          <a:off x="0" y="0"/>
-          <a:ext cx="0" cy="0"/>
-          <a:chOff x="0" y="0"/>
-          <a:chExt cx="0" cy="0"/>
-        </a:xfrm>
-      </p:grpSpPr>
-      <p:sp>
-        <p:nvSpPr>
-          <p:cNvPr id="2" name="제목 1">
-            <a:extLst>
-              <a:ext uri="{FF2B5EF4-FFF2-40B4-BE49-F238E27FC236}">
-                <a16:creationId xmlns:a16="http://schemas.microsoft.com/office/drawing/2014/main" id="{708E53AA-7D50-5F4A-320F-293F315471D7}"/>
-              </a:ext>
-            </a:extLst>
-          </p:cNvPr>
-          <p:cNvSpPr>
-            <a:spLocks noGrp="1"/>
-          </p:cNvSpPr>
-          <p:nvPr>
-            <p:ph type="title"/>
-          </p:nvPr>
-        </p:nvSpPr>
-        <p:spPr/>
-        <p:txBody>
-          <a:bodyPr/>
-          <a:lstStyle/>
-          <a:p>
-            <a:r>
-              <a:rPr lang="ko-KR" altLang="en-US" dirty="0"/>
-              <a:t>서론</a:t>
-            </a:r>
-          </a:p>
-        </p:txBody>
-      </p:sp>
-      <p:sp>
-        <p:nvSpPr>
-          <p:cNvPr id="4" name="슬라이드 번호 개체 틀 3">
-            <a:extLst>
-              <a:ext uri="{FF2B5EF4-FFF2-40B4-BE49-F238E27FC236}">
-                <a16:creationId xmlns:a16="http://schemas.microsoft.com/office/drawing/2014/main" id="{0E66E9B2-B0DB-FDCD-AA50-636EA4E5B253}"/>
-              </a:ext>
-            </a:extLst>
-          </p:cNvPr>
-          <p:cNvSpPr>
-            <a:spLocks noGrp="1"/>
-          </p:cNvSpPr>
-          <p:nvPr>
-            <p:ph type="sldNum" sz="quarter" idx="12"/>
-          </p:nvPr>
-        </p:nvSpPr>
-        <p:spPr/>
-        <p:txBody>
-          <a:bodyPr/>
-          <a:lstStyle/>
-          <a:p>
-            <a:fld id="{109C872D-39A9-4065-8BF3-6A613116E2A1}" type="slidenum">
-              <a:rPr lang="ko-KR" altLang="en-US" smtClean="0"/>
-              <a:t>4</a:t>
-            </a:fld>
-            <a:endParaRPr lang="ko-KR" altLang="en-US"/>
-          </a:p>
-        </p:txBody>
-      </p:sp>
-      <p:sp>
-        <p:nvSpPr>
-          <p:cNvPr id="3" name="TextBox 2">
-            <a:extLst>
-              <a:ext uri="{FF2B5EF4-FFF2-40B4-BE49-F238E27FC236}">
-                <a16:creationId xmlns:a16="http://schemas.microsoft.com/office/drawing/2014/main" id="{6C27E35B-63AE-3D62-3078-BE10F308BEDD}"/>
-              </a:ext>
-            </a:extLst>
-          </p:cNvPr>
-          <p:cNvSpPr txBox="1"/>
-          <p:nvPr/>
-        </p:nvSpPr>
-        <p:spPr>
-          <a:xfrm>
-            <a:off x="288790" y="958844"/>
-            <a:ext cx="11118453" cy="5584670"/>
-          </a:xfrm>
-          <a:prstGeom prst="rect">
-            <a:avLst/>
-          </a:prstGeom>
-          <a:noFill/>
-        </p:spPr>
-        <p:txBody>
-          <a:bodyPr wrap="square" rtlCol="0" anchor="t">
-            <a:spAutoFit/>
-          </a:bodyPr>
-          <a:lstStyle/>
-          <a:p>
-            <a:pPr marL="377825" indent="-285750">
-              <a:lnSpc>
-                <a:spcPct val="150000"/>
-              </a:lnSpc>
-              <a:buFont typeface="Arial" panose="020B0604020202020204" pitchFamily="34" charset="0"/>
-              <a:buChar char="•"/>
-            </a:pPr>
-            <a:r>
-              <a:rPr lang="ko-KR" altLang="en-US" sz="1600" dirty="0"/>
-              <a:t>천연가스는 주로 메탄</a:t>
-            </a:r>
-            <a:r>
-              <a:rPr lang="en-US" altLang="ko-KR" sz="1600" dirty="0"/>
-              <a:t>(CH</a:t>
-            </a:r>
-            <a:r>
-              <a:rPr lang="en-US" altLang="ko-KR" sz="1600" baseline="-25000" dirty="0"/>
-              <a:t>4</a:t>
-            </a:r>
-            <a:r>
-              <a:rPr lang="en-US" altLang="ko-KR" sz="1600" dirty="0"/>
-              <a:t>)</a:t>
-            </a:r>
-            <a:r>
-              <a:rPr lang="ko-KR" altLang="en-US" sz="1600" dirty="0"/>
-              <a:t>으로 구성되어 있으며</a:t>
-            </a:r>
-            <a:r>
-              <a:rPr lang="en-US" altLang="ko-KR" sz="1600" dirty="0"/>
-              <a:t>, </a:t>
-            </a:r>
-            <a:r>
-              <a:rPr lang="ko-KR" altLang="en-US" sz="1600" dirty="0"/>
-              <a:t>다른 연료</a:t>
-            </a:r>
-            <a:r>
-              <a:rPr lang="en-US" altLang="ko-KR" sz="1600" dirty="0"/>
-              <a:t>(</a:t>
-            </a:r>
-            <a:r>
-              <a:rPr lang="ko-KR" altLang="en-US" sz="1600" dirty="0"/>
-              <a:t>석탄 및 석유</a:t>
-            </a:r>
-            <a:r>
-              <a:rPr lang="en-US" altLang="ko-KR" sz="1600" dirty="0"/>
-              <a:t>)</a:t>
-            </a:r>
-            <a:r>
-              <a:rPr lang="ko-KR" altLang="en-US" sz="1600" dirty="0"/>
-              <a:t>에 비해 연소할 때 배출되는 오염물질이 적어</a:t>
-            </a:r>
-            <a:r>
-              <a:rPr lang="en-US" altLang="ko-KR" sz="1600" dirty="0"/>
-              <a:t>, </a:t>
-            </a:r>
-            <a:r>
-              <a:rPr lang="ko-KR" altLang="en-US" sz="1600" dirty="0"/>
-              <a:t>화석연료 중에서는 가장 청정한 연료로 평가된다</a:t>
-            </a:r>
-            <a:r>
-              <a:rPr lang="en-US" altLang="ko-KR" sz="1600" dirty="0"/>
-              <a:t>.</a:t>
-            </a:r>
-          </a:p>
-          <a:p>
-            <a:pPr marL="835025" lvl="1" indent="-285750">
-              <a:lnSpc>
-                <a:spcPct val="150000"/>
-              </a:lnSpc>
-              <a:buFont typeface="Wingdings" panose="05000000000000000000" pitchFamily="2" charset="2"/>
-              <a:buChar char="ü"/>
-            </a:pPr>
-            <a:r>
-              <a:rPr lang="ko-KR" altLang="en-US" sz="1600" dirty="0"/>
-              <a:t>이러한 특성으로</a:t>
-            </a:r>
-            <a:r>
-              <a:rPr lang="en-US" altLang="ko-KR" sz="1600" dirty="0"/>
-              <a:t> </a:t>
-            </a:r>
-            <a:r>
-              <a:rPr lang="ko-KR" altLang="en-US" sz="1600" dirty="0"/>
-              <a:t>기후변화 대응과 에너지 전환 과정에서 </a:t>
-            </a:r>
-            <a:r>
-              <a:rPr lang="en-US" altLang="ko-KR" sz="1600" dirty="0"/>
-              <a:t>‘</a:t>
-            </a:r>
-            <a:r>
-              <a:rPr lang="ko-KR" altLang="en-US" sz="1600" dirty="0"/>
-              <a:t>교량 연료</a:t>
-            </a:r>
-            <a:r>
-              <a:rPr lang="en-US" altLang="ko-KR" sz="1600" dirty="0"/>
-              <a:t>‘</a:t>
-            </a:r>
-            <a:r>
-              <a:rPr lang="ko-KR" altLang="en-US" sz="1600" dirty="0"/>
-              <a:t>로 주목받고 있으며</a:t>
-            </a:r>
-            <a:r>
-              <a:rPr lang="en-US" altLang="ko-KR" sz="1600" dirty="0"/>
-              <a:t>, </a:t>
-            </a:r>
-            <a:r>
-              <a:rPr lang="ko-KR" altLang="en-US" sz="1600" dirty="0"/>
-              <a:t>재생에너지의 간헐성을 보완하는 유연한 발전원으로 활용 가능하다</a:t>
-            </a:r>
-            <a:r>
-              <a:rPr lang="en-US" altLang="ko-KR" sz="1600" dirty="0"/>
-              <a:t>.</a:t>
-            </a:r>
-          </a:p>
-          <a:p>
-            <a:pPr marL="377825" indent="-285750">
-              <a:lnSpc>
-                <a:spcPct val="150000"/>
-              </a:lnSpc>
-              <a:buFont typeface="Arial" panose="020B0604020202020204" pitchFamily="34" charset="0"/>
-              <a:buChar char="•"/>
-            </a:pPr>
-            <a:endParaRPr lang="en-US" altLang="ko-KR" sz="1600" dirty="0"/>
-          </a:p>
-          <a:p>
-            <a:pPr marL="377825" indent="-285750">
-              <a:lnSpc>
-                <a:spcPct val="150000"/>
-              </a:lnSpc>
-              <a:buFont typeface="Arial" panose="020B0604020202020204" pitchFamily="34" charset="0"/>
-              <a:buChar char="•"/>
-            </a:pPr>
-            <a:r>
-              <a:rPr lang="ko-KR" altLang="en-US" sz="1600" dirty="0"/>
-              <a:t>인류의 천연가스 이용은 고대까지 거슬러 올라가며</a:t>
-            </a:r>
-            <a:r>
-              <a:rPr lang="en-US" altLang="ko-KR" sz="1600" dirty="0"/>
-              <a:t>, </a:t>
-            </a:r>
-            <a:r>
-              <a:rPr lang="ko-KR" altLang="en-US" sz="1600" dirty="0"/>
-              <a:t>상징적</a:t>
-            </a:r>
-            <a:r>
-              <a:rPr lang="en-US" altLang="ko-KR" sz="1600" dirty="0"/>
-              <a:t>·</a:t>
-            </a:r>
-            <a:r>
-              <a:rPr lang="ko-KR" altLang="en-US" sz="1600" dirty="0"/>
-              <a:t>제의적 의미에 머무르고</a:t>
-            </a:r>
-            <a:r>
-              <a:rPr lang="en-US" altLang="ko-KR" sz="1600" dirty="0"/>
-              <a:t>, </a:t>
-            </a:r>
-            <a:r>
-              <a:rPr lang="ko-KR" altLang="en-US" sz="1600" dirty="0"/>
-              <a:t>본격적으로 활용되지는 않았다</a:t>
-            </a:r>
-            <a:r>
-              <a:rPr lang="en-US" altLang="ko-KR" sz="1600" dirty="0"/>
-              <a:t>.</a:t>
-            </a:r>
-          </a:p>
-          <a:p>
-            <a:pPr marL="835025" lvl="1" indent="-285750">
-              <a:lnSpc>
-                <a:spcPct val="150000"/>
-              </a:lnSpc>
-              <a:buFont typeface="Wingdings" panose="05000000000000000000" pitchFamily="2" charset="2"/>
-              <a:buChar char="ü"/>
-            </a:pPr>
-            <a:r>
-              <a:rPr lang="ko-KR" altLang="en-US" sz="1600" dirty="0"/>
-              <a:t>기원전 </a:t>
-            </a:r>
-            <a:r>
-              <a:rPr lang="en-US" altLang="ko-KR" sz="1600" dirty="0"/>
-              <a:t>1,000</a:t>
-            </a:r>
-            <a:r>
-              <a:rPr lang="ko-KR" altLang="en-US" sz="1600" dirty="0" err="1"/>
-              <a:t>년경</a:t>
-            </a:r>
-            <a:r>
-              <a:rPr lang="ko-KR" altLang="en-US" sz="1600" dirty="0"/>
-              <a:t> 중국에서는 대나무 파이프를 사용하여 천연가스를 지표로부터 추출하였다</a:t>
-            </a:r>
-            <a:r>
-              <a:rPr lang="en-US" altLang="ko-KR" sz="1600" dirty="0"/>
-              <a:t>.</a:t>
-            </a:r>
-          </a:p>
-          <a:p>
-            <a:pPr marL="835025" lvl="1" indent="-285750">
-              <a:lnSpc>
-                <a:spcPct val="150000"/>
-              </a:lnSpc>
-              <a:buFont typeface="Wingdings" panose="05000000000000000000" pitchFamily="2" charset="2"/>
-              <a:buChar char="ü"/>
-            </a:pPr>
-            <a:r>
-              <a:rPr lang="ko-KR" altLang="en-US" sz="1600" dirty="0"/>
-              <a:t>고대 그리스 및 페르시아에서도 천연가스의 자연 누출로 발생하는 </a:t>
-            </a:r>
-            <a:r>
-              <a:rPr lang="en-US" altLang="ko-KR" sz="1600" dirty="0"/>
-              <a:t>‘</a:t>
-            </a:r>
-            <a:r>
-              <a:rPr lang="ko-KR" altLang="en-US" sz="1600" dirty="0"/>
-              <a:t>영원한 불</a:t>
-            </a:r>
-            <a:r>
-              <a:rPr lang="en-US" altLang="ko-KR" sz="1600" dirty="0"/>
-              <a:t>‘</a:t>
-            </a:r>
-            <a:r>
-              <a:rPr lang="ko-KR" altLang="en-US" sz="1600" dirty="0"/>
-              <a:t>은 신성한 존재로 인식되며 종교적 의례에 사용되었다</a:t>
-            </a:r>
-            <a:r>
-              <a:rPr lang="en-US" altLang="ko-KR" sz="1600" dirty="0"/>
-              <a:t>.</a:t>
-            </a:r>
-          </a:p>
-          <a:p>
-            <a:pPr marL="835025" lvl="1" indent="-285750">
-              <a:lnSpc>
-                <a:spcPct val="150000"/>
-              </a:lnSpc>
-              <a:buFont typeface="Wingdings" panose="05000000000000000000" pitchFamily="2" charset="2"/>
-              <a:buChar char="ü"/>
-            </a:pPr>
-            <a:endParaRPr lang="en-US" altLang="ko-KR" sz="1600" dirty="0"/>
-          </a:p>
-          <a:p>
-            <a:pPr marL="377825" indent="-285750">
-              <a:lnSpc>
-                <a:spcPct val="150000"/>
-              </a:lnSpc>
-              <a:buFont typeface="Arial" panose="020B0604020202020204" pitchFamily="34" charset="0"/>
-              <a:buChar char="•"/>
-            </a:pPr>
-            <a:r>
-              <a:rPr lang="en-US" altLang="ko-KR" sz="1600" dirty="0"/>
-              <a:t>19</a:t>
-            </a:r>
-            <a:r>
-              <a:rPr lang="ko-KR" altLang="en-US" sz="1600" dirty="0"/>
-              <a:t>세기 들어 산업화에 따라 천연가스의 상업적 활용이 시작되었다</a:t>
-            </a:r>
-            <a:r>
-              <a:rPr lang="en-US" altLang="ko-KR" sz="1600" dirty="0"/>
-              <a:t>.</a:t>
-            </a:r>
-          </a:p>
-          <a:p>
-            <a:pPr marL="835025" lvl="1" indent="-285750">
-              <a:lnSpc>
-                <a:spcPct val="150000"/>
-              </a:lnSpc>
-              <a:buFont typeface="Wingdings" panose="05000000000000000000" pitchFamily="2" charset="2"/>
-              <a:buChar char="ü"/>
-            </a:pPr>
-            <a:r>
-              <a:rPr lang="en-US" altLang="ko-KR" sz="1600" dirty="0"/>
-              <a:t>1821</a:t>
-            </a:r>
-            <a:r>
-              <a:rPr lang="ko-KR" altLang="en-US" sz="1600" dirty="0"/>
-              <a:t>년 미국 뉴욕주에서 세계 최초의 천연가스 우물이 </a:t>
-            </a:r>
-            <a:r>
-              <a:rPr lang="ko-KR" altLang="en-US" sz="1600" dirty="0" err="1"/>
-              <a:t>시추되었다</a:t>
-            </a:r>
-            <a:r>
-              <a:rPr lang="en-US" altLang="ko-KR" sz="1600" dirty="0"/>
-              <a:t>.</a:t>
-            </a:r>
-          </a:p>
-          <a:p>
-            <a:pPr marL="835025" lvl="1" indent="-285750">
-              <a:lnSpc>
-                <a:spcPct val="150000"/>
-              </a:lnSpc>
-              <a:buFont typeface="Wingdings" panose="05000000000000000000" pitchFamily="2" charset="2"/>
-              <a:buChar char="ü"/>
-            </a:pPr>
-            <a:r>
-              <a:rPr lang="en-US" altLang="ko-KR" sz="1600" dirty="0"/>
-              <a:t>1850</a:t>
-            </a:r>
-            <a:r>
-              <a:rPr lang="ko-KR" altLang="en-US" sz="1600" dirty="0"/>
-              <a:t>년대 중반부터는 도시의 가로등</a:t>
-            </a:r>
-            <a:r>
-              <a:rPr lang="en-US" altLang="ko-KR" sz="1600" dirty="0"/>
-              <a:t>, </a:t>
-            </a:r>
-            <a:r>
-              <a:rPr lang="ko-KR" altLang="en-US" sz="1600" dirty="0"/>
-              <a:t>가정 난방용으로 천연가스가 사용되기 시작하였다</a:t>
-            </a:r>
-            <a:r>
-              <a:rPr lang="en-US" altLang="ko-KR" sz="1600" dirty="0"/>
-              <a:t>.</a:t>
-            </a:r>
-          </a:p>
-          <a:p>
-            <a:pPr marL="835025" lvl="1" indent="-285750">
-              <a:lnSpc>
-                <a:spcPct val="150000"/>
-              </a:lnSpc>
-              <a:buFont typeface="Wingdings" panose="05000000000000000000" pitchFamily="2" charset="2"/>
-              <a:buChar char="ü"/>
-            </a:pPr>
-            <a:r>
-              <a:rPr lang="en-US" altLang="ko-KR" sz="1600" dirty="0"/>
-              <a:t>1859</a:t>
-            </a:r>
-            <a:r>
-              <a:rPr lang="ko-KR" altLang="en-US" sz="1600" dirty="0"/>
-              <a:t>년 펜실베니아 드레이크 성공은 </a:t>
-            </a:r>
-            <a:r>
-              <a:rPr lang="en-US" altLang="ko-KR" sz="1600" dirty="0"/>
-              <a:t>(</a:t>
-            </a:r>
-            <a:r>
-              <a:rPr lang="ko-KR" altLang="en-US" sz="1600" dirty="0" err="1"/>
-              <a:t>석유챕터</a:t>
-            </a:r>
-            <a:r>
-              <a:rPr lang="en-US" altLang="ko-KR" sz="1600" dirty="0"/>
-              <a:t> </a:t>
-            </a:r>
-            <a:r>
-              <a:rPr lang="ko-KR" altLang="en-US" sz="1600" dirty="0"/>
-              <a:t>참고</a:t>
-            </a:r>
-            <a:r>
-              <a:rPr lang="en-US" altLang="ko-KR" sz="1600" dirty="0"/>
-              <a:t>)</a:t>
-            </a:r>
-            <a:r>
-              <a:rPr lang="ko-KR" altLang="en-US" sz="1600" dirty="0"/>
-              <a:t> 석유 뿐만 아니라 천연가스 산업에도 기폭제 역할을 하였다</a:t>
-            </a:r>
-            <a:r>
-              <a:rPr lang="en-US" altLang="ko-KR" sz="1600" dirty="0"/>
-              <a:t>.</a:t>
-            </a:r>
-          </a:p>
-        </p:txBody>
-      </p:sp>
-    </p:spTree>
-    <p:extLst>
-      <p:ext uri="{BB962C8B-B14F-4D97-AF65-F5344CB8AC3E}">
-        <p14:creationId xmlns:p14="http://schemas.microsoft.com/office/powerpoint/2010/main" val="152177136"/>
-      </p:ext>
-    </p:extLst>
-  </p:cSld>
-  <p:clrMapOvr>
-    <a:masterClrMapping/>
-  </p:clrMapOvr>
-</p:sld>
-</file>
-
-<file path=ppt/slides/slide40.xml><?xml version="1.0" encoding="utf-8"?>
+<file path=ppt/slides/slide44.xml><?xml version="1.0" encoding="utf-8"?>
 <p:sld xmlns:a="http://schemas.openxmlformats.org/drawingml/2006/main" xmlns:r="http://schemas.openxmlformats.org/officeDocument/2006/relationships" xmlns:p="http://schemas.openxmlformats.org/presentationml/2006/main">
   <p:cSld>
     <p:spTree>
@@ -36276,7 +37638,7 @@
           <a:p>
             <a:fld id="{109C872D-39A9-4065-8BF3-6A613116E2A1}" type="slidenum">
               <a:rPr lang="ko-KR" altLang="en-US" smtClean="0"/>
-              <a:t>40</a:t>
+              <a:t>44</a:t>
             </a:fld>
             <a:endParaRPr lang="ko-KR" altLang="en-US"/>
           </a:p>
@@ -36592,7 +37954,7 @@
 </p:sld>
 </file>
 
-<file path=ppt/slides/slide41.xml><?xml version="1.0" encoding="utf-8"?>
+<file path=ppt/slides/slide45.xml><?xml version="1.0" encoding="utf-8"?>
 <p:sld xmlns:a="http://schemas.openxmlformats.org/drawingml/2006/main" xmlns:r="http://schemas.openxmlformats.org/officeDocument/2006/relationships" xmlns:p="http://schemas.openxmlformats.org/presentationml/2006/main">
   <p:cSld>
     <p:spTree>
@@ -36675,7 +38037,7 @@
           <a:p>
             <a:fld id="{109C872D-39A9-4065-8BF3-6A613116E2A1}" type="slidenum">
               <a:rPr lang="ko-KR" altLang="en-US" smtClean="0"/>
-              <a:t>41</a:t>
+              <a:t>45</a:t>
             </a:fld>
             <a:endParaRPr lang="ko-KR" altLang="en-US"/>
           </a:p>
@@ -36735,7 +38097,7 @@
 </p:sld>
 </file>
 
-<file path=ppt/slides/slide42.xml><?xml version="1.0" encoding="utf-8"?>
+<file path=ppt/slides/slide46.xml><?xml version="1.0" encoding="utf-8"?>
 <p:sld xmlns:a="http://schemas.openxmlformats.org/drawingml/2006/main" xmlns:r="http://schemas.openxmlformats.org/officeDocument/2006/relationships" xmlns:p="http://schemas.openxmlformats.org/presentationml/2006/main">
   <p:cSld>
     <p:spTree>
@@ -36809,7 +38171,7 @@
           <a:p>
             <a:fld id="{109C872D-39A9-4065-8BF3-6A613116E2A1}" type="slidenum">
               <a:rPr lang="ko-KR" altLang="en-US" smtClean="0"/>
-              <a:t>42</a:t>
+              <a:t>46</a:t>
             </a:fld>
             <a:endParaRPr lang="ko-KR" altLang="en-US"/>
           </a:p>
@@ -37109,7 +38471,7 @@
 </p:sld>
 </file>
 
-<file path=ppt/slides/slide43.xml><?xml version="1.0" encoding="utf-8"?>
+<file path=ppt/slides/slide47.xml><?xml version="1.0" encoding="utf-8"?>
 <p:sld xmlns:a="http://schemas.openxmlformats.org/drawingml/2006/main" xmlns:r="http://schemas.openxmlformats.org/officeDocument/2006/relationships" xmlns:p="http://schemas.openxmlformats.org/presentationml/2006/main">
   <p:cSld>
     <p:spTree>
@@ -37183,7 +38545,7 @@
           <a:p>
             <a:fld id="{109C872D-39A9-4065-8BF3-6A613116E2A1}" type="slidenum">
               <a:rPr lang="ko-KR" altLang="en-US" smtClean="0"/>
-              <a:t>43</a:t>
+              <a:t>47</a:t>
             </a:fld>
             <a:endParaRPr lang="ko-KR" altLang="en-US"/>
           </a:p>
@@ -37594,7 +38956,7 @@
 </p:sld>
 </file>
 
-<file path=ppt/slides/slide44.xml><?xml version="1.0" encoding="utf-8"?>
+<file path=ppt/slides/slide48.xml><?xml version="1.0" encoding="utf-8"?>
 <p:sld xmlns:a="http://schemas.openxmlformats.org/drawingml/2006/main" xmlns:r="http://schemas.openxmlformats.org/officeDocument/2006/relationships" xmlns:p="http://schemas.openxmlformats.org/presentationml/2006/main">
   <p:cSld>
     <p:spTree>
@@ -37668,7 +39030,7 @@
           <a:p>
             <a:fld id="{109C872D-39A9-4065-8BF3-6A613116E2A1}" type="slidenum">
               <a:rPr lang="ko-KR" altLang="en-US" smtClean="0"/>
-              <a:t>44</a:t>
+              <a:t>48</a:t>
             </a:fld>
             <a:endParaRPr lang="ko-KR" altLang="en-US"/>
           </a:p>
@@ -37925,7 +39287,7 @@
 </p:sld>
 </file>
 
-<file path=ppt/slides/slide45.xml><?xml version="1.0" encoding="utf-8"?>
+<file path=ppt/slides/slide49.xml><?xml version="1.0" encoding="utf-8"?>
 <p:sld xmlns:a="http://schemas.openxmlformats.org/drawingml/2006/main" xmlns:r="http://schemas.openxmlformats.org/officeDocument/2006/relationships" xmlns:p="http://schemas.openxmlformats.org/presentationml/2006/main">
   <p:cSld>
     <p:spTree>
@@ -37999,7 +39361,7 @@
           <a:p>
             <a:fld id="{109C872D-39A9-4065-8BF3-6A613116E2A1}" type="slidenum">
               <a:rPr lang="ko-KR" altLang="en-US" smtClean="0"/>
-              <a:t>45</a:t>
+              <a:t>49</a:t>
             </a:fld>
             <a:endParaRPr lang="ko-KR" altLang="en-US"/>
           </a:p>
@@ -38217,7 +39579,434 @@
 </p:sld>
 </file>
 
-<file path=ppt/slides/slide46.xml><?xml version="1.0" encoding="utf-8"?>
+<file path=ppt/slides/slide5.xml><?xml version="1.0" encoding="utf-8"?>
+<p:sld xmlns:a="http://schemas.openxmlformats.org/drawingml/2006/main" xmlns:r="http://schemas.openxmlformats.org/officeDocument/2006/relationships" xmlns:p="http://schemas.openxmlformats.org/presentationml/2006/main">
+  <p:cSld>
+    <p:spTree>
+      <p:nvGrpSpPr>
+        <p:cNvPr id="1" name="">
+          <a:extLst>
+            <a:ext uri="{FF2B5EF4-FFF2-40B4-BE49-F238E27FC236}">
+              <a16:creationId xmlns:a16="http://schemas.microsoft.com/office/drawing/2014/main" id="{AA58849E-C3EC-66C2-D5C9-C59E5D5BC968}"/>
+            </a:ext>
+          </a:extLst>
+        </p:cNvPr>
+        <p:cNvGrpSpPr/>
+        <p:nvPr/>
+      </p:nvGrpSpPr>
+      <p:grpSpPr>
+        <a:xfrm>
+          <a:off x="0" y="0"/>
+          <a:ext cx="0" cy="0"/>
+          <a:chOff x="0" y="0"/>
+          <a:chExt cx="0" cy="0"/>
+        </a:xfrm>
+      </p:grpSpPr>
+      <p:sp>
+        <p:nvSpPr>
+          <p:cNvPr id="2" name="제목 1">
+            <a:extLst>
+              <a:ext uri="{FF2B5EF4-FFF2-40B4-BE49-F238E27FC236}">
+                <a16:creationId xmlns:a16="http://schemas.microsoft.com/office/drawing/2014/main" id="{B4FAA21E-A0E0-EB01-8A47-F492A782CE9A}"/>
+              </a:ext>
+            </a:extLst>
+          </p:cNvPr>
+          <p:cNvSpPr>
+            <a:spLocks noGrp="1"/>
+          </p:cNvSpPr>
+          <p:nvPr>
+            <p:ph type="title"/>
+          </p:nvPr>
+        </p:nvSpPr>
+        <p:spPr/>
+        <p:txBody>
+          <a:bodyPr/>
+          <a:lstStyle/>
+          <a:p>
+            <a:r>
+              <a:rPr lang="ko-KR" altLang="en-US" dirty="0"/>
+              <a:t>서론</a:t>
+            </a:r>
+          </a:p>
+        </p:txBody>
+      </p:sp>
+      <p:sp>
+        <p:nvSpPr>
+          <p:cNvPr id="4" name="슬라이드 번호 개체 틀 3">
+            <a:extLst>
+              <a:ext uri="{FF2B5EF4-FFF2-40B4-BE49-F238E27FC236}">
+                <a16:creationId xmlns:a16="http://schemas.microsoft.com/office/drawing/2014/main" id="{3055CFF5-1045-A861-0C88-5A1DFAB93430}"/>
+              </a:ext>
+            </a:extLst>
+          </p:cNvPr>
+          <p:cNvSpPr>
+            <a:spLocks noGrp="1"/>
+          </p:cNvSpPr>
+          <p:nvPr>
+            <p:ph type="sldNum" sz="quarter" idx="12"/>
+          </p:nvPr>
+        </p:nvSpPr>
+        <p:spPr/>
+        <p:txBody>
+          <a:bodyPr/>
+          <a:lstStyle/>
+          <a:p>
+            <a:fld id="{109C872D-39A9-4065-8BF3-6A613116E2A1}" type="slidenum">
+              <a:rPr lang="ko-KR" altLang="en-US" smtClean="0"/>
+              <a:t>5</a:t>
+            </a:fld>
+            <a:endParaRPr lang="ko-KR" altLang="en-US"/>
+          </a:p>
+        </p:txBody>
+      </p:sp>
+      <p:sp>
+        <p:nvSpPr>
+          <p:cNvPr id="3" name="TextBox 2">
+            <a:extLst>
+              <a:ext uri="{FF2B5EF4-FFF2-40B4-BE49-F238E27FC236}">
+                <a16:creationId xmlns:a16="http://schemas.microsoft.com/office/drawing/2014/main" id="{F68FFC37-4353-1DB7-17B9-97C4402833EA}"/>
+              </a:ext>
+            </a:extLst>
+          </p:cNvPr>
+          <p:cNvSpPr txBox="1"/>
+          <p:nvPr/>
+        </p:nvSpPr>
+        <p:spPr>
+          <a:xfrm>
+            <a:off x="288790" y="958844"/>
+            <a:ext cx="11118453" cy="5584670"/>
+          </a:xfrm>
+          <a:prstGeom prst="rect">
+            <a:avLst/>
+          </a:prstGeom>
+          <a:noFill/>
+        </p:spPr>
+        <p:txBody>
+          <a:bodyPr wrap="square" rtlCol="0" anchor="t">
+            <a:spAutoFit/>
+          </a:bodyPr>
+          <a:lstStyle/>
+          <a:p>
+            <a:pPr marL="377825" indent="-285750">
+              <a:lnSpc>
+                <a:spcPct val="150000"/>
+              </a:lnSpc>
+              <a:buFont typeface="Arial" panose="020B0604020202020204" pitchFamily="34" charset="0"/>
+              <a:buChar char="•"/>
+            </a:pPr>
+            <a:r>
+              <a:rPr lang="en-US" altLang="ko-KR" sz="1600" dirty="0"/>
+              <a:t>20</a:t>
+            </a:r>
+            <a:r>
+              <a:rPr lang="ko-KR" altLang="en-US" sz="1600" dirty="0"/>
+              <a:t>세기 초반에는 파이프라인 기술의 발전으로</a:t>
+            </a:r>
+            <a:r>
+              <a:rPr lang="en-US" altLang="ko-KR" sz="1600" dirty="0"/>
+              <a:t> </a:t>
+            </a:r>
+            <a:r>
+              <a:rPr lang="ko-KR" altLang="en-US" sz="1600" dirty="0"/>
+              <a:t>천연가스의 대규모 수송이 가능해지며 산업적 활용이 크게 확대 </a:t>
+            </a:r>
+            <a:r>
+              <a:rPr lang="ko-KR" altLang="en-US" sz="1600" dirty="0" err="1"/>
+              <a:t>됬다</a:t>
+            </a:r>
+            <a:r>
+              <a:rPr lang="en-US" altLang="ko-KR" sz="1600" dirty="0"/>
+              <a:t>.</a:t>
+            </a:r>
+          </a:p>
+          <a:p>
+            <a:pPr marL="835025" lvl="1" indent="-285750">
+              <a:lnSpc>
+                <a:spcPct val="150000"/>
+              </a:lnSpc>
+              <a:buFont typeface="Wingdings" panose="05000000000000000000" pitchFamily="2" charset="2"/>
+              <a:buChar char="ü"/>
+            </a:pPr>
+            <a:r>
+              <a:rPr lang="en-US" altLang="ko-KR" sz="1600" dirty="0"/>
+              <a:t>1920</a:t>
+            </a:r>
+            <a:r>
+              <a:rPr lang="ko-KR" altLang="en-US" sz="1600" dirty="0"/>
+              <a:t>년대에는 장거리 천연가스 파이프라인이 건설되기 시작하였다</a:t>
+            </a:r>
+            <a:r>
+              <a:rPr lang="en-US" altLang="ko-KR" sz="1600" dirty="0"/>
+              <a:t>.</a:t>
+            </a:r>
+          </a:p>
+          <a:p>
+            <a:pPr marL="835025" lvl="1" indent="-285750">
+              <a:lnSpc>
+                <a:spcPct val="150000"/>
+              </a:lnSpc>
+              <a:buFont typeface="Wingdings" panose="05000000000000000000" pitchFamily="2" charset="2"/>
+              <a:buChar char="ü"/>
+            </a:pPr>
+            <a:r>
+              <a:rPr lang="en-US" altLang="ko-KR" sz="1600" dirty="0"/>
+              <a:t>1927</a:t>
+            </a:r>
+            <a:r>
+              <a:rPr lang="ko-KR" altLang="en-US" sz="1600" dirty="0"/>
+              <a:t>년에는 인디애나주와 시카고를 잇는 미국 최초의 장거리 파이프라인이 가동되었다</a:t>
+            </a:r>
+            <a:r>
+              <a:rPr lang="en-US" altLang="ko-KR" sz="1600" dirty="0"/>
+              <a:t>.</a:t>
+            </a:r>
+          </a:p>
+          <a:p>
+            <a:pPr marL="835025" lvl="1" indent="-285750">
+              <a:lnSpc>
+                <a:spcPct val="150000"/>
+              </a:lnSpc>
+              <a:buFont typeface="Wingdings" panose="05000000000000000000" pitchFamily="2" charset="2"/>
+              <a:buChar char="ü"/>
+            </a:pPr>
+            <a:endParaRPr lang="en-US" altLang="ko-KR" sz="1600" dirty="0"/>
+          </a:p>
+          <a:p>
+            <a:pPr marL="377825" indent="-285750">
+              <a:lnSpc>
+                <a:spcPct val="150000"/>
+              </a:lnSpc>
+              <a:buFont typeface="Arial" panose="020B0604020202020204" pitchFamily="34" charset="0"/>
+              <a:buChar char="•"/>
+            </a:pPr>
+            <a:r>
+              <a:rPr lang="en-US" altLang="ko-KR" sz="1600" dirty="0"/>
+              <a:t>1950~1960</a:t>
+            </a:r>
+            <a:r>
+              <a:rPr lang="ko-KR" altLang="en-US" sz="1600" dirty="0"/>
+              <a:t>년대는 천연가스 산업의 황금기이며</a:t>
+            </a:r>
+            <a:r>
+              <a:rPr lang="en-US" altLang="ko-KR" sz="1600" dirty="0"/>
+              <a:t>, </a:t>
+            </a:r>
+            <a:r>
+              <a:rPr lang="ko-KR" altLang="en-US" sz="1600" dirty="0"/>
+              <a:t>가정용과 산업용 에너지원으로서 수요가 폭발적인 증가를 보였다</a:t>
+            </a:r>
+            <a:r>
+              <a:rPr lang="en-US" altLang="ko-KR" sz="1600" dirty="0"/>
+              <a:t>.</a:t>
+            </a:r>
+          </a:p>
+          <a:p>
+            <a:pPr marL="835025" lvl="1" indent="-285750">
+              <a:lnSpc>
+                <a:spcPct val="150000"/>
+              </a:lnSpc>
+              <a:buFont typeface="Wingdings" panose="05000000000000000000" pitchFamily="2" charset="2"/>
+              <a:buChar char="ü"/>
+            </a:pPr>
+            <a:r>
+              <a:rPr lang="ko-KR" altLang="en-US" sz="1600" dirty="0"/>
+              <a:t>전력 생산부문에서는 석탄과 함께 주요 기저발전원으로 자리 잡았고</a:t>
+            </a:r>
+            <a:r>
+              <a:rPr lang="en-US" altLang="ko-KR" sz="1600" dirty="0"/>
+              <a:t>, </a:t>
+            </a:r>
+            <a:r>
+              <a:rPr lang="ko-KR" altLang="en-US" sz="1600" dirty="0"/>
+              <a:t>천연가스의 청정성과 연소 효율성으로 도시지역의 </a:t>
+            </a:r>
+            <a:r>
+              <a:rPr lang="ko-KR" altLang="en-US" sz="1600" dirty="0" err="1"/>
+              <a:t>대기질</a:t>
+            </a:r>
+            <a:r>
+              <a:rPr lang="ko-KR" altLang="en-US" sz="1600" dirty="0"/>
+              <a:t> 개선에도 기여하였다</a:t>
+            </a:r>
+            <a:r>
+              <a:rPr lang="en-US" altLang="ko-KR" sz="1600" dirty="0"/>
+              <a:t>.</a:t>
+            </a:r>
+          </a:p>
+          <a:p>
+            <a:pPr marL="835025" lvl="1" indent="-285750">
+              <a:lnSpc>
+                <a:spcPct val="150000"/>
+              </a:lnSpc>
+              <a:buFont typeface="Wingdings" panose="05000000000000000000" pitchFamily="2" charset="2"/>
+              <a:buChar char="ü"/>
+            </a:pPr>
+            <a:r>
+              <a:rPr lang="ko-KR" altLang="en-US" sz="1600" dirty="0"/>
+              <a:t>이 시기에 미국과 구소련</a:t>
+            </a:r>
+            <a:r>
+              <a:rPr lang="en-US" altLang="ko-KR" sz="1600" dirty="0"/>
+              <a:t>, </a:t>
+            </a:r>
+            <a:r>
+              <a:rPr lang="ko-KR" altLang="en-US" sz="1600" dirty="0"/>
+              <a:t>중동 지역에서는 대규모 가스전이 연이어 발견되었고</a:t>
+            </a:r>
+            <a:r>
+              <a:rPr lang="en-US" altLang="ko-KR" sz="1600" dirty="0"/>
+              <a:t>, </a:t>
+            </a:r>
+            <a:r>
+              <a:rPr lang="ko-KR" altLang="en-US" sz="1600" dirty="0"/>
+              <a:t>향후 글로벌 천연가스 공급의 기반이 되었다</a:t>
+            </a:r>
+            <a:r>
+              <a:rPr lang="en-US" altLang="ko-KR" sz="1600" dirty="0"/>
+              <a:t>.</a:t>
+            </a:r>
+          </a:p>
+          <a:p>
+            <a:pPr marL="835025" lvl="1" indent="-285750">
+              <a:lnSpc>
+                <a:spcPct val="150000"/>
+              </a:lnSpc>
+              <a:buFont typeface="Wingdings" panose="05000000000000000000" pitchFamily="2" charset="2"/>
+              <a:buChar char="ü"/>
+            </a:pPr>
+            <a:endParaRPr lang="en-US" altLang="ko-KR" sz="1600" dirty="0"/>
+          </a:p>
+          <a:p>
+            <a:pPr marL="377825" indent="-285750">
+              <a:lnSpc>
+                <a:spcPct val="150000"/>
+              </a:lnSpc>
+              <a:buFont typeface="Arial" panose="020B0604020202020204" pitchFamily="34" charset="0"/>
+              <a:buChar char="•"/>
+            </a:pPr>
+            <a:r>
+              <a:rPr lang="en-US" altLang="ko-KR" sz="1600" dirty="0"/>
+              <a:t>1980</a:t>
+            </a:r>
+            <a:r>
+              <a:rPr lang="ko-KR" altLang="en-US" sz="1600" dirty="0"/>
+              <a:t>년</a:t>
+            </a:r>
+            <a:r>
+              <a:rPr lang="en-US" altLang="ko-KR" sz="1600" dirty="0"/>
+              <a:t>~1990</a:t>
+            </a:r>
+            <a:r>
+              <a:rPr lang="ko-KR" altLang="en-US" sz="1600" dirty="0"/>
+              <a:t>년대는 천연가스의 국제무역이 본격화된 시기로 액화천연가스 기술의 발달이 중요한 전환점이 되었다</a:t>
+            </a:r>
+            <a:r>
+              <a:rPr lang="en-US" altLang="ko-KR" sz="1600" dirty="0"/>
+              <a:t>.</a:t>
+            </a:r>
+          </a:p>
+          <a:p>
+            <a:pPr marL="835025" lvl="1" indent="-285750">
+              <a:lnSpc>
+                <a:spcPct val="150000"/>
+              </a:lnSpc>
+              <a:buFont typeface="Wingdings" panose="05000000000000000000" pitchFamily="2" charset="2"/>
+              <a:buChar char="ü"/>
+            </a:pPr>
+            <a:r>
+              <a:rPr lang="ko-KR" altLang="en-US" sz="1600" dirty="0"/>
+              <a:t>액화천연가스</a:t>
+            </a:r>
+            <a:r>
+              <a:rPr lang="en-US" altLang="ko-KR" sz="1600" dirty="0"/>
+              <a:t>(LNG; Liquified Natural Gas) </a:t>
+            </a:r>
+            <a:r>
+              <a:rPr lang="ko-KR" altLang="en-US" sz="1600" dirty="0"/>
+              <a:t>기술은 가스를 영하</a:t>
+            </a:r>
+            <a:r>
+              <a:rPr lang="en-US" altLang="ko-KR" sz="1600" dirty="0"/>
+              <a:t>162</a:t>
+            </a:r>
+            <a:r>
+              <a:rPr lang="ko-KR" altLang="en-US" sz="1600" dirty="0"/>
+              <a:t>도까지 냉각하여 </a:t>
+            </a:r>
+            <a:r>
+              <a:rPr lang="ko-KR" altLang="en-US" sz="1600" dirty="0" err="1"/>
+              <a:t>액화한</a:t>
+            </a:r>
+            <a:r>
+              <a:rPr lang="ko-KR" altLang="en-US" sz="1600" dirty="0"/>
+              <a:t> 뒤 해상으로 수송하는 방식을 가능케 하여</a:t>
+            </a:r>
+            <a:r>
+              <a:rPr lang="en-US" altLang="ko-KR" sz="1600" dirty="0"/>
+              <a:t>, </a:t>
+            </a:r>
+            <a:r>
+              <a:rPr lang="ko-KR" altLang="en-US" sz="1600" dirty="0"/>
+              <a:t>파이프라인으로 공급하지 못하는 지역에도 천연가스를 공급할 수 있게 되었다</a:t>
+            </a:r>
+            <a:r>
+              <a:rPr lang="en-US" altLang="ko-KR" sz="1600" dirty="0"/>
+              <a:t>.</a:t>
+            </a:r>
+          </a:p>
+          <a:p>
+            <a:pPr marL="835025" lvl="1" indent="-285750">
+              <a:lnSpc>
+                <a:spcPct val="150000"/>
+              </a:lnSpc>
+              <a:buFont typeface="Wingdings" panose="05000000000000000000" pitchFamily="2" charset="2"/>
+              <a:buChar char="ü"/>
+            </a:pPr>
+            <a:r>
+              <a:rPr lang="en-US" altLang="ko-KR" sz="1600" dirty="0"/>
+              <a:t>1964</a:t>
+            </a:r>
+            <a:r>
+              <a:rPr lang="ko-KR" altLang="en-US" sz="1600" dirty="0"/>
+              <a:t>년 알제리에서 영국으로 </a:t>
+            </a:r>
+            <a:r>
+              <a:rPr lang="en-US" altLang="ko-KR" sz="1600" dirty="0"/>
+              <a:t>LNG </a:t>
+            </a:r>
+            <a:r>
+              <a:rPr lang="ko-KR" altLang="en-US" sz="1600" dirty="0"/>
+              <a:t>수출이 최초로 이루어지고</a:t>
+            </a:r>
+            <a:r>
+              <a:rPr lang="en-US" altLang="ko-KR" sz="1600" dirty="0"/>
+              <a:t>, </a:t>
+            </a:r>
+            <a:r>
+              <a:rPr lang="ko-KR" altLang="en-US" sz="1600" dirty="0"/>
+              <a:t>해상수송은 세계 천연가스시장에서 중요한 운송수단으로 자리잡았다</a:t>
+            </a:r>
+            <a:r>
+              <a:rPr lang="en-US" altLang="ko-KR" sz="1600" dirty="0"/>
+              <a:t>.</a:t>
+            </a:r>
+          </a:p>
+        </p:txBody>
+      </p:sp>
+    </p:spTree>
+    <p:extLst>
+      <p:ext uri="{BB962C8B-B14F-4D97-AF65-F5344CB8AC3E}">
+        <p14:creationId xmlns:p14="http://schemas.microsoft.com/office/powerpoint/2010/main" val="2296139293"/>
+      </p:ext>
+    </p:extLst>
+  </p:cSld>
+  <p:clrMapOvr>
+    <a:masterClrMapping/>
+  </p:clrMapOvr>
+</p:sld>
+</file>
+
+<file path=ppt/slides/slide50.xml><?xml version="1.0" encoding="utf-8"?>
 <p:sld xmlns:a="http://schemas.openxmlformats.org/drawingml/2006/main" xmlns:r="http://schemas.openxmlformats.org/officeDocument/2006/relationships" xmlns:p="http://schemas.openxmlformats.org/presentationml/2006/main">
   <p:cSld>
     <p:spTree>
@@ -38300,7 +40089,7 @@
           <a:p>
             <a:fld id="{109C872D-39A9-4065-8BF3-6A613116E2A1}" type="slidenum">
               <a:rPr lang="ko-KR" altLang="en-US" smtClean="0"/>
-              <a:t>46</a:t>
+              <a:t>50</a:t>
             </a:fld>
             <a:endParaRPr lang="ko-KR" altLang="en-US"/>
           </a:p>
@@ -38360,7 +40149,7 @@
 </p:sld>
 </file>
 
-<file path=ppt/slides/slide47.xml><?xml version="1.0" encoding="utf-8"?>
+<file path=ppt/slides/slide51.xml><?xml version="1.0" encoding="utf-8"?>
 <p:sld xmlns:a="http://schemas.openxmlformats.org/drawingml/2006/main" xmlns:r="http://schemas.openxmlformats.org/officeDocument/2006/relationships" xmlns:p="http://schemas.openxmlformats.org/presentationml/2006/main">
   <p:cSld>
     <p:spTree>
@@ -38434,7 +40223,7 @@
           <a:p>
             <a:fld id="{109C872D-39A9-4065-8BF3-6A613116E2A1}" type="slidenum">
               <a:rPr lang="ko-KR" altLang="en-US" smtClean="0"/>
-              <a:t>47</a:t>
+              <a:t>51</a:t>
             </a:fld>
             <a:endParaRPr lang="ko-KR" altLang="en-US"/>
           </a:p>
@@ -38728,7 +40517,7 @@
 </p:sld>
 </file>
 
-<file path=ppt/slides/slide48.xml><?xml version="1.0" encoding="utf-8"?>
+<file path=ppt/slides/slide52.xml><?xml version="1.0" encoding="utf-8"?>
 <p:sld xmlns:a="http://schemas.openxmlformats.org/drawingml/2006/main" xmlns:r="http://schemas.openxmlformats.org/officeDocument/2006/relationships" xmlns:p="http://schemas.openxmlformats.org/presentationml/2006/main">
   <p:cSld>
     <p:spTree>
@@ -38802,7 +40591,7 @@
           <a:p>
             <a:fld id="{109C872D-39A9-4065-8BF3-6A613116E2A1}" type="slidenum">
               <a:rPr lang="ko-KR" altLang="en-US" smtClean="0"/>
-              <a:t>48</a:t>
+              <a:t>52</a:t>
             </a:fld>
             <a:endParaRPr lang="ko-KR" altLang="en-US"/>
           </a:p>
@@ -39270,7 +41059,7 @@
 </p:sld>
 </file>
 
-<file path=ppt/slides/slide49.xml><?xml version="1.0" encoding="utf-8"?>
+<file path=ppt/slides/slide53.xml><?xml version="1.0" encoding="utf-8"?>
 <p:sld xmlns:a="http://schemas.openxmlformats.org/drawingml/2006/main" xmlns:r="http://schemas.openxmlformats.org/officeDocument/2006/relationships" xmlns:p="http://schemas.openxmlformats.org/presentationml/2006/main">
   <p:cSld>
     <p:spTree>
@@ -39344,7 +41133,7 @@
           <a:p>
             <a:fld id="{109C872D-39A9-4065-8BF3-6A613116E2A1}" type="slidenum">
               <a:rPr lang="ko-KR" altLang="en-US" smtClean="0"/>
-              <a:t>49</a:t>
+              <a:t>53</a:t>
             </a:fld>
             <a:endParaRPr lang="ko-KR" altLang="en-US"/>
           </a:p>
@@ -40053,434 +41842,7 @@
 </p:sld>
 </file>
 
-<file path=ppt/slides/slide5.xml><?xml version="1.0" encoding="utf-8"?>
-<p:sld xmlns:a="http://schemas.openxmlformats.org/drawingml/2006/main" xmlns:r="http://schemas.openxmlformats.org/officeDocument/2006/relationships" xmlns:p="http://schemas.openxmlformats.org/presentationml/2006/main">
-  <p:cSld>
-    <p:spTree>
-      <p:nvGrpSpPr>
-        <p:cNvPr id="1" name="">
-          <a:extLst>
-            <a:ext uri="{FF2B5EF4-FFF2-40B4-BE49-F238E27FC236}">
-              <a16:creationId xmlns:a16="http://schemas.microsoft.com/office/drawing/2014/main" id="{AA58849E-C3EC-66C2-D5C9-C59E5D5BC968}"/>
-            </a:ext>
-          </a:extLst>
-        </p:cNvPr>
-        <p:cNvGrpSpPr/>
-        <p:nvPr/>
-      </p:nvGrpSpPr>
-      <p:grpSpPr>
-        <a:xfrm>
-          <a:off x="0" y="0"/>
-          <a:ext cx="0" cy="0"/>
-          <a:chOff x="0" y="0"/>
-          <a:chExt cx="0" cy="0"/>
-        </a:xfrm>
-      </p:grpSpPr>
-      <p:sp>
-        <p:nvSpPr>
-          <p:cNvPr id="2" name="제목 1">
-            <a:extLst>
-              <a:ext uri="{FF2B5EF4-FFF2-40B4-BE49-F238E27FC236}">
-                <a16:creationId xmlns:a16="http://schemas.microsoft.com/office/drawing/2014/main" id="{B4FAA21E-A0E0-EB01-8A47-F492A782CE9A}"/>
-              </a:ext>
-            </a:extLst>
-          </p:cNvPr>
-          <p:cNvSpPr>
-            <a:spLocks noGrp="1"/>
-          </p:cNvSpPr>
-          <p:nvPr>
-            <p:ph type="title"/>
-          </p:nvPr>
-        </p:nvSpPr>
-        <p:spPr/>
-        <p:txBody>
-          <a:bodyPr/>
-          <a:lstStyle/>
-          <a:p>
-            <a:r>
-              <a:rPr lang="ko-KR" altLang="en-US" dirty="0"/>
-              <a:t>서론</a:t>
-            </a:r>
-          </a:p>
-        </p:txBody>
-      </p:sp>
-      <p:sp>
-        <p:nvSpPr>
-          <p:cNvPr id="4" name="슬라이드 번호 개체 틀 3">
-            <a:extLst>
-              <a:ext uri="{FF2B5EF4-FFF2-40B4-BE49-F238E27FC236}">
-                <a16:creationId xmlns:a16="http://schemas.microsoft.com/office/drawing/2014/main" id="{3055CFF5-1045-A861-0C88-5A1DFAB93430}"/>
-              </a:ext>
-            </a:extLst>
-          </p:cNvPr>
-          <p:cNvSpPr>
-            <a:spLocks noGrp="1"/>
-          </p:cNvSpPr>
-          <p:nvPr>
-            <p:ph type="sldNum" sz="quarter" idx="12"/>
-          </p:nvPr>
-        </p:nvSpPr>
-        <p:spPr/>
-        <p:txBody>
-          <a:bodyPr/>
-          <a:lstStyle/>
-          <a:p>
-            <a:fld id="{109C872D-39A9-4065-8BF3-6A613116E2A1}" type="slidenum">
-              <a:rPr lang="ko-KR" altLang="en-US" smtClean="0"/>
-              <a:t>5</a:t>
-            </a:fld>
-            <a:endParaRPr lang="ko-KR" altLang="en-US"/>
-          </a:p>
-        </p:txBody>
-      </p:sp>
-      <p:sp>
-        <p:nvSpPr>
-          <p:cNvPr id="3" name="TextBox 2">
-            <a:extLst>
-              <a:ext uri="{FF2B5EF4-FFF2-40B4-BE49-F238E27FC236}">
-                <a16:creationId xmlns:a16="http://schemas.microsoft.com/office/drawing/2014/main" id="{F68FFC37-4353-1DB7-17B9-97C4402833EA}"/>
-              </a:ext>
-            </a:extLst>
-          </p:cNvPr>
-          <p:cNvSpPr txBox="1"/>
-          <p:nvPr/>
-        </p:nvSpPr>
-        <p:spPr>
-          <a:xfrm>
-            <a:off x="288790" y="958844"/>
-            <a:ext cx="11118453" cy="5584670"/>
-          </a:xfrm>
-          <a:prstGeom prst="rect">
-            <a:avLst/>
-          </a:prstGeom>
-          <a:noFill/>
-        </p:spPr>
-        <p:txBody>
-          <a:bodyPr wrap="square" rtlCol="0" anchor="t">
-            <a:spAutoFit/>
-          </a:bodyPr>
-          <a:lstStyle/>
-          <a:p>
-            <a:pPr marL="377825" indent="-285750">
-              <a:lnSpc>
-                <a:spcPct val="150000"/>
-              </a:lnSpc>
-              <a:buFont typeface="Arial" panose="020B0604020202020204" pitchFamily="34" charset="0"/>
-              <a:buChar char="•"/>
-            </a:pPr>
-            <a:r>
-              <a:rPr lang="en-US" altLang="ko-KR" sz="1600" dirty="0"/>
-              <a:t>20</a:t>
-            </a:r>
-            <a:r>
-              <a:rPr lang="ko-KR" altLang="en-US" sz="1600" dirty="0"/>
-              <a:t>세기 초반에는 파이프라인 기술의 발전으로</a:t>
-            </a:r>
-            <a:r>
-              <a:rPr lang="en-US" altLang="ko-KR" sz="1600" dirty="0"/>
-              <a:t> </a:t>
-            </a:r>
-            <a:r>
-              <a:rPr lang="ko-KR" altLang="en-US" sz="1600" dirty="0"/>
-              <a:t>천연가스의 대규모 수송이 가능해지며 산업적 활용이 크게 확대 </a:t>
-            </a:r>
-            <a:r>
-              <a:rPr lang="ko-KR" altLang="en-US" sz="1600" dirty="0" err="1"/>
-              <a:t>됬다</a:t>
-            </a:r>
-            <a:r>
-              <a:rPr lang="en-US" altLang="ko-KR" sz="1600" dirty="0"/>
-              <a:t>.</a:t>
-            </a:r>
-          </a:p>
-          <a:p>
-            <a:pPr marL="835025" lvl="1" indent="-285750">
-              <a:lnSpc>
-                <a:spcPct val="150000"/>
-              </a:lnSpc>
-              <a:buFont typeface="Wingdings" panose="05000000000000000000" pitchFamily="2" charset="2"/>
-              <a:buChar char="ü"/>
-            </a:pPr>
-            <a:r>
-              <a:rPr lang="en-US" altLang="ko-KR" sz="1600" dirty="0"/>
-              <a:t>1920</a:t>
-            </a:r>
-            <a:r>
-              <a:rPr lang="ko-KR" altLang="en-US" sz="1600" dirty="0"/>
-              <a:t>년대에는 장거리 천연가스 파이프라인이 건설되기 시작하였다</a:t>
-            </a:r>
-            <a:r>
-              <a:rPr lang="en-US" altLang="ko-KR" sz="1600" dirty="0"/>
-              <a:t>.</a:t>
-            </a:r>
-          </a:p>
-          <a:p>
-            <a:pPr marL="835025" lvl="1" indent="-285750">
-              <a:lnSpc>
-                <a:spcPct val="150000"/>
-              </a:lnSpc>
-              <a:buFont typeface="Wingdings" panose="05000000000000000000" pitchFamily="2" charset="2"/>
-              <a:buChar char="ü"/>
-            </a:pPr>
-            <a:r>
-              <a:rPr lang="en-US" altLang="ko-KR" sz="1600" dirty="0"/>
-              <a:t>1927</a:t>
-            </a:r>
-            <a:r>
-              <a:rPr lang="ko-KR" altLang="en-US" sz="1600" dirty="0"/>
-              <a:t>년에는 인디애나주와 시카고를 잇는 미국 최초의 장거리 파이프라인이 가동되었다</a:t>
-            </a:r>
-            <a:r>
-              <a:rPr lang="en-US" altLang="ko-KR" sz="1600" dirty="0"/>
-              <a:t>.</a:t>
-            </a:r>
-          </a:p>
-          <a:p>
-            <a:pPr marL="835025" lvl="1" indent="-285750">
-              <a:lnSpc>
-                <a:spcPct val="150000"/>
-              </a:lnSpc>
-              <a:buFont typeface="Wingdings" panose="05000000000000000000" pitchFamily="2" charset="2"/>
-              <a:buChar char="ü"/>
-            </a:pPr>
-            <a:endParaRPr lang="en-US" altLang="ko-KR" sz="1600" dirty="0"/>
-          </a:p>
-          <a:p>
-            <a:pPr marL="377825" indent="-285750">
-              <a:lnSpc>
-                <a:spcPct val="150000"/>
-              </a:lnSpc>
-              <a:buFont typeface="Arial" panose="020B0604020202020204" pitchFamily="34" charset="0"/>
-              <a:buChar char="•"/>
-            </a:pPr>
-            <a:r>
-              <a:rPr lang="en-US" altLang="ko-KR" sz="1600" dirty="0"/>
-              <a:t>1950~1960</a:t>
-            </a:r>
-            <a:r>
-              <a:rPr lang="ko-KR" altLang="en-US" sz="1600" dirty="0"/>
-              <a:t>년대는 천연가스 산업의 황금기이며</a:t>
-            </a:r>
-            <a:r>
-              <a:rPr lang="en-US" altLang="ko-KR" sz="1600" dirty="0"/>
-              <a:t>, </a:t>
-            </a:r>
-            <a:r>
-              <a:rPr lang="ko-KR" altLang="en-US" sz="1600" dirty="0"/>
-              <a:t>가정용과 산업용 에너지원으로서 수요가 폭발적인 증가를 보였다</a:t>
-            </a:r>
-            <a:r>
-              <a:rPr lang="en-US" altLang="ko-KR" sz="1600" dirty="0"/>
-              <a:t>.</a:t>
-            </a:r>
-          </a:p>
-          <a:p>
-            <a:pPr marL="835025" lvl="1" indent="-285750">
-              <a:lnSpc>
-                <a:spcPct val="150000"/>
-              </a:lnSpc>
-              <a:buFont typeface="Wingdings" panose="05000000000000000000" pitchFamily="2" charset="2"/>
-              <a:buChar char="ü"/>
-            </a:pPr>
-            <a:r>
-              <a:rPr lang="ko-KR" altLang="en-US" sz="1600" dirty="0"/>
-              <a:t>전력 생산부문에서는 석탄과 함께 주요 기저발전원으로 자리 잡았고</a:t>
-            </a:r>
-            <a:r>
-              <a:rPr lang="en-US" altLang="ko-KR" sz="1600" dirty="0"/>
-              <a:t>, </a:t>
-            </a:r>
-            <a:r>
-              <a:rPr lang="ko-KR" altLang="en-US" sz="1600" dirty="0"/>
-              <a:t>천연가스의 청정성과 연소 효율성으로 도시지역의 </a:t>
-            </a:r>
-            <a:r>
-              <a:rPr lang="ko-KR" altLang="en-US" sz="1600" dirty="0" err="1"/>
-              <a:t>대기질</a:t>
-            </a:r>
-            <a:r>
-              <a:rPr lang="ko-KR" altLang="en-US" sz="1600" dirty="0"/>
-              <a:t> 개선에도 기여하였다</a:t>
-            </a:r>
-            <a:r>
-              <a:rPr lang="en-US" altLang="ko-KR" sz="1600" dirty="0"/>
-              <a:t>.</a:t>
-            </a:r>
-          </a:p>
-          <a:p>
-            <a:pPr marL="835025" lvl="1" indent="-285750">
-              <a:lnSpc>
-                <a:spcPct val="150000"/>
-              </a:lnSpc>
-              <a:buFont typeface="Wingdings" panose="05000000000000000000" pitchFamily="2" charset="2"/>
-              <a:buChar char="ü"/>
-            </a:pPr>
-            <a:r>
-              <a:rPr lang="ko-KR" altLang="en-US" sz="1600" dirty="0"/>
-              <a:t>이 시기에 미국과 구소련</a:t>
-            </a:r>
-            <a:r>
-              <a:rPr lang="en-US" altLang="ko-KR" sz="1600" dirty="0"/>
-              <a:t>, </a:t>
-            </a:r>
-            <a:r>
-              <a:rPr lang="ko-KR" altLang="en-US" sz="1600" dirty="0"/>
-              <a:t>중동 지역에서는 대규모 가스전이 연이어 발견되었고</a:t>
-            </a:r>
-            <a:r>
-              <a:rPr lang="en-US" altLang="ko-KR" sz="1600" dirty="0"/>
-              <a:t>, </a:t>
-            </a:r>
-            <a:r>
-              <a:rPr lang="ko-KR" altLang="en-US" sz="1600" dirty="0"/>
-              <a:t>향후 글로벌 천연가스 공급의 기반이 되었다</a:t>
-            </a:r>
-            <a:r>
-              <a:rPr lang="en-US" altLang="ko-KR" sz="1600" dirty="0"/>
-              <a:t>.</a:t>
-            </a:r>
-          </a:p>
-          <a:p>
-            <a:pPr marL="835025" lvl="1" indent="-285750">
-              <a:lnSpc>
-                <a:spcPct val="150000"/>
-              </a:lnSpc>
-              <a:buFont typeface="Wingdings" panose="05000000000000000000" pitchFamily="2" charset="2"/>
-              <a:buChar char="ü"/>
-            </a:pPr>
-            <a:endParaRPr lang="en-US" altLang="ko-KR" sz="1600" dirty="0"/>
-          </a:p>
-          <a:p>
-            <a:pPr marL="377825" indent="-285750">
-              <a:lnSpc>
-                <a:spcPct val="150000"/>
-              </a:lnSpc>
-              <a:buFont typeface="Arial" panose="020B0604020202020204" pitchFamily="34" charset="0"/>
-              <a:buChar char="•"/>
-            </a:pPr>
-            <a:r>
-              <a:rPr lang="en-US" altLang="ko-KR" sz="1600" dirty="0"/>
-              <a:t>1980</a:t>
-            </a:r>
-            <a:r>
-              <a:rPr lang="ko-KR" altLang="en-US" sz="1600" dirty="0"/>
-              <a:t>년</a:t>
-            </a:r>
-            <a:r>
-              <a:rPr lang="en-US" altLang="ko-KR" sz="1600" dirty="0"/>
-              <a:t>~1990</a:t>
-            </a:r>
-            <a:r>
-              <a:rPr lang="ko-KR" altLang="en-US" sz="1600" dirty="0"/>
-              <a:t>년대는 천연가스의 국제무역이 본격화된 시기로 액화천연가스 기술의 발달이 중요한 전환점이 되었다</a:t>
-            </a:r>
-            <a:r>
-              <a:rPr lang="en-US" altLang="ko-KR" sz="1600" dirty="0"/>
-              <a:t>.</a:t>
-            </a:r>
-          </a:p>
-          <a:p>
-            <a:pPr marL="835025" lvl="1" indent="-285750">
-              <a:lnSpc>
-                <a:spcPct val="150000"/>
-              </a:lnSpc>
-              <a:buFont typeface="Wingdings" panose="05000000000000000000" pitchFamily="2" charset="2"/>
-              <a:buChar char="ü"/>
-            </a:pPr>
-            <a:r>
-              <a:rPr lang="ko-KR" altLang="en-US" sz="1600" dirty="0"/>
-              <a:t>액화천연가스</a:t>
-            </a:r>
-            <a:r>
-              <a:rPr lang="en-US" altLang="ko-KR" sz="1600" dirty="0"/>
-              <a:t>(LNG; Liquified Natural Gas) </a:t>
-            </a:r>
-            <a:r>
-              <a:rPr lang="ko-KR" altLang="en-US" sz="1600" dirty="0"/>
-              <a:t>기술은 가스를 영하</a:t>
-            </a:r>
-            <a:r>
-              <a:rPr lang="en-US" altLang="ko-KR" sz="1600" dirty="0"/>
-              <a:t>162</a:t>
-            </a:r>
-            <a:r>
-              <a:rPr lang="ko-KR" altLang="en-US" sz="1600" dirty="0"/>
-              <a:t>도까지 냉각하여 </a:t>
-            </a:r>
-            <a:r>
-              <a:rPr lang="ko-KR" altLang="en-US" sz="1600" dirty="0" err="1"/>
-              <a:t>액화한</a:t>
-            </a:r>
-            <a:r>
-              <a:rPr lang="ko-KR" altLang="en-US" sz="1600" dirty="0"/>
-              <a:t> 뒤 해상으로 수송하는 방식을 가능케 하여</a:t>
-            </a:r>
-            <a:r>
-              <a:rPr lang="en-US" altLang="ko-KR" sz="1600" dirty="0"/>
-              <a:t>, </a:t>
-            </a:r>
-            <a:r>
-              <a:rPr lang="ko-KR" altLang="en-US" sz="1600" dirty="0"/>
-              <a:t>파이프라인으로 공급하지 못하는 지역에도 천연가스를 공급할 수 있게 되었다</a:t>
-            </a:r>
-            <a:r>
-              <a:rPr lang="en-US" altLang="ko-KR" sz="1600" dirty="0"/>
-              <a:t>.</a:t>
-            </a:r>
-          </a:p>
-          <a:p>
-            <a:pPr marL="835025" lvl="1" indent="-285750">
-              <a:lnSpc>
-                <a:spcPct val="150000"/>
-              </a:lnSpc>
-              <a:buFont typeface="Wingdings" panose="05000000000000000000" pitchFamily="2" charset="2"/>
-              <a:buChar char="ü"/>
-            </a:pPr>
-            <a:r>
-              <a:rPr lang="en-US" altLang="ko-KR" sz="1600" dirty="0"/>
-              <a:t>1964</a:t>
-            </a:r>
-            <a:r>
-              <a:rPr lang="ko-KR" altLang="en-US" sz="1600" dirty="0"/>
-              <a:t>년 알제리에서 영국으로 </a:t>
-            </a:r>
-            <a:r>
-              <a:rPr lang="en-US" altLang="ko-KR" sz="1600" dirty="0"/>
-              <a:t>LNG </a:t>
-            </a:r>
-            <a:r>
-              <a:rPr lang="ko-KR" altLang="en-US" sz="1600" dirty="0"/>
-              <a:t>수출이 최초로 이루어지고</a:t>
-            </a:r>
-            <a:r>
-              <a:rPr lang="en-US" altLang="ko-KR" sz="1600" dirty="0"/>
-              <a:t>, </a:t>
-            </a:r>
-            <a:r>
-              <a:rPr lang="ko-KR" altLang="en-US" sz="1600" dirty="0"/>
-              <a:t>해상수송은 세계 천연가스시장에서 중요한 운송수단으로 자리잡았다</a:t>
-            </a:r>
-            <a:r>
-              <a:rPr lang="en-US" altLang="ko-KR" sz="1600" dirty="0"/>
-              <a:t>.</a:t>
-            </a:r>
-          </a:p>
-        </p:txBody>
-      </p:sp>
-    </p:spTree>
-    <p:extLst>
-      <p:ext uri="{BB962C8B-B14F-4D97-AF65-F5344CB8AC3E}">
-        <p14:creationId xmlns:p14="http://schemas.microsoft.com/office/powerpoint/2010/main" val="2296139293"/>
-      </p:ext>
-    </p:extLst>
-  </p:cSld>
-  <p:clrMapOvr>
-    <a:masterClrMapping/>
-  </p:clrMapOvr>
-</p:sld>
-</file>
-
-<file path=ppt/slides/slide50.xml><?xml version="1.0" encoding="utf-8"?>
+<file path=ppt/slides/slide54.xml><?xml version="1.0" encoding="utf-8"?>
 <p:sld xmlns:a="http://schemas.openxmlformats.org/drawingml/2006/main" xmlns:r="http://schemas.openxmlformats.org/officeDocument/2006/relationships" xmlns:p="http://schemas.openxmlformats.org/presentationml/2006/main">
   <p:cSld>
     <p:spTree>
@@ -40554,7 +41916,7 @@
           <a:p>
             <a:fld id="{109C872D-39A9-4065-8BF3-6A613116E2A1}" type="slidenum">
               <a:rPr lang="ko-KR" altLang="en-US" smtClean="0"/>
-              <a:t>50</a:t>
+              <a:t>54</a:t>
             </a:fld>
             <a:endParaRPr lang="ko-KR" altLang="en-US"/>
           </a:p>
@@ -41288,7 +42650,7 @@
 </p:sld>
 </file>
 
-<file path=ppt/slides/slide51.xml><?xml version="1.0" encoding="utf-8"?>
+<file path=ppt/slides/slide55.xml><?xml version="1.0" encoding="utf-8"?>
 <p:sld xmlns:a="http://schemas.openxmlformats.org/drawingml/2006/main" xmlns:r="http://schemas.openxmlformats.org/officeDocument/2006/relationships" xmlns:p="http://schemas.openxmlformats.org/presentationml/2006/main">
   <p:cSld>
     <p:spTree>
@@ -41362,7 +42724,7 @@
           <a:p>
             <a:fld id="{109C872D-39A9-4065-8BF3-6A613116E2A1}" type="slidenum">
               <a:rPr lang="ko-KR" altLang="en-US" smtClean="0"/>
-              <a:t>51</a:t>
+              <a:t>55</a:t>
             </a:fld>
             <a:endParaRPr lang="ko-KR" altLang="en-US"/>
           </a:p>
@@ -41587,7 +42949,7 @@
 </p:sld>
 </file>
 
-<file path=ppt/slides/slide52.xml><?xml version="1.0" encoding="utf-8"?>
+<file path=ppt/slides/slide56.xml><?xml version="1.0" encoding="utf-8"?>
 <p:sld xmlns:a="http://schemas.openxmlformats.org/drawingml/2006/main" xmlns:r="http://schemas.openxmlformats.org/officeDocument/2006/relationships" xmlns:p="http://schemas.openxmlformats.org/presentationml/2006/main">
   <p:cSld>
     <p:spTree>
@@ -41661,7 +43023,7 @@
           <a:p>
             <a:fld id="{109C872D-39A9-4065-8BF3-6A613116E2A1}" type="slidenum">
               <a:rPr lang="ko-KR" altLang="en-US" smtClean="0"/>
-              <a:t>52</a:t>
+              <a:t>56</a:t>
             </a:fld>
             <a:endParaRPr lang="ko-KR" altLang="en-US"/>
           </a:p>
@@ -42007,7 +43369,7 @@
 </p:sld>
 </file>
 
-<file path=ppt/slides/slide53.xml><?xml version="1.0" encoding="utf-8"?>
+<file path=ppt/slides/slide57.xml><?xml version="1.0" encoding="utf-8"?>
 <p:sld xmlns:a="http://schemas.openxmlformats.org/drawingml/2006/main" xmlns:r="http://schemas.openxmlformats.org/officeDocument/2006/relationships" xmlns:p="http://schemas.openxmlformats.org/presentationml/2006/main">
   <p:cSld>
     <p:spTree>
@@ -42081,7 +43443,7 @@
           <a:p>
             <a:fld id="{109C872D-39A9-4065-8BF3-6A613116E2A1}" type="slidenum">
               <a:rPr lang="ko-KR" altLang="en-US" smtClean="0"/>
-              <a:t>53</a:t>
+              <a:t>57</a:t>
             </a:fld>
             <a:endParaRPr lang="ko-KR" altLang="en-US"/>
           </a:p>
@@ -42410,7 +43772,7 @@
 </p:sld>
 </file>
 
-<file path=ppt/slides/slide54.xml><?xml version="1.0" encoding="utf-8"?>
+<file path=ppt/slides/slide58.xml><?xml version="1.0" encoding="utf-8"?>
 <p:sld xmlns:a="http://schemas.openxmlformats.org/drawingml/2006/main" xmlns:r="http://schemas.openxmlformats.org/officeDocument/2006/relationships" xmlns:p="http://schemas.openxmlformats.org/presentationml/2006/main">
   <p:cSld>
     <p:spTree>
@@ -42484,7 +43846,7 @@
           <a:p>
             <a:fld id="{109C872D-39A9-4065-8BF3-6A613116E2A1}" type="slidenum">
               <a:rPr lang="ko-KR" altLang="en-US" smtClean="0"/>
-              <a:t>54</a:t>
+              <a:t>58</a:t>
             </a:fld>
             <a:endParaRPr lang="ko-KR" altLang="en-US"/>
           </a:p>
@@ -42759,7 +44121,7 @@
 </p:sld>
 </file>
 
-<file path=ppt/slides/slide55.xml><?xml version="1.0" encoding="utf-8"?>
+<file path=ppt/slides/slide59.xml><?xml version="1.0" encoding="utf-8"?>
 <p:sld xmlns:a="http://schemas.openxmlformats.org/drawingml/2006/main" xmlns:r="http://schemas.openxmlformats.org/officeDocument/2006/relationships" xmlns:p="http://schemas.openxmlformats.org/presentationml/2006/main">
   <p:cSld>
     <p:spTree>
@@ -42833,7 +44195,7 @@
           <a:p>
             <a:fld id="{109C872D-39A9-4065-8BF3-6A613116E2A1}" type="slidenum">
               <a:rPr lang="ko-KR" altLang="en-US" smtClean="0"/>
-              <a:t>55</a:t>
+              <a:t>59</a:t>
             </a:fld>
             <a:endParaRPr lang="ko-KR" altLang="en-US"/>
           </a:p>
@@ -43127,7 +44489,272 @@
 </p:sld>
 </file>
 
-<file path=ppt/slides/slide56.xml><?xml version="1.0" encoding="utf-8"?>
+<file path=ppt/slides/slide6.xml><?xml version="1.0" encoding="utf-8"?>
+<p:sld xmlns:a="http://schemas.openxmlformats.org/drawingml/2006/main" xmlns:r="http://schemas.openxmlformats.org/officeDocument/2006/relationships" xmlns:p="http://schemas.openxmlformats.org/presentationml/2006/main">
+  <p:cSld>
+    <p:spTree>
+      <p:nvGrpSpPr>
+        <p:cNvPr id="1" name="">
+          <a:extLst>
+            <a:ext uri="{FF2B5EF4-FFF2-40B4-BE49-F238E27FC236}">
+              <a16:creationId xmlns:a16="http://schemas.microsoft.com/office/drawing/2014/main" id="{337F2B2B-B0DB-E70D-D7BF-B2362ECCFC19}"/>
+            </a:ext>
+          </a:extLst>
+        </p:cNvPr>
+        <p:cNvGrpSpPr/>
+        <p:nvPr/>
+      </p:nvGrpSpPr>
+      <p:grpSpPr>
+        <a:xfrm>
+          <a:off x="0" y="0"/>
+          <a:ext cx="0" cy="0"/>
+          <a:chOff x="0" y="0"/>
+          <a:chExt cx="0" cy="0"/>
+        </a:xfrm>
+      </p:grpSpPr>
+      <p:sp>
+        <p:nvSpPr>
+          <p:cNvPr id="2" name="제목 1">
+            <a:extLst>
+              <a:ext uri="{FF2B5EF4-FFF2-40B4-BE49-F238E27FC236}">
+                <a16:creationId xmlns:a16="http://schemas.microsoft.com/office/drawing/2014/main" id="{17501D95-006F-48DC-EDE1-699FE507DF60}"/>
+              </a:ext>
+            </a:extLst>
+          </p:cNvPr>
+          <p:cNvSpPr>
+            <a:spLocks noGrp="1"/>
+          </p:cNvSpPr>
+          <p:nvPr>
+            <p:ph type="title"/>
+          </p:nvPr>
+        </p:nvSpPr>
+        <p:spPr/>
+        <p:txBody>
+          <a:bodyPr/>
+          <a:lstStyle/>
+          <a:p>
+            <a:r>
+              <a:rPr lang="ko-KR" altLang="en-US" dirty="0"/>
+              <a:t>서론</a:t>
+            </a:r>
+          </a:p>
+        </p:txBody>
+      </p:sp>
+      <p:sp>
+        <p:nvSpPr>
+          <p:cNvPr id="4" name="슬라이드 번호 개체 틀 3">
+            <a:extLst>
+              <a:ext uri="{FF2B5EF4-FFF2-40B4-BE49-F238E27FC236}">
+                <a16:creationId xmlns:a16="http://schemas.microsoft.com/office/drawing/2014/main" id="{8B78A500-8ECC-79BD-D5CA-30B816254C3E}"/>
+              </a:ext>
+            </a:extLst>
+          </p:cNvPr>
+          <p:cNvSpPr>
+            <a:spLocks noGrp="1"/>
+          </p:cNvSpPr>
+          <p:nvPr>
+            <p:ph type="sldNum" sz="quarter" idx="12"/>
+          </p:nvPr>
+        </p:nvSpPr>
+        <p:spPr/>
+        <p:txBody>
+          <a:bodyPr/>
+          <a:lstStyle/>
+          <a:p>
+            <a:fld id="{109C872D-39A9-4065-8BF3-6A613116E2A1}" type="slidenum">
+              <a:rPr lang="ko-KR" altLang="en-US" smtClean="0"/>
+              <a:t>6</a:t>
+            </a:fld>
+            <a:endParaRPr lang="ko-KR" altLang="en-US"/>
+          </a:p>
+        </p:txBody>
+      </p:sp>
+      <p:sp>
+        <p:nvSpPr>
+          <p:cNvPr id="3" name="TextBox 2">
+            <a:extLst>
+              <a:ext uri="{FF2B5EF4-FFF2-40B4-BE49-F238E27FC236}">
+                <a16:creationId xmlns:a16="http://schemas.microsoft.com/office/drawing/2014/main" id="{3D5D0CFB-4544-09EF-CC37-A77EF95709A1}"/>
+              </a:ext>
+            </a:extLst>
+          </p:cNvPr>
+          <p:cNvSpPr txBox="1"/>
+          <p:nvPr/>
+        </p:nvSpPr>
+        <p:spPr>
+          <a:xfrm>
+            <a:off x="288790" y="958844"/>
+            <a:ext cx="11118453" cy="2630015"/>
+          </a:xfrm>
+          <a:prstGeom prst="rect">
+            <a:avLst/>
+          </a:prstGeom>
+          <a:noFill/>
+        </p:spPr>
+        <p:txBody>
+          <a:bodyPr wrap="square" rtlCol="0" anchor="t">
+            <a:spAutoFit/>
+          </a:bodyPr>
+          <a:lstStyle/>
+          <a:p>
+            <a:pPr marL="377825" indent="-285750">
+              <a:lnSpc>
+                <a:spcPct val="150000"/>
+              </a:lnSpc>
+              <a:buFont typeface="Arial" panose="020B0604020202020204" pitchFamily="34" charset="0"/>
+              <a:buChar char="•"/>
+            </a:pPr>
+            <a:r>
+              <a:rPr lang="en-US" altLang="ko-KR" sz="1600" dirty="0"/>
+              <a:t>21</a:t>
+            </a:r>
+            <a:r>
+              <a:rPr lang="ko-KR" altLang="en-US" sz="1600" dirty="0"/>
+              <a:t>세기 들어서면서 천연가스 산업은 새로운 혁신기의 전기를 맞이하였다</a:t>
+            </a:r>
+            <a:r>
+              <a:rPr lang="en-US" altLang="ko-KR" sz="1600" dirty="0"/>
+              <a:t>.</a:t>
+            </a:r>
+          </a:p>
+          <a:p>
+            <a:pPr marL="835025" lvl="1" indent="-285750">
+              <a:lnSpc>
+                <a:spcPct val="150000"/>
+              </a:lnSpc>
+              <a:buFont typeface="Wingdings" panose="05000000000000000000" pitchFamily="2" charset="2"/>
+              <a:buChar char="ü"/>
+            </a:pPr>
+            <a:r>
+              <a:rPr lang="ko-KR" altLang="en-US" sz="1600" dirty="0"/>
+              <a:t>미국의 </a:t>
+            </a:r>
+            <a:r>
+              <a:rPr lang="ko-KR" altLang="en-US" sz="1600" dirty="0" err="1"/>
+              <a:t>셰일가스</a:t>
+            </a:r>
+            <a:r>
+              <a:rPr lang="ko-KR" altLang="en-US" sz="1600" dirty="0"/>
+              <a:t> 혁명</a:t>
+            </a:r>
+            <a:r>
+              <a:rPr lang="en-US" altLang="ko-KR" sz="1600" dirty="0"/>
+              <a:t>(</a:t>
+            </a:r>
+            <a:r>
+              <a:rPr lang="ko-KR" altLang="en-US" sz="1600" dirty="0" err="1"/>
+              <a:t>석유챕터</a:t>
+            </a:r>
+            <a:r>
+              <a:rPr lang="ko-KR" altLang="en-US" sz="1600" dirty="0"/>
+              <a:t> 참고</a:t>
+            </a:r>
+            <a:r>
+              <a:rPr lang="en-US" altLang="ko-KR" sz="1600" dirty="0"/>
+              <a:t>)</a:t>
+            </a:r>
+            <a:r>
+              <a:rPr lang="ko-KR" altLang="en-US" sz="1600" dirty="0"/>
+              <a:t>은 천연가스 공급 구조에 지대한 변화를 초래하였다</a:t>
+            </a:r>
+            <a:r>
+              <a:rPr lang="en-US" altLang="ko-KR" sz="1600" dirty="0"/>
+              <a:t>.</a:t>
+            </a:r>
+          </a:p>
+          <a:p>
+            <a:pPr marL="835025" lvl="1" indent="-285750">
+              <a:lnSpc>
+                <a:spcPct val="150000"/>
+              </a:lnSpc>
+              <a:buFont typeface="Wingdings" panose="05000000000000000000" pitchFamily="2" charset="2"/>
+              <a:buChar char="ü"/>
+            </a:pPr>
+            <a:r>
+              <a:rPr lang="ko-KR" altLang="en-US" sz="1600" dirty="0"/>
+              <a:t>미국은 세계 최대의 천연가스 생산국으로 부상하고</a:t>
+            </a:r>
+            <a:r>
+              <a:rPr lang="en-US" altLang="ko-KR" sz="1600" dirty="0"/>
+              <a:t>, </a:t>
+            </a:r>
+            <a:r>
+              <a:rPr lang="ko-KR" altLang="en-US" sz="1600" dirty="0"/>
+              <a:t>세계 천연가스 시장의 공급 안정성이 향상되었다</a:t>
+            </a:r>
+            <a:r>
+              <a:rPr lang="en-US" altLang="ko-KR" sz="1600" dirty="0"/>
+              <a:t>.</a:t>
+            </a:r>
+          </a:p>
+          <a:p>
+            <a:pPr marL="377825" indent="-285750">
+              <a:lnSpc>
+                <a:spcPct val="150000"/>
+              </a:lnSpc>
+              <a:buFont typeface="Arial" panose="020B0604020202020204" pitchFamily="34" charset="0"/>
+              <a:buChar char="•"/>
+            </a:pPr>
+            <a:endParaRPr lang="en-US" altLang="ko-KR" sz="1600" dirty="0"/>
+          </a:p>
+          <a:p>
+            <a:pPr marL="377825" indent="-285750">
+              <a:lnSpc>
+                <a:spcPct val="150000"/>
+              </a:lnSpc>
+              <a:buFont typeface="Arial" panose="020B0604020202020204" pitchFamily="34" charset="0"/>
+              <a:buChar char="•"/>
+            </a:pPr>
+            <a:r>
+              <a:rPr lang="ko-KR" altLang="en-US" sz="1600" dirty="0"/>
+              <a:t>한편 기후변화와 지속가능한 발전에 대한 국제적 요구가 확대되면서</a:t>
+            </a:r>
+            <a:r>
+              <a:rPr lang="en-US" altLang="ko-KR" sz="1600" dirty="0"/>
+              <a:t>, </a:t>
+            </a:r>
+            <a:r>
+              <a:rPr lang="ko-KR" altLang="en-US" sz="1600" dirty="0"/>
+              <a:t>천연가스는 석탄과 석유를 대체할 수 있는 과도기적 청정연료로서 주목 받고 있다</a:t>
+            </a:r>
+            <a:r>
+              <a:rPr lang="en-US" altLang="ko-KR" sz="1600" dirty="0"/>
+              <a:t>.</a:t>
+            </a:r>
+          </a:p>
+          <a:p>
+            <a:pPr marL="835025" lvl="1" indent="-285750">
+              <a:lnSpc>
+                <a:spcPct val="150000"/>
+              </a:lnSpc>
+              <a:buFont typeface="Wingdings" panose="05000000000000000000" pitchFamily="2" charset="2"/>
+              <a:buChar char="ü"/>
+            </a:pPr>
+            <a:r>
+              <a:rPr lang="ko-KR" altLang="en-US" sz="1600" dirty="0"/>
+              <a:t>특히 재생에너지와 결합하여 전력 시스템의 안정성과 유연성을 제고할 수 있다는 점에서 역할이 부각된다</a:t>
+            </a:r>
+            <a:r>
+              <a:rPr lang="en-US" altLang="ko-KR" sz="1600" dirty="0"/>
+              <a:t>.</a:t>
+            </a:r>
+          </a:p>
+        </p:txBody>
+      </p:sp>
+    </p:spTree>
+    <p:extLst>
+      <p:ext uri="{BB962C8B-B14F-4D97-AF65-F5344CB8AC3E}">
+        <p14:creationId xmlns:p14="http://schemas.microsoft.com/office/powerpoint/2010/main" val="3724184086"/>
+      </p:ext>
+    </p:extLst>
+  </p:cSld>
+  <p:clrMapOvr>
+    <a:masterClrMapping/>
+  </p:clrMapOvr>
+</p:sld>
+</file>
+
+<file path=ppt/slides/slide60.xml><?xml version="1.0" encoding="utf-8"?>
 <p:sld xmlns:a="http://schemas.openxmlformats.org/drawingml/2006/main" xmlns:r="http://schemas.openxmlformats.org/officeDocument/2006/relationships" xmlns:p="http://schemas.openxmlformats.org/presentationml/2006/main">
   <p:cSld>
     <p:spTree>
@@ -43201,7 +44828,7 @@
           <a:p>
             <a:fld id="{109C872D-39A9-4065-8BF3-6A613116E2A1}" type="slidenum">
               <a:rPr lang="ko-KR" altLang="en-US" smtClean="0"/>
-              <a:t>56</a:t>
+              <a:t>60</a:t>
             </a:fld>
             <a:endParaRPr lang="ko-KR" altLang="en-US"/>
           </a:p>
@@ -43538,7 +45165,7 @@
 </p:sld>
 </file>
 
-<file path=ppt/slides/slide57.xml><?xml version="1.0" encoding="utf-8"?>
+<file path=ppt/slides/slide61.xml><?xml version="1.0" encoding="utf-8"?>
 <p:sld xmlns:a="http://schemas.openxmlformats.org/drawingml/2006/main" xmlns:r="http://schemas.openxmlformats.org/officeDocument/2006/relationships" xmlns:p="http://schemas.openxmlformats.org/presentationml/2006/main">
   <p:cSld>
     <p:spTree>
@@ -43666,7 +45293,7 @@
           <a:p>
             <a:fld id="{109C872D-39A9-4065-8BF3-6A613116E2A1}" type="slidenum">
               <a:rPr lang="ko-KR" altLang="en-US" smtClean="0"/>
-              <a:t>57</a:t>
+              <a:t>61</a:t>
             </a:fld>
             <a:endParaRPr lang="ko-KR" altLang="en-US"/>
           </a:p>
@@ -43676,271 +45303,6 @@
     <p:extLst>
       <p:ext uri="{BB962C8B-B14F-4D97-AF65-F5344CB8AC3E}">
         <p14:creationId xmlns:p14="http://schemas.microsoft.com/office/powerpoint/2010/main" val="103939182"/>
-      </p:ext>
-    </p:extLst>
-  </p:cSld>
-  <p:clrMapOvr>
-    <a:masterClrMapping/>
-  </p:clrMapOvr>
-</p:sld>
-</file>
-
-<file path=ppt/slides/slide6.xml><?xml version="1.0" encoding="utf-8"?>
-<p:sld xmlns:a="http://schemas.openxmlformats.org/drawingml/2006/main" xmlns:r="http://schemas.openxmlformats.org/officeDocument/2006/relationships" xmlns:p="http://schemas.openxmlformats.org/presentationml/2006/main">
-  <p:cSld>
-    <p:spTree>
-      <p:nvGrpSpPr>
-        <p:cNvPr id="1" name="">
-          <a:extLst>
-            <a:ext uri="{FF2B5EF4-FFF2-40B4-BE49-F238E27FC236}">
-              <a16:creationId xmlns:a16="http://schemas.microsoft.com/office/drawing/2014/main" id="{337F2B2B-B0DB-E70D-D7BF-B2362ECCFC19}"/>
-            </a:ext>
-          </a:extLst>
-        </p:cNvPr>
-        <p:cNvGrpSpPr/>
-        <p:nvPr/>
-      </p:nvGrpSpPr>
-      <p:grpSpPr>
-        <a:xfrm>
-          <a:off x="0" y="0"/>
-          <a:ext cx="0" cy="0"/>
-          <a:chOff x="0" y="0"/>
-          <a:chExt cx="0" cy="0"/>
-        </a:xfrm>
-      </p:grpSpPr>
-      <p:sp>
-        <p:nvSpPr>
-          <p:cNvPr id="2" name="제목 1">
-            <a:extLst>
-              <a:ext uri="{FF2B5EF4-FFF2-40B4-BE49-F238E27FC236}">
-                <a16:creationId xmlns:a16="http://schemas.microsoft.com/office/drawing/2014/main" id="{17501D95-006F-48DC-EDE1-699FE507DF60}"/>
-              </a:ext>
-            </a:extLst>
-          </p:cNvPr>
-          <p:cNvSpPr>
-            <a:spLocks noGrp="1"/>
-          </p:cNvSpPr>
-          <p:nvPr>
-            <p:ph type="title"/>
-          </p:nvPr>
-        </p:nvSpPr>
-        <p:spPr/>
-        <p:txBody>
-          <a:bodyPr/>
-          <a:lstStyle/>
-          <a:p>
-            <a:r>
-              <a:rPr lang="ko-KR" altLang="en-US" dirty="0"/>
-              <a:t>서론</a:t>
-            </a:r>
-          </a:p>
-        </p:txBody>
-      </p:sp>
-      <p:sp>
-        <p:nvSpPr>
-          <p:cNvPr id="4" name="슬라이드 번호 개체 틀 3">
-            <a:extLst>
-              <a:ext uri="{FF2B5EF4-FFF2-40B4-BE49-F238E27FC236}">
-                <a16:creationId xmlns:a16="http://schemas.microsoft.com/office/drawing/2014/main" id="{8B78A500-8ECC-79BD-D5CA-30B816254C3E}"/>
-              </a:ext>
-            </a:extLst>
-          </p:cNvPr>
-          <p:cNvSpPr>
-            <a:spLocks noGrp="1"/>
-          </p:cNvSpPr>
-          <p:nvPr>
-            <p:ph type="sldNum" sz="quarter" idx="12"/>
-          </p:nvPr>
-        </p:nvSpPr>
-        <p:spPr/>
-        <p:txBody>
-          <a:bodyPr/>
-          <a:lstStyle/>
-          <a:p>
-            <a:fld id="{109C872D-39A9-4065-8BF3-6A613116E2A1}" type="slidenum">
-              <a:rPr lang="ko-KR" altLang="en-US" smtClean="0"/>
-              <a:t>6</a:t>
-            </a:fld>
-            <a:endParaRPr lang="ko-KR" altLang="en-US"/>
-          </a:p>
-        </p:txBody>
-      </p:sp>
-      <p:sp>
-        <p:nvSpPr>
-          <p:cNvPr id="3" name="TextBox 2">
-            <a:extLst>
-              <a:ext uri="{FF2B5EF4-FFF2-40B4-BE49-F238E27FC236}">
-                <a16:creationId xmlns:a16="http://schemas.microsoft.com/office/drawing/2014/main" id="{3D5D0CFB-4544-09EF-CC37-A77EF95709A1}"/>
-              </a:ext>
-            </a:extLst>
-          </p:cNvPr>
-          <p:cNvSpPr txBox="1"/>
-          <p:nvPr/>
-        </p:nvSpPr>
-        <p:spPr>
-          <a:xfrm>
-            <a:off x="288790" y="958844"/>
-            <a:ext cx="11118453" cy="2630015"/>
-          </a:xfrm>
-          <a:prstGeom prst="rect">
-            <a:avLst/>
-          </a:prstGeom>
-          <a:noFill/>
-        </p:spPr>
-        <p:txBody>
-          <a:bodyPr wrap="square" rtlCol="0" anchor="t">
-            <a:spAutoFit/>
-          </a:bodyPr>
-          <a:lstStyle/>
-          <a:p>
-            <a:pPr marL="377825" indent="-285750">
-              <a:lnSpc>
-                <a:spcPct val="150000"/>
-              </a:lnSpc>
-              <a:buFont typeface="Arial" panose="020B0604020202020204" pitchFamily="34" charset="0"/>
-              <a:buChar char="•"/>
-            </a:pPr>
-            <a:r>
-              <a:rPr lang="en-US" altLang="ko-KR" sz="1600" dirty="0"/>
-              <a:t>21</a:t>
-            </a:r>
-            <a:r>
-              <a:rPr lang="ko-KR" altLang="en-US" sz="1600" dirty="0"/>
-              <a:t>세기 들어서면서 천연가스 산업은 새로운 혁신기의 전기를 맞이하였다</a:t>
-            </a:r>
-            <a:r>
-              <a:rPr lang="en-US" altLang="ko-KR" sz="1600" dirty="0"/>
-              <a:t>.</a:t>
-            </a:r>
-          </a:p>
-          <a:p>
-            <a:pPr marL="835025" lvl="1" indent="-285750">
-              <a:lnSpc>
-                <a:spcPct val="150000"/>
-              </a:lnSpc>
-              <a:buFont typeface="Wingdings" panose="05000000000000000000" pitchFamily="2" charset="2"/>
-              <a:buChar char="ü"/>
-            </a:pPr>
-            <a:r>
-              <a:rPr lang="ko-KR" altLang="en-US" sz="1600" dirty="0"/>
-              <a:t>미국의 </a:t>
-            </a:r>
-            <a:r>
-              <a:rPr lang="ko-KR" altLang="en-US" sz="1600" dirty="0" err="1"/>
-              <a:t>셰일가스</a:t>
-            </a:r>
-            <a:r>
-              <a:rPr lang="ko-KR" altLang="en-US" sz="1600" dirty="0"/>
-              <a:t> 혁명</a:t>
-            </a:r>
-            <a:r>
-              <a:rPr lang="en-US" altLang="ko-KR" sz="1600" dirty="0"/>
-              <a:t>(</a:t>
-            </a:r>
-            <a:r>
-              <a:rPr lang="ko-KR" altLang="en-US" sz="1600" dirty="0" err="1"/>
-              <a:t>석유챕터</a:t>
-            </a:r>
-            <a:r>
-              <a:rPr lang="ko-KR" altLang="en-US" sz="1600" dirty="0"/>
-              <a:t> 참고</a:t>
-            </a:r>
-            <a:r>
-              <a:rPr lang="en-US" altLang="ko-KR" sz="1600" dirty="0"/>
-              <a:t>)</a:t>
-            </a:r>
-            <a:r>
-              <a:rPr lang="ko-KR" altLang="en-US" sz="1600" dirty="0"/>
-              <a:t>은 천연가스 공급 구조에 지대한 변화를 초래하였다</a:t>
-            </a:r>
-            <a:r>
-              <a:rPr lang="en-US" altLang="ko-KR" sz="1600" dirty="0"/>
-              <a:t>.</a:t>
-            </a:r>
-          </a:p>
-          <a:p>
-            <a:pPr marL="835025" lvl="1" indent="-285750">
-              <a:lnSpc>
-                <a:spcPct val="150000"/>
-              </a:lnSpc>
-              <a:buFont typeface="Wingdings" panose="05000000000000000000" pitchFamily="2" charset="2"/>
-              <a:buChar char="ü"/>
-            </a:pPr>
-            <a:r>
-              <a:rPr lang="ko-KR" altLang="en-US" sz="1600" dirty="0"/>
-              <a:t>미국은 세계 최대의 천연가스 생산국으로 부상하고</a:t>
-            </a:r>
-            <a:r>
-              <a:rPr lang="en-US" altLang="ko-KR" sz="1600" dirty="0"/>
-              <a:t>, </a:t>
-            </a:r>
-            <a:r>
-              <a:rPr lang="ko-KR" altLang="en-US" sz="1600" dirty="0"/>
-              <a:t>세계 천연가스 시장의 공급 안정성이 향상되었다</a:t>
-            </a:r>
-            <a:r>
-              <a:rPr lang="en-US" altLang="ko-KR" sz="1600" dirty="0"/>
-              <a:t>.</a:t>
-            </a:r>
-          </a:p>
-          <a:p>
-            <a:pPr marL="377825" indent="-285750">
-              <a:lnSpc>
-                <a:spcPct val="150000"/>
-              </a:lnSpc>
-              <a:buFont typeface="Arial" panose="020B0604020202020204" pitchFamily="34" charset="0"/>
-              <a:buChar char="•"/>
-            </a:pPr>
-            <a:endParaRPr lang="en-US" altLang="ko-KR" sz="1600" dirty="0"/>
-          </a:p>
-          <a:p>
-            <a:pPr marL="377825" indent="-285750">
-              <a:lnSpc>
-                <a:spcPct val="150000"/>
-              </a:lnSpc>
-              <a:buFont typeface="Arial" panose="020B0604020202020204" pitchFamily="34" charset="0"/>
-              <a:buChar char="•"/>
-            </a:pPr>
-            <a:r>
-              <a:rPr lang="ko-KR" altLang="en-US" sz="1600" dirty="0"/>
-              <a:t>한편 기후변화와 지속가능한 발전에 대한 국제적 요구가 확대되면서</a:t>
-            </a:r>
-            <a:r>
-              <a:rPr lang="en-US" altLang="ko-KR" sz="1600" dirty="0"/>
-              <a:t>, </a:t>
-            </a:r>
-            <a:r>
-              <a:rPr lang="ko-KR" altLang="en-US" sz="1600" dirty="0"/>
-              <a:t>천연가스는 석탄과 석유를 대체할 수 있는 과도기적 청정연료로서 주목 받고 있다</a:t>
-            </a:r>
-            <a:r>
-              <a:rPr lang="en-US" altLang="ko-KR" sz="1600" dirty="0"/>
-              <a:t>.</a:t>
-            </a:r>
-          </a:p>
-          <a:p>
-            <a:pPr marL="835025" lvl="1" indent="-285750">
-              <a:lnSpc>
-                <a:spcPct val="150000"/>
-              </a:lnSpc>
-              <a:buFont typeface="Wingdings" panose="05000000000000000000" pitchFamily="2" charset="2"/>
-              <a:buChar char="ü"/>
-            </a:pPr>
-            <a:r>
-              <a:rPr lang="ko-KR" altLang="en-US" sz="1600" dirty="0"/>
-              <a:t>특히 재생에너지와 결합하여 전력 시스템의 안정성과 유연성을 제고할 수 있다는 점에서 역할이 부각된다</a:t>
-            </a:r>
-            <a:r>
-              <a:rPr lang="en-US" altLang="ko-KR" sz="1600" dirty="0"/>
-              <a:t>.</a:t>
-            </a:r>
-          </a:p>
-        </p:txBody>
-      </p:sp>
-    </p:spTree>
-    <p:extLst>
-      <p:ext uri="{BB962C8B-B14F-4D97-AF65-F5344CB8AC3E}">
-        <p14:creationId xmlns:p14="http://schemas.microsoft.com/office/powerpoint/2010/main" val="3724184086"/>
       </p:ext>
     </p:extLst>
   </p:cSld>

--- a/에너지경제학/자원에너지경제학_Chapter_4 (가스).pptx
+++ b/에너지경제학/자원에너지경제학_Chapter_4 (가스).pptx
@@ -5,7 +5,7 @@
     <p:sldMasterId id="2147483648" r:id="rId1"/>
   </p:sldMasterIdLst>
   <p:notesMasterIdLst>
-    <p:notesMasterId r:id="rId63"/>
+    <p:notesMasterId r:id="rId61"/>
   </p:notesMasterIdLst>
   <p:sldIdLst>
     <p:sldId id="375" r:id="rId2"/>
@@ -24,51 +24,49 @@
     <p:sldId id="646" r:id="rId15"/>
     <p:sldId id="647" r:id="rId16"/>
     <p:sldId id="648" r:id="rId17"/>
-    <p:sldId id="649" r:id="rId18"/>
-    <p:sldId id="689" r:id="rId19"/>
-    <p:sldId id="690" r:id="rId20"/>
-    <p:sldId id="691" r:id="rId21"/>
-    <p:sldId id="692" r:id="rId22"/>
-    <p:sldId id="650" r:id="rId23"/>
-    <p:sldId id="653" r:id="rId24"/>
-    <p:sldId id="651" r:id="rId25"/>
-    <p:sldId id="654" r:id="rId26"/>
-    <p:sldId id="652" r:id="rId27"/>
-    <p:sldId id="655" r:id="rId28"/>
-    <p:sldId id="656" r:id="rId29"/>
-    <p:sldId id="657" r:id="rId30"/>
-    <p:sldId id="658" r:id="rId31"/>
-    <p:sldId id="659" r:id="rId32"/>
-    <p:sldId id="660" r:id="rId33"/>
-    <p:sldId id="661" r:id="rId34"/>
-    <p:sldId id="662" r:id="rId35"/>
-    <p:sldId id="663" r:id="rId36"/>
-    <p:sldId id="664" r:id="rId37"/>
-    <p:sldId id="665" r:id="rId38"/>
-    <p:sldId id="666" r:id="rId39"/>
-    <p:sldId id="667" r:id="rId40"/>
-    <p:sldId id="668" r:id="rId41"/>
-    <p:sldId id="676" r:id="rId42"/>
-    <p:sldId id="669" r:id="rId43"/>
-    <p:sldId id="670" r:id="rId44"/>
-    <p:sldId id="671" r:id="rId45"/>
-    <p:sldId id="677" r:id="rId46"/>
-    <p:sldId id="672" r:id="rId47"/>
-    <p:sldId id="673" r:id="rId48"/>
-    <p:sldId id="674" r:id="rId49"/>
-    <p:sldId id="675" r:id="rId50"/>
-    <p:sldId id="678" r:id="rId51"/>
-    <p:sldId id="679" r:id="rId52"/>
-    <p:sldId id="680" r:id="rId53"/>
-    <p:sldId id="681" r:id="rId54"/>
-    <p:sldId id="682" r:id="rId55"/>
-    <p:sldId id="683" r:id="rId56"/>
-    <p:sldId id="684" r:id="rId57"/>
-    <p:sldId id="685" r:id="rId58"/>
-    <p:sldId id="686" r:id="rId59"/>
-    <p:sldId id="687" r:id="rId60"/>
-    <p:sldId id="688" r:id="rId61"/>
-    <p:sldId id="598" r:id="rId62"/>
+    <p:sldId id="690" r:id="rId18"/>
+    <p:sldId id="691" r:id="rId19"/>
+    <p:sldId id="692" r:id="rId20"/>
+    <p:sldId id="650" r:id="rId21"/>
+    <p:sldId id="653" r:id="rId22"/>
+    <p:sldId id="651" r:id="rId23"/>
+    <p:sldId id="654" r:id="rId24"/>
+    <p:sldId id="652" r:id="rId25"/>
+    <p:sldId id="655" r:id="rId26"/>
+    <p:sldId id="656" r:id="rId27"/>
+    <p:sldId id="657" r:id="rId28"/>
+    <p:sldId id="658" r:id="rId29"/>
+    <p:sldId id="659" r:id="rId30"/>
+    <p:sldId id="660" r:id="rId31"/>
+    <p:sldId id="661" r:id="rId32"/>
+    <p:sldId id="662" r:id="rId33"/>
+    <p:sldId id="663" r:id="rId34"/>
+    <p:sldId id="664" r:id="rId35"/>
+    <p:sldId id="665" r:id="rId36"/>
+    <p:sldId id="666" r:id="rId37"/>
+    <p:sldId id="667" r:id="rId38"/>
+    <p:sldId id="668" r:id="rId39"/>
+    <p:sldId id="676" r:id="rId40"/>
+    <p:sldId id="669" r:id="rId41"/>
+    <p:sldId id="670" r:id="rId42"/>
+    <p:sldId id="671" r:id="rId43"/>
+    <p:sldId id="677" r:id="rId44"/>
+    <p:sldId id="672" r:id="rId45"/>
+    <p:sldId id="673" r:id="rId46"/>
+    <p:sldId id="674" r:id="rId47"/>
+    <p:sldId id="675" r:id="rId48"/>
+    <p:sldId id="678" r:id="rId49"/>
+    <p:sldId id="679" r:id="rId50"/>
+    <p:sldId id="680" r:id="rId51"/>
+    <p:sldId id="681" r:id="rId52"/>
+    <p:sldId id="682" r:id="rId53"/>
+    <p:sldId id="683" r:id="rId54"/>
+    <p:sldId id="684" r:id="rId55"/>
+    <p:sldId id="685" r:id="rId56"/>
+    <p:sldId id="686" r:id="rId57"/>
+    <p:sldId id="687" r:id="rId58"/>
+    <p:sldId id="688" r:id="rId59"/>
+    <p:sldId id="598" r:id="rId60"/>
   </p:sldIdLst>
   <p:sldSz cx="12192000" cy="6858000"/>
   <p:notesSz cx="6858000" cy="9144000"/>
@@ -279,7 +277,7 @@
           <a:p>
             <a:fld id="{4A5E00EF-AEA4-43E2-9451-8F9C59A39471}" type="datetimeFigureOut">
               <a:rPr lang="ko-KR" altLang="en-US" smtClean="0"/>
-              <a:t>2026-10-01</a:t>
+              <a:t>2026-10-02</a:t>
             </a:fld>
             <a:endParaRPr lang="ko-KR" altLang="en-US"/>
           </a:p>
@@ -611,7 +609,7 @@
           <a:p>
             <a:fld id="{D6183C86-FCDD-4CD4-A668-4DF0BEDE3EB5}" type="slidenum">
               <a:rPr lang="ko-KR" altLang="en-US" smtClean="0"/>
-              <a:t>52</a:t>
+              <a:t>50</a:t>
             </a:fld>
             <a:endParaRPr lang="ko-KR" altLang="en-US"/>
           </a:p>
@@ -719,7 +717,7 @@
           <a:p>
             <a:fld id="{D6183C86-FCDD-4CD4-A668-4DF0BEDE3EB5}" type="slidenum">
               <a:rPr lang="ko-KR" altLang="en-US" smtClean="0"/>
-              <a:t>53</a:t>
+              <a:t>51</a:t>
             </a:fld>
             <a:endParaRPr lang="ko-KR" altLang="en-US"/>
           </a:p>
@@ -827,7 +825,7 @@
           <a:p>
             <a:fld id="{D6183C86-FCDD-4CD4-A668-4DF0BEDE3EB5}" type="slidenum">
               <a:rPr lang="ko-KR" altLang="en-US" smtClean="0"/>
-              <a:t>54</a:t>
+              <a:t>52</a:t>
             </a:fld>
             <a:endParaRPr lang="ko-KR" altLang="en-US"/>
           </a:p>
@@ -911,7 +909,7 @@
           <a:p>
             <a:fld id="{D6183C86-FCDD-4CD4-A668-4DF0BEDE3EB5}" type="slidenum">
               <a:rPr lang="ko-KR" altLang="en-US" smtClean="0"/>
-              <a:t>56</a:t>
+              <a:t>54</a:t>
             </a:fld>
             <a:endParaRPr lang="ko-KR" altLang="en-US"/>
           </a:p>
@@ -1085,7 +1083,7 @@
           <a:p>
             <a:fld id="{CD32C56F-BD27-4999-9E6D-D4EACE3DA9F4}" type="datetime1">
               <a:rPr lang="ko-KR" altLang="en-US" smtClean="0"/>
-              <a:t>2026-10-01</a:t>
+              <a:t>2026-10-02</a:t>
             </a:fld>
             <a:endParaRPr lang="ko-KR" altLang="en-US"/>
           </a:p>
@@ -1299,7 +1297,7 @@
           <a:p>
             <a:fld id="{8EF4A19C-72C8-45CA-8E3F-68A7FA345D6C}" type="datetime1">
               <a:rPr lang="ko-KR" altLang="en-US" smtClean="0"/>
-              <a:t>2026-10-01</a:t>
+              <a:t>2026-10-02</a:t>
             </a:fld>
             <a:endParaRPr lang="ko-KR" altLang="en-US"/>
           </a:p>
@@ -1523,7 +1521,7 @@
           <a:p>
             <a:fld id="{56A175B2-010B-4341-954C-5F8F5C70B124}" type="datetime1">
               <a:rPr lang="ko-KR" altLang="en-US" smtClean="0"/>
-              <a:t>2026-10-01</a:t>
+              <a:t>2026-10-02</a:t>
             </a:fld>
             <a:endParaRPr lang="ko-KR" altLang="en-US"/>
           </a:p>
@@ -1737,7 +1735,7 @@
           <a:p>
             <a:fld id="{16B83F9E-22C9-45CA-9E85-070F1D3EF530}" type="datetime1">
               <a:rPr lang="ko-KR" altLang="en-US" smtClean="0"/>
-              <a:t>2026-10-01</a:t>
+              <a:t>2026-10-02</a:t>
             </a:fld>
             <a:endParaRPr lang="ko-KR" altLang="en-US"/>
           </a:p>
@@ -2028,7 +2026,7 @@
           <a:p>
             <a:fld id="{03278F45-FB3C-4C4D-B89A-7BC3F5F229F6}" type="datetime1">
               <a:rPr lang="ko-KR" altLang="en-US" smtClean="0"/>
-              <a:t>2026-10-01</a:t>
+              <a:t>2026-10-02</a:t>
             </a:fld>
             <a:endParaRPr lang="ko-KR" altLang="en-US"/>
           </a:p>
@@ -2421,7 +2419,7 @@
           <a:p>
             <a:fld id="{38FDAC3C-35A6-415C-9F03-738A6AC328B1}" type="datetime1">
               <a:rPr lang="ko-KR" altLang="en-US" smtClean="0"/>
-              <a:t>2026-10-01</a:t>
+              <a:t>2026-10-02</a:t>
             </a:fld>
             <a:endParaRPr lang="ko-KR" altLang="en-US"/>
           </a:p>
@@ -4015,7 +4013,7 @@
           <a:p>
             <a:fld id="{507A0DF1-AEE6-4B0D-89D2-351E7B3EF65C}" type="datetime1">
               <a:rPr lang="ko-KR" altLang="en-US" smtClean="0"/>
-              <a:t>2026-10-01</a:t>
+              <a:t>2026-10-02</a:t>
             </a:fld>
             <a:endParaRPr lang="ko-KR" altLang="en-US"/>
           </a:p>
@@ -4443,7 +4441,7 @@
           <a:p>
             <a:fld id="{CA93B8C9-630F-4D57-944D-04FD37CECCD3}" type="datetime1">
               <a:rPr lang="ko-KR" altLang="en-US" smtClean="0"/>
-              <a:t>2026-10-01</a:t>
+              <a:t>2026-10-02</a:t>
             </a:fld>
             <a:endParaRPr lang="ko-KR" altLang="en-US"/>
           </a:p>
@@ -4600,7 +4598,7 @@
           <a:p>
             <a:fld id="{E986165A-AC43-4902-9541-874ECD310BA3}" type="datetime1">
               <a:rPr lang="ko-KR" altLang="en-US" smtClean="0"/>
-              <a:t>2026-10-01</a:t>
+              <a:t>2026-10-02</a:t>
             </a:fld>
             <a:endParaRPr lang="ko-KR" altLang="en-US"/>
           </a:p>
@@ -4927,7 +4925,7 @@
           <a:p>
             <a:fld id="{47E6EE6D-2B0E-43A9-87A2-7354CDB998F4}" type="datetime1">
               <a:rPr lang="ko-KR" altLang="en-US" smtClean="0"/>
-              <a:t>2026-10-01</a:t>
+              <a:t>2026-10-02</a:t>
             </a:fld>
             <a:endParaRPr lang="ko-KR" altLang="en-US"/>
           </a:p>
@@ -5231,7 +5229,7 @@
           <a:p>
             <a:fld id="{5CC5944E-0BC8-4FAA-9F94-6B4B05834E10}" type="datetime1">
               <a:rPr lang="ko-KR" altLang="en-US" smtClean="0"/>
-              <a:t>2026-10-01</a:t>
+              <a:t>2026-10-02</a:t>
             </a:fld>
             <a:endParaRPr lang="ko-KR" altLang="en-US"/>
           </a:p>
@@ -7760,7 +7758,7 @@
         <p:spPr>
           <a:xfrm>
             <a:off x="288790" y="958844"/>
-            <a:ext cx="11118453" cy="4476675"/>
+            <a:ext cx="11118453" cy="5215338"/>
           </a:xfrm>
           <a:prstGeom prst="rect">
             <a:avLst/>
@@ -8014,7 +8012,7 @@
             </a:r>
             <a:r>
               <a:rPr lang="ko-KR" altLang="en-US" sz="1600" dirty="0"/>
-              <a:t>나 석유화학 연료</a:t>
+              <a:t>나 석유화학 원료</a:t>
             </a:r>
             <a:r>
               <a:rPr lang="en-US" altLang="ko-KR" sz="1600" dirty="0"/>
@@ -8076,6 +8074,63 @@
             <a:r>
               <a:rPr lang="en-US" altLang="ko-KR" sz="1600" dirty="0"/>
               <a:t>.</a:t>
+            </a:r>
+          </a:p>
+          <a:p>
+            <a:pPr marL="1292225" lvl="2" indent="-285750">
+              <a:lnSpc>
+                <a:spcPct val="150000"/>
+              </a:lnSpc>
+              <a:buFont typeface="Wingdings" panose="05000000000000000000" pitchFamily="2" charset="2"/>
+              <a:buChar char="Ø"/>
+            </a:pPr>
+            <a:r>
+              <a:rPr lang="ko-KR" altLang="en-US" sz="1600" dirty="0"/>
+              <a:t>석유화학 원료</a:t>
+            </a:r>
+            <a:r>
+              <a:rPr lang="en-US" altLang="ko-KR" sz="1600" dirty="0"/>
+              <a:t>(NGLs)</a:t>
+            </a:r>
+            <a:r>
+              <a:rPr lang="ko-KR" altLang="en-US" sz="1600" dirty="0"/>
+              <a:t>로 쓰면</a:t>
+            </a:r>
+            <a:r>
+              <a:rPr lang="en-US" altLang="ko-KR" sz="1600" dirty="0"/>
+              <a:t>, </a:t>
+            </a:r>
+            <a:r>
+              <a:rPr lang="ko-KR" altLang="en-US" sz="1600" dirty="0"/>
+              <a:t>그 안의 탄소를 제품을 만드는 재료로 활용한다</a:t>
+            </a:r>
+            <a:r>
+              <a:rPr lang="en-US" altLang="ko-KR" sz="1600" dirty="0"/>
+              <a:t>. (</a:t>
+            </a:r>
+            <a:r>
+              <a:rPr lang="ko-KR" altLang="en-US" sz="1600" dirty="0"/>
+              <a:t>플라스틱</a:t>
+            </a:r>
+            <a:r>
+              <a:rPr lang="en-US" altLang="ko-KR" sz="1600" dirty="0"/>
+              <a:t>, </a:t>
+            </a:r>
+            <a:r>
+              <a:rPr lang="ko-KR" altLang="en-US" sz="1600" dirty="0"/>
+              <a:t>합성섬유</a:t>
+            </a:r>
+            <a:r>
+              <a:rPr lang="en-US" altLang="ko-KR" sz="1600" dirty="0"/>
+              <a:t>, </a:t>
+            </a:r>
+            <a:r>
+              <a:rPr lang="ko-KR" altLang="en-US" sz="1600" dirty="0"/>
+              <a:t>합성고무 등</a:t>
+            </a:r>
+            <a:r>
+              <a:rPr lang="en-US" altLang="ko-KR" sz="1600" dirty="0"/>
+              <a:t>)</a:t>
             </a:r>
           </a:p>
         </p:txBody>
@@ -9990,7 +10045,7 @@
         <p:spPr>
           <a:xfrm>
             <a:off x="288790" y="958844"/>
-            <a:ext cx="11118453" cy="4846007"/>
+            <a:ext cx="11118453" cy="5215338"/>
           </a:xfrm>
           <a:prstGeom prst="rect">
             <a:avLst/>
@@ -10109,7 +10164,7 @@
             </a:pPr>
             <a:r>
               <a:rPr lang="ko-KR" altLang="en-US" sz="1600" dirty="0"/>
-              <a:t>공급사슬의 마지막 단계는 분배이며</a:t>
+              <a:t>다음 단계는 분배이며</a:t>
             </a:r>
             <a:r>
               <a:rPr lang="en-US" altLang="ko-KR" sz="1600" dirty="0"/>
@@ -10208,8 +10263,8 @@
               <a:t>, </a:t>
             </a:r>
             <a:r>
-              <a:rPr lang="ko-KR" altLang="en-US" sz="1600" dirty="0" err="1"/>
-              <a:t>산업열원</a:t>
+              <a:rPr lang="ko-KR" altLang="en-US" sz="1600" dirty="0"/>
+              <a:t>산업 열원</a:t>
             </a:r>
             <a:r>
               <a:rPr lang="en-US" altLang="ko-KR" sz="1600" dirty="0"/>
@@ -10250,23 +10305,39 @@
             </a:pPr>
             <a:r>
               <a:rPr lang="ko-KR" altLang="en-US" sz="1600" dirty="0"/>
-              <a:t>압축천연가스 </a:t>
-            </a:r>
-            <a:r>
-              <a:rPr lang="en-US" altLang="ko-KR" sz="1600" dirty="0"/>
-              <a:t>(CNG, Compressed Natural Gas)</a:t>
-            </a:r>
-            <a:r>
-              <a:rPr lang="ko-KR" altLang="en-US" sz="1600" dirty="0"/>
-              <a:t>는 도시버스나 승용차에</a:t>
-            </a:r>
-            <a:r>
-              <a:rPr lang="en-US" altLang="ko-KR" sz="1600" dirty="0"/>
-              <a:t> </a:t>
-            </a:r>
-            <a:r>
-              <a:rPr lang="ko-KR" altLang="en-US" sz="1600" dirty="0"/>
-              <a:t>쓰인다</a:t>
+              <a:t>액화천연가스 </a:t>
+            </a:r>
+            <a:r>
+              <a:rPr lang="en-US" altLang="ko-KR" sz="1600" dirty="0"/>
+              <a:t>(LNG, Liquified Natural Gas)</a:t>
+            </a:r>
+            <a:r>
+              <a:rPr lang="ko-KR" altLang="en-US" sz="1600" dirty="0"/>
+              <a:t>는 트럭</a:t>
+            </a:r>
+            <a:r>
+              <a:rPr lang="en-US" altLang="ko-KR" sz="1600" dirty="0"/>
+              <a:t>, </a:t>
+            </a:r>
+            <a:r>
+              <a:rPr lang="ko-KR" altLang="en-US" sz="1600" dirty="0"/>
+              <a:t>선박</a:t>
+            </a:r>
+            <a:r>
+              <a:rPr lang="en-US" altLang="ko-KR" sz="1600" dirty="0"/>
+              <a:t>, </a:t>
+            </a:r>
+            <a:r>
+              <a:rPr lang="ko-KR" altLang="en-US" sz="1600" dirty="0"/>
+              <a:t>철도 등 장거리</a:t>
+            </a:r>
+            <a:r>
+              <a:rPr lang="en-US" altLang="ko-KR" sz="1600" dirty="0"/>
+              <a:t>·</a:t>
+            </a:r>
+            <a:r>
+              <a:rPr lang="ko-KR" altLang="en-US" sz="1600" dirty="0"/>
+              <a:t>대형 운송수단에 쓰인다</a:t>
             </a:r>
             <a:r>
               <a:rPr lang="en-US" altLang="ko-KR" sz="1600" dirty="0"/>
@@ -10283,15 +10354,48 @@
             </a:pPr>
             <a:r>
               <a:rPr lang="ko-KR" altLang="en-US" sz="1600" dirty="0"/>
-              <a:t>액화천연가스 </a:t>
-            </a:r>
-            <a:r>
-              <a:rPr lang="en-US" altLang="ko-KR" sz="1600" dirty="0"/>
-              <a:t>(LNG, Liquified Natural Gas)</a:t>
-            </a:r>
-            <a:r>
-              <a:rPr lang="ko-KR" altLang="en-US" sz="1600" dirty="0"/>
-              <a:t>는 트럭</a:t>
+              <a:t>압축천연가스 </a:t>
+            </a:r>
+            <a:r>
+              <a:rPr lang="en-US" altLang="ko-KR" sz="1600" dirty="0"/>
+              <a:t>(CNG, Compressed Natural Gas)</a:t>
+            </a:r>
+            <a:r>
+              <a:rPr lang="ko-KR" altLang="en-US" sz="1600" dirty="0"/>
+              <a:t>는 도시버스나 승용차에</a:t>
+            </a:r>
+            <a:r>
+              <a:rPr lang="en-US" altLang="ko-KR" sz="1600" dirty="0"/>
+              <a:t> </a:t>
+            </a:r>
+            <a:r>
+              <a:rPr lang="ko-KR" altLang="en-US" sz="1600" dirty="0"/>
+              <a:t>쓰인다</a:t>
+            </a:r>
+            <a:r>
+              <a:rPr lang="en-US" altLang="ko-KR" sz="1600" dirty="0"/>
+              <a:t>.</a:t>
+            </a:r>
+          </a:p>
+          <a:p>
+            <a:pPr marL="835025" lvl="1" indent="-285750">
+              <a:lnSpc>
+                <a:spcPct val="150000"/>
+              </a:lnSpc>
+              <a:buFont typeface="Wingdings" panose="05000000000000000000" pitchFamily="2" charset="2"/>
+              <a:buChar char="ü"/>
+            </a:pPr>
+            <a:r>
+              <a:rPr lang="ko-KR" altLang="en-US" sz="1600" dirty="0"/>
+              <a:t>배관천연가스</a:t>
+            </a:r>
+            <a:r>
+              <a:rPr lang="en-US" altLang="ko-KR" sz="1600" dirty="0"/>
+              <a:t> (PNG, Pipeline Natural Gas)</a:t>
+            </a:r>
+            <a:r>
+              <a:rPr lang="ko-KR" altLang="en-US" sz="1600" dirty="0"/>
+              <a:t>는 배관망을 통해 가정</a:t>
             </a:r>
             <a:r>
               <a:rPr lang="en-US" altLang="ko-KR" sz="1600" dirty="0"/>
@@ -10299,7 +10403,7 @@
             </a:r>
             <a:r>
               <a:rPr lang="ko-KR" altLang="en-US" sz="1600" dirty="0"/>
-              <a:t>선박</a:t>
+              <a:t>산업시설</a:t>
             </a:r>
             <a:r>
               <a:rPr lang="en-US" altLang="ko-KR" sz="1600" dirty="0"/>
@@ -10307,15 +10411,7 @@
             </a:r>
             <a:r>
               <a:rPr lang="ko-KR" altLang="en-US" sz="1600" dirty="0"/>
-              <a:t>철도 등 장거리</a:t>
-            </a:r>
-            <a:r>
-              <a:rPr lang="en-US" altLang="ko-KR" sz="1600" dirty="0"/>
-              <a:t>·</a:t>
-            </a:r>
-            <a:r>
-              <a:rPr lang="ko-KR" altLang="en-US" sz="1600" dirty="0"/>
-              <a:t>대형 운송수단에 쓰인다</a:t>
+              <a:t>발전소 등에 공급된다</a:t>
             </a:r>
             <a:r>
               <a:rPr lang="en-US" altLang="ko-KR" sz="1600" dirty="0"/>
@@ -10338,430 +10434,6 @@
 </file>
 
 <file path=ppt/slides/slide17.xml><?xml version="1.0" encoding="utf-8"?>
-<p:sld xmlns:a="http://schemas.openxmlformats.org/drawingml/2006/main" xmlns:r="http://schemas.openxmlformats.org/officeDocument/2006/relationships" xmlns:p="http://schemas.openxmlformats.org/presentationml/2006/main">
-  <p:cSld>
-    <p:spTree>
-      <p:nvGrpSpPr>
-        <p:cNvPr id="1" name="">
-          <a:extLst>
-            <a:ext uri="{FF2B5EF4-FFF2-40B4-BE49-F238E27FC236}">
-              <a16:creationId xmlns:a16="http://schemas.microsoft.com/office/drawing/2014/main" id="{8698C290-92DE-9947-B598-198660309B0B}"/>
-            </a:ext>
-          </a:extLst>
-        </p:cNvPr>
-        <p:cNvGrpSpPr/>
-        <p:nvPr/>
-      </p:nvGrpSpPr>
-      <p:grpSpPr>
-        <a:xfrm>
-          <a:off x="0" y="0"/>
-          <a:ext cx="0" cy="0"/>
-          <a:chOff x="0" y="0"/>
-          <a:chExt cx="0" cy="0"/>
-        </a:xfrm>
-      </p:grpSpPr>
-      <p:sp>
-        <p:nvSpPr>
-          <p:cNvPr id="2" name="제목 1">
-            <a:extLst>
-              <a:ext uri="{FF2B5EF4-FFF2-40B4-BE49-F238E27FC236}">
-                <a16:creationId xmlns:a16="http://schemas.microsoft.com/office/drawing/2014/main" id="{0F54CB4D-D982-EEAD-F858-758C9A117A48}"/>
-              </a:ext>
-            </a:extLst>
-          </p:cNvPr>
-          <p:cNvSpPr>
-            <a:spLocks noGrp="1"/>
-          </p:cNvSpPr>
-          <p:nvPr>
-            <p:ph type="title"/>
-          </p:nvPr>
-        </p:nvSpPr>
-        <p:spPr/>
-        <p:txBody>
-          <a:bodyPr/>
-          <a:lstStyle/>
-          <a:p>
-            <a:r>
-              <a:rPr lang="ko-KR" altLang="en-US" dirty="0"/>
-              <a:t>천연가스 공급사슬</a:t>
-            </a:r>
-          </a:p>
-        </p:txBody>
-      </p:sp>
-      <p:sp>
-        <p:nvSpPr>
-          <p:cNvPr id="4" name="슬라이드 번호 개체 틀 3">
-            <a:extLst>
-              <a:ext uri="{FF2B5EF4-FFF2-40B4-BE49-F238E27FC236}">
-                <a16:creationId xmlns:a16="http://schemas.microsoft.com/office/drawing/2014/main" id="{F3E4E8D8-AA26-04DB-3BB8-BCBD2294CA50}"/>
-              </a:ext>
-            </a:extLst>
-          </p:cNvPr>
-          <p:cNvSpPr>
-            <a:spLocks noGrp="1"/>
-          </p:cNvSpPr>
-          <p:nvPr>
-            <p:ph type="sldNum" sz="quarter" idx="12"/>
-          </p:nvPr>
-        </p:nvSpPr>
-        <p:spPr/>
-        <p:txBody>
-          <a:bodyPr/>
-          <a:lstStyle/>
-          <a:p>
-            <a:fld id="{109C872D-39A9-4065-8BF3-6A613116E2A1}" type="slidenum">
-              <a:rPr lang="ko-KR" altLang="en-US" smtClean="0"/>
-              <a:t>17</a:t>
-            </a:fld>
-            <a:endParaRPr lang="ko-KR" altLang="en-US"/>
-          </a:p>
-        </p:txBody>
-      </p:sp>
-      <p:sp>
-        <p:nvSpPr>
-          <p:cNvPr id="3" name="TextBox 2">
-            <a:extLst>
-              <a:ext uri="{FF2B5EF4-FFF2-40B4-BE49-F238E27FC236}">
-                <a16:creationId xmlns:a16="http://schemas.microsoft.com/office/drawing/2014/main" id="{2E063C0F-AE23-70B0-8CD4-785AC69CB882}"/>
-              </a:ext>
-            </a:extLst>
-          </p:cNvPr>
-          <p:cNvSpPr txBox="1"/>
-          <p:nvPr/>
-        </p:nvSpPr>
-        <p:spPr>
-          <a:xfrm>
-            <a:off x="288790" y="958844"/>
-            <a:ext cx="11118453" cy="1522020"/>
-          </a:xfrm>
-          <a:prstGeom prst="rect">
-            <a:avLst/>
-          </a:prstGeom>
-          <a:noFill/>
-        </p:spPr>
-        <p:txBody>
-          <a:bodyPr wrap="square" rtlCol="0" anchor="t">
-            <a:spAutoFit/>
-          </a:bodyPr>
-          <a:lstStyle/>
-          <a:p>
-            <a:pPr marL="377825" indent="-285750">
-              <a:lnSpc>
-                <a:spcPct val="150000"/>
-              </a:lnSpc>
-              <a:buFont typeface="Arial" panose="020B0604020202020204" pitchFamily="34" charset="0"/>
-              <a:buChar char="•"/>
-            </a:pPr>
-            <a:r>
-              <a:rPr lang="ko-KR" altLang="en-US" sz="1600" dirty="0"/>
-              <a:t>천연가스 공급사슬은 기술</a:t>
-            </a:r>
-            <a:r>
-              <a:rPr lang="en-US" altLang="ko-KR" sz="1600" dirty="0"/>
-              <a:t>, </a:t>
-            </a:r>
-            <a:r>
-              <a:rPr lang="ko-KR" altLang="en-US" sz="1600" dirty="0"/>
-              <a:t>경제성</a:t>
-            </a:r>
-            <a:r>
-              <a:rPr lang="en-US" altLang="ko-KR" sz="1600" dirty="0"/>
-              <a:t>, </a:t>
-            </a:r>
-            <a:r>
-              <a:rPr lang="ko-KR" altLang="en-US" sz="1600" dirty="0" err="1"/>
-              <a:t>환경성</a:t>
-            </a:r>
-            <a:r>
-              <a:rPr lang="en-US" altLang="ko-KR" sz="1600" dirty="0"/>
-              <a:t>, </a:t>
-            </a:r>
-            <a:r>
-              <a:rPr lang="ko-KR" altLang="en-US" sz="1600" dirty="0"/>
-              <a:t>국제정치가 복합적으로 얽힌 구조로서</a:t>
-            </a:r>
-            <a:r>
-              <a:rPr lang="en-US" altLang="ko-KR" sz="1600" dirty="0"/>
-              <a:t>, </a:t>
-            </a:r>
-            <a:r>
-              <a:rPr lang="ko-KR" altLang="en-US" sz="1600" dirty="0"/>
-              <a:t>각 단계는 단순한 생산과 수송 이상의 전략적 의미를 갖는다</a:t>
-            </a:r>
-            <a:r>
-              <a:rPr lang="en-US" altLang="ko-KR" sz="1600" dirty="0"/>
-              <a:t>.</a:t>
-            </a:r>
-          </a:p>
-          <a:p>
-            <a:pPr marL="377825" indent="-285750">
-              <a:lnSpc>
-                <a:spcPct val="150000"/>
-              </a:lnSpc>
-              <a:buFont typeface="Arial" panose="020B0604020202020204" pitchFamily="34" charset="0"/>
-              <a:buChar char="•"/>
-            </a:pPr>
-            <a:r>
-              <a:rPr lang="ko-KR" altLang="en-US" sz="1600" dirty="0"/>
-              <a:t>특히 에너지 안보</a:t>
-            </a:r>
-            <a:r>
-              <a:rPr lang="en-US" altLang="ko-KR" sz="1600" dirty="0"/>
-              <a:t>, </a:t>
-            </a:r>
-            <a:r>
-              <a:rPr lang="ko-KR" altLang="en-US" sz="1600" dirty="0"/>
-              <a:t>에너지 전환</a:t>
-            </a:r>
-            <a:r>
-              <a:rPr lang="en-US" altLang="ko-KR" sz="1600" dirty="0"/>
-              <a:t>, </a:t>
-            </a:r>
-            <a:r>
-              <a:rPr lang="ko-KR" altLang="en-US" sz="1600" dirty="0"/>
-              <a:t>탄소중립 목표가 중요한 시대적 과제로 떠오른 현재</a:t>
-            </a:r>
-            <a:r>
-              <a:rPr lang="en-US" altLang="ko-KR" sz="1600" dirty="0"/>
-              <a:t>, </a:t>
-            </a:r>
-            <a:r>
-              <a:rPr lang="ko-KR" altLang="en-US" sz="1600" dirty="0"/>
-              <a:t>천연가스 공급사슬의 효율성과 탄력성은 국가 및 글로벌 차원의 정책 설계와 시장전략에서 핵심 요소로 작용하고 있다</a:t>
-            </a:r>
-            <a:r>
-              <a:rPr lang="en-US" altLang="ko-KR" sz="1600" dirty="0"/>
-              <a:t>.</a:t>
-            </a:r>
-          </a:p>
-        </p:txBody>
-      </p:sp>
-    </p:spTree>
-    <p:extLst>
-      <p:ext uri="{BB962C8B-B14F-4D97-AF65-F5344CB8AC3E}">
-        <p14:creationId xmlns:p14="http://schemas.microsoft.com/office/powerpoint/2010/main" val="3633658994"/>
-      </p:ext>
-    </p:extLst>
-  </p:cSld>
-  <p:clrMapOvr>
-    <a:masterClrMapping/>
-  </p:clrMapOvr>
-</p:sld>
-</file>
-
-<file path=ppt/slides/slide18.xml><?xml version="1.0" encoding="utf-8"?>
-<p:sld xmlns:a="http://schemas.openxmlformats.org/drawingml/2006/main" xmlns:r="http://schemas.openxmlformats.org/officeDocument/2006/relationships" xmlns:p="http://schemas.openxmlformats.org/presentationml/2006/main">
-  <p:cSld>
-    <p:spTree>
-      <p:nvGrpSpPr>
-        <p:cNvPr id="1" name="">
-          <a:extLst>
-            <a:ext uri="{FF2B5EF4-FFF2-40B4-BE49-F238E27FC236}">
-              <a16:creationId xmlns:a16="http://schemas.microsoft.com/office/drawing/2014/main" id="{7EE3C058-5EF2-5802-A3C8-F10C838576F2}"/>
-            </a:ext>
-          </a:extLst>
-        </p:cNvPr>
-        <p:cNvGrpSpPr/>
-        <p:nvPr/>
-      </p:nvGrpSpPr>
-      <p:grpSpPr>
-        <a:xfrm>
-          <a:off x="0" y="0"/>
-          <a:ext cx="0" cy="0"/>
-          <a:chOff x="0" y="0"/>
-          <a:chExt cx="0" cy="0"/>
-        </a:xfrm>
-      </p:grpSpPr>
-      <p:sp>
-        <p:nvSpPr>
-          <p:cNvPr id="2" name="제목 1">
-            <a:extLst>
-              <a:ext uri="{FF2B5EF4-FFF2-40B4-BE49-F238E27FC236}">
-                <a16:creationId xmlns:a16="http://schemas.microsoft.com/office/drawing/2014/main" id="{88AC10F2-4EBA-CE40-9E9F-2C9A3A6857EF}"/>
-              </a:ext>
-            </a:extLst>
-          </p:cNvPr>
-          <p:cNvSpPr>
-            <a:spLocks noGrp="1"/>
-          </p:cNvSpPr>
-          <p:nvPr>
-            <p:ph type="title"/>
-          </p:nvPr>
-        </p:nvSpPr>
-        <p:spPr/>
-        <p:txBody>
-          <a:bodyPr/>
-          <a:lstStyle/>
-          <a:p>
-            <a:r>
-              <a:rPr lang="ko-KR" altLang="en-US" dirty="0"/>
-              <a:t>천연가스 공급사슬</a:t>
-            </a:r>
-          </a:p>
-        </p:txBody>
-      </p:sp>
-      <p:sp>
-        <p:nvSpPr>
-          <p:cNvPr id="4" name="슬라이드 번호 개체 틀 3">
-            <a:extLst>
-              <a:ext uri="{FF2B5EF4-FFF2-40B4-BE49-F238E27FC236}">
-                <a16:creationId xmlns:a16="http://schemas.microsoft.com/office/drawing/2014/main" id="{21D77C88-06DC-29CB-0ADE-FC200BDBF42D}"/>
-              </a:ext>
-            </a:extLst>
-          </p:cNvPr>
-          <p:cNvSpPr>
-            <a:spLocks noGrp="1"/>
-          </p:cNvSpPr>
-          <p:nvPr>
-            <p:ph type="sldNum" sz="quarter" idx="12"/>
-          </p:nvPr>
-        </p:nvSpPr>
-        <p:spPr/>
-        <p:txBody>
-          <a:bodyPr/>
-          <a:lstStyle/>
-          <a:p>
-            <a:fld id="{109C872D-39A9-4065-8BF3-6A613116E2A1}" type="slidenum">
-              <a:rPr lang="ko-KR" altLang="en-US" smtClean="0"/>
-              <a:t>18</a:t>
-            </a:fld>
-            <a:endParaRPr lang="ko-KR" altLang="en-US"/>
-          </a:p>
-        </p:txBody>
-      </p:sp>
-      <p:sp>
-        <p:nvSpPr>
-          <p:cNvPr id="3" name="TextBox 2">
-            <a:extLst>
-              <a:ext uri="{FF2B5EF4-FFF2-40B4-BE49-F238E27FC236}">
-                <a16:creationId xmlns:a16="http://schemas.microsoft.com/office/drawing/2014/main" id="{67AE0A3A-0ACB-D5D6-0635-57D75C020C1C}"/>
-              </a:ext>
-            </a:extLst>
-          </p:cNvPr>
-          <p:cNvSpPr txBox="1"/>
-          <p:nvPr/>
-        </p:nvSpPr>
-        <p:spPr>
-          <a:xfrm>
-            <a:off x="288790" y="958844"/>
-            <a:ext cx="11118453" cy="1522020"/>
-          </a:xfrm>
-          <a:prstGeom prst="rect">
-            <a:avLst/>
-          </a:prstGeom>
-          <a:noFill/>
-        </p:spPr>
-        <p:txBody>
-          <a:bodyPr wrap="square" rtlCol="0" anchor="t">
-            <a:spAutoFit/>
-          </a:bodyPr>
-          <a:lstStyle/>
-          <a:p>
-            <a:pPr marL="377825" indent="-285750">
-              <a:lnSpc>
-                <a:spcPct val="150000"/>
-              </a:lnSpc>
-              <a:buFont typeface="Arial" panose="020B0604020202020204" pitchFamily="34" charset="0"/>
-              <a:buChar char="•"/>
-            </a:pPr>
-            <a:r>
-              <a:rPr lang="ko-KR" altLang="en-US" sz="1600" dirty="0"/>
-              <a:t>천연가스 공급사슬은 기술</a:t>
-            </a:r>
-            <a:r>
-              <a:rPr lang="en-US" altLang="ko-KR" sz="1600" dirty="0"/>
-              <a:t>, </a:t>
-            </a:r>
-            <a:r>
-              <a:rPr lang="ko-KR" altLang="en-US" sz="1600" dirty="0"/>
-              <a:t>경제성</a:t>
-            </a:r>
-            <a:r>
-              <a:rPr lang="en-US" altLang="ko-KR" sz="1600" dirty="0"/>
-              <a:t>, </a:t>
-            </a:r>
-            <a:r>
-              <a:rPr lang="ko-KR" altLang="en-US" sz="1600" dirty="0" err="1"/>
-              <a:t>환경성</a:t>
-            </a:r>
-            <a:r>
-              <a:rPr lang="en-US" altLang="ko-KR" sz="1600" dirty="0"/>
-              <a:t>, </a:t>
-            </a:r>
-            <a:r>
-              <a:rPr lang="ko-KR" altLang="en-US" sz="1600" dirty="0"/>
-              <a:t>국제정치가 복합적으로 얽힌 구조로서</a:t>
-            </a:r>
-            <a:r>
-              <a:rPr lang="en-US" altLang="ko-KR" sz="1600" dirty="0"/>
-              <a:t>, </a:t>
-            </a:r>
-            <a:r>
-              <a:rPr lang="ko-KR" altLang="en-US" sz="1600" dirty="0"/>
-              <a:t>각 단계는 단순한 생산과 수송 이상의 전략적 의미를 갖는다</a:t>
-            </a:r>
-            <a:r>
-              <a:rPr lang="en-US" altLang="ko-KR" sz="1600" dirty="0"/>
-              <a:t>.</a:t>
-            </a:r>
-          </a:p>
-          <a:p>
-            <a:pPr marL="377825" indent="-285750">
-              <a:lnSpc>
-                <a:spcPct val="150000"/>
-              </a:lnSpc>
-              <a:buFont typeface="Arial" panose="020B0604020202020204" pitchFamily="34" charset="0"/>
-              <a:buChar char="•"/>
-            </a:pPr>
-            <a:r>
-              <a:rPr lang="ko-KR" altLang="en-US" sz="1600" dirty="0"/>
-              <a:t>특히 에너지 안보</a:t>
-            </a:r>
-            <a:r>
-              <a:rPr lang="en-US" altLang="ko-KR" sz="1600" dirty="0"/>
-              <a:t>, </a:t>
-            </a:r>
-            <a:r>
-              <a:rPr lang="ko-KR" altLang="en-US" sz="1600" dirty="0"/>
-              <a:t>에너지 전환</a:t>
-            </a:r>
-            <a:r>
-              <a:rPr lang="en-US" altLang="ko-KR" sz="1600" dirty="0"/>
-              <a:t>, </a:t>
-            </a:r>
-            <a:r>
-              <a:rPr lang="ko-KR" altLang="en-US" sz="1600" dirty="0"/>
-              <a:t>탄소중립 목표가 중요한 시대적 과제로 떠오른 현재</a:t>
-            </a:r>
-            <a:r>
-              <a:rPr lang="en-US" altLang="ko-KR" sz="1600" dirty="0"/>
-              <a:t>, </a:t>
-            </a:r>
-            <a:r>
-              <a:rPr lang="ko-KR" altLang="en-US" sz="1600" dirty="0"/>
-              <a:t>천연가스 공급사슬의 효율성과 탄력성은 국가 및 글로벌 차원의 정책 설계와 시장전략에서 핵심 요소로 작용하고 있다</a:t>
-            </a:r>
-            <a:r>
-              <a:rPr lang="en-US" altLang="ko-KR" sz="1600" dirty="0"/>
-              <a:t>.</a:t>
-            </a:r>
-          </a:p>
-        </p:txBody>
-      </p:sp>
-    </p:spTree>
-    <p:extLst>
-      <p:ext uri="{BB962C8B-B14F-4D97-AF65-F5344CB8AC3E}">
-        <p14:creationId xmlns:p14="http://schemas.microsoft.com/office/powerpoint/2010/main" val="452298595"/>
-      </p:ext>
-    </p:extLst>
-  </p:cSld>
-  <p:clrMapOvr>
-    <a:masterClrMapping/>
-  </p:clrMapOvr>
-</p:sld>
-</file>
-
-<file path=ppt/slides/slide19.xml><?xml version="1.0" encoding="utf-8"?>
 <p:sld xmlns:a="http://schemas.openxmlformats.org/drawingml/2006/main" xmlns:r="http://schemas.openxmlformats.org/officeDocument/2006/relationships" xmlns:p="http://schemas.openxmlformats.org/presentationml/2006/main">
   <p:cSld>
     <p:spTree>
@@ -10839,7 +10511,7 @@
           <a:p>
             <a:fld id="{109C872D-39A9-4065-8BF3-6A613116E2A1}" type="slidenum">
               <a:rPr lang="ko-KR" altLang="en-US" smtClean="0"/>
-              <a:t>19</a:t>
+              <a:t>17</a:t>
             </a:fld>
             <a:endParaRPr lang="ko-KR" altLang="en-US"/>
           </a:p>
@@ -10860,7 +10532,7 @@
         <p:spPr>
           <a:xfrm>
             <a:off x="288790" y="958844"/>
-            <a:ext cx="11118453" cy="5215338"/>
+            <a:ext cx="11118453" cy="3738011"/>
           </a:xfrm>
           <a:prstGeom prst="rect">
             <a:avLst/>
@@ -11069,6 +10741,132 @@
             </a:pPr>
             <a:endParaRPr lang="en-US" altLang="ko-KR" sz="1600" dirty="0"/>
           </a:p>
+        </p:txBody>
+      </p:sp>
+    </p:spTree>
+    <p:extLst>
+      <p:ext uri="{BB962C8B-B14F-4D97-AF65-F5344CB8AC3E}">
+        <p14:creationId xmlns:p14="http://schemas.microsoft.com/office/powerpoint/2010/main" val="209569913"/>
+      </p:ext>
+    </p:extLst>
+  </p:cSld>
+  <p:clrMapOvr>
+    <a:masterClrMapping/>
+  </p:clrMapOvr>
+</p:sld>
+</file>
+
+<file path=ppt/slides/slide18.xml><?xml version="1.0" encoding="utf-8"?>
+<p:sld xmlns:a="http://schemas.openxmlformats.org/drawingml/2006/main" xmlns:r="http://schemas.openxmlformats.org/officeDocument/2006/relationships" xmlns:p="http://schemas.openxmlformats.org/presentationml/2006/main">
+  <p:cSld>
+    <p:spTree>
+      <p:nvGrpSpPr>
+        <p:cNvPr id="1" name="">
+          <a:extLst>
+            <a:ext uri="{FF2B5EF4-FFF2-40B4-BE49-F238E27FC236}">
+              <a16:creationId xmlns:a16="http://schemas.microsoft.com/office/drawing/2014/main" id="{CA1D23FE-C073-7293-849C-835E51580DDF}"/>
+            </a:ext>
+          </a:extLst>
+        </p:cNvPr>
+        <p:cNvGrpSpPr/>
+        <p:nvPr/>
+      </p:nvGrpSpPr>
+      <p:grpSpPr>
+        <a:xfrm>
+          <a:off x="0" y="0"/>
+          <a:ext cx="0" cy="0"/>
+          <a:chOff x="0" y="0"/>
+          <a:chExt cx="0" cy="0"/>
+        </a:xfrm>
+      </p:grpSpPr>
+      <p:sp>
+        <p:nvSpPr>
+          <p:cNvPr id="2" name="제목 1">
+            <a:extLst>
+              <a:ext uri="{FF2B5EF4-FFF2-40B4-BE49-F238E27FC236}">
+                <a16:creationId xmlns:a16="http://schemas.microsoft.com/office/drawing/2014/main" id="{36920A42-E2FF-6FCF-46E6-1E5E9E93F058}"/>
+              </a:ext>
+            </a:extLst>
+          </p:cNvPr>
+          <p:cNvSpPr>
+            <a:spLocks noGrp="1"/>
+          </p:cNvSpPr>
+          <p:nvPr>
+            <p:ph type="title"/>
+          </p:nvPr>
+        </p:nvSpPr>
+        <p:spPr/>
+        <p:txBody>
+          <a:bodyPr/>
+          <a:lstStyle/>
+          <a:p>
+            <a:r>
+              <a:rPr lang="en-US" altLang="ko-KR" dirty="0"/>
+              <a:t>LNG</a:t>
+            </a:r>
+            <a:r>
+              <a:rPr lang="ko-KR" altLang="en-US" dirty="0"/>
+              <a:t> 기술개발을 통한 천연가스 수송혁신</a:t>
+            </a:r>
+          </a:p>
+        </p:txBody>
+      </p:sp>
+      <p:sp>
+        <p:nvSpPr>
+          <p:cNvPr id="4" name="슬라이드 번호 개체 틀 3">
+            <a:extLst>
+              <a:ext uri="{FF2B5EF4-FFF2-40B4-BE49-F238E27FC236}">
+                <a16:creationId xmlns:a16="http://schemas.microsoft.com/office/drawing/2014/main" id="{A1D215EB-BC08-CDE8-9223-1AA33F6B37D4}"/>
+              </a:ext>
+            </a:extLst>
+          </p:cNvPr>
+          <p:cNvSpPr>
+            <a:spLocks noGrp="1"/>
+          </p:cNvSpPr>
+          <p:nvPr>
+            <p:ph type="sldNum" sz="quarter" idx="12"/>
+          </p:nvPr>
+        </p:nvSpPr>
+        <p:spPr/>
+        <p:txBody>
+          <a:bodyPr/>
+          <a:lstStyle/>
+          <a:p>
+            <a:fld id="{109C872D-39A9-4065-8BF3-6A613116E2A1}" type="slidenum">
+              <a:rPr lang="ko-KR" altLang="en-US" smtClean="0"/>
+              <a:t>18</a:t>
+            </a:fld>
+            <a:endParaRPr lang="ko-KR" altLang="en-US"/>
+          </a:p>
+        </p:txBody>
+      </p:sp>
+      <p:sp>
+        <p:nvSpPr>
+          <p:cNvPr id="3" name="TextBox 2">
+            <a:extLst>
+              <a:ext uri="{FF2B5EF4-FFF2-40B4-BE49-F238E27FC236}">
+                <a16:creationId xmlns:a16="http://schemas.microsoft.com/office/drawing/2014/main" id="{FF709185-8DEF-87E2-06F2-0BB52D7E35CC}"/>
+              </a:ext>
+            </a:extLst>
+          </p:cNvPr>
+          <p:cNvSpPr txBox="1"/>
+          <p:nvPr/>
+        </p:nvSpPr>
+        <p:spPr>
+          <a:xfrm>
+            <a:off x="288790" y="958844"/>
+            <a:ext cx="11118453" cy="1522020"/>
+          </a:xfrm>
+          <a:prstGeom prst="rect">
+            <a:avLst/>
+          </a:prstGeom>
+          <a:noFill/>
+        </p:spPr>
+        <p:txBody>
+          <a:bodyPr wrap="square" rtlCol="0" anchor="t">
+            <a:spAutoFit/>
+          </a:bodyPr>
+          <a:lstStyle/>
           <a:p>
             <a:pPr marL="377825" indent="-285750">
               <a:lnSpc>
@@ -11181,10 +10979,487 @@
           </a:p>
         </p:txBody>
       </p:sp>
+      <p:sp>
+        <p:nvSpPr>
+          <p:cNvPr id="6" name="TextBox 5">
+            <a:extLst>
+              <a:ext uri="{FF2B5EF4-FFF2-40B4-BE49-F238E27FC236}">
+                <a16:creationId xmlns:a16="http://schemas.microsoft.com/office/drawing/2014/main" id="{A27A27FD-EBCC-4990-97D7-9913CD55BCA3}"/>
+              </a:ext>
+            </a:extLst>
+          </p:cNvPr>
+          <p:cNvSpPr txBox="1"/>
+          <p:nvPr/>
+        </p:nvSpPr>
+        <p:spPr>
+          <a:xfrm>
+            <a:off x="7145360" y="6276719"/>
+            <a:ext cx="4487840" cy="261610"/>
+          </a:xfrm>
+          <a:prstGeom prst="rect">
+            <a:avLst/>
+          </a:prstGeom>
+          <a:noFill/>
+        </p:spPr>
+        <p:txBody>
+          <a:bodyPr wrap="square">
+            <a:spAutoFit/>
+          </a:bodyPr>
+          <a:lstStyle/>
+          <a:p>
+            <a:r>
+              <a:rPr lang="ko-KR" altLang="en-US" sz="1100" dirty="0"/>
+              <a:t>https://www.gjnewsplaza.com/news/articleView.html?idxno=1726</a:t>
+            </a:r>
+          </a:p>
+        </p:txBody>
+      </p:sp>
+      <p:pic>
+        <p:nvPicPr>
+          <p:cNvPr id="7" name="그림 6">
+            <a:extLst>
+              <a:ext uri="{FF2B5EF4-FFF2-40B4-BE49-F238E27FC236}">
+                <a16:creationId xmlns:a16="http://schemas.microsoft.com/office/drawing/2014/main" id="{04213AB6-4825-9A17-4DF6-6165266BE3DD}"/>
+              </a:ext>
+            </a:extLst>
+          </p:cNvPr>
+          <p:cNvPicPr>
+            <a:picLocks noChangeAspect="1"/>
+          </p:cNvPicPr>
+          <p:nvPr/>
+        </p:nvPicPr>
+        <p:blipFill>
+          <a:blip r:embed="rId2"/>
+          <a:stretch>
+            <a:fillRect/>
+          </a:stretch>
+        </p:blipFill>
+        <p:spPr>
+          <a:xfrm>
+            <a:off x="6742582" y="2272880"/>
+            <a:ext cx="5094372" cy="4033044"/>
+          </a:xfrm>
+          <a:prstGeom prst="rect">
+            <a:avLst/>
+          </a:prstGeom>
+        </p:spPr>
+      </p:pic>
+      <p:pic>
+        <p:nvPicPr>
+          <p:cNvPr id="9" name="그림 8" descr="삼성중공업이 건조한 부유식 액화천연가스 생산설비">
+            <a:extLst>
+              <a:ext uri="{FF2B5EF4-FFF2-40B4-BE49-F238E27FC236}">
+                <a16:creationId xmlns:a16="http://schemas.microsoft.com/office/drawing/2014/main" id="{2DC7909D-48CD-9D08-5BD6-6055F98790C6}"/>
+              </a:ext>
+            </a:extLst>
+          </p:cNvPr>
+          <p:cNvPicPr>
+            <a:picLocks noChangeAspect="1"/>
+          </p:cNvPicPr>
+          <p:nvPr/>
+        </p:nvPicPr>
+        <p:blipFill>
+          <a:blip r:embed="rId3"/>
+          <a:stretch>
+            <a:fillRect/>
+          </a:stretch>
+        </p:blipFill>
+        <p:spPr>
+          <a:xfrm>
+            <a:off x="1193068" y="3173420"/>
+            <a:ext cx="4654948" cy="3103299"/>
+          </a:xfrm>
+          <a:prstGeom prst="rect">
+            <a:avLst/>
+          </a:prstGeom>
+        </p:spPr>
+      </p:pic>
+      <p:sp>
+        <p:nvSpPr>
+          <p:cNvPr id="11" name="TextBox 10">
+            <a:extLst>
+              <a:ext uri="{FF2B5EF4-FFF2-40B4-BE49-F238E27FC236}">
+                <a16:creationId xmlns:a16="http://schemas.microsoft.com/office/drawing/2014/main" id="{8DEB2AD2-36A0-8418-7EDD-1DDD40CAFA8A}"/>
+              </a:ext>
+            </a:extLst>
+          </p:cNvPr>
+          <p:cNvSpPr txBox="1"/>
+          <p:nvPr/>
+        </p:nvSpPr>
+        <p:spPr>
+          <a:xfrm>
+            <a:off x="514350" y="2834866"/>
+            <a:ext cx="6134100" cy="276999"/>
+          </a:xfrm>
+          <a:prstGeom prst="rect">
+            <a:avLst/>
+          </a:prstGeom>
+          <a:noFill/>
+        </p:spPr>
+        <p:txBody>
+          <a:bodyPr wrap="square">
+            <a:spAutoFit/>
+          </a:bodyPr>
+          <a:lstStyle/>
+          <a:p>
+            <a:pPr algn="ctr"/>
+            <a:r>
+              <a:rPr lang="en-US" altLang="ko-KR" sz="1200" dirty="0"/>
+              <a:t>&lt;</a:t>
+            </a:r>
+            <a:r>
+              <a:rPr lang="ko-KR" altLang="en-US" sz="1200" dirty="0"/>
+              <a:t>삼성중공업이 건조한 </a:t>
+            </a:r>
+            <a:r>
+              <a:rPr lang="ko-KR" altLang="en-US" sz="1200" dirty="0" err="1"/>
+              <a:t>부유식</a:t>
+            </a:r>
+            <a:r>
+              <a:rPr lang="ko-KR" altLang="en-US" sz="1200" dirty="0"/>
+              <a:t> 액화천연가스 생산설비</a:t>
+            </a:r>
+            <a:r>
+              <a:rPr lang="en-US" altLang="ko-KR" sz="1200" dirty="0"/>
+              <a:t>&gt;</a:t>
+            </a:r>
+            <a:endParaRPr lang="ko-KR" altLang="en-US" sz="1400" dirty="0"/>
+          </a:p>
+        </p:txBody>
+      </p:sp>
+      <p:sp>
+        <p:nvSpPr>
+          <p:cNvPr id="13" name="TextBox 12">
+            <a:extLst>
+              <a:ext uri="{FF2B5EF4-FFF2-40B4-BE49-F238E27FC236}">
+                <a16:creationId xmlns:a16="http://schemas.microsoft.com/office/drawing/2014/main" id="{201311D2-95C7-4712-04A1-BA3883D67267}"/>
+              </a:ext>
+            </a:extLst>
+          </p:cNvPr>
+          <p:cNvSpPr txBox="1"/>
+          <p:nvPr/>
+        </p:nvSpPr>
+        <p:spPr>
+          <a:xfrm>
+            <a:off x="1130300" y="6276719"/>
+            <a:ext cx="3492500" cy="261610"/>
+          </a:xfrm>
+          <a:prstGeom prst="rect">
+            <a:avLst/>
+          </a:prstGeom>
+          <a:noFill/>
+        </p:spPr>
+        <p:txBody>
+          <a:bodyPr wrap="square">
+            <a:spAutoFit/>
+          </a:bodyPr>
+          <a:lstStyle/>
+          <a:p>
+            <a:r>
+              <a:rPr lang="ko-KR" altLang="en-US" sz="1100" dirty="0"/>
+              <a:t>https://www.yna.co.kr/view/AKR20260914038600003</a:t>
+            </a:r>
+          </a:p>
+        </p:txBody>
+      </p:sp>
     </p:spTree>
     <p:extLst>
       <p:ext uri="{BB962C8B-B14F-4D97-AF65-F5344CB8AC3E}">
-        <p14:creationId xmlns:p14="http://schemas.microsoft.com/office/powerpoint/2010/main" val="209569913"/>
+        <p14:creationId xmlns:p14="http://schemas.microsoft.com/office/powerpoint/2010/main" val="3119020869"/>
+      </p:ext>
+    </p:extLst>
+  </p:cSld>
+  <p:clrMapOvr>
+    <a:masterClrMapping/>
+  </p:clrMapOvr>
+</p:sld>
+</file>
+
+<file path=ppt/slides/slide19.xml><?xml version="1.0" encoding="utf-8"?>
+<p:sld xmlns:a="http://schemas.openxmlformats.org/drawingml/2006/main" xmlns:r="http://schemas.openxmlformats.org/officeDocument/2006/relationships" xmlns:p="http://schemas.openxmlformats.org/presentationml/2006/main">
+  <p:cSld>
+    <p:spTree>
+      <p:nvGrpSpPr>
+        <p:cNvPr id="1" name="">
+          <a:extLst>
+            <a:ext uri="{FF2B5EF4-FFF2-40B4-BE49-F238E27FC236}">
+              <a16:creationId xmlns:a16="http://schemas.microsoft.com/office/drawing/2014/main" id="{68BD9592-FA09-351E-AFB0-0190BE1CBD2C}"/>
+            </a:ext>
+          </a:extLst>
+        </p:cNvPr>
+        <p:cNvGrpSpPr/>
+        <p:nvPr/>
+      </p:nvGrpSpPr>
+      <p:grpSpPr>
+        <a:xfrm>
+          <a:off x="0" y="0"/>
+          <a:ext cx="0" cy="0"/>
+          <a:chOff x="0" y="0"/>
+          <a:chExt cx="0" cy="0"/>
+        </a:xfrm>
+      </p:grpSpPr>
+      <p:sp>
+        <p:nvSpPr>
+          <p:cNvPr id="2" name="제목 1">
+            <a:extLst>
+              <a:ext uri="{FF2B5EF4-FFF2-40B4-BE49-F238E27FC236}">
+                <a16:creationId xmlns:a16="http://schemas.microsoft.com/office/drawing/2014/main" id="{87B8455C-8C67-2B3A-AF6F-491FFAA2DAB5}"/>
+              </a:ext>
+            </a:extLst>
+          </p:cNvPr>
+          <p:cNvSpPr>
+            <a:spLocks noGrp="1"/>
+          </p:cNvSpPr>
+          <p:nvPr>
+            <p:ph type="title"/>
+          </p:nvPr>
+        </p:nvSpPr>
+        <p:spPr/>
+        <p:txBody>
+          <a:bodyPr/>
+          <a:lstStyle/>
+          <a:p>
+            <a:r>
+              <a:rPr lang="en-US" altLang="ko-KR" dirty="0"/>
+              <a:t>LNG</a:t>
+            </a:r>
+            <a:r>
+              <a:rPr lang="ko-KR" altLang="en-US" dirty="0"/>
+              <a:t> 기술개발을 통한 천연가스 수송혁신</a:t>
+            </a:r>
+          </a:p>
+        </p:txBody>
+      </p:sp>
+      <p:sp>
+        <p:nvSpPr>
+          <p:cNvPr id="4" name="슬라이드 번호 개체 틀 3">
+            <a:extLst>
+              <a:ext uri="{FF2B5EF4-FFF2-40B4-BE49-F238E27FC236}">
+                <a16:creationId xmlns:a16="http://schemas.microsoft.com/office/drawing/2014/main" id="{A9B85088-7BCB-D0F5-BCBD-23514CB8F7B2}"/>
+              </a:ext>
+            </a:extLst>
+          </p:cNvPr>
+          <p:cNvSpPr>
+            <a:spLocks noGrp="1"/>
+          </p:cNvSpPr>
+          <p:nvPr>
+            <p:ph type="sldNum" sz="quarter" idx="12"/>
+          </p:nvPr>
+        </p:nvSpPr>
+        <p:spPr/>
+        <p:txBody>
+          <a:bodyPr/>
+          <a:lstStyle/>
+          <a:p>
+            <a:fld id="{109C872D-39A9-4065-8BF3-6A613116E2A1}" type="slidenum">
+              <a:rPr lang="ko-KR" altLang="en-US" smtClean="0"/>
+              <a:t>19</a:t>
+            </a:fld>
+            <a:endParaRPr lang="ko-KR" altLang="en-US"/>
+          </a:p>
+        </p:txBody>
+      </p:sp>
+      <p:sp>
+        <p:nvSpPr>
+          <p:cNvPr id="3" name="TextBox 2">
+            <a:extLst>
+              <a:ext uri="{FF2B5EF4-FFF2-40B4-BE49-F238E27FC236}">
+                <a16:creationId xmlns:a16="http://schemas.microsoft.com/office/drawing/2014/main" id="{660338E8-567A-85F5-07BD-2CB85DFABB1F}"/>
+              </a:ext>
+            </a:extLst>
+          </p:cNvPr>
+          <p:cNvSpPr txBox="1"/>
+          <p:nvPr/>
+        </p:nvSpPr>
+        <p:spPr>
+          <a:xfrm>
+            <a:off x="288790" y="958844"/>
+            <a:ext cx="11118453" cy="2260683"/>
+          </a:xfrm>
+          <a:prstGeom prst="rect">
+            <a:avLst/>
+          </a:prstGeom>
+          <a:noFill/>
+        </p:spPr>
+        <p:txBody>
+          <a:bodyPr wrap="square" rtlCol="0" anchor="t">
+            <a:spAutoFit/>
+          </a:bodyPr>
+          <a:lstStyle/>
+          <a:p>
+            <a:pPr marL="377825" indent="-285750">
+              <a:lnSpc>
+                <a:spcPct val="150000"/>
+              </a:lnSpc>
+              <a:buFont typeface="Arial" panose="020B0604020202020204" pitchFamily="34" charset="0"/>
+              <a:buChar char="•"/>
+            </a:pPr>
+            <a:r>
+              <a:rPr lang="en-US" altLang="ko-KR" sz="1600" dirty="0"/>
+              <a:t>LNG </a:t>
+            </a:r>
+            <a:r>
+              <a:rPr lang="ko-KR" altLang="en-US" sz="1600" dirty="0"/>
+              <a:t>기술이 개발되면서 가장 혜택을 본 나라는 동아시아의 한국</a:t>
+            </a:r>
+            <a:r>
+              <a:rPr lang="en-US" altLang="ko-KR" sz="1600" dirty="0"/>
+              <a:t>, </a:t>
+            </a:r>
+            <a:r>
+              <a:rPr lang="ko-KR" altLang="en-US" sz="1600" dirty="0"/>
+              <a:t>일본</a:t>
+            </a:r>
+            <a:r>
+              <a:rPr lang="en-US" altLang="ko-KR" sz="1600" dirty="0"/>
+              <a:t>, </a:t>
+            </a:r>
+            <a:r>
+              <a:rPr lang="ko-KR" altLang="en-US" sz="1600" dirty="0"/>
+              <a:t>타이완이다</a:t>
+            </a:r>
+            <a:r>
+              <a:rPr lang="en-US" altLang="ko-KR" sz="1600" dirty="0"/>
+              <a:t>.</a:t>
+            </a:r>
+          </a:p>
+          <a:p>
+            <a:pPr marL="835025" lvl="1" indent="-285750">
+              <a:lnSpc>
+                <a:spcPct val="150000"/>
+              </a:lnSpc>
+              <a:buFont typeface="Wingdings" panose="05000000000000000000" pitchFamily="2" charset="2"/>
+              <a:buChar char="ü"/>
+            </a:pPr>
+            <a:r>
+              <a:rPr lang="ko-KR" altLang="en-US" sz="1600" dirty="0"/>
+              <a:t>그동안 </a:t>
+            </a:r>
+            <a:r>
+              <a:rPr lang="ko-KR" altLang="en-US" sz="1600" dirty="0" err="1"/>
+              <a:t>중동산</a:t>
+            </a:r>
+            <a:r>
+              <a:rPr lang="ko-KR" altLang="en-US" sz="1600" dirty="0"/>
+              <a:t> 석유에만 의존해 왔는데 동아시아에서 멀지 않은 호주</a:t>
+            </a:r>
+            <a:r>
+              <a:rPr lang="en-US" altLang="ko-KR" sz="1600" dirty="0"/>
+              <a:t>, </a:t>
+            </a:r>
+            <a:r>
+              <a:rPr lang="ko-KR" altLang="en-US" sz="1600" dirty="0"/>
+              <a:t>인도네시아</a:t>
+            </a:r>
+            <a:r>
+              <a:rPr lang="en-US" altLang="ko-KR" sz="1600" dirty="0"/>
+              <a:t>, </a:t>
+            </a:r>
+            <a:r>
+              <a:rPr lang="ko-KR" altLang="en-US" sz="1600" dirty="0"/>
+              <a:t>말레이시아 로부터 </a:t>
+            </a:r>
+            <a:r>
+              <a:rPr lang="en-US" altLang="ko-KR" sz="1600" dirty="0"/>
+              <a:t>LNG</a:t>
+            </a:r>
+            <a:r>
+              <a:rPr lang="ko-KR" altLang="en-US" sz="1600" dirty="0"/>
+              <a:t>가 공급되면서</a:t>
+            </a:r>
+            <a:r>
+              <a:rPr lang="en-US" altLang="ko-KR" sz="1600" dirty="0"/>
+              <a:t>, </a:t>
+            </a:r>
+            <a:r>
+              <a:rPr lang="ko-KR" altLang="en-US" sz="1600" dirty="0"/>
+              <a:t>한국과 일본의 에너지 시장에 일대 혁신이 일어났다</a:t>
+            </a:r>
+            <a:r>
+              <a:rPr lang="en-US" altLang="ko-KR" sz="1600" dirty="0"/>
+              <a:t>.</a:t>
+            </a:r>
+          </a:p>
+          <a:p>
+            <a:pPr marL="377825" indent="-285750">
+              <a:lnSpc>
+                <a:spcPct val="150000"/>
+              </a:lnSpc>
+              <a:buFont typeface="Arial" panose="020B0604020202020204" pitchFamily="34" charset="0"/>
+              <a:buChar char="•"/>
+            </a:pPr>
+            <a:r>
+              <a:rPr lang="ko-KR" altLang="en-US" sz="1600" dirty="0"/>
+              <a:t>우리나라에는 </a:t>
+            </a:r>
+            <a:r>
+              <a:rPr lang="en-US" altLang="ko-KR" sz="1600" dirty="0"/>
+              <a:t>1983</a:t>
+            </a:r>
+            <a:r>
+              <a:rPr lang="ko-KR" altLang="en-US" sz="1600" dirty="0"/>
+              <a:t>년 천연가스 사업을 전담하는 한국가스공사가 설립되고</a:t>
+            </a:r>
+            <a:r>
+              <a:rPr lang="en-US" altLang="ko-KR" sz="1600" dirty="0"/>
+              <a:t> 1986</a:t>
+            </a:r>
+            <a:r>
+              <a:rPr lang="ko-KR" altLang="en-US" sz="1600" dirty="0"/>
+              <a:t>년부터 </a:t>
+            </a:r>
+            <a:r>
+              <a:rPr lang="en-US" altLang="ko-KR" sz="1600" dirty="0"/>
+              <a:t>LNG</a:t>
+            </a:r>
+            <a:r>
+              <a:rPr lang="ko-KR" altLang="en-US" sz="1600" dirty="0"/>
+              <a:t>를 도입하기 시작했다</a:t>
+            </a:r>
+            <a:r>
+              <a:rPr lang="en-US" altLang="ko-KR" sz="1600" dirty="0"/>
+              <a:t>.</a:t>
+            </a:r>
+          </a:p>
+          <a:p>
+            <a:pPr marL="835025" lvl="1" indent="-285750">
+              <a:lnSpc>
+                <a:spcPct val="150000"/>
+              </a:lnSpc>
+              <a:buFont typeface="Wingdings" panose="05000000000000000000" pitchFamily="2" charset="2"/>
+              <a:buChar char="ü"/>
+            </a:pPr>
+            <a:r>
+              <a:rPr lang="ko-KR" altLang="en-US" sz="1600" dirty="0"/>
+              <a:t>이전에는 가정에서 프로판 용기에 들어 있던 </a:t>
+            </a:r>
+            <a:r>
+              <a:rPr lang="en-US" altLang="ko-KR" sz="1600" dirty="0"/>
+              <a:t>LPG</a:t>
+            </a:r>
+            <a:r>
+              <a:rPr lang="ko-KR" altLang="en-US" sz="1600" dirty="0"/>
+              <a:t>를 주로 사용하였는데</a:t>
+            </a:r>
+            <a:r>
+              <a:rPr lang="en-US" altLang="ko-KR" sz="1600" dirty="0"/>
+              <a:t>, </a:t>
+            </a:r>
+            <a:r>
+              <a:rPr lang="ko-KR" altLang="en-US" sz="1600" dirty="0"/>
+              <a:t>전국적으로 가스관이 깔리고 도시가스가 공급되면서 가정에서 편리하고 값싼 가스를 사용하게 되었다</a:t>
+            </a:r>
+            <a:r>
+              <a:rPr lang="en-US" altLang="ko-KR" sz="1600" dirty="0"/>
+              <a:t>.</a:t>
+            </a:r>
+          </a:p>
+        </p:txBody>
+      </p:sp>
+    </p:spTree>
+    <p:extLst>
+      <p:ext uri="{BB962C8B-B14F-4D97-AF65-F5344CB8AC3E}">
+        <p14:creationId xmlns:p14="http://schemas.microsoft.com/office/powerpoint/2010/main" val="530824633"/>
       </p:ext>
     </p:extLst>
   </p:cSld>
@@ -11351,719 +11626,6 @@
         <p:cNvPr id="1" name="">
           <a:extLst>
             <a:ext uri="{FF2B5EF4-FFF2-40B4-BE49-F238E27FC236}">
-              <a16:creationId xmlns:a16="http://schemas.microsoft.com/office/drawing/2014/main" id="{CA1D23FE-C073-7293-849C-835E51580DDF}"/>
-            </a:ext>
-          </a:extLst>
-        </p:cNvPr>
-        <p:cNvGrpSpPr/>
-        <p:nvPr/>
-      </p:nvGrpSpPr>
-      <p:grpSpPr>
-        <a:xfrm>
-          <a:off x="0" y="0"/>
-          <a:ext cx="0" cy="0"/>
-          <a:chOff x="0" y="0"/>
-          <a:chExt cx="0" cy="0"/>
-        </a:xfrm>
-      </p:grpSpPr>
-      <p:sp>
-        <p:nvSpPr>
-          <p:cNvPr id="2" name="제목 1">
-            <a:extLst>
-              <a:ext uri="{FF2B5EF4-FFF2-40B4-BE49-F238E27FC236}">
-                <a16:creationId xmlns:a16="http://schemas.microsoft.com/office/drawing/2014/main" id="{36920A42-E2FF-6FCF-46E6-1E5E9E93F058}"/>
-              </a:ext>
-            </a:extLst>
-          </p:cNvPr>
-          <p:cNvSpPr>
-            <a:spLocks noGrp="1"/>
-          </p:cNvSpPr>
-          <p:nvPr>
-            <p:ph type="title"/>
-          </p:nvPr>
-        </p:nvSpPr>
-        <p:spPr/>
-        <p:txBody>
-          <a:bodyPr/>
-          <a:lstStyle/>
-          <a:p>
-            <a:r>
-              <a:rPr lang="en-US" altLang="ko-KR" dirty="0"/>
-              <a:t>LNG</a:t>
-            </a:r>
-            <a:r>
-              <a:rPr lang="ko-KR" altLang="en-US" dirty="0"/>
-              <a:t> 기술개발을 통한 천연가스 수송혁신</a:t>
-            </a:r>
-          </a:p>
-        </p:txBody>
-      </p:sp>
-      <p:sp>
-        <p:nvSpPr>
-          <p:cNvPr id="4" name="슬라이드 번호 개체 틀 3">
-            <a:extLst>
-              <a:ext uri="{FF2B5EF4-FFF2-40B4-BE49-F238E27FC236}">
-                <a16:creationId xmlns:a16="http://schemas.microsoft.com/office/drawing/2014/main" id="{A1D215EB-BC08-CDE8-9223-1AA33F6B37D4}"/>
-              </a:ext>
-            </a:extLst>
-          </p:cNvPr>
-          <p:cNvSpPr>
-            <a:spLocks noGrp="1"/>
-          </p:cNvSpPr>
-          <p:nvPr>
-            <p:ph type="sldNum" sz="quarter" idx="12"/>
-          </p:nvPr>
-        </p:nvSpPr>
-        <p:spPr/>
-        <p:txBody>
-          <a:bodyPr/>
-          <a:lstStyle/>
-          <a:p>
-            <a:fld id="{109C872D-39A9-4065-8BF3-6A613116E2A1}" type="slidenum">
-              <a:rPr lang="ko-KR" altLang="en-US" smtClean="0"/>
-              <a:t>20</a:t>
-            </a:fld>
-            <a:endParaRPr lang="ko-KR" altLang="en-US"/>
-          </a:p>
-        </p:txBody>
-      </p:sp>
-      <p:sp>
-        <p:nvSpPr>
-          <p:cNvPr id="3" name="TextBox 2">
-            <a:extLst>
-              <a:ext uri="{FF2B5EF4-FFF2-40B4-BE49-F238E27FC236}">
-                <a16:creationId xmlns:a16="http://schemas.microsoft.com/office/drawing/2014/main" id="{FF709185-8DEF-87E2-06F2-0BB52D7E35CC}"/>
-              </a:ext>
-            </a:extLst>
-          </p:cNvPr>
-          <p:cNvSpPr txBox="1"/>
-          <p:nvPr/>
-        </p:nvSpPr>
-        <p:spPr>
-          <a:xfrm>
-            <a:off x="288790" y="958844"/>
-            <a:ext cx="11118453" cy="1522020"/>
-          </a:xfrm>
-          <a:prstGeom prst="rect">
-            <a:avLst/>
-          </a:prstGeom>
-          <a:noFill/>
-        </p:spPr>
-        <p:txBody>
-          <a:bodyPr wrap="square" rtlCol="0" anchor="t">
-            <a:spAutoFit/>
-          </a:bodyPr>
-          <a:lstStyle/>
-          <a:p>
-            <a:pPr marL="377825" indent="-285750">
-              <a:lnSpc>
-                <a:spcPct val="150000"/>
-              </a:lnSpc>
-              <a:buFont typeface="Arial" panose="020B0604020202020204" pitchFamily="34" charset="0"/>
-              <a:buChar char="•"/>
-            </a:pPr>
-            <a:r>
-              <a:rPr lang="en-US" altLang="ko-KR" sz="1600" dirty="0"/>
-              <a:t>2010</a:t>
-            </a:r>
-            <a:r>
-              <a:rPr lang="ko-KR" altLang="en-US" sz="1600" dirty="0"/>
-              <a:t>년대 부터는 해상에서 바로 </a:t>
-            </a:r>
-            <a:r>
-              <a:rPr lang="ko-KR" altLang="en-US" sz="1600" dirty="0" err="1"/>
-              <a:t>액화하는</a:t>
-            </a:r>
-            <a:r>
-              <a:rPr lang="ko-KR" altLang="en-US" sz="1600" dirty="0"/>
-              <a:t> </a:t>
-            </a:r>
-            <a:r>
-              <a:rPr lang="ko-KR" altLang="en-US" sz="1600" dirty="0" err="1"/>
-              <a:t>부유식</a:t>
-            </a:r>
-            <a:r>
-              <a:rPr lang="ko-KR" altLang="en-US" sz="1600" dirty="0"/>
-              <a:t> </a:t>
-            </a:r>
-            <a:r>
-              <a:rPr lang="en-US" altLang="ko-KR" sz="1600" dirty="0"/>
-              <a:t>LNG </a:t>
-            </a:r>
-            <a:r>
-              <a:rPr lang="ko-KR" altLang="en-US" sz="1600" dirty="0"/>
-              <a:t>기술이 개발되어</a:t>
-            </a:r>
-            <a:r>
-              <a:rPr lang="en-US" altLang="ko-KR" sz="1600" dirty="0"/>
-              <a:t>, </a:t>
-            </a:r>
-            <a:r>
-              <a:rPr lang="ko-KR" altLang="en-US" sz="1600" dirty="0"/>
-              <a:t>먼 바다의 가스전에서 </a:t>
-            </a:r>
-            <a:r>
-              <a:rPr lang="en-US" altLang="ko-KR" sz="1600" dirty="0"/>
-              <a:t>LNG</a:t>
-            </a:r>
-            <a:r>
-              <a:rPr lang="ko-KR" altLang="en-US" sz="1600" dirty="0"/>
-              <a:t>를 직접 생산할 수 있게 되었다</a:t>
-            </a:r>
-            <a:r>
-              <a:rPr lang="en-US" altLang="ko-KR" sz="1600" dirty="0"/>
-              <a:t>.</a:t>
-            </a:r>
-          </a:p>
-          <a:p>
-            <a:pPr marL="835025" lvl="1" indent="-285750">
-              <a:lnSpc>
-                <a:spcPct val="150000"/>
-              </a:lnSpc>
-              <a:buFont typeface="Wingdings" panose="05000000000000000000" pitchFamily="2" charset="2"/>
-              <a:buChar char="ü"/>
-            </a:pPr>
-            <a:r>
-              <a:rPr lang="ko-KR" altLang="en-US" sz="1600" dirty="0"/>
-              <a:t>그동안 </a:t>
-            </a:r>
-            <a:r>
-              <a:rPr lang="en-US" altLang="ko-KR" sz="1600" dirty="0"/>
-              <a:t>LNG </a:t>
-            </a:r>
-            <a:r>
-              <a:rPr lang="ko-KR" altLang="en-US" sz="1600" dirty="0"/>
-              <a:t>설비를</a:t>
-            </a:r>
-            <a:r>
-              <a:rPr lang="en-US" altLang="ko-KR" sz="1600" dirty="0"/>
-              <a:t> </a:t>
-            </a:r>
-            <a:r>
-              <a:rPr lang="ko-KR" altLang="en-US" sz="1600" dirty="0"/>
-              <a:t>육지에서만 할 수 있었으므로</a:t>
-            </a:r>
-            <a:r>
-              <a:rPr lang="en-US" altLang="ko-KR" sz="1600" dirty="0"/>
-              <a:t>, </a:t>
-            </a:r>
-            <a:r>
-              <a:rPr lang="ko-KR" altLang="en-US" sz="1600" dirty="0"/>
-              <a:t>해상 가스전의 경우 육지의 </a:t>
-            </a:r>
-            <a:r>
-              <a:rPr lang="en-US" altLang="ko-KR" sz="1600" dirty="0"/>
-              <a:t>LNG</a:t>
-            </a:r>
-            <a:r>
-              <a:rPr lang="ko-KR" altLang="en-US" sz="1600" dirty="0"/>
-              <a:t>플랜트까지 가스관을 건설해야 했다</a:t>
-            </a:r>
-            <a:r>
-              <a:rPr lang="en-US" altLang="ko-KR" sz="1600" dirty="0"/>
-              <a:t>. </a:t>
-            </a:r>
-          </a:p>
-        </p:txBody>
-      </p:sp>
-      <p:sp>
-        <p:nvSpPr>
-          <p:cNvPr id="6" name="TextBox 5">
-            <a:extLst>
-              <a:ext uri="{FF2B5EF4-FFF2-40B4-BE49-F238E27FC236}">
-                <a16:creationId xmlns:a16="http://schemas.microsoft.com/office/drawing/2014/main" id="{A27A27FD-EBCC-4990-97D7-9913CD55BCA3}"/>
-              </a:ext>
-            </a:extLst>
-          </p:cNvPr>
-          <p:cNvSpPr txBox="1"/>
-          <p:nvPr/>
-        </p:nvSpPr>
-        <p:spPr>
-          <a:xfrm>
-            <a:off x="7145360" y="6276719"/>
-            <a:ext cx="4487840" cy="261610"/>
-          </a:xfrm>
-          <a:prstGeom prst="rect">
-            <a:avLst/>
-          </a:prstGeom>
-          <a:noFill/>
-        </p:spPr>
-        <p:txBody>
-          <a:bodyPr wrap="square">
-            <a:spAutoFit/>
-          </a:bodyPr>
-          <a:lstStyle/>
-          <a:p>
-            <a:r>
-              <a:rPr lang="ko-KR" altLang="en-US" sz="1100" dirty="0"/>
-              <a:t>https://www.gjnewsplaza.com/news/articleView.html?idxno=1726</a:t>
-            </a:r>
-          </a:p>
-        </p:txBody>
-      </p:sp>
-      <p:pic>
-        <p:nvPicPr>
-          <p:cNvPr id="7" name="그림 6">
-            <a:extLst>
-              <a:ext uri="{FF2B5EF4-FFF2-40B4-BE49-F238E27FC236}">
-                <a16:creationId xmlns:a16="http://schemas.microsoft.com/office/drawing/2014/main" id="{04213AB6-4825-9A17-4DF6-6165266BE3DD}"/>
-              </a:ext>
-            </a:extLst>
-          </p:cNvPr>
-          <p:cNvPicPr>
-            <a:picLocks noChangeAspect="1"/>
-          </p:cNvPicPr>
-          <p:nvPr/>
-        </p:nvPicPr>
-        <p:blipFill>
-          <a:blip r:embed="rId2"/>
-          <a:stretch>
-            <a:fillRect/>
-          </a:stretch>
-        </p:blipFill>
-        <p:spPr>
-          <a:xfrm>
-            <a:off x="6742582" y="2272880"/>
-            <a:ext cx="5094372" cy="4033044"/>
-          </a:xfrm>
-          <a:prstGeom prst="rect">
-            <a:avLst/>
-          </a:prstGeom>
-        </p:spPr>
-      </p:pic>
-      <p:pic>
-        <p:nvPicPr>
-          <p:cNvPr id="9" name="그림 8" descr="삼성중공업이 건조한 부유식 액화천연가스 생산설비">
-            <a:extLst>
-              <a:ext uri="{FF2B5EF4-FFF2-40B4-BE49-F238E27FC236}">
-                <a16:creationId xmlns:a16="http://schemas.microsoft.com/office/drawing/2014/main" id="{2DC7909D-48CD-9D08-5BD6-6055F98790C6}"/>
-              </a:ext>
-            </a:extLst>
-          </p:cNvPr>
-          <p:cNvPicPr>
-            <a:picLocks noChangeAspect="1"/>
-          </p:cNvPicPr>
-          <p:nvPr/>
-        </p:nvPicPr>
-        <p:blipFill>
-          <a:blip r:embed="rId3"/>
-          <a:stretch>
-            <a:fillRect/>
-          </a:stretch>
-        </p:blipFill>
-        <p:spPr>
-          <a:xfrm>
-            <a:off x="1193068" y="3173420"/>
-            <a:ext cx="4654948" cy="3103299"/>
-          </a:xfrm>
-          <a:prstGeom prst="rect">
-            <a:avLst/>
-          </a:prstGeom>
-        </p:spPr>
-      </p:pic>
-      <p:sp>
-        <p:nvSpPr>
-          <p:cNvPr id="11" name="TextBox 10">
-            <a:extLst>
-              <a:ext uri="{FF2B5EF4-FFF2-40B4-BE49-F238E27FC236}">
-                <a16:creationId xmlns:a16="http://schemas.microsoft.com/office/drawing/2014/main" id="{8DEB2AD2-36A0-8418-7EDD-1DDD40CAFA8A}"/>
-              </a:ext>
-            </a:extLst>
-          </p:cNvPr>
-          <p:cNvSpPr txBox="1"/>
-          <p:nvPr/>
-        </p:nvSpPr>
-        <p:spPr>
-          <a:xfrm>
-            <a:off x="514350" y="2834866"/>
-            <a:ext cx="6134100" cy="276999"/>
-          </a:xfrm>
-          <a:prstGeom prst="rect">
-            <a:avLst/>
-          </a:prstGeom>
-          <a:noFill/>
-        </p:spPr>
-        <p:txBody>
-          <a:bodyPr wrap="square">
-            <a:spAutoFit/>
-          </a:bodyPr>
-          <a:lstStyle/>
-          <a:p>
-            <a:pPr algn="ctr"/>
-            <a:r>
-              <a:rPr lang="en-US" altLang="ko-KR" sz="1200" dirty="0"/>
-              <a:t>&lt;</a:t>
-            </a:r>
-            <a:r>
-              <a:rPr lang="ko-KR" altLang="en-US" sz="1200" dirty="0"/>
-              <a:t>삼성중공업이 건조한 </a:t>
-            </a:r>
-            <a:r>
-              <a:rPr lang="ko-KR" altLang="en-US" sz="1200" dirty="0" err="1"/>
-              <a:t>부유식</a:t>
-            </a:r>
-            <a:r>
-              <a:rPr lang="ko-KR" altLang="en-US" sz="1200" dirty="0"/>
-              <a:t> 액화천연가스 생산설비</a:t>
-            </a:r>
-            <a:r>
-              <a:rPr lang="en-US" altLang="ko-KR" sz="1200" dirty="0"/>
-              <a:t>&gt;</a:t>
-            </a:r>
-            <a:endParaRPr lang="ko-KR" altLang="en-US" sz="1400" dirty="0"/>
-          </a:p>
-        </p:txBody>
-      </p:sp>
-      <p:sp>
-        <p:nvSpPr>
-          <p:cNvPr id="13" name="TextBox 12">
-            <a:extLst>
-              <a:ext uri="{FF2B5EF4-FFF2-40B4-BE49-F238E27FC236}">
-                <a16:creationId xmlns:a16="http://schemas.microsoft.com/office/drawing/2014/main" id="{201311D2-95C7-4712-04A1-BA3883D67267}"/>
-              </a:ext>
-            </a:extLst>
-          </p:cNvPr>
-          <p:cNvSpPr txBox="1"/>
-          <p:nvPr/>
-        </p:nvSpPr>
-        <p:spPr>
-          <a:xfrm>
-            <a:off x="1130300" y="6276719"/>
-            <a:ext cx="3492500" cy="261610"/>
-          </a:xfrm>
-          <a:prstGeom prst="rect">
-            <a:avLst/>
-          </a:prstGeom>
-          <a:noFill/>
-        </p:spPr>
-        <p:txBody>
-          <a:bodyPr wrap="square">
-            <a:spAutoFit/>
-          </a:bodyPr>
-          <a:lstStyle/>
-          <a:p>
-            <a:r>
-              <a:rPr lang="ko-KR" altLang="en-US" sz="1100" dirty="0"/>
-              <a:t>https://www.yna.co.kr/view/AKR20260914038600003</a:t>
-            </a:r>
-          </a:p>
-        </p:txBody>
-      </p:sp>
-    </p:spTree>
-    <p:extLst>
-      <p:ext uri="{BB962C8B-B14F-4D97-AF65-F5344CB8AC3E}">
-        <p14:creationId xmlns:p14="http://schemas.microsoft.com/office/powerpoint/2010/main" val="3119020869"/>
-      </p:ext>
-    </p:extLst>
-  </p:cSld>
-  <p:clrMapOvr>
-    <a:masterClrMapping/>
-  </p:clrMapOvr>
-</p:sld>
-</file>
-
-<file path=ppt/slides/slide21.xml><?xml version="1.0" encoding="utf-8"?>
-<p:sld xmlns:a="http://schemas.openxmlformats.org/drawingml/2006/main" xmlns:r="http://schemas.openxmlformats.org/officeDocument/2006/relationships" xmlns:p="http://schemas.openxmlformats.org/presentationml/2006/main">
-  <p:cSld>
-    <p:spTree>
-      <p:nvGrpSpPr>
-        <p:cNvPr id="1" name="">
-          <a:extLst>
-            <a:ext uri="{FF2B5EF4-FFF2-40B4-BE49-F238E27FC236}">
-              <a16:creationId xmlns:a16="http://schemas.microsoft.com/office/drawing/2014/main" id="{68BD9592-FA09-351E-AFB0-0190BE1CBD2C}"/>
-            </a:ext>
-          </a:extLst>
-        </p:cNvPr>
-        <p:cNvGrpSpPr/>
-        <p:nvPr/>
-      </p:nvGrpSpPr>
-      <p:grpSpPr>
-        <a:xfrm>
-          <a:off x="0" y="0"/>
-          <a:ext cx="0" cy="0"/>
-          <a:chOff x="0" y="0"/>
-          <a:chExt cx="0" cy="0"/>
-        </a:xfrm>
-      </p:grpSpPr>
-      <p:sp>
-        <p:nvSpPr>
-          <p:cNvPr id="2" name="제목 1">
-            <a:extLst>
-              <a:ext uri="{FF2B5EF4-FFF2-40B4-BE49-F238E27FC236}">
-                <a16:creationId xmlns:a16="http://schemas.microsoft.com/office/drawing/2014/main" id="{87B8455C-8C67-2B3A-AF6F-491FFAA2DAB5}"/>
-              </a:ext>
-            </a:extLst>
-          </p:cNvPr>
-          <p:cNvSpPr>
-            <a:spLocks noGrp="1"/>
-          </p:cNvSpPr>
-          <p:nvPr>
-            <p:ph type="title"/>
-          </p:nvPr>
-        </p:nvSpPr>
-        <p:spPr/>
-        <p:txBody>
-          <a:bodyPr/>
-          <a:lstStyle/>
-          <a:p>
-            <a:r>
-              <a:rPr lang="en-US" altLang="ko-KR" dirty="0"/>
-              <a:t>LNG</a:t>
-            </a:r>
-            <a:r>
-              <a:rPr lang="ko-KR" altLang="en-US" dirty="0"/>
-              <a:t> 기술개발을 통한 천연가스 수송혁신</a:t>
-            </a:r>
-          </a:p>
-        </p:txBody>
-      </p:sp>
-      <p:sp>
-        <p:nvSpPr>
-          <p:cNvPr id="4" name="슬라이드 번호 개체 틀 3">
-            <a:extLst>
-              <a:ext uri="{FF2B5EF4-FFF2-40B4-BE49-F238E27FC236}">
-                <a16:creationId xmlns:a16="http://schemas.microsoft.com/office/drawing/2014/main" id="{A9B85088-7BCB-D0F5-BCBD-23514CB8F7B2}"/>
-              </a:ext>
-            </a:extLst>
-          </p:cNvPr>
-          <p:cNvSpPr>
-            <a:spLocks noGrp="1"/>
-          </p:cNvSpPr>
-          <p:nvPr>
-            <p:ph type="sldNum" sz="quarter" idx="12"/>
-          </p:nvPr>
-        </p:nvSpPr>
-        <p:spPr/>
-        <p:txBody>
-          <a:bodyPr/>
-          <a:lstStyle/>
-          <a:p>
-            <a:fld id="{109C872D-39A9-4065-8BF3-6A613116E2A1}" type="slidenum">
-              <a:rPr lang="ko-KR" altLang="en-US" smtClean="0"/>
-              <a:t>21</a:t>
-            </a:fld>
-            <a:endParaRPr lang="ko-KR" altLang="en-US"/>
-          </a:p>
-        </p:txBody>
-      </p:sp>
-      <p:sp>
-        <p:nvSpPr>
-          <p:cNvPr id="3" name="TextBox 2">
-            <a:extLst>
-              <a:ext uri="{FF2B5EF4-FFF2-40B4-BE49-F238E27FC236}">
-                <a16:creationId xmlns:a16="http://schemas.microsoft.com/office/drawing/2014/main" id="{660338E8-567A-85F5-07BD-2CB85DFABB1F}"/>
-              </a:ext>
-            </a:extLst>
-          </p:cNvPr>
-          <p:cNvSpPr txBox="1"/>
-          <p:nvPr/>
-        </p:nvSpPr>
-        <p:spPr>
-          <a:xfrm>
-            <a:off x="288790" y="958844"/>
-            <a:ext cx="11118453" cy="2260683"/>
-          </a:xfrm>
-          <a:prstGeom prst="rect">
-            <a:avLst/>
-          </a:prstGeom>
-          <a:noFill/>
-        </p:spPr>
-        <p:txBody>
-          <a:bodyPr wrap="square" rtlCol="0" anchor="t">
-            <a:spAutoFit/>
-          </a:bodyPr>
-          <a:lstStyle/>
-          <a:p>
-            <a:pPr marL="377825" indent="-285750">
-              <a:lnSpc>
-                <a:spcPct val="150000"/>
-              </a:lnSpc>
-              <a:buFont typeface="Arial" panose="020B0604020202020204" pitchFamily="34" charset="0"/>
-              <a:buChar char="•"/>
-            </a:pPr>
-            <a:r>
-              <a:rPr lang="en-US" altLang="ko-KR" sz="1600" dirty="0"/>
-              <a:t>LNG </a:t>
-            </a:r>
-            <a:r>
-              <a:rPr lang="ko-KR" altLang="en-US" sz="1600" dirty="0"/>
-              <a:t>기술이 개발되면서 가장 혜택을 본 나라는 동아시아의 한국</a:t>
-            </a:r>
-            <a:r>
-              <a:rPr lang="en-US" altLang="ko-KR" sz="1600" dirty="0"/>
-              <a:t>, </a:t>
-            </a:r>
-            <a:r>
-              <a:rPr lang="ko-KR" altLang="en-US" sz="1600" dirty="0"/>
-              <a:t>일본</a:t>
-            </a:r>
-            <a:r>
-              <a:rPr lang="en-US" altLang="ko-KR" sz="1600" dirty="0"/>
-              <a:t>, </a:t>
-            </a:r>
-            <a:r>
-              <a:rPr lang="ko-KR" altLang="en-US" sz="1600" dirty="0"/>
-              <a:t>타이완이다</a:t>
-            </a:r>
-            <a:r>
-              <a:rPr lang="en-US" altLang="ko-KR" sz="1600" dirty="0"/>
-              <a:t>.</a:t>
-            </a:r>
-          </a:p>
-          <a:p>
-            <a:pPr marL="835025" lvl="1" indent="-285750">
-              <a:lnSpc>
-                <a:spcPct val="150000"/>
-              </a:lnSpc>
-              <a:buFont typeface="Wingdings" panose="05000000000000000000" pitchFamily="2" charset="2"/>
-              <a:buChar char="ü"/>
-            </a:pPr>
-            <a:r>
-              <a:rPr lang="ko-KR" altLang="en-US" sz="1600" dirty="0"/>
-              <a:t>그동안 </a:t>
-            </a:r>
-            <a:r>
-              <a:rPr lang="ko-KR" altLang="en-US" sz="1600" dirty="0" err="1"/>
-              <a:t>중동산</a:t>
-            </a:r>
-            <a:r>
-              <a:rPr lang="ko-KR" altLang="en-US" sz="1600" dirty="0"/>
-              <a:t> 석유에만 의존해 왔는데 동아시아에서 멀지 않은 호주</a:t>
-            </a:r>
-            <a:r>
-              <a:rPr lang="en-US" altLang="ko-KR" sz="1600" dirty="0"/>
-              <a:t>, </a:t>
-            </a:r>
-            <a:r>
-              <a:rPr lang="ko-KR" altLang="en-US" sz="1600" dirty="0"/>
-              <a:t>인도네시아</a:t>
-            </a:r>
-            <a:r>
-              <a:rPr lang="en-US" altLang="ko-KR" sz="1600" dirty="0"/>
-              <a:t>, </a:t>
-            </a:r>
-            <a:r>
-              <a:rPr lang="ko-KR" altLang="en-US" sz="1600" dirty="0"/>
-              <a:t>말레이시아 로부터 </a:t>
-            </a:r>
-            <a:r>
-              <a:rPr lang="en-US" altLang="ko-KR" sz="1600" dirty="0"/>
-              <a:t>LNG</a:t>
-            </a:r>
-            <a:r>
-              <a:rPr lang="ko-KR" altLang="en-US" sz="1600" dirty="0"/>
-              <a:t>가 공급되면서</a:t>
-            </a:r>
-            <a:r>
-              <a:rPr lang="en-US" altLang="ko-KR" sz="1600" dirty="0"/>
-              <a:t>, </a:t>
-            </a:r>
-            <a:r>
-              <a:rPr lang="ko-KR" altLang="en-US" sz="1600" dirty="0"/>
-              <a:t>한국과 일본의 에너지 시장에 일대 혁신이 일어났다</a:t>
-            </a:r>
-            <a:r>
-              <a:rPr lang="en-US" altLang="ko-KR" sz="1600" dirty="0"/>
-              <a:t>.</a:t>
-            </a:r>
-          </a:p>
-          <a:p>
-            <a:pPr marL="377825" indent="-285750">
-              <a:lnSpc>
-                <a:spcPct val="150000"/>
-              </a:lnSpc>
-              <a:buFont typeface="Arial" panose="020B0604020202020204" pitchFamily="34" charset="0"/>
-              <a:buChar char="•"/>
-            </a:pPr>
-            <a:r>
-              <a:rPr lang="ko-KR" altLang="en-US" sz="1600" dirty="0"/>
-              <a:t>우리나라에는 </a:t>
-            </a:r>
-            <a:r>
-              <a:rPr lang="en-US" altLang="ko-KR" sz="1600" dirty="0"/>
-              <a:t>1983</a:t>
-            </a:r>
-            <a:r>
-              <a:rPr lang="ko-KR" altLang="en-US" sz="1600" dirty="0"/>
-              <a:t>년 천연가스 사업을 전담하는 한국가스공사가 설립되고</a:t>
-            </a:r>
-            <a:r>
-              <a:rPr lang="en-US" altLang="ko-KR" sz="1600" dirty="0"/>
-              <a:t> 1986</a:t>
-            </a:r>
-            <a:r>
-              <a:rPr lang="ko-KR" altLang="en-US" sz="1600" dirty="0"/>
-              <a:t>년부터 </a:t>
-            </a:r>
-            <a:r>
-              <a:rPr lang="en-US" altLang="ko-KR" sz="1600" dirty="0"/>
-              <a:t>LNG</a:t>
-            </a:r>
-            <a:r>
-              <a:rPr lang="ko-KR" altLang="en-US" sz="1600" dirty="0"/>
-              <a:t>를 도입하기 시작했다</a:t>
-            </a:r>
-            <a:r>
-              <a:rPr lang="en-US" altLang="ko-KR" sz="1600" dirty="0"/>
-              <a:t>.</a:t>
-            </a:r>
-          </a:p>
-          <a:p>
-            <a:pPr marL="835025" lvl="1" indent="-285750">
-              <a:lnSpc>
-                <a:spcPct val="150000"/>
-              </a:lnSpc>
-              <a:buFont typeface="Wingdings" panose="05000000000000000000" pitchFamily="2" charset="2"/>
-              <a:buChar char="ü"/>
-            </a:pPr>
-            <a:r>
-              <a:rPr lang="ko-KR" altLang="en-US" sz="1600" dirty="0"/>
-              <a:t>이전에는 가정에서 프로판 용기에 들어 있던 </a:t>
-            </a:r>
-            <a:r>
-              <a:rPr lang="en-US" altLang="ko-KR" sz="1600" dirty="0"/>
-              <a:t>LPG</a:t>
-            </a:r>
-            <a:r>
-              <a:rPr lang="ko-KR" altLang="en-US" sz="1600" dirty="0"/>
-              <a:t>를 주로 사용하였는데</a:t>
-            </a:r>
-            <a:r>
-              <a:rPr lang="en-US" altLang="ko-KR" sz="1600" dirty="0"/>
-              <a:t>, </a:t>
-            </a:r>
-            <a:r>
-              <a:rPr lang="ko-KR" altLang="en-US" sz="1600" dirty="0"/>
-              <a:t>전국적으로 가스관이 깔리고 도시가스가 공급되면서 가정에서 편리하고 값싼 가스를 사용하게 되었다</a:t>
-            </a:r>
-            <a:r>
-              <a:rPr lang="en-US" altLang="ko-KR" sz="1600" dirty="0"/>
-              <a:t>.</a:t>
-            </a:r>
-          </a:p>
-        </p:txBody>
-      </p:sp>
-    </p:spTree>
-    <p:extLst>
-      <p:ext uri="{BB962C8B-B14F-4D97-AF65-F5344CB8AC3E}">
-        <p14:creationId xmlns:p14="http://schemas.microsoft.com/office/powerpoint/2010/main" val="530824633"/>
-      </p:ext>
-    </p:extLst>
-  </p:cSld>
-  <p:clrMapOvr>
-    <a:masterClrMapping/>
-  </p:clrMapOvr>
-</p:sld>
-</file>
-
-<file path=ppt/slides/slide22.xml><?xml version="1.0" encoding="utf-8"?>
-<p:sld xmlns:a="http://schemas.openxmlformats.org/drawingml/2006/main" xmlns:r="http://schemas.openxmlformats.org/officeDocument/2006/relationships" xmlns:p="http://schemas.openxmlformats.org/presentationml/2006/main">
-  <p:cSld>
-    <p:spTree>
-      <p:nvGrpSpPr>
-        <p:cNvPr id="1" name="">
-          <a:extLst>
-            <a:ext uri="{FF2B5EF4-FFF2-40B4-BE49-F238E27FC236}">
               <a16:creationId xmlns:a16="http://schemas.microsoft.com/office/drawing/2014/main" id="{7CB6601A-FB1D-722F-2FC6-1AD571EAC781}"/>
             </a:ext>
           </a:extLst>
@@ -12139,7 +11701,7 @@
           <a:p>
             <a:fld id="{109C872D-39A9-4065-8BF3-6A613116E2A1}" type="slidenum">
               <a:rPr lang="ko-KR" altLang="en-US" smtClean="0"/>
-              <a:t>22</a:t>
+              <a:t>20</a:t>
             </a:fld>
             <a:endParaRPr lang="ko-KR" altLang="en-US"/>
           </a:p>
@@ -12199,7 +11761,7 @@
 </p:sld>
 </file>
 
-<file path=ppt/slides/slide23.xml><?xml version="1.0" encoding="utf-8"?>
+<file path=ppt/slides/slide21.xml><?xml version="1.0" encoding="utf-8"?>
 <p:sld xmlns:a="http://schemas.openxmlformats.org/drawingml/2006/main" xmlns:r="http://schemas.openxmlformats.org/officeDocument/2006/relationships" xmlns:p="http://schemas.openxmlformats.org/presentationml/2006/main">
   <p:cSld>
     <p:spTree>
@@ -12273,7 +11835,7 @@
           <a:p>
             <a:fld id="{109C872D-39A9-4065-8BF3-6A613116E2A1}" type="slidenum">
               <a:rPr lang="ko-KR" altLang="en-US" smtClean="0"/>
-              <a:t>23</a:t>
+              <a:t>21</a:t>
             </a:fld>
             <a:endParaRPr lang="ko-KR" altLang="en-US"/>
           </a:p>
@@ -12332,11 +11894,23 @@
             </a:r>
             <a:r>
               <a:rPr lang="ko-KR" altLang="en-US" sz="1600" dirty="0" err="1"/>
-              <a:t>입방미터에</a:t>
-            </a:r>
-            <a:r>
-              <a:rPr lang="ko-KR" altLang="en-US" sz="1600" dirty="0"/>
-              <a:t> 달하며</a:t>
+              <a:t>입방미터</a:t>
+            </a:r>
+            <a:r>
+              <a:rPr lang="en-US" altLang="ko-KR" sz="1600" dirty="0"/>
+              <a:t>(m</a:t>
+            </a:r>
+            <a:r>
+              <a:rPr lang="en-US" altLang="ko-KR" sz="1600" baseline="30000" dirty="0"/>
+              <a:t>3</a:t>
+            </a:r>
+            <a:r>
+              <a:rPr lang="en-US" altLang="ko-KR" sz="1600" dirty="0"/>
+              <a:t>)</a:t>
+            </a:r>
+            <a:r>
+              <a:rPr lang="ko-KR" altLang="en-US" sz="1600" dirty="0"/>
+              <a:t>에 달하며</a:t>
             </a:r>
             <a:r>
               <a:rPr lang="en-US" altLang="ko-KR" sz="1600" dirty="0"/>
@@ -16867,8 +16441,12 @@
               <a:t>조 </a:t>
             </a:r>
             <a:r>
-              <a:rPr lang="ko-KR" altLang="en-US" sz="1200" spc="-50" dirty="0" err="1"/>
-              <a:t>입방미터</a:t>
+              <a:rPr lang="en-US" altLang="ko-KR" sz="1200" dirty="0"/>
+              <a:t>m</a:t>
+            </a:r>
+            <a:r>
+              <a:rPr lang="en-US" altLang="ko-KR" sz="1200" baseline="30000" dirty="0"/>
+              <a:t>3</a:t>
             </a:r>
             <a:r>
               <a:rPr lang="en-US" altLang="ko-KR" sz="1200" spc="-50" dirty="0"/>
@@ -16891,7 +16469,7 @@
 </p:sld>
 </file>
 
-<file path=ppt/slides/slide24.xml><?xml version="1.0" encoding="utf-8"?>
+<file path=ppt/slides/slide22.xml><?xml version="1.0" encoding="utf-8"?>
 <p:sld xmlns:a="http://schemas.openxmlformats.org/drawingml/2006/main" xmlns:r="http://schemas.openxmlformats.org/officeDocument/2006/relationships" xmlns:p="http://schemas.openxmlformats.org/presentationml/2006/main">
   <p:cSld>
     <p:spTree>
@@ -16965,7 +16543,7 @@
           <a:p>
             <a:fld id="{109C872D-39A9-4065-8BF3-6A613116E2A1}" type="slidenum">
               <a:rPr lang="ko-KR" altLang="en-US" smtClean="0"/>
-              <a:t>24</a:t>
+              <a:t>22</a:t>
             </a:fld>
             <a:endParaRPr lang="ko-KR" altLang="en-US"/>
           </a:p>
@@ -17379,7 +16957,7 @@
 </p:sld>
 </file>
 
-<file path=ppt/slides/slide25.xml><?xml version="1.0" encoding="utf-8"?>
+<file path=ppt/slides/slide23.xml><?xml version="1.0" encoding="utf-8"?>
 <p:sld xmlns:a="http://schemas.openxmlformats.org/drawingml/2006/main" xmlns:r="http://schemas.openxmlformats.org/officeDocument/2006/relationships" xmlns:p="http://schemas.openxmlformats.org/presentationml/2006/main">
   <p:cSld>
     <p:spTree>
@@ -17453,7 +17031,7 @@
           <a:p>
             <a:fld id="{109C872D-39A9-4065-8BF3-6A613116E2A1}" type="slidenum">
               <a:rPr lang="ko-KR" altLang="en-US" smtClean="0"/>
-              <a:t>25</a:t>
+              <a:t>23</a:t>
             </a:fld>
             <a:endParaRPr lang="ko-KR" altLang="en-US"/>
           </a:p>
@@ -17561,7 +17139,7 @@
           <p:nvPr>
             <p:extLst>
               <p:ext uri="{D42A27DB-BD31-4B8C-83A1-F6EECF244321}">
-                <p14:modId xmlns:p14="http://schemas.microsoft.com/office/powerpoint/2010/main" val="1797281950"/>
+                <p14:modId xmlns:p14="http://schemas.microsoft.com/office/powerpoint/2010/main" val="2556087027"/>
               </p:ext>
             </p:extLst>
           </p:nvPr>
@@ -17975,7 +17553,7 @@
                         </a:spcAft>
                       </a:pPr>
                       <a:r>
-                        <a:rPr lang="ko-KR" altLang="en-US" sz="1300" b="0" kern="0" spc="0" dirty="0">
+                        <a:rPr lang="ko-KR" altLang="en-US" sz="1300" b="1" kern="0" spc="0" dirty="0">
                           <a:solidFill>
                             <a:srgbClr val="000000"/>
                           </a:solidFill>
@@ -17986,7 +17564,7 @@
                         </a:rPr>
                         <a:t>북미</a:t>
                       </a:r>
-                      <a:endParaRPr lang="en-US" sz="1300" b="0" kern="0" spc="0" dirty="0">
+                      <a:endParaRPr lang="en-US" sz="1300" b="1" kern="0" spc="0" dirty="0">
                         <a:solidFill>
                           <a:srgbClr val="000000"/>
                         </a:solidFill>
@@ -18048,7 +17626,7 @@
                         <a:buNone/>
                       </a:pPr>
                       <a:r>
-                        <a:rPr lang="en-US" altLang="ko-KR" sz="1300" b="0" kern="0" spc="0" dirty="0">
+                        <a:rPr lang="en-US" altLang="ko-KR" sz="1300" b="1" kern="0" spc="0" dirty="0">
                           <a:solidFill>
                             <a:srgbClr val="000000"/>
                           </a:solidFill>
@@ -18112,7 +17690,7 @@
                         <a:buNone/>
                       </a:pPr>
                       <a:r>
-                        <a:rPr lang="en-US" altLang="ko-KR" sz="1300" b="0" kern="0" spc="0" dirty="0">
+                        <a:rPr lang="en-US" altLang="ko-KR" sz="1300" b="1" kern="0" spc="0" dirty="0">
                           <a:solidFill>
                             <a:srgbClr val="000000"/>
                           </a:solidFill>
@@ -18176,7 +17754,7 @@
                         <a:buNone/>
                       </a:pPr>
                       <a:r>
-                        <a:rPr lang="en-US" altLang="ko-KR" sz="1300" b="0" kern="0" spc="0" dirty="0">
+                        <a:rPr lang="en-US" altLang="ko-KR" sz="1300" b="1" kern="0" spc="0" dirty="0">
                           <a:solidFill>
                             <a:srgbClr val="000000"/>
                           </a:solidFill>
@@ -18535,7 +18113,7 @@
                         </a:spcAft>
                       </a:pPr>
                       <a:r>
-                        <a:rPr lang="ko-KR" altLang="en-US" sz="1300" b="0" kern="0" spc="0" dirty="0">
+                        <a:rPr lang="ko-KR" altLang="en-US" sz="1300" b="1" kern="0" spc="0" dirty="0">
                           <a:solidFill>
                             <a:srgbClr val="000000"/>
                           </a:solidFill>
@@ -18546,7 +18124,7 @@
                         </a:rPr>
                         <a:t>중남미</a:t>
                       </a:r>
-                      <a:endParaRPr lang="en-US" sz="1300" b="0" kern="0" spc="0" dirty="0">
+                      <a:endParaRPr lang="en-US" sz="1300" b="1" kern="0" spc="0" dirty="0">
                         <a:solidFill>
                           <a:srgbClr val="000000"/>
                         </a:solidFill>
@@ -18608,7 +18186,7 @@
                         <a:buNone/>
                       </a:pPr>
                       <a:r>
-                        <a:rPr lang="en-US" altLang="ko-KR" sz="1300" b="0" kern="0" spc="0" dirty="0">
+                        <a:rPr lang="en-US" altLang="ko-KR" sz="1300" b="1" kern="0" spc="0" dirty="0">
                           <a:solidFill>
                             <a:srgbClr val="000000"/>
                           </a:solidFill>
@@ -18672,7 +18250,7 @@
                         <a:buNone/>
                       </a:pPr>
                       <a:r>
-                        <a:rPr lang="en-US" altLang="ko-KR" sz="1300" b="0" kern="0" spc="0" dirty="0">
+                        <a:rPr lang="en-US" altLang="ko-KR" sz="1300" b="1" kern="0" spc="0" dirty="0">
                           <a:solidFill>
                             <a:srgbClr val="000000"/>
                           </a:solidFill>
@@ -18736,7 +18314,7 @@
                         <a:buNone/>
                       </a:pPr>
                       <a:r>
-                        <a:rPr lang="en-US" altLang="ko-KR" sz="1300" b="0" kern="0" spc="0" dirty="0">
+                        <a:rPr lang="en-US" altLang="ko-KR" sz="1300" b="1" kern="0" spc="0" dirty="0">
                           <a:solidFill>
                             <a:srgbClr val="000000"/>
                           </a:solidFill>
@@ -18815,7 +18393,7 @@
                         </a:spcAft>
                       </a:pPr>
                       <a:r>
-                        <a:rPr lang="ko-KR" altLang="en-US" sz="1300" b="0" kern="0" spc="0" dirty="0">
+                        <a:rPr lang="ko-KR" altLang="en-US" sz="1300" b="1" kern="0" spc="0" dirty="0">
                           <a:solidFill>
                             <a:srgbClr val="000000"/>
                           </a:solidFill>
@@ -18826,7 +18404,7 @@
                         </a:rPr>
                         <a:t>유럽</a:t>
                       </a:r>
-                      <a:endParaRPr lang="en-US" sz="1300" b="0" kern="0" spc="0" dirty="0">
+                      <a:endParaRPr lang="en-US" sz="1300" b="1" kern="0" spc="0" dirty="0">
                         <a:solidFill>
                           <a:srgbClr val="000000"/>
                         </a:solidFill>
@@ -18888,7 +18466,7 @@
                         <a:buNone/>
                       </a:pPr>
                       <a:r>
-                        <a:rPr lang="en-US" altLang="ko-KR" sz="1300" b="0" kern="0" spc="0" dirty="0">
+                        <a:rPr lang="en-US" altLang="ko-KR" sz="1300" b="1" kern="0" spc="0" dirty="0">
                           <a:solidFill>
                             <a:srgbClr val="000000"/>
                           </a:solidFill>
@@ -18952,7 +18530,7 @@
                         <a:buNone/>
                       </a:pPr>
                       <a:r>
-                        <a:rPr lang="en-US" altLang="ko-KR" sz="1300" b="0" kern="0" spc="0" dirty="0">
+                        <a:rPr lang="en-US" altLang="ko-KR" sz="1300" b="1" kern="0" spc="0" dirty="0">
                           <a:solidFill>
                             <a:srgbClr val="000000"/>
                           </a:solidFill>
@@ -19016,7 +18594,7 @@
                         <a:buNone/>
                       </a:pPr>
                       <a:r>
-                        <a:rPr lang="en-US" altLang="ko-KR" sz="1300" b="0" kern="0" spc="0" dirty="0">
+                        <a:rPr lang="en-US" altLang="ko-KR" sz="1300" b="1" kern="0" spc="0" dirty="0">
                           <a:solidFill>
                             <a:srgbClr val="000000"/>
                           </a:solidFill>
@@ -19375,7 +18953,7 @@
                         </a:spcAft>
                       </a:pPr>
                       <a:r>
-                        <a:rPr lang="en-US" sz="1300" b="0" kern="0" spc="0" dirty="0">
+                        <a:rPr lang="en-US" sz="1300" b="1" kern="0" spc="0" dirty="0">
                           <a:solidFill>
                             <a:srgbClr val="000000"/>
                           </a:solidFill>
@@ -19387,7 +18965,7 @@
                         <a:t>CIS</a:t>
                       </a:r>
                       <a:r>
-                        <a:rPr lang="ko-KR" altLang="en-US" sz="1300" b="0" kern="0" spc="0" dirty="0">
+                        <a:rPr lang="ko-KR" altLang="en-US" sz="1300" b="1" kern="0" spc="0" dirty="0">
                           <a:solidFill>
                             <a:srgbClr val="000000"/>
                           </a:solidFill>
@@ -19398,7 +18976,7 @@
                         </a:rPr>
                         <a:t> 국가들</a:t>
                       </a:r>
-                      <a:endParaRPr lang="en-US" sz="1300" b="0" kern="0" spc="0" dirty="0">
+                      <a:endParaRPr lang="en-US" sz="1300" b="1" kern="0" spc="0" dirty="0">
                         <a:solidFill>
                           <a:srgbClr val="000000"/>
                         </a:solidFill>
@@ -19460,7 +19038,7 @@
                         <a:buNone/>
                       </a:pPr>
                       <a:r>
-                        <a:rPr lang="en-US" altLang="ko-KR" sz="1300" b="0" kern="0" spc="0" dirty="0">
+                        <a:rPr lang="en-US" altLang="ko-KR" sz="1300" b="1" kern="0" spc="0" dirty="0">
                           <a:solidFill>
                             <a:srgbClr val="000000"/>
                           </a:solidFill>
@@ -19524,7 +19102,7 @@
                         <a:buNone/>
                       </a:pPr>
                       <a:r>
-                        <a:rPr lang="en-US" altLang="ko-KR" sz="1300" b="0" kern="0" spc="0" dirty="0">
+                        <a:rPr lang="en-US" altLang="ko-KR" sz="1300" b="1" kern="0" spc="0" dirty="0">
                           <a:solidFill>
                             <a:srgbClr val="000000"/>
                           </a:solidFill>
@@ -19588,7 +19166,7 @@
                         <a:buNone/>
                       </a:pPr>
                       <a:r>
-                        <a:rPr lang="en-US" altLang="ko-KR" sz="1300" b="0" kern="0" spc="0" dirty="0">
+                        <a:rPr lang="en-US" altLang="ko-KR" sz="1300" b="1" kern="0" spc="0" dirty="0">
                           <a:solidFill>
                             <a:srgbClr val="000000"/>
                           </a:solidFill>
@@ -19947,7 +19525,7 @@
                         </a:spcAft>
                       </a:pPr>
                       <a:r>
-                        <a:rPr lang="ko-KR" altLang="en-US" sz="1300" b="0" kern="0" spc="0" dirty="0">
+                        <a:rPr lang="ko-KR" altLang="en-US" sz="1300" b="1" kern="0" spc="0" dirty="0">
                           <a:solidFill>
                             <a:srgbClr val="000000"/>
                           </a:solidFill>
@@ -19958,7 +19536,7 @@
                         </a:rPr>
                         <a:t>중동</a:t>
                       </a:r>
-                      <a:endParaRPr lang="en-US" sz="1300" b="0" kern="0" spc="0" dirty="0">
+                      <a:endParaRPr lang="en-US" sz="1300" b="1" kern="0" spc="0" dirty="0">
                         <a:solidFill>
                           <a:srgbClr val="000000"/>
                         </a:solidFill>
@@ -20020,7 +19598,7 @@
                         <a:buNone/>
                       </a:pPr>
                       <a:r>
-                        <a:rPr lang="en-US" altLang="ko-KR" sz="1300" b="0" kern="0" spc="0" dirty="0">
+                        <a:rPr lang="en-US" altLang="ko-KR" sz="1300" b="1" kern="0" spc="0" dirty="0">
                           <a:solidFill>
                             <a:srgbClr val="000000"/>
                           </a:solidFill>
@@ -20084,7 +19662,7 @@
                         <a:buNone/>
                       </a:pPr>
                       <a:r>
-                        <a:rPr lang="en-US" altLang="ko-KR" sz="1300" b="0" kern="0" spc="0" dirty="0">
+                        <a:rPr lang="en-US" altLang="ko-KR" sz="1300" b="1" kern="0" spc="0" dirty="0">
                           <a:solidFill>
                             <a:srgbClr val="000000"/>
                           </a:solidFill>
@@ -20148,7 +19726,7 @@
                         <a:buNone/>
                       </a:pPr>
                       <a:r>
-                        <a:rPr lang="en-US" altLang="ko-KR" sz="1300" b="0" kern="0" spc="0" dirty="0">
+                        <a:rPr lang="en-US" altLang="ko-KR" sz="1300" b="1" kern="0" spc="0" dirty="0">
                           <a:solidFill>
                             <a:srgbClr val="000000"/>
                           </a:solidFill>
@@ -21067,7 +20645,7 @@
                         </a:spcAft>
                       </a:pPr>
                       <a:r>
-                        <a:rPr lang="ko-KR" altLang="en-US" sz="1300" b="0" kern="0" spc="0" dirty="0">
+                        <a:rPr lang="ko-KR" altLang="en-US" sz="1300" b="1" kern="0" spc="0" dirty="0">
                           <a:solidFill>
                             <a:srgbClr val="000000"/>
                           </a:solidFill>
@@ -21078,7 +20656,7 @@
                         </a:rPr>
                         <a:t>아프리카</a:t>
                       </a:r>
-                      <a:endParaRPr lang="en-US" sz="1300" b="0" kern="0" spc="0" dirty="0">
+                      <a:endParaRPr lang="en-US" sz="1300" b="1" kern="0" spc="0" dirty="0">
                         <a:solidFill>
                           <a:srgbClr val="000000"/>
                         </a:solidFill>
@@ -21140,7 +20718,7 @@
                         <a:buNone/>
                       </a:pPr>
                       <a:r>
-                        <a:rPr lang="en-US" altLang="ko-KR" sz="1300" b="0" kern="0" spc="0" dirty="0">
+                        <a:rPr lang="en-US" altLang="ko-KR" sz="1300" b="1" kern="0" spc="0" dirty="0">
                           <a:solidFill>
                             <a:srgbClr val="000000"/>
                           </a:solidFill>
@@ -21204,7 +20782,7 @@
                         <a:buNone/>
                       </a:pPr>
                       <a:r>
-                        <a:rPr lang="en-US" altLang="ko-KR" sz="1300" b="0" kern="0" spc="0" dirty="0">
+                        <a:rPr lang="en-US" altLang="ko-KR" sz="1300" b="1" kern="0" spc="0" dirty="0">
                           <a:solidFill>
                             <a:srgbClr val="000000"/>
                           </a:solidFill>
@@ -21268,7 +20846,7 @@
                         <a:buNone/>
                       </a:pPr>
                       <a:r>
-                        <a:rPr lang="en-US" altLang="ko-KR" sz="1300" b="0" kern="0" spc="0" dirty="0">
+                        <a:rPr lang="en-US" altLang="ko-KR" sz="1300" b="1" kern="0" spc="0" dirty="0">
                           <a:solidFill>
                             <a:srgbClr val="000000"/>
                           </a:solidFill>
@@ -21627,7 +21205,7 @@
                         </a:spcAft>
                       </a:pPr>
                       <a:r>
-                        <a:rPr lang="ko-KR" altLang="en-US" sz="1300" b="0" kern="0" spc="0" dirty="0">
+                        <a:rPr lang="ko-KR" altLang="en-US" sz="1300" b="1" kern="0" spc="0" dirty="0">
                           <a:solidFill>
                             <a:srgbClr val="000000"/>
                           </a:solidFill>
@@ -21638,7 +21216,7 @@
                         </a:rPr>
                         <a:t>아시아태평양</a:t>
                       </a:r>
-                      <a:endParaRPr lang="en-US" sz="1300" b="0" kern="0" spc="0" dirty="0">
+                      <a:endParaRPr lang="en-US" sz="1300" b="1" kern="0" spc="0" dirty="0">
                         <a:solidFill>
                           <a:srgbClr val="000000"/>
                         </a:solidFill>
@@ -21700,7 +21278,7 @@
                         <a:buNone/>
                       </a:pPr>
                       <a:r>
-                        <a:rPr lang="en-US" altLang="ko-KR" sz="1300" b="0" kern="0" spc="0" dirty="0">
+                        <a:rPr lang="en-US" altLang="ko-KR" sz="1300" b="1" kern="0" spc="0" dirty="0">
                           <a:solidFill>
                             <a:srgbClr val="000000"/>
                           </a:solidFill>
@@ -21764,7 +21342,7 @@
                         <a:buNone/>
                       </a:pPr>
                       <a:r>
-                        <a:rPr lang="en-US" altLang="ko-KR" sz="1300" b="0" kern="0" spc="0" dirty="0">
+                        <a:rPr lang="en-US" altLang="ko-KR" sz="1300" b="1" kern="0" spc="0" dirty="0">
                           <a:solidFill>
                             <a:srgbClr val="000000"/>
                           </a:solidFill>
@@ -21828,7 +21406,7 @@
                         <a:buNone/>
                       </a:pPr>
                       <a:r>
-                        <a:rPr lang="en-US" altLang="ko-KR" sz="1300" b="0" kern="0" spc="0" dirty="0">
+                        <a:rPr lang="en-US" altLang="ko-KR" sz="1300" b="1" kern="0" spc="0" dirty="0">
                           <a:solidFill>
                             <a:srgbClr val="000000"/>
                           </a:solidFill>
@@ -23445,7 +23023,7 @@
 </p:sld>
 </file>
 
-<file path=ppt/slides/slide26.xml><?xml version="1.0" encoding="utf-8"?>
+<file path=ppt/slides/slide24.xml><?xml version="1.0" encoding="utf-8"?>
 <p:sld xmlns:a="http://schemas.openxmlformats.org/drawingml/2006/main" xmlns:r="http://schemas.openxmlformats.org/officeDocument/2006/relationships" xmlns:p="http://schemas.openxmlformats.org/presentationml/2006/main">
   <p:cSld>
     <p:spTree>
@@ -23519,7 +23097,7 @@
           <a:p>
             <a:fld id="{109C872D-39A9-4065-8BF3-6A613116E2A1}" type="slidenum">
               <a:rPr lang="ko-KR" altLang="en-US" smtClean="0"/>
-              <a:t>26</a:t>
+              <a:t>24</a:t>
             </a:fld>
             <a:endParaRPr lang="ko-KR" altLang="en-US"/>
           </a:p>
@@ -23988,7 +23566,7 @@
 </p:sld>
 </file>
 
-<file path=ppt/slides/slide27.xml><?xml version="1.0" encoding="utf-8"?>
+<file path=ppt/slides/slide25.xml><?xml version="1.0" encoding="utf-8"?>
 <p:sld xmlns:a="http://schemas.openxmlformats.org/drawingml/2006/main" xmlns:r="http://schemas.openxmlformats.org/officeDocument/2006/relationships" xmlns:p="http://schemas.openxmlformats.org/presentationml/2006/main">
   <p:cSld>
     <p:spTree>
@@ -24062,7 +23640,7 @@
           <a:p>
             <a:fld id="{109C872D-39A9-4065-8BF3-6A613116E2A1}" type="slidenum">
               <a:rPr lang="ko-KR" altLang="en-US" smtClean="0"/>
-              <a:t>27</a:t>
+              <a:t>25</a:t>
             </a:fld>
             <a:endParaRPr lang="ko-KR" altLang="en-US"/>
           </a:p>
@@ -24510,7 +24088,7 @@
 </p:sld>
 </file>
 
-<file path=ppt/slides/slide28.xml><?xml version="1.0" encoding="utf-8"?>
+<file path=ppt/slides/slide26.xml><?xml version="1.0" encoding="utf-8"?>
 <p:sld xmlns:a="http://schemas.openxmlformats.org/drawingml/2006/main" xmlns:r="http://schemas.openxmlformats.org/officeDocument/2006/relationships" xmlns:p="http://schemas.openxmlformats.org/presentationml/2006/main">
   <p:cSld>
     <p:spTree>
@@ -24584,7 +24162,7 @@
           <a:p>
             <a:fld id="{109C872D-39A9-4065-8BF3-6A613116E2A1}" type="slidenum">
               <a:rPr lang="ko-KR" altLang="en-US" smtClean="0"/>
-              <a:t>28</a:t>
+              <a:t>26</a:t>
             </a:fld>
             <a:endParaRPr lang="ko-KR" altLang="en-US"/>
           </a:p>
@@ -24698,7 +24276,7 @@
           <p:nvPr>
             <p:extLst>
               <p:ext uri="{D42A27DB-BD31-4B8C-83A1-F6EECF244321}">
-                <p14:modId xmlns:p14="http://schemas.microsoft.com/office/powerpoint/2010/main" val="4197556406"/>
+                <p14:modId xmlns:p14="http://schemas.microsoft.com/office/powerpoint/2010/main" val="934027549"/>
               </p:ext>
             </p:extLst>
           </p:nvPr>
@@ -25112,7 +24690,7 @@
                         </a:spcAft>
                       </a:pPr>
                       <a:r>
-                        <a:rPr lang="ko-KR" altLang="en-US" sz="1300" b="0" kern="0" spc="0" dirty="0">
+                        <a:rPr lang="ko-KR" altLang="en-US" sz="1300" b="1" kern="0" spc="0" dirty="0">
                           <a:solidFill>
                             <a:srgbClr val="000000"/>
                           </a:solidFill>
@@ -25123,7 +24701,7 @@
                         </a:rPr>
                         <a:t>북미</a:t>
                       </a:r>
-                      <a:endParaRPr lang="en-US" sz="1300" b="0" kern="0" spc="0" dirty="0">
+                      <a:endParaRPr lang="en-US" sz="1300" b="1" kern="0" spc="0" dirty="0">
                         <a:solidFill>
                           <a:srgbClr val="000000"/>
                         </a:solidFill>
@@ -25185,7 +24763,7 @@
                         <a:buNone/>
                       </a:pPr>
                       <a:r>
-                        <a:rPr lang="en-US" altLang="ko-KR" sz="1300" b="0" kern="0" spc="0" dirty="0">
+                        <a:rPr lang="en-US" altLang="ko-KR" sz="1300" b="1" kern="0" spc="0" dirty="0">
                           <a:solidFill>
                             <a:srgbClr val="000000"/>
                           </a:solidFill>
@@ -25249,7 +24827,7 @@
                         <a:buNone/>
                       </a:pPr>
                       <a:r>
-                        <a:rPr lang="en-US" altLang="ko-KR" sz="1300" b="0" kern="0" spc="0" dirty="0">
+                        <a:rPr lang="en-US" altLang="ko-KR" sz="1300" b="1" kern="0" spc="0" dirty="0">
                           <a:solidFill>
                             <a:srgbClr val="000000"/>
                           </a:solidFill>
@@ -25313,7 +24891,7 @@
                         <a:buNone/>
                       </a:pPr>
                       <a:r>
-                        <a:rPr lang="en-US" altLang="ko-KR" sz="1300" b="0" kern="0" spc="0" dirty="0">
+                        <a:rPr lang="en-US" altLang="ko-KR" sz="1300" b="1" kern="0" spc="0" dirty="0">
                           <a:solidFill>
                             <a:srgbClr val="000000"/>
                           </a:solidFill>
@@ -26232,7 +25810,7 @@
                         </a:spcAft>
                       </a:pPr>
                       <a:r>
-                        <a:rPr lang="ko-KR" altLang="en-US" sz="1300" b="0" kern="0" spc="0" dirty="0">
+                        <a:rPr lang="ko-KR" altLang="en-US" sz="1300" b="1" kern="0" spc="0" dirty="0">
                           <a:solidFill>
                             <a:srgbClr val="000000"/>
                           </a:solidFill>
@@ -26244,7 +25822,7 @@
                         <a:t>중</a:t>
                       </a:r>
                       <a:r>
-                        <a:rPr lang="en-US" altLang="ko-KR" sz="1300" b="0" kern="0" spc="0" dirty="0">
+                        <a:rPr lang="en-US" altLang="ko-KR" sz="1300" b="1" kern="0" spc="0" dirty="0">
                           <a:solidFill>
                             <a:srgbClr val="000000"/>
                           </a:solidFill>
@@ -26256,7 +25834,7 @@
                         <a:t>·</a:t>
                       </a:r>
                       <a:r>
-                        <a:rPr lang="ko-KR" altLang="en-US" sz="1300" b="0" kern="0" spc="0" dirty="0">
+                        <a:rPr lang="ko-KR" altLang="en-US" sz="1300" b="1" kern="0" spc="0" dirty="0">
                           <a:solidFill>
                             <a:srgbClr val="000000"/>
                           </a:solidFill>
@@ -26267,7 +25845,7 @@
                         </a:rPr>
                         <a:t>남미</a:t>
                       </a:r>
-                      <a:endParaRPr lang="en-US" sz="1300" b="0" kern="0" spc="0" dirty="0">
+                      <a:endParaRPr lang="en-US" sz="1300" b="1" kern="0" spc="0" dirty="0">
                         <a:solidFill>
                           <a:srgbClr val="000000"/>
                         </a:solidFill>
@@ -26329,7 +25907,7 @@
                         <a:buNone/>
                       </a:pPr>
                       <a:r>
-                        <a:rPr lang="en-US" altLang="ko-KR" sz="1300" b="0" kern="0" spc="0" dirty="0">
+                        <a:rPr lang="en-US" altLang="ko-KR" sz="1300" b="1" kern="0" spc="0" dirty="0">
                           <a:solidFill>
                             <a:srgbClr val="000000"/>
                           </a:solidFill>
@@ -26393,7 +25971,7 @@
                         <a:buNone/>
                       </a:pPr>
                       <a:r>
-                        <a:rPr lang="en-US" altLang="ko-KR" sz="1300" b="0" kern="0" spc="0" dirty="0">
+                        <a:rPr lang="en-US" altLang="ko-KR" sz="1300" b="1" kern="0" spc="0" dirty="0">
                           <a:solidFill>
                             <a:srgbClr val="000000"/>
                           </a:solidFill>
@@ -26457,7 +26035,7 @@
                         <a:buNone/>
                       </a:pPr>
                       <a:r>
-                        <a:rPr lang="en-US" altLang="ko-KR" sz="1300" b="0" kern="0" spc="0" dirty="0">
+                        <a:rPr lang="en-US" altLang="ko-KR" sz="1300" b="1" kern="0" spc="0" dirty="0">
                           <a:solidFill>
                             <a:srgbClr val="000000"/>
                           </a:solidFill>
@@ -26536,7 +26114,7 @@
                         </a:spcAft>
                       </a:pPr>
                       <a:r>
-                        <a:rPr lang="ko-KR" altLang="en-US" sz="1300" b="0" kern="0" spc="0" dirty="0">
+                        <a:rPr lang="ko-KR" altLang="en-US" sz="1300" b="1" kern="0" spc="0" dirty="0">
                           <a:solidFill>
                             <a:srgbClr val="000000"/>
                           </a:solidFill>
@@ -26547,7 +26125,7 @@
                         </a:rPr>
                         <a:t>유럽</a:t>
                       </a:r>
-                      <a:endParaRPr lang="en-US" sz="1300" b="0" kern="0" spc="0" dirty="0">
+                      <a:endParaRPr lang="en-US" sz="1300" b="1" kern="0" spc="0" dirty="0">
                         <a:solidFill>
                           <a:srgbClr val="000000"/>
                         </a:solidFill>
@@ -26609,7 +26187,7 @@
                         <a:buNone/>
                       </a:pPr>
                       <a:r>
-                        <a:rPr lang="en-US" altLang="ko-KR" sz="1300" b="0" kern="0" spc="0" dirty="0">
+                        <a:rPr lang="en-US" altLang="ko-KR" sz="1300" b="1" kern="0" spc="0" dirty="0">
                           <a:solidFill>
                             <a:srgbClr val="000000"/>
                           </a:solidFill>
@@ -26673,7 +26251,7 @@
                         <a:buNone/>
                       </a:pPr>
                       <a:r>
-                        <a:rPr lang="en-US" altLang="ko-KR" sz="1300" b="0" kern="0" spc="0" dirty="0">
+                        <a:rPr lang="en-US" altLang="ko-KR" sz="1300" b="1" kern="0" spc="0" dirty="0">
                           <a:solidFill>
                             <a:srgbClr val="000000"/>
                           </a:solidFill>
@@ -26737,7 +26315,7 @@
                         <a:buNone/>
                       </a:pPr>
                       <a:r>
-                        <a:rPr lang="en-US" altLang="ko-KR" sz="1300" b="0" kern="0" spc="0" dirty="0">
+                        <a:rPr lang="en-US" altLang="ko-KR" sz="1300" b="1" kern="0" spc="0" dirty="0">
                           <a:solidFill>
                             <a:srgbClr val="000000"/>
                           </a:solidFill>
@@ -26816,7 +26394,7 @@
                         </a:spcAft>
                       </a:pPr>
                       <a:r>
-                        <a:rPr lang="en-US" sz="1300" b="0" kern="0" spc="0" dirty="0">
+                        <a:rPr lang="en-US" sz="1300" b="1" kern="0" spc="0" dirty="0">
                           <a:solidFill>
                             <a:srgbClr val="000000"/>
                           </a:solidFill>
@@ -26828,7 +26406,7 @@
                         <a:t>CIS </a:t>
                       </a:r>
                       <a:r>
-                        <a:rPr lang="ko-KR" altLang="en-US" sz="1300" b="0" kern="0" spc="0" dirty="0">
+                        <a:rPr lang="ko-KR" altLang="en-US" sz="1300" b="1" kern="0" spc="0" dirty="0">
                           <a:solidFill>
                             <a:srgbClr val="000000"/>
                           </a:solidFill>
@@ -26839,7 +26417,7 @@
                         </a:rPr>
                         <a:t>국가들</a:t>
                       </a:r>
-                      <a:endParaRPr lang="en-US" sz="1300" b="0" kern="0" spc="0" dirty="0">
+                      <a:endParaRPr lang="en-US" sz="1300" b="1" kern="0" spc="0" dirty="0">
                         <a:solidFill>
                           <a:srgbClr val="000000"/>
                         </a:solidFill>
@@ -26901,7 +26479,7 @@
                         <a:buNone/>
                       </a:pPr>
                       <a:r>
-                        <a:rPr lang="en-US" altLang="ko-KR" sz="1300" b="0" kern="0" spc="0" dirty="0">
+                        <a:rPr lang="en-US" altLang="ko-KR" sz="1300" b="1" kern="0" spc="0" dirty="0">
                           <a:solidFill>
                             <a:srgbClr val="000000"/>
                           </a:solidFill>
@@ -26965,7 +26543,7 @@
                         <a:buNone/>
                       </a:pPr>
                       <a:r>
-                        <a:rPr lang="en-US" altLang="ko-KR" sz="1300" b="0" kern="0" spc="0" dirty="0">
+                        <a:rPr lang="en-US" altLang="ko-KR" sz="1300" b="1" kern="0" spc="0" dirty="0">
                           <a:solidFill>
                             <a:srgbClr val="000000"/>
                           </a:solidFill>
@@ -27029,7 +26607,7 @@
                         <a:buNone/>
                       </a:pPr>
                       <a:r>
-                        <a:rPr lang="en-US" altLang="ko-KR" sz="1300" b="0" kern="0" spc="0" dirty="0">
+                        <a:rPr lang="en-US" altLang="ko-KR" sz="1300" b="1" kern="0" spc="0" dirty="0">
                           <a:solidFill>
                             <a:srgbClr val="000000"/>
                           </a:solidFill>
@@ -27388,7 +26966,7 @@
                         </a:spcAft>
                       </a:pPr>
                       <a:r>
-                        <a:rPr lang="ko-KR" altLang="en-US" sz="1300" b="0" kern="0" spc="0" dirty="0">
+                        <a:rPr lang="ko-KR" altLang="en-US" sz="1300" b="1" kern="0" spc="0" dirty="0">
                           <a:solidFill>
                             <a:srgbClr val="000000"/>
                           </a:solidFill>
@@ -27399,7 +26977,7 @@
                         </a:rPr>
                         <a:t>중동</a:t>
                       </a:r>
-                      <a:endParaRPr lang="en-US" sz="1300" b="0" kern="0" spc="0" dirty="0">
+                      <a:endParaRPr lang="en-US" sz="1300" b="1" kern="0" spc="0" dirty="0">
                         <a:solidFill>
                           <a:srgbClr val="000000"/>
                         </a:solidFill>
@@ -27461,7 +27039,7 @@
                         <a:buNone/>
                       </a:pPr>
                       <a:r>
-                        <a:rPr lang="en-US" altLang="ko-KR" sz="1300" b="0" kern="0" spc="0" dirty="0">
+                        <a:rPr lang="en-US" altLang="ko-KR" sz="1300" b="1" kern="0" spc="0" dirty="0">
                           <a:solidFill>
                             <a:srgbClr val="000000"/>
                           </a:solidFill>
@@ -27525,7 +27103,7 @@
                         <a:buNone/>
                       </a:pPr>
                       <a:r>
-                        <a:rPr lang="en-US" altLang="ko-KR" sz="1300" b="0" kern="0" spc="0" dirty="0">
+                        <a:rPr lang="en-US" altLang="ko-KR" sz="1300" b="1" kern="0" spc="0" dirty="0">
                           <a:solidFill>
                             <a:srgbClr val="000000"/>
                           </a:solidFill>
@@ -27589,7 +27167,7 @@
                         <a:buNone/>
                       </a:pPr>
                       <a:r>
-                        <a:rPr lang="en-US" altLang="ko-KR" sz="1300" b="0" kern="0" spc="0" dirty="0">
+                        <a:rPr lang="en-US" altLang="ko-KR" sz="1300" b="1" kern="0" spc="0" dirty="0">
                           <a:solidFill>
                             <a:srgbClr val="000000"/>
                           </a:solidFill>
@@ -28228,7 +27806,7 @@
                         </a:spcAft>
                       </a:pPr>
                       <a:r>
-                        <a:rPr lang="ko-KR" altLang="en-US" sz="1300" b="0" kern="0" spc="0" dirty="0">
+                        <a:rPr lang="ko-KR" altLang="en-US" sz="1300" b="1" kern="0" spc="0" dirty="0">
                           <a:solidFill>
                             <a:srgbClr val="000000"/>
                           </a:solidFill>
@@ -28239,7 +27817,7 @@
                         </a:rPr>
                         <a:t>아프리카</a:t>
                       </a:r>
-                      <a:endParaRPr lang="en-US" sz="1300" b="0" kern="0" spc="0" dirty="0">
+                      <a:endParaRPr lang="en-US" sz="1300" b="1" kern="0" spc="0" dirty="0">
                         <a:solidFill>
                           <a:srgbClr val="000000"/>
                         </a:solidFill>
@@ -28301,7 +27879,7 @@
                         <a:buNone/>
                       </a:pPr>
                       <a:r>
-                        <a:rPr lang="en-US" altLang="ko-KR" sz="1300" b="0" kern="0" spc="0" dirty="0">
+                        <a:rPr lang="en-US" altLang="ko-KR" sz="1300" b="1" kern="0" spc="0" dirty="0">
                           <a:solidFill>
                             <a:srgbClr val="000000"/>
                           </a:solidFill>
@@ -28365,7 +27943,7 @@
                         <a:buNone/>
                       </a:pPr>
                       <a:r>
-                        <a:rPr lang="en-US" altLang="ko-KR" sz="1300" b="0" kern="0" spc="0" dirty="0">
+                        <a:rPr lang="en-US" altLang="ko-KR" sz="1300" b="1" kern="0" spc="0" dirty="0">
                           <a:solidFill>
                             <a:srgbClr val="000000"/>
                           </a:solidFill>
@@ -28429,7 +28007,7 @@
                         <a:buNone/>
                       </a:pPr>
                       <a:r>
-                        <a:rPr lang="en-US" altLang="ko-KR" sz="1300" b="0" kern="0" spc="0" dirty="0">
+                        <a:rPr lang="en-US" altLang="ko-KR" sz="1300" b="1" kern="0" spc="0" dirty="0">
                           <a:solidFill>
                             <a:srgbClr val="000000"/>
                           </a:solidFill>
@@ -28508,7 +28086,7 @@
                         </a:spcAft>
                       </a:pPr>
                       <a:r>
-                        <a:rPr lang="ko-KR" altLang="en-US" sz="1300" b="0" kern="0" spc="0" dirty="0">
+                        <a:rPr lang="ko-KR" altLang="en-US" sz="1300" b="1" kern="0" spc="0" dirty="0">
                           <a:solidFill>
                             <a:srgbClr val="000000"/>
                           </a:solidFill>
@@ -28519,7 +28097,7 @@
                         </a:rPr>
                         <a:t>아시아태평양</a:t>
                       </a:r>
-                      <a:endParaRPr lang="en-US" sz="1300" b="0" kern="0" spc="0" dirty="0">
+                      <a:endParaRPr lang="en-US" sz="1300" b="1" kern="0" spc="0" dirty="0">
                         <a:solidFill>
                           <a:srgbClr val="000000"/>
                         </a:solidFill>
@@ -28581,7 +28159,7 @@
                         <a:buNone/>
                       </a:pPr>
                       <a:r>
-                        <a:rPr lang="en-US" altLang="ko-KR" sz="1300" b="0" kern="0" spc="0" dirty="0">
+                        <a:rPr lang="en-US" altLang="ko-KR" sz="1300" b="1" kern="0" spc="0" dirty="0">
                           <a:solidFill>
                             <a:srgbClr val="000000"/>
                           </a:solidFill>
@@ -28645,7 +28223,7 @@
                         <a:buNone/>
                       </a:pPr>
                       <a:r>
-                        <a:rPr lang="en-US" altLang="ko-KR" sz="1300" b="0" kern="0" spc="0" dirty="0">
+                        <a:rPr lang="en-US" altLang="ko-KR" sz="1300" b="1" kern="0" spc="0" dirty="0">
                           <a:solidFill>
                             <a:srgbClr val="000000"/>
                           </a:solidFill>
@@ -28709,7 +28287,7 @@
                         <a:buNone/>
                       </a:pPr>
                       <a:r>
-                        <a:rPr lang="en-US" altLang="ko-KR" sz="1300" b="0" kern="0" spc="0" dirty="0">
+                        <a:rPr lang="en-US" altLang="ko-KR" sz="1300" b="1" kern="0" spc="0" dirty="0">
                           <a:solidFill>
                             <a:srgbClr val="000000"/>
                           </a:solidFill>
@@ -29628,7 +29206,7 @@
                         </a:spcAft>
                       </a:pPr>
                       <a:r>
-                        <a:rPr lang="ko-KR" altLang="en-US" sz="1300" b="0" kern="0" spc="0" dirty="0">
+                        <a:rPr lang="ko-KR" altLang="en-US" sz="1300" b="1" kern="0" spc="0" dirty="0">
                           <a:solidFill>
                             <a:srgbClr val="000000"/>
                           </a:solidFill>
@@ -29639,7 +29217,7 @@
                         </a:rPr>
                         <a:t>전 세계</a:t>
                       </a:r>
-                      <a:endParaRPr lang="en-US" sz="1300" b="0" kern="0" spc="0" dirty="0">
+                      <a:endParaRPr lang="en-US" sz="1300" b="1" kern="0" spc="0" dirty="0">
                         <a:solidFill>
                           <a:srgbClr val="000000"/>
                         </a:solidFill>
@@ -29701,7 +29279,7 @@
                         <a:buNone/>
                       </a:pPr>
                       <a:r>
-                        <a:rPr lang="en-US" altLang="ko-KR" sz="1300" b="0" kern="0" spc="0" dirty="0">
+                        <a:rPr lang="en-US" altLang="ko-KR" sz="1300" b="1" kern="0" spc="0" dirty="0">
                           <a:solidFill>
                             <a:srgbClr val="000000"/>
                           </a:solidFill>
@@ -29765,7 +29343,7 @@
                         <a:buNone/>
                       </a:pPr>
                       <a:r>
-                        <a:rPr lang="en-US" altLang="ko-KR" sz="1300" b="0" kern="0" spc="0" dirty="0">
+                        <a:rPr lang="en-US" altLang="ko-KR" sz="1300" b="1" kern="0" spc="0" dirty="0">
                           <a:solidFill>
                             <a:srgbClr val="000000"/>
                           </a:solidFill>
@@ -29829,7 +29407,7 @@
                         <a:buNone/>
                       </a:pPr>
                       <a:r>
-                        <a:rPr lang="en-US" altLang="ko-KR" sz="1300" b="0" kern="0" spc="0" dirty="0">
+                        <a:rPr lang="en-US" altLang="ko-KR" sz="1300" b="1" kern="0" spc="0" dirty="0">
                           <a:solidFill>
                             <a:srgbClr val="000000"/>
                           </a:solidFill>
@@ -30600,7 +30178,7 @@
 </p:sld>
 </file>
 
-<file path=ppt/slides/slide29.xml><?xml version="1.0" encoding="utf-8"?>
+<file path=ppt/slides/slide27.xml><?xml version="1.0" encoding="utf-8"?>
 <p:sld xmlns:a="http://schemas.openxmlformats.org/drawingml/2006/main" xmlns:r="http://schemas.openxmlformats.org/officeDocument/2006/relationships" xmlns:p="http://schemas.openxmlformats.org/presentationml/2006/main">
   <p:cSld>
     <p:spTree>
@@ -30646,7 +30224,7 @@
           <a:p>
             <a:r>
               <a:rPr lang="ko-KR" altLang="en-US" dirty="0"/>
-              <a:t>천연가스 생산과 공급</a:t>
+              <a:t>천연가스 소비</a:t>
             </a:r>
           </a:p>
         </p:txBody>
@@ -30674,7 +30252,7 @@
           <a:p>
             <a:fld id="{109C872D-39A9-4065-8BF3-6A613116E2A1}" type="slidenum">
               <a:rPr lang="ko-KR" altLang="en-US" smtClean="0"/>
-              <a:t>29</a:t>
+              <a:t>27</a:t>
             </a:fld>
             <a:endParaRPr lang="ko-KR" altLang="en-US"/>
           </a:p>
@@ -31086,6 +30664,827 @@
     <p:extLst>
       <p:ext uri="{BB962C8B-B14F-4D97-AF65-F5344CB8AC3E}">
         <p14:creationId xmlns:p14="http://schemas.microsoft.com/office/powerpoint/2010/main" val="3423313291"/>
+      </p:ext>
+    </p:extLst>
+  </p:cSld>
+  <p:clrMapOvr>
+    <a:masterClrMapping/>
+  </p:clrMapOvr>
+</p:sld>
+</file>
+
+<file path=ppt/slides/slide28.xml><?xml version="1.0" encoding="utf-8"?>
+<p:sld xmlns:a="http://schemas.openxmlformats.org/drawingml/2006/main" xmlns:r="http://schemas.openxmlformats.org/officeDocument/2006/relationships" xmlns:p="http://schemas.openxmlformats.org/presentationml/2006/main">
+  <p:cSld>
+    <p:spTree>
+      <p:nvGrpSpPr>
+        <p:cNvPr id="1" name="">
+          <a:extLst>
+            <a:ext uri="{FF2B5EF4-FFF2-40B4-BE49-F238E27FC236}">
+              <a16:creationId xmlns:a16="http://schemas.microsoft.com/office/drawing/2014/main" id="{FB53CCBB-A096-4F5E-82A0-6FA451650AF3}"/>
+            </a:ext>
+          </a:extLst>
+        </p:cNvPr>
+        <p:cNvGrpSpPr/>
+        <p:nvPr/>
+      </p:nvGrpSpPr>
+      <p:grpSpPr>
+        <a:xfrm>
+          <a:off x="0" y="0"/>
+          <a:ext cx="0" cy="0"/>
+          <a:chOff x="0" y="0"/>
+          <a:chExt cx="0" cy="0"/>
+        </a:xfrm>
+      </p:grpSpPr>
+      <p:sp>
+        <p:nvSpPr>
+          <p:cNvPr id="2" name="제목 1">
+            <a:extLst>
+              <a:ext uri="{FF2B5EF4-FFF2-40B4-BE49-F238E27FC236}">
+                <a16:creationId xmlns:a16="http://schemas.microsoft.com/office/drawing/2014/main" id="{4A390E5F-A4F8-AAD3-CC8B-AB68364297D1}"/>
+              </a:ext>
+            </a:extLst>
+          </p:cNvPr>
+          <p:cNvSpPr>
+            <a:spLocks noGrp="1"/>
+          </p:cNvSpPr>
+          <p:nvPr>
+            <p:ph type="title"/>
+          </p:nvPr>
+        </p:nvSpPr>
+        <p:spPr/>
+        <p:txBody>
+          <a:bodyPr/>
+          <a:lstStyle/>
+          <a:p>
+            <a:r>
+              <a:rPr lang="en-US" altLang="ko-KR" dirty="0"/>
+              <a:t>L N G</a:t>
+            </a:r>
+            <a:r>
+              <a:rPr lang="ko-KR" altLang="en-US" dirty="0"/>
+              <a:t> 수입</a:t>
+            </a:r>
+          </a:p>
+        </p:txBody>
+      </p:sp>
+      <p:sp>
+        <p:nvSpPr>
+          <p:cNvPr id="4" name="슬라이드 번호 개체 틀 3">
+            <a:extLst>
+              <a:ext uri="{FF2B5EF4-FFF2-40B4-BE49-F238E27FC236}">
+                <a16:creationId xmlns:a16="http://schemas.microsoft.com/office/drawing/2014/main" id="{283DFC10-B1F8-C620-A895-687007ABFB07}"/>
+              </a:ext>
+            </a:extLst>
+          </p:cNvPr>
+          <p:cNvSpPr>
+            <a:spLocks noGrp="1"/>
+          </p:cNvSpPr>
+          <p:nvPr>
+            <p:ph type="sldNum" sz="quarter" idx="12"/>
+          </p:nvPr>
+        </p:nvSpPr>
+        <p:spPr/>
+        <p:txBody>
+          <a:bodyPr/>
+          <a:lstStyle/>
+          <a:p>
+            <a:fld id="{109C872D-39A9-4065-8BF3-6A613116E2A1}" type="slidenum">
+              <a:rPr lang="ko-KR" altLang="en-US" smtClean="0"/>
+              <a:t>28</a:t>
+            </a:fld>
+            <a:endParaRPr lang="ko-KR" altLang="en-US"/>
+          </a:p>
+        </p:txBody>
+      </p:sp>
+      <p:sp>
+        <p:nvSpPr>
+          <p:cNvPr id="3" name="TextBox 2">
+            <a:extLst>
+              <a:ext uri="{FF2B5EF4-FFF2-40B4-BE49-F238E27FC236}">
+                <a16:creationId xmlns:a16="http://schemas.microsoft.com/office/drawing/2014/main" id="{0D9406ED-3EC3-CA2F-B6EB-A9691A7965F6}"/>
+              </a:ext>
+            </a:extLst>
+          </p:cNvPr>
+          <p:cNvSpPr txBox="1"/>
+          <p:nvPr/>
+        </p:nvSpPr>
+        <p:spPr>
+          <a:xfrm>
+            <a:off x="288790" y="958844"/>
+            <a:ext cx="11118453" cy="5215338"/>
+          </a:xfrm>
+          <a:prstGeom prst="rect">
+            <a:avLst/>
+          </a:prstGeom>
+          <a:noFill/>
+        </p:spPr>
+        <p:txBody>
+          <a:bodyPr wrap="square" rtlCol="0" anchor="t">
+            <a:spAutoFit/>
+          </a:bodyPr>
+          <a:lstStyle/>
+          <a:p>
+            <a:pPr marL="377825" indent="-285750">
+              <a:lnSpc>
+                <a:spcPct val="150000"/>
+              </a:lnSpc>
+              <a:buFont typeface="Arial" panose="020B0604020202020204" pitchFamily="34" charset="0"/>
+              <a:buChar char="•"/>
+            </a:pPr>
+            <a:r>
+              <a:rPr lang="ko-KR" altLang="en-US" sz="1600" dirty="0"/>
+              <a:t>글로벌 액화천연가스</a:t>
+            </a:r>
+            <a:r>
+              <a:rPr lang="en-US" altLang="ko-KR" sz="1600" dirty="0"/>
+              <a:t>(LNG) </a:t>
+            </a:r>
+            <a:r>
+              <a:rPr lang="ko-KR" altLang="en-US" sz="1600" dirty="0"/>
+              <a:t>수입은 지난 수십 년간 에너지 시장에서 가장 빠르게 성장한 분야이다</a:t>
+            </a:r>
+            <a:r>
+              <a:rPr lang="en-US" altLang="ko-KR" sz="1600" dirty="0"/>
+              <a:t>.</a:t>
+            </a:r>
+          </a:p>
+          <a:p>
+            <a:pPr marL="835025" lvl="1" indent="-285750">
+              <a:lnSpc>
+                <a:spcPct val="150000"/>
+              </a:lnSpc>
+              <a:buFont typeface="Wingdings" panose="05000000000000000000" pitchFamily="2" charset="2"/>
+              <a:buChar char="ü"/>
+            </a:pPr>
+            <a:r>
+              <a:rPr lang="ko-KR" altLang="en-US" sz="1600" dirty="0"/>
+              <a:t>공급망 유연성 증대와 에너지 안보 강화에 핵심적 역할을 해왔다</a:t>
+            </a:r>
+            <a:r>
+              <a:rPr lang="en-US" altLang="ko-KR" sz="1600" dirty="0"/>
+              <a:t>.</a:t>
+            </a:r>
+          </a:p>
+          <a:p>
+            <a:pPr marL="835025" lvl="1" indent="-285750">
+              <a:lnSpc>
+                <a:spcPct val="150000"/>
+              </a:lnSpc>
+              <a:buFont typeface="Wingdings" panose="05000000000000000000" pitchFamily="2" charset="2"/>
+              <a:buChar char="ü"/>
+            </a:pPr>
+            <a:r>
+              <a:rPr lang="ko-KR" altLang="en-US" sz="1600" dirty="0"/>
+              <a:t>기존 파이프라인 수송 방식에 비해</a:t>
+            </a:r>
+            <a:r>
+              <a:rPr lang="en-US" altLang="ko-KR" sz="1600" dirty="0"/>
+              <a:t>, </a:t>
+            </a:r>
+            <a:r>
+              <a:rPr lang="ko-KR" altLang="en-US" sz="1600" dirty="0"/>
+              <a:t>거리 및 지정학적 제약으로부터 자유롭기 때문에 천연가스 국제무역을 가능하게 하는 핵심 기술이 되었다</a:t>
+            </a:r>
+            <a:r>
+              <a:rPr lang="en-US" altLang="ko-KR" sz="1600" dirty="0"/>
+              <a:t>.</a:t>
+            </a:r>
+          </a:p>
+          <a:p>
+            <a:pPr marL="1292225" lvl="2" indent="-285750">
+              <a:lnSpc>
+                <a:spcPct val="150000"/>
+              </a:lnSpc>
+              <a:buFont typeface="Wingdings" panose="05000000000000000000" pitchFamily="2" charset="2"/>
+              <a:buChar char="Ø"/>
+            </a:pPr>
+            <a:r>
+              <a:rPr lang="ko-KR" altLang="en-US" sz="1600" dirty="0"/>
+              <a:t>천연가스 자원이 풍부한 북미</a:t>
+            </a:r>
+            <a:r>
+              <a:rPr lang="en-US" altLang="ko-KR" sz="1600" dirty="0"/>
+              <a:t>, </a:t>
+            </a:r>
+            <a:r>
+              <a:rPr lang="ko-KR" altLang="en-US" sz="1600" dirty="0"/>
+              <a:t>중동</a:t>
+            </a:r>
+            <a:r>
+              <a:rPr lang="en-US" altLang="ko-KR" sz="1600" dirty="0"/>
+              <a:t>, </a:t>
+            </a:r>
+            <a:r>
+              <a:rPr lang="ko-KR" altLang="en-US" sz="1600" dirty="0"/>
+              <a:t>러시아 등의 지역에서 생산된 가스가</a:t>
+            </a:r>
+            <a:r>
+              <a:rPr lang="en-US" altLang="ko-KR" sz="1600" dirty="0"/>
+              <a:t>, </a:t>
+            </a:r>
+            <a:r>
+              <a:rPr lang="ko-KR" altLang="en-US" sz="1600" dirty="0"/>
+              <a:t>수요가 집중된 동아시아</a:t>
+            </a:r>
+            <a:r>
+              <a:rPr lang="en-US" altLang="ko-KR" sz="1600" dirty="0"/>
+              <a:t>, </a:t>
+            </a:r>
+            <a:r>
+              <a:rPr lang="ko-KR" altLang="en-US" sz="1600" dirty="0"/>
+              <a:t>유럽</a:t>
+            </a:r>
+            <a:r>
+              <a:rPr lang="en-US" altLang="ko-KR" sz="1600" dirty="0"/>
+              <a:t>, </a:t>
+            </a:r>
+            <a:r>
+              <a:rPr lang="ko-KR" altLang="en-US" sz="1600" dirty="0"/>
+              <a:t>남아시아 지역으로 이전됨으로써 천연가스는 석유 시장과 유사한 통합성과 유연성을 갖춘 글로벌 상품으로 진화하고 있다</a:t>
+            </a:r>
+            <a:r>
+              <a:rPr lang="en-US" altLang="ko-KR" sz="1600" dirty="0"/>
+              <a:t>.</a:t>
+            </a:r>
+          </a:p>
+          <a:p>
+            <a:pPr marL="835025" lvl="1" indent="-285750">
+              <a:lnSpc>
+                <a:spcPct val="150000"/>
+              </a:lnSpc>
+              <a:buFont typeface="Wingdings" panose="05000000000000000000" pitchFamily="2" charset="2"/>
+              <a:buChar char="ü"/>
+            </a:pPr>
+            <a:r>
+              <a:rPr lang="ko-KR" altLang="en-US" sz="1600" dirty="0"/>
+              <a:t>수입국 측면에서 아시아는 전세계 </a:t>
+            </a:r>
+            <a:r>
+              <a:rPr lang="en-US" altLang="ko-KR" sz="1600" dirty="0"/>
+              <a:t>LNG </a:t>
+            </a:r>
+            <a:r>
+              <a:rPr lang="ko-KR" altLang="en-US" sz="1600" dirty="0"/>
+              <a:t>수요의 중심지로 부상하였다</a:t>
+            </a:r>
+            <a:r>
+              <a:rPr lang="en-US" altLang="ko-KR" sz="1600" dirty="0"/>
+              <a:t>.</a:t>
+            </a:r>
+          </a:p>
+          <a:p>
+            <a:pPr marL="1292225" lvl="2" indent="-285750">
+              <a:lnSpc>
+                <a:spcPct val="150000"/>
+              </a:lnSpc>
+              <a:buFont typeface="Wingdings" panose="05000000000000000000" pitchFamily="2" charset="2"/>
+              <a:buChar char="Ø"/>
+            </a:pPr>
+            <a:r>
+              <a:rPr lang="ko-KR" altLang="en-US" sz="1600" dirty="0"/>
+              <a:t>일본은 오랜 기간 세계 최대 </a:t>
+            </a:r>
+            <a:r>
+              <a:rPr lang="en-US" altLang="ko-KR" sz="1600" dirty="0"/>
+              <a:t>LNG </a:t>
+            </a:r>
+            <a:r>
+              <a:rPr lang="ko-KR" altLang="en-US" sz="1600" dirty="0"/>
+              <a:t>수입국의 지위를 유지하였고</a:t>
+            </a:r>
+            <a:r>
+              <a:rPr lang="en-US" altLang="ko-KR" sz="1600" dirty="0"/>
+              <a:t>, 2011</a:t>
+            </a:r>
+            <a:r>
+              <a:rPr lang="ko-KR" altLang="en-US" sz="1600" dirty="0"/>
+              <a:t>년 후쿠시마 원전 사고 이후 원전 의존도를 대폭 축소하고</a:t>
+            </a:r>
+            <a:r>
+              <a:rPr lang="en-US" altLang="ko-KR" sz="1600" dirty="0"/>
+              <a:t>, LNG </a:t>
+            </a:r>
+            <a:r>
+              <a:rPr lang="ko-KR" altLang="en-US" sz="1600" dirty="0"/>
+              <a:t>수입을 대체 에너지원으로 급격히 확대하였다</a:t>
+            </a:r>
+            <a:r>
+              <a:rPr lang="en-US" altLang="ko-KR" sz="1600" dirty="0"/>
+              <a:t>.</a:t>
+            </a:r>
+          </a:p>
+          <a:p>
+            <a:pPr marL="1292225" lvl="2" indent="-285750">
+              <a:lnSpc>
+                <a:spcPct val="150000"/>
+              </a:lnSpc>
+              <a:buFont typeface="Wingdings" panose="05000000000000000000" pitchFamily="2" charset="2"/>
+              <a:buChar char="Ø"/>
+            </a:pPr>
+            <a:r>
+              <a:rPr lang="ko-KR" altLang="en-US" sz="1600" dirty="0"/>
+              <a:t>중국은 최근 에너지 수요 급증과 </a:t>
+            </a:r>
+            <a:r>
+              <a:rPr lang="ko-KR" altLang="en-US" sz="1600" dirty="0" err="1"/>
+              <a:t>대기질</a:t>
+            </a:r>
+            <a:r>
+              <a:rPr lang="ko-KR" altLang="en-US" sz="1600" dirty="0"/>
+              <a:t> 개선 목표에 따라 </a:t>
+            </a:r>
+            <a:r>
+              <a:rPr lang="en-US" altLang="ko-KR" sz="1600" dirty="0"/>
+              <a:t>LNG </a:t>
+            </a:r>
+            <a:r>
+              <a:rPr lang="ko-KR" altLang="en-US" sz="1600" dirty="0"/>
+              <a:t>수입을 대폭 늘려</a:t>
+            </a:r>
+            <a:r>
+              <a:rPr lang="en-US" altLang="ko-KR" sz="1600" dirty="0"/>
+              <a:t>, 2021</a:t>
+            </a:r>
+            <a:r>
+              <a:rPr lang="ko-KR" altLang="en-US" sz="1600" dirty="0"/>
+              <a:t>년 처음으로 일본을 제치고 세계 최대 </a:t>
+            </a:r>
+            <a:r>
+              <a:rPr lang="en-US" altLang="ko-KR" sz="1600" dirty="0"/>
+              <a:t>LNG </a:t>
+            </a:r>
+            <a:r>
+              <a:rPr lang="ko-KR" altLang="en-US" sz="1600" dirty="0"/>
+              <a:t>수입국이 되었다</a:t>
+            </a:r>
+            <a:r>
+              <a:rPr lang="en-US" altLang="ko-KR" sz="1600" dirty="0"/>
+              <a:t>.</a:t>
+            </a:r>
+          </a:p>
+          <a:p>
+            <a:pPr marL="1292225" lvl="2" indent="-285750">
+              <a:lnSpc>
+                <a:spcPct val="150000"/>
+              </a:lnSpc>
+              <a:buFont typeface="Wingdings" panose="05000000000000000000" pitchFamily="2" charset="2"/>
+              <a:buChar char="Ø"/>
+            </a:pPr>
+            <a:r>
+              <a:rPr lang="ko-KR" altLang="en-US" sz="1600" dirty="0"/>
+              <a:t>인도와 한국 또한 수입량을 지속적으로 확대하고 있으며</a:t>
+            </a:r>
+            <a:r>
+              <a:rPr lang="en-US" altLang="ko-KR" sz="1600" dirty="0"/>
+              <a:t>, </a:t>
+            </a:r>
+            <a:r>
+              <a:rPr lang="ko-KR" altLang="en-US" sz="1600" dirty="0"/>
+              <a:t>아시아 전체는 현재 글로벌 </a:t>
+            </a:r>
+            <a:r>
+              <a:rPr lang="en-US" altLang="ko-KR" sz="1600" dirty="0"/>
+              <a:t>LNG </a:t>
+            </a:r>
+            <a:r>
+              <a:rPr lang="ko-KR" altLang="en-US" sz="1600" dirty="0"/>
+              <a:t>수입의 약 </a:t>
+            </a:r>
+            <a:r>
+              <a:rPr lang="en-US" altLang="ko-KR" sz="1600" dirty="0"/>
+              <a:t>70%</a:t>
+            </a:r>
+            <a:r>
+              <a:rPr lang="ko-KR" altLang="en-US" sz="1600" dirty="0"/>
+              <a:t>를 차지하고 있다</a:t>
+            </a:r>
+            <a:r>
+              <a:rPr lang="en-US" altLang="ko-KR" sz="1600" dirty="0"/>
+              <a:t>.</a:t>
+            </a:r>
+          </a:p>
+        </p:txBody>
+      </p:sp>
+    </p:spTree>
+    <p:extLst>
+      <p:ext uri="{BB962C8B-B14F-4D97-AF65-F5344CB8AC3E}">
+        <p14:creationId xmlns:p14="http://schemas.microsoft.com/office/powerpoint/2010/main" val="3435324664"/>
+      </p:ext>
+    </p:extLst>
+  </p:cSld>
+  <p:clrMapOvr>
+    <a:masterClrMapping/>
+  </p:clrMapOvr>
+</p:sld>
+</file>
+
+<file path=ppt/slides/slide29.xml><?xml version="1.0" encoding="utf-8"?>
+<p:sld xmlns:a="http://schemas.openxmlformats.org/drawingml/2006/main" xmlns:r="http://schemas.openxmlformats.org/officeDocument/2006/relationships" xmlns:p="http://schemas.openxmlformats.org/presentationml/2006/main">
+  <p:cSld>
+    <p:spTree>
+      <p:nvGrpSpPr>
+        <p:cNvPr id="1" name="">
+          <a:extLst>
+            <a:ext uri="{FF2B5EF4-FFF2-40B4-BE49-F238E27FC236}">
+              <a16:creationId xmlns:a16="http://schemas.microsoft.com/office/drawing/2014/main" id="{5FA8CD1B-9FA0-D50E-9F70-DB9EB64D9260}"/>
+            </a:ext>
+          </a:extLst>
+        </p:cNvPr>
+        <p:cNvGrpSpPr/>
+        <p:nvPr/>
+      </p:nvGrpSpPr>
+      <p:grpSpPr>
+        <a:xfrm>
+          <a:off x="0" y="0"/>
+          <a:ext cx="0" cy="0"/>
+          <a:chOff x="0" y="0"/>
+          <a:chExt cx="0" cy="0"/>
+        </a:xfrm>
+      </p:grpSpPr>
+      <p:sp>
+        <p:nvSpPr>
+          <p:cNvPr id="2" name="제목 1">
+            <a:extLst>
+              <a:ext uri="{FF2B5EF4-FFF2-40B4-BE49-F238E27FC236}">
+                <a16:creationId xmlns:a16="http://schemas.microsoft.com/office/drawing/2014/main" id="{79B34FB3-EDD9-C0E4-685A-3951CEB74506}"/>
+              </a:ext>
+            </a:extLst>
+          </p:cNvPr>
+          <p:cNvSpPr>
+            <a:spLocks noGrp="1"/>
+          </p:cNvSpPr>
+          <p:nvPr>
+            <p:ph type="title"/>
+          </p:nvPr>
+        </p:nvSpPr>
+        <p:spPr/>
+        <p:txBody>
+          <a:bodyPr/>
+          <a:lstStyle/>
+          <a:p>
+            <a:r>
+              <a:rPr lang="en-US" altLang="ko-KR" dirty="0"/>
+              <a:t>L N G</a:t>
+            </a:r>
+            <a:r>
+              <a:rPr lang="ko-KR" altLang="en-US" dirty="0"/>
+              <a:t> 수입</a:t>
+            </a:r>
+          </a:p>
+        </p:txBody>
+      </p:sp>
+      <p:sp>
+        <p:nvSpPr>
+          <p:cNvPr id="4" name="슬라이드 번호 개체 틀 3">
+            <a:extLst>
+              <a:ext uri="{FF2B5EF4-FFF2-40B4-BE49-F238E27FC236}">
+                <a16:creationId xmlns:a16="http://schemas.microsoft.com/office/drawing/2014/main" id="{248B2577-1AF3-CD0B-486F-C29A2495E75D}"/>
+              </a:ext>
+            </a:extLst>
+          </p:cNvPr>
+          <p:cNvSpPr>
+            <a:spLocks noGrp="1"/>
+          </p:cNvSpPr>
+          <p:nvPr>
+            <p:ph type="sldNum" sz="quarter" idx="12"/>
+          </p:nvPr>
+        </p:nvSpPr>
+        <p:spPr/>
+        <p:txBody>
+          <a:bodyPr/>
+          <a:lstStyle/>
+          <a:p>
+            <a:fld id="{109C872D-39A9-4065-8BF3-6A613116E2A1}" type="slidenum">
+              <a:rPr lang="ko-KR" altLang="en-US" smtClean="0"/>
+              <a:t>29</a:t>
+            </a:fld>
+            <a:endParaRPr lang="ko-KR" altLang="en-US"/>
+          </a:p>
+        </p:txBody>
+      </p:sp>
+      <p:sp>
+        <p:nvSpPr>
+          <p:cNvPr id="3" name="TextBox 2">
+            <a:extLst>
+              <a:ext uri="{FF2B5EF4-FFF2-40B4-BE49-F238E27FC236}">
+                <a16:creationId xmlns:a16="http://schemas.microsoft.com/office/drawing/2014/main" id="{FDD62BF2-D3B7-7B98-DDD0-10A5909F39DB}"/>
+              </a:ext>
+            </a:extLst>
+          </p:cNvPr>
+          <p:cNvSpPr txBox="1"/>
+          <p:nvPr/>
+        </p:nvSpPr>
+        <p:spPr>
+          <a:xfrm>
+            <a:off x="288790" y="958844"/>
+            <a:ext cx="11118453" cy="4846007"/>
+          </a:xfrm>
+          <a:prstGeom prst="rect">
+            <a:avLst/>
+          </a:prstGeom>
+          <a:noFill/>
+        </p:spPr>
+        <p:txBody>
+          <a:bodyPr wrap="square" rtlCol="0" anchor="t">
+            <a:spAutoFit/>
+          </a:bodyPr>
+          <a:lstStyle/>
+          <a:p>
+            <a:pPr marL="835025" lvl="1" indent="-285750">
+              <a:lnSpc>
+                <a:spcPct val="150000"/>
+              </a:lnSpc>
+              <a:buFont typeface="Wingdings" panose="05000000000000000000" pitchFamily="2" charset="2"/>
+              <a:buChar char="ü"/>
+            </a:pPr>
+            <a:r>
+              <a:rPr lang="ko-KR" altLang="en-US" sz="1600" dirty="0"/>
+              <a:t>유럽 역시 </a:t>
+            </a:r>
+            <a:r>
+              <a:rPr lang="en-US" altLang="ko-KR" sz="1600" dirty="0"/>
+              <a:t>LNG </a:t>
+            </a:r>
+            <a:r>
+              <a:rPr lang="ko-KR" altLang="en-US" sz="1600" dirty="0"/>
+              <a:t>수입 시장에서 중요한 변화를 보이고 있다</a:t>
+            </a:r>
+            <a:r>
+              <a:rPr lang="en-US" altLang="ko-KR" sz="1600" dirty="0"/>
+              <a:t>.</a:t>
+            </a:r>
+          </a:p>
+          <a:p>
+            <a:pPr marL="1292225" lvl="2" indent="-285750">
+              <a:lnSpc>
+                <a:spcPct val="150000"/>
+              </a:lnSpc>
+              <a:buFont typeface="Wingdings" panose="05000000000000000000" pitchFamily="2" charset="2"/>
+              <a:buChar char="Ø"/>
+            </a:pPr>
+            <a:r>
+              <a:rPr lang="ko-KR" altLang="en-US" sz="1600" dirty="0"/>
+              <a:t>과거 유럽은 러시아산 파이프라인 가스에 대한 높은 의존도를 보여왔지만</a:t>
+            </a:r>
+            <a:r>
+              <a:rPr lang="en-US" altLang="ko-KR" sz="1600" dirty="0"/>
+              <a:t>, 2022</a:t>
+            </a:r>
+            <a:r>
+              <a:rPr lang="ko-KR" altLang="en-US" sz="1600" dirty="0"/>
+              <a:t>년 러시아</a:t>
+            </a:r>
+            <a:r>
+              <a:rPr lang="en-US" altLang="ko-KR" sz="1600" dirty="0"/>
+              <a:t>-</a:t>
+            </a:r>
+            <a:r>
+              <a:rPr lang="ko-KR" altLang="en-US" sz="1600" dirty="0"/>
+              <a:t>우크라이나 전쟁 이후 에너지 안보에 대한 우려가 급증하여 </a:t>
+            </a:r>
+            <a:r>
+              <a:rPr lang="en-US" altLang="ko-KR" sz="1600" dirty="0"/>
+              <a:t>LNG</a:t>
+            </a:r>
+            <a:r>
+              <a:rPr lang="ko-KR" altLang="en-US" sz="1600" dirty="0"/>
+              <a:t>수입을 전략적으로 확대하는 방향으로 전환하였다</a:t>
+            </a:r>
+            <a:r>
+              <a:rPr lang="en-US" altLang="ko-KR" sz="1600" dirty="0"/>
+              <a:t>.</a:t>
+            </a:r>
+          </a:p>
+          <a:p>
+            <a:pPr marL="1292225" lvl="2" indent="-285750">
+              <a:lnSpc>
+                <a:spcPct val="150000"/>
+              </a:lnSpc>
+              <a:buFont typeface="Wingdings" panose="05000000000000000000" pitchFamily="2" charset="2"/>
+              <a:buChar char="Ø"/>
+            </a:pPr>
+            <a:r>
+              <a:rPr lang="ko-KR" altLang="en-US" sz="1600" dirty="0"/>
+              <a:t>독일</a:t>
+            </a:r>
+            <a:r>
+              <a:rPr lang="en-US" altLang="ko-KR" sz="1600" dirty="0"/>
+              <a:t>, </a:t>
+            </a:r>
+            <a:r>
+              <a:rPr lang="ko-KR" altLang="en-US" sz="1600" dirty="0"/>
+              <a:t>폴란드</a:t>
+            </a:r>
+            <a:r>
+              <a:rPr lang="en-US" altLang="ko-KR" sz="1600" dirty="0"/>
+              <a:t>, </a:t>
+            </a:r>
+            <a:r>
+              <a:rPr lang="ko-KR" altLang="en-US" sz="1600" dirty="0"/>
+              <a:t>핀란드 등은 기존에 부재하던 </a:t>
+            </a:r>
+            <a:r>
+              <a:rPr lang="en-US" altLang="ko-KR" sz="1600" dirty="0"/>
+              <a:t>LNG </a:t>
+            </a:r>
+            <a:r>
+              <a:rPr lang="ko-KR" altLang="en-US" sz="1600" dirty="0"/>
+              <a:t>터미널을 신속히 구축하거나 기존 시설을 확장하였고</a:t>
+            </a:r>
+            <a:r>
+              <a:rPr lang="en-US" altLang="ko-KR" sz="1600" dirty="0"/>
+              <a:t>, </a:t>
+            </a:r>
+            <a:r>
+              <a:rPr lang="ko-KR" altLang="en-US" sz="1600" dirty="0"/>
+              <a:t>미국 및 카타르 등으로부터 장기 수입계약 체결을 통해 공급선 다변화를 적극 추진하고 있다</a:t>
+            </a:r>
+            <a:r>
+              <a:rPr lang="en-US" altLang="ko-KR" sz="1600" dirty="0"/>
+              <a:t>.</a:t>
+            </a:r>
+          </a:p>
+          <a:p>
+            <a:pPr marL="1292225" lvl="2" indent="-285750">
+              <a:lnSpc>
+                <a:spcPct val="150000"/>
+              </a:lnSpc>
+              <a:buFont typeface="Wingdings" panose="05000000000000000000" pitchFamily="2" charset="2"/>
+              <a:buChar char="Ø"/>
+            </a:pPr>
+            <a:r>
+              <a:rPr lang="ko-KR" altLang="en-US" sz="1600" dirty="0"/>
+              <a:t>그 결과 </a:t>
+            </a:r>
+            <a:r>
+              <a:rPr lang="en-US" altLang="ko-KR" sz="1600" dirty="0"/>
+              <a:t>2022-2023</a:t>
+            </a:r>
+            <a:r>
+              <a:rPr lang="ko-KR" altLang="en-US" sz="1600" dirty="0"/>
+              <a:t>년 사이 유럽의 </a:t>
+            </a:r>
+            <a:r>
+              <a:rPr lang="en-US" altLang="ko-KR" sz="1600" dirty="0"/>
+              <a:t>LNG </a:t>
+            </a:r>
+            <a:r>
+              <a:rPr lang="ko-KR" altLang="en-US" sz="1600" dirty="0"/>
+              <a:t>수입량은 전년 대비 약 </a:t>
+            </a:r>
+            <a:r>
+              <a:rPr lang="en-US" altLang="ko-KR" sz="1600" dirty="0"/>
+              <a:t>60% </a:t>
+            </a:r>
+            <a:r>
+              <a:rPr lang="ko-KR" altLang="en-US" sz="1600" dirty="0"/>
+              <a:t>증가하였으며</a:t>
+            </a:r>
+            <a:r>
+              <a:rPr lang="en-US" altLang="ko-KR" sz="1600" dirty="0"/>
+              <a:t>, </a:t>
+            </a:r>
+            <a:r>
+              <a:rPr lang="ko-KR" altLang="en-US" sz="1600" dirty="0"/>
+              <a:t>이는 글로벌 </a:t>
+            </a:r>
+            <a:r>
+              <a:rPr lang="en-US" altLang="ko-KR" sz="1600" dirty="0"/>
+              <a:t>LNG </a:t>
+            </a:r>
+            <a:r>
+              <a:rPr lang="ko-KR" altLang="en-US" sz="1600" dirty="0"/>
+              <a:t>수급 및 가격에 상당한 파급효과를 미쳤다</a:t>
+            </a:r>
+            <a:r>
+              <a:rPr lang="en-US" altLang="ko-KR" sz="1600" dirty="0"/>
+              <a:t>.</a:t>
+            </a:r>
+          </a:p>
+          <a:p>
+            <a:pPr marL="1292225" lvl="2" indent="-285750">
+              <a:lnSpc>
+                <a:spcPct val="150000"/>
+              </a:lnSpc>
+              <a:buFont typeface="Wingdings" panose="05000000000000000000" pitchFamily="2" charset="2"/>
+              <a:buChar char="Ø"/>
+            </a:pPr>
+            <a:endParaRPr lang="en-US" altLang="ko-KR" sz="1600" dirty="0"/>
+          </a:p>
+          <a:p>
+            <a:pPr marL="377825" indent="-285750">
+              <a:lnSpc>
+                <a:spcPct val="150000"/>
+              </a:lnSpc>
+              <a:buFont typeface="Arial" panose="020B0604020202020204" pitchFamily="34" charset="0"/>
+              <a:buChar char="•"/>
+            </a:pPr>
+            <a:r>
+              <a:rPr lang="ko-KR" altLang="en-US" sz="1600" dirty="0"/>
+              <a:t>글로벌 </a:t>
+            </a:r>
+            <a:r>
+              <a:rPr lang="en-US" altLang="ko-KR" sz="1600" dirty="0"/>
+              <a:t>LNG </a:t>
+            </a:r>
+            <a:r>
+              <a:rPr lang="ko-KR" altLang="en-US" sz="1600" dirty="0"/>
+              <a:t>시장은 계약 구조 측면에서도 중요한 변화를 경험하고 있다</a:t>
+            </a:r>
+            <a:r>
+              <a:rPr lang="en-US" altLang="ko-KR" sz="1600" dirty="0"/>
+              <a:t>.</a:t>
+            </a:r>
+          </a:p>
+          <a:p>
+            <a:pPr marL="835025" lvl="1" indent="-285750">
+              <a:lnSpc>
+                <a:spcPct val="150000"/>
+              </a:lnSpc>
+              <a:buFont typeface="Wingdings" panose="05000000000000000000" pitchFamily="2" charset="2"/>
+              <a:buChar char="ü"/>
+            </a:pPr>
+            <a:r>
+              <a:rPr lang="ko-KR" altLang="en-US" sz="1600" dirty="0"/>
+              <a:t>과거에는 </a:t>
+            </a:r>
+            <a:r>
+              <a:rPr lang="en-US" altLang="ko-KR" sz="1600" dirty="0"/>
+              <a:t>20</a:t>
+            </a:r>
+            <a:r>
+              <a:rPr lang="ko-KR" altLang="en-US" sz="1600" dirty="0"/>
+              <a:t>년 이상의 장기 고정가격 계약이 시장의 표준이었으나</a:t>
+            </a:r>
+            <a:r>
+              <a:rPr lang="en-US" altLang="ko-KR" sz="1600" dirty="0"/>
+              <a:t>, </a:t>
+            </a:r>
+            <a:r>
+              <a:rPr lang="ko-KR" altLang="en-US" sz="1600" dirty="0"/>
+              <a:t>최근에는 현물 시장 및 단기 계약의 비중이 늘고 있다</a:t>
+            </a:r>
+            <a:r>
+              <a:rPr lang="en-US" altLang="ko-KR" sz="1600" dirty="0"/>
+              <a:t>.</a:t>
+            </a:r>
+          </a:p>
+          <a:p>
+            <a:pPr marL="1292225" lvl="2" indent="-285750">
+              <a:lnSpc>
+                <a:spcPct val="150000"/>
+              </a:lnSpc>
+              <a:buFont typeface="Wingdings" panose="05000000000000000000" pitchFamily="2" charset="2"/>
+              <a:buChar char="Ø"/>
+            </a:pPr>
+            <a:r>
+              <a:rPr lang="ko-KR" altLang="en-US" sz="1600" dirty="0"/>
+              <a:t>이는 수요의 변동성 증가</a:t>
+            </a:r>
+            <a:r>
+              <a:rPr lang="en-US" altLang="ko-KR" sz="1600" dirty="0"/>
+              <a:t>, </a:t>
+            </a:r>
+            <a:r>
+              <a:rPr lang="ko-KR" altLang="en-US" sz="1600" dirty="0"/>
+              <a:t>시장 가격에 대한 민감성 강화</a:t>
+            </a:r>
+            <a:r>
+              <a:rPr lang="en-US" altLang="ko-KR" sz="1600" dirty="0"/>
+              <a:t>, </a:t>
+            </a:r>
+            <a:r>
+              <a:rPr lang="ko-KR" altLang="en-US" sz="1600" dirty="0"/>
+              <a:t>공급국 간 경쟁 심화 등과 같은 요인에 기인하며</a:t>
+            </a:r>
+            <a:r>
+              <a:rPr lang="en-US" altLang="ko-KR" sz="1600" dirty="0"/>
+              <a:t>, </a:t>
+            </a:r>
+            <a:r>
+              <a:rPr lang="ko-KR" altLang="en-US" sz="1600" dirty="0"/>
+              <a:t>결과적으로 </a:t>
+            </a:r>
+            <a:r>
+              <a:rPr lang="en-US" altLang="ko-KR" sz="1600" dirty="0"/>
+              <a:t>LNG </a:t>
+            </a:r>
+            <a:r>
+              <a:rPr lang="ko-KR" altLang="en-US" sz="1600" dirty="0"/>
+              <a:t>거래의 유연성과 시장 반응성을 높이는 방향으로 시장이 진화하고 있음을 의미한다</a:t>
+            </a:r>
+            <a:r>
+              <a:rPr lang="en-US" altLang="ko-KR" sz="1600" dirty="0"/>
+              <a:t>.</a:t>
+            </a:r>
+          </a:p>
+        </p:txBody>
+      </p:sp>
+    </p:spTree>
+    <p:extLst>
+      <p:ext uri="{BB962C8B-B14F-4D97-AF65-F5344CB8AC3E}">
+        <p14:creationId xmlns:p14="http://schemas.microsoft.com/office/powerpoint/2010/main" val="3139826916"/>
       </p:ext>
     </p:extLst>
   </p:cSld>
@@ -31246,823 +31645,6 @@
         <p:cNvPr id="1" name="">
           <a:extLst>
             <a:ext uri="{FF2B5EF4-FFF2-40B4-BE49-F238E27FC236}">
-              <a16:creationId xmlns:a16="http://schemas.microsoft.com/office/drawing/2014/main" id="{FB53CCBB-A096-4F5E-82A0-6FA451650AF3}"/>
-            </a:ext>
-          </a:extLst>
-        </p:cNvPr>
-        <p:cNvGrpSpPr/>
-        <p:nvPr/>
-      </p:nvGrpSpPr>
-      <p:grpSpPr>
-        <a:xfrm>
-          <a:off x="0" y="0"/>
-          <a:ext cx="0" cy="0"/>
-          <a:chOff x="0" y="0"/>
-          <a:chExt cx="0" cy="0"/>
-        </a:xfrm>
-      </p:grpSpPr>
-      <p:sp>
-        <p:nvSpPr>
-          <p:cNvPr id="2" name="제목 1">
-            <a:extLst>
-              <a:ext uri="{FF2B5EF4-FFF2-40B4-BE49-F238E27FC236}">
-                <a16:creationId xmlns:a16="http://schemas.microsoft.com/office/drawing/2014/main" id="{4A390E5F-A4F8-AAD3-CC8B-AB68364297D1}"/>
-              </a:ext>
-            </a:extLst>
-          </p:cNvPr>
-          <p:cNvSpPr>
-            <a:spLocks noGrp="1"/>
-          </p:cNvSpPr>
-          <p:nvPr>
-            <p:ph type="title"/>
-          </p:nvPr>
-        </p:nvSpPr>
-        <p:spPr/>
-        <p:txBody>
-          <a:bodyPr/>
-          <a:lstStyle/>
-          <a:p>
-            <a:r>
-              <a:rPr lang="ko-KR" altLang="en-US" dirty="0"/>
-              <a:t>천연가스 소비</a:t>
-            </a:r>
-          </a:p>
-        </p:txBody>
-      </p:sp>
-      <p:sp>
-        <p:nvSpPr>
-          <p:cNvPr id="4" name="슬라이드 번호 개체 틀 3">
-            <a:extLst>
-              <a:ext uri="{FF2B5EF4-FFF2-40B4-BE49-F238E27FC236}">
-                <a16:creationId xmlns:a16="http://schemas.microsoft.com/office/drawing/2014/main" id="{283DFC10-B1F8-C620-A895-687007ABFB07}"/>
-              </a:ext>
-            </a:extLst>
-          </p:cNvPr>
-          <p:cNvSpPr>
-            <a:spLocks noGrp="1"/>
-          </p:cNvSpPr>
-          <p:nvPr>
-            <p:ph type="sldNum" sz="quarter" idx="12"/>
-          </p:nvPr>
-        </p:nvSpPr>
-        <p:spPr/>
-        <p:txBody>
-          <a:bodyPr/>
-          <a:lstStyle/>
-          <a:p>
-            <a:fld id="{109C872D-39A9-4065-8BF3-6A613116E2A1}" type="slidenum">
-              <a:rPr lang="ko-KR" altLang="en-US" smtClean="0"/>
-              <a:t>30</a:t>
-            </a:fld>
-            <a:endParaRPr lang="ko-KR" altLang="en-US"/>
-          </a:p>
-        </p:txBody>
-      </p:sp>
-      <p:sp>
-        <p:nvSpPr>
-          <p:cNvPr id="3" name="TextBox 2">
-            <a:extLst>
-              <a:ext uri="{FF2B5EF4-FFF2-40B4-BE49-F238E27FC236}">
-                <a16:creationId xmlns:a16="http://schemas.microsoft.com/office/drawing/2014/main" id="{0D9406ED-3EC3-CA2F-B6EB-A9691A7965F6}"/>
-              </a:ext>
-            </a:extLst>
-          </p:cNvPr>
-          <p:cNvSpPr txBox="1"/>
-          <p:nvPr/>
-        </p:nvSpPr>
-        <p:spPr>
-          <a:xfrm>
-            <a:off x="288790" y="958844"/>
-            <a:ext cx="11118453" cy="5215338"/>
-          </a:xfrm>
-          <a:prstGeom prst="rect">
-            <a:avLst/>
-          </a:prstGeom>
-          <a:noFill/>
-        </p:spPr>
-        <p:txBody>
-          <a:bodyPr wrap="square" rtlCol="0" anchor="t">
-            <a:spAutoFit/>
-          </a:bodyPr>
-          <a:lstStyle/>
-          <a:p>
-            <a:pPr marL="377825" indent="-285750">
-              <a:lnSpc>
-                <a:spcPct val="150000"/>
-              </a:lnSpc>
-              <a:buFont typeface="Arial" panose="020B0604020202020204" pitchFamily="34" charset="0"/>
-              <a:buChar char="•"/>
-            </a:pPr>
-            <a:r>
-              <a:rPr lang="ko-KR" altLang="en-US" sz="1600" dirty="0"/>
-              <a:t>글로벌 액화천연가스</a:t>
-            </a:r>
-            <a:r>
-              <a:rPr lang="en-US" altLang="ko-KR" sz="1600" dirty="0"/>
-              <a:t>(LNG) </a:t>
-            </a:r>
-            <a:r>
-              <a:rPr lang="ko-KR" altLang="en-US" sz="1600" dirty="0"/>
-              <a:t>수입은 지난 수십 년간 에너지 시장에서 가장 빠르게 성장한 분야이다</a:t>
-            </a:r>
-            <a:r>
-              <a:rPr lang="en-US" altLang="ko-KR" sz="1600" dirty="0"/>
-              <a:t>.</a:t>
-            </a:r>
-          </a:p>
-          <a:p>
-            <a:pPr marL="835025" lvl="1" indent="-285750">
-              <a:lnSpc>
-                <a:spcPct val="150000"/>
-              </a:lnSpc>
-              <a:buFont typeface="Wingdings" panose="05000000000000000000" pitchFamily="2" charset="2"/>
-              <a:buChar char="ü"/>
-            </a:pPr>
-            <a:r>
-              <a:rPr lang="ko-KR" altLang="en-US" sz="1600" dirty="0"/>
-              <a:t>공급망 유연성 증대와 에너지 안보 강화에 핵심적 역할을 해왔다</a:t>
-            </a:r>
-            <a:r>
-              <a:rPr lang="en-US" altLang="ko-KR" sz="1600" dirty="0"/>
-              <a:t>.</a:t>
-            </a:r>
-          </a:p>
-          <a:p>
-            <a:pPr marL="835025" lvl="1" indent="-285750">
-              <a:lnSpc>
-                <a:spcPct val="150000"/>
-              </a:lnSpc>
-              <a:buFont typeface="Wingdings" panose="05000000000000000000" pitchFamily="2" charset="2"/>
-              <a:buChar char="ü"/>
-            </a:pPr>
-            <a:r>
-              <a:rPr lang="ko-KR" altLang="en-US" sz="1600" dirty="0"/>
-              <a:t>기존 파이프라인 수송 방식에 비해</a:t>
-            </a:r>
-            <a:r>
-              <a:rPr lang="en-US" altLang="ko-KR" sz="1600" dirty="0"/>
-              <a:t>, </a:t>
-            </a:r>
-            <a:r>
-              <a:rPr lang="ko-KR" altLang="en-US" sz="1600" dirty="0"/>
-              <a:t>거리 및 지정학적 제약으로부터 자유롭기 때문에 천연가스 국제무역을 가능하게 하는 핵심 기술이 되었다</a:t>
-            </a:r>
-            <a:r>
-              <a:rPr lang="en-US" altLang="ko-KR" sz="1600" dirty="0"/>
-              <a:t>.</a:t>
-            </a:r>
-          </a:p>
-          <a:p>
-            <a:pPr marL="1292225" lvl="2" indent="-285750">
-              <a:lnSpc>
-                <a:spcPct val="150000"/>
-              </a:lnSpc>
-              <a:buFont typeface="Wingdings" panose="05000000000000000000" pitchFamily="2" charset="2"/>
-              <a:buChar char="Ø"/>
-            </a:pPr>
-            <a:r>
-              <a:rPr lang="ko-KR" altLang="en-US" sz="1600" dirty="0"/>
-              <a:t>천연가스 자원이 풍부한 북미</a:t>
-            </a:r>
-            <a:r>
-              <a:rPr lang="en-US" altLang="ko-KR" sz="1600" dirty="0"/>
-              <a:t>, </a:t>
-            </a:r>
-            <a:r>
-              <a:rPr lang="ko-KR" altLang="en-US" sz="1600" dirty="0"/>
-              <a:t>중동</a:t>
-            </a:r>
-            <a:r>
-              <a:rPr lang="en-US" altLang="ko-KR" sz="1600" dirty="0"/>
-              <a:t>, </a:t>
-            </a:r>
-            <a:r>
-              <a:rPr lang="ko-KR" altLang="en-US" sz="1600" dirty="0"/>
-              <a:t>러시아 등의 지역에서 생산된 가스가</a:t>
-            </a:r>
-            <a:r>
-              <a:rPr lang="en-US" altLang="ko-KR" sz="1600" dirty="0"/>
-              <a:t>, </a:t>
-            </a:r>
-            <a:r>
-              <a:rPr lang="ko-KR" altLang="en-US" sz="1600" dirty="0"/>
-              <a:t>수요가 집중된 동아시아</a:t>
-            </a:r>
-            <a:r>
-              <a:rPr lang="en-US" altLang="ko-KR" sz="1600" dirty="0"/>
-              <a:t>, </a:t>
-            </a:r>
-            <a:r>
-              <a:rPr lang="ko-KR" altLang="en-US" sz="1600" dirty="0"/>
-              <a:t>유럽</a:t>
-            </a:r>
-            <a:r>
-              <a:rPr lang="en-US" altLang="ko-KR" sz="1600" dirty="0"/>
-              <a:t>, </a:t>
-            </a:r>
-            <a:r>
-              <a:rPr lang="ko-KR" altLang="en-US" sz="1600" dirty="0"/>
-              <a:t>남아시아 지역으로 이전됨으로써 천연가스는 석유 시장과 유사한 통합성과 유연성을 갖춘 글로벌 상품으로 진화하고 있다</a:t>
-            </a:r>
-            <a:r>
-              <a:rPr lang="en-US" altLang="ko-KR" sz="1600" dirty="0"/>
-              <a:t>.</a:t>
-            </a:r>
-          </a:p>
-          <a:p>
-            <a:pPr marL="835025" lvl="1" indent="-285750">
-              <a:lnSpc>
-                <a:spcPct val="150000"/>
-              </a:lnSpc>
-              <a:buFont typeface="Wingdings" panose="05000000000000000000" pitchFamily="2" charset="2"/>
-              <a:buChar char="ü"/>
-            </a:pPr>
-            <a:r>
-              <a:rPr lang="ko-KR" altLang="en-US" sz="1600" dirty="0"/>
-              <a:t>수입국 측면에서 아시아는 전세계 </a:t>
-            </a:r>
-            <a:r>
-              <a:rPr lang="en-US" altLang="ko-KR" sz="1600" dirty="0"/>
-              <a:t>LNG </a:t>
-            </a:r>
-            <a:r>
-              <a:rPr lang="ko-KR" altLang="en-US" sz="1600" dirty="0"/>
-              <a:t>수요의 중심지로 부상하였다</a:t>
-            </a:r>
-            <a:r>
-              <a:rPr lang="en-US" altLang="ko-KR" sz="1600" dirty="0"/>
-              <a:t>.</a:t>
-            </a:r>
-          </a:p>
-          <a:p>
-            <a:pPr marL="1292225" lvl="2" indent="-285750">
-              <a:lnSpc>
-                <a:spcPct val="150000"/>
-              </a:lnSpc>
-              <a:buFont typeface="Wingdings" panose="05000000000000000000" pitchFamily="2" charset="2"/>
-              <a:buChar char="Ø"/>
-            </a:pPr>
-            <a:r>
-              <a:rPr lang="ko-KR" altLang="en-US" sz="1600" dirty="0"/>
-              <a:t>일본은 오랜 기간 세계 최대 </a:t>
-            </a:r>
-            <a:r>
-              <a:rPr lang="en-US" altLang="ko-KR" sz="1600" dirty="0"/>
-              <a:t>LNG </a:t>
-            </a:r>
-            <a:r>
-              <a:rPr lang="ko-KR" altLang="en-US" sz="1600" dirty="0"/>
-              <a:t>수입국의 지위를 유지하였고</a:t>
-            </a:r>
-            <a:r>
-              <a:rPr lang="en-US" altLang="ko-KR" sz="1600" dirty="0"/>
-              <a:t>, 2011</a:t>
-            </a:r>
-            <a:r>
-              <a:rPr lang="ko-KR" altLang="en-US" sz="1600" dirty="0"/>
-              <a:t>년 후쿠시마 원전 사고 이후 원전 의존도를 대폭 축소하고</a:t>
-            </a:r>
-            <a:r>
-              <a:rPr lang="en-US" altLang="ko-KR" sz="1600" dirty="0"/>
-              <a:t>, LNG </a:t>
-            </a:r>
-            <a:r>
-              <a:rPr lang="ko-KR" altLang="en-US" sz="1600" dirty="0"/>
-              <a:t>수입을 대체 에너지원으로 급격히 확대하였다</a:t>
-            </a:r>
-            <a:r>
-              <a:rPr lang="en-US" altLang="ko-KR" sz="1600" dirty="0"/>
-              <a:t>.</a:t>
-            </a:r>
-          </a:p>
-          <a:p>
-            <a:pPr marL="1292225" lvl="2" indent="-285750">
-              <a:lnSpc>
-                <a:spcPct val="150000"/>
-              </a:lnSpc>
-              <a:buFont typeface="Wingdings" panose="05000000000000000000" pitchFamily="2" charset="2"/>
-              <a:buChar char="Ø"/>
-            </a:pPr>
-            <a:r>
-              <a:rPr lang="ko-KR" altLang="en-US" sz="1600" dirty="0"/>
-              <a:t>중국은 최근 에너지 수요 급증과 </a:t>
-            </a:r>
-            <a:r>
-              <a:rPr lang="ko-KR" altLang="en-US" sz="1600" dirty="0" err="1"/>
-              <a:t>대기질</a:t>
-            </a:r>
-            <a:r>
-              <a:rPr lang="ko-KR" altLang="en-US" sz="1600" dirty="0"/>
-              <a:t> 개선 목표에 따라 </a:t>
-            </a:r>
-            <a:r>
-              <a:rPr lang="en-US" altLang="ko-KR" sz="1600" dirty="0"/>
-              <a:t>LNG </a:t>
-            </a:r>
-            <a:r>
-              <a:rPr lang="ko-KR" altLang="en-US" sz="1600" dirty="0"/>
-              <a:t>수입을 대폭 늘려</a:t>
-            </a:r>
-            <a:r>
-              <a:rPr lang="en-US" altLang="ko-KR" sz="1600" dirty="0"/>
-              <a:t>, 2021</a:t>
-            </a:r>
-            <a:r>
-              <a:rPr lang="ko-KR" altLang="en-US" sz="1600" dirty="0"/>
-              <a:t>년 처음으로 일본을 제치고 세계 최대 </a:t>
-            </a:r>
-            <a:r>
-              <a:rPr lang="en-US" altLang="ko-KR" sz="1600" dirty="0"/>
-              <a:t>LNG </a:t>
-            </a:r>
-            <a:r>
-              <a:rPr lang="ko-KR" altLang="en-US" sz="1600" dirty="0"/>
-              <a:t>수입국이 되었다</a:t>
-            </a:r>
-            <a:r>
-              <a:rPr lang="en-US" altLang="ko-KR" sz="1600" dirty="0"/>
-              <a:t>.</a:t>
-            </a:r>
-          </a:p>
-          <a:p>
-            <a:pPr marL="1292225" lvl="2" indent="-285750">
-              <a:lnSpc>
-                <a:spcPct val="150000"/>
-              </a:lnSpc>
-              <a:buFont typeface="Wingdings" panose="05000000000000000000" pitchFamily="2" charset="2"/>
-              <a:buChar char="Ø"/>
-            </a:pPr>
-            <a:r>
-              <a:rPr lang="ko-KR" altLang="en-US" sz="1600" dirty="0"/>
-              <a:t>인도와 한국 또한 수입량을 지속적으로 확대하고 있으며</a:t>
-            </a:r>
-            <a:r>
-              <a:rPr lang="en-US" altLang="ko-KR" sz="1600" dirty="0"/>
-              <a:t>, </a:t>
-            </a:r>
-            <a:r>
-              <a:rPr lang="ko-KR" altLang="en-US" sz="1600" dirty="0"/>
-              <a:t>아시아 전체는 현재 글로벌 </a:t>
-            </a:r>
-            <a:r>
-              <a:rPr lang="en-US" altLang="ko-KR" sz="1600" dirty="0"/>
-              <a:t>LNG </a:t>
-            </a:r>
-            <a:r>
-              <a:rPr lang="ko-KR" altLang="en-US" sz="1600" dirty="0"/>
-              <a:t>수입의 약 </a:t>
-            </a:r>
-            <a:r>
-              <a:rPr lang="en-US" altLang="ko-KR" sz="1600" dirty="0"/>
-              <a:t>70%</a:t>
-            </a:r>
-            <a:r>
-              <a:rPr lang="ko-KR" altLang="en-US" sz="1600" dirty="0"/>
-              <a:t>를 차지하고 있다</a:t>
-            </a:r>
-            <a:r>
-              <a:rPr lang="en-US" altLang="ko-KR" sz="1600" dirty="0"/>
-              <a:t>.</a:t>
-            </a:r>
-          </a:p>
-        </p:txBody>
-      </p:sp>
-    </p:spTree>
-    <p:extLst>
-      <p:ext uri="{BB962C8B-B14F-4D97-AF65-F5344CB8AC3E}">
-        <p14:creationId xmlns:p14="http://schemas.microsoft.com/office/powerpoint/2010/main" val="3435324664"/>
-      </p:ext>
-    </p:extLst>
-  </p:cSld>
-  <p:clrMapOvr>
-    <a:masterClrMapping/>
-  </p:clrMapOvr>
-</p:sld>
-</file>
-
-<file path=ppt/slides/slide31.xml><?xml version="1.0" encoding="utf-8"?>
-<p:sld xmlns:a="http://schemas.openxmlformats.org/drawingml/2006/main" xmlns:r="http://schemas.openxmlformats.org/officeDocument/2006/relationships" xmlns:p="http://schemas.openxmlformats.org/presentationml/2006/main">
-  <p:cSld>
-    <p:spTree>
-      <p:nvGrpSpPr>
-        <p:cNvPr id="1" name="">
-          <a:extLst>
-            <a:ext uri="{FF2B5EF4-FFF2-40B4-BE49-F238E27FC236}">
-              <a16:creationId xmlns:a16="http://schemas.microsoft.com/office/drawing/2014/main" id="{5FA8CD1B-9FA0-D50E-9F70-DB9EB64D9260}"/>
-            </a:ext>
-          </a:extLst>
-        </p:cNvPr>
-        <p:cNvGrpSpPr/>
-        <p:nvPr/>
-      </p:nvGrpSpPr>
-      <p:grpSpPr>
-        <a:xfrm>
-          <a:off x="0" y="0"/>
-          <a:ext cx="0" cy="0"/>
-          <a:chOff x="0" y="0"/>
-          <a:chExt cx="0" cy="0"/>
-        </a:xfrm>
-      </p:grpSpPr>
-      <p:sp>
-        <p:nvSpPr>
-          <p:cNvPr id="2" name="제목 1">
-            <a:extLst>
-              <a:ext uri="{FF2B5EF4-FFF2-40B4-BE49-F238E27FC236}">
-                <a16:creationId xmlns:a16="http://schemas.microsoft.com/office/drawing/2014/main" id="{79B34FB3-EDD9-C0E4-685A-3951CEB74506}"/>
-              </a:ext>
-            </a:extLst>
-          </p:cNvPr>
-          <p:cNvSpPr>
-            <a:spLocks noGrp="1"/>
-          </p:cNvSpPr>
-          <p:nvPr>
-            <p:ph type="title"/>
-          </p:nvPr>
-        </p:nvSpPr>
-        <p:spPr/>
-        <p:txBody>
-          <a:bodyPr/>
-          <a:lstStyle/>
-          <a:p>
-            <a:r>
-              <a:rPr lang="ko-KR" altLang="en-US" dirty="0"/>
-              <a:t>천연가스 소비</a:t>
-            </a:r>
-          </a:p>
-        </p:txBody>
-      </p:sp>
-      <p:sp>
-        <p:nvSpPr>
-          <p:cNvPr id="4" name="슬라이드 번호 개체 틀 3">
-            <a:extLst>
-              <a:ext uri="{FF2B5EF4-FFF2-40B4-BE49-F238E27FC236}">
-                <a16:creationId xmlns:a16="http://schemas.microsoft.com/office/drawing/2014/main" id="{248B2577-1AF3-CD0B-486F-C29A2495E75D}"/>
-              </a:ext>
-            </a:extLst>
-          </p:cNvPr>
-          <p:cNvSpPr>
-            <a:spLocks noGrp="1"/>
-          </p:cNvSpPr>
-          <p:nvPr>
-            <p:ph type="sldNum" sz="quarter" idx="12"/>
-          </p:nvPr>
-        </p:nvSpPr>
-        <p:spPr/>
-        <p:txBody>
-          <a:bodyPr/>
-          <a:lstStyle/>
-          <a:p>
-            <a:fld id="{109C872D-39A9-4065-8BF3-6A613116E2A1}" type="slidenum">
-              <a:rPr lang="ko-KR" altLang="en-US" smtClean="0"/>
-              <a:t>31</a:t>
-            </a:fld>
-            <a:endParaRPr lang="ko-KR" altLang="en-US"/>
-          </a:p>
-        </p:txBody>
-      </p:sp>
-      <p:sp>
-        <p:nvSpPr>
-          <p:cNvPr id="3" name="TextBox 2">
-            <a:extLst>
-              <a:ext uri="{FF2B5EF4-FFF2-40B4-BE49-F238E27FC236}">
-                <a16:creationId xmlns:a16="http://schemas.microsoft.com/office/drawing/2014/main" id="{FDD62BF2-D3B7-7B98-DDD0-10A5909F39DB}"/>
-              </a:ext>
-            </a:extLst>
-          </p:cNvPr>
-          <p:cNvSpPr txBox="1"/>
-          <p:nvPr/>
-        </p:nvSpPr>
-        <p:spPr>
-          <a:xfrm>
-            <a:off x="288790" y="958844"/>
-            <a:ext cx="11118453" cy="4846007"/>
-          </a:xfrm>
-          <a:prstGeom prst="rect">
-            <a:avLst/>
-          </a:prstGeom>
-          <a:noFill/>
-        </p:spPr>
-        <p:txBody>
-          <a:bodyPr wrap="square" rtlCol="0" anchor="t">
-            <a:spAutoFit/>
-          </a:bodyPr>
-          <a:lstStyle/>
-          <a:p>
-            <a:pPr marL="835025" lvl="1" indent="-285750">
-              <a:lnSpc>
-                <a:spcPct val="150000"/>
-              </a:lnSpc>
-              <a:buFont typeface="Wingdings" panose="05000000000000000000" pitchFamily="2" charset="2"/>
-              <a:buChar char="ü"/>
-            </a:pPr>
-            <a:r>
-              <a:rPr lang="ko-KR" altLang="en-US" sz="1600" dirty="0"/>
-              <a:t>유럽 역시 </a:t>
-            </a:r>
-            <a:r>
-              <a:rPr lang="en-US" altLang="ko-KR" sz="1600" dirty="0"/>
-              <a:t>LNG </a:t>
-            </a:r>
-            <a:r>
-              <a:rPr lang="ko-KR" altLang="en-US" sz="1600" dirty="0"/>
-              <a:t>수입 시장에서 중요한 변화를 보이고 있다</a:t>
-            </a:r>
-            <a:r>
-              <a:rPr lang="en-US" altLang="ko-KR" sz="1600" dirty="0"/>
-              <a:t>.</a:t>
-            </a:r>
-          </a:p>
-          <a:p>
-            <a:pPr marL="1292225" lvl="2" indent="-285750">
-              <a:lnSpc>
-                <a:spcPct val="150000"/>
-              </a:lnSpc>
-              <a:buFont typeface="Wingdings" panose="05000000000000000000" pitchFamily="2" charset="2"/>
-              <a:buChar char="Ø"/>
-            </a:pPr>
-            <a:r>
-              <a:rPr lang="ko-KR" altLang="en-US" sz="1600" dirty="0"/>
-              <a:t>과거 유럽은 러시아산 파이프라인 가스에 대한 높은 의존도를 보여왔지만</a:t>
-            </a:r>
-            <a:r>
-              <a:rPr lang="en-US" altLang="ko-KR" sz="1600" dirty="0"/>
-              <a:t>, 2022</a:t>
-            </a:r>
-            <a:r>
-              <a:rPr lang="ko-KR" altLang="en-US" sz="1600" dirty="0"/>
-              <a:t>년 </a:t>
-            </a:r>
-            <a:r>
-              <a:rPr lang="ko-KR" altLang="en-US" sz="1600" dirty="0" err="1"/>
-              <a:t>러이사</a:t>
-            </a:r>
-            <a:r>
-              <a:rPr lang="en-US" altLang="ko-KR" sz="1600" dirty="0"/>
-              <a:t>-</a:t>
-            </a:r>
-            <a:r>
-              <a:rPr lang="ko-KR" altLang="en-US" sz="1600" dirty="0"/>
-              <a:t>우크라이나 전쟁 이후 에너지 안보에 대한 우려가 급증하여 </a:t>
-            </a:r>
-            <a:r>
-              <a:rPr lang="en-US" altLang="ko-KR" sz="1600" dirty="0"/>
-              <a:t>LNG</a:t>
-            </a:r>
-            <a:r>
-              <a:rPr lang="ko-KR" altLang="en-US" sz="1600" dirty="0"/>
-              <a:t>수입을 전략적으로 확대하는 방향으로 전환하였다</a:t>
-            </a:r>
-            <a:r>
-              <a:rPr lang="en-US" altLang="ko-KR" sz="1600" dirty="0"/>
-              <a:t>.</a:t>
-            </a:r>
-          </a:p>
-          <a:p>
-            <a:pPr marL="1292225" lvl="2" indent="-285750">
-              <a:lnSpc>
-                <a:spcPct val="150000"/>
-              </a:lnSpc>
-              <a:buFont typeface="Wingdings" panose="05000000000000000000" pitchFamily="2" charset="2"/>
-              <a:buChar char="Ø"/>
-            </a:pPr>
-            <a:r>
-              <a:rPr lang="ko-KR" altLang="en-US" sz="1600" dirty="0"/>
-              <a:t>독일</a:t>
-            </a:r>
-            <a:r>
-              <a:rPr lang="en-US" altLang="ko-KR" sz="1600" dirty="0"/>
-              <a:t>, </a:t>
-            </a:r>
-            <a:r>
-              <a:rPr lang="ko-KR" altLang="en-US" sz="1600" dirty="0"/>
-              <a:t>폴란드</a:t>
-            </a:r>
-            <a:r>
-              <a:rPr lang="en-US" altLang="ko-KR" sz="1600" dirty="0"/>
-              <a:t>, </a:t>
-            </a:r>
-            <a:r>
-              <a:rPr lang="ko-KR" altLang="en-US" sz="1600" dirty="0"/>
-              <a:t>핀란드 등은 기존에 부재하던 </a:t>
-            </a:r>
-            <a:r>
-              <a:rPr lang="en-US" altLang="ko-KR" sz="1600" dirty="0"/>
-              <a:t>LNG </a:t>
-            </a:r>
-            <a:r>
-              <a:rPr lang="ko-KR" altLang="en-US" sz="1600" dirty="0"/>
-              <a:t>터미널을 신속히 구축하거나 기존 시설을 확장하였고</a:t>
-            </a:r>
-            <a:r>
-              <a:rPr lang="en-US" altLang="ko-KR" sz="1600" dirty="0"/>
-              <a:t>, </a:t>
-            </a:r>
-            <a:r>
-              <a:rPr lang="ko-KR" altLang="en-US" sz="1600" dirty="0"/>
-              <a:t>미국 및 카타르 등으로부터 장기 수입계약 체결을 통해 공급선 다변화를 적극 추진하고 있다</a:t>
-            </a:r>
-            <a:r>
-              <a:rPr lang="en-US" altLang="ko-KR" sz="1600" dirty="0"/>
-              <a:t>.</a:t>
-            </a:r>
-          </a:p>
-          <a:p>
-            <a:pPr marL="1292225" lvl="2" indent="-285750">
-              <a:lnSpc>
-                <a:spcPct val="150000"/>
-              </a:lnSpc>
-              <a:buFont typeface="Wingdings" panose="05000000000000000000" pitchFamily="2" charset="2"/>
-              <a:buChar char="Ø"/>
-            </a:pPr>
-            <a:r>
-              <a:rPr lang="ko-KR" altLang="en-US" sz="1600" dirty="0"/>
-              <a:t>그 결과 </a:t>
-            </a:r>
-            <a:r>
-              <a:rPr lang="en-US" altLang="ko-KR" sz="1600" dirty="0"/>
-              <a:t>2022-2023</a:t>
-            </a:r>
-            <a:r>
-              <a:rPr lang="ko-KR" altLang="en-US" sz="1600" dirty="0"/>
-              <a:t>년 사이 유럽의 </a:t>
-            </a:r>
-            <a:r>
-              <a:rPr lang="en-US" altLang="ko-KR" sz="1600" dirty="0"/>
-              <a:t>LNG </a:t>
-            </a:r>
-            <a:r>
-              <a:rPr lang="ko-KR" altLang="en-US" sz="1600" dirty="0"/>
-              <a:t>수입량은 전년 대비 약 </a:t>
-            </a:r>
-            <a:r>
-              <a:rPr lang="en-US" altLang="ko-KR" sz="1600" dirty="0"/>
-              <a:t>60% </a:t>
-            </a:r>
-            <a:r>
-              <a:rPr lang="ko-KR" altLang="en-US" sz="1600" dirty="0"/>
-              <a:t>증가하였으며</a:t>
-            </a:r>
-            <a:r>
-              <a:rPr lang="en-US" altLang="ko-KR" sz="1600" dirty="0"/>
-              <a:t>, </a:t>
-            </a:r>
-            <a:r>
-              <a:rPr lang="ko-KR" altLang="en-US" sz="1600" dirty="0"/>
-              <a:t>이는 글로벌 </a:t>
-            </a:r>
-            <a:r>
-              <a:rPr lang="en-US" altLang="ko-KR" sz="1600" dirty="0"/>
-              <a:t>LNG </a:t>
-            </a:r>
-            <a:r>
-              <a:rPr lang="ko-KR" altLang="en-US" sz="1600" dirty="0"/>
-              <a:t>수급 및 가격에 상당한 파급효과를 미쳤다</a:t>
-            </a:r>
-            <a:r>
-              <a:rPr lang="en-US" altLang="ko-KR" sz="1600" dirty="0"/>
-              <a:t>.</a:t>
-            </a:r>
-          </a:p>
-          <a:p>
-            <a:pPr marL="1292225" lvl="2" indent="-285750">
-              <a:lnSpc>
-                <a:spcPct val="150000"/>
-              </a:lnSpc>
-              <a:buFont typeface="Wingdings" panose="05000000000000000000" pitchFamily="2" charset="2"/>
-              <a:buChar char="Ø"/>
-            </a:pPr>
-            <a:endParaRPr lang="en-US" altLang="ko-KR" sz="1600" dirty="0"/>
-          </a:p>
-          <a:p>
-            <a:pPr marL="377825" indent="-285750">
-              <a:lnSpc>
-                <a:spcPct val="150000"/>
-              </a:lnSpc>
-              <a:buFont typeface="Arial" panose="020B0604020202020204" pitchFamily="34" charset="0"/>
-              <a:buChar char="•"/>
-            </a:pPr>
-            <a:r>
-              <a:rPr lang="ko-KR" altLang="en-US" sz="1600" dirty="0"/>
-              <a:t>글로벌 </a:t>
-            </a:r>
-            <a:r>
-              <a:rPr lang="en-US" altLang="ko-KR" sz="1600" dirty="0"/>
-              <a:t>LNG </a:t>
-            </a:r>
-            <a:r>
-              <a:rPr lang="ko-KR" altLang="en-US" sz="1600" dirty="0"/>
-              <a:t>시장은 계약 구조 측면에서도 중요한 변화를 경험하고 있다</a:t>
-            </a:r>
-            <a:r>
-              <a:rPr lang="en-US" altLang="ko-KR" sz="1600" dirty="0"/>
-              <a:t>.</a:t>
-            </a:r>
-          </a:p>
-          <a:p>
-            <a:pPr marL="835025" lvl="1" indent="-285750">
-              <a:lnSpc>
-                <a:spcPct val="150000"/>
-              </a:lnSpc>
-              <a:buFont typeface="Wingdings" panose="05000000000000000000" pitchFamily="2" charset="2"/>
-              <a:buChar char="ü"/>
-            </a:pPr>
-            <a:r>
-              <a:rPr lang="ko-KR" altLang="en-US" sz="1600" dirty="0"/>
-              <a:t>과거에는 </a:t>
-            </a:r>
-            <a:r>
-              <a:rPr lang="en-US" altLang="ko-KR" sz="1600" dirty="0"/>
-              <a:t>20</a:t>
-            </a:r>
-            <a:r>
-              <a:rPr lang="ko-KR" altLang="en-US" sz="1600" dirty="0"/>
-              <a:t>년 이상의 장기 고정가격 계약이 시장의 표준이었으나</a:t>
-            </a:r>
-            <a:r>
-              <a:rPr lang="en-US" altLang="ko-KR" sz="1600" dirty="0"/>
-              <a:t>, </a:t>
-            </a:r>
-            <a:r>
-              <a:rPr lang="ko-KR" altLang="en-US" sz="1600" dirty="0"/>
-              <a:t>최근에는 현물 시장 및 단기 계약의 비중이 늘고 있다</a:t>
-            </a:r>
-            <a:r>
-              <a:rPr lang="en-US" altLang="ko-KR" sz="1600" dirty="0"/>
-              <a:t>.</a:t>
-            </a:r>
-          </a:p>
-          <a:p>
-            <a:pPr marL="1292225" lvl="2" indent="-285750">
-              <a:lnSpc>
-                <a:spcPct val="150000"/>
-              </a:lnSpc>
-              <a:buFont typeface="Wingdings" panose="05000000000000000000" pitchFamily="2" charset="2"/>
-              <a:buChar char="Ø"/>
-            </a:pPr>
-            <a:r>
-              <a:rPr lang="ko-KR" altLang="en-US" sz="1600" dirty="0"/>
-              <a:t>이는 수요의 변동성 증가</a:t>
-            </a:r>
-            <a:r>
-              <a:rPr lang="en-US" altLang="ko-KR" sz="1600" dirty="0"/>
-              <a:t>, </a:t>
-            </a:r>
-            <a:r>
-              <a:rPr lang="ko-KR" altLang="en-US" sz="1600" dirty="0"/>
-              <a:t>시장 가격에 대한 민감성 강화</a:t>
-            </a:r>
-            <a:r>
-              <a:rPr lang="en-US" altLang="ko-KR" sz="1600" dirty="0"/>
-              <a:t>, </a:t>
-            </a:r>
-            <a:r>
-              <a:rPr lang="ko-KR" altLang="en-US" sz="1600" dirty="0"/>
-              <a:t>공급국 간 경쟁 심화 등과 같은 요인에 기인하며</a:t>
-            </a:r>
-            <a:r>
-              <a:rPr lang="en-US" altLang="ko-KR" sz="1600" dirty="0"/>
-              <a:t>, </a:t>
-            </a:r>
-            <a:r>
-              <a:rPr lang="ko-KR" altLang="en-US" sz="1600" dirty="0"/>
-              <a:t>결과적으로 </a:t>
-            </a:r>
-            <a:r>
-              <a:rPr lang="en-US" altLang="ko-KR" sz="1600" dirty="0"/>
-              <a:t>LNG </a:t>
-            </a:r>
-            <a:r>
-              <a:rPr lang="ko-KR" altLang="en-US" sz="1600" dirty="0"/>
-              <a:t>거래의 유연성과 시장 반응성을 높이는 방향으로 시장이 진화하고 있음을 의미한다</a:t>
-            </a:r>
-            <a:r>
-              <a:rPr lang="en-US" altLang="ko-KR" sz="1600" dirty="0"/>
-              <a:t>.</a:t>
-            </a:r>
-          </a:p>
-        </p:txBody>
-      </p:sp>
-    </p:spTree>
-    <p:extLst>
-      <p:ext uri="{BB962C8B-B14F-4D97-AF65-F5344CB8AC3E}">
-        <p14:creationId xmlns:p14="http://schemas.microsoft.com/office/powerpoint/2010/main" val="3139826916"/>
-      </p:ext>
-    </p:extLst>
-  </p:cSld>
-  <p:clrMapOvr>
-    <a:masterClrMapping/>
-  </p:clrMapOvr>
-</p:sld>
-</file>
-
-<file path=ppt/slides/slide32.xml><?xml version="1.0" encoding="utf-8"?>
-<p:sld xmlns:a="http://schemas.openxmlformats.org/drawingml/2006/main" xmlns:r="http://schemas.openxmlformats.org/officeDocument/2006/relationships" xmlns:p="http://schemas.openxmlformats.org/presentationml/2006/main">
-  <p:cSld>
-    <p:spTree>
-      <p:nvGrpSpPr>
-        <p:cNvPr id="1" name="">
-          <a:extLst>
-            <a:ext uri="{FF2B5EF4-FFF2-40B4-BE49-F238E27FC236}">
               <a16:creationId xmlns:a16="http://schemas.microsoft.com/office/drawing/2014/main" id="{04C58AE2-422F-6289-068D-E8103D8736E1}"/>
             </a:ext>
           </a:extLst>
@@ -32100,8 +31682,12 @@
           <a:lstStyle/>
           <a:p>
             <a:r>
+              <a:rPr lang="en-US" altLang="ko-KR" dirty="0"/>
+              <a:t>L N G</a:t>
+            </a:r>
+            <a:r>
               <a:rPr lang="ko-KR" altLang="en-US" dirty="0"/>
-              <a:t>천연가스 소비</a:t>
+              <a:t> 수입</a:t>
             </a:r>
           </a:p>
         </p:txBody>
@@ -32129,7 +31715,7 @@
           <a:p>
             <a:fld id="{109C872D-39A9-4065-8BF3-6A613116E2A1}" type="slidenum">
               <a:rPr lang="ko-KR" altLang="en-US" smtClean="0"/>
-              <a:t>32</a:t>
+              <a:t>30</a:t>
             </a:fld>
             <a:endParaRPr lang="ko-KR" altLang="en-US"/>
           </a:p>
@@ -32366,7 +31952,7 @@
         <p:spPr>
           <a:xfrm>
             <a:off x="7512785" y="3570199"/>
-            <a:ext cx="3225894" cy="253916"/>
+            <a:ext cx="3391328" cy="253916"/>
           </a:xfrm>
           <a:prstGeom prst="rect">
             <a:avLst/>
@@ -32386,7 +31972,15 @@
             </a:r>
             <a:r>
               <a:rPr lang="ko-KR" altLang="en-US" sz="1050" spc="-50" dirty="0"/>
-              <a:t>주요 국가의 천연가스 수입량  </a:t>
+              <a:t>주요 국가의 천연가스</a:t>
+            </a:r>
+            <a:r>
+              <a:rPr lang="en-US" altLang="ko-KR" sz="1050" spc="-50" dirty="0"/>
+              <a:t>(LNG)</a:t>
+            </a:r>
+            <a:r>
+              <a:rPr lang="ko-KR" altLang="en-US" sz="1050" spc="-50" dirty="0"/>
+              <a:t> 수입량  </a:t>
             </a:r>
             <a:r>
               <a:rPr lang="en-US" altLang="ko-KR" sz="1050" spc="-50" dirty="0"/>
@@ -32601,7 +32195,7 @@
 </p:sld>
 </file>
 
-<file path=ppt/slides/slide33.xml><?xml version="1.0" encoding="utf-8"?>
+<file path=ppt/slides/slide31.xml><?xml version="1.0" encoding="utf-8"?>
 <p:sld xmlns:a="http://schemas.openxmlformats.org/drawingml/2006/main" xmlns:r="http://schemas.openxmlformats.org/officeDocument/2006/relationships" xmlns:p="http://schemas.openxmlformats.org/presentationml/2006/main">
   <p:cSld>
     <p:spTree>
@@ -32646,8 +32240,12 @@
           <a:lstStyle/>
           <a:p>
             <a:r>
+              <a:rPr lang="en-US" altLang="ko-KR" dirty="0"/>
+              <a:t>L N G</a:t>
+            </a:r>
+            <a:r>
               <a:rPr lang="ko-KR" altLang="en-US" dirty="0"/>
-              <a:t>천연가스 소비</a:t>
+              <a:t> 수출</a:t>
             </a:r>
           </a:p>
         </p:txBody>
@@ -32675,7 +32273,7 @@
           <a:p>
             <a:fld id="{109C872D-39A9-4065-8BF3-6A613116E2A1}" type="slidenum">
               <a:rPr lang="ko-KR" altLang="en-US" smtClean="0"/>
-              <a:t>33</a:t>
+              <a:t>31</a:t>
             </a:fld>
             <a:endParaRPr lang="ko-KR" altLang="en-US"/>
           </a:p>
@@ -33062,7 +32660,7 @@
 </p:sld>
 </file>
 
-<file path=ppt/slides/slide34.xml><?xml version="1.0" encoding="utf-8"?>
+<file path=ppt/slides/slide32.xml><?xml version="1.0" encoding="utf-8"?>
 <p:sld xmlns:a="http://schemas.openxmlformats.org/drawingml/2006/main" xmlns:r="http://schemas.openxmlformats.org/officeDocument/2006/relationships" xmlns:p="http://schemas.openxmlformats.org/presentationml/2006/main">
   <p:cSld>
     <p:spTree>
@@ -33107,8 +32705,12 @@
           <a:lstStyle/>
           <a:p>
             <a:r>
+              <a:rPr lang="en-US" altLang="ko-KR" dirty="0"/>
+              <a:t>L N G</a:t>
+            </a:r>
+            <a:r>
               <a:rPr lang="ko-KR" altLang="en-US" dirty="0"/>
-              <a:t>천연가스 소비</a:t>
+              <a:t> 수출</a:t>
             </a:r>
           </a:p>
         </p:txBody>
@@ -33136,7 +32738,7 @@
           <a:p>
             <a:fld id="{109C872D-39A9-4065-8BF3-6A613116E2A1}" type="slidenum">
               <a:rPr lang="ko-KR" altLang="en-US" smtClean="0"/>
-              <a:t>34</a:t>
+              <a:t>32</a:t>
             </a:fld>
             <a:endParaRPr lang="ko-KR" altLang="en-US"/>
           </a:p>
@@ -33200,7 +32802,7 @@
             </a:pPr>
             <a:r>
               <a:rPr lang="ko-KR" altLang="en-US" sz="1600" dirty="0"/>
-              <a:t>일부 국가는 여전히 장기 고정계약에 의존하고 있으며</a:t>
+              <a:t>일부 국가는 여전히 장기 공급계약에 의존하고 있으며</a:t>
             </a:r>
             <a:r>
               <a:rPr lang="en-US" altLang="ko-KR" sz="1600" dirty="0"/>
@@ -33506,7 +33108,7 @@
 </p:sld>
 </file>
 
-<file path=ppt/slides/slide35.xml><?xml version="1.0" encoding="utf-8"?>
+<file path=ppt/slides/slide33.xml><?xml version="1.0" encoding="utf-8"?>
 <p:sld xmlns:a="http://schemas.openxmlformats.org/drawingml/2006/main" xmlns:r="http://schemas.openxmlformats.org/officeDocument/2006/relationships" xmlns:p="http://schemas.openxmlformats.org/presentationml/2006/main">
   <p:cSld>
     <p:spTree>
@@ -33551,8 +33153,12 @@
           <a:lstStyle/>
           <a:p>
             <a:r>
+              <a:rPr lang="en-US" altLang="ko-KR" dirty="0"/>
+              <a:t>L N G</a:t>
+            </a:r>
+            <a:r>
               <a:rPr lang="ko-KR" altLang="en-US" dirty="0"/>
-              <a:t>천연가스 소비</a:t>
+              <a:t> 수출</a:t>
             </a:r>
           </a:p>
         </p:txBody>
@@ -33580,7 +33186,7 @@
           <a:p>
             <a:fld id="{109C872D-39A9-4065-8BF3-6A613116E2A1}" type="slidenum">
               <a:rPr lang="ko-KR" altLang="en-US" smtClean="0"/>
-              <a:t>35</a:t>
+              <a:t>33</a:t>
             </a:fld>
             <a:endParaRPr lang="ko-KR" altLang="en-US"/>
           </a:p>
@@ -33971,7 +33577,7 @@
 </p:sld>
 </file>
 
-<file path=ppt/slides/slide36.xml><?xml version="1.0" encoding="utf-8"?>
+<file path=ppt/slides/slide34.xml><?xml version="1.0" encoding="utf-8"?>
 <p:sld xmlns:a="http://schemas.openxmlformats.org/drawingml/2006/main" xmlns:r="http://schemas.openxmlformats.org/officeDocument/2006/relationships" xmlns:p="http://schemas.openxmlformats.org/presentationml/2006/main">
   <p:cSld>
     <p:spTree>
@@ -34016,8 +33622,12 @@
           <a:lstStyle/>
           <a:p>
             <a:r>
+              <a:rPr lang="en-US" altLang="ko-KR" dirty="0"/>
+              <a:t>L N G</a:t>
+            </a:r>
+            <a:r>
               <a:rPr lang="ko-KR" altLang="en-US" dirty="0"/>
-              <a:t>천연가스 소비</a:t>
+              <a:t> 수출</a:t>
             </a:r>
           </a:p>
         </p:txBody>
@@ -34045,7 +33655,7 @@
           <a:p>
             <a:fld id="{109C872D-39A9-4065-8BF3-6A613116E2A1}" type="slidenum">
               <a:rPr lang="ko-KR" altLang="en-US" smtClean="0"/>
-              <a:t>36</a:t>
+              <a:t>34</a:t>
             </a:fld>
             <a:endParaRPr lang="ko-KR" altLang="en-US"/>
           </a:p>
@@ -34148,7 +33758,7 @@
             </a:r>
             <a:r>
               <a:rPr lang="en-US" altLang="ko-KR" sz="1600" dirty="0"/>
-              <a:t>.</a:t>
+              <a:t>. </a:t>
             </a:r>
           </a:p>
         </p:txBody>
@@ -34184,11 +33794,11 @@
             <a:pPr algn="ctr"/>
             <a:r>
               <a:rPr lang="en-US" altLang="ko-KR" sz="1050" spc="-50" dirty="0"/>
-              <a:t>&lt; </a:t>
+              <a:t>&lt; 2023</a:t>
             </a:r>
             <a:r>
               <a:rPr lang="ko-KR" altLang="en-US" sz="1050" spc="-50" dirty="0"/>
-              <a:t>미국의 주요 </a:t>
+              <a:t>년 미국의 주요 </a:t>
             </a:r>
             <a:r>
               <a:rPr lang="en-US" altLang="ko-KR" sz="1050" spc="-50" dirty="0"/>
@@ -34294,8 +33904,8 @@
         </p:nvSpPr>
         <p:spPr>
           <a:xfrm>
-            <a:off x="7804333" y="3801247"/>
-            <a:ext cx="3225894" cy="253916"/>
+            <a:off x="7737264" y="3801247"/>
+            <a:ext cx="3360032" cy="253916"/>
           </a:xfrm>
           <a:prstGeom prst="rect">
             <a:avLst/>
@@ -34311,11 +33921,11 @@
             <a:pPr algn="ctr"/>
             <a:r>
               <a:rPr lang="en-US" altLang="ko-KR" sz="1050" spc="-50" dirty="0"/>
-              <a:t>&lt; </a:t>
+              <a:t>&lt; 2023</a:t>
             </a:r>
             <a:r>
               <a:rPr lang="ko-KR" altLang="en-US" sz="1050" spc="-50" dirty="0"/>
-              <a:t>러시아의 주요 </a:t>
+              <a:t>년 러시아의 주요 </a:t>
             </a:r>
             <a:r>
               <a:rPr lang="en-US" altLang="ko-KR" sz="1050" spc="-50" dirty="0"/>
@@ -34398,15 +34008,7 @@
             </a:r>
             <a:r>
               <a:rPr lang="ko-KR" altLang="en-US" sz="1600" dirty="0"/>
-              <a:t>유럽의 비중은 </a:t>
-            </a:r>
-            <a:r>
-              <a:rPr lang="ko-KR" altLang="en-US" sz="1600" dirty="0" err="1"/>
-              <a:t>스페과</a:t>
-            </a:r>
-            <a:r>
-              <a:rPr lang="ko-KR" altLang="en-US" sz="1600" dirty="0"/>
-              <a:t> 프랑스를 중심으로 </a:t>
+              <a:t>유럽의 비중은 스페인과 프랑스를 중심으로 </a:t>
             </a:r>
             <a:r>
               <a:rPr lang="en-US" altLang="ko-KR" sz="1600" dirty="0"/>
@@ -34436,7 +34038,7 @@
 </p:sld>
 </file>
 
-<file path=ppt/slides/slide37.xml><?xml version="1.0" encoding="utf-8"?>
+<file path=ppt/slides/slide35.xml><?xml version="1.0" encoding="utf-8"?>
 <p:sld xmlns:a="http://schemas.openxmlformats.org/drawingml/2006/main" xmlns:r="http://schemas.openxmlformats.org/officeDocument/2006/relationships" xmlns:p="http://schemas.openxmlformats.org/presentationml/2006/main">
   <p:cSld>
     <p:spTree>
@@ -34459,357 +34061,6 @@
           <a:chExt cx="0" cy="0"/>
         </a:xfrm>
       </p:grpSpPr>
-      <p:sp>
-        <p:nvSpPr>
-          <p:cNvPr id="2" name="제목 1">
-            <a:extLst>
-              <a:ext uri="{FF2B5EF4-FFF2-40B4-BE49-F238E27FC236}">
-                <a16:creationId xmlns:a16="http://schemas.microsoft.com/office/drawing/2014/main" id="{B4180EAA-1F75-2CC2-7AC5-7D66B52C37D4}"/>
-              </a:ext>
-            </a:extLst>
-          </p:cNvPr>
-          <p:cNvSpPr>
-            <a:spLocks noGrp="1"/>
-          </p:cNvSpPr>
-          <p:nvPr>
-            <p:ph type="title"/>
-          </p:nvPr>
-        </p:nvSpPr>
-        <p:spPr/>
-        <p:txBody>
-          <a:bodyPr/>
-          <a:lstStyle/>
-          <a:p>
-            <a:r>
-              <a:rPr lang="ko-KR" altLang="en-US" dirty="0"/>
-              <a:t>천연가스 소비</a:t>
-            </a:r>
-          </a:p>
-        </p:txBody>
-      </p:sp>
-      <p:sp>
-        <p:nvSpPr>
-          <p:cNvPr id="4" name="슬라이드 번호 개체 틀 3">
-            <a:extLst>
-              <a:ext uri="{FF2B5EF4-FFF2-40B4-BE49-F238E27FC236}">
-                <a16:creationId xmlns:a16="http://schemas.microsoft.com/office/drawing/2014/main" id="{B86BB38D-7453-D5CB-9E95-0A9369626776}"/>
-              </a:ext>
-            </a:extLst>
-          </p:cNvPr>
-          <p:cNvSpPr>
-            <a:spLocks noGrp="1"/>
-          </p:cNvSpPr>
-          <p:nvPr>
-            <p:ph type="sldNum" sz="quarter" idx="12"/>
-          </p:nvPr>
-        </p:nvSpPr>
-        <p:spPr/>
-        <p:txBody>
-          <a:bodyPr/>
-          <a:lstStyle/>
-          <a:p>
-            <a:fld id="{109C872D-39A9-4065-8BF3-6A613116E2A1}" type="slidenum">
-              <a:rPr lang="ko-KR" altLang="en-US" smtClean="0"/>
-              <a:t>37</a:t>
-            </a:fld>
-            <a:endParaRPr lang="ko-KR" altLang="en-US"/>
-          </a:p>
-        </p:txBody>
-      </p:sp>
-      <p:sp>
-        <p:nvSpPr>
-          <p:cNvPr id="3" name="TextBox 2">
-            <a:extLst>
-              <a:ext uri="{FF2B5EF4-FFF2-40B4-BE49-F238E27FC236}">
-                <a16:creationId xmlns:a16="http://schemas.microsoft.com/office/drawing/2014/main" id="{B7037CD8-F2C2-1C14-8620-845FE3DEFA61}"/>
-              </a:ext>
-            </a:extLst>
-          </p:cNvPr>
-          <p:cNvSpPr txBox="1"/>
-          <p:nvPr/>
-        </p:nvSpPr>
-        <p:spPr>
-          <a:xfrm>
-            <a:off x="288790" y="958844"/>
-            <a:ext cx="6001575" cy="1152688"/>
-          </a:xfrm>
-          <a:prstGeom prst="rect">
-            <a:avLst/>
-          </a:prstGeom>
-          <a:noFill/>
-        </p:spPr>
-        <p:txBody>
-          <a:bodyPr wrap="square" rtlCol="0" anchor="t">
-            <a:spAutoFit/>
-          </a:bodyPr>
-          <a:lstStyle/>
-          <a:p>
-            <a:pPr marL="377825" indent="-285750">
-              <a:lnSpc>
-                <a:spcPct val="150000"/>
-              </a:lnSpc>
-              <a:buFont typeface="Arial" panose="020B0604020202020204" pitchFamily="34" charset="0"/>
-              <a:buChar char="•"/>
-            </a:pPr>
-            <a:r>
-              <a:rPr lang="ko-KR" altLang="en-US" sz="1600" dirty="0"/>
-              <a:t>카타르는 중국</a:t>
-            </a:r>
-            <a:r>
-              <a:rPr lang="en-US" altLang="ko-KR" sz="1600" dirty="0"/>
-              <a:t>, </a:t>
-            </a:r>
-            <a:r>
-              <a:rPr lang="ko-KR" altLang="en-US" sz="1600" dirty="0"/>
-              <a:t>인도</a:t>
-            </a:r>
-            <a:r>
-              <a:rPr lang="en-US" altLang="ko-KR" sz="1600" dirty="0"/>
-              <a:t>, </a:t>
-            </a:r>
-            <a:r>
-              <a:rPr lang="ko-KR" altLang="en-US" sz="1600" dirty="0"/>
-              <a:t>한국을 포함한 아시아 지역으로의 수출이 전체 수출량의 </a:t>
-            </a:r>
-            <a:r>
-              <a:rPr lang="en-US" altLang="ko-KR" sz="1600" dirty="0"/>
-              <a:t>75%</a:t>
-            </a:r>
-            <a:r>
-              <a:rPr lang="ko-KR" altLang="en-US" sz="1600" dirty="0"/>
-              <a:t>를 차지하고 있고</a:t>
-            </a:r>
-            <a:r>
-              <a:rPr lang="en-US" altLang="ko-KR" sz="1600" dirty="0"/>
-              <a:t>, </a:t>
-            </a:r>
-            <a:r>
-              <a:rPr lang="ko-KR" altLang="en-US" sz="1600" dirty="0"/>
-              <a:t>이태리</a:t>
-            </a:r>
-            <a:r>
-              <a:rPr lang="en-US" altLang="ko-KR" sz="1600" dirty="0"/>
-              <a:t>, </a:t>
-            </a:r>
-            <a:r>
-              <a:rPr lang="ko-KR" altLang="en-US" sz="1600" dirty="0"/>
-              <a:t>벨기에를 포함한 유럽지역에 </a:t>
-            </a:r>
-            <a:r>
-              <a:rPr lang="en-US" altLang="ko-KR" sz="1600" dirty="0"/>
-              <a:t>19.2%</a:t>
-            </a:r>
-            <a:r>
-              <a:rPr lang="ko-KR" altLang="en-US" sz="1600" dirty="0"/>
-              <a:t>를 수출하고 있다</a:t>
-            </a:r>
-            <a:r>
-              <a:rPr lang="en-US" altLang="ko-KR" sz="1600" dirty="0"/>
-              <a:t>.</a:t>
-            </a:r>
-          </a:p>
-        </p:txBody>
-      </p:sp>
-      <p:sp>
-        <p:nvSpPr>
-          <p:cNvPr id="6" name="TextBox 5">
-            <a:extLst>
-              <a:ext uri="{FF2B5EF4-FFF2-40B4-BE49-F238E27FC236}">
-                <a16:creationId xmlns:a16="http://schemas.microsoft.com/office/drawing/2014/main" id="{0B4AF9A2-A3FF-E0DE-3030-464CCCE19A94}"/>
-              </a:ext>
-            </a:extLst>
-          </p:cNvPr>
-          <p:cNvSpPr txBox="1"/>
-          <p:nvPr/>
-        </p:nvSpPr>
-        <p:spPr>
-          <a:xfrm>
-            <a:off x="7804333" y="794349"/>
-            <a:ext cx="3225894" cy="253916"/>
-          </a:xfrm>
-          <a:prstGeom prst="rect">
-            <a:avLst/>
-          </a:prstGeom>
-          <a:noFill/>
-        </p:spPr>
-        <p:txBody>
-          <a:bodyPr wrap="square">
-            <a:spAutoFit/>
-          </a:bodyPr>
-          <a:lstStyle/>
-          <a:p>
-            <a:pPr algn="ctr"/>
-            <a:r>
-              <a:rPr lang="en-US" altLang="ko-KR" sz="1050" spc="-50" dirty="0"/>
-              <a:t>&lt; </a:t>
-            </a:r>
-            <a:r>
-              <a:rPr lang="ko-KR" altLang="en-US" sz="1050" spc="-50" dirty="0"/>
-              <a:t>카타르의 주요 </a:t>
-            </a:r>
-            <a:r>
-              <a:rPr lang="en-US" altLang="ko-KR" sz="1050" spc="-50" dirty="0"/>
-              <a:t>LNG </a:t>
-            </a:r>
-            <a:r>
-              <a:rPr lang="ko-KR" altLang="en-US" sz="1050" spc="-50" dirty="0"/>
-              <a:t>수출국 </a:t>
-            </a:r>
-            <a:r>
-              <a:rPr lang="en-US" altLang="ko-KR" sz="1050" spc="-50" dirty="0"/>
-              <a:t>(10</a:t>
-            </a:r>
-            <a:r>
-              <a:rPr lang="ko-KR" altLang="en-US" sz="1050" spc="-50" dirty="0"/>
-              <a:t>억 </a:t>
-            </a:r>
-            <a:r>
-              <a:rPr lang="ko-KR" altLang="en-US" sz="1050" spc="-50" dirty="0" err="1"/>
-              <a:t>입방미터</a:t>
-            </a:r>
-            <a:r>
-              <a:rPr lang="en-US" altLang="ko-KR" sz="1050" spc="-50" dirty="0"/>
-              <a:t>) &gt;</a:t>
-            </a:r>
-            <a:endParaRPr lang="ko-KR" altLang="en-US" sz="1050" dirty="0"/>
-          </a:p>
-        </p:txBody>
-      </p:sp>
-      <p:sp>
-        <p:nvSpPr>
-          <p:cNvPr id="10" name="TextBox 9">
-            <a:extLst>
-              <a:ext uri="{FF2B5EF4-FFF2-40B4-BE49-F238E27FC236}">
-                <a16:creationId xmlns:a16="http://schemas.microsoft.com/office/drawing/2014/main" id="{324BFEC3-9C90-5CAE-EF5C-526EF1AB47F6}"/>
-              </a:ext>
-            </a:extLst>
-          </p:cNvPr>
-          <p:cNvSpPr txBox="1"/>
-          <p:nvPr/>
-        </p:nvSpPr>
-        <p:spPr>
-          <a:xfrm>
-            <a:off x="7804333" y="3801247"/>
-            <a:ext cx="3225894" cy="253916"/>
-          </a:xfrm>
-          <a:prstGeom prst="rect">
-            <a:avLst/>
-          </a:prstGeom>
-          <a:noFill/>
-        </p:spPr>
-        <p:txBody>
-          <a:bodyPr wrap="square">
-            <a:spAutoFit/>
-          </a:bodyPr>
-          <a:lstStyle/>
-          <a:p>
-            <a:pPr algn="ctr"/>
-            <a:r>
-              <a:rPr lang="en-US" altLang="ko-KR" sz="1050" spc="-50" dirty="0"/>
-              <a:t>&lt; </a:t>
-            </a:r>
-            <a:r>
-              <a:rPr lang="ko-KR" altLang="en-US" sz="1050" spc="-50" dirty="0"/>
-              <a:t>호주의 주요 </a:t>
-            </a:r>
-            <a:r>
-              <a:rPr lang="en-US" altLang="ko-KR" sz="1050" spc="-50" dirty="0"/>
-              <a:t>LNG </a:t>
-            </a:r>
-            <a:r>
-              <a:rPr lang="ko-KR" altLang="en-US" sz="1050" spc="-50" dirty="0"/>
-              <a:t>수출국 </a:t>
-            </a:r>
-            <a:r>
-              <a:rPr lang="en-US" altLang="ko-KR" sz="1050" spc="-50" dirty="0"/>
-              <a:t>(10</a:t>
-            </a:r>
-            <a:r>
-              <a:rPr lang="ko-KR" altLang="en-US" sz="1050" spc="-50" dirty="0"/>
-              <a:t>억 </a:t>
-            </a:r>
-            <a:r>
-              <a:rPr lang="ko-KR" altLang="en-US" sz="1050" spc="-50" dirty="0" err="1"/>
-              <a:t>입방미터</a:t>
-            </a:r>
-            <a:r>
-              <a:rPr lang="en-US" altLang="ko-KR" sz="1050" spc="-50" dirty="0"/>
-              <a:t>) &gt;</a:t>
-            </a:r>
-            <a:endParaRPr lang="ko-KR" altLang="en-US" sz="1050" dirty="0"/>
-          </a:p>
-        </p:txBody>
-      </p:sp>
-      <p:sp>
-        <p:nvSpPr>
-          <p:cNvPr id="11" name="TextBox 10">
-            <a:extLst>
-              <a:ext uri="{FF2B5EF4-FFF2-40B4-BE49-F238E27FC236}">
-                <a16:creationId xmlns:a16="http://schemas.microsoft.com/office/drawing/2014/main" id="{EA5DB801-04CD-D02A-E416-136AA9DB095F}"/>
-              </a:ext>
-            </a:extLst>
-          </p:cNvPr>
-          <p:cNvSpPr txBox="1"/>
-          <p:nvPr/>
-        </p:nvSpPr>
-        <p:spPr>
-          <a:xfrm>
-            <a:off x="288790" y="3928205"/>
-            <a:ext cx="6001575" cy="783356"/>
-          </a:xfrm>
-          <a:prstGeom prst="rect">
-            <a:avLst/>
-          </a:prstGeom>
-          <a:noFill/>
-        </p:spPr>
-        <p:txBody>
-          <a:bodyPr wrap="square" rtlCol="0" anchor="t">
-            <a:spAutoFit/>
-          </a:bodyPr>
-          <a:lstStyle/>
-          <a:p>
-            <a:pPr marL="377825" indent="-285750">
-              <a:lnSpc>
-                <a:spcPct val="150000"/>
-              </a:lnSpc>
-              <a:buFont typeface="Arial" panose="020B0604020202020204" pitchFamily="34" charset="0"/>
-              <a:buChar char="•"/>
-            </a:pPr>
-            <a:r>
-              <a:rPr lang="ko-KR" altLang="en-US" sz="1600" dirty="0"/>
-              <a:t>호주의 경우 수출 전량이 아시아 지역으로 향하고 있으며</a:t>
-            </a:r>
-            <a:r>
-              <a:rPr lang="en-US" altLang="ko-KR" sz="1600" dirty="0"/>
-              <a:t>, </a:t>
-            </a:r>
-            <a:r>
-              <a:rPr lang="ko-KR" altLang="en-US" sz="1600" dirty="0"/>
-              <a:t>일본</a:t>
-            </a:r>
-            <a:r>
-              <a:rPr lang="en-US" altLang="ko-KR" sz="1600" dirty="0"/>
-              <a:t>, </a:t>
-            </a:r>
-            <a:r>
-              <a:rPr lang="ko-KR" altLang="en-US" sz="1600" dirty="0"/>
-              <a:t>중국</a:t>
-            </a:r>
-            <a:r>
-              <a:rPr lang="en-US" altLang="ko-KR" sz="1600" dirty="0"/>
-              <a:t>, </a:t>
-            </a:r>
-            <a:r>
-              <a:rPr lang="ko-KR" altLang="en-US" sz="1600" dirty="0"/>
-              <a:t>한국 순으로 수출량이 많다</a:t>
-            </a:r>
-            <a:r>
-              <a:rPr lang="en-US" altLang="ko-KR" sz="1600" dirty="0"/>
-              <a:t>.</a:t>
-            </a:r>
-          </a:p>
-        </p:txBody>
-      </p:sp>
       <p:pic>
         <p:nvPicPr>
           <p:cNvPr id="5" name="그림 4">
@@ -34841,6 +34092,361 @@
           </a:prstGeom>
         </p:spPr>
       </p:pic>
+      <p:sp>
+        <p:nvSpPr>
+          <p:cNvPr id="2" name="제목 1">
+            <a:extLst>
+              <a:ext uri="{FF2B5EF4-FFF2-40B4-BE49-F238E27FC236}">
+                <a16:creationId xmlns:a16="http://schemas.microsoft.com/office/drawing/2014/main" id="{B4180EAA-1F75-2CC2-7AC5-7D66B52C37D4}"/>
+              </a:ext>
+            </a:extLst>
+          </p:cNvPr>
+          <p:cNvSpPr>
+            <a:spLocks noGrp="1"/>
+          </p:cNvSpPr>
+          <p:nvPr>
+            <p:ph type="title"/>
+          </p:nvPr>
+        </p:nvSpPr>
+        <p:spPr/>
+        <p:txBody>
+          <a:bodyPr/>
+          <a:lstStyle/>
+          <a:p>
+            <a:r>
+              <a:rPr lang="en-US" altLang="ko-KR" dirty="0"/>
+              <a:t>L N G</a:t>
+            </a:r>
+            <a:r>
+              <a:rPr lang="ko-KR" altLang="en-US" dirty="0"/>
+              <a:t> 소비</a:t>
+            </a:r>
+          </a:p>
+        </p:txBody>
+      </p:sp>
+      <p:sp>
+        <p:nvSpPr>
+          <p:cNvPr id="4" name="슬라이드 번호 개체 틀 3">
+            <a:extLst>
+              <a:ext uri="{FF2B5EF4-FFF2-40B4-BE49-F238E27FC236}">
+                <a16:creationId xmlns:a16="http://schemas.microsoft.com/office/drawing/2014/main" id="{B86BB38D-7453-D5CB-9E95-0A9369626776}"/>
+              </a:ext>
+            </a:extLst>
+          </p:cNvPr>
+          <p:cNvSpPr>
+            <a:spLocks noGrp="1"/>
+          </p:cNvSpPr>
+          <p:nvPr>
+            <p:ph type="sldNum" sz="quarter" idx="12"/>
+          </p:nvPr>
+        </p:nvSpPr>
+        <p:spPr/>
+        <p:txBody>
+          <a:bodyPr/>
+          <a:lstStyle/>
+          <a:p>
+            <a:fld id="{109C872D-39A9-4065-8BF3-6A613116E2A1}" type="slidenum">
+              <a:rPr lang="ko-KR" altLang="en-US" smtClean="0"/>
+              <a:t>35</a:t>
+            </a:fld>
+            <a:endParaRPr lang="ko-KR" altLang="en-US"/>
+          </a:p>
+        </p:txBody>
+      </p:sp>
+      <p:sp>
+        <p:nvSpPr>
+          <p:cNvPr id="3" name="TextBox 2">
+            <a:extLst>
+              <a:ext uri="{FF2B5EF4-FFF2-40B4-BE49-F238E27FC236}">
+                <a16:creationId xmlns:a16="http://schemas.microsoft.com/office/drawing/2014/main" id="{B7037CD8-F2C2-1C14-8620-845FE3DEFA61}"/>
+              </a:ext>
+            </a:extLst>
+          </p:cNvPr>
+          <p:cNvSpPr txBox="1"/>
+          <p:nvPr/>
+        </p:nvSpPr>
+        <p:spPr>
+          <a:xfrm>
+            <a:off x="288790" y="958844"/>
+            <a:ext cx="6001575" cy="1152688"/>
+          </a:xfrm>
+          <a:prstGeom prst="rect">
+            <a:avLst/>
+          </a:prstGeom>
+          <a:noFill/>
+        </p:spPr>
+        <p:txBody>
+          <a:bodyPr wrap="square" rtlCol="0" anchor="t">
+            <a:spAutoFit/>
+          </a:bodyPr>
+          <a:lstStyle/>
+          <a:p>
+            <a:pPr marL="377825" indent="-285750">
+              <a:lnSpc>
+                <a:spcPct val="150000"/>
+              </a:lnSpc>
+              <a:buFont typeface="Arial" panose="020B0604020202020204" pitchFamily="34" charset="0"/>
+              <a:buChar char="•"/>
+            </a:pPr>
+            <a:r>
+              <a:rPr lang="ko-KR" altLang="en-US" sz="1600" dirty="0"/>
+              <a:t>카타르는 중국</a:t>
+            </a:r>
+            <a:r>
+              <a:rPr lang="en-US" altLang="ko-KR" sz="1600" dirty="0"/>
+              <a:t>, </a:t>
+            </a:r>
+            <a:r>
+              <a:rPr lang="ko-KR" altLang="en-US" sz="1600" dirty="0"/>
+              <a:t>인도</a:t>
+            </a:r>
+            <a:r>
+              <a:rPr lang="en-US" altLang="ko-KR" sz="1600" dirty="0"/>
+              <a:t>, </a:t>
+            </a:r>
+            <a:r>
+              <a:rPr lang="ko-KR" altLang="en-US" sz="1600" dirty="0"/>
+              <a:t>한국을 포함한 아시아 지역으로의 수출이 전체 수출량의 </a:t>
+            </a:r>
+            <a:r>
+              <a:rPr lang="en-US" altLang="ko-KR" sz="1600" dirty="0"/>
+              <a:t>75%</a:t>
+            </a:r>
+            <a:r>
+              <a:rPr lang="ko-KR" altLang="en-US" sz="1600" dirty="0"/>
+              <a:t>를 차지하고 있고</a:t>
+            </a:r>
+            <a:r>
+              <a:rPr lang="en-US" altLang="ko-KR" sz="1600" dirty="0"/>
+              <a:t>, </a:t>
+            </a:r>
+            <a:r>
+              <a:rPr lang="ko-KR" altLang="en-US" sz="1600" dirty="0"/>
+              <a:t>이태리</a:t>
+            </a:r>
+            <a:r>
+              <a:rPr lang="en-US" altLang="ko-KR" sz="1600" dirty="0"/>
+              <a:t>, </a:t>
+            </a:r>
+            <a:r>
+              <a:rPr lang="ko-KR" altLang="en-US" sz="1600" dirty="0"/>
+              <a:t>벨기에를 포함한 유럽지역에 </a:t>
+            </a:r>
+            <a:r>
+              <a:rPr lang="en-US" altLang="ko-KR" sz="1600" dirty="0"/>
+              <a:t>19.2%</a:t>
+            </a:r>
+            <a:r>
+              <a:rPr lang="ko-KR" altLang="en-US" sz="1600" dirty="0"/>
+              <a:t>를 수출하고 있다</a:t>
+            </a:r>
+            <a:r>
+              <a:rPr lang="en-US" altLang="ko-KR" sz="1600" dirty="0"/>
+              <a:t>.</a:t>
+            </a:r>
+          </a:p>
+        </p:txBody>
+      </p:sp>
+      <p:sp>
+        <p:nvSpPr>
+          <p:cNvPr id="6" name="TextBox 5">
+            <a:extLst>
+              <a:ext uri="{FF2B5EF4-FFF2-40B4-BE49-F238E27FC236}">
+                <a16:creationId xmlns:a16="http://schemas.microsoft.com/office/drawing/2014/main" id="{0B4AF9A2-A3FF-E0DE-3030-464CCCE19A94}"/>
+              </a:ext>
+            </a:extLst>
+          </p:cNvPr>
+          <p:cNvSpPr txBox="1"/>
+          <p:nvPr/>
+        </p:nvSpPr>
+        <p:spPr>
+          <a:xfrm>
+            <a:off x="7804332" y="893088"/>
+            <a:ext cx="3318721" cy="253916"/>
+          </a:xfrm>
+          <a:prstGeom prst="rect">
+            <a:avLst/>
+          </a:prstGeom>
+          <a:noFill/>
+        </p:spPr>
+        <p:txBody>
+          <a:bodyPr wrap="square">
+            <a:spAutoFit/>
+          </a:bodyPr>
+          <a:lstStyle/>
+          <a:p>
+            <a:pPr algn="ctr"/>
+            <a:r>
+              <a:rPr lang="en-US" altLang="ko-KR" sz="1050" spc="-50" dirty="0"/>
+              <a:t>&lt; 2023</a:t>
+            </a:r>
+            <a:r>
+              <a:rPr lang="ko-KR" altLang="en-US" sz="1050" spc="-50" dirty="0"/>
+              <a:t>년 카타르의 주요 </a:t>
+            </a:r>
+            <a:r>
+              <a:rPr lang="en-US" altLang="ko-KR" sz="1050" spc="-50" dirty="0"/>
+              <a:t>LNG </a:t>
+            </a:r>
+            <a:r>
+              <a:rPr lang="ko-KR" altLang="en-US" sz="1050" spc="-50" dirty="0"/>
+              <a:t>수출국 </a:t>
+            </a:r>
+            <a:r>
+              <a:rPr lang="en-US" altLang="ko-KR" sz="1050" spc="-50" dirty="0"/>
+              <a:t>(10</a:t>
+            </a:r>
+            <a:r>
+              <a:rPr lang="ko-KR" altLang="en-US" sz="1050" spc="-50" dirty="0"/>
+              <a:t>억 </a:t>
+            </a:r>
+            <a:r>
+              <a:rPr lang="ko-KR" altLang="en-US" sz="1050" spc="-50" dirty="0" err="1"/>
+              <a:t>입방미터</a:t>
+            </a:r>
+            <a:r>
+              <a:rPr lang="en-US" altLang="ko-KR" sz="1050" spc="-50" dirty="0"/>
+              <a:t>) &gt;</a:t>
+            </a:r>
+            <a:endParaRPr lang="ko-KR" altLang="en-US" sz="1050" dirty="0"/>
+          </a:p>
+        </p:txBody>
+      </p:sp>
+      <p:sp>
+        <p:nvSpPr>
+          <p:cNvPr id="10" name="TextBox 9">
+            <a:extLst>
+              <a:ext uri="{FF2B5EF4-FFF2-40B4-BE49-F238E27FC236}">
+                <a16:creationId xmlns:a16="http://schemas.microsoft.com/office/drawing/2014/main" id="{324BFEC3-9C90-5CAE-EF5C-526EF1AB47F6}"/>
+              </a:ext>
+            </a:extLst>
+          </p:cNvPr>
+          <p:cNvSpPr txBox="1"/>
+          <p:nvPr/>
+        </p:nvSpPr>
+        <p:spPr>
+          <a:xfrm>
+            <a:off x="7804333" y="3899986"/>
+            <a:ext cx="3225894" cy="253916"/>
+          </a:xfrm>
+          <a:prstGeom prst="rect">
+            <a:avLst/>
+          </a:prstGeom>
+          <a:noFill/>
+        </p:spPr>
+        <p:txBody>
+          <a:bodyPr wrap="square">
+            <a:spAutoFit/>
+          </a:bodyPr>
+          <a:lstStyle/>
+          <a:p>
+            <a:pPr algn="ctr"/>
+            <a:r>
+              <a:rPr lang="en-US" altLang="ko-KR" sz="1050" spc="-50" dirty="0"/>
+              <a:t>&lt; 2023</a:t>
+            </a:r>
+            <a:r>
+              <a:rPr lang="ko-KR" altLang="en-US" sz="1050" spc="-50" dirty="0"/>
+              <a:t>년 호주의 주요 </a:t>
+            </a:r>
+            <a:r>
+              <a:rPr lang="en-US" altLang="ko-KR" sz="1050" spc="-50" dirty="0"/>
+              <a:t>LNG </a:t>
+            </a:r>
+            <a:r>
+              <a:rPr lang="ko-KR" altLang="en-US" sz="1050" spc="-50" dirty="0"/>
+              <a:t>수출국 </a:t>
+            </a:r>
+            <a:r>
+              <a:rPr lang="en-US" altLang="ko-KR" sz="1050" spc="-50" dirty="0"/>
+              <a:t>(10</a:t>
+            </a:r>
+            <a:r>
+              <a:rPr lang="ko-KR" altLang="en-US" sz="1050" spc="-50" dirty="0"/>
+              <a:t>억 </a:t>
+            </a:r>
+            <a:r>
+              <a:rPr lang="ko-KR" altLang="en-US" sz="1050" spc="-50" dirty="0" err="1"/>
+              <a:t>입방미터</a:t>
+            </a:r>
+            <a:r>
+              <a:rPr lang="en-US" altLang="ko-KR" sz="1050" spc="-50" dirty="0"/>
+              <a:t>) &gt;</a:t>
+            </a:r>
+            <a:endParaRPr lang="ko-KR" altLang="en-US" sz="1050" dirty="0"/>
+          </a:p>
+        </p:txBody>
+      </p:sp>
+      <p:sp>
+        <p:nvSpPr>
+          <p:cNvPr id="11" name="TextBox 10">
+            <a:extLst>
+              <a:ext uri="{FF2B5EF4-FFF2-40B4-BE49-F238E27FC236}">
+                <a16:creationId xmlns:a16="http://schemas.microsoft.com/office/drawing/2014/main" id="{EA5DB801-04CD-D02A-E416-136AA9DB095F}"/>
+              </a:ext>
+            </a:extLst>
+          </p:cNvPr>
+          <p:cNvSpPr txBox="1"/>
+          <p:nvPr/>
+        </p:nvSpPr>
+        <p:spPr>
+          <a:xfrm>
+            <a:off x="288790" y="3928205"/>
+            <a:ext cx="6001575" cy="783356"/>
+          </a:xfrm>
+          <a:prstGeom prst="rect">
+            <a:avLst/>
+          </a:prstGeom>
+          <a:noFill/>
+        </p:spPr>
+        <p:txBody>
+          <a:bodyPr wrap="square" rtlCol="0" anchor="t">
+            <a:spAutoFit/>
+          </a:bodyPr>
+          <a:lstStyle/>
+          <a:p>
+            <a:pPr marL="377825" indent="-285750">
+              <a:lnSpc>
+                <a:spcPct val="150000"/>
+              </a:lnSpc>
+              <a:buFont typeface="Arial" panose="020B0604020202020204" pitchFamily="34" charset="0"/>
+              <a:buChar char="•"/>
+            </a:pPr>
+            <a:r>
+              <a:rPr lang="ko-KR" altLang="en-US" sz="1600" dirty="0"/>
+              <a:t>호주의 경우 수출 전량이 아시아 지역으로 향하고 있으며</a:t>
+            </a:r>
+            <a:r>
+              <a:rPr lang="en-US" altLang="ko-KR" sz="1600" dirty="0"/>
+              <a:t>, </a:t>
+            </a:r>
+            <a:r>
+              <a:rPr lang="ko-KR" altLang="en-US" sz="1600" dirty="0"/>
+              <a:t>일본</a:t>
+            </a:r>
+            <a:r>
+              <a:rPr lang="en-US" altLang="ko-KR" sz="1600" dirty="0"/>
+              <a:t>, </a:t>
+            </a:r>
+            <a:r>
+              <a:rPr lang="ko-KR" altLang="en-US" sz="1600" dirty="0"/>
+              <a:t>중국</a:t>
+            </a:r>
+            <a:r>
+              <a:rPr lang="en-US" altLang="ko-KR" sz="1600" dirty="0"/>
+              <a:t>, </a:t>
+            </a:r>
+            <a:r>
+              <a:rPr lang="ko-KR" altLang="en-US" sz="1600" dirty="0"/>
+              <a:t>한국 순으로 수출량이 많다</a:t>
+            </a:r>
+            <a:r>
+              <a:rPr lang="en-US" altLang="ko-KR" sz="1600" dirty="0"/>
+              <a:t>.</a:t>
+            </a:r>
+          </a:p>
+        </p:txBody>
+      </p:sp>
       <p:pic>
         <p:nvPicPr>
           <p:cNvPr id="7" name="그림 6">
@@ -34885,7 +34491,7 @@
 </p:sld>
 </file>
 
-<file path=ppt/slides/slide38.xml><?xml version="1.0" encoding="utf-8"?>
+<file path=ppt/slides/slide36.xml><?xml version="1.0" encoding="utf-8"?>
 <p:sld xmlns:a="http://schemas.openxmlformats.org/drawingml/2006/main" xmlns:r="http://schemas.openxmlformats.org/officeDocument/2006/relationships" xmlns:p="http://schemas.openxmlformats.org/presentationml/2006/main">
   <p:cSld>
     <p:spTree>
@@ -34930,8 +34536,12 @@
           <a:lstStyle/>
           <a:p>
             <a:r>
+              <a:rPr lang="en-US" altLang="ko-KR" dirty="0"/>
+              <a:t>P N G</a:t>
+            </a:r>
+            <a:r>
               <a:rPr lang="ko-KR" altLang="en-US" dirty="0"/>
-              <a:t>천연가스 소비</a:t>
+              <a:t> 수출</a:t>
             </a:r>
           </a:p>
         </p:txBody>
@@ -34959,7 +34569,7 @@
           <a:p>
             <a:fld id="{109C872D-39A9-4065-8BF3-6A613116E2A1}" type="slidenum">
               <a:rPr lang="ko-KR" altLang="en-US" smtClean="0"/>
-              <a:t>38</a:t>
+              <a:t>36</a:t>
             </a:fld>
             <a:endParaRPr lang="ko-KR" altLang="en-US"/>
           </a:p>
@@ -35278,7 +34888,7 @@
 </p:sld>
 </file>
 
-<file path=ppt/slides/slide39.xml><?xml version="1.0" encoding="utf-8"?>
+<file path=ppt/slides/slide37.xml><?xml version="1.0" encoding="utf-8"?>
 <p:sld xmlns:a="http://schemas.openxmlformats.org/drawingml/2006/main" xmlns:r="http://schemas.openxmlformats.org/officeDocument/2006/relationships" xmlns:p="http://schemas.openxmlformats.org/presentationml/2006/main">
   <p:cSld>
     <p:spTree>
@@ -35323,8 +34933,12 @@
           <a:lstStyle/>
           <a:p>
             <a:r>
+              <a:rPr lang="en-US" altLang="ko-KR" dirty="0"/>
+              <a:t>P N G</a:t>
+            </a:r>
+            <a:r>
               <a:rPr lang="ko-KR" altLang="en-US" dirty="0"/>
-              <a:t>천연가스 소비</a:t>
+              <a:t> 수출</a:t>
             </a:r>
           </a:p>
         </p:txBody>
@@ -35352,7 +34966,7 @@
           <a:p>
             <a:fld id="{109C872D-39A9-4065-8BF3-6A613116E2A1}" type="slidenum">
               <a:rPr lang="ko-KR" altLang="en-US" smtClean="0"/>
-              <a:t>39</a:t>
+              <a:t>37</a:t>
             </a:fld>
             <a:endParaRPr lang="ko-KR" altLang="en-US"/>
           </a:p>
@@ -35740,480 +35354,7 @@
 </p:sld>
 </file>
 
-<file path=ppt/slides/slide4.xml><?xml version="1.0" encoding="utf-8"?>
-<p:sld xmlns:a="http://schemas.openxmlformats.org/drawingml/2006/main" xmlns:r="http://schemas.openxmlformats.org/officeDocument/2006/relationships" xmlns:p="http://schemas.openxmlformats.org/presentationml/2006/main">
-  <p:cSld>
-    <p:spTree>
-      <p:nvGrpSpPr>
-        <p:cNvPr id="1" name=""/>
-        <p:cNvGrpSpPr/>
-        <p:nvPr/>
-      </p:nvGrpSpPr>
-      <p:grpSpPr>
-        <a:xfrm>
-          <a:off x="0" y="0"/>
-          <a:ext cx="0" cy="0"/>
-          <a:chOff x="0" y="0"/>
-          <a:chExt cx="0" cy="0"/>
-        </a:xfrm>
-      </p:grpSpPr>
-      <p:sp>
-        <p:nvSpPr>
-          <p:cNvPr id="2" name="제목 1">
-            <a:extLst>
-              <a:ext uri="{FF2B5EF4-FFF2-40B4-BE49-F238E27FC236}">
-                <a16:creationId xmlns:a16="http://schemas.microsoft.com/office/drawing/2014/main" id="{708E53AA-7D50-5F4A-320F-293F315471D7}"/>
-              </a:ext>
-            </a:extLst>
-          </p:cNvPr>
-          <p:cNvSpPr>
-            <a:spLocks noGrp="1"/>
-          </p:cNvSpPr>
-          <p:nvPr>
-            <p:ph type="title"/>
-          </p:nvPr>
-        </p:nvSpPr>
-        <p:spPr/>
-        <p:txBody>
-          <a:bodyPr/>
-          <a:lstStyle/>
-          <a:p>
-            <a:r>
-              <a:rPr lang="ko-KR" altLang="en-US" dirty="0"/>
-              <a:t>서론</a:t>
-            </a:r>
-          </a:p>
-        </p:txBody>
-      </p:sp>
-      <p:sp>
-        <p:nvSpPr>
-          <p:cNvPr id="4" name="슬라이드 번호 개체 틀 3">
-            <a:extLst>
-              <a:ext uri="{FF2B5EF4-FFF2-40B4-BE49-F238E27FC236}">
-                <a16:creationId xmlns:a16="http://schemas.microsoft.com/office/drawing/2014/main" id="{0E66E9B2-B0DB-FDCD-AA50-636EA4E5B253}"/>
-              </a:ext>
-            </a:extLst>
-          </p:cNvPr>
-          <p:cNvSpPr>
-            <a:spLocks noGrp="1"/>
-          </p:cNvSpPr>
-          <p:nvPr>
-            <p:ph type="sldNum" sz="quarter" idx="12"/>
-          </p:nvPr>
-        </p:nvSpPr>
-        <p:spPr/>
-        <p:txBody>
-          <a:bodyPr/>
-          <a:lstStyle/>
-          <a:p>
-            <a:fld id="{109C872D-39A9-4065-8BF3-6A613116E2A1}" type="slidenum">
-              <a:rPr lang="ko-KR" altLang="en-US" smtClean="0"/>
-              <a:t>4</a:t>
-            </a:fld>
-            <a:endParaRPr lang="ko-KR" altLang="en-US"/>
-          </a:p>
-        </p:txBody>
-      </p:sp>
-      <p:sp>
-        <p:nvSpPr>
-          <p:cNvPr id="3" name="TextBox 2">
-            <a:extLst>
-              <a:ext uri="{FF2B5EF4-FFF2-40B4-BE49-F238E27FC236}">
-                <a16:creationId xmlns:a16="http://schemas.microsoft.com/office/drawing/2014/main" id="{6C27E35B-63AE-3D62-3078-BE10F308BEDD}"/>
-              </a:ext>
-            </a:extLst>
-          </p:cNvPr>
-          <p:cNvSpPr txBox="1"/>
-          <p:nvPr/>
-        </p:nvSpPr>
-        <p:spPr>
-          <a:xfrm>
-            <a:off x="288790" y="958844"/>
-            <a:ext cx="11118453" cy="5584670"/>
-          </a:xfrm>
-          <a:prstGeom prst="rect">
-            <a:avLst/>
-          </a:prstGeom>
-          <a:noFill/>
-        </p:spPr>
-        <p:txBody>
-          <a:bodyPr wrap="square" rtlCol="0" anchor="t">
-            <a:spAutoFit/>
-          </a:bodyPr>
-          <a:lstStyle/>
-          <a:p>
-            <a:pPr marL="377825" indent="-285750">
-              <a:lnSpc>
-                <a:spcPct val="150000"/>
-              </a:lnSpc>
-              <a:buFont typeface="Arial" panose="020B0604020202020204" pitchFamily="34" charset="0"/>
-              <a:buChar char="•"/>
-            </a:pPr>
-            <a:r>
-              <a:rPr lang="ko-KR" altLang="en-US" sz="1600" dirty="0"/>
-              <a:t>천연가스는 주로 메탄</a:t>
-            </a:r>
-            <a:r>
-              <a:rPr lang="en-US" altLang="ko-KR" sz="1600" dirty="0"/>
-              <a:t>(CH</a:t>
-            </a:r>
-            <a:r>
-              <a:rPr lang="en-US" altLang="ko-KR" sz="1600" baseline="-25000" dirty="0"/>
-              <a:t>4</a:t>
-            </a:r>
-            <a:r>
-              <a:rPr lang="en-US" altLang="ko-KR" sz="1600" dirty="0"/>
-              <a:t>)</a:t>
-            </a:r>
-            <a:r>
-              <a:rPr lang="ko-KR" altLang="en-US" sz="1600" dirty="0"/>
-              <a:t>으로 구성되어 있으며</a:t>
-            </a:r>
-            <a:r>
-              <a:rPr lang="en-US" altLang="ko-KR" sz="1600" dirty="0"/>
-              <a:t>, </a:t>
-            </a:r>
-            <a:r>
-              <a:rPr lang="ko-KR" altLang="en-US" sz="1600" dirty="0"/>
-              <a:t>다른 연료</a:t>
-            </a:r>
-            <a:r>
-              <a:rPr lang="en-US" altLang="ko-KR" sz="1600" dirty="0"/>
-              <a:t>(</a:t>
-            </a:r>
-            <a:r>
-              <a:rPr lang="ko-KR" altLang="en-US" sz="1600" dirty="0"/>
-              <a:t>석탄 및 석유</a:t>
-            </a:r>
-            <a:r>
-              <a:rPr lang="en-US" altLang="ko-KR" sz="1600" dirty="0"/>
-              <a:t>)</a:t>
-            </a:r>
-            <a:r>
-              <a:rPr lang="ko-KR" altLang="en-US" sz="1600" dirty="0"/>
-              <a:t>에 비해 연소할 때 배출되는 오염물질이 적어</a:t>
-            </a:r>
-            <a:r>
-              <a:rPr lang="en-US" altLang="ko-KR" sz="1600" dirty="0"/>
-              <a:t>, </a:t>
-            </a:r>
-            <a:r>
-              <a:rPr lang="ko-KR" altLang="en-US" sz="1600" dirty="0"/>
-              <a:t>화석연료 중에서는 가장 청정한 연료로 평가된다</a:t>
-            </a:r>
-            <a:r>
-              <a:rPr lang="en-US" altLang="ko-KR" sz="1600" dirty="0"/>
-              <a:t>.</a:t>
-            </a:r>
-          </a:p>
-          <a:p>
-            <a:pPr marL="835025" lvl="1" indent="-285750">
-              <a:lnSpc>
-                <a:spcPct val="150000"/>
-              </a:lnSpc>
-              <a:buFont typeface="Wingdings" panose="05000000000000000000" pitchFamily="2" charset="2"/>
-              <a:buChar char="ü"/>
-            </a:pPr>
-            <a:r>
-              <a:rPr lang="ko-KR" altLang="en-US" sz="1600" dirty="0"/>
-              <a:t>이러한 특성으로</a:t>
-            </a:r>
-            <a:r>
-              <a:rPr lang="en-US" altLang="ko-KR" sz="1600" dirty="0"/>
-              <a:t> </a:t>
-            </a:r>
-            <a:r>
-              <a:rPr lang="ko-KR" altLang="en-US" sz="1600" dirty="0"/>
-              <a:t>기후변화 대응과 에너지 전환 과정에서 </a:t>
-            </a:r>
-            <a:r>
-              <a:rPr lang="en-US" altLang="ko-KR" sz="1600" dirty="0"/>
-              <a:t>‘</a:t>
-            </a:r>
-            <a:r>
-              <a:rPr lang="ko-KR" altLang="en-US" sz="1600" dirty="0"/>
-              <a:t>교량 연료</a:t>
-            </a:r>
-            <a:r>
-              <a:rPr lang="en-US" altLang="ko-KR" sz="1600" dirty="0"/>
-              <a:t>‘</a:t>
-            </a:r>
-            <a:r>
-              <a:rPr lang="ko-KR" altLang="en-US" sz="1600" dirty="0"/>
-              <a:t>로 주목받고 있으며</a:t>
-            </a:r>
-            <a:r>
-              <a:rPr lang="en-US" altLang="ko-KR" sz="1600" dirty="0"/>
-              <a:t>, </a:t>
-            </a:r>
-            <a:r>
-              <a:rPr lang="ko-KR" altLang="en-US" sz="1600" dirty="0"/>
-              <a:t>재생에너지의 간헐성을 보완하는 유연한 발전원으로 활용 가능하다</a:t>
-            </a:r>
-            <a:r>
-              <a:rPr lang="en-US" altLang="ko-KR" sz="1600" dirty="0"/>
-              <a:t>.</a:t>
-            </a:r>
-          </a:p>
-          <a:p>
-            <a:pPr marL="377825" indent="-285750">
-              <a:lnSpc>
-                <a:spcPct val="150000"/>
-              </a:lnSpc>
-              <a:buFont typeface="Arial" panose="020B0604020202020204" pitchFamily="34" charset="0"/>
-              <a:buChar char="•"/>
-            </a:pPr>
-            <a:endParaRPr lang="en-US" altLang="ko-KR" sz="1600" dirty="0"/>
-          </a:p>
-          <a:p>
-            <a:pPr marL="377825" indent="-285750">
-              <a:lnSpc>
-                <a:spcPct val="150000"/>
-              </a:lnSpc>
-              <a:buFont typeface="Arial" panose="020B0604020202020204" pitchFamily="34" charset="0"/>
-              <a:buChar char="•"/>
-            </a:pPr>
-            <a:r>
-              <a:rPr lang="ko-KR" altLang="en-US" sz="1600" dirty="0"/>
-              <a:t>인류의 천연가스 이용은 고대까지 거슬러 올라가며</a:t>
-            </a:r>
-            <a:r>
-              <a:rPr lang="en-US" altLang="ko-KR" sz="1600" dirty="0"/>
-              <a:t>, </a:t>
-            </a:r>
-            <a:r>
-              <a:rPr lang="ko-KR" altLang="en-US" sz="1600" dirty="0"/>
-              <a:t>상징적</a:t>
-            </a:r>
-            <a:r>
-              <a:rPr lang="en-US" altLang="ko-KR" sz="1600" dirty="0"/>
-              <a:t>·</a:t>
-            </a:r>
-            <a:r>
-              <a:rPr lang="ko-KR" altLang="en-US" sz="1600" dirty="0"/>
-              <a:t>제의적 의미에 머무르고</a:t>
-            </a:r>
-            <a:r>
-              <a:rPr lang="en-US" altLang="ko-KR" sz="1600" dirty="0"/>
-              <a:t>, </a:t>
-            </a:r>
-            <a:r>
-              <a:rPr lang="ko-KR" altLang="en-US" sz="1600" dirty="0"/>
-              <a:t>본격적으로 활용되지는 않았다</a:t>
-            </a:r>
-            <a:r>
-              <a:rPr lang="en-US" altLang="ko-KR" sz="1600" dirty="0"/>
-              <a:t>.</a:t>
-            </a:r>
-          </a:p>
-          <a:p>
-            <a:pPr marL="835025" lvl="1" indent="-285750">
-              <a:lnSpc>
-                <a:spcPct val="150000"/>
-              </a:lnSpc>
-              <a:buFont typeface="Wingdings" panose="05000000000000000000" pitchFamily="2" charset="2"/>
-              <a:buChar char="ü"/>
-            </a:pPr>
-            <a:r>
-              <a:rPr lang="ko-KR" altLang="en-US" sz="1600" dirty="0"/>
-              <a:t>기원전 </a:t>
-            </a:r>
-            <a:r>
-              <a:rPr lang="en-US" altLang="ko-KR" sz="1600" dirty="0"/>
-              <a:t>1,000</a:t>
-            </a:r>
-            <a:r>
-              <a:rPr lang="ko-KR" altLang="en-US" sz="1600" dirty="0" err="1"/>
-              <a:t>년경</a:t>
-            </a:r>
-            <a:r>
-              <a:rPr lang="ko-KR" altLang="en-US" sz="1600" dirty="0"/>
-              <a:t> 중국에서는 대나무 파이프를 사용하여 천연가스를 지표로부터 추출하였다</a:t>
-            </a:r>
-            <a:r>
-              <a:rPr lang="en-US" altLang="ko-KR" sz="1600" dirty="0"/>
-              <a:t>.</a:t>
-            </a:r>
-          </a:p>
-          <a:p>
-            <a:pPr marL="835025" lvl="1" indent="-285750">
-              <a:lnSpc>
-                <a:spcPct val="150000"/>
-              </a:lnSpc>
-              <a:buFont typeface="Wingdings" panose="05000000000000000000" pitchFamily="2" charset="2"/>
-              <a:buChar char="ü"/>
-            </a:pPr>
-            <a:r>
-              <a:rPr lang="ko-KR" altLang="en-US" sz="1600" dirty="0"/>
-              <a:t>고대 그리스 및 페르시아에서도 천연가스의 자연 누출로 발생하는 </a:t>
-            </a:r>
-            <a:r>
-              <a:rPr lang="en-US" altLang="ko-KR" sz="1600" dirty="0"/>
-              <a:t>‘</a:t>
-            </a:r>
-            <a:r>
-              <a:rPr lang="ko-KR" altLang="en-US" sz="1600" dirty="0"/>
-              <a:t>영원한 불</a:t>
-            </a:r>
-            <a:r>
-              <a:rPr lang="en-US" altLang="ko-KR" sz="1600" dirty="0"/>
-              <a:t>‘</a:t>
-            </a:r>
-            <a:r>
-              <a:rPr lang="ko-KR" altLang="en-US" sz="1600" dirty="0"/>
-              <a:t>은 신성한 존재로 인식되며 종교적 의례에 사용되었다</a:t>
-            </a:r>
-            <a:r>
-              <a:rPr lang="en-US" altLang="ko-KR" sz="1600" dirty="0"/>
-              <a:t>.</a:t>
-            </a:r>
-          </a:p>
-          <a:p>
-            <a:pPr marL="835025" lvl="1" indent="-285750">
-              <a:lnSpc>
-                <a:spcPct val="150000"/>
-              </a:lnSpc>
-              <a:buFont typeface="Wingdings" panose="05000000000000000000" pitchFamily="2" charset="2"/>
-              <a:buChar char="ü"/>
-            </a:pPr>
-            <a:endParaRPr lang="en-US" altLang="ko-KR" sz="1600" dirty="0"/>
-          </a:p>
-          <a:p>
-            <a:pPr marL="377825" indent="-285750">
-              <a:lnSpc>
-                <a:spcPct val="150000"/>
-              </a:lnSpc>
-              <a:buFont typeface="Arial" panose="020B0604020202020204" pitchFamily="34" charset="0"/>
-              <a:buChar char="•"/>
-            </a:pPr>
-            <a:r>
-              <a:rPr lang="en-US" altLang="ko-KR" sz="1600" dirty="0"/>
-              <a:t>19</a:t>
-            </a:r>
-            <a:r>
-              <a:rPr lang="ko-KR" altLang="en-US" sz="1600" dirty="0"/>
-              <a:t>세기 들어 산업화에 따라 천연가스의 상업적 활용이 시작되었다</a:t>
-            </a:r>
-            <a:r>
-              <a:rPr lang="en-US" altLang="ko-KR" sz="1600" dirty="0"/>
-              <a:t>.</a:t>
-            </a:r>
-          </a:p>
-          <a:p>
-            <a:pPr marL="835025" lvl="1" indent="-285750">
-              <a:lnSpc>
-                <a:spcPct val="150000"/>
-              </a:lnSpc>
-              <a:buFont typeface="Wingdings" panose="05000000000000000000" pitchFamily="2" charset="2"/>
-              <a:buChar char="ü"/>
-            </a:pPr>
-            <a:r>
-              <a:rPr lang="en-US" altLang="ko-KR" sz="1600" dirty="0"/>
-              <a:t>1821</a:t>
-            </a:r>
-            <a:r>
-              <a:rPr lang="ko-KR" altLang="en-US" sz="1600" dirty="0"/>
-              <a:t>년 미국 뉴욕주에서 세계 최초의 천연가스 우물이 </a:t>
-            </a:r>
-            <a:r>
-              <a:rPr lang="ko-KR" altLang="en-US" sz="1600" dirty="0" err="1"/>
-              <a:t>시추되었다</a:t>
-            </a:r>
-            <a:r>
-              <a:rPr lang="en-US" altLang="ko-KR" sz="1600" dirty="0"/>
-              <a:t>.</a:t>
-            </a:r>
-          </a:p>
-          <a:p>
-            <a:pPr marL="835025" lvl="1" indent="-285750">
-              <a:lnSpc>
-                <a:spcPct val="150000"/>
-              </a:lnSpc>
-              <a:buFont typeface="Wingdings" panose="05000000000000000000" pitchFamily="2" charset="2"/>
-              <a:buChar char="ü"/>
-            </a:pPr>
-            <a:r>
-              <a:rPr lang="en-US" altLang="ko-KR" sz="1600" dirty="0"/>
-              <a:t>1850</a:t>
-            </a:r>
-            <a:r>
-              <a:rPr lang="ko-KR" altLang="en-US" sz="1600" dirty="0"/>
-              <a:t>년대 중반부터는 도시의 가로등</a:t>
-            </a:r>
-            <a:r>
-              <a:rPr lang="en-US" altLang="ko-KR" sz="1600" dirty="0"/>
-              <a:t>, </a:t>
-            </a:r>
-            <a:r>
-              <a:rPr lang="ko-KR" altLang="en-US" sz="1600" dirty="0"/>
-              <a:t>가정 난방용으로 천연가스가 사용되기 시작하였다</a:t>
-            </a:r>
-            <a:r>
-              <a:rPr lang="en-US" altLang="ko-KR" sz="1600" dirty="0"/>
-              <a:t>.</a:t>
-            </a:r>
-          </a:p>
-          <a:p>
-            <a:pPr marL="835025" lvl="1" indent="-285750">
-              <a:lnSpc>
-                <a:spcPct val="150000"/>
-              </a:lnSpc>
-              <a:buFont typeface="Wingdings" panose="05000000000000000000" pitchFamily="2" charset="2"/>
-              <a:buChar char="ü"/>
-            </a:pPr>
-            <a:r>
-              <a:rPr lang="en-US" altLang="ko-KR" sz="1600" dirty="0"/>
-              <a:t>1859</a:t>
-            </a:r>
-            <a:r>
-              <a:rPr lang="ko-KR" altLang="en-US" sz="1600" dirty="0"/>
-              <a:t>년 펜실베니아 드레이크 성공은 </a:t>
-            </a:r>
-            <a:r>
-              <a:rPr lang="en-US" altLang="ko-KR" sz="1600" dirty="0"/>
-              <a:t>(</a:t>
-            </a:r>
-            <a:r>
-              <a:rPr lang="ko-KR" altLang="en-US" sz="1600" dirty="0" err="1"/>
-              <a:t>석유챕터</a:t>
-            </a:r>
-            <a:r>
-              <a:rPr lang="en-US" altLang="ko-KR" sz="1600" dirty="0"/>
-              <a:t> </a:t>
-            </a:r>
-            <a:r>
-              <a:rPr lang="ko-KR" altLang="en-US" sz="1600" dirty="0"/>
-              <a:t>참고</a:t>
-            </a:r>
-            <a:r>
-              <a:rPr lang="en-US" altLang="ko-KR" sz="1600" dirty="0"/>
-              <a:t>)</a:t>
-            </a:r>
-            <a:r>
-              <a:rPr lang="ko-KR" altLang="en-US" sz="1600" dirty="0"/>
-              <a:t> 석유 뿐만 아니라 천연가스 산업에도 기폭제 역할을 하였다</a:t>
-            </a:r>
-            <a:r>
-              <a:rPr lang="en-US" altLang="ko-KR" sz="1600" dirty="0"/>
-              <a:t>.</a:t>
-            </a:r>
-          </a:p>
-        </p:txBody>
-      </p:sp>
-    </p:spTree>
-    <p:extLst>
-      <p:ext uri="{BB962C8B-B14F-4D97-AF65-F5344CB8AC3E}">
-        <p14:creationId xmlns:p14="http://schemas.microsoft.com/office/powerpoint/2010/main" val="152177136"/>
-      </p:ext>
-    </p:extLst>
-  </p:cSld>
-  <p:clrMapOvr>
-    <a:masterClrMapping/>
-  </p:clrMapOvr>
-</p:sld>
-</file>
-
-<file path=ppt/slides/slide40.xml><?xml version="1.0" encoding="utf-8"?>
+<file path=ppt/slides/slide38.xml><?xml version="1.0" encoding="utf-8"?>
 <p:sld xmlns:a="http://schemas.openxmlformats.org/drawingml/2006/main" xmlns:r="http://schemas.openxmlformats.org/officeDocument/2006/relationships" xmlns:p="http://schemas.openxmlformats.org/presentationml/2006/main">
   <p:cSld>
     <p:spTree>
@@ -36258,8 +35399,12 @@
           <a:lstStyle/>
           <a:p>
             <a:r>
+              <a:rPr lang="en-US" altLang="ko-KR" dirty="0"/>
+              <a:t>P N G</a:t>
+            </a:r>
+            <a:r>
               <a:rPr lang="ko-KR" altLang="en-US" dirty="0"/>
-              <a:t>천연가스 소비</a:t>
+              <a:t> 수출</a:t>
             </a:r>
           </a:p>
         </p:txBody>
@@ -36287,7 +35432,7 @@
           <a:p>
             <a:fld id="{109C872D-39A9-4065-8BF3-6A613116E2A1}" type="slidenum">
               <a:rPr lang="ko-KR" altLang="en-US" smtClean="0"/>
-              <a:t>40</a:t>
+              <a:t>38</a:t>
             </a:fld>
             <a:endParaRPr lang="ko-KR" altLang="en-US"/>
           </a:p>
@@ -36728,7 +35873,7 @@
 </p:sld>
 </file>
 
-<file path=ppt/slides/slide41.xml><?xml version="1.0" encoding="utf-8"?>
+<file path=ppt/slides/slide39.xml><?xml version="1.0" encoding="utf-8"?>
 <p:sld xmlns:a="http://schemas.openxmlformats.org/drawingml/2006/main" xmlns:r="http://schemas.openxmlformats.org/officeDocument/2006/relationships" xmlns:p="http://schemas.openxmlformats.org/presentationml/2006/main">
   <p:cSld>
     <p:spTree>
@@ -36811,7 +35956,7 @@
           <a:p>
             <a:fld id="{109C872D-39A9-4065-8BF3-6A613116E2A1}" type="slidenum">
               <a:rPr lang="ko-KR" altLang="en-US" smtClean="0"/>
-              <a:t>41</a:t>
+              <a:t>39</a:t>
             </a:fld>
             <a:endParaRPr lang="ko-KR" altLang="en-US"/>
           </a:p>
@@ -36871,7 +36016,480 @@
 </p:sld>
 </file>
 
-<file path=ppt/slides/slide42.xml><?xml version="1.0" encoding="utf-8"?>
+<file path=ppt/slides/slide4.xml><?xml version="1.0" encoding="utf-8"?>
+<p:sld xmlns:a="http://schemas.openxmlformats.org/drawingml/2006/main" xmlns:r="http://schemas.openxmlformats.org/officeDocument/2006/relationships" xmlns:p="http://schemas.openxmlformats.org/presentationml/2006/main">
+  <p:cSld>
+    <p:spTree>
+      <p:nvGrpSpPr>
+        <p:cNvPr id="1" name=""/>
+        <p:cNvGrpSpPr/>
+        <p:nvPr/>
+      </p:nvGrpSpPr>
+      <p:grpSpPr>
+        <a:xfrm>
+          <a:off x="0" y="0"/>
+          <a:ext cx="0" cy="0"/>
+          <a:chOff x="0" y="0"/>
+          <a:chExt cx="0" cy="0"/>
+        </a:xfrm>
+      </p:grpSpPr>
+      <p:sp>
+        <p:nvSpPr>
+          <p:cNvPr id="2" name="제목 1">
+            <a:extLst>
+              <a:ext uri="{FF2B5EF4-FFF2-40B4-BE49-F238E27FC236}">
+                <a16:creationId xmlns:a16="http://schemas.microsoft.com/office/drawing/2014/main" id="{708E53AA-7D50-5F4A-320F-293F315471D7}"/>
+              </a:ext>
+            </a:extLst>
+          </p:cNvPr>
+          <p:cNvSpPr>
+            <a:spLocks noGrp="1"/>
+          </p:cNvSpPr>
+          <p:nvPr>
+            <p:ph type="title"/>
+          </p:nvPr>
+        </p:nvSpPr>
+        <p:spPr/>
+        <p:txBody>
+          <a:bodyPr/>
+          <a:lstStyle/>
+          <a:p>
+            <a:r>
+              <a:rPr lang="ko-KR" altLang="en-US" dirty="0"/>
+              <a:t>서론</a:t>
+            </a:r>
+          </a:p>
+        </p:txBody>
+      </p:sp>
+      <p:sp>
+        <p:nvSpPr>
+          <p:cNvPr id="4" name="슬라이드 번호 개체 틀 3">
+            <a:extLst>
+              <a:ext uri="{FF2B5EF4-FFF2-40B4-BE49-F238E27FC236}">
+                <a16:creationId xmlns:a16="http://schemas.microsoft.com/office/drawing/2014/main" id="{0E66E9B2-B0DB-FDCD-AA50-636EA4E5B253}"/>
+              </a:ext>
+            </a:extLst>
+          </p:cNvPr>
+          <p:cNvSpPr>
+            <a:spLocks noGrp="1"/>
+          </p:cNvSpPr>
+          <p:nvPr>
+            <p:ph type="sldNum" sz="quarter" idx="12"/>
+          </p:nvPr>
+        </p:nvSpPr>
+        <p:spPr/>
+        <p:txBody>
+          <a:bodyPr/>
+          <a:lstStyle/>
+          <a:p>
+            <a:fld id="{109C872D-39A9-4065-8BF3-6A613116E2A1}" type="slidenum">
+              <a:rPr lang="ko-KR" altLang="en-US" smtClean="0"/>
+              <a:t>4</a:t>
+            </a:fld>
+            <a:endParaRPr lang="ko-KR" altLang="en-US"/>
+          </a:p>
+        </p:txBody>
+      </p:sp>
+      <p:sp>
+        <p:nvSpPr>
+          <p:cNvPr id="3" name="TextBox 2">
+            <a:extLst>
+              <a:ext uri="{FF2B5EF4-FFF2-40B4-BE49-F238E27FC236}">
+                <a16:creationId xmlns:a16="http://schemas.microsoft.com/office/drawing/2014/main" id="{6C27E35B-63AE-3D62-3078-BE10F308BEDD}"/>
+              </a:ext>
+            </a:extLst>
+          </p:cNvPr>
+          <p:cNvSpPr txBox="1"/>
+          <p:nvPr/>
+        </p:nvSpPr>
+        <p:spPr>
+          <a:xfrm>
+            <a:off x="288790" y="958844"/>
+            <a:ext cx="11118453" cy="5584670"/>
+          </a:xfrm>
+          <a:prstGeom prst="rect">
+            <a:avLst/>
+          </a:prstGeom>
+          <a:noFill/>
+        </p:spPr>
+        <p:txBody>
+          <a:bodyPr wrap="square" rtlCol="0" anchor="t">
+            <a:spAutoFit/>
+          </a:bodyPr>
+          <a:lstStyle/>
+          <a:p>
+            <a:pPr marL="377825" indent="-285750">
+              <a:lnSpc>
+                <a:spcPct val="150000"/>
+              </a:lnSpc>
+              <a:buFont typeface="Arial" panose="020B0604020202020204" pitchFamily="34" charset="0"/>
+              <a:buChar char="•"/>
+            </a:pPr>
+            <a:r>
+              <a:rPr lang="ko-KR" altLang="en-US" sz="1600" dirty="0"/>
+              <a:t>천연가스는 주로 메탄</a:t>
+            </a:r>
+            <a:r>
+              <a:rPr lang="en-US" altLang="ko-KR" sz="1600" dirty="0"/>
+              <a:t>(CH</a:t>
+            </a:r>
+            <a:r>
+              <a:rPr lang="en-US" altLang="ko-KR" sz="1600" baseline="-25000" dirty="0"/>
+              <a:t>4</a:t>
+            </a:r>
+            <a:r>
+              <a:rPr lang="en-US" altLang="ko-KR" sz="1600" dirty="0"/>
+              <a:t>)</a:t>
+            </a:r>
+            <a:r>
+              <a:rPr lang="ko-KR" altLang="en-US" sz="1600" dirty="0"/>
+              <a:t>으로 구성되어 있으며</a:t>
+            </a:r>
+            <a:r>
+              <a:rPr lang="en-US" altLang="ko-KR" sz="1600" dirty="0"/>
+              <a:t>, </a:t>
+            </a:r>
+            <a:r>
+              <a:rPr lang="ko-KR" altLang="en-US" sz="1600" dirty="0"/>
+              <a:t>다른 연료</a:t>
+            </a:r>
+            <a:r>
+              <a:rPr lang="en-US" altLang="ko-KR" sz="1600" dirty="0"/>
+              <a:t>(</a:t>
+            </a:r>
+            <a:r>
+              <a:rPr lang="ko-KR" altLang="en-US" sz="1600" dirty="0"/>
+              <a:t>석탄 및 석유</a:t>
+            </a:r>
+            <a:r>
+              <a:rPr lang="en-US" altLang="ko-KR" sz="1600" dirty="0"/>
+              <a:t>)</a:t>
+            </a:r>
+            <a:r>
+              <a:rPr lang="ko-KR" altLang="en-US" sz="1600" dirty="0"/>
+              <a:t>에 비해 연소할 때 배출되는 오염물질이 적어</a:t>
+            </a:r>
+            <a:r>
+              <a:rPr lang="en-US" altLang="ko-KR" sz="1600" dirty="0"/>
+              <a:t>, </a:t>
+            </a:r>
+            <a:r>
+              <a:rPr lang="ko-KR" altLang="en-US" sz="1600" dirty="0"/>
+              <a:t>화석연료 중에서는 가장 청정한 연료로 평가된다</a:t>
+            </a:r>
+            <a:r>
+              <a:rPr lang="en-US" altLang="ko-KR" sz="1600" dirty="0"/>
+              <a:t>.</a:t>
+            </a:r>
+          </a:p>
+          <a:p>
+            <a:pPr marL="835025" lvl="1" indent="-285750">
+              <a:lnSpc>
+                <a:spcPct val="150000"/>
+              </a:lnSpc>
+              <a:buFont typeface="Wingdings" panose="05000000000000000000" pitchFamily="2" charset="2"/>
+              <a:buChar char="ü"/>
+            </a:pPr>
+            <a:r>
+              <a:rPr lang="ko-KR" altLang="en-US" sz="1600" dirty="0"/>
+              <a:t>이러한 특성으로</a:t>
+            </a:r>
+            <a:r>
+              <a:rPr lang="en-US" altLang="ko-KR" sz="1600" dirty="0"/>
+              <a:t> </a:t>
+            </a:r>
+            <a:r>
+              <a:rPr lang="ko-KR" altLang="en-US" sz="1600" dirty="0"/>
+              <a:t>기후변화 대응과 에너지 전환 과정에서 </a:t>
+            </a:r>
+            <a:r>
+              <a:rPr lang="en-US" altLang="ko-KR" sz="1600" dirty="0"/>
+              <a:t>‘</a:t>
+            </a:r>
+            <a:r>
+              <a:rPr lang="ko-KR" altLang="en-US" sz="1600" dirty="0"/>
+              <a:t>교량 연료</a:t>
+            </a:r>
+            <a:r>
+              <a:rPr lang="en-US" altLang="ko-KR" sz="1600" dirty="0"/>
+              <a:t>‘</a:t>
+            </a:r>
+            <a:r>
+              <a:rPr lang="ko-KR" altLang="en-US" sz="1600" dirty="0"/>
+              <a:t>로 주목받고 있으며</a:t>
+            </a:r>
+            <a:r>
+              <a:rPr lang="en-US" altLang="ko-KR" sz="1600" dirty="0"/>
+              <a:t>, </a:t>
+            </a:r>
+            <a:r>
+              <a:rPr lang="ko-KR" altLang="en-US" sz="1600" dirty="0"/>
+              <a:t>재생에너지의 간헐성을 보완하는 유연한 발전원으로 활용 가능하다</a:t>
+            </a:r>
+            <a:r>
+              <a:rPr lang="en-US" altLang="ko-KR" sz="1600" dirty="0"/>
+              <a:t>.</a:t>
+            </a:r>
+          </a:p>
+          <a:p>
+            <a:pPr marL="377825" indent="-285750">
+              <a:lnSpc>
+                <a:spcPct val="150000"/>
+              </a:lnSpc>
+              <a:buFont typeface="Arial" panose="020B0604020202020204" pitchFamily="34" charset="0"/>
+              <a:buChar char="•"/>
+            </a:pPr>
+            <a:endParaRPr lang="en-US" altLang="ko-KR" sz="1600" dirty="0"/>
+          </a:p>
+          <a:p>
+            <a:pPr marL="377825" indent="-285750">
+              <a:lnSpc>
+                <a:spcPct val="150000"/>
+              </a:lnSpc>
+              <a:buFont typeface="Arial" panose="020B0604020202020204" pitchFamily="34" charset="0"/>
+              <a:buChar char="•"/>
+            </a:pPr>
+            <a:r>
+              <a:rPr lang="ko-KR" altLang="en-US" sz="1600" dirty="0"/>
+              <a:t>인류의 천연가스 이용은 고대까지 거슬러 올라가며</a:t>
+            </a:r>
+            <a:r>
+              <a:rPr lang="en-US" altLang="ko-KR" sz="1600" dirty="0"/>
+              <a:t>, </a:t>
+            </a:r>
+            <a:r>
+              <a:rPr lang="ko-KR" altLang="en-US" sz="1600" dirty="0"/>
+              <a:t>상징적</a:t>
+            </a:r>
+            <a:r>
+              <a:rPr lang="en-US" altLang="ko-KR" sz="1600" dirty="0"/>
+              <a:t>·</a:t>
+            </a:r>
+            <a:r>
+              <a:rPr lang="ko-KR" altLang="en-US" sz="1600" dirty="0"/>
+              <a:t>제의적 의미에 머무르고</a:t>
+            </a:r>
+            <a:r>
+              <a:rPr lang="en-US" altLang="ko-KR" sz="1600" dirty="0"/>
+              <a:t>, </a:t>
+            </a:r>
+            <a:r>
+              <a:rPr lang="ko-KR" altLang="en-US" sz="1600" dirty="0"/>
+              <a:t>본격적으로 활용되지는 않았다</a:t>
+            </a:r>
+            <a:r>
+              <a:rPr lang="en-US" altLang="ko-KR" sz="1600" dirty="0"/>
+              <a:t>.</a:t>
+            </a:r>
+          </a:p>
+          <a:p>
+            <a:pPr marL="835025" lvl="1" indent="-285750">
+              <a:lnSpc>
+                <a:spcPct val="150000"/>
+              </a:lnSpc>
+              <a:buFont typeface="Wingdings" panose="05000000000000000000" pitchFamily="2" charset="2"/>
+              <a:buChar char="ü"/>
+            </a:pPr>
+            <a:r>
+              <a:rPr lang="ko-KR" altLang="en-US" sz="1600" dirty="0"/>
+              <a:t>기원전 </a:t>
+            </a:r>
+            <a:r>
+              <a:rPr lang="en-US" altLang="ko-KR" sz="1600" dirty="0"/>
+              <a:t>1,000</a:t>
+            </a:r>
+            <a:r>
+              <a:rPr lang="ko-KR" altLang="en-US" sz="1600" dirty="0" err="1"/>
+              <a:t>년경</a:t>
+            </a:r>
+            <a:r>
+              <a:rPr lang="ko-KR" altLang="en-US" sz="1600" dirty="0"/>
+              <a:t> 중국에서는 대나무 파이프를 사용하여 천연가스를 지표로부터 추출하였다</a:t>
+            </a:r>
+            <a:r>
+              <a:rPr lang="en-US" altLang="ko-KR" sz="1600" dirty="0"/>
+              <a:t>.</a:t>
+            </a:r>
+          </a:p>
+          <a:p>
+            <a:pPr marL="835025" lvl="1" indent="-285750">
+              <a:lnSpc>
+                <a:spcPct val="150000"/>
+              </a:lnSpc>
+              <a:buFont typeface="Wingdings" panose="05000000000000000000" pitchFamily="2" charset="2"/>
+              <a:buChar char="ü"/>
+            </a:pPr>
+            <a:r>
+              <a:rPr lang="ko-KR" altLang="en-US" sz="1600" dirty="0"/>
+              <a:t>고대 그리스 및 페르시아에서도 천연가스의 자연 누출로 발생하는 </a:t>
+            </a:r>
+            <a:r>
+              <a:rPr lang="en-US" altLang="ko-KR" sz="1600" dirty="0"/>
+              <a:t>‘</a:t>
+            </a:r>
+            <a:r>
+              <a:rPr lang="ko-KR" altLang="en-US" sz="1600" dirty="0"/>
+              <a:t>영원한 불</a:t>
+            </a:r>
+            <a:r>
+              <a:rPr lang="en-US" altLang="ko-KR" sz="1600" dirty="0"/>
+              <a:t>‘</a:t>
+            </a:r>
+            <a:r>
+              <a:rPr lang="ko-KR" altLang="en-US" sz="1600" dirty="0"/>
+              <a:t>은 신성한 존재로 인식되며 종교적 의례에 사용되었다</a:t>
+            </a:r>
+            <a:r>
+              <a:rPr lang="en-US" altLang="ko-KR" sz="1600" dirty="0"/>
+              <a:t>.</a:t>
+            </a:r>
+          </a:p>
+          <a:p>
+            <a:pPr marL="835025" lvl="1" indent="-285750">
+              <a:lnSpc>
+                <a:spcPct val="150000"/>
+              </a:lnSpc>
+              <a:buFont typeface="Wingdings" panose="05000000000000000000" pitchFamily="2" charset="2"/>
+              <a:buChar char="ü"/>
+            </a:pPr>
+            <a:endParaRPr lang="en-US" altLang="ko-KR" sz="1600" dirty="0"/>
+          </a:p>
+          <a:p>
+            <a:pPr marL="377825" indent="-285750">
+              <a:lnSpc>
+                <a:spcPct val="150000"/>
+              </a:lnSpc>
+              <a:buFont typeface="Arial" panose="020B0604020202020204" pitchFamily="34" charset="0"/>
+              <a:buChar char="•"/>
+            </a:pPr>
+            <a:r>
+              <a:rPr lang="en-US" altLang="ko-KR" sz="1600" dirty="0"/>
+              <a:t>19</a:t>
+            </a:r>
+            <a:r>
+              <a:rPr lang="ko-KR" altLang="en-US" sz="1600" dirty="0"/>
+              <a:t>세기 들어 산업화에 따라 천연가스의 상업적 활용이 시작되었다</a:t>
+            </a:r>
+            <a:r>
+              <a:rPr lang="en-US" altLang="ko-KR" sz="1600" dirty="0"/>
+              <a:t>.</a:t>
+            </a:r>
+          </a:p>
+          <a:p>
+            <a:pPr marL="835025" lvl="1" indent="-285750">
+              <a:lnSpc>
+                <a:spcPct val="150000"/>
+              </a:lnSpc>
+              <a:buFont typeface="Wingdings" panose="05000000000000000000" pitchFamily="2" charset="2"/>
+              <a:buChar char="ü"/>
+            </a:pPr>
+            <a:r>
+              <a:rPr lang="en-US" altLang="ko-KR" sz="1600" dirty="0"/>
+              <a:t>1821</a:t>
+            </a:r>
+            <a:r>
+              <a:rPr lang="ko-KR" altLang="en-US" sz="1600" dirty="0"/>
+              <a:t>년 미국 뉴욕주에서 세계 최초의 천연가스 우물이 </a:t>
+            </a:r>
+            <a:r>
+              <a:rPr lang="ko-KR" altLang="en-US" sz="1600" dirty="0" err="1"/>
+              <a:t>시추되었다</a:t>
+            </a:r>
+            <a:r>
+              <a:rPr lang="en-US" altLang="ko-KR" sz="1600" dirty="0"/>
+              <a:t>.</a:t>
+            </a:r>
+          </a:p>
+          <a:p>
+            <a:pPr marL="835025" lvl="1" indent="-285750">
+              <a:lnSpc>
+                <a:spcPct val="150000"/>
+              </a:lnSpc>
+              <a:buFont typeface="Wingdings" panose="05000000000000000000" pitchFamily="2" charset="2"/>
+              <a:buChar char="ü"/>
+            </a:pPr>
+            <a:r>
+              <a:rPr lang="en-US" altLang="ko-KR" sz="1600" dirty="0"/>
+              <a:t>1850</a:t>
+            </a:r>
+            <a:r>
+              <a:rPr lang="ko-KR" altLang="en-US" sz="1600" dirty="0"/>
+              <a:t>년대 중반부터는 도시의 가로등</a:t>
+            </a:r>
+            <a:r>
+              <a:rPr lang="en-US" altLang="ko-KR" sz="1600" dirty="0"/>
+              <a:t>, </a:t>
+            </a:r>
+            <a:r>
+              <a:rPr lang="ko-KR" altLang="en-US" sz="1600" dirty="0"/>
+              <a:t>가정 난방용으로 천연가스가 사용되기 시작하였다</a:t>
+            </a:r>
+            <a:r>
+              <a:rPr lang="en-US" altLang="ko-KR" sz="1600" dirty="0"/>
+              <a:t>.</a:t>
+            </a:r>
+          </a:p>
+          <a:p>
+            <a:pPr marL="835025" lvl="1" indent="-285750">
+              <a:lnSpc>
+                <a:spcPct val="150000"/>
+              </a:lnSpc>
+              <a:buFont typeface="Wingdings" panose="05000000000000000000" pitchFamily="2" charset="2"/>
+              <a:buChar char="ü"/>
+            </a:pPr>
+            <a:r>
+              <a:rPr lang="en-US" altLang="ko-KR" sz="1600" dirty="0"/>
+              <a:t>1859</a:t>
+            </a:r>
+            <a:r>
+              <a:rPr lang="ko-KR" altLang="en-US" sz="1600" dirty="0"/>
+              <a:t>년 펜실베니아 드레이크 성공은 </a:t>
+            </a:r>
+            <a:r>
+              <a:rPr lang="en-US" altLang="ko-KR" sz="1600" dirty="0"/>
+              <a:t>(</a:t>
+            </a:r>
+            <a:r>
+              <a:rPr lang="ko-KR" altLang="en-US" sz="1600" dirty="0" err="1"/>
+              <a:t>석유챕터</a:t>
+            </a:r>
+            <a:r>
+              <a:rPr lang="en-US" altLang="ko-KR" sz="1600" dirty="0"/>
+              <a:t> </a:t>
+            </a:r>
+            <a:r>
+              <a:rPr lang="ko-KR" altLang="en-US" sz="1600" dirty="0"/>
+              <a:t>참고</a:t>
+            </a:r>
+            <a:r>
+              <a:rPr lang="en-US" altLang="ko-KR" sz="1600" dirty="0"/>
+              <a:t>)</a:t>
+            </a:r>
+            <a:r>
+              <a:rPr lang="ko-KR" altLang="en-US" sz="1600" dirty="0"/>
+              <a:t> 석유 뿐만 아니라 천연가스 산업에도 기폭제 역할을 하였다</a:t>
+            </a:r>
+            <a:r>
+              <a:rPr lang="en-US" altLang="ko-KR" sz="1600" dirty="0"/>
+              <a:t>.</a:t>
+            </a:r>
+          </a:p>
+        </p:txBody>
+      </p:sp>
+    </p:spTree>
+    <p:extLst>
+      <p:ext uri="{BB962C8B-B14F-4D97-AF65-F5344CB8AC3E}">
+        <p14:creationId xmlns:p14="http://schemas.microsoft.com/office/powerpoint/2010/main" val="152177136"/>
+      </p:ext>
+    </p:extLst>
+  </p:cSld>
+  <p:clrMapOvr>
+    <a:masterClrMapping/>
+  </p:clrMapOvr>
+</p:sld>
+</file>
+
+<file path=ppt/slides/slide40.xml><?xml version="1.0" encoding="utf-8"?>
 <p:sld xmlns:a="http://schemas.openxmlformats.org/drawingml/2006/main" xmlns:r="http://schemas.openxmlformats.org/officeDocument/2006/relationships" xmlns:p="http://schemas.openxmlformats.org/presentationml/2006/main">
   <p:cSld>
     <p:spTree>
@@ -36945,7 +36563,7 @@
           <a:p>
             <a:fld id="{109C872D-39A9-4065-8BF3-6A613116E2A1}" type="slidenum">
               <a:rPr lang="ko-KR" altLang="en-US" smtClean="0"/>
-              <a:t>42</a:t>
+              <a:t>40</a:t>
             </a:fld>
             <a:endParaRPr lang="ko-KR" altLang="en-US"/>
           </a:p>
@@ -37245,7 +36863,7 @@
 </p:sld>
 </file>
 
-<file path=ppt/slides/slide43.xml><?xml version="1.0" encoding="utf-8"?>
+<file path=ppt/slides/slide41.xml><?xml version="1.0" encoding="utf-8"?>
 <p:sld xmlns:a="http://schemas.openxmlformats.org/drawingml/2006/main" xmlns:r="http://schemas.openxmlformats.org/officeDocument/2006/relationships" xmlns:p="http://schemas.openxmlformats.org/presentationml/2006/main">
   <p:cSld>
     <p:spTree>
@@ -37319,7 +36937,7 @@
           <a:p>
             <a:fld id="{109C872D-39A9-4065-8BF3-6A613116E2A1}" type="slidenum">
               <a:rPr lang="ko-KR" altLang="en-US" smtClean="0"/>
-              <a:t>43</a:t>
+              <a:t>41</a:t>
             </a:fld>
             <a:endParaRPr lang="ko-KR" altLang="en-US"/>
           </a:p>
@@ -37564,7 +37182,7 @@
 </p:sld>
 </file>
 
-<file path=ppt/slides/slide44.xml><?xml version="1.0" encoding="utf-8"?>
+<file path=ppt/slides/slide42.xml><?xml version="1.0" encoding="utf-8"?>
 <p:sld xmlns:a="http://schemas.openxmlformats.org/drawingml/2006/main" xmlns:r="http://schemas.openxmlformats.org/officeDocument/2006/relationships" xmlns:p="http://schemas.openxmlformats.org/presentationml/2006/main">
   <p:cSld>
     <p:spTree>
@@ -37638,7 +37256,7 @@
           <a:p>
             <a:fld id="{109C872D-39A9-4065-8BF3-6A613116E2A1}" type="slidenum">
               <a:rPr lang="ko-KR" altLang="en-US" smtClean="0"/>
-              <a:t>44</a:t>
+              <a:t>42</a:t>
             </a:fld>
             <a:endParaRPr lang="ko-KR" altLang="en-US"/>
           </a:p>
@@ -37954,7 +37572,7 @@
 </p:sld>
 </file>
 
-<file path=ppt/slides/slide45.xml><?xml version="1.0" encoding="utf-8"?>
+<file path=ppt/slides/slide43.xml><?xml version="1.0" encoding="utf-8"?>
 <p:sld xmlns:a="http://schemas.openxmlformats.org/drawingml/2006/main" xmlns:r="http://schemas.openxmlformats.org/officeDocument/2006/relationships" xmlns:p="http://schemas.openxmlformats.org/presentationml/2006/main">
   <p:cSld>
     <p:spTree>
@@ -38037,7 +37655,7 @@
           <a:p>
             <a:fld id="{109C872D-39A9-4065-8BF3-6A613116E2A1}" type="slidenum">
               <a:rPr lang="ko-KR" altLang="en-US" smtClean="0"/>
-              <a:t>45</a:t>
+              <a:t>43</a:t>
             </a:fld>
             <a:endParaRPr lang="ko-KR" altLang="en-US"/>
           </a:p>
@@ -38097,7 +37715,7 @@
 </p:sld>
 </file>
 
-<file path=ppt/slides/slide46.xml><?xml version="1.0" encoding="utf-8"?>
+<file path=ppt/slides/slide44.xml><?xml version="1.0" encoding="utf-8"?>
 <p:sld xmlns:a="http://schemas.openxmlformats.org/drawingml/2006/main" xmlns:r="http://schemas.openxmlformats.org/officeDocument/2006/relationships" xmlns:p="http://schemas.openxmlformats.org/presentationml/2006/main">
   <p:cSld>
     <p:spTree>
@@ -38171,7 +37789,7 @@
           <a:p>
             <a:fld id="{109C872D-39A9-4065-8BF3-6A613116E2A1}" type="slidenum">
               <a:rPr lang="ko-KR" altLang="en-US" smtClean="0"/>
-              <a:t>46</a:t>
+              <a:t>44</a:t>
             </a:fld>
             <a:endParaRPr lang="ko-KR" altLang="en-US"/>
           </a:p>
@@ -38471,7 +38089,7 @@
 </p:sld>
 </file>
 
-<file path=ppt/slides/slide47.xml><?xml version="1.0" encoding="utf-8"?>
+<file path=ppt/slides/slide45.xml><?xml version="1.0" encoding="utf-8"?>
 <p:sld xmlns:a="http://schemas.openxmlformats.org/drawingml/2006/main" xmlns:r="http://schemas.openxmlformats.org/officeDocument/2006/relationships" xmlns:p="http://schemas.openxmlformats.org/presentationml/2006/main">
   <p:cSld>
     <p:spTree>
@@ -38545,7 +38163,7 @@
           <a:p>
             <a:fld id="{109C872D-39A9-4065-8BF3-6A613116E2A1}" type="slidenum">
               <a:rPr lang="ko-KR" altLang="en-US" smtClean="0"/>
-              <a:t>47</a:t>
+              <a:t>45</a:t>
             </a:fld>
             <a:endParaRPr lang="ko-KR" altLang="en-US"/>
           </a:p>
@@ -38956,7 +38574,7 @@
 </p:sld>
 </file>
 
-<file path=ppt/slides/slide48.xml><?xml version="1.0" encoding="utf-8"?>
+<file path=ppt/slides/slide46.xml><?xml version="1.0" encoding="utf-8"?>
 <p:sld xmlns:a="http://schemas.openxmlformats.org/drawingml/2006/main" xmlns:r="http://schemas.openxmlformats.org/officeDocument/2006/relationships" xmlns:p="http://schemas.openxmlformats.org/presentationml/2006/main">
   <p:cSld>
     <p:spTree>
@@ -39030,7 +38648,7 @@
           <a:p>
             <a:fld id="{109C872D-39A9-4065-8BF3-6A613116E2A1}" type="slidenum">
               <a:rPr lang="ko-KR" altLang="en-US" smtClean="0"/>
-              <a:t>48</a:t>
+              <a:t>46</a:t>
             </a:fld>
             <a:endParaRPr lang="ko-KR" altLang="en-US"/>
           </a:p>
@@ -39287,7 +38905,7 @@
 </p:sld>
 </file>
 
-<file path=ppt/slides/slide49.xml><?xml version="1.0" encoding="utf-8"?>
+<file path=ppt/slides/slide47.xml><?xml version="1.0" encoding="utf-8"?>
 <p:sld xmlns:a="http://schemas.openxmlformats.org/drawingml/2006/main" xmlns:r="http://schemas.openxmlformats.org/officeDocument/2006/relationships" xmlns:p="http://schemas.openxmlformats.org/presentationml/2006/main">
   <p:cSld>
     <p:spTree>
@@ -39361,7 +38979,7 @@
           <a:p>
             <a:fld id="{109C872D-39A9-4065-8BF3-6A613116E2A1}" type="slidenum">
               <a:rPr lang="ko-KR" altLang="en-US" smtClean="0"/>
-              <a:t>49</a:t>
+              <a:t>47</a:t>
             </a:fld>
             <a:endParaRPr lang="ko-KR" altLang="en-US"/>
           </a:p>
@@ -39579,434 +39197,7 @@
 </p:sld>
 </file>
 
-<file path=ppt/slides/slide5.xml><?xml version="1.0" encoding="utf-8"?>
-<p:sld xmlns:a="http://schemas.openxmlformats.org/drawingml/2006/main" xmlns:r="http://schemas.openxmlformats.org/officeDocument/2006/relationships" xmlns:p="http://schemas.openxmlformats.org/presentationml/2006/main">
-  <p:cSld>
-    <p:spTree>
-      <p:nvGrpSpPr>
-        <p:cNvPr id="1" name="">
-          <a:extLst>
-            <a:ext uri="{FF2B5EF4-FFF2-40B4-BE49-F238E27FC236}">
-              <a16:creationId xmlns:a16="http://schemas.microsoft.com/office/drawing/2014/main" id="{AA58849E-C3EC-66C2-D5C9-C59E5D5BC968}"/>
-            </a:ext>
-          </a:extLst>
-        </p:cNvPr>
-        <p:cNvGrpSpPr/>
-        <p:nvPr/>
-      </p:nvGrpSpPr>
-      <p:grpSpPr>
-        <a:xfrm>
-          <a:off x="0" y="0"/>
-          <a:ext cx="0" cy="0"/>
-          <a:chOff x="0" y="0"/>
-          <a:chExt cx="0" cy="0"/>
-        </a:xfrm>
-      </p:grpSpPr>
-      <p:sp>
-        <p:nvSpPr>
-          <p:cNvPr id="2" name="제목 1">
-            <a:extLst>
-              <a:ext uri="{FF2B5EF4-FFF2-40B4-BE49-F238E27FC236}">
-                <a16:creationId xmlns:a16="http://schemas.microsoft.com/office/drawing/2014/main" id="{B4FAA21E-A0E0-EB01-8A47-F492A782CE9A}"/>
-              </a:ext>
-            </a:extLst>
-          </p:cNvPr>
-          <p:cNvSpPr>
-            <a:spLocks noGrp="1"/>
-          </p:cNvSpPr>
-          <p:nvPr>
-            <p:ph type="title"/>
-          </p:nvPr>
-        </p:nvSpPr>
-        <p:spPr/>
-        <p:txBody>
-          <a:bodyPr/>
-          <a:lstStyle/>
-          <a:p>
-            <a:r>
-              <a:rPr lang="ko-KR" altLang="en-US" dirty="0"/>
-              <a:t>서론</a:t>
-            </a:r>
-          </a:p>
-        </p:txBody>
-      </p:sp>
-      <p:sp>
-        <p:nvSpPr>
-          <p:cNvPr id="4" name="슬라이드 번호 개체 틀 3">
-            <a:extLst>
-              <a:ext uri="{FF2B5EF4-FFF2-40B4-BE49-F238E27FC236}">
-                <a16:creationId xmlns:a16="http://schemas.microsoft.com/office/drawing/2014/main" id="{3055CFF5-1045-A861-0C88-5A1DFAB93430}"/>
-              </a:ext>
-            </a:extLst>
-          </p:cNvPr>
-          <p:cNvSpPr>
-            <a:spLocks noGrp="1"/>
-          </p:cNvSpPr>
-          <p:nvPr>
-            <p:ph type="sldNum" sz="quarter" idx="12"/>
-          </p:nvPr>
-        </p:nvSpPr>
-        <p:spPr/>
-        <p:txBody>
-          <a:bodyPr/>
-          <a:lstStyle/>
-          <a:p>
-            <a:fld id="{109C872D-39A9-4065-8BF3-6A613116E2A1}" type="slidenum">
-              <a:rPr lang="ko-KR" altLang="en-US" smtClean="0"/>
-              <a:t>5</a:t>
-            </a:fld>
-            <a:endParaRPr lang="ko-KR" altLang="en-US"/>
-          </a:p>
-        </p:txBody>
-      </p:sp>
-      <p:sp>
-        <p:nvSpPr>
-          <p:cNvPr id="3" name="TextBox 2">
-            <a:extLst>
-              <a:ext uri="{FF2B5EF4-FFF2-40B4-BE49-F238E27FC236}">
-                <a16:creationId xmlns:a16="http://schemas.microsoft.com/office/drawing/2014/main" id="{F68FFC37-4353-1DB7-17B9-97C4402833EA}"/>
-              </a:ext>
-            </a:extLst>
-          </p:cNvPr>
-          <p:cNvSpPr txBox="1"/>
-          <p:nvPr/>
-        </p:nvSpPr>
-        <p:spPr>
-          <a:xfrm>
-            <a:off x="288790" y="958844"/>
-            <a:ext cx="11118453" cy="5584670"/>
-          </a:xfrm>
-          <a:prstGeom prst="rect">
-            <a:avLst/>
-          </a:prstGeom>
-          <a:noFill/>
-        </p:spPr>
-        <p:txBody>
-          <a:bodyPr wrap="square" rtlCol="0" anchor="t">
-            <a:spAutoFit/>
-          </a:bodyPr>
-          <a:lstStyle/>
-          <a:p>
-            <a:pPr marL="377825" indent="-285750">
-              <a:lnSpc>
-                <a:spcPct val="150000"/>
-              </a:lnSpc>
-              <a:buFont typeface="Arial" panose="020B0604020202020204" pitchFamily="34" charset="0"/>
-              <a:buChar char="•"/>
-            </a:pPr>
-            <a:r>
-              <a:rPr lang="en-US" altLang="ko-KR" sz="1600" dirty="0"/>
-              <a:t>20</a:t>
-            </a:r>
-            <a:r>
-              <a:rPr lang="ko-KR" altLang="en-US" sz="1600" dirty="0"/>
-              <a:t>세기 초반에는 파이프라인 기술의 발전으로</a:t>
-            </a:r>
-            <a:r>
-              <a:rPr lang="en-US" altLang="ko-KR" sz="1600" dirty="0"/>
-              <a:t> </a:t>
-            </a:r>
-            <a:r>
-              <a:rPr lang="ko-KR" altLang="en-US" sz="1600" dirty="0"/>
-              <a:t>천연가스의 대규모 수송이 가능해지며 산업적 활용이 크게 확대 </a:t>
-            </a:r>
-            <a:r>
-              <a:rPr lang="ko-KR" altLang="en-US" sz="1600" dirty="0" err="1"/>
-              <a:t>됬다</a:t>
-            </a:r>
-            <a:r>
-              <a:rPr lang="en-US" altLang="ko-KR" sz="1600" dirty="0"/>
-              <a:t>.</a:t>
-            </a:r>
-          </a:p>
-          <a:p>
-            <a:pPr marL="835025" lvl="1" indent="-285750">
-              <a:lnSpc>
-                <a:spcPct val="150000"/>
-              </a:lnSpc>
-              <a:buFont typeface="Wingdings" panose="05000000000000000000" pitchFamily="2" charset="2"/>
-              <a:buChar char="ü"/>
-            </a:pPr>
-            <a:r>
-              <a:rPr lang="en-US" altLang="ko-KR" sz="1600" dirty="0"/>
-              <a:t>1920</a:t>
-            </a:r>
-            <a:r>
-              <a:rPr lang="ko-KR" altLang="en-US" sz="1600" dirty="0"/>
-              <a:t>년대에는 장거리 천연가스 파이프라인이 건설되기 시작하였다</a:t>
-            </a:r>
-            <a:r>
-              <a:rPr lang="en-US" altLang="ko-KR" sz="1600" dirty="0"/>
-              <a:t>.</a:t>
-            </a:r>
-          </a:p>
-          <a:p>
-            <a:pPr marL="835025" lvl="1" indent="-285750">
-              <a:lnSpc>
-                <a:spcPct val="150000"/>
-              </a:lnSpc>
-              <a:buFont typeface="Wingdings" panose="05000000000000000000" pitchFamily="2" charset="2"/>
-              <a:buChar char="ü"/>
-            </a:pPr>
-            <a:r>
-              <a:rPr lang="en-US" altLang="ko-KR" sz="1600" dirty="0"/>
-              <a:t>1927</a:t>
-            </a:r>
-            <a:r>
-              <a:rPr lang="ko-KR" altLang="en-US" sz="1600" dirty="0"/>
-              <a:t>년에는 인디애나주와 시카고를 잇는 미국 최초의 장거리 파이프라인이 가동되었다</a:t>
-            </a:r>
-            <a:r>
-              <a:rPr lang="en-US" altLang="ko-KR" sz="1600" dirty="0"/>
-              <a:t>.</a:t>
-            </a:r>
-          </a:p>
-          <a:p>
-            <a:pPr marL="835025" lvl="1" indent="-285750">
-              <a:lnSpc>
-                <a:spcPct val="150000"/>
-              </a:lnSpc>
-              <a:buFont typeface="Wingdings" panose="05000000000000000000" pitchFamily="2" charset="2"/>
-              <a:buChar char="ü"/>
-            </a:pPr>
-            <a:endParaRPr lang="en-US" altLang="ko-KR" sz="1600" dirty="0"/>
-          </a:p>
-          <a:p>
-            <a:pPr marL="377825" indent="-285750">
-              <a:lnSpc>
-                <a:spcPct val="150000"/>
-              </a:lnSpc>
-              <a:buFont typeface="Arial" panose="020B0604020202020204" pitchFamily="34" charset="0"/>
-              <a:buChar char="•"/>
-            </a:pPr>
-            <a:r>
-              <a:rPr lang="en-US" altLang="ko-KR" sz="1600" dirty="0"/>
-              <a:t>1950~1960</a:t>
-            </a:r>
-            <a:r>
-              <a:rPr lang="ko-KR" altLang="en-US" sz="1600" dirty="0"/>
-              <a:t>년대는 천연가스 산업의 황금기이며</a:t>
-            </a:r>
-            <a:r>
-              <a:rPr lang="en-US" altLang="ko-KR" sz="1600" dirty="0"/>
-              <a:t>, </a:t>
-            </a:r>
-            <a:r>
-              <a:rPr lang="ko-KR" altLang="en-US" sz="1600" dirty="0"/>
-              <a:t>가정용과 산업용 에너지원으로서 수요가 폭발적인 증가를 보였다</a:t>
-            </a:r>
-            <a:r>
-              <a:rPr lang="en-US" altLang="ko-KR" sz="1600" dirty="0"/>
-              <a:t>.</a:t>
-            </a:r>
-          </a:p>
-          <a:p>
-            <a:pPr marL="835025" lvl="1" indent="-285750">
-              <a:lnSpc>
-                <a:spcPct val="150000"/>
-              </a:lnSpc>
-              <a:buFont typeface="Wingdings" panose="05000000000000000000" pitchFamily="2" charset="2"/>
-              <a:buChar char="ü"/>
-            </a:pPr>
-            <a:r>
-              <a:rPr lang="ko-KR" altLang="en-US" sz="1600" dirty="0"/>
-              <a:t>전력 생산부문에서는 석탄과 함께 주요 기저발전원으로 자리 잡았고</a:t>
-            </a:r>
-            <a:r>
-              <a:rPr lang="en-US" altLang="ko-KR" sz="1600" dirty="0"/>
-              <a:t>, </a:t>
-            </a:r>
-            <a:r>
-              <a:rPr lang="ko-KR" altLang="en-US" sz="1600" dirty="0"/>
-              <a:t>천연가스의 청정성과 연소 효율성으로 도시지역의 </a:t>
-            </a:r>
-            <a:r>
-              <a:rPr lang="ko-KR" altLang="en-US" sz="1600" dirty="0" err="1"/>
-              <a:t>대기질</a:t>
-            </a:r>
-            <a:r>
-              <a:rPr lang="ko-KR" altLang="en-US" sz="1600" dirty="0"/>
-              <a:t> 개선에도 기여하였다</a:t>
-            </a:r>
-            <a:r>
-              <a:rPr lang="en-US" altLang="ko-KR" sz="1600" dirty="0"/>
-              <a:t>.</a:t>
-            </a:r>
-          </a:p>
-          <a:p>
-            <a:pPr marL="835025" lvl="1" indent="-285750">
-              <a:lnSpc>
-                <a:spcPct val="150000"/>
-              </a:lnSpc>
-              <a:buFont typeface="Wingdings" panose="05000000000000000000" pitchFamily="2" charset="2"/>
-              <a:buChar char="ü"/>
-            </a:pPr>
-            <a:r>
-              <a:rPr lang="ko-KR" altLang="en-US" sz="1600" dirty="0"/>
-              <a:t>이 시기에 미국과 구소련</a:t>
-            </a:r>
-            <a:r>
-              <a:rPr lang="en-US" altLang="ko-KR" sz="1600" dirty="0"/>
-              <a:t>, </a:t>
-            </a:r>
-            <a:r>
-              <a:rPr lang="ko-KR" altLang="en-US" sz="1600" dirty="0"/>
-              <a:t>중동 지역에서는 대규모 가스전이 연이어 발견되었고</a:t>
-            </a:r>
-            <a:r>
-              <a:rPr lang="en-US" altLang="ko-KR" sz="1600" dirty="0"/>
-              <a:t>, </a:t>
-            </a:r>
-            <a:r>
-              <a:rPr lang="ko-KR" altLang="en-US" sz="1600" dirty="0"/>
-              <a:t>향후 글로벌 천연가스 공급의 기반이 되었다</a:t>
-            </a:r>
-            <a:r>
-              <a:rPr lang="en-US" altLang="ko-KR" sz="1600" dirty="0"/>
-              <a:t>.</a:t>
-            </a:r>
-          </a:p>
-          <a:p>
-            <a:pPr marL="835025" lvl="1" indent="-285750">
-              <a:lnSpc>
-                <a:spcPct val="150000"/>
-              </a:lnSpc>
-              <a:buFont typeface="Wingdings" panose="05000000000000000000" pitchFamily="2" charset="2"/>
-              <a:buChar char="ü"/>
-            </a:pPr>
-            <a:endParaRPr lang="en-US" altLang="ko-KR" sz="1600" dirty="0"/>
-          </a:p>
-          <a:p>
-            <a:pPr marL="377825" indent="-285750">
-              <a:lnSpc>
-                <a:spcPct val="150000"/>
-              </a:lnSpc>
-              <a:buFont typeface="Arial" panose="020B0604020202020204" pitchFamily="34" charset="0"/>
-              <a:buChar char="•"/>
-            </a:pPr>
-            <a:r>
-              <a:rPr lang="en-US" altLang="ko-KR" sz="1600" dirty="0"/>
-              <a:t>1980</a:t>
-            </a:r>
-            <a:r>
-              <a:rPr lang="ko-KR" altLang="en-US" sz="1600" dirty="0"/>
-              <a:t>년</a:t>
-            </a:r>
-            <a:r>
-              <a:rPr lang="en-US" altLang="ko-KR" sz="1600" dirty="0"/>
-              <a:t>~1990</a:t>
-            </a:r>
-            <a:r>
-              <a:rPr lang="ko-KR" altLang="en-US" sz="1600" dirty="0"/>
-              <a:t>년대는 천연가스의 국제무역이 본격화된 시기로 액화천연가스 기술의 발달이 중요한 전환점이 되었다</a:t>
-            </a:r>
-            <a:r>
-              <a:rPr lang="en-US" altLang="ko-KR" sz="1600" dirty="0"/>
-              <a:t>.</a:t>
-            </a:r>
-          </a:p>
-          <a:p>
-            <a:pPr marL="835025" lvl="1" indent="-285750">
-              <a:lnSpc>
-                <a:spcPct val="150000"/>
-              </a:lnSpc>
-              <a:buFont typeface="Wingdings" panose="05000000000000000000" pitchFamily="2" charset="2"/>
-              <a:buChar char="ü"/>
-            </a:pPr>
-            <a:r>
-              <a:rPr lang="ko-KR" altLang="en-US" sz="1600" dirty="0"/>
-              <a:t>액화천연가스</a:t>
-            </a:r>
-            <a:r>
-              <a:rPr lang="en-US" altLang="ko-KR" sz="1600" dirty="0"/>
-              <a:t>(LNG; Liquified Natural Gas) </a:t>
-            </a:r>
-            <a:r>
-              <a:rPr lang="ko-KR" altLang="en-US" sz="1600" dirty="0"/>
-              <a:t>기술은 가스를 영하</a:t>
-            </a:r>
-            <a:r>
-              <a:rPr lang="en-US" altLang="ko-KR" sz="1600" dirty="0"/>
-              <a:t>162</a:t>
-            </a:r>
-            <a:r>
-              <a:rPr lang="ko-KR" altLang="en-US" sz="1600" dirty="0"/>
-              <a:t>도까지 냉각하여 </a:t>
-            </a:r>
-            <a:r>
-              <a:rPr lang="ko-KR" altLang="en-US" sz="1600" dirty="0" err="1"/>
-              <a:t>액화한</a:t>
-            </a:r>
-            <a:r>
-              <a:rPr lang="ko-KR" altLang="en-US" sz="1600" dirty="0"/>
-              <a:t> 뒤 해상으로 수송하는 방식을 가능케 하여</a:t>
-            </a:r>
-            <a:r>
-              <a:rPr lang="en-US" altLang="ko-KR" sz="1600" dirty="0"/>
-              <a:t>, </a:t>
-            </a:r>
-            <a:r>
-              <a:rPr lang="ko-KR" altLang="en-US" sz="1600" dirty="0"/>
-              <a:t>파이프라인으로 공급하지 못하는 지역에도 천연가스를 공급할 수 있게 되었다</a:t>
-            </a:r>
-            <a:r>
-              <a:rPr lang="en-US" altLang="ko-KR" sz="1600" dirty="0"/>
-              <a:t>.</a:t>
-            </a:r>
-          </a:p>
-          <a:p>
-            <a:pPr marL="835025" lvl="1" indent="-285750">
-              <a:lnSpc>
-                <a:spcPct val="150000"/>
-              </a:lnSpc>
-              <a:buFont typeface="Wingdings" panose="05000000000000000000" pitchFamily="2" charset="2"/>
-              <a:buChar char="ü"/>
-            </a:pPr>
-            <a:r>
-              <a:rPr lang="en-US" altLang="ko-KR" sz="1600" dirty="0"/>
-              <a:t>1964</a:t>
-            </a:r>
-            <a:r>
-              <a:rPr lang="ko-KR" altLang="en-US" sz="1600" dirty="0"/>
-              <a:t>년 알제리에서 영국으로 </a:t>
-            </a:r>
-            <a:r>
-              <a:rPr lang="en-US" altLang="ko-KR" sz="1600" dirty="0"/>
-              <a:t>LNG </a:t>
-            </a:r>
-            <a:r>
-              <a:rPr lang="ko-KR" altLang="en-US" sz="1600" dirty="0"/>
-              <a:t>수출이 최초로 이루어지고</a:t>
-            </a:r>
-            <a:r>
-              <a:rPr lang="en-US" altLang="ko-KR" sz="1600" dirty="0"/>
-              <a:t>, </a:t>
-            </a:r>
-            <a:r>
-              <a:rPr lang="ko-KR" altLang="en-US" sz="1600" dirty="0"/>
-              <a:t>해상수송은 세계 천연가스시장에서 중요한 운송수단으로 자리잡았다</a:t>
-            </a:r>
-            <a:r>
-              <a:rPr lang="en-US" altLang="ko-KR" sz="1600" dirty="0"/>
-              <a:t>.</a:t>
-            </a:r>
-          </a:p>
-        </p:txBody>
-      </p:sp>
-    </p:spTree>
-    <p:extLst>
-      <p:ext uri="{BB962C8B-B14F-4D97-AF65-F5344CB8AC3E}">
-        <p14:creationId xmlns:p14="http://schemas.microsoft.com/office/powerpoint/2010/main" val="2296139293"/>
-      </p:ext>
-    </p:extLst>
-  </p:cSld>
-  <p:clrMapOvr>
-    <a:masterClrMapping/>
-  </p:clrMapOvr>
-</p:sld>
-</file>
-
-<file path=ppt/slides/slide50.xml><?xml version="1.0" encoding="utf-8"?>
+<file path=ppt/slides/slide48.xml><?xml version="1.0" encoding="utf-8"?>
 <p:sld xmlns:a="http://schemas.openxmlformats.org/drawingml/2006/main" xmlns:r="http://schemas.openxmlformats.org/officeDocument/2006/relationships" xmlns:p="http://schemas.openxmlformats.org/presentationml/2006/main">
   <p:cSld>
     <p:spTree>
@@ -40089,7 +39280,7 @@
           <a:p>
             <a:fld id="{109C872D-39A9-4065-8BF3-6A613116E2A1}" type="slidenum">
               <a:rPr lang="ko-KR" altLang="en-US" smtClean="0"/>
-              <a:t>50</a:t>
+              <a:t>48</a:t>
             </a:fld>
             <a:endParaRPr lang="ko-KR" altLang="en-US"/>
           </a:p>
@@ -40149,7 +39340,7 @@
 </p:sld>
 </file>
 
-<file path=ppt/slides/slide51.xml><?xml version="1.0" encoding="utf-8"?>
+<file path=ppt/slides/slide49.xml><?xml version="1.0" encoding="utf-8"?>
 <p:sld xmlns:a="http://schemas.openxmlformats.org/drawingml/2006/main" xmlns:r="http://schemas.openxmlformats.org/officeDocument/2006/relationships" xmlns:p="http://schemas.openxmlformats.org/presentationml/2006/main">
   <p:cSld>
     <p:spTree>
@@ -40223,7 +39414,7 @@
           <a:p>
             <a:fld id="{109C872D-39A9-4065-8BF3-6A613116E2A1}" type="slidenum">
               <a:rPr lang="ko-KR" altLang="en-US" smtClean="0"/>
-              <a:t>51</a:t>
+              <a:t>49</a:t>
             </a:fld>
             <a:endParaRPr lang="ko-KR" altLang="en-US"/>
           </a:p>
@@ -40517,7 +39708,434 @@
 </p:sld>
 </file>
 
-<file path=ppt/slides/slide52.xml><?xml version="1.0" encoding="utf-8"?>
+<file path=ppt/slides/slide5.xml><?xml version="1.0" encoding="utf-8"?>
+<p:sld xmlns:a="http://schemas.openxmlformats.org/drawingml/2006/main" xmlns:r="http://schemas.openxmlformats.org/officeDocument/2006/relationships" xmlns:p="http://schemas.openxmlformats.org/presentationml/2006/main">
+  <p:cSld>
+    <p:spTree>
+      <p:nvGrpSpPr>
+        <p:cNvPr id="1" name="">
+          <a:extLst>
+            <a:ext uri="{FF2B5EF4-FFF2-40B4-BE49-F238E27FC236}">
+              <a16:creationId xmlns:a16="http://schemas.microsoft.com/office/drawing/2014/main" id="{AA58849E-C3EC-66C2-D5C9-C59E5D5BC968}"/>
+            </a:ext>
+          </a:extLst>
+        </p:cNvPr>
+        <p:cNvGrpSpPr/>
+        <p:nvPr/>
+      </p:nvGrpSpPr>
+      <p:grpSpPr>
+        <a:xfrm>
+          <a:off x="0" y="0"/>
+          <a:ext cx="0" cy="0"/>
+          <a:chOff x="0" y="0"/>
+          <a:chExt cx="0" cy="0"/>
+        </a:xfrm>
+      </p:grpSpPr>
+      <p:sp>
+        <p:nvSpPr>
+          <p:cNvPr id="2" name="제목 1">
+            <a:extLst>
+              <a:ext uri="{FF2B5EF4-FFF2-40B4-BE49-F238E27FC236}">
+                <a16:creationId xmlns:a16="http://schemas.microsoft.com/office/drawing/2014/main" id="{B4FAA21E-A0E0-EB01-8A47-F492A782CE9A}"/>
+              </a:ext>
+            </a:extLst>
+          </p:cNvPr>
+          <p:cNvSpPr>
+            <a:spLocks noGrp="1"/>
+          </p:cNvSpPr>
+          <p:nvPr>
+            <p:ph type="title"/>
+          </p:nvPr>
+        </p:nvSpPr>
+        <p:spPr/>
+        <p:txBody>
+          <a:bodyPr/>
+          <a:lstStyle/>
+          <a:p>
+            <a:r>
+              <a:rPr lang="ko-KR" altLang="en-US" dirty="0"/>
+              <a:t>서론</a:t>
+            </a:r>
+          </a:p>
+        </p:txBody>
+      </p:sp>
+      <p:sp>
+        <p:nvSpPr>
+          <p:cNvPr id="4" name="슬라이드 번호 개체 틀 3">
+            <a:extLst>
+              <a:ext uri="{FF2B5EF4-FFF2-40B4-BE49-F238E27FC236}">
+                <a16:creationId xmlns:a16="http://schemas.microsoft.com/office/drawing/2014/main" id="{3055CFF5-1045-A861-0C88-5A1DFAB93430}"/>
+              </a:ext>
+            </a:extLst>
+          </p:cNvPr>
+          <p:cNvSpPr>
+            <a:spLocks noGrp="1"/>
+          </p:cNvSpPr>
+          <p:nvPr>
+            <p:ph type="sldNum" sz="quarter" idx="12"/>
+          </p:nvPr>
+        </p:nvSpPr>
+        <p:spPr/>
+        <p:txBody>
+          <a:bodyPr/>
+          <a:lstStyle/>
+          <a:p>
+            <a:fld id="{109C872D-39A9-4065-8BF3-6A613116E2A1}" type="slidenum">
+              <a:rPr lang="ko-KR" altLang="en-US" smtClean="0"/>
+              <a:t>5</a:t>
+            </a:fld>
+            <a:endParaRPr lang="ko-KR" altLang="en-US"/>
+          </a:p>
+        </p:txBody>
+      </p:sp>
+      <p:sp>
+        <p:nvSpPr>
+          <p:cNvPr id="3" name="TextBox 2">
+            <a:extLst>
+              <a:ext uri="{FF2B5EF4-FFF2-40B4-BE49-F238E27FC236}">
+                <a16:creationId xmlns:a16="http://schemas.microsoft.com/office/drawing/2014/main" id="{F68FFC37-4353-1DB7-17B9-97C4402833EA}"/>
+              </a:ext>
+            </a:extLst>
+          </p:cNvPr>
+          <p:cNvSpPr txBox="1"/>
+          <p:nvPr/>
+        </p:nvSpPr>
+        <p:spPr>
+          <a:xfrm>
+            <a:off x="288790" y="958844"/>
+            <a:ext cx="11118453" cy="5584670"/>
+          </a:xfrm>
+          <a:prstGeom prst="rect">
+            <a:avLst/>
+          </a:prstGeom>
+          <a:noFill/>
+        </p:spPr>
+        <p:txBody>
+          <a:bodyPr wrap="square" rtlCol="0" anchor="t">
+            <a:spAutoFit/>
+          </a:bodyPr>
+          <a:lstStyle/>
+          <a:p>
+            <a:pPr marL="377825" indent="-285750">
+              <a:lnSpc>
+                <a:spcPct val="150000"/>
+              </a:lnSpc>
+              <a:buFont typeface="Arial" panose="020B0604020202020204" pitchFamily="34" charset="0"/>
+              <a:buChar char="•"/>
+            </a:pPr>
+            <a:r>
+              <a:rPr lang="en-US" altLang="ko-KR" sz="1600" dirty="0"/>
+              <a:t>20</a:t>
+            </a:r>
+            <a:r>
+              <a:rPr lang="ko-KR" altLang="en-US" sz="1600" dirty="0"/>
+              <a:t>세기 초반에는 파이프라인 기술의 발전으로</a:t>
+            </a:r>
+            <a:r>
+              <a:rPr lang="en-US" altLang="ko-KR" sz="1600" dirty="0"/>
+              <a:t> </a:t>
+            </a:r>
+            <a:r>
+              <a:rPr lang="ko-KR" altLang="en-US" sz="1600" dirty="0"/>
+              <a:t>천연가스의 대규모 수송이 가능해지며 산업적 활용이 크게 확대 </a:t>
+            </a:r>
+            <a:r>
+              <a:rPr lang="ko-KR" altLang="en-US" sz="1600" dirty="0" err="1"/>
+              <a:t>됬다</a:t>
+            </a:r>
+            <a:r>
+              <a:rPr lang="en-US" altLang="ko-KR" sz="1600" dirty="0"/>
+              <a:t>.</a:t>
+            </a:r>
+          </a:p>
+          <a:p>
+            <a:pPr marL="835025" lvl="1" indent="-285750">
+              <a:lnSpc>
+                <a:spcPct val="150000"/>
+              </a:lnSpc>
+              <a:buFont typeface="Wingdings" panose="05000000000000000000" pitchFamily="2" charset="2"/>
+              <a:buChar char="ü"/>
+            </a:pPr>
+            <a:r>
+              <a:rPr lang="en-US" altLang="ko-KR" sz="1600" dirty="0"/>
+              <a:t>1920</a:t>
+            </a:r>
+            <a:r>
+              <a:rPr lang="ko-KR" altLang="en-US" sz="1600" dirty="0"/>
+              <a:t>년대에는 장거리 천연가스 파이프라인이 건설되기 시작하였다</a:t>
+            </a:r>
+            <a:r>
+              <a:rPr lang="en-US" altLang="ko-KR" sz="1600" dirty="0"/>
+              <a:t>.</a:t>
+            </a:r>
+          </a:p>
+          <a:p>
+            <a:pPr marL="835025" lvl="1" indent="-285750">
+              <a:lnSpc>
+                <a:spcPct val="150000"/>
+              </a:lnSpc>
+              <a:buFont typeface="Wingdings" panose="05000000000000000000" pitchFamily="2" charset="2"/>
+              <a:buChar char="ü"/>
+            </a:pPr>
+            <a:r>
+              <a:rPr lang="en-US" altLang="ko-KR" sz="1600" dirty="0"/>
+              <a:t>1927</a:t>
+            </a:r>
+            <a:r>
+              <a:rPr lang="ko-KR" altLang="en-US" sz="1600" dirty="0"/>
+              <a:t>년에는 인디애나주와 시카고를 잇는 미국 최초의 장거리 파이프라인이 가동되었다</a:t>
+            </a:r>
+            <a:r>
+              <a:rPr lang="en-US" altLang="ko-KR" sz="1600" dirty="0"/>
+              <a:t>.</a:t>
+            </a:r>
+          </a:p>
+          <a:p>
+            <a:pPr marL="835025" lvl="1" indent="-285750">
+              <a:lnSpc>
+                <a:spcPct val="150000"/>
+              </a:lnSpc>
+              <a:buFont typeface="Wingdings" panose="05000000000000000000" pitchFamily="2" charset="2"/>
+              <a:buChar char="ü"/>
+            </a:pPr>
+            <a:endParaRPr lang="en-US" altLang="ko-KR" sz="1600" dirty="0"/>
+          </a:p>
+          <a:p>
+            <a:pPr marL="377825" indent="-285750">
+              <a:lnSpc>
+                <a:spcPct val="150000"/>
+              </a:lnSpc>
+              <a:buFont typeface="Arial" panose="020B0604020202020204" pitchFamily="34" charset="0"/>
+              <a:buChar char="•"/>
+            </a:pPr>
+            <a:r>
+              <a:rPr lang="en-US" altLang="ko-KR" sz="1600" dirty="0"/>
+              <a:t>1950~1960</a:t>
+            </a:r>
+            <a:r>
+              <a:rPr lang="ko-KR" altLang="en-US" sz="1600" dirty="0"/>
+              <a:t>년대는 천연가스 산업의 황금기이며</a:t>
+            </a:r>
+            <a:r>
+              <a:rPr lang="en-US" altLang="ko-KR" sz="1600" dirty="0"/>
+              <a:t>, </a:t>
+            </a:r>
+            <a:r>
+              <a:rPr lang="ko-KR" altLang="en-US" sz="1600" dirty="0"/>
+              <a:t>가정용과 산업용 에너지원으로서 수요가 폭발적인 증가를 보였다</a:t>
+            </a:r>
+            <a:r>
+              <a:rPr lang="en-US" altLang="ko-KR" sz="1600" dirty="0"/>
+              <a:t>.</a:t>
+            </a:r>
+          </a:p>
+          <a:p>
+            <a:pPr marL="835025" lvl="1" indent="-285750">
+              <a:lnSpc>
+                <a:spcPct val="150000"/>
+              </a:lnSpc>
+              <a:buFont typeface="Wingdings" panose="05000000000000000000" pitchFamily="2" charset="2"/>
+              <a:buChar char="ü"/>
+            </a:pPr>
+            <a:r>
+              <a:rPr lang="ko-KR" altLang="en-US" sz="1600" dirty="0"/>
+              <a:t>전력 생산부문에서는 석탄과 함께 주요 기저발전원으로 자리 잡았고</a:t>
+            </a:r>
+            <a:r>
+              <a:rPr lang="en-US" altLang="ko-KR" sz="1600" dirty="0"/>
+              <a:t>, </a:t>
+            </a:r>
+            <a:r>
+              <a:rPr lang="ko-KR" altLang="en-US" sz="1600" dirty="0"/>
+              <a:t>천연가스의 청정성과 연소 효율성으로 도시지역의 </a:t>
+            </a:r>
+            <a:r>
+              <a:rPr lang="ko-KR" altLang="en-US" sz="1600" dirty="0" err="1"/>
+              <a:t>대기질</a:t>
+            </a:r>
+            <a:r>
+              <a:rPr lang="ko-KR" altLang="en-US" sz="1600" dirty="0"/>
+              <a:t> 개선에도 기여하였다</a:t>
+            </a:r>
+            <a:r>
+              <a:rPr lang="en-US" altLang="ko-KR" sz="1600" dirty="0"/>
+              <a:t>.</a:t>
+            </a:r>
+          </a:p>
+          <a:p>
+            <a:pPr marL="835025" lvl="1" indent="-285750">
+              <a:lnSpc>
+                <a:spcPct val="150000"/>
+              </a:lnSpc>
+              <a:buFont typeface="Wingdings" panose="05000000000000000000" pitchFamily="2" charset="2"/>
+              <a:buChar char="ü"/>
+            </a:pPr>
+            <a:r>
+              <a:rPr lang="ko-KR" altLang="en-US" sz="1600" dirty="0"/>
+              <a:t>이 시기에 미국과 구소련</a:t>
+            </a:r>
+            <a:r>
+              <a:rPr lang="en-US" altLang="ko-KR" sz="1600" dirty="0"/>
+              <a:t>, </a:t>
+            </a:r>
+            <a:r>
+              <a:rPr lang="ko-KR" altLang="en-US" sz="1600" dirty="0"/>
+              <a:t>중동 지역에서는 대규모 가스전이 연이어 발견되었고</a:t>
+            </a:r>
+            <a:r>
+              <a:rPr lang="en-US" altLang="ko-KR" sz="1600" dirty="0"/>
+              <a:t>, </a:t>
+            </a:r>
+            <a:r>
+              <a:rPr lang="ko-KR" altLang="en-US" sz="1600" dirty="0"/>
+              <a:t>향후 글로벌 천연가스 공급의 기반이 되었다</a:t>
+            </a:r>
+            <a:r>
+              <a:rPr lang="en-US" altLang="ko-KR" sz="1600" dirty="0"/>
+              <a:t>.</a:t>
+            </a:r>
+          </a:p>
+          <a:p>
+            <a:pPr marL="835025" lvl="1" indent="-285750">
+              <a:lnSpc>
+                <a:spcPct val="150000"/>
+              </a:lnSpc>
+              <a:buFont typeface="Wingdings" panose="05000000000000000000" pitchFamily="2" charset="2"/>
+              <a:buChar char="ü"/>
+            </a:pPr>
+            <a:endParaRPr lang="en-US" altLang="ko-KR" sz="1600" dirty="0"/>
+          </a:p>
+          <a:p>
+            <a:pPr marL="377825" indent="-285750">
+              <a:lnSpc>
+                <a:spcPct val="150000"/>
+              </a:lnSpc>
+              <a:buFont typeface="Arial" panose="020B0604020202020204" pitchFamily="34" charset="0"/>
+              <a:buChar char="•"/>
+            </a:pPr>
+            <a:r>
+              <a:rPr lang="en-US" altLang="ko-KR" sz="1600" dirty="0"/>
+              <a:t>1980</a:t>
+            </a:r>
+            <a:r>
+              <a:rPr lang="ko-KR" altLang="en-US" sz="1600" dirty="0"/>
+              <a:t>년</a:t>
+            </a:r>
+            <a:r>
+              <a:rPr lang="en-US" altLang="ko-KR" sz="1600" dirty="0"/>
+              <a:t>~1990</a:t>
+            </a:r>
+            <a:r>
+              <a:rPr lang="ko-KR" altLang="en-US" sz="1600" dirty="0"/>
+              <a:t>년대는 천연가스의 국제무역이 본격화된 시기로 액화천연가스 기술의 발달이 중요한 전환점이 되었다</a:t>
+            </a:r>
+            <a:r>
+              <a:rPr lang="en-US" altLang="ko-KR" sz="1600" dirty="0"/>
+              <a:t>.</a:t>
+            </a:r>
+          </a:p>
+          <a:p>
+            <a:pPr marL="835025" lvl="1" indent="-285750">
+              <a:lnSpc>
+                <a:spcPct val="150000"/>
+              </a:lnSpc>
+              <a:buFont typeface="Wingdings" panose="05000000000000000000" pitchFamily="2" charset="2"/>
+              <a:buChar char="ü"/>
+            </a:pPr>
+            <a:r>
+              <a:rPr lang="ko-KR" altLang="en-US" sz="1600" dirty="0"/>
+              <a:t>액화천연가스</a:t>
+            </a:r>
+            <a:r>
+              <a:rPr lang="en-US" altLang="ko-KR" sz="1600" dirty="0"/>
+              <a:t>(LNG; Liquified Natural Gas) </a:t>
+            </a:r>
+            <a:r>
+              <a:rPr lang="ko-KR" altLang="en-US" sz="1600" dirty="0"/>
+              <a:t>기술은 가스를 영하</a:t>
+            </a:r>
+            <a:r>
+              <a:rPr lang="en-US" altLang="ko-KR" sz="1600" dirty="0"/>
+              <a:t>162</a:t>
+            </a:r>
+            <a:r>
+              <a:rPr lang="ko-KR" altLang="en-US" sz="1600" dirty="0"/>
+              <a:t>도까지 냉각하여 </a:t>
+            </a:r>
+            <a:r>
+              <a:rPr lang="ko-KR" altLang="en-US" sz="1600" dirty="0" err="1"/>
+              <a:t>액화한</a:t>
+            </a:r>
+            <a:r>
+              <a:rPr lang="ko-KR" altLang="en-US" sz="1600" dirty="0"/>
+              <a:t> 뒤 해상으로 수송하는 방식을 가능케 하여</a:t>
+            </a:r>
+            <a:r>
+              <a:rPr lang="en-US" altLang="ko-KR" sz="1600" dirty="0"/>
+              <a:t>, </a:t>
+            </a:r>
+            <a:r>
+              <a:rPr lang="ko-KR" altLang="en-US" sz="1600" dirty="0"/>
+              <a:t>파이프라인으로 공급하지 못하는 지역에도 천연가스를 공급할 수 있게 되었다</a:t>
+            </a:r>
+            <a:r>
+              <a:rPr lang="en-US" altLang="ko-KR" sz="1600" dirty="0"/>
+              <a:t>.</a:t>
+            </a:r>
+          </a:p>
+          <a:p>
+            <a:pPr marL="835025" lvl="1" indent="-285750">
+              <a:lnSpc>
+                <a:spcPct val="150000"/>
+              </a:lnSpc>
+              <a:buFont typeface="Wingdings" panose="05000000000000000000" pitchFamily="2" charset="2"/>
+              <a:buChar char="ü"/>
+            </a:pPr>
+            <a:r>
+              <a:rPr lang="en-US" altLang="ko-KR" sz="1600" dirty="0"/>
+              <a:t>1964</a:t>
+            </a:r>
+            <a:r>
+              <a:rPr lang="ko-KR" altLang="en-US" sz="1600" dirty="0"/>
+              <a:t>년 알제리에서 영국으로 </a:t>
+            </a:r>
+            <a:r>
+              <a:rPr lang="en-US" altLang="ko-KR" sz="1600" dirty="0"/>
+              <a:t>LNG </a:t>
+            </a:r>
+            <a:r>
+              <a:rPr lang="ko-KR" altLang="en-US" sz="1600" dirty="0"/>
+              <a:t>수출이 최초로 이루어지고</a:t>
+            </a:r>
+            <a:r>
+              <a:rPr lang="en-US" altLang="ko-KR" sz="1600" dirty="0"/>
+              <a:t>, </a:t>
+            </a:r>
+            <a:r>
+              <a:rPr lang="ko-KR" altLang="en-US" sz="1600" dirty="0"/>
+              <a:t>해상수송은 세계 천연가스시장에서 중요한 운송수단으로 자리잡았다</a:t>
+            </a:r>
+            <a:r>
+              <a:rPr lang="en-US" altLang="ko-KR" sz="1600" dirty="0"/>
+              <a:t>.</a:t>
+            </a:r>
+          </a:p>
+        </p:txBody>
+      </p:sp>
+    </p:spTree>
+    <p:extLst>
+      <p:ext uri="{BB962C8B-B14F-4D97-AF65-F5344CB8AC3E}">
+        <p14:creationId xmlns:p14="http://schemas.microsoft.com/office/powerpoint/2010/main" val="2296139293"/>
+      </p:ext>
+    </p:extLst>
+  </p:cSld>
+  <p:clrMapOvr>
+    <a:masterClrMapping/>
+  </p:clrMapOvr>
+</p:sld>
+</file>
+
+<file path=ppt/slides/slide50.xml><?xml version="1.0" encoding="utf-8"?>
 <p:sld xmlns:a="http://schemas.openxmlformats.org/drawingml/2006/main" xmlns:r="http://schemas.openxmlformats.org/officeDocument/2006/relationships" xmlns:p="http://schemas.openxmlformats.org/presentationml/2006/main">
   <p:cSld>
     <p:spTree>
@@ -40591,7 +40209,7 @@
           <a:p>
             <a:fld id="{109C872D-39A9-4065-8BF3-6A613116E2A1}" type="slidenum">
               <a:rPr lang="ko-KR" altLang="en-US" smtClean="0"/>
-              <a:t>52</a:t>
+              <a:t>50</a:t>
             </a:fld>
             <a:endParaRPr lang="ko-KR" altLang="en-US"/>
           </a:p>
@@ -41059,7 +40677,7 @@
 </p:sld>
 </file>
 
-<file path=ppt/slides/slide53.xml><?xml version="1.0" encoding="utf-8"?>
+<file path=ppt/slides/slide51.xml><?xml version="1.0" encoding="utf-8"?>
 <p:sld xmlns:a="http://schemas.openxmlformats.org/drawingml/2006/main" xmlns:r="http://schemas.openxmlformats.org/officeDocument/2006/relationships" xmlns:p="http://schemas.openxmlformats.org/presentationml/2006/main">
   <p:cSld>
     <p:spTree>
@@ -41133,7 +40751,7 @@
           <a:p>
             <a:fld id="{109C872D-39A9-4065-8BF3-6A613116E2A1}" type="slidenum">
               <a:rPr lang="ko-KR" altLang="en-US" smtClean="0"/>
-              <a:t>53</a:t>
+              <a:t>51</a:t>
             </a:fld>
             <a:endParaRPr lang="ko-KR" altLang="en-US"/>
           </a:p>
@@ -41842,7 +41460,7 @@
 </p:sld>
 </file>
 
-<file path=ppt/slides/slide54.xml><?xml version="1.0" encoding="utf-8"?>
+<file path=ppt/slides/slide52.xml><?xml version="1.0" encoding="utf-8"?>
 <p:sld xmlns:a="http://schemas.openxmlformats.org/drawingml/2006/main" xmlns:r="http://schemas.openxmlformats.org/officeDocument/2006/relationships" xmlns:p="http://schemas.openxmlformats.org/presentationml/2006/main">
   <p:cSld>
     <p:spTree>
@@ -41916,7 +41534,7 @@
           <a:p>
             <a:fld id="{109C872D-39A9-4065-8BF3-6A613116E2A1}" type="slidenum">
               <a:rPr lang="ko-KR" altLang="en-US" smtClean="0"/>
-              <a:t>54</a:t>
+              <a:t>52</a:t>
             </a:fld>
             <a:endParaRPr lang="ko-KR" altLang="en-US"/>
           </a:p>
@@ -42650,7 +42268,7 @@
 </p:sld>
 </file>
 
-<file path=ppt/slides/slide55.xml><?xml version="1.0" encoding="utf-8"?>
+<file path=ppt/slides/slide53.xml><?xml version="1.0" encoding="utf-8"?>
 <p:sld xmlns:a="http://schemas.openxmlformats.org/drawingml/2006/main" xmlns:r="http://schemas.openxmlformats.org/officeDocument/2006/relationships" xmlns:p="http://schemas.openxmlformats.org/presentationml/2006/main">
   <p:cSld>
     <p:spTree>
@@ -42724,7 +42342,7 @@
           <a:p>
             <a:fld id="{109C872D-39A9-4065-8BF3-6A613116E2A1}" type="slidenum">
               <a:rPr lang="ko-KR" altLang="en-US" smtClean="0"/>
-              <a:t>55</a:t>
+              <a:t>53</a:t>
             </a:fld>
             <a:endParaRPr lang="ko-KR" altLang="en-US"/>
           </a:p>
@@ -42745,7 +42363,7 @@
         <p:spPr>
           <a:xfrm>
             <a:off x="288790" y="958844"/>
-            <a:ext cx="11118453" cy="3368679"/>
+            <a:ext cx="11118453" cy="3738011"/>
           </a:xfrm>
           <a:prstGeom prst="rect">
             <a:avLst/>
@@ -42795,8 +42413,12 @@
               <a:t>천연가스 가격은 </a:t>
             </a:r>
             <a:r>
-              <a:rPr lang="ko-KR" altLang="en-US" sz="1600" dirty="0" err="1"/>
+              <a:rPr lang="ko-KR" altLang="en-US" sz="1600" b="1" dirty="0" err="1"/>
               <a:t>헨리허브</a:t>
+            </a:r>
+            <a:r>
+              <a:rPr lang="en-US" altLang="ko-KR" sz="1600" b="1" dirty="0"/>
+              <a:t>(Henry Hub)</a:t>
             </a:r>
             <a:r>
               <a:rPr lang="ko-KR" altLang="en-US" sz="1600" dirty="0"/>
@@ -42853,7 +42475,7 @@
               <a:t>와 네덜란드의 </a:t>
             </a:r>
             <a:r>
-              <a:rPr lang="en-US" altLang="ko-KR" sz="1600" dirty="0"/>
+              <a:rPr lang="en-US" altLang="ko-KR" sz="1600" b="1" dirty="0"/>
               <a:t>TTF(Title Transfer Facility)</a:t>
             </a:r>
             <a:r>
@@ -42889,6 +42511,31 @@
               </a:lnSpc>
               <a:buFont typeface="Wingdings" panose="05000000000000000000" pitchFamily="2" charset="2"/>
               <a:buChar char="ü"/>
+            </a:pPr>
+            <a:r>
+              <a:rPr lang="ko-KR" altLang="en-US" sz="1600" dirty="0"/>
+              <a:t>동북아시아의 가스 현물시장 가격은 </a:t>
+            </a:r>
+            <a:r>
+              <a:rPr lang="en-US" altLang="ko-KR" sz="1600" b="1" dirty="0"/>
+              <a:t>JKM (Japan Korea Market)</a:t>
+            </a:r>
+            <a:r>
+              <a:rPr lang="ko-KR" altLang="en-US" sz="1600" dirty="0"/>
+              <a:t>이라 한다</a:t>
+            </a:r>
+            <a:r>
+              <a:rPr lang="en-US" altLang="ko-KR" sz="1600" dirty="0"/>
+              <a:t>.</a:t>
+            </a:r>
+          </a:p>
+          <a:p>
+            <a:pPr marL="1292225" lvl="2" indent="-285750">
+              <a:lnSpc>
+                <a:spcPct val="150000"/>
+              </a:lnSpc>
+              <a:buFont typeface="Wingdings" panose="05000000000000000000" pitchFamily="2" charset="2"/>
+              <a:buChar char="Ø"/>
             </a:pPr>
             <a:r>
               <a:rPr lang="ko-KR" altLang="en-US" sz="1600" dirty="0"/>
@@ -42949,7 +42596,7 @@
 </p:sld>
 </file>
 
-<file path=ppt/slides/slide56.xml><?xml version="1.0" encoding="utf-8"?>
+<file path=ppt/slides/slide54.xml><?xml version="1.0" encoding="utf-8"?>
 <p:sld xmlns:a="http://schemas.openxmlformats.org/drawingml/2006/main" xmlns:r="http://schemas.openxmlformats.org/officeDocument/2006/relationships" xmlns:p="http://schemas.openxmlformats.org/presentationml/2006/main">
   <p:cSld>
     <p:spTree>
@@ -43023,7 +42670,7 @@
           <a:p>
             <a:fld id="{109C872D-39A9-4065-8BF3-6A613116E2A1}" type="slidenum">
               <a:rPr lang="ko-KR" altLang="en-US" smtClean="0"/>
-              <a:t>56</a:t>
+              <a:t>54</a:t>
             </a:fld>
             <a:endParaRPr lang="ko-KR" altLang="en-US"/>
           </a:p>
@@ -43276,7 +42923,7 @@
         <p:spPr>
           <a:xfrm>
             <a:off x="288791" y="3382254"/>
-            <a:ext cx="6929226" cy="2630015"/>
+            <a:ext cx="6929226" cy="2260683"/>
           </a:xfrm>
           <a:prstGeom prst="rect">
             <a:avLst/>
@@ -43331,7 +42978,7 @@
             </a:pPr>
             <a:r>
               <a:rPr lang="ko-KR" altLang="en-US" sz="1600" dirty="0"/>
-              <a:t>미국의 천연가스 시장은 유럽에 비해 덜 분산되어 있어 수요와 공급이 비교적 안정적인 경향이 있으나</a:t>
+              <a:t>미국은 풍부한 국내 생산과 발달한 배관망을 바탕으로 가스를 공급하는 반면</a:t>
             </a:r>
             <a:r>
               <a:rPr lang="en-US" altLang="ko-KR" sz="1600" dirty="0"/>
@@ -43339,20 +42986,21 @@
             </a:r>
             <a:r>
               <a:rPr lang="ko-KR" altLang="en-US" sz="1600" dirty="0"/>
-              <a:t>유럽은 여러 국가들이 서로 다른 방식으로 에너지를 수급하고 있어</a:t>
-            </a:r>
-            <a:r>
-              <a:rPr lang="en-US" altLang="ko-KR" sz="1600" dirty="0"/>
-              <a:t>, </a:t>
-            </a:r>
-            <a:r>
-              <a:rPr lang="ko-KR" altLang="en-US" sz="1600" dirty="0"/>
-              <a:t>불안정성이 더 크게 나타났다</a:t>
-            </a:r>
-            <a:r>
-              <a:rPr lang="en-US" altLang="ko-KR" sz="1600" dirty="0"/>
+              <a:t>유럽은 높은 수입 의존도와 공급</a:t>
+            </a:r>
+            <a:r>
+              <a:rPr lang="en-US" altLang="ko-KR" sz="1600" dirty="0"/>
+              <a:t>·</a:t>
+            </a:r>
+            <a:r>
+              <a:rPr lang="ko-KR" altLang="en-US" sz="1600" dirty="0"/>
+              <a:t>운송 제약으로 인해 해외 공급 차질에 따른 가격 충격에 더 취약하다</a:t>
+            </a:r>
+            <a:r>
+              <a:rPr lang="en-US" altLang="ko-KR" sz="1600"/>
               <a:t>.</a:t>
             </a:r>
+            <a:endParaRPr lang="en-US" altLang="ko-KR" sz="1600" dirty="0"/>
           </a:p>
         </p:txBody>
       </p:sp>
@@ -43369,7 +43017,7 @@
 </p:sld>
 </file>
 
-<file path=ppt/slides/slide57.xml><?xml version="1.0" encoding="utf-8"?>
+<file path=ppt/slides/slide55.xml><?xml version="1.0" encoding="utf-8"?>
 <p:sld xmlns:a="http://schemas.openxmlformats.org/drawingml/2006/main" xmlns:r="http://schemas.openxmlformats.org/officeDocument/2006/relationships" xmlns:p="http://schemas.openxmlformats.org/presentationml/2006/main">
   <p:cSld>
     <p:spTree>
@@ -43443,7 +43091,7 @@
           <a:p>
             <a:fld id="{109C872D-39A9-4065-8BF3-6A613116E2A1}" type="slidenum">
               <a:rPr lang="ko-KR" altLang="en-US" smtClean="0"/>
-              <a:t>57</a:t>
+              <a:t>55</a:t>
             </a:fld>
             <a:endParaRPr lang="ko-KR" altLang="en-US"/>
           </a:p>
@@ -43772,7 +43420,7 @@
 </p:sld>
 </file>
 
-<file path=ppt/slides/slide58.xml><?xml version="1.0" encoding="utf-8"?>
+<file path=ppt/slides/slide56.xml><?xml version="1.0" encoding="utf-8"?>
 <p:sld xmlns:a="http://schemas.openxmlformats.org/drawingml/2006/main" xmlns:r="http://schemas.openxmlformats.org/officeDocument/2006/relationships" xmlns:p="http://schemas.openxmlformats.org/presentationml/2006/main">
   <p:cSld>
     <p:spTree>
@@ -43846,7 +43494,7 @@
           <a:p>
             <a:fld id="{109C872D-39A9-4065-8BF3-6A613116E2A1}" type="slidenum">
               <a:rPr lang="ko-KR" altLang="en-US" smtClean="0"/>
-              <a:t>58</a:t>
+              <a:t>56</a:t>
             </a:fld>
             <a:endParaRPr lang="ko-KR" altLang="en-US"/>
           </a:p>
@@ -44121,7 +43769,7 @@
 </p:sld>
 </file>
 
-<file path=ppt/slides/slide59.xml><?xml version="1.0" encoding="utf-8"?>
+<file path=ppt/slides/slide57.xml><?xml version="1.0" encoding="utf-8"?>
 <p:sld xmlns:a="http://schemas.openxmlformats.org/drawingml/2006/main" xmlns:r="http://schemas.openxmlformats.org/officeDocument/2006/relationships" xmlns:p="http://schemas.openxmlformats.org/presentationml/2006/main">
   <p:cSld>
     <p:spTree>
@@ -44195,7 +43843,7 @@
           <a:p>
             <a:fld id="{109C872D-39A9-4065-8BF3-6A613116E2A1}" type="slidenum">
               <a:rPr lang="ko-KR" altLang="en-US" smtClean="0"/>
-              <a:t>59</a:t>
+              <a:t>57</a:t>
             </a:fld>
             <a:endParaRPr lang="ko-KR" altLang="en-US"/>
           </a:p>
@@ -44489,272 +44137,7 @@
 </p:sld>
 </file>
 
-<file path=ppt/slides/slide6.xml><?xml version="1.0" encoding="utf-8"?>
-<p:sld xmlns:a="http://schemas.openxmlformats.org/drawingml/2006/main" xmlns:r="http://schemas.openxmlformats.org/officeDocument/2006/relationships" xmlns:p="http://schemas.openxmlformats.org/presentationml/2006/main">
-  <p:cSld>
-    <p:spTree>
-      <p:nvGrpSpPr>
-        <p:cNvPr id="1" name="">
-          <a:extLst>
-            <a:ext uri="{FF2B5EF4-FFF2-40B4-BE49-F238E27FC236}">
-              <a16:creationId xmlns:a16="http://schemas.microsoft.com/office/drawing/2014/main" id="{337F2B2B-B0DB-E70D-D7BF-B2362ECCFC19}"/>
-            </a:ext>
-          </a:extLst>
-        </p:cNvPr>
-        <p:cNvGrpSpPr/>
-        <p:nvPr/>
-      </p:nvGrpSpPr>
-      <p:grpSpPr>
-        <a:xfrm>
-          <a:off x="0" y="0"/>
-          <a:ext cx="0" cy="0"/>
-          <a:chOff x="0" y="0"/>
-          <a:chExt cx="0" cy="0"/>
-        </a:xfrm>
-      </p:grpSpPr>
-      <p:sp>
-        <p:nvSpPr>
-          <p:cNvPr id="2" name="제목 1">
-            <a:extLst>
-              <a:ext uri="{FF2B5EF4-FFF2-40B4-BE49-F238E27FC236}">
-                <a16:creationId xmlns:a16="http://schemas.microsoft.com/office/drawing/2014/main" id="{17501D95-006F-48DC-EDE1-699FE507DF60}"/>
-              </a:ext>
-            </a:extLst>
-          </p:cNvPr>
-          <p:cNvSpPr>
-            <a:spLocks noGrp="1"/>
-          </p:cNvSpPr>
-          <p:nvPr>
-            <p:ph type="title"/>
-          </p:nvPr>
-        </p:nvSpPr>
-        <p:spPr/>
-        <p:txBody>
-          <a:bodyPr/>
-          <a:lstStyle/>
-          <a:p>
-            <a:r>
-              <a:rPr lang="ko-KR" altLang="en-US" dirty="0"/>
-              <a:t>서론</a:t>
-            </a:r>
-          </a:p>
-        </p:txBody>
-      </p:sp>
-      <p:sp>
-        <p:nvSpPr>
-          <p:cNvPr id="4" name="슬라이드 번호 개체 틀 3">
-            <a:extLst>
-              <a:ext uri="{FF2B5EF4-FFF2-40B4-BE49-F238E27FC236}">
-                <a16:creationId xmlns:a16="http://schemas.microsoft.com/office/drawing/2014/main" id="{8B78A500-8ECC-79BD-D5CA-30B816254C3E}"/>
-              </a:ext>
-            </a:extLst>
-          </p:cNvPr>
-          <p:cNvSpPr>
-            <a:spLocks noGrp="1"/>
-          </p:cNvSpPr>
-          <p:nvPr>
-            <p:ph type="sldNum" sz="quarter" idx="12"/>
-          </p:nvPr>
-        </p:nvSpPr>
-        <p:spPr/>
-        <p:txBody>
-          <a:bodyPr/>
-          <a:lstStyle/>
-          <a:p>
-            <a:fld id="{109C872D-39A9-4065-8BF3-6A613116E2A1}" type="slidenum">
-              <a:rPr lang="ko-KR" altLang="en-US" smtClean="0"/>
-              <a:t>6</a:t>
-            </a:fld>
-            <a:endParaRPr lang="ko-KR" altLang="en-US"/>
-          </a:p>
-        </p:txBody>
-      </p:sp>
-      <p:sp>
-        <p:nvSpPr>
-          <p:cNvPr id="3" name="TextBox 2">
-            <a:extLst>
-              <a:ext uri="{FF2B5EF4-FFF2-40B4-BE49-F238E27FC236}">
-                <a16:creationId xmlns:a16="http://schemas.microsoft.com/office/drawing/2014/main" id="{3D5D0CFB-4544-09EF-CC37-A77EF95709A1}"/>
-              </a:ext>
-            </a:extLst>
-          </p:cNvPr>
-          <p:cNvSpPr txBox="1"/>
-          <p:nvPr/>
-        </p:nvSpPr>
-        <p:spPr>
-          <a:xfrm>
-            <a:off x="288790" y="958844"/>
-            <a:ext cx="11118453" cy="2630015"/>
-          </a:xfrm>
-          <a:prstGeom prst="rect">
-            <a:avLst/>
-          </a:prstGeom>
-          <a:noFill/>
-        </p:spPr>
-        <p:txBody>
-          <a:bodyPr wrap="square" rtlCol="0" anchor="t">
-            <a:spAutoFit/>
-          </a:bodyPr>
-          <a:lstStyle/>
-          <a:p>
-            <a:pPr marL="377825" indent="-285750">
-              <a:lnSpc>
-                <a:spcPct val="150000"/>
-              </a:lnSpc>
-              <a:buFont typeface="Arial" panose="020B0604020202020204" pitchFamily="34" charset="0"/>
-              <a:buChar char="•"/>
-            </a:pPr>
-            <a:r>
-              <a:rPr lang="en-US" altLang="ko-KR" sz="1600" dirty="0"/>
-              <a:t>21</a:t>
-            </a:r>
-            <a:r>
-              <a:rPr lang="ko-KR" altLang="en-US" sz="1600" dirty="0"/>
-              <a:t>세기 들어서면서 천연가스 산업은 새로운 혁신기의 전기를 맞이하였다</a:t>
-            </a:r>
-            <a:r>
-              <a:rPr lang="en-US" altLang="ko-KR" sz="1600" dirty="0"/>
-              <a:t>.</a:t>
-            </a:r>
-          </a:p>
-          <a:p>
-            <a:pPr marL="835025" lvl="1" indent="-285750">
-              <a:lnSpc>
-                <a:spcPct val="150000"/>
-              </a:lnSpc>
-              <a:buFont typeface="Wingdings" panose="05000000000000000000" pitchFamily="2" charset="2"/>
-              <a:buChar char="ü"/>
-            </a:pPr>
-            <a:r>
-              <a:rPr lang="ko-KR" altLang="en-US" sz="1600" dirty="0"/>
-              <a:t>미국의 </a:t>
-            </a:r>
-            <a:r>
-              <a:rPr lang="ko-KR" altLang="en-US" sz="1600" dirty="0" err="1"/>
-              <a:t>셰일가스</a:t>
-            </a:r>
-            <a:r>
-              <a:rPr lang="ko-KR" altLang="en-US" sz="1600" dirty="0"/>
-              <a:t> 혁명</a:t>
-            </a:r>
-            <a:r>
-              <a:rPr lang="en-US" altLang="ko-KR" sz="1600" dirty="0"/>
-              <a:t>(</a:t>
-            </a:r>
-            <a:r>
-              <a:rPr lang="ko-KR" altLang="en-US" sz="1600" dirty="0" err="1"/>
-              <a:t>석유챕터</a:t>
-            </a:r>
-            <a:r>
-              <a:rPr lang="ko-KR" altLang="en-US" sz="1600" dirty="0"/>
-              <a:t> 참고</a:t>
-            </a:r>
-            <a:r>
-              <a:rPr lang="en-US" altLang="ko-KR" sz="1600" dirty="0"/>
-              <a:t>)</a:t>
-            </a:r>
-            <a:r>
-              <a:rPr lang="ko-KR" altLang="en-US" sz="1600" dirty="0"/>
-              <a:t>은 천연가스 공급 구조에 지대한 변화를 초래하였다</a:t>
-            </a:r>
-            <a:r>
-              <a:rPr lang="en-US" altLang="ko-KR" sz="1600" dirty="0"/>
-              <a:t>.</a:t>
-            </a:r>
-          </a:p>
-          <a:p>
-            <a:pPr marL="835025" lvl="1" indent="-285750">
-              <a:lnSpc>
-                <a:spcPct val="150000"/>
-              </a:lnSpc>
-              <a:buFont typeface="Wingdings" panose="05000000000000000000" pitchFamily="2" charset="2"/>
-              <a:buChar char="ü"/>
-            </a:pPr>
-            <a:r>
-              <a:rPr lang="ko-KR" altLang="en-US" sz="1600" dirty="0"/>
-              <a:t>미국은 세계 최대의 천연가스 생산국으로 부상하고</a:t>
-            </a:r>
-            <a:r>
-              <a:rPr lang="en-US" altLang="ko-KR" sz="1600" dirty="0"/>
-              <a:t>, </a:t>
-            </a:r>
-            <a:r>
-              <a:rPr lang="ko-KR" altLang="en-US" sz="1600" dirty="0"/>
-              <a:t>세계 천연가스 시장의 공급 안정성이 향상되었다</a:t>
-            </a:r>
-            <a:r>
-              <a:rPr lang="en-US" altLang="ko-KR" sz="1600" dirty="0"/>
-              <a:t>.</a:t>
-            </a:r>
-          </a:p>
-          <a:p>
-            <a:pPr marL="377825" indent="-285750">
-              <a:lnSpc>
-                <a:spcPct val="150000"/>
-              </a:lnSpc>
-              <a:buFont typeface="Arial" panose="020B0604020202020204" pitchFamily="34" charset="0"/>
-              <a:buChar char="•"/>
-            </a:pPr>
-            <a:endParaRPr lang="en-US" altLang="ko-KR" sz="1600" dirty="0"/>
-          </a:p>
-          <a:p>
-            <a:pPr marL="377825" indent="-285750">
-              <a:lnSpc>
-                <a:spcPct val="150000"/>
-              </a:lnSpc>
-              <a:buFont typeface="Arial" panose="020B0604020202020204" pitchFamily="34" charset="0"/>
-              <a:buChar char="•"/>
-            </a:pPr>
-            <a:r>
-              <a:rPr lang="ko-KR" altLang="en-US" sz="1600" dirty="0"/>
-              <a:t>한편 기후변화와 지속가능한 발전에 대한 국제적 요구가 확대되면서</a:t>
-            </a:r>
-            <a:r>
-              <a:rPr lang="en-US" altLang="ko-KR" sz="1600" dirty="0"/>
-              <a:t>, </a:t>
-            </a:r>
-            <a:r>
-              <a:rPr lang="ko-KR" altLang="en-US" sz="1600" dirty="0"/>
-              <a:t>천연가스는 석탄과 석유를 대체할 수 있는 과도기적 청정연료로서 주목 받고 있다</a:t>
-            </a:r>
-            <a:r>
-              <a:rPr lang="en-US" altLang="ko-KR" sz="1600" dirty="0"/>
-              <a:t>.</a:t>
-            </a:r>
-          </a:p>
-          <a:p>
-            <a:pPr marL="835025" lvl="1" indent="-285750">
-              <a:lnSpc>
-                <a:spcPct val="150000"/>
-              </a:lnSpc>
-              <a:buFont typeface="Wingdings" panose="05000000000000000000" pitchFamily="2" charset="2"/>
-              <a:buChar char="ü"/>
-            </a:pPr>
-            <a:r>
-              <a:rPr lang="ko-KR" altLang="en-US" sz="1600" dirty="0"/>
-              <a:t>특히 재생에너지와 결합하여 전력 시스템의 안정성과 유연성을 제고할 수 있다는 점에서 역할이 부각된다</a:t>
-            </a:r>
-            <a:r>
-              <a:rPr lang="en-US" altLang="ko-KR" sz="1600" dirty="0"/>
-              <a:t>.</a:t>
-            </a:r>
-          </a:p>
-        </p:txBody>
-      </p:sp>
-    </p:spTree>
-    <p:extLst>
-      <p:ext uri="{BB962C8B-B14F-4D97-AF65-F5344CB8AC3E}">
-        <p14:creationId xmlns:p14="http://schemas.microsoft.com/office/powerpoint/2010/main" val="3724184086"/>
-      </p:ext>
-    </p:extLst>
-  </p:cSld>
-  <p:clrMapOvr>
-    <a:masterClrMapping/>
-  </p:clrMapOvr>
-</p:sld>
-</file>
-
-<file path=ppt/slides/slide60.xml><?xml version="1.0" encoding="utf-8"?>
+<file path=ppt/slides/slide58.xml><?xml version="1.0" encoding="utf-8"?>
 <p:sld xmlns:a="http://schemas.openxmlformats.org/drawingml/2006/main" xmlns:r="http://schemas.openxmlformats.org/officeDocument/2006/relationships" xmlns:p="http://schemas.openxmlformats.org/presentationml/2006/main">
   <p:cSld>
     <p:spTree>
@@ -44828,7 +44211,7 @@
           <a:p>
             <a:fld id="{109C872D-39A9-4065-8BF3-6A613116E2A1}" type="slidenum">
               <a:rPr lang="ko-KR" altLang="en-US" smtClean="0"/>
-              <a:t>60</a:t>
+              <a:t>58</a:t>
             </a:fld>
             <a:endParaRPr lang="ko-KR" altLang="en-US"/>
           </a:p>
@@ -45165,7 +44548,7 @@
 </p:sld>
 </file>
 
-<file path=ppt/slides/slide61.xml><?xml version="1.0" encoding="utf-8"?>
+<file path=ppt/slides/slide59.xml><?xml version="1.0" encoding="utf-8"?>
 <p:sld xmlns:a="http://schemas.openxmlformats.org/drawingml/2006/main" xmlns:r="http://schemas.openxmlformats.org/officeDocument/2006/relationships" xmlns:p="http://schemas.openxmlformats.org/presentationml/2006/main">
   <p:cSld>
     <p:spTree>
@@ -45293,7 +44676,7 @@
           <a:p>
             <a:fld id="{109C872D-39A9-4065-8BF3-6A613116E2A1}" type="slidenum">
               <a:rPr lang="ko-KR" altLang="en-US" smtClean="0"/>
-              <a:t>61</a:t>
+              <a:t>59</a:t>
             </a:fld>
             <a:endParaRPr lang="ko-KR" altLang="en-US"/>
           </a:p>
@@ -45303,6 +44686,271 @@
     <p:extLst>
       <p:ext uri="{BB962C8B-B14F-4D97-AF65-F5344CB8AC3E}">
         <p14:creationId xmlns:p14="http://schemas.microsoft.com/office/powerpoint/2010/main" val="103939182"/>
+      </p:ext>
+    </p:extLst>
+  </p:cSld>
+  <p:clrMapOvr>
+    <a:masterClrMapping/>
+  </p:clrMapOvr>
+</p:sld>
+</file>
+
+<file path=ppt/slides/slide6.xml><?xml version="1.0" encoding="utf-8"?>
+<p:sld xmlns:a="http://schemas.openxmlformats.org/drawingml/2006/main" xmlns:r="http://schemas.openxmlformats.org/officeDocument/2006/relationships" xmlns:p="http://schemas.openxmlformats.org/presentationml/2006/main">
+  <p:cSld>
+    <p:spTree>
+      <p:nvGrpSpPr>
+        <p:cNvPr id="1" name="">
+          <a:extLst>
+            <a:ext uri="{FF2B5EF4-FFF2-40B4-BE49-F238E27FC236}">
+              <a16:creationId xmlns:a16="http://schemas.microsoft.com/office/drawing/2014/main" id="{337F2B2B-B0DB-E70D-D7BF-B2362ECCFC19}"/>
+            </a:ext>
+          </a:extLst>
+        </p:cNvPr>
+        <p:cNvGrpSpPr/>
+        <p:nvPr/>
+      </p:nvGrpSpPr>
+      <p:grpSpPr>
+        <a:xfrm>
+          <a:off x="0" y="0"/>
+          <a:ext cx="0" cy="0"/>
+          <a:chOff x="0" y="0"/>
+          <a:chExt cx="0" cy="0"/>
+        </a:xfrm>
+      </p:grpSpPr>
+      <p:sp>
+        <p:nvSpPr>
+          <p:cNvPr id="2" name="제목 1">
+            <a:extLst>
+              <a:ext uri="{FF2B5EF4-FFF2-40B4-BE49-F238E27FC236}">
+                <a16:creationId xmlns:a16="http://schemas.microsoft.com/office/drawing/2014/main" id="{17501D95-006F-48DC-EDE1-699FE507DF60}"/>
+              </a:ext>
+            </a:extLst>
+          </p:cNvPr>
+          <p:cNvSpPr>
+            <a:spLocks noGrp="1"/>
+          </p:cNvSpPr>
+          <p:nvPr>
+            <p:ph type="title"/>
+          </p:nvPr>
+        </p:nvSpPr>
+        <p:spPr/>
+        <p:txBody>
+          <a:bodyPr/>
+          <a:lstStyle/>
+          <a:p>
+            <a:r>
+              <a:rPr lang="ko-KR" altLang="en-US" dirty="0"/>
+              <a:t>서론</a:t>
+            </a:r>
+          </a:p>
+        </p:txBody>
+      </p:sp>
+      <p:sp>
+        <p:nvSpPr>
+          <p:cNvPr id="4" name="슬라이드 번호 개체 틀 3">
+            <a:extLst>
+              <a:ext uri="{FF2B5EF4-FFF2-40B4-BE49-F238E27FC236}">
+                <a16:creationId xmlns:a16="http://schemas.microsoft.com/office/drawing/2014/main" id="{8B78A500-8ECC-79BD-D5CA-30B816254C3E}"/>
+              </a:ext>
+            </a:extLst>
+          </p:cNvPr>
+          <p:cNvSpPr>
+            <a:spLocks noGrp="1"/>
+          </p:cNvSpPr>
+          <p:nvPr>
+            <p:ph type="sldNum" sz="quarter" idx="12"/>
+          </p:nvPr>
+        </p:nvSpPr>
+        <p:spPr/>
+        <p:txBody>
+          <a:bodyPr/>
+          <a:lstStyle/>
+          <a:p>
+            <a:fld id="{109C872D-39A9-4065-8BF3-6A613116E2A1}" type="slidenum">
+              <a:rPr lang="ko-KR" altLang="en-US" smtClean="0"/>
+              <a:t>6</a:t>
+            </a:fld>
+            <a:endParaRPr lang="ko-KR" altLang="en-US"/>
+          </a:p>
+        </p:txBody>
+      </p:sp>
+      <p:sp>
+        <p:nvSpPr>
+          <p:cNvPr id="3" name="TextBox 2">
+            <a:extLst>
+              <a:ext uri="{FF2B5EF4-FFF2-40B4-BE49-F238E27FC236}">
+                <a16:creationId xmlns:a16="http://schemas.microsoft.com/office/drawing/2014/main" id="{3D5D0CFB-4544-09EF-CC37-A77EF95709A1}"/>
+              </a:ext>
+            </a:extLst>
+          </p:cNvPr>
+          <p:cNvSpPr txBox="1"/>
+          <p:nvPr/>
+        </p:nvSpPr>
+        <p:spPr>
+          <a:xfrm>
+            <a:off x="288790" y="958844"/>
+            <a:ext cx="11118453" cy="2630015"/>
+          </a:xfrm>
+          <a:prstGeom prst="rect">
+            <a:avLst/>
+          </a:prstGeom>
+          <a:noFill/>
+        </p:spPr>
+        <p:txBody>
+          <a:bodyPr wrap="square" rtlCol="0" anchor="t">
+            <a:spAutoFit/>
+          </a:bodyPr>
+          <a:lstStyle/>
+          <a:p>
+            <a:pPr marL="377825" indent="-285750">
+              <a:lnSpc>
+                <a:spcPct val="150000"/>
+              </a:lnSpc>
+              <a:buFont typeface="Arial" panose="020B0604020202020204" pitchFamily="34" charset="0"/>
+              <a:buChar char="•"/>
+            </a:pPr>
+            <a:r>
+              <a:rPr lang="en-US" altLang="ko-KR" sz="1600" dirty="0"/>
+              <a:t>21</a:t>
+            </a:r>
+            <a:r>
+              <a:rPr lang="ko-KR" altLang="en-US" sz="1600" dirty="0"/>
+              <a:t>세기 들어서면서 천연가스 산업은 새로운 혁신기의 전기를 맞이하였다</a:t>
+            </a:r>
+            <a:r>
+              <a:rPr lang="en-US" altLang="ko-KR" sz="1600" dirty="0"/>
+              <a:t>.</a:t>
+            </a:r>
+          </a:p>
+          <a:p>
+            <a:pPr marL="835025" lvl="1" indent="-285750">
+              <a:lnSpc>
+                <a:spcPct val="150000"/>
+              </a:lnSpc>
+              <a:buFont typeface="Wingdings" panose="05000000000000000000" pitchFamily="2" charset="2"/>
+              <a:buChar char="ü"/>
+            </a:pPr>
+            <a:r>
+              <a:rPr lang="ko-KR" altLang="en-US" sz="1600" dirty="0"/>
+              <a:t>미국의 </a:t>
+            </a:r>
+            <a:r>
+              <a:rPr lang="ko-KR" altLang="en-US" sz="1600" dirty="0" err="1"/>
+              <a:t>셰일가스</a:t>
+            </a:r>
+            <a:r>
+              <a:rPr lang="ko-KR" altLang="en-US" sz="1600" dirty="0"/>
+              <a:t> 혁명</a:t>
+            </a:r>
+            <a:r>
+              <a:rPr lang="en-US" altLang="ko-KR" sz="1600" dirty="0"/>
+              <a:t>(</a:t>
+            </a:r>
+            <a:r>
+              <a:rPr lang="ko-KR" altLang="en-US" sz="1600" dirty="0" err="1"/>
+              <a:t>석유챕터</a:t>
+            </a:r>
+            <a:r>
+              <a:rPr lang="ko-KR" altLang="en-US" sz="1600" dirty="0"/>
+              <a:t> 참고</a:t>
+            </a:r>
+            <a:r>
+              <a:rPr lang="en-US" altLang="ko-KR" sz="1600" dirty="0"/>
+              <a:t>)</a:t>
+            </a:r>
+            <a:r>
+              <a:rPr lang="ko-KR" altLang="en-US" sz="1600" dirty="0"/>
+              <a:t>은 천연가스 공급 구조에 지대한 변화를 초래하였다</a:t>
+            </a:r>
+            <a:r>
+              <a:rPr lang="en-US" altLang="ko-KR" sz="1600" dirty="0"/>
+              <a:t>.</a:t>
+            </a:r>
+          </a:p>
+          <a:p>
+            <a:pPr marL="835025" lvl="1" indent="-285750">
+              <a:lnSpc>
+                <a:spcPct val="150000"/>
+              </a:lnSpc>
+              <a:buFont typeface="Wingdings" panose="05000000000000000000" pitchFamily="2" charset="2"/>
+              <a:buChar char="ü"/>
+            </a:pPr>
+            <a:r>
+              <a:rPr lang="ko-KR" altLang="en-US" sz="1600" dirty="0"/>
+              <a:t>미국은 세계 최대의 천연가스 생산국으로 부상하고</a:t>
+            </a:r>
+            <a:r>
+              <a:rPr lang="en-US" altLang="ko-KR" sz="1600" dirty="0"/>
+              <a:t>, </a:t>
+            </a:r>
+            <a:r>
+              <a:rPr lang="ko-KR" altLang="en-US" sz="1600" dirty="0"/>
+              <a:t>세계 천연가스 시장의 공급 안정성이 향상되었다</a:t>
+            </a:r>
+            <a:r>
+              <a:rPr lang="en-US" altLang="ko-KR" sz="1600" dirty="0"/>
+              <a:t>.</a:t>
+            </a:r>
+          </a:p>
+          <a:p>
+            <a:pPr marL="377825" indent="-285750">
+              <a:lnSpc>
+                <a:spcPct val="150000"/>
+              </a:lnSpc>
+              <a:buFont typeface="Arial" panose="020B0604020202020204" pitchFamily="34" charset="0"/>
+              <a:buChar char="•"/>
+            </a:pPr>
+            <a:endParaRPr lang="en-US" altLang="ko-KR" sz="1600" dirty="0"/>
+          </a:p>
+          <a:p>
+            <a:pPr marL="377825" indent="-285750">
+              <a:lnSpc>
+                <a:spcPct val="150000"/>
+              </a:lnSpc>
+              <a:buFont typeface="Arial" panose="020B0604020202020204" pitchFamily="34" charset="0"/>
+              <a:buChar char="•"/>
+            </a:pPr>
+            <a:r>
+              <a:rPr lang="ko-KR" altLang="en-US" sz="1600" dirty="0"/>
+              <a:t>한편 기후변화와 지속가능한 발전에 대한 국제적 요구가 확대되면서</a:t>
+            </a:r>
+            <a:r>
+              <a:rPr lang="en-US" altLang="ko-KR" sz="1600" dirty="0"/>
+              <a:t>, </a:t>
+            </a:r>
+            <a:r>
+              <a:rPr lang="ko-KR" altLang="en-US" sz="1600" dirty="0"/>
+              <a:t>천연가스는 석탄과 석유를 대체할 수 있는 과도기적 청정연료로서 주목 받고 있다</a:t>
+            </a:r>
+            <a:r>
+              <a:rPr lang="en-US" altLang="ko-KR" sz="1600" dirty="0"/>
+              <a:t>.</a:t>
+            </a:r>
+          </a:p>
+          <a:p>
+            <a:pPr marL="835025" lvl="1" indent="-285750">
+              <a:lnSpc>
+                <a:spcPct val="150000"/>
+              </a:lnSpc>
+              <a:buFont typeface="Wingdings" panose="05000000000000000000" pitchFamily="2" charset="2"/>
+              <a:buChar char="ü"/>
+            </a:pPr>
+            <a:r>
+              <a:rPr lang="ko-KR" altLang="en-US" sz="1600" dirty="0"/>
+              <a:t>특히 재생에너지와 결합하여 전력 시스템의 안정성과 유연성을 제고할 수 있다는 점에서 역할이 부각된다</a:t>
+            </a:r>
+            <a:r>
+              <a:rPr lang="en-US" altLang="ko-KR" sz="1600" dirty="0"/>
+              <a:t>.</a:t>
+            </a:r>
+          </a:p>
+        </p:txBody>
+      </p:sp>
+    </p:spTree>
+    <p:extLst>
+      <p:ext uri="{BB962C8B-B14F-4D97-AF65-F5344CB8AC3E}">
+        <p14:creationId xmlns:p14="http://schemas.microsoft.com/office/powerpoint/2010/main" val="3724184086"/>
       </p:ext>
     </p:extLst>
   </p:cSld>

--- a/에너지경제학/자원에너지경제학_Chapter_4 (가스).pptx
+++ b/에너지경제학/자원에너지경제학_Chapter_4 (가스).pptx
@@ -277,7 +277,7 @@
           <a:p>
             <a:fld id="{4A5E00EF-AEA4-43E2-9451-8F9C59A39471}" type="datetimeFigureOut">
               <a:rPr lang="ko-KR" altLang="en-US" smtClean="0"/>
-              <a:t>2026-10-02</a:t>
+              <a:t>2026-10-04</a:t>
             </a:fld>
             <a:endParaRPr lang="ko-KR" altLang="en-US"/>
           </a:p>
@@ -1083,7 +1083,7 @@
           <a:p>
             <a:fld id="{CD32C56F-BD27-4999-9E6D-D4EACE3DA9F4}" type="datetime1">
               <a:rPr lang="ko-KR" altLang="en-US" smtClean="0"/>
-              <a:t>2026-10-02</a:t>
+              <a:t>2026-10-04</a:t>
             </a:fld>
             <a:endParaRPr lang="ko-KR" altLang="en-US"/>
           </a:p>
@@ -1297,7 +1297,7 @@
           <a:p>
             <a:fld id="{8EF4A19C-72C8-45CA-8E3F-68A7FA345D6C}" type="datetime1">
               <a:rPr lang="ko-KR" altLang="en-US" smtClean="0"/>
-              <a:t>2026-10-02</a:t>
+              <a:t>2026-10-04</a:t>
             </a:fld>
             <a:endParaRPr lang="ko-KR" altLang="en-US"/>
           </a:p>
@@ -1521,7 +1521,7 @@
           <a:p>
             <a:fld id="{56A175B2-010B-4341-954C-5F8F5C70B124}" type="datetime1">
               <a:rPr lang="ko-KR" altLang="en-US" smtClean="0"/>
-              <a:t>2026-10-02</a:t>
+              <a:t>2026-10-04</a:t>
             </a:fld>
             <a:endParaRPr lang="ko-KR" altLang="en-US"/>
           </a:p>
@@ -1735,7 +1735,7 @@
           <a:p>
             <a:fld id="{16B83F9E-22C9-45CA-9E85-070F1D3EF530}" type="datetime1">
               <a:rPr lang="ko-KR" altLang="en-US" smtClean="0"/>
-              <a:t>2026-10-02</a:t>
+              <a:t>2026-10-04</a:t>
             </a:fld>
             <a:endParaRPr lang="ko-KR" altLang="en-US"/>
           </a:p>
@@ -2026,7 +2026,7 @@
           <a:p>
             <a:fld id="{03278F45-FB3C-4C4D-B89A-7BC3F5F229F6}" type="datetime1">
               <a:rPr lang="ko-KR" altLang="en-US" smtClean="0"/>
-              <a:t>2026-10-02</a:t>
+              <a:t>2026-10-04</a:t>
             </a:fld>
             <a:endParaRPr lang="ko-KR" altLang="en-US"/>
           </a:p>
@@ -2419,7 +2419,7 @@
           <a:p>
             <a:fld id="{38FDAC3C-35A6-415C-9F03-738A6AC328B1}" type="datetime1">
               <a:rPr lang="ko-KR" altLang="en-US" smtClean="0"/>
-              <a:t>2026-10-02</a:t>
+              <a:t>2026-10-04</a:t>
             </a:fld>
             <a:endParaRPr lang="ko-KR" altLang="en-US"/>
           </a:p>
@@ -4013,7 +4013,7 @@
           <a:p>
             <a:fld id="{507A0DF1-AEE6-4B0D-89D2-351E7B3EF65C}" type="datetime1">
               <a:rPr lang="ko-KR" altLang="en-US" smtClean="0"/>
-              <a:t>2026-10-02</a:t>
+              <a:t>2026-10-04</a:t>
             </a:fld>
             <a:endParaRPr lang="ko-KR" altLang="en-US"/>
           </a:p>
@@ -4441,7 +4441,7 @@
           <a:p>
             <a:fld id="{CA93B8C9-630F-4D57-944D-04FD37CECCD3}" type="datetime1">
               <a:rPr lang="ko-KR" altLang="en-US" smtClean="0"/>
-              <a:t>2026-10-02</a:t>
+              <a:t>2026-10-04</a:t>
             </a:fld>
             <a:endParaRPr lang="ko-KR" altLang="en-US"/>
           </a:p>
@@ -4598,7 +4598,7 @@
           <a:p>
             <a:fld id="{E986165A-AC43-4902-9541-874ECD310BA3}" type="datetime1">
               <a:rPr lang="ko-KR" altLang="en-US" smtClean="0"/>
-              <a:t>2026-10-02</a:t>
+              <a:t>2026-10-04</a:t>
             </a:fld>
             <a:endParaRPr lang="ko-KR" altLang="en-US"/>
           </a:p>
@@ -4925,7 +4925,7 @@
           <a:p>
             <a:fld id="{47E6EE6D-2B0E-43A9-87A2-7354CDB998F4}" type="datetime1">
               <a:rPr lang="ko-KR" altLang="en-US" smtClean="0"/>
-              <a:t>2026-10-02</a:t>
+              <a:t>2026-10-04</a:t>
             </a:fld>
             <a:endParaRPr lang="ko-KR" altLang="en-US"/>
           </a:p>
@@ -5229,7 +5229,7 @@
           <a:p>
             <a:fld id="{5CC5944E-0BC8-4FAA-9F94-6B4B05834E10}" type="datetime1">
               <a:rPr lang="ko-KR" altLang="en-US" smtClean="0"/>
-              <a:t>2026-10-02</a:t>
+              <a:t>2026-10-04</a:t>
             </a:fld>
             <a:endParaRPr lang="ko-KR" altLang="en-US"/>
           </a:p>
@@ -32759,7 +32759,7 @@
         <p:spPr>
           <a:xfrm>
             <a:off x="288790" y="958844"/>
-            <a:ext cx="11118453" cy="5215338"/>
+            <a:ext cx="11118453" cy="5584670"/>
           </a:xfrm>
           <a:prstGeom prst="rect">
             <a:avLst/>
@@ -32860,15 +32860,39 @@
             </a:r>
             <a:r>
               <a:rPr lang="ko-KR" altLang="en-US" sz="1600" dirty="0"/>
-              <a:t>미국은 대부분의 </a:t>
-            </a:r>
-            <a:r>
-              <a:rPr lang="en-US" altLang="ko-KR" sz="1600" dirty="0"/>
-              <a:t>LNG </a:t>
-            </a:r>
-            <a:r>
-              <a:rPr lang="ko-KR" altLang="en-US" sz="1600" dirty="0"/>
-              <a:t>수출을 헨리 허브 가격을 기반으로 하는 유연한 계약구조를 채택하고 있다</a:t>
+              <a:t>미국은 </a:t>
+            </a:r>
+            <a:r>
+              <a:rPr lang="ko-KR" altLang="en-US" sz="1600" dirty="0" err="1"/>
+              <a:t>헨리허브</a:t>
+            </a:r>
+            <a:r>
+              <a:rPr lang="ko-KR" altLang="en-US" sz="1600" dirty="0"/>
+              <a:t> 가격에 연동된 장기계약을 중심으로 하되</a:t>
+            </a:r>
+            <a:r>
+              <a:rPr lang="en-US" altLang="ko-KR" sz="1600" dirty="0"/>
+              <a:t>, </a:t>
+            </a:r>
+            <a:r>
+              <a:rPr lang="ko-KR" altLang="en-US" sz="1600" dirty="0"/>
+              <a:t>보다 유연한</a:t>
+            </a:r>
+            <a:r>
+              <a:rPr lang="en-US" altLang="ko-KR" sz="1600" dirty="0"/>
+              <a:t>(</a:t>
+            </a:r>
+            <a:r>
+              <a:rPr lang="ko-KR" altLang="en-US" sz="1600" dirty="0"/>
+              <a:t>목적지 제한이 적음</a:t>
+            </a:r>
+            <a:r>
+              <a:rPr lang="en-US" altLang="ko-KR" sz="1600" dirty="0"/>
+              <a:t>) </a:t>
+            </a:r>
+            <a:r>
+              <a:rPr lang="ko-KR" altLang="en-US" sz="1600" dirty="0"/>
+              <a:t>계약구조를 발전시켜 왔다</a:t>
             </a:r>
             <a:r>
               <a:rPr lang="en-US" altLang="ko-KR" sz="1600" dirty="0"/>
@@ -32885,15 +32909,39 @@
             </a:pPr>
             <a:r>
               <a:rPr lang="ko-KR" altLang="en-US" sz="1600" dirty="0"/>
-              <a:t>수출</a:t>
-            </a:r>
-            <a:r>
-              <a:rPr lang="en-US" altLang="ko-KR" sz="1600" dirty="0"/>
-              <a:t>, </a:t>
-            </a:r>
-            <a:r>
-              <a:rPr lang="ko-KR" altLang="en-US" sz="1600" dirty="0"/>
-              <a:t>수입국 모두 시장 가격 변화에 민감하게 반응하는 구조를 갖게 되었다</a:t>
+              <a:t>구매자는 시장 상황에 따라 </a:t>
+            </a:r>
+            <a:r>
+              <a:rPr lang="en-US" altLang="ko-KR" sz="1600" dirty="0"/>
+              <a:t>LNG</a:t>
+            </a:r>
+            <a:r>
+              <a:rPr lang="ko-KR" altLang="en-US" sz="1600" dirty="0"/>
+              <a:t>의 목적지를 변경 </a:t>
+            </a:r>
+            <a:r>
+              <a:rPr lang="en-US" altLang="ko-KR" sz="1600" dirty="0"/>
+              <a:t>(or </a:t>
+            </a:r>
+            <a:r>
+              <a:rPr lang="ko-KR" altLang="en-US" sz="1600" dirty="0"/>
+              <a:t>재판매</a:t>
+            </a:r>
+            <a:r>
+              <a:rPr lang="en-US" altLang="ko-KR" sz="1600" dirty="0"/>
+              <a:t>)</a:t>
+            </a:r>
+            <a:r>
+              <a:rPr lang="ko-KR" altLang="en-US" sz="1600" dirty="0"/>
+              <a:t>할 수 있어 국제 </a:t>
+            </a:r>
+            <a:r>
+              <a:rPr lang="en-US" altLang="ko-KR" sz="1600" dirty="0"/>
+              <a:t>LNG</a:t>
+            </a:r>
+            <a:r>
+              <a:rPr lang="ko-KR" altLang="en-US" sz="1600" dirty="0"/>
+              <a:t>시장의 유연성을 높인다</a:t>
             </a:r>
             <a:r>
               <a:rPr lang="en-US" altLang="ko-KR" sz="1600" dirty="0"/>
@@ -32910,7 +32958,15 @@
             </a:pPr>
             <a:r>
               <a:rPr lang="ko-KR" altLang="en-US" sz="1600" dirty="0"/>
-              <a:t>이러한 미국식 계약 모델은 글로벌 </a:t>
+              <a:t>이런</a:t>
+            </a:r>
+            <a:r>
+              <a:rPr lang="en-US" altLang="ko-KR" sz="1600" dirty="0"/>
+              <a:t> </a:t>
+            </a:r>
+            <a:r>
+              <a:rPr lang="ko-KR" altLang="en-US" sz="1600" dirty="0"/>
+              <a:t>미국식 계약모델은 지역별 시장 간 </a:t>
             </a:r>
             <a:r>
               <a:rPr lang="en-US" altLang="ko-KR" sz="1600" dirty="0"/>
@@ -32918,28 +32974,29 @@
             </a:r>
             <a:r>
               <a:rPr lang="ko-KR" altLang="en-US" sz="1600" dirty="0"/>
-              <a:t>현물시장</a:t>
-            </a:r>
-            <a:r>
-              <a:rPr lang="en-US" altLang="ko-KR" sz="1600" dirty="0"/>
-              <a:t>(spot market)</a:t>
-            </a:r>
-            <a:r>
-              <a:rPr lang="ko-KR" altLang="en-US" sz="1600" dirty="0"/>
-              <a:t>의 성장과 가격 신호의 국제적 확산에 기여하고 있으며</a:t>
-            </a:r>
-            <a:r>
-              <a:rPr lang="en-US" altLang="ko-KR" sz="1600" dirty="0"/>
-              <a:t>, </a:t>
-            </a:r>
-            <a:r>
-              <a:rPr lang="ko-KR" altLang="en-US" sz="1600" dirty="0"/>
-              <a:t>시장 유연성과 경쟁성을 동시에 제고하는 데 중요한 역할을 하고 있다</a:t>
-            </a:r>
-            <a:r>
-              <a:rPr lang="en-US" altLang="ko-KR" sz="1600" dirty="0"/>
+              <a:t>이동을 촉진하여 글로벌 </a:t>
+            </a:r>
+            <a:r>
+              <a:rPr lang="en-US" altLang="ko-KR" sz="1600" dirty="0"/>
+              <a:t>LNG </a:t>
+            </a:r>
+            <a:r>
+              <a:rPr lang="ko-KR" altLang="en-US" sz="1600" dirty="0"/>
+              <a:t>현물시장의 성장과 지역 간 가격 연계 </a:t>
+            </a:r>
+            <a:r>
+              <a:rPr lang="ko-KR" altLang="en-US" sz="1600" dirty="0" err="1"/>
+              <a:t>강황에</a:t>
+            </a:r>
+            <a:r>
+              <a:rPr lang="ko-KR" altLang="en-US" sz="1600"/>
+              <a:t> 기여하였다</a:t>
+            </a:r>
+            <a:r>
+              <a:rPr lang="en-US" altLang="ko-KR" sz="1600"/>
               <a:t>.</a:t>
             </a:r>
+            <a:endParaRPr lang="en-US" altLang="ko-KR" sz="1600" dirty="0"/>
           </a:p>
           <a:p>
             <a:pPr marL="377825" indent="-285750">
